--- a/ExaminerB/.appCatalog/ExaminerB notes 1404.pptx
+++ b/ExaminerB/.appCatalog/ExaminerB notes 1404.pptx
@@ -280,7 +280,7 @@
             </a:pPr>
             <a:fld id="{BCC18F51-09EC-435C-A3BA-64A766E099C0}" type="datetimeFigureOut">
               <a:rPr lang="fa-IR"/>
-              <a:t>20/09/1447</a:t>
+              <a:t>27/09/1447</a:t>
             </a:fld>
             <a:endParaRPr/>
           </a:p>
@@ -459,7 +459,7 @@
             </a:pPr>
             <a:fld id="{BCC18F51-09EC-435C-A3BA-64A766E099C0}" type="datetimeFigureOut">
               <a:rPr lang="fa-IR"/>
-              <a:t>20/09/1447</a:t>
+              <a:t>27/09/1447</a:t>
             </a:fld>
             <a:endParaRPr/>
           </a:p>
@@ -648,7 +648,7 @@
             </a:pPr>
             <a:fld id="{BCC18F51-09EC-435C-A3BA-64A766E099C0}" type="datetimeFigureOut">
               <a:rPr lang="fa-IR"/>
-              <a:t>20/09/1447</a:t>
+              <a:t>27/09/1447</a:t>
             </a:fld>
             <a:endParaRPr/>
           </a:p>
@@ -827,7 +827,7 @@
             </a:pPr>
             <a:fld id="{BCC18F51-09EC-435C-A3BA-64A766E099C0}" type="datetimeFigureOut">
               <a:rPr lang="fa-IR"/>
-              <a:t>20/09/1447</a:t>
+              <a:t>27/09/1447</a:t>
             </a:fld>
             <a:endParaRPr/>
           </a:p>
@@ -1079,7 +1079,7 @@
             </a:pPr>
             <a:fld id="{BCC18F51-09EC-435C-A3BA-64A766E099C0}" type="datetimeFigureOut">
               <a:rPr lang="fa-IR"/>
-              <a:t>20/09/1447</a:t>
+              <a:t>27/09/1447</a:t>
             </a:fld>
             <a:endParaRPr/>
           </a:p>
@@ -1324,7 +1324,7 @@
             </a:pPr>
             <a:fld id="{BCC18F51-09EC-435C-A3BA-64A766E099C0}" type="datetimeFigureOut">
               <a:rPr lang="fa-IR"/>
-              <a:t>20/09/1447</a:t>
+              <a:t>27/09/1447</a:t>
             </a:fld>
             <a:endParaRPr/>
           </a:p>
@@ -1706,7 +1706,7 @@
             </a:pPr>
             <a:fld id="{BCC18F51-09EC-435C-A3BA-64A766E099C0}" type="datetimeFigureOut">
               <a:rPr lang="fa-IR"/>
-              <a:t>20/09/1447</a:t>
+              <a:t>27/09/1447</a:t>
             </a:fld>
             <a:endParaRPr/>
           </a:p>
@@ -1829,7 +1829,7 @@
             </a:pPr>
             <a:fld id="{BCC18F51-09EC-435C-A3BA-64A766E099C0}" type="datetimeFigureOut">
               <a:rPr lang="fa-IR"/>
-              <a:t>20/09/1447</a:t>
+              <a:t>27/09/1447</a:t>
             </a:fld>
             <a:endParaRPr/>
           </a:p>
@@ -1928,7 +1928,7 @@
             </a:pPr>
             <a:fld id="{BCC18F51-09EC-435C-A3BA-64A766E099C0}" type="datetimeFigureOut">
               <a:rPr lang="fa-IR"/>
-              <a:t>20/09/1447</a:t>
+              <a:t>27/09/1447</a:t>
             </a:fld>
             <a:endParaRPr/>
           </a:p>
@@ -2215,7 +2215,7 @@
             </a:pPr>
             <a:fld id="{BCC18F51-09EC-435C-A3BA-64A766E099C0}" type="datetimeFigureOut">
               <a:rPr lang="fa-IR"/>
-              <a:t>20/09/1447</a:t>
+              <a:t>27/09/1447</a:t>
             </a:fld>
             <a:endParaRPr/>
           </a:p>
@@ -2479,7 +2479,7 @@
             </a:pPr>
             <a:fld id="{BCC18F51-09EC-435C-A3BA-64A766E099C0}" type="datetimeFigureOut">
               <a:rPr lang="fa-IR"/>
-              <a:t>20/09/1447</a:t>
+              <a:t>27/09/1447</a:t>
             </a:fld>
             <a:endParaRPr/>
           </a:p>
@@ -2701,7 +2701,7 @@
             </a:pPr>
             <a:fld id="{BCC18F51-09EC-435C-A3BA-64A766E099C0}" type="datetimeFigureOut">
               <a:rPr lang="fa-IR"/>
-              <a:t>20/09/1447</a:t>
+              <a:t>27/09/1447</a:t>
             </a:fld>
             <a:endParaRPr/>
           </a:p>
@@ -7895,8 +7895,8 @@
         </p:nvSpPr>
         <p:spPr bwMode="auto">
           <a:xfrm>
-            <a:off x="771596" y="1684762"/>
-            <a:ext cx="1990011" cy="259346"/>
+            <a:off x="779315" y="1829793"/>
+            <a:ext cx="2013126" cy="259346"/>
           </a:xfrm>
           <a:prstGeom prst="borderCallout2">
             <a:avLst>
@@ -8339,11 +8339,11 @@
         <p:spPr bwMode="auto">
           <a:xfrm>
             <a:off x="48639" y="157639"/>
-            <a:ext cx="1445914" cy="1196534"/>
+            <a:ext cx="1445914" cy="1642462"/>
           </a:xfrm>
           <a:prstGeom prst="roundRect">
             <a:avLst>
-              <a:gd name="adj" fmla="val 9941"/>
+              <a:gd name="adj" fmla="val 6742"/>
             </a:avLst>
           </a:prstGeom>
           <a:solidFill>
@@ -8486,6 +8486,66 @@
                 <a:cs typeface="Segoe UI" panose="020B0502040204020203" pitchFamily="34" charset="0"/>
               </a:rPr>
               <a:t>PostText</a:t>
+            </a:r>
+          </a:p>
+          <a:p>
+            <a:pPr rtl="0">
+              <a:defRPr/>
+            </a:pPr>
+            <a:r>
+              <a:rPr lang="en-US" sz="853">
+                <a:solidFill>
+                  <a:schemeClr val="tx1"/>
+                </a:solidFill>
+                <a:latin typeface="Segoe UI" panose="020B0502040204020203" pitchFamily="34" charset="0"/>
+                <a:cs typeface="Segoe UI" panose="020B0502040204020203" pitchFamily="34" charset="0"/>
+              </a:rPr>
+              <a:t>PostTags</a:t>
+            </a:r>
+          </a:p>
+          <a:p>
+            <a:pPr rtl="0">
+              <a:defRPr/>
+            </a:pPr>
+            <a:r>
+              <a:rPr lang="en-US" sz="800">
+                <a:solidFill>
+                  <a:schemeClr val="tx1"/>
+                </a:solidFill>
+                <a:latin typeface="Segoe UI" panose="020B0502040204020203" pitchFamily="34" charset="0"/>
+                <a:cs typeface="Segoe UI" panose="020B0502040204020203" pitchFamily="34" charset="0"/>
+              </a:rPr>
+              <a:t>  1:NeedReply</a:t>
+            </a:r>
+          </a:p>
+          <a:p>
+            <a:pPr rtl="0">
+              <a:defRPr/>
+            </a:pPr>
+            <a:r>
+              <a:rPr lang="en-US" sz="800">
+                <a:solidFill>
+                  <a:schemeClr val="tx1"/>
+                </a:solidFill>
+                <a:latin typeface="Segoe UI" panose="020B0502040204020203" pitchFamily="34" charset="0"/>
+                <a:cs typeface="Segoe UI" panose="020B0502040204020203" pitchFamily="34" charset="0"/>
+              </a:rPr>
+              <a:t>  2:IsEdited</a:t>
+            </a:r>
+          </a:p>
+          <a:p>
+            <a:pPr rtl="0">
+              <a:defRPr/>
+            </a:pPr>
+            <a:r>
+              <a:rPr lang="en-US" sz="800">
+                <a:solidFill>
+                  <a:schemeClr val="tx1"/>
+                </a:solidFill>
+                <a:latin typeface="Segoe UI" panose="020B0502040204020203" pitchFamily="34" charset="0"/>
+                <a:cs typeface="Segoe UI" panose="020B0502040204020203" pitchFamily="34" charset="0"/>
+              </a:rPr>
+              <a:t>  4:IsDeleted</a:t>
             </a:r>
           </a:p>
         </p:txBody>

--- a/ExaminerB/.appCatalog/ExaminerB notes 1404.pptx
+++ b/ExaminerB/.appCatalog/ExaminerB notes 1404.pptx
@@ -280,7 +280,7 @@
             </a:pPr>
             <a:fld id="{BCC18F51-09EC-435C-A3BA-64A766E099C0}" type="datetimeFigureOut">
               <a:rPr lang="fa-IR"/>
-              <a:t>27/09/1447</a:t>
+              <a:t>26/10/1447</a:t>
             </a:fld>
             <a:endParaRPr/>
           </a:p>
@@ -459,7 +459,7 @@
             </a:pPr>
             <a:fld id="{BCC18F51-09EC-435C-A3BA-64A766E099C0}" type="datetimeFigureOut">
               <a:rPr lang="fa-IR"/>
-              <a:t>27/09/1447</a:t>
+              <a:t>26/10/1447</a:t>
             </a:fld>
             <a:endParaRPr/>
           </a:p>
@@ -648,7 +648,7 @@
             </a:pPr>
             <a:fld id="{BCC18F51-09EC-435C-A3BA-64A766E099C0}" type="datetimeFigureOut">
               <a:rPr lang="fa-IR"/>
-              <a:t>27/09/1447</a:t>
+              <a:t>26/10/1447</a:t>
             </a:fld>
             <a:endParaRPr/>
           </a:p>
@@ -827,7 +827,7 @@
             </a:pPr>
             <a:fld id="{BCC18F51-09EC-435C-A3BA-64A766E099C0}" type="datetimeFigureOut">
               <a:rPr lang="fa-IR"/>
-              <a:t>27/09/1447</a:t>
+              <a:t>26/10/1447</a:t>
             </a:fld>
             <a:endParaRPr/>
           </a:p>
@@ -1079,7 +1079,7 @@
             </a:pPr>
             <a:fld id="{BCC18F51-09EC-435C-A3BA-64A766E099C0}" type="datetimeFigureOut">
               <a:rPr lang="fa-IR"/>
-              <a:t>27/09/1447</a:t>
+              <a:t>26/10/1447</a:t>
             </a:fld>
             <a:endParaRPr/>
           </a:p>
@@ -1324,7 +1324,7 @@
             </a:pPr>
             <a:fld id="{BCC18F51-09EC-435C-A3BA-64A766E099C0}" type="datetimeFigureOut">
               <a:rPr lang="fa-IR"/>
-              <a:t>27/09/1447</a:t>
+              <a:t>26/10/1447</a:t>
             </a:fld>
             <a:endParaRPr/>
           </a:p>
@@ -1706,7 +1706,7 @@
             </a:pPr>
             <a:fld id="{BCC18F51-09EC-435C-A3BA-64A766E099C0}" type="datetimeFigureOut">
               <a:rPr lang="fa-IR"/>
-              <a:t>27/09/1447</a:t>
+              <a:t>26/10/1447</a:t>
             </a:fld>
             <a:endParaRPr/>
           </a:p>
@@ -1829,7 +1829,7 @@
             </a:pPr>
             <a:fld id="{BCC18F51-09EC-435C-A3BA-64A766E099C0}" type="datetimeFigureOut">
               <a:rPr lang="fa-IR"/>
-              <a:t>27/09/1447</a:t>
+              <a:t>26/10/1447</a:t>
             </a:fld>
             <a:endParaRPr/>
           </a:p>
@@ -1928,7 +1928,7 @@
             </a:pPr>
             <a:fld id="{BCC18F51-09EC-435C-A3BA-64A766E099C0}" type="datetimeFigureOut">
               <a:rPr lang="fa-IR"/>
-              <a:t>27/09/1447</a:t>
+              <a:t>26/10/1447</a:t>
             </a:fld>
             <a:endParaRPr/>
           </a:p>
@@ -2215,7 +2215,7 @@
             </a:pPr>
             <a:fld id="{BCC18F51-09EC-435C-A3BA-64A766E099C0}" type="datetimeFigureOut">
               <a:rPr lang="fa-IR"/>
-              <a:t>27/09/1447</a:t>
+              <a:t>26/10/1447</a:t>
             </a:fld>
             <a:endParaRPr/>
           </a:p>
@@ -2479,7 +2479,7 @@
             </a:pPr>
             <a:fld id="{BCC18F51-09EC-435C-A3BA-64A766E099C0}" type="datetimeFigureOut">
               <a:rPr lang="fa-IR"/>
-              <a:t>27/09/1447</a:t>
+              <a:t>26/10/1447</a:t>
             </a:fld>
             <a:endParaRPr/>
           </a:p>
@@ -2701,7 +2701,7 @@
             </a:pPr>
             <a:fld id="{BCC18F51-09EC-435C-A3BA-64A766E099C0}" type="datetimeFigureOut">
               <a:rPr lang="fa-IR"/>
-              <a:t>27/09/1447</a:t>
+              <a:t>26/10/1447</a:t>
             </a:fld>
             <a:endParaRPr/>
           </a:p>
@@ -7131,8 +7131,8 @@
         </p:nvSpPr>
         <p:spPr>
           <a:xfrm>
-            <a:off x="1585325" y="6149939"/>
-            <a:ext cx="1316313" cy="1166425"/>
+            <a:off x="1585325" y="6149940"/>
+            <a:ext cx="1316313" cy="1122060"/>
           </a:xfrm>
           <a:prstGeom prst="roundRect">
             <a:avLst>
@@ -7628,7 +7628,7 @@
         </p:nvSpPr>
         <p:spPr bwMode="auto">
           <a:xfrm>
-            <a:off x="230644" y="7616978"/>
+            <a:off x="595546" y="7759508"/>
             <a:ext cx="2306092" cy="326683"/>
           </a:xfrm>
           <a:prstGeom prst="borderCallout2">
@@ -7980,7 +7980,7 @@
         </p:nvSpPr>
         <p:spPr bwMode="auto">
           <a:xfrm>
-            <a:off x="2735908" y="7900267"/>
+            <a:off x="3164545" y="7770744"/>
             <a:ext cx="2891549" cy="355614"/>
           </a:xfrm>
           <a:prstGeom prst="borderCallout2">
@@ -8087,7 +8087,7 @@
         </p:nvSpPr>
         <p:spPr bwMode="auto">
           <a:xfrm>
-            <a:off x="229840" y="7190422"/>
+            <a:off x="171698" y="7182323"/>
             <a:ext cx="1152128" cy="355613"/>
           </a:xfrm>
           <a:prstGeom prst="borderCallout2">

--- a/ExaminerB/.appCatalog/ExaminerB notes 1404.pptx
+++ b/ExaminerB/.appCatalog/ExaminerB notes 1404.pptx
@@ -280,7 +280,7 @@
             </a:pPr>
             <a:fld id="{BCC18F51-09EC-435C-A3BA-64A766E099C0}" type="datetimeFigureOut">
               <a:rPr lang="fa-IR"/>
-              <a:t>26/10/1447</a:t>
+              <a:t>02/11/1447</a:t>
             </a:fld>
             <a:endParaRPr/>
           </a:p>
@@ -459,7 +459,7 @@
             </a:pPr>
             <a:fld id="{BCC18F51-09EC-435C-A3BA-64A766E099C0}" type="datetimeFigureOut">
               <a:rPr lang="fa-IR"/>
-              <a:t>26/10/1447</a:t>
+              <a:t>02/11/1447</a:t>
             </a:fld>
             <a:endParaRPr/>
           </a:p>
@@ -648,7 +648,7 @@
             </a:pPr>
             <a:fld id="{BCC18F51-09EC-435C-A3BA-64A766E099C0}" type="datetimeFigureOut">
               <a:rPr lang="fa-IR"/>
-              <a:t>26/10/1447</a:t>
+              <a:t>02/11/1447</a:t>
             </a:fld>
             <a:endParaRPr/>
           </a:p>
@@ -827,7 +827,7 @@
             </a:pPr>
             <a:fld id="{BCC18F51-09EC-435C-A3BA-64A766E099C0}" type="datetimeFigureOut">
               <a:rPr lang="fa-IR"/>
-              <a:t>26/10/1447</a:t>
+              <a:t>02/11/1447</a:t>
             </a:fld>
             <a:endParaRPr/>
           </a:p>
@@ -1079,7 +1079,7 @@
             </a:pPr>
             <a:fld id="{BCC18F51-09EC-435C-A3BA-64A766E099C0}" type="datetimeFigureOut">
               <a:rPr lang="fa-IR"/>
-              <a:t>26/10/1447</a:t>
+              <a:t>02/11/1447</a:t>
             </a:fld>
             <a:endParaRPr/>
           </a:p>
@@ -1324,7 +1324,7 @@
             </a:pPr>
             <a:fld id="{BCC18F51-09EC-435C-A3BA-64A766E099C0}" type="datetimeFigureOut">
               <a:rPr lang="fa-IR"/>
-              <a:t>26/10/1447</a:t>
+              <a:t>02/11/1447</a:t>
             </a:fld>
             <a:endParaRPr/>
           </a:p>
@@ -1706,7 +1706,7 @@
             </a:pPr>
             <a:fld id="{BCC18F51-09EC-435C-A3BA-64A766E099C0}" type="datetimeFigureOut">
               <a:rPr lang="fa-IR"/>
-              <a:t>26/10/1447</a:t>
+              <a:t>02/11/1447</a:t>
             </a:fld>
             <a:endParaRPr/>
           </a:p>
@@ -1829,7 +1829,7 @@
             </a:pPr>
             <a:fld id="{BCC18F51-09EC-435C-A3BA-64A766E099C0}" type="datetimeFigureOut">
               <a:rPr lang="fa-IR"/>
-              <a:t>26/10/1447</a:t>
+              <a:t>02/11/1447</a:t>
             </a:fld>
             <a:endParaRPr/>
           </a:p>
@@ -1928,7 +1928,7 @@
             </a:pPr>
             <a:fld id="{BCC18F51-09EC-435C-A3BA-64A766E099C0}" type="datetimeFigureOut">
               <a:rPr lang="fa-IR"/>
-              <a:t>26/10/1447</a:t>
+              <a:t>02/11/1447</a:t>
             </a:fld>
             <a:endParaRPr/>
           </a:p>
@@ -2215,7 +2215,7 @@
             </a:pPr>
             <a:fld id="{BCC18F51-09EC-435C-A3BA-64A766E099C0}" type="datetimeFigureOut">
               <a:rPr lang="fa-IR"/>
-              <a:t>26/10/1447</a:t>
+              <a:t>02/11/1447</a:t>
             </a:fld>
             <a:endParaRPr/>
           </a:p>
@@ -2479,7 +2479,7 @@
             </a:pPr>
             <a:fld id="{BCC18F51-09EC-435C-A3BA-64A766E099C0}" type="datetimeFigureOut">
               <a:rPr lang="fa-IR"/>
-              <a:t>26/10/1447</a:t>
+              <a:t>02/11/1447</a:t>
             </a:fld>
             <a:endParaRPr/>
           </a:p>
@@ -2701,7 +2701,7 @@
             </a:pPr>
             <a:fld id="{BCC18F51-09EC-435C-A3BA-64A766E099C0}" type="datetimeFigureOut">
               <a:rPr lang="fa-IR"/>
-              <a:t>26/10/1447</a:t>
+              <a:t>02/11/1447</a:t>
             </a:fld>
             <a:endParaRPr/>
           </a:p>
@@ -6043,7 +6043,7 @@
                 <a:latin typeface="Segoe UI" panose="020B0502040204020203" pitchFamily="34" charset="0"/>
                 <a:cs typeface="Segoe UI" panose="020B0502040204020203" pitchFamily="34" charset="0"/>
               </a:rPr>
-              <a:t>1:act 2:st, 4:fin, 8:rev</a:t>
+              <a:t>1:act 2:strt, 4:fin, 8:rev</a:t>
             </a:r>
           </a:p>
           <a:p>

--- a/ExaminerB/.appCatalog/ExaminerB notes 1404.pptx
+++ b/ExaminerB/.appCatalog/ExaminerB notes 1404.pptx
@@ -280,7 +280,7 @@
             </a:pPr>
             <a:fld id="{BCC18F51-09EC-435C-A3BA-64A766E099C0}" type="datetimeFigureOut">
               <a:rPr lang="fa-IR"/>
-              <a:t>02/11/1447</a:t>
+              <a:t>06/11/1447</a:t>
             </a:fld>
             <a:endParaRPr/>
           </a:p>
@@ -459,7 +459,7 @@
             </a:pPr>
             <a:fld id="{BCC18F51-09EC-435C-A3BA-64A766E099C0}" type="datetimeFigureOut">
               <a:rPr lang="fa-IR"/>
-              <a:t>02/11/1447</a:t>
+              <a:t>06/11/1447</a:t>
             </a:fld>
             <a:endParaRPr/>
           </a:p>
@@ -648,7 +648,7 @@
             </a:pPr>
             <a:fld id="{BCC18F51-09EC-435C-A3BA-64A766E099C0}" type="datetimeFigureOut">
               <a:rPr lang="fa-IR"/>
-              <a:t>02/11/1447</a:t>
+              <a:t>06/11/1447</a:t>
             </a:fld>
             <a:endParaRPr/>
           </a:p>
@@ -827,7 +827,7 @@
             </a:pPr>
             <a:fld id="{BCC18F51-09EC-435C-A3BA-64A766E099C0}" type="datetimeFigureOut">
               <a:rPr lang="fa-IR"/>
-              <a:t>02/11/1447</a:t>
+              <a:t>06/11/1447</a:t>
             </a:fld>
             <a:endParaRPr/>
           </a:p>
@@ -1079,7 +1079,7 @@
             </a:pPr>
             <a:fld id="{BCC18F51-09EC-435C-A3BA-64A766E099C0}" type="datetimeFigureOut">
               <a:rPr lang="fa-IR"/>
-              <a:t>02/11/1447</a:t>
+              <a:t>06/11/1447</a:t>
             </a:fld>
             <a:endParaRPr/>
           </a:p>
@@ -1324,7 +1324,7 @@
             </a:pPr>
             <a:fld id="{BCC18F51-09EC-435C-A3BA-64A766E099C0}" type="datetimeFigureOut">
               <a:rPr lang="fa-IR"/>
-              <a:t>02/11/1447</a:t>
+              <a:t>06/11/1447</a:t>
             </a:fld>
             <a:endParaRPr/>
           </a:p>
@@ -1706,7 +1706,7 @@
             </a:pPr>
             <a:fld id="{BCC18F51-09EC-435C-A3BA-64A766E099C0}" type="datetimeFigureOut">
               <a:rPr lang="fa-IR"/>
-              <a:t>02/11/1447</a:t>
+              <a:t>06/11/1447</a:t>
             </a:fld>
             <a:endParaRPr/>
           </a:p>
@@ -1829,7 +1829,7 @@
             </a:pPr>
             <a:fld id="{BCC18F51-09EC-435C-A3BA-64A766E099C0}" type="datetimeFigureOut">
               <a:rPr lang="fa-IR"/>
-              <a:t>02/11/1447</a:t>
+              <a:t>06/11/1447</a:t>
             </a:fld>
             <a:endParaRPr/>
           </a:p>
@@ -1928,7 +1928,7 @@
             </a:pPr>
             <a:fld id="{BCC18F51-09EC-435C-A3BA-64A766E099C0}" type="datetimeFigureOut">
               <a:rPr lang="fa-IR"/>
-              <a:t>02/11/1447</a:t>
+              <a:t>06/11/1447</a:t>
             </a:fld>
             <a:endParaRPr/>
           </a:p>
@@ -2215,7 +2215,7 @@
             </a:pPr>
             <a:fld id="{BCC18F51-09EC-435C-A3BA-64A766E099C0}" type="datetimeFigureOut">
               <a:rPr lang="fa-IR"/>
-              <a:t>02/11/1447</a:t>
+              <a:t>06/11/1447</a:t>
             </a:fld>
             <a:endParaRPr/>
           </a:p>
@@ -2479,7 +2479,7 @@
             </a:pPr>
             <a:fld id="{BCC18F51-09EC-435C-A3BA-64A766E099C0}" type="datetimeFigureOut">
               <a:rPr lang="fa-IR"/>
-              <a:t>02/11/1447</a:t>
+              <a:t>06/11/1447</a:t>
             </a:fld>
             <a:endParaRPr/>
           </a:p>
@@ -2701,7 +2701,7 @@
             </a:pPr>
             <a:fld id="{BCC18F51-09EC-435C-A3BA-64A766E099C0}" type="datetimeFigureOut">
               <a:rPr lang="fa-IR"/>
-              <a:t>02/11/1447</a:t>
+              <a:t>06/11/1447</a:t>
             </a:fld>
             <a:endParaRPr/>
           </a:p>
@@ -7266,8 +7266,8 @@
         </p:nvSpPr>
         <p:spPr>
           <a:xfrm>
-            <a:off x="632108" y="6269364"/>
-            <a:ext cx="997025" cy="883585"/>
+            <a:off x="632108" y="6149940"/>
+            <a:ext cx="997025" cy="1003009"/>
           </a:xfrm>
           <a:prstGeom prst="roundRect">
             <a:avLst>
@@ -7344,6 +7344,17 @@
                 </a:solidFill>
               </a:rPr>
               <a:t>UserId</a:t>
+            </a:r>
+          </a:p>
+          <a:p>
+            <a:pPr rtl="0"/>
+            <a:r>
+              <a:rPr lang="en-US" sz="853">
+                <a:solidFill>
+                  <a:schemeClr val="tx1"/>
+                </a:solidFill>
+              </a:rPr>
+              <a:t>UserType</a:t>
             </a:r>
             <a:endParaRPr lang="en-US" sz="853" dirty="0"/>
           </a:p>
@@ -7694,7 +7705,18 @@
                 <a:ea typeface="Calibri" panose="020F0502020204030204" pitchFamily="34" charset="0"/>
                 <a:cs typeface="Calibri Light" panose="020F0302020204030204" pitchFamily="34" charset="0"/>
               </a:rPr>
-              <a:t>1:U, 2:SP, 3:S, 4:G, 5:C, 6:E, 7:SN</a:t>
+              <a:t>1:U, 2:SP, 3:S, 4:G, 5:C, 6:E</a:t>
+            </a:r>
+            <a:r>
+              <a:rPr lang="en-US" sz="853" i="1" kern="100">
+                <a:solidFill>
+                  <a:srgbClr val="FF0000"/>
+                </a:solidFill>
+                <a:latin typeface="Consolas" panose="020B0609020204030204" pitchFamily="49" charset="0"/>
+                <a:ea typeface="Calibri" panose="020F0502020204030204" pitchFamily="34" charset="0"/>
+                <a:cs typeface="Calibri Light" panose="020F0302020204030204" pitchFamily="34" charset="0"/>
+              </a:rPr>
+              <a:t>, 7:SN</a:t>
             </a:r>
           </a:p>
         </p:txBody>

--- a/ExaminerB/.appCatalog/ExaminerB notes 1404.pptx
+++ b/ExaminerB/.appCatalog/ExaminerB notes 1404.pptx
@@ -7639,7 +7639,7 @@
         </p:nvSpPr>
         <p:spPr bwMode="auto">
           <a:xfrm>
-            <a:off x="595546" y="7759508"/>
+            <a:off x="737837" y="7800331"/>
             <a:ext cx="2306092" cy="326683"/>
           </a:xfrm>
           <a:prstGeom prst="borderCallout2">
@@ -7705,18 +7705,7 @@
                 <a:ea typeface="Calibri" panose="020F0502020204030204" pitchFamily="34" charset="0"/>
                 <a:cs typeface="Calibri Light" panose="020F0302020204030204" pitchFamily="34" charset="0"/>
               </a:rPr>
-              <a:t>1:U, 2:SP, 3:S, 4:G, 5:C, 6:E</a:t>
-            </a:r>
-            <a:r>
-              <a:rPr lang="en-US" sz="853" i="1" kern="100">
-                <a:solidFill>
-                  <a:srgbClr val="FF0000"/>
-                </a:solidFill>
-                <a:latin typeface="Consolas" panose="020B0609020204030204" pitchFamily="49" charset="0"/>
-                <a:ea typeface="Calibri" panose="020F0502020204030204" pitchFamily="34" charset="0"/>
-                <a:cs typeface="Calibri Light" panose="020F0302020204030204" pitchFamily="34" charset="0"/>
-              </a:rPr>
-              <a:t>, 7:SN</a:t>
+              <a:t>1:U, 2:SP, 3:S, 4:G, 5:C, 6:E, 7:SN</a:t>
             </a:r>
           </a:p>
         </p:txBody>
@@ -8002,7 +7991,7 @@
         </p:nvSpPr>
         <p:spPr bwMode="auto">
           <a:xfrm>
-            <a:off x="3164545" y="7770744"/>
+            <a:off x="3172878" y="7800331"/>
             <a:ext cx="2891549" cy="355614"/>
           </a:xfrm>
           <a:prstGeom prst="borderCallout2">
@@ -8109,8 +8098,8 @@
         </p:nvSpPr>
         <p:spPr bwMode="auto">
           <a:xfrm>
-            <a:off x="171698" y="7182323"/>
-            <a:ext cx="1152128" cy="355613"/>
+            <a:off x="171697" y="7182323"/>
+            <a:ext cx="1372612" cy="563993"/>
           </a:xfrm>
           <a:prstGeom prst="borderCallout2">
             <a:avLst>
@@ -8146,6 +8135,38 @@
         <p:txBody>
           <a:bodyPr rtlCol="1" anchor="ctr"/>
           <a:lstStyle/>
+          <a:p>
+            <a:pPr rtl="0">
+              <a:buNone/>
+            </a:pPr>
+            <a:r>
+              <a:rPr lang="en-US" sz="853" kern="100">
+                <a:solidFill>
+                  <a:schemeClr val="tx1"/>
+                </a:solidFill>
+                <a:latin typeface="Consolas" panose="020B0609020204030204" pitchFamily="49" charset="0"/>
+                <a:ea typeface="Calibri" panose="020F0502020204030204" pitchFamily="34" charset="0"/>
+                <a:cs typeface="Calibri Light" panose="020F0302020204030204" pitchFamily="34" charset="0"/>
+              </a:rPr>
+              <a:t>UserType</a:t>
+            </a:r>
+          </a:p>
+          <a:p>
+            <a:pPr rtl="0">
+              <a:buNone/>
+            </a:pPr>
+            <a:r>
+              <a:rPr lang="en-US" sz="853" kern="100">
+                <a:solidFill>
+                  <a:schemeClr val="tx1"/>
+                </a:solidFill>
+                <a:latin typeface="Consolas" panose="020B0609020204030204" pitchFamily="49" charset="0"/>
+                <a:ea typeface="Calibri" panose="020F0502020204030204" pitchFamily="34" charset="0"/>
+                <a:cs typeface="Calibri Light" panose="020F0302020204030204" pitchFamily="34" charset="0"/>
+              </a:rPr>
+              <a:t>1:Teacher 2:Student </a:t>
+            </a:r>
+          </a:p>
           <a:p>
             <a:pPr rtl="0">
               <a:buNone/>

--- a/ExaminerB/.appCatalog/ExaminerB notes 1404.pptx
+++ b/ExaminerB/.appCatalog/ExaminerB notes 1404.pptx
@@ -280,7 +280,7 @@
             </a:pPr>
             <a:fld id="{BCC18F51-09EC-435C-A3BA-64A766E099C0}" type="datetimeFigureOut">
               <a:rPr lang="fa-IR"/>
-              <a:t>06/11/1447</a:t>
+              <a:t>07/11/1447</a:t>
             </a:fld>
             <a:endParaRPr/>
           </a:p>
@@ -459,7 +459,7 @@
             </a:pPr>
             <a:fld id="{BCC18F51-09EC-435C-A3BA-64A766E099C0}" type="datetimeFigureOut">
               <a:rPr lang="fa-IR"/>
-              <a:t>06/11/1447</a:t>
+              <a:t>07/11/1447</a:t>
             </a:fld>
             <a:endParaRPr/>
           </a:p>
@@ -648,7 +648,7 @@
             </a:pPr>
             <a:fld id="{BCC18F51-09EC-435C-A3BA-64A766E099C0}" type="datetimeFigureOut">
               <a:rPr lang="fa-IR"/>
-              <a:t>06/11/1447</a:t>
+              <a:t>07/11/1447</a:t>
             </a:fld>
             <a:endParaRPr/>
           </a:p>
@@ -827,7 +827,7 @@
             </a:pPr>
             <a:fld id="{BCC18F51-09EC-435C-A3BA-64A766E099C0}" type="datetimeFigureOut">
               <a:rPr lang="fa-IR"/>
-              <a:t>06/11/1447</a:t>
+              <a:t>07/11/1447</a:t>
             </a:fld>
             <a:endParaRPr/>
           </a:p>
@@ -1079,7 +1079,7 @@
             </a:pPr>
             <a:fld id="{BCC18F51-09EC-435C-A3BA-64A766E099C0}" type="datetimeFigureOut">
               <a:rPr lang="fa-IR"/>
-              <a:t>06/11/1447</a:t>
+              <a:t>07/11/1447</a:t>
             </a:fld>
             <a:endParaRPr/>
           </a:p>
@@ -1324,7 +1324,7 @@
             </a:pPr>
             <a:fld id="{BCC18F51-09EC-435C-A3BA-64A766E099C0}" type="datetimeFigureOut">
               <a:rPr lang="fa-IR"/>
-              <a:t>06/11/1447</a:t>
+              <a:t>07/11/1447</a:t>
             </a:fld>
             <a:endParaRPr/>
           </a:p>
@@ -1706,7 +1706,7 @@
             </a:pPr>
             <a:fld id="{BCC18F51-09EC-435C-A3BA-64A766E099C0}" type="datetimeFigureOut">
               <a:rPr lang="fa-IR"/>
-              <a:t>06/11/1447</a:t>
+              <a:t>07/11/1447</a:t>
             </a:fld>
             <a:endParaRPr/>
           </a:p>
@@ -1829,7 +1829,7 @@
             </a:pPr>
             <a:fld id="{BCC18F51-09EC-435C-A3BA-64A766E099C0}" type="datetimeFigureOut">
               <a:rPr lang="fa-IR"/>
-              <a:t>06/11/1447</a:t>
+              <a:t>07/11/1447</a:t>
             </a:fld>
             <a:endParaRPr/>
           </a:p>
@@ -1928,7 +1928,7 @@
             </a:pPr>
             <a:fld id="{BCC18F51-09EC-435C-A3BA-64A766E099C0}" type="datetimeFigureOut">
               <a:rPr lang="fa-IR"/>
-              <a:t>06/11/1447</a:t>
+              <a:t>07/11/1447</a:t>
             </a:fld>
             <a:endParaRPr/>
           </a:p>
@@ -2215,7 +2215,7 @@
             </a:pPr>
             <a:fld id="{BCC18F51-09EC-435C-A3BA-64A766E099C0}" type="datetimeFigureOut">
               <a:rPr lang="fa-IR"/>
-              <a:t>06/11/1447</a:t>
+              <a:t>07/11/1447</a:t>
             </a:fld>
             <a:endParaRPr/>
           </a:p>
@@ -2479,7 +2479,7 @@
             </a:pPr>
             <a:fld id="{BCC18F51-09EC-435C-A3BA-64A766E099C0}" type="datetimeFigureOut">
               <a:rPr lang="fa-IR"/>
-              <a:t>06/11/1447</a:t>
+              <a:t>07/11/1447</a:t>
             </a:fld>
             <a:endParaRPr/>
           </a:p>
@@ -2701,7 +2701,7 @@
             </a:pPr>
             <a:fld id="{BCC18F51-09EC-435C-A3BA-64A766E099C0}" type="datetimeFigureOut">
               <a:rPr lang="fa-IR"/>
-              <a:t>06/11/1447</a:t>
+              <a:t>07/11/1447</a:t>
             </a:fld>
             <a:endParaRPr/>
           </a:p>
@@ -7639,8 +7639,8 @@
         </p:nvSpPr>
         <p:spPr bwMode="auto">
           <a:xfrm>
-            <a:off x="737837" y="7800331"/>
-            <a:ext cx="2306092" cy="326683"/>
+            <a:off x="1359988" y="7446793"/>
+            <a:ext cx="1331097" cy="1122060"/>
           </a:xfrm>
           <a:prstGeom prst="borderCallout2">
             <a:avLst>
@@ -7689,7 +7689,7 @@
                 <a:ea typeface="Calibri" panose="020F0502020204030204" pitchFamily="34" charset="0"/>
                 <a:cs typeface="Calibri Light" panose="020F0302020204030204" pitchFamily="34" charset="0"/>
               </a:rPr>
-              <a:t>parentTypes</a:t>
+              <a:t>parentTypes:</a:t>
             </a:r>
           </a:p>
           <a:p>
@@ -7705,7 +7705,103 @@
                 <a:ea typeface="Calibri" panose="020F0502020204030204" pitchFamily="34" charset="0"/>
                 <a:cs typeface="Calibri Light" panose="020F0302020204030204" pitchFamily="34" charset="0"/>
               </a:rPr>
-              <a:t>1:U, 2:SP, 3:S, 4:G, 5:C, 6:E, 7:SN</a:t>
+              <a:t> 1: quickNote by T</a:t>
+            </a:r>
+          </a:p>
+          <a:p>
+            <a:pPr rtl="0">
+              <a:buNone/>
+            </a:pPr>
+            <a:r>
+              <a:rPr lang="en-US" sz="853" kern="100">
+                <a:solidFill>
+                  <a:schemeClr val="tx1"/>
+                </a:solidFill>
+                <a:latin typeface="Consolas" panose="020B0609020204030204" pitchFamily="49" charset="0"/>
+                <a:ea typeface="Calibri" panose="020F0502020204030204" pitchFamily="34" charset="0"/>
+                <a:cs typeface="Calibri Light" panose="020F0302020204030204" pitchFamily="34" charset="0"/>
+              </a:rPr>
+              <a:t> 2: section Note</a:t>
+            </a:r>
+          </a:p>
+          <a:p>
+            <a:pPr rtl="0">
+              <a:buNone/>
+            </a:pPr>
+            <a:r>
+              <a:rPr lang="en-US" sz="853" kern="100">
+                <a:solidFill>
+                  <a:schemeClr val="tx1"/>
+                </a:solidFill>
+                <a:latin typeface="Consolas" panose="020B0609020204030204" pitchFamily="49" charset="0"/>
+                <a:ea typeface="Calibri" panose="020F0502020204030204" pitchFamily="34" charset="0"/>
+                <a:cs typeface="Calibri Light" panose="020F0302020204030204" pitchFamily="34" charset="0"/>
+              </a:rPr>
+              <a:t> 3: note on Student</a:t>
+            </a:r>
+          </a:p>
+          <a:p>
+            <a:pPr rtl="0">
+              <a:buNone/>
+            </a:pPr>
+            <a:r>
+              <a:rPr lang="en-US" sz="853" kern="100">
+                <a:solidFill>
+                  <a:schemeClr val="tx1"/>
+                </a:solidFill>
+                <a:latin typeface="Consolas" panose="020B0609020204030204" pitchFamily="49" charset="0"/>
+                <a:ea typeface="Calibri" panose="020F0502020204030204" pitchFamily="34" charset="0"/>
+                <a:cs typeface="Calibri Light" panose="020F0302020204030204" pitchFamily="34" charset="0"/>
+              </a:rPr>
+              <a:t> 4: note on Group</a:t>
+            </a:r>
+          </a:p>
+          <a:p>
+            <a:pPr rtl="0">
+              <a:buNone/>
+            </a:pPr>
+            <a:r>
+              <a:rPr lang="en-US" sz="853" kern="100">
+                <a:solidFill>
+                  <a:schemeClr val="tx1"/>
+                </a:solidFill>
+                <a:latin typeface="Consolas" panose="020B0609020204030204" pitchFamily="49" charset="0"/>
+                <a:ea typeface="Calibri" panose="020F0502020204030204" pitchFamily="34" charset="0"/>
+                <a:cs typeface="Calibri Light" panose="020F0302020204030204" pitchFamily="34" charset="0"/>
+              </a:rPr>
+              <a:t> 5: note on Course</a:t>
+            </a:r>
+          </a:p>
+          <a:p>
+            <a:pPr rtl="0">
+              <a:buNone/>
+            </a:pPr>
+            <a:r>
+              <a:rPr lang="en-US" sz="853" kern="100">
+                <a:solidFill>
+                  <a:schemeClr val="tx1"/>
+                </a:solidFill>
+                <a:latin typeface="Consolas" panose="020B0609020204030204" pitchFamily="49" charset="0"/>
+                <a:ea typeface="Calibri" panose="020F0502020204030204" pitchFamily="34" charset="0"/>
+                <a:cs typeface="Calibri Light" panose="020F0302020204030204" pitchFamily="34" charset="0"/>
+              </a:rPr>
+              <a:t> 6: note on Exam</a:t>
+            </a:r>
+          </a:p>
+          <a:p>
+            <a:pPr rtl="0">
+              <a:buNone/>
+            </a:pPr>
+            <a:r>
+              <a:rPr lang="en-US" sz="853" kern="100">
+                <a:solidFill>
+                  <a:schemeClr val="tx1"/>
+                </a:solidFill>
+                <a:latin typeface="Consolas" panose="020B0609020204030204" pitchFamily="49" charset="0"/>
+                <a:ea typeface="Calibri" panose="020F0502020204030204" pitchFamily="34" charset="0"/>
+                <a:cs typeface="Calibri Light" panose="020F0302020204030204" pitchFamily="34" charset="0"/>
+              </a:rPr>
+              <a:t> 7: quickNote by S</a:t>
             </a:r>
           </a:p>
         </p:txBody>
@@ -7991,8 +8087,8 @@
         </p:nvSpPr>
         <p:spPr bwMode="auto">
           <a:xfrm>
-            <a:off x="3172878" y="7800331"/>
-            <a:ext cx="2891549" cy="355614"/>
+            <a:off x="2735908" y="7920781"/>
+            <a:ext cx="1584176" cy="620356"/>
           </a:xfrm>
           <a:prstGeom prst="borderCallout2">
             <a:avLst>
@@ -8057,19 +8153,48 @@
                 <a:ea typeface="Calibri" panose="020F0502020204030204" pitchFamily="34" charset="0"/>
                 <a:cs typeface="Calibri Light" panose="020F0302020204030204" pitchFamily="34" charset="0"/>
               </a:rPr>
-              <a:t>1:rtl 2:done 4:shared 8:</a:t>
-            </a:r>
+              <a:t> 1:rtl      2:done</a:t>
+            </a:r>
+          </a:p>
+          <a:p>
+            <a:pPr rtl="0">
+              <a:buNone/>
+            </a:pPr>
             <a:r>
               <a:rPr lang="en-US" sz="853" kern="100">
                 <a:solidFill>
-                  <a:srgbClr val="FF0000"/>
+                  <a:schemeClr val="tx1"/>
                 </a:solidFill>
                 <a:latin typeface="Consolas" panose="020B0609020204030204" pitchFamily="49" charset="0"/>
                 <a:ea typeface="Calibri" panose="020F0502020204030204" pitchFamily="34" charset="0"/>
                 <a:cs typeface="Calibri Light" panose="020F0302020204030204" pitchFamily="34" charset="0"/>
               </a:rPr>
+              <a:t> 4:shared   8:</a:t>
+            </a:r>
+            <a:r>
+              <a:rPr lang="en-US" sz="853" kern="100">
+                <a:solidFill>
+                  <a:srgbClr val="FF0000"/>
+                </a:solidFill>
+                <a:latin typeface="Consolas" panose="020B0609020204030204" pitchFamily="49" charset="0"/>
+                <a:ea typeface="Calibri" panose="020F0502020204030204" pitchFamily="34" charset="0"/>
+                <a:cs typeface="Calibri Light" panose="020F0302020204030204" pitchFamily="34" charset="0"/>
+              </a:rPr>
               <a:t>readonly</a:t>
             </a:r>
+            <a:endParaRPr lang="en-US" sz="853" kern="100">
+              <a:solidFill>
+                <a:schemeClr val="tx1"/>
+              </a:solidFill>
+              <a:latin typeface="Consolas" panose="020B0609020204030204" pitchFamily="49" charset="0"/>
+              <a:ea typeface="Calibri" panose="020F0502020204030204" pitchFamily="34" charset="0"/>
+              <a:cs typeface="Calibri Light" panose="020F0302020204030204" pitchFamily="34" charset="0"/>
+            </a:endParaRPr>
+          </a:p>
+          <a:p>
+            <a:pPr rtl="0">
+              <a:buNone/>
+            </a:pPr>
             <a:r>
               <a:rPr lang="en-US" sz="853" kern="100">
                 <a:solidFill>
@@ -8098,8 +8223,8 @@
         </p:nvSpPr>
         <p:spPr bwMode="auto">
           <a:xfrm>
-            <a:off x="171697" y="7182323"/>
-            <a:ext cx="1372612" cy="563993"/>
+            <a:off x="184856" y="7242193"/>
+            <a:ext cx="890894" cy="822604"/>
           </a:xfrm>
           <a:prstGeom prst="borderCallout2">
             <a:avLst>
@@ -8164,7 +8289,7 @@
                 <a:ea typeface="Calibri" panose="020F0502020204030204" pitchFamily="34" charset="0"/>
                 <a:cs typeface="Calibri Light" panose="020F0302020204030204" pitchFamily="34" charset="0"/>
               </a:rPr>
-              <a:t>1:Teacher 2:Student </a:t>
+              <a:t> 1:Teacher</a:t>
             </a:r>
           </a:p>
           <a:p>
@@ -8180,7 +8305,7 @@
                 <a:ea typeface="Calibri" panose="020F0502020204030204" pitchFamily="34" charset="0"/>
                 <a:cs typeface="Calibri Light" panose="020F0302020204030204" pitchFamily="34" charset="0"/>
               </a:rPr>
-              <a:t>ProjectTags</a:t>
+              <a:t> 2:Student</a:t>
             </a:r>
           </a:p>
           <a:p>
@@ -8196,7 +8321,39 @@
                 <a:ea typeface="Calibri" panose="020F0502020204030204" pitchFamily="34" charset="0"/>
                 <a:cs typeface="Calibri Light" panose="020F0302020204030204" pitchFamily="34" charset="0"/>
               </a:rPr>
-              <a:t>1:active</a:t>
+              <a:t> </a:t>
+            </a:r>
+          </a:p>
+          <a:p>
+            <a:pPr rtl="0">
+              <a:buNone/>
+            </a:pPr>
+            <a:r>
+              <a:rPr lang="en-US" sz="853" kern="100">
+                <a:solidFill>
+                  <a:schemeClr val="tx1"/>
+                </a:solidFill>
+                <a:latin typeface="Consolas" panose="020B0609020204030204" pitchFamily="49" charset="0"/>
+                <a:ea typeface="Calibri" panose="020F0502020204030204" pitchFamily="34" charset="0"/>
+                <a:cs typeface="Calibri Light" panose="020F0302020204030204" pitchFamily="34" charset="0"/>
+              </a:rPr>
+              <a:t>ProjectTags</a:t>
+            </a:r>
+          </a:p>
+          <a:p>
+            <a:pPr rtl="0">
+              <a:buNone/>
+            </a:pPr>
+            <a:r>
+              <a:rPr lang="en-US" sz="853" kern="100">
+                <a:solidFill>
+                  <a:schemeClr val="tx1"/>
+                </a:solidFill>
+                <a:latin typeface="Consolas" panose="020B0609020204030204" pitchFamily="49" charset="0"/>
+                <a:ea typeface="Calibri" panose="020F0502020204030204" pitchFamily="34" charset="0"/>
+                <a:cs typeface="Calibri Light" panose="020F0302020204030204" pitchFamily="34" charset="0"/>
+              </a:rPr>
+              <a:t> 1:active</a:t>
             </a:r>
           </a:p>
         </p:txBody>
@@ -21623,6 +21780,49 @@
     </a:fmtScheme>
   </a:themeElements>
   <a:objectDefaults>
+    <a:spDef>
+      <a:spPr bwMode="auto">
+        <a:solidFill>
+          <a:schemeClr val="bg1"/>
+        </a:solidFill>
+        <a:ln w="28575">
+          <a:solidFill>
+            <a:schemeClr val="tx1"/>
+          </a:solidFill>
+          <a:prstDash val="solid"/>
+        </a:ln>
+        <a:effectLst/>
+      </a:spPr>
+      <a:bodyPr rtlCol="1" anchor="ctr"/>
+      <a:lstStyle>
+        <a:defPPr algn="r" rtl="1">
+          <a:defRPr sz="4400" b="1" smtClean="0">
+            <a:solidFill>
+              <a:schemeClr val="bg1"/>
+            </a:solidFill>
+            <a:highlight>
+              <a:srgbClr val="800080"/>
+            </a:highlight>
+            <a:latin typeface="Segoe UI" panose="020B0502040204020203" pitchFamily="34" charset="0"/>
+            <a:cs typeface="Segoe UI" panose="020B0502040204020203" pitchFamily="34" charset="0"/>
+          </a:defRPr>
+        </a:defPPr>
+      </a:lstStyle>
+      <a:style>
+        <a:lnRef idx="0">
+          <a:schemeClr val="accent4"/>
+        </a:lnRef>
+        <a:fillRef idx="3">
+          <a:schemeClr val="accent4"/>
+        </a:fillRef>
+        <a:effectRef idx="3">
+          <a:schemeClr val="accent4"/>
+        </a:effectRef>
+        <a:fontRef idx="minor">
+          <a:schemeClr val="lt1"/>
+        </a:fontRef>
+      </a:style>
+    </a:spDef>
     <a:txDef>
       <a:spPr>
         <a:noFill/>

--- a/ExaminerB/.appCatalog/ExaminerB notes 1404.pptx
+++ b/ExaminerB/.appCatalog/ExaminerB notes 1404.pptx
@@ -280,7 +280,7 @@
             </a:pPr>
             <a:fld id="{BCC18F51-09EC-435C-A3BA-64A766E099C0}" type="datetimeFigureOut">
               <a:rPr lang="fa-IR"/>
-              <a:t>07/11/1447</a:t>
+              <a:t>22/12/1447</a:t>
             </a:fld>
             <a:endParaRPr/>
           </a:p>
@@ -459,7 +459,7 @@
             </a:pPr>
             <a:fld id="{BCC18F51-09EC-435C-A3BA-64A766E099C0}" type="datetimeFigureOut">
               <a:rPr lang="fa-IR"/>
-              <a:t>07/11/1447</a:t>
+              <a:t>22/12/1447</a:t>
             </a:fld>
             <a:endParaRPr/>
           </a:p>
@@ -648,7 +648,7 @@
             </a:pPr>
             <a:fld id="{BCC18F51-09EC-435C-A3BA-64A766E099C0}" type="datetimeFigureOut">
               <a:rPr lang="fa-IR"/>
-              <a:t>07/11/1447</a:t>
+              <a:t>22/12/1447</a:t>
             </a:fld>
             <a:endParaRPr/>
           </a:p>
@@ -827,7 +827,7 @@
             </a:pPr>
             <a:fld id="{BCC18F51-09EC-435C-A3BA-64A766E099C0}" type="datetimeFigureOut">
               <a:rPr lang="fa-IR"/>
-              <a:t>07/11/1447</a:t>
+              <a:t>22/12/1447</a:t>
             </a:fld>
             <a:endParaRPr/>
           </a:p>
@@ -1079,7 +1079,7 @@
             </a:pPr>
             <a:fld id="{BCC18F51-09EC-435C-A3BA-64A766E099C0}" type="datetimeFigureOut">
               <a:rPr lang="fa-IR"/>
-              <a:t>07/11/1447</a:t>
+              <a:t>22/12/1447</a:t>
             </a:fld>
             <a:endParaRPr/>
           </a:p>
@@ -1324,7 +1324,7 @@
             </a:pPr>
             <a:fld id="{BCC18F51-09EC-435C-A3BA-64A766E099C0}" type="datetimeFigureOut">
               <a:rPr lang="fa-IR"/>
-              <a:t>07/11/1447</a:t>
+              <a:t>22/12/1447</a:t>
             </a:fld>
             <a:endParaRPr/>
           </a:p>
@@ -1706,7 +1706,7 @@
             </a:pPr>
             <a:fld id="{BCC18F51-09EC-435C-A3BA-64A766E099C0}" type="datetimeFigureOut">
               <a:rPr lang="fa-IR"/>
-              <a:t>07/11/1447</a:t>
+              <a:t>22/12/1447</a:t>
             </a:fld>
             <a:endParaRPr/>
           </a:p>
@@ -1829,7 +1829,7 @@
             </a:pPr>
             <a:fld id="{BCC18F51-09EC-435C-A3BA-64A766E099C0}" type="datetimeFigureOut">
               <a:rPr lang="fa-IR"/>
-              <a:t>07/11/1447</a:t>
+              <a:t>22/12/1447</a:t>
             </a:fld>
             <a:endParaRPr/>
           </a:p>
@@ -1928,7 +1928,7 @@
             </a:pPr>
             <a:fld id="{BCC18F51-09EC-435C-A3BA-64A766E099C0}" type="datetimeFigureOut">
               <a:rPr lang="fa-IR"/>
-              <a:t>07/11/1447</a:t>
+              <a:t>22/12/1447</a:t>
             </a:fld>
             <a:endParaRPr/>
           </a:p>
@@ -2215,7 +2215,7 @@
             </a:pPr>
             <a:fld id="{BCC18F51-09EC-435C-A3BA-64A766E099C0}" type="datetimeFigureOut">
               <a:rPr lang="fa-IR"/>
-              <a:t>07/11/1447</a:t>
+              <a:t>22/12/1447</a:t>
             </a:fld>
             <a:endParaRPr/>
           </a:p>
@@ -2479,7 +2479,7 @@
             </a:pPr>
             <a:fld id="{BCC18F51-09EC-435C-A3BA-64A766E099C0}" type="datetimeFigureOut">
               <a:rPr lang="fa-IR"/>
-              <a:t>07/11/1447</a:t>
+              <a:t>22/12/1447</a:t>
             </a:fld>
             <a:endParaRPr/>
           </a:p>
@@ -2701,7 +2701,7 @@
             </a:pPr>
             <a:fld id="{BCC18F51-09EC-435C-A3BA-64A766E099C0}" type="datetimeFigureOut">
               <a:rPr lang="fa-IR"/>
-              <a:t>07/11/1447</a:t>
+              <a:t>22/12/1447</a:t>
             </a:fld>
             <a:endParaRPr/>
           </a:p>
@@ -4360,7 +4360,7 @@
         <p:spPr bwMode="auto">
           <a:xfrm>
             <a:off x="3860208" y="2944397"/>
-            <a:ext cx="1855656" cy="2435984"/>
+            <a:ext cx="1855656" cy="2528112"/>
           </a:xfrm>
           <a:prstGeom prst="roundRect">
             <a:avLst>
@@ -4542,48 +4542,138 @@
             </a:r>
           </a:p>
           <a:p>
-            <a:pPr marL="189651" rtl="0">
-              <a:defRPr/>
-            </a:pPr>
-            <a:r>
-              <a:rPr lang="en-US" sz="853">
+            <a:pPr marL="176213" rtl="0">
+              <a:defRPr/>
+            </a:pPr>
+            <a:r>
+              <a:rPr lang="en-US" sz="700">
                 <a:solidFill>
                   <a:srgbClr val="C00000"/>
                 </a:solidFill>
                 <a:latin typeface="Segoe UI" panose="020B0502040204020203" pitchFamily="34" charset="0"/>
                 <a:cs typeface="Segoe UI" panose="020B0502040204020203" pitchFamily="34" charset="0"/>
               </a:rPr>
-              <a:t>1:act 2:pass</a:t>
-            </a:r>
-          </a:p>
-          <a:p>
-            <a:pPr marL="189651" rtl="0">
-              <a:defRPr/>
-            </a:pPr>
-            <a:r>
-              <a:rPr lang="en-US" sz="853">
+              <a:t>1:IsActive</a:t>
+            </a:r>
+          </a:p>
+          <a:p>
+            <a:pPr marL="176213" rtl="0">
+              <a:defRPr/>
+            </a:pPr>
+            <a:r>
+              <a:rPr lang="en-US" sz="700">
                 <a:solidFill>
                   <a:srgbClr val="C00000"/>
                 </a:solidFill>
                 <a:latin typeface="Segoe UI" panose="020B0502040204020203" pitchFamily="34" charset="0"/>
                 <a:cs typeface="Segoe UI" panose="020B0502040204020203" pitchFamily="34" charset="0"/>
               </a:rPr>
-              <a:t>4,8,16,32: x </a:t>
-            </a:r>
-          </a:p>
-          <a:p>
-            <a:pPr marL="189651" rtl="0">
-              <a:defRPr/>
-            </a:pPr>
-            <a:r>
-              <a:rPr lang="en-US" sz="853">
+              <a:t>2:ChangePass</a:t>
+            </a:r>
+          </a:p>
+          <a:p>
+            <a:pPr marL="176213" rtl="0">
+              <a:defRPr/>
+            </a:pPr>
+            <a:r>
+              <a:rPr lang="en-US" sz="700">
                 <a:solidFill>
                   <a:srgbClr val="C00000"/>
                 </a:solidFill>
                 <a:latin typeface="Segoe UI" panose="020B0502040204020203" pitchFamily="34" charset="0"/>
                 <a:cs typeface="Segoe UI" panose="020B0502040204020203" pitchFamily="34" charset="0"/>
               </a:rPr>
-              <a:t>64:selected</a:t>
+              <a:t>4:ReviewEx</a:t>
+            </a:r>
+          </a:p>
+          <a:p>
+            <a:pPr marL="176213" rtl="0">
+              <a:defRPr/>
+            </a:pPr>
+            <a:r>
+              <a:rPr lang="en-US" sz="700">
+                <a:solidFill>
+                  <a:srgbClr val="C00000"/>
+                </a:solidFill>
+                <a:latin typeface="Segoe UI" panose="020B0502040204020203" pitchFamily="34" charset="0"/>
+                <a:cs typeface="Segoe UI" panose="020B0502040204020203" pitchFamily="34" charset="0"/>
+              </a:rPr>
+              <a:t>8:GetStExTests</a:t>
+            </a:r>
+          </a:p>
+          <a:p>
+            <a:pPr marL="176213" rtl="0">
+              <a:defRPr/>
+            </a:pPr>
+            <a:r>
+              <a:rPr lang="en-US" sz="700">
+                <a:solidFill>
+                  <a:srgbClr val="C00000"/>
+                </a:solidFill>
+                <a:latin typeface="Segoe UI" panose="020B0502040204020203" pitchFamily="34" charset="0"/>
+                <a:cs typeface="Segoe UI" panose="020B0502040204020203" pitchFamily="34" charset="0"/>
+              </a:rPr>
+              <a:t>16:CorrectStExTests</a:t>
+            </a:r>
+          </a:p>
+          <a:p>
+            <a:pPr marL="176213" rtl="0">
+              <a:defRPr/>
+            </a:pPr>
+            <a:r>
+              <a:rPr lang="en-US" sz="700">
+                <a:solidFill>
+                  <a:srgbClr val="C00000"/>
+                </a:solidFill>
+                <a:latin typeface="Segoe UI" panose="020B0502040204020203" pitchFamily="34" charset="0"/>
+                <a:cs typeface="Segoe UI" panose="020B0502040204020203" pitchFamily="34" charset="0"/>
+              </a:rPr>
+              <a:t>32:RevStExTests</a:t>
+            </a:r>
+          </a:p>
+          <a:p>
+            <a:pPr marL="176213" rtl="0">
+              <a:defRPr/>
+            </a:pPr>
+            <a:r>
+              <a:rPr lang="en-US" sz="700">
+                <a:solidFill>
+                  <a:srgbClr val="C00000"/>
+                </a:solidFill>
+                <a:latin typeface="Segoe UI" panose="020B0502040204020203" pitchFamily="34" charset="0"/>
+                <a:cs typeface="Segoe UI" panose="020B0502040204020203" pitchFamily="34" charset="0"/>
+              </a:rPr>
+              <a:t>64: IsSelected</a:t>
+            </a:r>
+          </a:p>
+          <a:p>
+            <a:pPr marL="176213" rtl="0">
+              <a:defRPr/>
+            </a:pPr>
+            <a:r>
+              <a:rPr lang="en-US" sz="700">
+                <a:solidFill>
+                  <a:srgbClr val="C00000"/>
+                </a:solidFill>
+                <a:latin typeface="Segoe UI" panose="020B0502040204020203" pitchFamily="34" charset="0"/>
+                <a:cs typeface="Segoe UI" panose="020B0502040204020203" pitchFamily="34" charset="0"/>
+              </a:rPr>
+              <a:t>128:</a:t>
+            </a:r>
+          </a:p>
+          <a:p>
+            <a:pPr marL="176213" rtl="0">
+              <a:defRPr/>
+            </a:pPr>
+            <a:r>
+              <a:rPr lang="en-US" sz="700">
+                <a:solidFill>
+                  <a:srgbClr val="C00000"/>
+                </a:solidFill>
+                <a:latin typeface="Segoe UI" panose="020B0502040204020203" pitchFamily="34" charset="0"/>
+                <a:cs typeface="Segoe UI" panose="020B0502040204020203" pitchFamily="34" charset="0"/>
+              </a:rPr>
+              <a:t>256: CalendarFa</a:t>
             </a:r>
           </a:p>
         </p:txBody>

--- a/ExaminerB/.appCatalog/ExaminerB notes 1404.pptx
+++ b/ExaminerB/.appCatalog/ExaminerB notes 1404.pptx
@@ -280,7 +280,7 @@
             </a:pPr>
             <a:fld id="{BCC18F51-09EC-435C-A3BA-64A766E099C0}" type="datetimeFigureOut">
               <a:rPr lang="fa-IR"/>
-              <a:t>22/12/1447</a:t>
+              <a:t>06/01/1448</a:t>
             </a:fld>
             <a:endParaRPr/>
           </a:p>
@@ -459,7 +459,7 @@
             </a:pPr>
             <a:fld id="{BCC18F51-09EC-435C-A3BA-64A766E099C0}" type="datetimeFigureOut">
               <a:rPr lang="fa-IR"/>
-              <a:t>22/12/1447</a:t>
+              <a:t>06/01/1448</a:t>
             </a:fld>
             <a:endParaRPr/>
           </a:p>
@@ -648,7 +648,7 @@
             </a:pPr>
             <a:fld id="{BCC18F51-09EC-435C-A3BA-64A766E099C0}" type="datetimeFigureOut">
               <a:rPr lang="fa-IR"/>
-              <a:t>22/12/1447</a:t>
+              <a:t>06/01/1448</a:t>
             </a:fld>
             <a:endParaRPr/>
           </a:p>
@@ -827,7 +827,7 @@
             </a:pPr>
             <a:fld id="{BCC18F51-09EC-435C-A3BA-64A766E099C0}" type="datetimeFigureOut">
               <a:rPr lang="fa-IR"/>
-              <a:t>22/12/1447</a:t>
+              <a:t>06/01/1448</a:t>
             </a:fld>
             <a:endParaRPr/>
           </a:p>
@@ -1079,7 +1079,7 @@
             </a:pPr>
             <a:fld id="{BCC18F51-09EC-435C-A3BA-64A766E099C0}" type="datetimeFigureOut">
               <a:rPr lang="fa-IR"/>
-              <a:t>22/12/1447</a:t>
+              <a:t>06/01/1448</a:t>
             </a:fld>
             <a:endParaRPr/>
           </a:p>
@@ -1324,7 +1324,7 @@
             </a:pPr>
             <a:fld id="{BCC18F51-09EC-435C-A3BA-64A766E099C0}" type="datetimeFigureOut">
               <a:rPr lang="fa-IR"/>
-              <a:t>22/12/1447</a:t>
+              <a:t>06/01/1448</a:t>
             </a:fld>
             <a:endParaRPr/>
           </a:p>
@@ -1706,7 +1706,7 @@
             </a:pPr>
             <a:fld id="{BCC18F51-09EC-435C-A3BA-64A766E099C0}" type="datetimeFigureOut">
               <a:rPr lang="fa-IR"/>
-              <a:t>22/12/1447</a:t>
+              <a:t>06/01/1448</a:t>
             </a:fld>
             <a:endParaRPr/>
           </a:p>
@@ -1829,7 +1829,7 @@
             </a:pPr>
             <a:fld id="{BCC18F51-09EC-435C-A3BA-64A766E099C0}" type="datetimeFigureOut">
               <a:rPr lang="fa-IR"/>
-              <a:t>22/12/1447</a:t>
+              <a:t>06/01/1448</a:t>
             </a:fld>
             <a:endParaRPr/>
           </a:p>
@@ -1928,7 +1928,7 @@
             </a:pPr>
             <a:fld id="{BCC18F51-09EC-435C-A3BA-64A766E099C0}" type="datetimeFigureOut">
               <a:rPr lang="fa-IR"/>
-              <a:t>22/12/1447</a:t>
+              <a:t>06/01/1448</a:t>
             </a:fld>
             <a:endParaRPr/>
           </a:p>
@@ -2215,7 +2215,7 @@
             </a:pPr>
             <a:fld id="{BCC18F51-09EC-435C-A3BA-64A766E099C0}" type="datetimeFigureOut">
               <a:rPr lang="fa-IR"/>
-              <a:t>22/12/1447</a:t>
+              <a:t>06/01/1448</a:t>
             </a:fld>
             <a:endParaRPr/>
           </a:p>
@@ -2479,7 +2479,7 @@
             </a:pPr>
             <a:fld id="{BCC18F51-09EC-435C-A3BA-64A766E099C0}" type="datetimeFigureOut">
               <a:rPr lang="fa-IR"/>
-              <a:t>22/12/1447</a:t>
+              <a:t>06/01/1448</a:t>
             </a:fld>
             <a:endParaRPr/>
           </a:p>
@@ -2701,7 +2701,7 @@
             </a:pPr>
             <a:fld id="{BCC18F51-09EC-435C-A3BA-64A766E099C0}" type="datetimeFigureOut">
               <a:rPr lang="fa-IR"/>
-              <a:t>22/12/1447</a:t>
+              <a:t>06/01/1448</a:t>
             </a:fld>
             <a:endParaRPr/>
           </a:p>
@@ -7729,8 +7729,8 @@
         </p:nvSpPr>
         <p:spPr bwMode="auto">
           <a:xfrm>
-            <a:off x="1359988" y="7446793"/>
-            <a:ext cx="1331097" cy="1122060"/>
+            <a:off x="1007716" y="7332621"/>
+            <a:ext cx="1683369" cy="1236232"/>
           </a:xfrm>
           <a:prstGeom prst="borderCallout2">
             <a:avLst>
@@ -7892,6 +7892,22 @@
                 <a:cs typeface="Calibri Light" panose="020F0302020204030204" pitchFamily="34" charset="0"/>
               </a:rPr>
               <a:t> 7: quickNote by S</a:t>
+            </a:r>
+          </a:p>
+          <a:p>
+            <a:pPr rtl="0">
+              <a:buNone/>
+            </a:pPr>
+            <a:r>
+              <a:rPr lang="en-US" sz="853" kern="100">
+                <a:solidFill>
+                  <a:schemeClr val="tx1"/>
+                </a:solidFill>
+                <a:latin typeface="Consolas" panose="020B0609020204030204" pitchFamily="49" charset="0"/>
+                <a:ea typeface="Calibri" panose="020F0502020204030204" pitchFamily="34" charset="0"/>
+                <a:cs typeface="Calibri Light" panose="020F0302020204030204" pitchFamily="34" charset="0"/>
+              </a:rPr>
+              <a:t> 8: note on Examstudents</a:t>
             </a:r>
           </a:p>
         </p:txBody>
@@ -8313,8 +8329,8 @@
         </p:nvSpPr>
         <p:spPr bwMode="auto">
           <a:xfrm>
-            <a:off x="184856" y="7242193"/>
-            <a:ext cx="890894" cy="822604"/>
+            <a:off x="77984" y="7242193"/>
+            <a:ext cx="861549" cy="822604"/>
           </a:xfrm>
           <a:prstGeom prst="borderCallout2">
             <a:avLst>

--- a/ExaminerB/.appCatalog/ExaminerB notes 1404.pptx
+++ b/ExaminerB/.appCatalog/ExaminerB notes 1404.pptx
@@ -280,7 +280,7 @@
             </a:pPr>
             <a:fld id="{BCC18F51-09EC-435C-A3BA-64A766E099C0}" type="datetimeFigureOut">
               <a:rPr lang="fa-IR"/>
-              <a:t>06/01/1448</a:t>
+              <a:t>11/01/1448</a:t>
             </a:fld>
             <a:endParaRPr/>
           </a:p>
@@ -459,7 +459,7 @@
             </a:pPr>
             <a:fld id="{BCC18F51-09EC-435C-A3BA-64A766E099C0}" type="datetimeFigureOut">
               <a:rPr lang="fa-IR"/>
-              <a:t>06/01/1448</a:t>
+              <a:t>11/01/1448</a:t>
             </a:fld>
             <a:endParaRPr/>
           </a:p>
@@ -648,7 +648,7 @@
             </a:pPr>
             <a:fld id="{BCC18F51-09EC-435C-A3BA-64A766E099C0}" type="datetimeFigureOut">
               <a:rPr lang="fa-IR"/>
-              <a:t>06/01/1448</a:t>
+              <a:t>11/01/1448</a:t>
             </a:fld>
             <a:endParaRPr/>
           </a:p>
@@ -827,7 +827,7 @@
             </a:pPr>
             <a:fld id="{BCC18F51-09EC-435C-A3BA-64A766E099C0}" type="datetimeFigureOut">
               <a:rPr lang="fa-IR"/>
-              <a:t>06/01/1448</a:t>
+              <a:t>11/01/1448</a:t>
             </a:fld>
             <a:endParaRPr/>
           </a:p>
@@ -1079,7 +1079,7 @@
             </a:pPr>
             <a:fld id="{BCC18F51-09EC-435C-A3BA-64A766E099C0}" type="datetimeFigureOut">
               <a:rPr lang="fa-IR"/>
-              <a:t>06/01/1448</a:t>
+              <a:t>11/01/1448</a:t>
             </a:fld>
             <a:endParaRPr/>
           </a:p>
@@ -1324,7 +1324,7 @@
             </a:pPr>
             <a:fld id="{BCC18F51-09EC-435C-A3BA-64A766E099C0}" type="datetimeFigureOut">
               <a:rPr lang="fa-IR"/>
-              <a:t>06/01/1448</a:t>
+              <a:t>11/01/1448</a:t>
             </a:fld>
             <a:endParaRPr/>
           </a:p>
@@ -1706,7 +1706,7 @@
             </a:pPr>
             <a:fld id="{BCC18F51-09EC-435C-A3BA-64A766E099C0}" type="datetimeFigureOut">
               <a:rPr lang="fa-IR"/>
-              <a:t>06/01/1448</a:t>
+              <a:t>11/01/1448</a:t>
             </a:fld>
             <a:endParaRPr/>
           </a:p>
@@ -1829,7 +1829,7 @@
             </a:pPr>
             <a:fld id="{BCC18F51-09EC-435C-A3BA-64A766E099C0}" type="datetimeFigureOut">
               <a:rPr lang="fa-IR"/>
-              <a:t>06/01/1448</a:t>
+              <a:t>11/01/1448</a:t>
             </a:fld>
             <a:endParaRPr/>
           </a:p>
@@ -1928,7 +1928,7 @@
             </a:pPr>
             <a:fld id="{BCC18F51-09EC-435C-A3BA-64A766E099C0}" type="datetimeFigureOut">
               <a:rPr lang="fa-IR"/>
-              <a:t>06/01/1448</a:t>
+              <a:t>11/01/1448</a:t>
             </a:fld>
             <a:endParaRPr/>
           </a:p>
@@ -2215,7 +2215,7 @@
             </a:pPr>
             <a:fld id="{BCC18F51-09EC-435C-A3BA-64A766E099C0}" type="datetimeFigureOut">
               <a:rPr lang="fa-IR"/>
-              <a:t>06/01/1448</a:t>
+              <a:t>11/01/1448</a:t>
             </a:fld>
             <a:endParaRPr/>
           </a:p>
@@ -2479,7 +2479,7 @@
             </a:pPr>
             <a:fld id="{BCC18F51-09EC-435C-A3BA-64A766E099C0}" type="datetimeFigureOut">
               <a:rPr lang="fa-IR"/>
-              <a:t>06/01/1448</a:t>
+              <a:t>11/01/1448</a:t>
             </a:fld>
             <a:endParaRPr/>
           </a:p>
@@ -2701,7 +2701,7 @@
             </a:pPr>
             <a:fld id="{BCC18F51-09EC-435C-A3BA-64A766E099C0}" type="datetimeFigureOut">
               <a:rPr lang="fa-IR"/>
-              <a:t>06/01/1448</a:t>
+              <a:t>11/01/1448</a:t>
             </a:fld>
             <a:endParaRPr/>
           </a:p>
@@ -3219,6 +3219,9 @@
                 <a:solidFill>
                   <a:schemeClr val="tx1"/>
                 </a:solidFill>
+                <a:highlight>
+                  <a:srgbClr val="FFFF00"/>
+                </a:highlight>
                 <a:latin typeface="Segoe UI" panose="020B0502040204020203" pitchFamily="34" charset="0"/>
                 <a:cs typeface="Segoe UI" panose="020B0502040204020203" pitchFamily="34" charset="0"/>
               </a:rPr>
@@ -5119,6 +5122,9 @@
                 <a:solidFill>
                   <a:schemeClr val="tx1"/>
                 </a:solidFill>
+                <a:highlight>
+                  <a:srgbClr val="FFFF00"/>
+                </a:highlight>
                 <a:latin typeface="Segoe UI" panose="020B0502040204020203" pitchFamily="34" charset="0"/>
                 <a:cs typeface="Segoe UI" panose="020B0502040204020203" pitchFamily="34" charset="0"/>
               </a:rPr>
@@ -6045,6 +6051,9 @@
                 <a:solidFill>
                   <a:schemeClr val="tx1"/>
                 </a:solidFill>
+                <a:highlight>
+                  <a:srgbClr val="FFFF00"/>
+                </a:highlight>
                 <a:latin typeface="Segoe UI" panose="020B0502040204020203" pitchFamily="34" charset="0"/>
                 <a:cs typeface="Segoe UI" panose="020B0502040204020203" pitchFamily="34" charset="0"/>
               </a:rPr>
@@ -6289,6 +6298,9 @@
                 <a:solidFill>
                   <a:schemeClr val="tx1"/>
                 </a:solidFill>
+                <a:highlight>
+                  <a:srgbClr val="FFFF00"/>
+                </a:highlight>
                 <a:latin typeface="Segoe UI" panose="020B0502040204020203" pitchFamily="34" charset="0"/>
                 <a:cs typeface="Segoe UI" panose="020B0502040204020203" pitchFamily="34" charset="0"/>
               </a:rPr>
@@ -7493,7 +7505,7 @@
         <p:spPr>
           <a:xfrm>
             <a:off x="2735908" y="6631447"/>
-            <a:ext cx="895415" cy="1128061"/>
+            <a:ext cx="895415" cy="1236232"/>
           </a:xfrm>
           <a:prstGeom prst="roundRect">
             <a:avLst>
@@ -7600,9 +7612,20 @@
               </a:rPr>
               <a:t>NoteTags</a:t>
             </a:r>
+          </a:p>
+          <a:p>
+            <a:pPr rtl="0"/>
+            <a:r>
+              <a:rPr lang="en-US" sz="853">
+                <a:solidFill>
+                  <a:schemeClr val="tx1"/>
+                </a:solidFill>
+              </a:rPr>
+              <a:t>CreatorId</a:t>
+            </a:r>
             <a:endParaRPr lang="fa-IR" sz="853" dirty="0">
               <a:solidFill>
-                <a:srgbClr val="C00000"/>
+                <a:schemeClr val="tx1"/>
               </a:solidFill>
             </a:endParaRPr>
           </a:p>
@@ -8026,6 +8049,9 @@
                 <a:solidFill>
                   <a:schemeClr val="tx1"/>
                 </a:solidFill>
+                <a:highlight>
+                  <a:srgbClr val="FFFF00"/>
+                </a:highlight>
                 <a:latin typeface="Segoe UI" panose="020B0502040204020203" pitchFamily="34" charset="0"/>
                 <a:cs typeface="Segoe UI" panose="020B0502040204020203" pitchFamily="34" charset="0"/>
               </a:rPr>
@@ -8041,6 +8067,9 @@
                 <a:solidFill>
                   <a:schemeClr val="tx1"/>
                 </a:solidFill>
+                <a:highlight>
+                  <a:srgbClr val="FFFF00"/>
+                </a:highlight>
                 <a:latin typeface="Segoe UI" panose="020B0502040204020203" pitchFamily="34" charset="0"/>
                 <a:cs typeface="Segoe UI" panose="020B0502040204020203" pitchFamily="34" charset="0"/>
               </a:rPr>
@@ -8592,6 +8621,9 @@
                 <a:solidFill>
                   <a:schemeClr val="tx1"/>
                 </a:solidFill>
+                <a:highlight>
+                  <a:srgbClr val="FFFF00"/>
+                </a:highlight>
                 <a:latin typeface="Segoe UI" panose="020B0502040204020203" pitchFamily="34" charset="0"/>
                 <a:cs typeface="Segoe UI" panose="020B0502040204020203" pitchFamily="34" charset="0"/>
               </a:rPr>
@@ -8758,6 +8790,9 @@
                 <a:solidFill>
                   <a:schemeClr val="tx1"/>
                 </a:solidFill>
+                <a:highlight>
+                  <a:srgbClr val="FFFF00"/>
+                </a:highlight>
                 <a:latin typeface="Segoe UI" panose="020B0502040204020203" pitchFamily="34" charset="0"/>
                 <a:cs typeface="Segoe UI" panose="020B0502040204020203" pitchFamily="34" charset="0"/>
               </a:rPr>

--- a/ExaminerB/.appCatalog/ExaminerB notes 1404.pptx
+++ b/ExaminerB/.appCatalog/ExaminerB notes 1404.pptx
@@ -3219,9 +3219,6 @@
                 <a:solidFill>
                   <a:schemeClr val="tx1"/>
                 </a:solidFill>
-                <a:highlight>
-                  <a:srgbClr val="FFFF00"/>
-                </a:highlight>
                 <a:latin typeface="Segoe UI" panose="020B0502040204020203" pitchFamily="34" charset="0"/>
                 <a:cs typeface="Segoe UI" panose="020B0502040204020203" pitchFamily="34" charset="0"/>
               </a:rPr>
@@ -4363,7 +4360,7 @@
         <p:spPr bwMode="auto">
           <a:xfrm>
             <a:off x="3860208" y="2944397"/>
-            <a:ext cx="1855656" cy="2528112"/>
+            <a:ext cx="1855656" cy="2144040"/>
           </a:xfrm>
           <a:prstGeom prst="roundRect">
             <a:avLst>
@@ -4458,21 +4455,6 @@
               <a:latin typeface="Segoe UI" panose="020B0502040204020203" pitchFamily="34" charset="0"/>
               <a:cs typeface="Segoe UI" panose="020B0502040204020203" pitchFamily="34" charset="0"/>
             </a:endParaRPr>
-          </a:p>
-          <a:p>
-            <a:pPr marL="189651" rtl="0">
-              <a:defRPr/>
-            </a:pPr>
-            <a:r>
-              <a:rPr lang="en-US" sz="853">
-                <a:solidFill>
-                  <a:schemeClr val="tx1"/>
-                </a:solidFill>
-                <a:latin typeface="Segoe UI" panose="020B0502040204020203" pitchFamily="34" charset="0"/>
-                <a:cs typeface="Segoe UI" panose="020B0502040204020203" pitchFamily="34" charset="0"/>
-              </a:rPr>
-              <a:t>TeacherId</a:t>
-            </a:r>
           </a:p>
           <a:p>
             <a:pPr marL="189651" rtl="0">
@@ -5122,9 +5104,6 @@
                 <a:solidFill>
                   <a:schemeClr val="tx1"/>
                 </a:solidFill>
-                <a:highlight>
-                  <a:srgbClr val="FFFF00"/>
-                </a:highlight>
                 <a:latin typeface="Segoe UI" panose="020B0502040204020203" pitchFamily="34" charset="0"/>
                 <a:cs typeface="Segoe UI" panose="020B0502040204020203" pitchFamily="34" charset="0"/>
               </a:rPr>
@@ -6051,9 +6030,6 @@
                 <a:solidFill>
                   <a:schemeClr val="tx1"/>
                 </a:solidFill>
-                <a:highlight>
-                  <a:srgbClr val="FFFF00"/>
-                </a:highlight>
                 <a:latin typeface="Segoe UI" panose="020B0502040204020203" pitchFamily="34" charset="0"/>
                 <a:cs typeface="Segoe UI" panose="020B0502040204020203" pitchFamily="34" charset="0"/>
               </a:rPr>
@@ -6298,9 +6274,6 @@
                 <a:solidFill>
                   <a:schemeClr val="tx1"/>
                 </a:solidFill>
-                <a:highlight>
-                  <a:srgbClr val="FFFF00"/>
-                </a:highlight>
                 <a:latin typeface="Segoe UI" panose="020B0502040204020203" pitchFamily="34" charset="0"/>
                 <a:cs typeface="Segoe UI" panose="020B0502040204020203" pitchFamily="34" charset="0"/>
               </a:rPr>
@@ -7620,6 +7593,9 @@
                 <a:solidFill>
                   <a:schemeClr val="tx1"/>
                 </a:solidFill>
+                <a:highlight>
+                  <a:srgbClr val="FFFF00"/>
+                </a:highlight>
               </a:rPr>
               <a:t>CreatorId</a:t>
             </a:r>
@@ -7627,6 +7603,9 @@
               <a:solidFill>
                 <a:schemeClr val="tx1"/>
               </a:solidFill>
+              <a:highlight>
+                <a:srgbClr val="FFFF00"/>
+              </a:highlight>
             </a:endParaRPr>
           </a:p>
         </p:txBody>
@@ -8049,9 +8028,6 @@
                 <a:solidFill>
                   <a:schemeClr val="tx1"/>
                 </a:solidFill>
-                <a:highlight>
-                  <a:srgbClr val="FFFF00"/>
-                </a:highlight>
                 <a:latin typeface="Segoe UI" panose="020B0502040204020203" pitchFamily="34" charset="0"/>
                 <a:cs typeface="Segoe UI" panose="020B0502040204020203" pitchFamily="34" charset="0"/>
               </a:rPr>
@@ -8067,9 +8043,6 @@
                 <a:solidFill>
                   <a:schemeClr val="tx1"/>
                 </a:solidFill>
-                <a:highlight>
-                  <a:srgbClr val="FFFF00"/>
-                </a:highlight>
                 <a:latin typeface="Segoe UI" panose="020B0502040204020203" pitchFamily="34" charset="0"/>
                 <a:cs typeface="Segoe UI" panose="020B0502040204020203" pitchFamily="34" charset="0"/>
               </a:rPr>
@@ -8621,9 +8594,6 @@
                 <a:solidFill>
                   <a:schemeClr val="tx1"/>
                 </a:solidFill>
-                <a:highlight>
-                  <a:srgbClr val="FFFF00"/>
-                </a:highlight>
                 <a:latin typeface="Segoe UI" panose="020B0502040204020203" pitchFamily="34" charset="0"/>
                 <a:cs typeface="Segoe UI" panose="020B0502040204020203" pitchFamily="34" charset="0"/>
               </a:rPr>
@@ -8790,9 +8760,6 @@
                 <a:solidFill>
                   <a:schemeClr val="tx1"/>
                 </a:solidFill>
-                <a:highlight>
-                  <a:srgbClr val="FFFF00"/>
-                </a:highlight>
                 <a:latin typeface="Segoe UI" panose="020B0502040204020203" pitchFamily="34" charset="0"/>
                 <a:cs typeface="Segoe UI" panose="020B0502040204020203" pitchFamily="34" charset="0"/>
               </a:rPr>

--- a/ExaminerB/.appCatalog/ExaminerB notes 1404.pptx
+++ b/ExaminerB/.appCatalog/ExaminerB notes 1404.pptx
@@ -280,7 +280,7 @@
             </a:pPr>
             <a:fld id="{BCC18F51-09EC-435C-A3BA-64A766E099C0}" type="datetimeFigureOut">
               <a:rPr lang="fa-IR"/>
-              <a:t>11/01/1448</a:t>
+              <a:t>14/01/1448</a:t>
             </a:fld>
             <a:endParaRPr/>
           </a:p>
@@ -459,7 +459,7 @@
             </a:pPr>
             <a:fld id="{BCC18F51-09EC-435C-A3BA-64A766E099C0}" type="datetimeFigureOut">
               <a:rPr lang="fa-IR"/>
-              <a:t>11/01/1448</a:t>
+              <a:t>14/01/1448</a:t>
             </a:fld>
             <a:endParaRPr/>
           </a:p>
@@ -648,7 +648,7 @@
             </a:pPr>
             <a:fld id="{BCC18F51-09EC-435C-A3BA-64A766E099C0}" type="datetimeFigureOut">
               <a:rPr lang="fa-IR"/>
-              <a:t>11/01/1448</a:t>
+              <a:t>14/01/1448</a:t>
             </a:fld>
             <a:endParaRPr/>
           </a:p>
@@ -827,7 +827,7 @@
             </a:pPr>
             <a:fld id="{BCC18F51-09EC-435C-A3BA-64A766E099C0}" type="datetimeFigureOut">
               <a:rPr lang="fa-IR"/>
-              <a:t>11/01/1448</a:t>
+              <a:t>14/01/1448</a:t>
             </a:fld>
             <a:endParaRPr/>
           </a:p>
@@ -1079,7 +1079,7 @@
             </a:pPr>
             <a:fld id="{BCC18F51-09EC-435C-A3BA-64A766E099C0}" type="datetimeFigureOut">
               <a:rPr lang="fa-IR"/>
-              <a:t>11/01/1448</a:t>
+              <a:t>14/01/1448</a:t>
             </a:fld>
             <a:endParaRPr/>
           </a:p>
@@ -1324,7 +1324,7 @@
             </a:pPr>
             <a:fld id="{BCC18F51-09EC-435C-A3BA-64A766E099C0}" type="datetimeFigureOut">
               <a:rPr lang="fa-IR"/>
-              <a:t>11/01/1448</a:t>
+              <a:t>14/01/1448</a:t>
             </a:fld>
             <a:endParaRPr/>
           </a:p>
@@ -1706,7 +1706,7 @@
             </a:pPr>
             <a:fld id="{BCC18F51-09EC-435C-A3BA-64A766E099C0}" type="datetimeFigureOut">
               <a:rPr lang="fa-IR"/>
-              <a:t>11/01/1448</a:t>
+              <a:t>14/01/1448</a:t>
             </a:fld>
             <a:endParaRPr/>
           </a:p>
@@ -1829,7 +1829,7 @@
             </a:pPr>
             <a:fld id="{BCC18F51-09EC-435C-A3BA-64A766E099C0}" type="datetimeFigureOut">
               <a:rPr lang="fa-IR"/>
-              <a:t>11/01/1448</a:t>
+              <a:t>14/01/1448</a:t>
             </a:fld>
             <a:endParaRPr/>
           </a:p>
@@ -1928,7 +1928,7 @@
             </a:pPr>
             <a:fld id="{BCC18F51-09EC-435C-A3BA-64A766E099C0}" type="datetimeFigureOut">
               <a:rPr lang="fa-IR"/>
-              <a:t>11/01/1448</a:t>
+              <a:t>14/01/1448</a:t>
             </a:fld>
             <a:endParaRPr/>
           </a:p>
@@ -2215,7 +2215,7 @@
             </a:pPr>
             <a:fld id="{BCC18F51-09EC-435C-A3BA-64A766E099C0}" type="datetimeFigureOut">
               <a:rPr lang="fa-IR"/>
-              <a:t>11/01/1448</a:t>
+              <a:t>14/01/1448</a:t>
             </a:fld>
             <a:endParaRPr/>
           </a:p>
@@ -2479,7 +2479,7 @@
             </a:pPr>
             <a:fld id="{BCC18F51-09EC-435C-A3BA-64A766E099C0}" type="datetimeFigureOut">
               <a:rPr lang="fa-IR"/>
-              <a:t>11/01/1448</a:t>
+              <a:t>14/01/1448</a:t>
             </a:fld>
             <a:endParaRPr/>
           </a:p>
@@ -2701,7 +2701,7 @@
             </a:pPr>
             <a:fld id="{BCC18F51-09EC-435C-A3BA-64A766E099C0}" type="datetimeFigureOut">
               <a:rPr lang="fa-IR"/>
-              <a:t>11/01/1448</a:t>
+              <a:t>14/01/1448</a:t>
             </a:fld>
             <a:endParaRPr/>
           </a:p>
@@ -3274,17 +3274,7 @@
                 <a:latin typeface="Segoe UI" panose="020B0502040204020203" pitchFamily="34" charset="0"/>
                 <a:cs typeface="Segoe UI" panose="020B0502040204020203" pitchFamily="34" charset="0"/>
               </a:rPr>
-              <a:t>StudentMessage</a:t>
-            </a:r>
-            <a:r>
-              <a:rPr lang="en-US" sz="853">
-                <a:solidFill>
-                  <a:srgbClr val="C00000"/>
-                </a:solidFill>
-                <a:latin typeface="Segoe UI" panose="020B0502040204020203" pitchFamily="34" charset="0"/>
-                <a:cs typeface="Segoe UI" panose="020B0502040204020203" pitchFamily="34" charset="0"/>
-              </a:rPr>
-              <a:t>Tags</a:t>
+              <a:t>StudentMessageTags</a:t>
             </a:r>
           </a:p>
           <a:p>
@@ -3292,7 +3282,7 @@
               <a:buNone/>
             </a:pPr>
             <a:r>
-              <a:rPr lang="en-US" sz="853" kern="100">
+              <a:rPr lang="en-US" sz="500" kern="100">
                 <a:solidFill>
                   <a:srgbClr val="C00000"/>
                 </a:solidFill>
@@ -3308,7 +3298,7 @@
               <a:buNone/>
             </a:pPr>
             <a:r>
-              <a:rPr lang="en-US" sz="853" kern="100">
+              <a:rPr lang="en-US" sz="500" kern="100">
                 <a:solidFill>
                   <a:srgbClr val="C00000"/>
                 </a:solidFill>
@@ -3324,7 +3314,7 @@
               <a:buNone/>
             </a:pPr>
             <a:r>
-              <a:rPr lang="en-US" sz="853" kern="100">
+              <a:rPr lang="en-US" sz="500" kern="100">
                 <a:solidFill>
                   <a:srgbClr val="C00000"/>
                 </a:solidFill>
@@ -3338,7 +3328,7 @@
           <a:p>
             <a:pPr rtl="0"/>
             <a:r>
-              <a:rPr lang="en-US" sz="853" kern="100">
+              <a:rPr lang="en-US" sz="500" kern="100">
                 <a:solidFill>
                   <a:srgbClr val="C00000"/>
                 </a:solidFill>
@@ -3354,7 +3344,7 @@
               <a:buNone/>
             </a:pPr>
             <a:r>
-              <a:rPr lang="en-US" sz="853" kern="100">
+              <a:rPr lang="en-US" sz="500" kern="100">
                 <a:solidFill>
                   <a:srgbClr val="C00000"/>
                 </a:solidFill>
@@ -3370,7 +3360,7 @@
               <a:buNone/>
             </a:pPr>
             <a:r>
-              <a:rPr lang="en-US" sz="853" kern="100">
+              <a:rPr lang="en-US" sz="500" kern="100">
                 <a:solidFill>
                   <a:srgbClr val="C00000"/>
                 </a:solidFill>
@@ -3405,7 +3395,7 @@
         </p:blipFill>
         <p:spPr>
           <a:xfrm>
-            <a:off x="9862126" y="8018081"/>
+            <a:off x="10368756" y="8280821"/>
             <a:ext cx="1037872" cy="236733"/>
           </a:xfrm>
           <a:prstGeom prst="rect">
@@ -3440,7 +3430,7 @@
         <p:spPr bwMode="auto">
           <a:xfrm>
             <a:off x="9107253" y="359941"/>
-            <a:ext cx="1261503" cy="1196534"/>
+            <a:ext cx="1261503" cy="1338752"/>
           </a:xfrm>
           <a:prstGeom prst="roundRect">
             <a:avLst>
@@ -3586,7 +3576,7 @@
                 <a:latin typeface="Segoe UI" panose="020B0502040204020203" pitchFamily="34" charset="0"/>
                 <a:cs typeface="Segoe UI" panose="020B0502040204020203" pitchFamily="34" charset="0"/>
               </a:rPr>
-              <a:t>Usr</a:t>
+              <a:t>UsrTags</a:t>
             </a:r>
             <a:r>
               <a:rPr lang="en-US" sz="853">
@@ -3596,8 +3586,35 @@
                 <a:latin typeface="Segoe UI" panose="020B0502040204020203" pitchFamily="34" charset="0"/>
                 <a:cs typeface="Segoe UI" panose="020B0502040204020203" pitchFamily="34" charset="0"/>
               </a:rPr>
-              <a:t>Tags  1: active</a:t>
-            </a:r>
+              <a:t> </a:t>
+            </a:r>
+          </a:p>
+          <a:p>
+            <a:pPr rtl="0">
+              <a:defRPr/>
+            </a:pPr>
+            <a:r>
+              <a:rPr lang="en-US" sz="500">
+                <a:solidFill>
+                  <a:srgbClr val="C00000"/>
+                </a:solidFill>
+                <a:latin typeface="Segoe UI" panose="020B0502040204020203" pitchFamily="34" charset="0"/>
+                <a:cs typeface="Segoe UI" panose="020B0502040204020203" pitchFamily="34" charset="0"/>
+              </a:rPr>
+              <a:t>1: active</a:t>
+            </a:r>
+          </a:p>
+          <a:p>
+            <a:pPr rtl="0">
+              <a:defRPr/>
+            </a:pPr>
+            <a:endParaRPr lang="en-US" sz="500">
+              <a:solidFill>
+                <a:srgbClr val="C00000"/>
+              </a:solidFill>
+              <a:latin typeface="Segoe UI" panose="020B0502040204020203" pitchFamily="34" charset="0"/>
+              <a:cs typeface="Segoe UI" panose="020B0502040204020203" pitchFamily="34" charset="0"/>
+            </a:endParaRPr>
           </a:p>
         </p:txBody>
       </p:sp>
@@ -3615,8 +3632,8 @@
         </p:nvSpPr>
         <p:spPr bwMode="auto">
           <a:xfrm>
-            <a:off x="4371117" y="645939"/>
-            <a:ext cx="1824374" cy="1308924"/>
+            <a:off x="4511934" y="894865"/>
+            <a:ext cx="1824374" cy="1059998"/>
           </a:xfrm>
           <a:prstGeom prst="roundRect">
             <a:avLst>
@@ -3942,39 +3959,43 @@
                 <a:latin typeface="Segoe UI" panose="020B0502040204020203" pitchFamily="34" charset="0"/>
                 <a:cs typeface="Segoe UI" panose="020B0502040204020203" pitchFamily="34" charset="0"/>
               </a:rPr>
-              <a:t>Test</a:t>
-            </a:r>
-            <a:r>
-              <a:rPr lang="en-US" sz="853">
+              <a:t>TestTags</a:t>
+            </a:r>
+          </a:p>
+          <a:p>
+            <a:pPr marL="189651" rtl="0"/>
+            <a:r>
+              <a:rPr lang="en-US" sz="500" kern="100">
                 <a:solidFill>
                   <a:srgbClr val="C00000"/>
-                </a:solidFill>
-                <a:latin typeface="Segoe UI" panose="020B0502040204020203" pitchFamily="34" charset="0"/>
-                <a:cs typeface="Segoe UI" panose="020B0502040204020203" pitchFamily="34" charset="0"/>
-              </a:rPr>
-              <a:t>Tags (</a:t>
-            </a:r>
-            <a:r>
-              <a:rPr lang="en-US" sz="853" kern="100">
-                <a:solidFill>
-                  <a:schemeClr val="tx1"/>
                 </a:solidFill>
                 <a:latin typeface="Consolas" panose="020B0609020204030204" pitchFamily="49" charset="0"/>
                 <a:ea typeface="Calibri" panose="020F0502020204030204" pitchFamily="34" charset="0"/>
                 <a:cs typeface="Calibri Light" panose="020F0302020204030204" pitchFamily="34" charset="0"/>
               </a:rPr>
-              <a:t>testRtl, optRtl</a:t>
-            </a:r>
-            <a:r>
-              <a:rPr lang="en-US" sz="853">
+              <a:t> testRtl</a:t>
+            </a:r>
+          </a:p>
+          <a:p>
+            <a:pPr marL="189651" rtl="0"/>
+            <a:r>
+              <a:rPr lang="en-US" sz="500" kern="100">
                 <a:solidFill>
                   <a:srgbClr val="C00000"/>
                 </a:solidFill>
-                <a:latin typeface="Segoe UI" panose="020B0502040204020203" pitchFamily="34" charset="0"/>
-                <a:cs typeface="Segoe UI" panose="020B0502040204020203" pitchFamily="34" charset="0"/>
-              </a:rPr>
-              <a:t>)</a:t>
-            </a:r>
+                <a:latin typeface="Consolas" panose="020B0609020204030204" pitchFamily="49" charset="0"/>
+                <a:ea typeface="Calibri" panose="020F0502020204030204" pitchFamily="34" charset="0"/>
+                <a:cs typeface="Calibri Light" panose="020F0302020204030204" pitchFamily="34" charset="0"/>
+              </a:rPr>
+              <a:t> optRtl</a:t>
+            </a:r>
+            <a:endParaRPr lang="en-US" sz="500">
+              <a:solidFill>
+                <a:srgbClr val="C00000"/>
+              </a:solidFill>
+              <a:latin typeface="Segoe UI" panose="020B0502040204020203" pitchFamily="34" charset="0"/>
+              <a:cs typeface="Segoe UI" panose="020B0502040204020203" pitchFamily="34" charset="0"/>
+            </a:endParaRPr>
           </a:p>
         </p:txBody>
       </p:sp>
@@ -4125,7 +4146,7 @@
                 <a:latin typeface="Segoe UI" panose="020B0502040204020203" pitchFamily="34" charset="0"/>
                 <a:cs typeface="Segoe UI" panose="020B0502040204020203" pitchFamily="34" charset="0"/>
               </a:rPr>
-              <a:t>TestOption</a:t>
+              <a:t>TestOptionTags</a:t>
             </a:r>
             <a:r>
               <a:rPr lang="en-US" sz="853">
@@ -4135,13 +4156,13 @@
                 <a:latin typeface="Segoe UI" panose="020B0502040204020203" pitchFamily="34" charset="0"/>
                 <a:cs typeface="Segoe UI" panose="020B0502040204020203" pitchFamily="34" charset="0"/>
               </a:rPr>
-              <a:t>Tags </a:t>
+              <a:t> </a:t>
             </a:r>
           </a:p>
           <a:p>
             <a:pPr rtl="0"/>
             <a:r>
-              <a:rPr lang="en-US" sz="853" kern="100">
+              <a:rPr lang="en-US" sz="500" kern="100">
                 <a:solidFill>
                   <a:srgbClr val="C00000"/>
                 </a:solidFill>
@@ -4149,13 +4170,13 @@
                 <a:ea typeface="Calibri" panose="020F0502020204030204" pitchFamily="34" charset="0"/>
                 <a:cs typeface="Calibri Light" panose="020F0302020204030204" pitchFamily="34" charset="0"/>
               </a:rPr>
-              <a:t>1:forceLast</a:t>
+              <a:t>1: forceLast</a:t>
             </a:r>
           </a:p>
           <a:p>
             <a:pPr rtl="0"/>
             <a:r>
-              <a:rPr lang="en-US" sz="853" kern="100">
+              <a:rPr lang="en-US" sz="500" kern="100">
                 <a:solidFill>
                   <a:srgbClr val="C00000"/>
                 </a:solidFill>
@@ -4163,7 +4184,7 @@
                 <a:ea typeface="Calibri" panose="020F0502020204030204" pitchFamily="34" charset="0"/>
                 <a:cs typeface="Calibri Light" panose="020F0302020204030204" pitchFamily="34" charset="0"/>
               </a:rPr>
-              <a:t>2:isAns</a:t>
+              <a:t>2: isAns</a:t>
             </a:r>
           </a:p>
         </p:txBody>
@@ -4182,7 +4203,7 @@
         </p:nvSpPr>
         <p:spPr bwMode="auto">
           <a:xfrm>
-            <a:off x="4561055" y="6369915"/>
+            <a:off x="4686211" y="6369915"/>
             <a:ext cx="1722105" cy="1226651"/>
           </a:xfrm>
           <a:prstGeom prst="roundRect">
@@ -4513,17 +4534,22 @@
                 <a:latin typeface="Segoe UI" panose="020B0502040204020203" pitchFamily="34" charset="0"/>
                 <a:cs typeface="Segoe UI" panose="020B0502040204020203" pitchFamily="34" charset="0"/>
               </a:rPr>
-              <a:t>Student</a:t>
-            </a:r>
-            <a:r>
-              <a:rPr lang="en-US" sz="853">
+              <a:t>StudentTags</a:t>
+            </a:r>
+          </a:p>
+          <a:p>
+            <a:pPr marL="176213" rtl="0">
+              <a:defRPr/>
+            </a:pPr>
+            <a:r>
+              <a:rPr lang="en-US" sz="500">
                 <a:solidFill>
                   <a:srgbClr val="C00000"/>
                 </a:solidFill>
                 <a:latin typeface="Segoe UI" panose="020B0502040204020203" pitchFamily="34" charset="0"/>
                 <a:cs typeface="Segoe UI" panose="020B0502040204020203" pitchFamily="34" charset="0"/>
               </a:rPr>
-              <a:t>Tags</a:t>
+              <a:t>1: IsActive</a:t>
             </a:r>
           </a:p>
           <a:p>
@@ -4531,14 +4557,14 @@
               <a:defRPr/>
             </a:pPr>
             <a:r>
-              <a:rPr lang="en-US" sz="700">
+              <a:rPr lang="en-US" sz="500">
                 <a:solidFill>
                   <a:srgbClr val="C00000"/>
                 </a:solidFill>
                 <a:latin typeface="Segoe UI" panose="020B0502040204020203" pitchFamily="34" charset="0"/>
                 <a:cs typeface="Segoe UI" panose="020B0502040204020203" pitchFamily="34" charset="0"/>
               </a:rPr>
-              <a:t>1:IsActive</a:t>
+              <a:t>2: ChangePass</a:t>
             </a:r>
           </a:p>
           <a:p>
@@ -4546,14 +4572,14 @@
               <a:defRPr/>
             </a:pPr>
             <a:r>
-              <a:rPr lang="en-US" sz="700">
+              <a:rPr lang="en-US" sz="500">
                 <a:solidFill>
                   <a:srgbClr val="C00000"/>
                 </a:solidFill>
                 <a:latin typeface="Segoe UI" panose="020B0502040204020203" pitchFamily="34" charset="0"/>
                 <a:cs typeface="Segoe UI" panose="020B0502040204020203" pitchFamily="34" charset="0"/>
               </a:rPr>
-              <a:t>2:ChangePass</a:t>
+              <a:t>4: ReviewEx</a:t>
             </a:r>
           </a:p>
           <a:p>
@@ -4561,14 +4587,14 @@
               <a:defRPr/>
             </a:pPr>
             <a:r>
-              <a:rPr lang="en-US" sz="700">
+              <a:rPr lang="en-US" sz="500">
                 <a:solidFill>
                   <a:srgbClr val="C00000"/>
                 </a:solidFill>
                 <a:latin typeface="Segoe UI" panose="020B0502040204020203" pitchFamily="34" charset="0"/>
                 <a:cs typeface="Segoe UI" panose="020B0502040204020203" pitchFamily="34" charset="0"/>
               </a:rPr>
-              <a:t>4:ReviewEx</a:t>
+              <a:t>8: GetStExTests</a:t>
             </a:r>
           </a:p>
           <a:p>
@@ -4576,14 +4602,14 @@
               <a:defRPr/>
             </a:pPr>
             <a:r>
-              <a:rPr lang="en-US" sz="700">
+              <a:rPr lang="en-US" sz="500">
                 <a:solidFill>
                   <a:srgbClr val="C00000"/>
                 </a:solidFill>
                 <a:latin typeface="Segoe UI" panose="020B0502040204020203" pitchFamily="34" charset="0"/>
                 <a:cs typeface="Segoe UI" panose="020B0502040204020203" pitchFamily="34" charset="0"/>
               </a:rPr>
-              <a:t>8:GetStExTests</a:t>
+              <a:t>16: CorrectStExTests</a:t>
             </a:r>
           </a:p>
           <a:p>
@@ -4591,14 +4617,14 @@
               <a:defRPr/>
             </a:pPr>
             <a:r>
-              <a:rPr lang="en-US" sz="700">
+              <a:rPr lang="en-US" sz="500">
                 <a:solidFill>
                   <a:srgbClr val="C00000"/>
                 </a:solidFill>
                 <a:latin typeface="Segoe UI" panose="020B0502040204020203" pitchFamily="34" charset="0"/>
                 <a:cs typeface="Segoe UI" panose="020B0502040204020203" pitchFamily="34" charset="0"/>
               </a:rPr>
-              <a:t>16:CorrectStExTests</a:t>
+              <a:t>32: RevStExTests</a:t>
             </a:r>
           </a:p>
           <a:p>
@@ -4606,14 +4632,14 @@
               <a:defRPr/>
             </a:pPr>
             <a:r>
-              <a:rPr lang="en-US" sz="700">
+              <a:rPr lang="en-US" sz="500">
                 <a:solidFill>
                   <a:srgbClr val="C00000"/>
                 </a:solidFill>
                 <a:latin typeface="Segoe UI" panose="020B0502040204020203" pitchFamily="34" charset="0"/>
                 <a:cs typeface="Segoe UI" panose="020B0502040204020203" pitchFamily="34" charset="0"/>
               </a:rPr>
-              <a:t>32:RevStExTests</a:t>
+              <a:t>64: IsSelected</a:t>
             </a:r>
           </a:p>
           <a:p>
@@ -4621,14 +4647,14 @@
               <a:defRPr/>
             </a:pPr>
             <a:r>
-              <a:rPr lang="en-US" sz="700">
+              <a:rPr lang="en-US" sz="500">
                 <a:solidFill>
                   <a:srgbClr val="C00000"/>
                 </a:solidFill>
                 <a:latin typeface="Segoe UI" panose="020B0502040204020203" pitchFamily="34" charset="0"/>
                 <a:cs typeface="Segoe UI" panose="020B0502040204020203" pitchFamily="34" charset="0"/>
               </a:rPr>
-              <a:t>64: IsSelected</a:t>
+              <a:t>128:</a:t>
             </a:r>
           </a:p>
           <a:p>
@@ -4636,22 +4662,7 @@
               <a:defRPr/>
             </a:pPr>
             <a:r>
-              <a:rPr lang="en-US" sz="700">
-                <a:solidFill>
-                  <a:srgbClr val="C00000"/>
-                </a:solidFill>
-                <a:latin typeface="Segoe UI" panose="020B0502040204020203" pitchFamily="34" charset="0"/>
-                <a:cs typeface="Segoe UI" panose="020B0502040204020203" pitchFamily="34" charset="0"/>
-              </a:rPr>
-              <a:t>128:</a:t>
-            </a:r>
-          </a:p>
-          <a:p>
-            <a:pPr marL="176213" rtl="0">
-              <a:defRPr/>
-            </a:pPr>
-            <a:r>
-              <a:rPr lang="en-US" sz="700">
+              <a:rPr lang="en-US" sz="500">
                 <a:solidFill>
                   <a:srgbClr val="C00000"/>
                 </a:solidFill>
@@ -4844,7 +4855,7 @@
         </p:nvSpPr>
         <p:spPr bwMode="auto">
           <a:xfrm>
-            <a:off x="5600126" y="645939"/>
+            <a:off x="5685945" y="670129"/>
             <a:ext cx="1366068" cy="1308924"/>
           </a:xfrm>
           <a:prstGeom prst="roundRect">
@@ -5162,14 +5173,14 @@
           <a:p>
             <a:pPr rtl="0"/>
             <a:r>
-              <a:rPr lang="en-US" sz="853">
+              <a:rPr lang="en-US" sz="500">
                 <a:solidFill>
                   <a:srgbClr val="C00000"/>
                 </a:solidFill>
                 <a:latin typeface="Segoe UI" panose="020B0502040204020203" pitchFamily="34" charset="0"/>
                 <a:cs typeface="Segoe UI" panose="020B0502040204020203" pitchFamily="34" charset="0"/>
               </a:rPr>
-              <a:t>1:act</a:t>
+              <a:t>1: act</a:t>
             </a:r>
           </a:p>
         </p:txBody>
@@ -5324,8 +5335,8 @@
         </p:nvSpPr>
         <p:spPr>
           <a:xfrm>
-            <a:off x="9757896" y="8201250"/>
-            <a:ext cx="1402948" cy="223587"/>
+            <a:off x="-12559" y="8399187"/>
+            <a:ext cx="1467068" cy="230832"/>
           </a:xfrm>
           <a:prstGeom prst="rect">
             <a:avLst/>
@@ -5340,17 +5351,21 @@
           <a:p>
             <a:pPr algn="l" rtl="0"/>
             <a:r>
-              <a:rPr lang="en-US" sz="853">
-                <a:solidFill>
-                  <a:schemeClr val="tx1"/>
+              <a:rPr lang="en-US" sz="900">
+                <a:solidFill>
+                  <a:schemeClr val="accent5">
+                    <a:lumMod val="75000"/>
+                  </a:schemeClr>
                 </a:solidFill>
                 <a:latin typeface="Consolas" panose="020B0609020204030204" pitchFamily="49" charset="0"/>
               </a:rPr>
               <a:t>Majid SharifiTehrani</a:t>
             </a:r>
-            <a:endParaRPr lang="fa-IR" sz="853">
+            <a:endParaRPr lang="fa-IR" sz="900">
               <a:solidFill>
-                <a:schemeClr val="tx1"/>
+                <a:schemeClr val="accent5">
+                  <a:lumMod val="75000"/>
+                </a:schemeClr>
               </a:solidFill>
               <a:latin typeface="Consolas" panose="020B0609020204030204" pitchFamily="49" charset="0"/>
             </a:endParaRPr>
@@ -5371,8 +5386,8 @@
         </p:nvSpPr>
         <p:spPr bwMode="auto">
           <a:xfrm>
-            <a:off x="5051947" y="4698088"/>
-            <a:ext cx="2010706" cy="1872068"/>
+            <a:off x="5192945" y="4910537"/>
+            <a:ext cx="1869708" cy="1570084"/>
           </a:xfrm>
           <a:prstGeom prst="roundRect">
             <a:avLst>
@@ -5548,7 +5563,7 @@
                 <a:latin typeface="Segoe UI" panose="020B0502040204020203" pitchFamily="34" charset="0"/>
                 <a:cs typeface="Segoe UI" panose="020B0502040204020203" pitchFamily="34" charset="0"/>
               </a:rPr>
-              <a:t>Exam</a:t>
+              <a:t>ExamTags</a:t>
             </a:r>
             <a:r>
               <a:rPr lang="en-US" sz="853">
@@ -5558,7 +5573,7 @@
                 <a:latin typeface="Segoe UI" panose="020B0502040204020203" pitchFamily="34" charset="0"/>
                 <a:cs typeface="Segoe UI" panose="020B0502040204020203" pitchFamily="34" charset="0"/>
               </a:rPr>
-              <a:t>Tags </a:t>
+              <a:t> </a:t>
             </a:r>
           </a:p>
           <a:p>
@@ -5566,7 +5581,7 @@
               <a:defRPr/>
             </a:pPr>
             <a:r>
-              <a:rPr lang="en-US" sz="853">
+              <a:rPr lang="en-US" sz="500">
                 <a:solidFill>
                   <a:srgbClr val="C00000"/>
                 </a:solidFill>
@@ -5729,8 +5744,8 @@
         </p:nvSpPr>
         <p:spPr bwMode="auto">
           <a:xfrm>
-            <a:off x="5049531" y="1921275"/>
-            <a:ext cx="2013127" cy="1645829"/>
+            <a:off x="5298327" y="1921275"/>
+            <a:ext cx="1764331" cy="1645829"/>
           </a:xfrm>
           <a:prstGeom prst="roundRect">
             <a:avLst>
@@ -5899,8 +5914,8 @@
         </p:nvSpPr>
         <p:spPr bwMode="auto">
           <a:xfrm>
-            <a:off x="6727074" y="6096823"/>
-            <a:ext cx="1552129" cy="1649493"/>
+            <a:off x="6641384" y="6096823"/>
+            <a:ext cx="1637820" cy="1649493"/>
           </a:xfrm>
           <a:prstGeom prst="roundRect">
             <a:avLst>
@@ -6093,17 +6108,7 @@
                 <a:latin typeface="Segoe UI" panose="020B0502040204020203" pitchFamily="34" charset="0"/>
                 <a:cs typeface="Segoe UI" panose="020B0502040204020203" pitchFamily="34" charset="0"/>
               </a:rPr>
-              <a:t>StudentExam</a:t>
-            </a:r>
-            <a:r>
-              <a:rPr lang="en-US" sz="853">
-                <a:solidFill>
-                  <a:srgbClr val="C00000"/>
-                </a:solidFill>
-                <a:latin typeface="Segoe UI" panose="020B0502040204020203" pitchFamily="34" charset="0"/>
-                <a:cs typeface="Segoe UI" panose="020B0502040204020203" pitchFamily="34" charset="0"/>
-              </a:rPr>
-              <a:t>Tags</a:t>
+              <a:t>StudentExamTags</a:t>
             </a:r>
           </a:p>
           <a:p>
@@ -6111,7 +6116,7 @@
               <a:defRPr/>
             </a:pPr>
             <a:r>
-              <a:rPr lang="en-US" sz="853">
+              <a:rPr lang="en-US" sz="500">
                 <a:solidFill>
                   <a:srgbClr val="C00000"/>
                 </a:solidFill>
@@ -6162,8 +6167,8 @@
         </p:nvSpPr>
         <p:spPr bwMode="auto">
           <a:xfrm>
-            <a:off x="6709586" y="1844456"/>
-            <a:ext cx="1545810" cy="1868075"/>
+            <a:off x="6709586" y="2038905"/>
+            <a:ext cx="1545810" cy="1705412"/>
           </a:xfrm>
           <a:prstGeom prst="roundRect">
             <a:avLst>
@@ -6337,17 +6342,7 @@
                 <a:latin typeface="Segoe UI" panose="020B0502040204020203" pitchFamily="34" charset="0"/>
                 <a:cs typeface="Segoe UI" panose="020B0502040204020203" pitchFamily="34" charset="0"/>
               </a:rPr>
-              <a:t>StudentCourse</a:t>
-            </a:r>
-            <a:r>
-              <a:rPr lang="en-US" sz="853">
-                <a:solidFill>
-                  <a:srgbClr val="C00000"/>
-                </a:solidFill>
-                <a:latin typeface="Segoe UI" panose="020B0502040204020203" pitchFamily="34" charset="0"/>
-                <a:cs typeface="Segoe UI" panose="020B0502040204020203" pitchFamily="34" charset="0"/>
-              </a:rPr>
-              <a:t>Tags</a:t>
+              <a:t>StudentCourseTags</a:t>
             </a:r>
           </a:p>
           <a:p>
@@ -6355,7 +6350,7 @@
               <a:buNone/>
             </a:pPr>
             <a:r>
-              <a:rPr lang="en-US" sz="853" kern="100">
+              <a:rPr lang="en-US" sz="500" kern="100">
                 <a:solidFill>
                   <a:srgbClr val="C00000"/>
                 </a:solidFill>
@@ -6363,7 +6358,39 @@
                 <a:ea typeface="Calibri" panose="020F0502020204030204" pitchFamily="34" charset="0"/>
                 <a:cs typeface="Segoe UI" panose="020B0502040204020203" pitchFamily="34" charset="0"/>
               </a:rPr>
-              <a:t>1:act 2:retry 4rev</a:t>
+              <a:t>1: act</a:t>
+            </a:r>
+          </a:p>
+          <a:p>
+            <a:pPr rtl="0">
+              <a:buNone/>
+            </a:pPr>
+            <a:r>
+              <a:rPr lang="en-US" sz="500" kern="100">
+                <a:solidFill>
+                  <a:srgbClr val="C00000"/>
+                </a:solidFill>
+                <a:latin typeface="Segoe UI" panose="020B0502040204020203" pitchFamily="34" charset="0"/>
+                <a:ea typeface="Calibri" panose="020F0502020204030204" pitchFamily="34" charset="0"/>
+                <a:cs typeface="Segoe UI" panose="020B0502040204020203" pitchFamily="34" charset="0"/>
+              </a:rPr>
+              <a:t>2: retry</a:t>
+            </a:r>
+          </a:p>
+          <a:p>
+            <a:pPr rtl="0">
+              <a:buNone/>
+            </a:pPr>
+            <a:r>
+              <a:rPr lang="en-US" sz="500" kern="100">
+                <a:solidFill>
+                  <a:srgbClr val="C00000"/>
+                </a:solidFill>
+                <a:latin typeface="Segoe UI" panose="020B0502040204020203" pitchFamily="34" charset="0"/>
+                <a:ea typeface="Calibri" panose="020F0502020204030204" pitchFamily="34" charset="0"/>
+                <a:cs typeface="Segoe UI" panose="020B0502040204020203" pitchFamily="34" charset="0"/>
+              </a:rPr>
+              <a:t>4: rev</a:t>
             </a:r>
           </a:p>
         </p:txBody>
@@ -6382,8 +6409,8 @@
         </p:nvSpPr>
         <p:spPr bwMode="auto">
           <a:xfrm>
-            <a:off x="6703272" y="4578752"/>
-            <a:ext cx="1552129" cy="1387474"/>
+            <a:off x="6641384" y="4578752"/>
+            <a:ext cx="1614017" cy="1387474"/>
           </a:xfrm>
           <a:prstGeom prst="roundRect">
             <a:avLst>
@@ -6568,8 +6595,8 @@
         </p:nvSpPr>
         <p:spPr bwMode="auto">
           <a:xfrm>
-            <a:off x="8114732" y="2007119"/>
-            <a:ext cx="1864591" cy="1402330"/>
+            <a:off x="8114731" y="2196769"/>
+            <a:ext cx="1864591" cy="1259516"/>
           </a:xfrm>
           <a:prstGeom prst="roundRect">
             <a:avLst>
@@ -6756,8 +6783,8 @@
         </p:nvSpPr>
         <p:spPr bwMode="auto">
           <a:xfrm>
-            <a:off x="8114731" y="5248801"/>
-            <a:ext cx="2299440" cy="2118334"/>
+            <a:off x="8136507" y="5248801"/>
+            <a:ext cx="2277663" cy="2599258"/>
           </a:xfrm>
           <a:prstGeom prst="roundRect">
             <a:avLst>
@@ -7014,78 +7041,15 @@
                 <a:latin typeface="Segoe UI" panose="020B0502040204020203" pitchFamily="34" charset="0"/>
                 <a:cs typeface="Segoe UI" panose="020B0502040204020203" pitchFamily="34" charset="0"/>
               </a:rPr>
-              <a:t>StudentExamTest</a:t>
-            </a:r>
-            <a:r>
-              <a:rPr lang="en-US" sz="853">
-                <a:solidFill>
-                  <a:srgbClr val="C00000"/>
-                </a:solidFill>
-                <a:latin typeface="Segoe UI" panose="020B0502040204020203" pitchFamily="34" charset="0"/>
-                <a:cs typeface="Segoe UI" panose="020B0502040204020203" pitchFamily="34" charset="0"/>
-              </a:rPr>
-              <a:t>Tags</a:t>
-            </a:r>
-          </a:p>
-        </p:txBody>
-      </p:sp>
-      <p:sp>
-        <p:nvSpPr>
-          <p:cNvPr id="30" name="Callout: Bent Line 29">
-            <a:extLst>
-              <a:ext uri="{FF2B5EF4-FFF2-40B4-BE49-F238E27FC236}">
-                <a16:creationId xmlns:a16="http://schemas.microsoft.com/office/drawing/2014/main" id="{37CBAADD-8162-F8CF-9142-1CCC32CAB857}"/>
-              </a:ext>
-            </a:extLst>
-          </p:cNvPr>
-          <p:cNvSpPr/>
-          <p:nvPr/>
-        </p:nvSpPr>
-        <p:spPr bwMode="auto">
-          <a:xfrm>
-            <a:off x="9376850" y="6290922"/>
-            <a:ext cx="969138" cy="981077"/>
-          </a:xfrm>
-          <a:prstGeom prst="borderCallout2">
-            <a:avLst>
-              <a:gd name="adj1" fmla="val -1024"/>
-              <a:gd name="adj2" fmla="val 85567"/>
-              <a:gd name="adj3" fmla="val 366"/>
-              <a:gd name="adj4" fmla="val 82159"/>
-              <a:gd name="adj5" fmla="val 180"/>
-              <a:gd name="adj6" fmla="val 85711"/>
-            </a:avLst>
-          </a:prstGeom>
-          <a:noFill/>
-          <a:ln>
-            <a:prstDash val="dash"/>
-          </a:ln>
-        </p:spPr>
-        <p:style>
-          <a:lnRef idx="2">
-            <a:schemeClr val="accent1">
-              <a:shade val="15000"/>
-            </a:schemeClr>
-          </a:lnRef>
-          <a:fillRef idx="1">
-            <a:schemeClr val="accent1"/>
-          </a:fillRef>
-          <a:effectRef idx="0">
-            <a:schemeClr val="accent1"/>
-          </a:effectRef>
-          <a:fontRef idx="minor">
-            <a:schemeClr val="lt1"/>
-          </a:fontRef>
-        </p:style>
-        <p:txBody>
-          <a:bodyPr rtlCol="1" anchor="ctr"/>
-          <a:lstStyle/>
+              <a:t>StudentExamTestTags</a:t>
+            </a:r>
+          </a:p>
           <a:p>
             <a:pPr rtl="0">
               <a:buNone/>
             </a:pPr>
             <a:r>
-              <a:rPr lang="en-US" sz="853" kern="100">
+              <a:rPr lang="en-US" sz="500" kern="100">
                 <a:solidFill>
                   <a:srgbClr val="C00000"/>
                 </a:solidFill>
@@ -7101,7 +7065,7 @@
               <a:buNone/>
             </a:pPr>
             <a:r>
-              <a:rPr lang="en-US" sz="853" kern="100">
+              <a:rPr lang="en-US" sz="500" kern="100">
                 <a:solidFill>
                   <a:srgbClr val="C00000"/>
                 </a:solidFill>
@@ -7117,7 +7081,7 @@
               <a:buNone/>
             </a:pPr>
             <a:r>
-              <a:rPr lang="en-US" sz="853" kern="100">
+              <a:rPr lang="en-US" sz="500" kern="100">
                 <a:solidFill>
                   <a:srgbClr val="C00000"/>
                 </a:solidFill>
@@ -7133,7 +7097,7 @@
               <a:buNone/>
             </a:pPr>
             <a:r>
-              <a:rPr lang="en-US" sz="853" kern="100">
+              <a:rPr lang="en-US" sz="500" kern="100">
                 <a:solidFill>
                   <a:srgbClr val="C00000"/>
                 </a:solidFill>
@@ -7149,7 +7113,7 @@
               <a:buNone/>
             </a:pPr>
             <a:r>
-              <a:rPr lang="en-US" sz="853" kern="100">
+              <a:rPr lang="en-US" sz="500" kern="100">
                 <a:solidFill>
                   <a:srgbClr val="C00000"/>
                 </a:solidFill>
@@ -7165,7 +7129,7 @@
               <a:buNone/>
             </a:pPr>
             <a:r>
-              <a:rPr lang="en-US" sz="853" kern="100">
+              <a:rPr lang="en-US" sz="500" kern="100">
                 <a:solidFill>
                   <a:srgbClr val="C00000"/>
                 </a:solidFill>
@@ -7179,7 +7143,7 @@
           <a:p>
             <a:pPr rtl="0"/>
             <a:r>
-              <a:rPr lang="en-US" sz="853" kern="100">
+              <a:rPr lang="en-US" sz="500" kern="100">
                 <a:solidFill>
                   <a:srgbClr val="C00000"/>
                 </a:solidFill>
@@ -7341,8 +7305,8 @@
         </p:nvSpPr>
         <p:spPr>
           <a:xfrm>
-            <a:off x="632108" y="6149940"/>
-            <a:ext cx="997025" cy="1003009"/>
+            <a:off x="632108" y="6149941"/>
+            <a:ext cx="997025" cy="1301732"/>
           </a:xfrm>
           <a:prstGeom prst="roundRect">
             <a:avLst>
@@ -7431,6 +7395,38 @@
               </a:rPr>
               <a:t>UserType</a:t>
             </a:r>
+          </a:p>
+          <a:p>
+            <a:pPr rtl="0">
+              <a:buNone/>
+            </a:pPr>
+            <a:r>
+              <a:rPr lang="en-US" sz="600" kern="100">
+                <a:solidFill>
+                  <a:schemeClr val="tx1"/>
+                </a:solidFill>
+                <a:latin typeface="Consolas" panose="020B0609020204030204" pitchFamily="49" charset="0"/>
+                <a:ea typeface="Calibri" panose="020F0502020204030204" pitchFamily="34" charset="0"/>
+                <a:cs typeface="Calibri Light" panose="020F0302020204030204" pitchFamily="34" charset="0"/>
+              </a:rPr>
+              <a:t> 1:Teacher</a:t>
+            </a:r>
+          </a:p>
+          <a:p>
+            <a:pPr rtl="0">
+              <a:buNone/>
+            </a:pPr>
+            <a:r>
+              <a:rPr lang="en-US" sz="600" kern="100">
+                <a:solidFill>
+                  <a:schemeClr val="tx1"/>
+                </a:solidFill>
+                <a:latin typeface="Consolas" panose="020B0609020204030204" pitchFamily="49" charset="0"/>
+                <a:ea typeface="Calibri" panose="020F0502020204030204" pitchFamily="34" charset="0"/>
+                <a:cs typeface="Calibri Light" panose="020F0302020204030204" pitchFamily="34" charset="0"/>
+              </a:rPr>
+              <a:t> 2:Student</a:t>
+            </a:r>
             <a:endParaRPr lang="en-US" sz="853" dirty="0"/>
           </a:p>
           <a:p>
@@ -7444,169 +7440,27 @@
           <a:p>
             <a:pPr rtl="0"/>
             <a:r>
-              <a:rPr lang="en-US" sz="853"/>
-              <a:t>Project</a:t>
-            </a:r>
-            <a:r>
               <a:rPr lang="en-US" sz="853">
                 <a:solidFill>
+                  <a:schemeClr val="tx1"/>
+                </a:solidFill>
+              </a:rPr>
+              <a:t>ProjectTags</a:t>
+            </a:r>
+          </a:p>
+          <a:p>
+            <a:pPr rtl="0"/>
+            <a:r>
+              <a:rPr lang="en-US" sz="500" kern="100">
+                <a:solidFill>
                   <a:srgbClr val="C00000"/>
                 </a:solidFill>
-              </a:rPr>
-              <a:t>Tags</a:t>
-            </a:r>
-            <a:endParaRPr lang="en-US" sz="853" dirty="0">
-              <a:solidFill>
-                <a:srgbClr val="C00000"/>
-              </a:solidFill>
-            </a:endParaRPr>
-          </a:p>
-        </p:txBody>
-      </p:sp>
-      <p:sp>
-        <p:nvSpPr>
-          <p:cNvPr id="2" name="Rectangle: Rounded Corners 1">
-            <a:extLst>
-              <a:ext uri="{FF2B5EF4-FFF2-40B4-BE49-F238E27FC236}">
-                <a16:creationId xmlns:a16="http://schemas.microsoft.com/office/drawing/2014/main" id="{6A0D2D6C-AD44-BFED-2D51-29757378D5BB}"/>
-              </a:ext>
-            </a:extLst>
-          </p:cNvPr>
-          <p:cNvSpPr/>
-          <p:nvPr/>
-        </p:nvSpPr>
-        <p:spPr>
-          <a:xfrm>
-            <a:off x="2735908" y="6631447"/>
-            <a:ext cx="895415" cy="1236232"/>
-          </a:xfrm>
-          <a:prstGeom prst="roundRect">
-            <a:avLst>
-              <a:gd name="adj" fmla="val 1266"/>
-            </a:avLst>
-          </a:prstGeom>
-          <a:solidFill>
-            <a:schemeClr val="bg1"/>
-          </a:solidFill>
-          <a:ln>
-            <a:solidFill>
-              <a:schemeClr val="tx1">
-                <a:lumMod val="65000"/>
-                <a:lumOff val="35000"/>
-              </a:schemeClr>
-            </a:solidFill>
-          </a:ln>
-        </p:spPr>
-        <p:style>
-          <a:lnRef idx="1">
-            <a:schemeClr val="accent4"/>
-          </a:lnRef>
-          <a:fillRef idx="2">
-            <a:schemeClr val="accent4"/>
-          </a:fillRef>
-          <a:effectRef idx="1">
-            <a:schemeClr val="accent4"/>
-          </a:effectRef>
-          <a:fontRef idx="minor">
-            <a:schemeClr val="dk1"/>
-          </a:fontRef>
-        </p:style>
-        <p:txBody>
-          <a:bodyPr rtlCol="1" anchor="t"/>
-          <a:lstStyle/>
-          <a:p>
-            <a:pPr rtl="0"/>
-            <a:r>
-              <a:rPr lang="en-US" sz="1707" b="1" dirty="0">
-                <a:solidFill>
-                  <a:schemeClr val="bg1"/>
-                </a:solidFill>
-                <a:highlight>
-                  <a:srgbClr val="000000"/>
-                </a:highlight>
-              </a:rPr>
-              <a:t>N</a:t>
-            </a:r>
-            <a:r>
-              <a:rPr lang="en-US" sz="1280" b="1" dirty="0"/>
-              <a:t>otes</a:t>
-            </a:r>
-          </a:p>
-          <a:p>
-            <a:pPr rtl="0"/>
-            <a:r>
-              <a:rPr lang="en-US" sz="853" i="1">
-                <a:solidFill>
-                  <a:schemeClr val="accent5"/>
-                </a:solidFill>
-                <a:latin typeface="Segoe UI" panose="020B0502040204020203" pitchFamily="34" charset="0"/>
-                <a:cs typeface="Segoe UI" panose="020B0502040204020203" pitchFamily="34" charset="0"/>
-              </a:rPr>
-              <a:t>NoteId</a:t>
-            </a:r>
-          </a:p>
-          <a:p>
-            <a:pPr rtl="0"/>
-            <a:r>
-              <a:rPr lang="en-US" sz="853"/>
-              <a:t>ParentId</a:t>
-            </a:r>
-          </a:p>
-          <a:p>
-            <a:pPr rtl="0"/>
-            <a:r>
-              <a:rPr lang="en-US" sz="853"/>
-              <a:t>ParentType</a:t>
-            </a:r>
-          </a:p>
-          <a:p>
-            <a:pPr rtl="0"/>
-            <a:r>
-              <a:rPr lang="en-US" sz="853"/>
-              <a:t>NoteDatum</a:t>
-            </a:r>
-            <a:endParaRPr lang="en-US" sz="853" dirty="0"/>
-          </a:p>
-          <a:p>
-            <a:pPr rtl="0"/>
-            <a:r>
-              <a:rPr lang="en-US" sz="853"/>
-              <a:t>NoteText</a:t>
-            </a:r>
-            <a:endParaRPr lang="en-US" sz="853" dirty="0"/>
-          </a:p>
-          <a:p>
-            <a:pPr rtl="0"/>
-            <a:r>
-              <a:rPr lang="en-US" sz="853">
-                <a:solidFill>
-                  <a:srgbClr val="C00000"/>
-                </a:solidFill>
-              </a:rPr>
-              <a:t>NoteTags</a:t>
-            </a:r>
-          </a:p>
-          <a:p>
-            <a:pPr rtl="0"/>
-            <a:r>
-              <a:rPr lang="en-US" sz="853">
-                <a:solidFill>
-                  <a:schemeClr val="tx1"/>
-                </a:solidFill>
-                <a:highlight>
-                  <a:srgbClr val="FFFF00"/>
-                </a:highlight>
-              </a:rPr>
-              <a:t>CreatorId</a:t>
-            </a:r>
-            <a:endParaRPr lang="fa-IR" sz="853" dirty="0">
-              <a:solidFill>
-                <a:schemeClr val="tx1"/>
-              </a:solidFill>
-              <a:highlight>
-                <a:srgbClr val="FFFF00"/>
-              </a:highlight>
-            </a:endParaRPr>
+                <a:latin typeface="Consolas" panose="020B0609020204030204" pitchFamily="49" charset="0"/>
+                <a:ea typeface="Calibri" panose="020F0502020204030204" pitchFamily="34" charset="0"/>
+                <a:cs typeface="Calibri Light" panose="020F0302020204030204" pitchFamily="34" charset="0"/>
+              </a:rPr>
+              <a:t> 1:active</a:t>
+            </a:r>
           </a:p>
         </p:txBody>
       </p:sp>
@@ -7624,7 +7478,7 @@
         </p:nvSpPr>
         <p:spPr>
           <a:xfrm>
-            <a:off x="3482164" y="6264597"/>
+            <a:off x="3440149" y="6209602"/>
             <a:ext cx="909928" cy="721108"/>
           </a:xfrm>
           <a:prstGeom prst="roundRect">
@@ -7731,8 +7585,8 @@
         </p:nvSpPr>
         <p:spPr bwMode="auto">
           <a:xfrm>
-            <a:off x="1007716" y="7332621"/>
-            <a:ext cx="1683369" cy="1236232"/>
+            <a:off x="1796568" y="7479661"/>
+            <a:ext cx="1105070" cy="787849"/>
           </a:xfrm>
           <a:prstGeom prst="borderCallout2">
             <a:avLst>
@@ -7773,7 +7627,7 @@
               <a:buNone/>
             </a:pPr>
             <a:r>
-              <a:rPr lang="en-US" sz="853" kern="100">
+              <a:rPr lang="en-US" sz="500" kern="100">
                 <a:solidFill>
                   <a:schemeClr val="tx1"/>
                 </a:solidFill>
@@ -7781,7 +7635,7 @@
                 <a:ea typeface="Calibri" panose="020F0502020204030204" pitchFamily="34" charset="0"/>
                 <a:cs typeface="Calibri Light" panose="020F0302020204030204" pitchFamily="34" charset="0"/>
               </a:rPr>
-              <a:t>parentTypes:</a:t>
+              <a:t>NoteTypes:</a:t>
             </a:r>
           </a:p>
           <a:p>
@@ -7789,7 +7643,7 @@
               <a:buNone/>
             </a:pPr>
             <a:r>
-              <a:rPr lang="en-US" sz="853" kern="100">
+              <a:rPr lang="en-US" sz="500" kern="100">
                 <a:solidFill>
                   <a:schemeClr val="tx1"/>
                 </a:solidFill>
@@ -7797,7 +7651,7 @@
                 <a:ea typeface="Calibri" panose="020F0502020204030204" pitchFamily="34" charset="0"/>
                 <a:cs typeface="Calibri Light" panose="020F0302020204030204" pitchFamily="34" charset="0"/>
               </a:rPr>
-              <a:t> 1: quickNote by T</a:t>
+              <a:t> 1: S: quickNote</a:t>
             </a:r>
           </a:p>
           <a:p>
@@ -7805,7 +7659,7 @@
               <a:buNone/>
             </a:pPr>
             <a:r>
-              <a:rPr lang="en-US" sz="853" kern="100">
+              <a:rPr lang="en-US" sz="500" kern="100">
                 <a:solidFill>
                   <a:schemeClr val="tx1"/>
                 </a:solidFill>
@@ -7813,7 +7667,7 @@
                 <a:ea typeface="Calibri" panose="020F0502020204030204" pitchFamily="34" charset="0"/>
                 <a:cs typeface="Calibri Light" panose="020F0302020204030204" pitchFamily="34" charset="0"/>
               </a:rPr>
-              <a:t> 2: section Note</a:t>
+              <a:t> 2: S: sectionNote</a:t>
             </a:r>
           </a:p>
           <a:p>
@@ -7821,7 +7675,7 @@
               <a:buNone/>
             </a:pPr>
             <a:r>
-              <a:rPr lang="en-US" sz="853" kern="100">
+              <a:rPr lang="en-US" sz="500" kern="100">
                 <a:solidFill>
                   <a:schemeClr val="tx1"/>
                 </a:solidFill>
@@ -7829,7 +7683,7 @@
                 <a:ea typeface="Calibri" panose="020F0502020204030204" pitchFamily="34" charset="0"/>
                 <a:cs typeface="Calibri Light" panose="020F0302020204030204" pitchFamily="34" charset="0"/>
               </a:rPr>
-              <a:t> 3: note on Student</a:t>
+              <a:t>11: T: quickNote</a:t>
             </a:r>
           </a:p>
           <a:p>
@@ -7837,7 +7691,7 @@
               <a:buNone/>
             </a:pPr>
             <a:r>
-              <a:rPr lang="en-US" sz="853" kern="100">
+              <a:rPr lang="en-US" sz="500" kern="100">
                 <a:solidFill>
                   <a:schemeClr val="tx1"/>
                 </a:solidFill>
@@ -7845,7 +7699,7 @@
                 <a:ea typeface="Calibri" panose="020F0502020204030204" pitchFamily="34" charset="0"/>
                 <a:cs typeface="Calibri Light" panose="020F0302020204030204" pitchFamily="34" charset="0"/>
               </a:rPr>
-              <a:t> 4: note on Group</a:t>
+              <a:t>12: T: sectionNote</a:t>
             </a:r>
           </a:p>
           <a:p>
@@ -7853,7 +7707,7 @@
               <a:buNone/>
             </a:pPr>
             <a:r>
-              <a:rPr lang="en-US" sz="853" kern="100">
+              <a:rPr lang="en-US" sz="500" kern="100">
                 <a:solidFill>
                   <a:schemeClr val="tx1"/>
                 </a:solidFill>
@@ -7861,7 +7715,7 @@
                 <a:ea typeface="Calibri" panose="020F0502020204030204" pitchFamily="34" charset="0"/>
                 <a:cs typeface="Calibri Light" panose="020F0302020204030204" pitchFamily="34" charset="0"/>
               </a:rPr>
-              <a:t> 5: note on Course</a:t>
+              <a:t>13: T: note on Student</a:t>
             </a:r>
           </a:p>
           <a:p>
@@ -7869,7 +7723,7 @@
               <a:buNone/>
             </a:pPr>
             <a:r>
-              <a:rPr lang="en-US" sz="853" kern="100">
+              <a:rPr lang="en-US" sz="500" kern="100">
                 <a:solidFill>
                   <a:schemeClr val="tx1"/>
                 </a:solidFill>
@@ -7877,7 +7731,7 @@
                 <a:ea typeface="Calibri" panose="020F0502020204030204" pitchFamily="34" charset="0"/>
                 <a:cs typeface="Calibri Light" panose="020F0302020204030204" pitchFamily="34" charset="0"/>
               </a:rPr>
-              <a:t> 6: note on Exam</a:t>
+              <a:t>14: T: note on Group</a:t>
             </a:r>
           </a:p>
           <a:p>
@@ -7885,7 +7739,7 @@
               <a:buNone/>
             </a:pPr>
             <a:r>
-              <a:rPr lang="en-US" sz="853" kern="100">
+              <a:rPr lang="en-US" sz="500" kern="100">
                 <a:solidFill>
                   <a:schemeClr val="tx1"/>
                 </a:solidFill>
@@ -7893,7 +7747,7 @@
                 <a:ea typeface="Calibri" panose="020F0502020204030204" pitchFamily="34" charset="0"/>
                 <a:cs typeface="Calibri Light" panose="020F0302020204030204" pitchFamily="34" charset="0"/>
               </a:rPr>
-              <a:t> 7: quickNote by S</a:t>
+              <a:t>15: T: note on Course</a:t>
             </a:r>
           </a:p>
           <a:p>
@@ -7901,7 +7755,7 @@
               <a:buNone/>
             </a:pPr>
             <a:r>
-              <a:rPr lang="en-US" sz="853" kern="100">
+              <a:rPr lang="en-US" sz="500" kern="100">
                 <a:solidFill>
                   <a:schemeClr val="tx1"/>
                 </a:solidFill>
@@ -7909,7 +7763,23 @@
                 <a:ea typeface="Calibri" panose="020F0502020204030204" pitchFamily="34" charset="0"/>
                 <a:cs typeface="Calibri Light" panose="020F0302020204030204" pitchFamily="34" charset="0"/>
               </a:rPr>
-              <a:t> 8: note on Examstudents</a:t>
+              <a:t>16: T: note on Exam</a:t>
+            </a:r>
+          </a:p>
+          <a:p>
+            <a:pPr rtl="0">
+              <a:buNone/>
+            </a:pPr>
+            <a:r>
+              <a:rPr lang="en-US" sz="500" kern="100">
+                <a:solidFill>
+                  <a:schemeClr val="tx1"/>
+                </a:solidFill>
+                <a:latin typeface="Consolas" panose="020B0609020204030204" pitchFamily="49" charset="0"/>
+                <a:ea typeface="Calibri" panose="020F0502020204030204" pitchFamily="34" charset="0"/>
+                <a:cs typeface="Calibri Light" panose="020F0302020204030204" pitchFamily="34" charset="0"/>
+              </a:rPr>
+              <a:t>17: T: note on StudentExam</a:t>
             </a:r>
           </a:p>
         </p:txBody>
@@ -7928,8 +7798,8 @@
         </p:nvSpPr>
         <p:spPr bwMode="auto">
           <a:xfrm>
-            <a:off x="2833510" y="597669"/>
-            <a:ext cx="1182039" cy="1402919"/>
+            <a:off x="2794325" y="588887"/>
+            <a:ext cx="1516599" cy="1411701"/>
           </a:xfrm>
           <a:prstGeom prst="roundRect">
             <a:avLst>
@@ -8094,65 +7964,12 @@
               <a:t>ChatTags</a:t>
             </a:r>
           </a:p>
-        </p:txBody>
-      </p:sp>
-      <p:sp>
-        <p:nvSpPr>
-          <p:cNvPr id="19" name="Callout: Bent Line 18">
-            <a:extLst>
-              <a:ext uri="{FF2B5EF4-FFF2-40B4-BE49-F238E27FC236}">
-                <a16:creationId xmlns:a16="http://schemas.microsoft.com/office/drawing/2014/main" id="{911BC3D9-3D49-A426-849E-1055E8FBCA28}"/>
-              </a:ext>
-            </a:extLst>
-          </p:cNvPr>
-          <p:cNvSpPr/>
-          <p:nvPr/>
-        </p:nvSpPr>
-        <p:spPr bwMode="auto">
-          <a:xfrm>
-            <a:off x="779315" y="1829793"/>
-            <a:ext cx="2013126" cy="259346"/>
-          </a:xfrm>
-          <a:prstGeom prst="borderCallout2">
-            <a:avLst>
-              <a:gd name="adj1" fmla="val -1024"/>
-              <a:gd name="adj2" fmla="val 85567"/>
-              <a:gd name="adj3" fmla="val 366"/>
-              <a:gd name="adj4" fmla="val 82159"/>
-              <a:gd name="adj5" fmla="val 180"/>
-              <a:gd name="adj6" fmla="val 85711"/>
-            </a:avLst>
-          </a:prstGeom>
-          <a:noFill/>
-          <a:ln>
-            <a:prstDash val="dash"/>
-          </a:ln>
-        </p:spPr>
-        <p:style>
-          <a:lnRef idx="2">
-            <a:schemeClr val="accent1">
-              <a:shade val="15000"/>
-            </a:schemeClr>
-          </a:lnRef>
-          <a:fillRef idx="1">
-            <a:schemeClr val="accent1"/>
-          </a:fillRef>
-          <a:effectRef idx="0">
-            <a:schemeClr val="accent1"/>
-          </a:effectRef>
-          <a:fontRef idx="minor">
-            <a:schemeClr val="lt1"/>
-          </a:fontRef>
-        </p:style>
-        <p:txBody>
-          <a:bodyPr rtlCol="1" anchor="ctr"/>
-          <a:lstStyle/>
           <a:p>
             <a:pPr rtl="0">
-              <a:buNone/>
-            </a:pPr>
-            <a:r>
-              <a:rPr lang="en-US" sz="853" kern="100">
+              <a:defRPr/>
+            </a:pPr>
+            <a:r>
+              <a:rPr lang="en-US" sz="600" kern="100">
                 <a:solidFill>
                   <a:schemeClr val="tx1"/>
                 </a:solidFill>
@@ -8160,308 +7977,7 @@
                 <a:ea typeface="Calibri" panose="020F0502020204030204" pitchFamily="34" charset="0"/>
                 <a:cs typeface="Calibri Light" panose="020F0302020204030204" pitchFamily="34" charset="0"/>
               </a:rPr>
-              <a:t>ChatTags</a:t>
-            </a:r>
-          </a:p>
-          <a:p>
-            <a:pPr rtl="0">
-              <a:buNone/>
-            </a:pPr>
-            <a:r>
-              <a:rPr lang="en-US" sz="853" kern="100">
-                <a:solidFill>
-                  <a:schemeClr val="tx1"/>
-                </a:solidFill>
-                <a:latin typeface="Consolas" panose="020B0609020204030204" pitchFamily="49" charset="0"/>
-                <a:ea typeface="Calibri" panose="020F0502020204030204" pitchFamily="34" charset="0"/>
-                <a:cs typeface="Calibri Light" panose="020F0302020204030204" pitchFamily="34" charset="0"/>
-              </a:rPr>
               <a:t>1:Read 2:Imp 3:Bookmark 4:Del</a:t>
-            </a:r>
-          </a:p>
-        </p:txBody>
-      </p:sp>
-      <p:sp>
-        <p:nvSpPr>
-          <p:cNvPr id="20" name="Callout: Bent Line 19">
-            <a:extLst>
-              <a:ext uri="{FF2B5EF4-FFF2-40B4-BE49-F238E27FC236}">
-                <a16:creationId xmlns:a16="http://schemas.microsoft.com/office/drawing/2014/main" id="{12E24851-D7C0-662B-DDE1-34D282E94032}"/>
-              </a:ext>
-            </a:extLst>
-          </p:cNvPr>
-          <p:cNvSpPr/>
-          <p:nvPr/>
-        </p:nvSpPr>
-        <p:spPr bwMode="auto">
-          <a:xfrm>
-            <a:off x="2735908" y="7920781"/>
-            <a:ext cx="1584176" cy="620356"/>
-          </a:xfrm>
-          <a:prstGeom prst="borderCallout2">
-            <a:avLst>
-              <a:gd name="adj1" fmla="val -1024"/>
-              <a:gd name="adj2" fmla="val 85567"/>
-              <a:gd name="adj3" fmla="val 366"/>
-              <a:gd name="adj4" fmla="val 82159"/>
-              <a:gd name="adj5" fmla="val 180"/>
-              <a:gd name="adj6" fmla="val 85711"/>
-            </a:avLst>
-          </a:prstGeom>
-          <a:noFill/>
-          <a:ln>
-            <a:prstDash val="dash"/>
-          </a:ln>
-        </p:spPr>
-        <p:style>
-          <a:lnRef idx="2">
-            <a:schemeClr val="accent1">
-              <a:shade val="15000"/>
-            </a:schemeClr>
-          </a:lnRef>
-          <a:fillRef idx="1">
-            <a:schemeClr val="accent1"/>
-          </a:fillRef>
-          <a:effectRef idx="0">
-            <a:schemeClr val="accent1"/>
-          </a:effectRef>
-          <a:fontRef idx="minor">
-            <a:schemeClr val="lt1"/>
-          </a:fontRef>
-        </p:style>
-        <p:txBody>
-          <a:bodyPr rtlCol="1" anchor="ctr"/>
-          <a:lstStyle/>
-          <a:p>
-            <a:pPr rtl="0">
-              <a:buNone/>
-            </a:pPr>
-            <a:r>
-              <a:rPr lang="en-US" sz="853" kern="100">
-                <a:solidFill>
-                  <a:schemeClr val="tx1"/>
-                </a:solidFill>
-                <a:latin typeface="Consolas" panose="020B0609020204030204" pitchFamily="49" charset="0"/>
-                <a:ea typeface="Calibri" panose="020F0502020204030204" pitchFamily="34" charset="0"/>
-                <a:cs typeface="Calibri Light" panose="020F0302020204030204" pitchFamily="34" charset="0"/>
-              </a:rPr>
-              <a:t>NoteTags</a:t>
-            </a:r>
-          </a:p>
-          <a:p>
-            <a:pPr rtl="0">
-              <a:buNone/>
-            </a:pPr>
-            <a:r>
-              <a:rPr lang="en-US" sz="853" kern="100">
-                <a:solidFill>
-                  <a:schemeClr val="tx1"/>
-                </a:solidFill>
-                <a:latin typeface="Consolas" panose="020B0609020204030204" pitchFamily="49" charset="0"/>
-                <a:ea typeface="Calibri" panose="020F0502020204030204" pitchFamily="34" charset="0"/>
-                <a:cs typeface="Calibri Light" panose="020F0302020204030204" pitchFamily="34" charset="0"/>
-              </a:rPr>
-              <a:t> 1:rtl      2:done</a:t>
-            </a:r>
-          </a:p>
-          <a:p>
-            <a:pPr rtl="0">
-              <a:buNone/>
-            </a:pPr>
-            <a:r>
-              <a:rPr lang="en-US" sz="853" kern="100">
-                <a:solidFill>
-                  <a:schemeClr val="tx1"/>
-                </a:solidFill>
-                <a:latin typeface="Consolas" panose="020B0609020204030204" pitchFamily="49" charset="0"/>
-                <a:ea typeface="Calibri" panose="020F0502020204030204" pitchFamily="34" charset="0"/>
-                <a:cs typeface="Calibri Light" panose="020F0302020204030204" pitchFamily="34" charset="0"/>
-              </a:rPr>
-              <a:t> 4:shared   8:</a:t>
-            </a:r>
-            <a:r>
-              <a:rPr lang="en-US" sz="853" kern="100">
-                <a:solidFill>
-                  <a:srgbClr val="FF0000"/>
-                </a:solidFill>
-                <a:latin typeface="Consolas" panose="020B0609020204030204" pitchFamily="49" charset="0"/>
-                <a:ea typeface="Calibri" panose="020F0502020204030204" pitchFamily="34" charset="0"/>
-                <a:cs typeface="Calibri Light" panose="020F0302020204030204" pitchFamily="34" charset="0"/>
-              </a:rPr>
-              <a:t>readonly</a:t>
-            </a:r>
-            <a:endParaRPr lang="en-US" sz="853" kern="100">
-              <a:solidFill>
-                <a:schemeClr val="tx1"/>
-              </a:solidFill>
-              <a:latin typeface="Consolas" panose="020B0609020204030204" pitchFamily="49" charset="0"/>
-              <a:ea typeface="Calibri" panose="020F0502020204030204" pitchFamily="34" charset="0"/>
-              <a:cs typeface="Calibri Light" panose="020F0302020204030204" pitchFamily="34" charset="0"/>
-            </a:endParaRPr>
-          </a:p>
-          <a:p>
-            <a:pPr rtl="0">
-              <a:buNone/>
-            </a:pPr>
-            <a:r>
-              <a:rPr lang="en-US" sz="853" kern="100">
-                <a:solidFill>
-                  <a:schemeClr val="tx1"/>
-                </a:solidFill>
-                <a:latin typeface="Consolas" panose="020B0609020204030204" pitchFamily="49" charset="0"/>
-                <a:ea typeface="Calibri" panose="020F0502020204030204" pitchFamily="34" charset="0"/>
-                <a:cs typeface="Calibri Light" panose="020F0302020204030204" pitchFamily="34" charset="0"/>
-              </a:rPr>
-              <a:t> 16:S-Note?</a:t>
-            </a:r>
-          </a:p>
-        </p:txBody>
-      </p:sp>
-      <p:sp>
-        <p:nvSpPr>
-          <p:cNvPr id="24" name="Callout: Bent Line 23">
-            <a:extLst>
-              <a:ext uri="{FF2B5EF4-FFF2-40B4-BE49-F238E27FC236}">
-                <a16:creationId xmlns:a16="http://schemas.microsoft.com/office/drawing/2014/main" id="{5C54F825-3D0E-64C0-E121-67B6A937D248}"/>
-              </a:ext>
-            </a:extLst>
-          </p:cNvPr>
-          <p:cNvSpPr/>
-          <p:nvPr/>
-        </p:nvSpPr>
-        <p:spPr bwMode="auto">
-          <a:xfrm>
-            <a:off x="77984" y="7242193"/>
-            <a:ext cx="861549" cy="822604"/>
-          </a:xfrm>
-          <a:prstGeom prst="borderCallout2">
-            <a:avLst>
-              <a:gd name="adj1" fmla="val -1024"/>
-              <a:gd name="adj2" fmla="val 85567"/>
-              <a:gd name="adj3" fmla="val 366"/>
-              <a:gd name="adj4" fmla="val 82159"/>
-              <a:gd name="adj5" fmla="val 180"/>
-              <a:gd name="adj6" fmla="val 85711"/>
-            </a:avLst>
-          </a:prstGeom>
-          <a:noFill/>
-          <a:ln>
-            <a:prstDash val="dash"/>
-          </a:ln>
-        </p:spPr>
-        <p:style>
-          <a:lnRef idx="2">
-            <a:schemeClr val="accent1">
-              <a:shade val="15000"/>
-            </a:schemeClr>
-          </a:lnRef>
-          <a:fillRef idx="1">
-            <a:schemeClr val="accent1"/>
-          </a:fillRef>
-          <a:effectRef idx="0">
-            <a:schemeClr val="accent1"/>
-          </a:effectRef>
-          <a:fontRef idx="minor">
-            <a:schemeClr val="lt1"/>
-          </a:fontRef>
-        </p:style>
-        <p:txBody>
-          <a:bodyPr rtlCol="1" anchor="ctr"/>
-          <a:lstStyle/>
-          <a:p>
-            <a:pPr rtl="0">
-              <a:buNone/>
-            </a:pPr>
-            <a:r>
-              <a:rPr lang="en-US" sz="853" kern="100">
-                <a:solidFill>
-                  <a:schemeClr val="tx1"/>
-                </a:solidFill>
-                <a:latin typeface="Consolas" panose="020B0609020204030204" pitchFamily="49" charset="0"/>
-                <a:ea typeface="Calibri" panose="020F0502020204030204" pitchFamily="34" charset="0"/>
-                <a:cs typeface="Calibri Light" panose="020F0302020204030204" pitchFamily="34" charset="0"/>
-              </a:rPr>
-              <a:t>UserType</a:t>
-            </a:r>
-          </a:p>
-          <a:p>
-            <a:pPr rtl="0">
-              <a:buNone/>
-            </a:pPr>
-            <a:r>
-              <a:rPr lang="en-US" sz="853" kern="100">
-                <a:solidFill>
-                  <a:schemeClr val="tx1"/>
-                </a:solidFill>
-                <a:latin typeface="Consolas" panose="020B0609020204030204" pitchFamily="49" charset="0"/>
-                <a:ea typeface="Calibri" panose="020F0502020204030204" pitchFamily="34" charset="0"/>
-                <a:cs typeface="Calibri Light" panose="020F0302020204030204" pitchFamily="34" charset="0"/>
-              </a:rPr>
-              <a:t> 1:Teacher</a:t>
-            </a:r>
-          </a:p>
-          <a:p>
-            <a:pPr rtl="0">
-              <a:buNone/>
-            </a:pPr>
-            <a:r>
-              <a:rPr lang="en-US" sz="853" kern="100">
-                <a:solidFill>
-                  <a:schemeClr val="tx1"/>
-                </a:solidFill>
-                <a:latin typeface="Consolas" panose="020B0609020204030204" pitchFamily="49" charset="0"/>
-                <a:ea typeface="Calibri" panose="020F0502020204030204" pitchFamily="34" charset="0"/>
-                <a:cs typeface="Calibri Light" panose="020F0302020204030204" pitchFamily="34" charset="0"/>
-              </a:rPr>
-              <a:t> 2:Student</a:t>
-            </a:r>
-          </a:p>
-          <a:p>
-            <a:pPr rtl="0">
-              <a:buNone/>
-            </a:pPr>
-            <a:r>
-              <a:rPr lang="en-US" sz="853" kern="100">
-                <a:solidFill>
-                  <a:schemeClr val="tx1"/>
-                </a:solidFill>
-                <a:latin typeface="Consolas" panose="020B0609020204030204" pitchFamily="49" charset="0"/>
-                <a:ea typeface="Calibri" panose="020F0502020204030204" pitchFamily="34" charset="0"/>
-                <a:cs typeface="Calibri Light" panose="020F0302020204030204" pitchFamily="34" charset="0"/>
-              </a:rPr>
-              <a:t> </a:t>
-            </a:r>
-          </a:p>
-          <a:p>
-            <a:pPr rtl="0">
-              <a:buNone/>
-            </a:pPr>
-            <a:r>
-              <a:rPr lang="en-US" sz="853" kern="100">
-                <a:solidFill>
-                  <a:schemeClr val="tx1"/>
-                </a:solidFill>
-                <a:latin typeface="Consolas" panose="020B0609020204030204" pitchFamily="49" charset="0"/>
-                <a:ea typeface="Calibri" panose="020F0502020204030204" pitchFamily="34" charset="0"/>
-                <a:cs typeface="Calibri Light" panose="020F0302020204030204" pitchFamily="34" charset="0"/>
-              </a:rPr>
-              <a:t>ProjectTags</a:t>
-            </a:r>
-          </a:p>
-          <a:p>
-            <a:pPr rtl="0">
-              <a:buNone/>
-            </a:pPr>
-            <a:r>
-              <a:rPr lang="en-US" sz="853" kern="100">
-                <a:solidFill>
-                  <a:schemeClr val="tx1"/>
-                </a:solidFill>
-                <a:latin typeface="Consolas" panose="020B0609020204030204" pitchFamily="49" charset="0"/>
-                <a:ea typeface="Calibri" panose="020F0502020204030204" pitchFamily="34" charset="0"/>
-                <a:cs typeface="Calibri Light" panose="020F0302020204030204" pitchFamily="34" charset="0"/>
-              </a:rPr>
-              <a:t> 1:active</a:t>
             </a:r>
           </a:p>
         </p:txBody>
@@ -8816,9 +8332,9 @@
               <a:defRPr/>
             </a:pPr>
             <a:r>
-              <a:rPr lang="en-US" sz="800">
-                <a:solidFill>
-                  <a:schemeClr val="tx1"/>
+              <a:rPr lang="en-US" sz="500">
+                <a:solidFill>
+                  <a:srgbClr val="C00000"/>
                 </a:solidFill>
                 <a:latin typeface="Segoe UI" panose="020B0502040204020203" pitchFamily="34" charset="0"/>
                 <a:cs typeface="Segoe UI" panose="020B0502040204020203" pitchFamily="34" charset="0"/>
@@ -8831,9 +8347,9 @@
               <a:defRPr/>
             </a:pPr>
             <a:r>
-              <a:rPr lang="en-US" sz="800">
-                <a:solidFill>
-                  <a:schemeClr val="tx1"/>
+              <a:rPr lang="en-US" sz="500">
+                <a:solidFill>
+                  <a:srgbClr val="C00000"/>
                 </a:solidFill>
                 <a:latin typeface="Segoe UI" panose="020B0502040204020203" pitchFamily="34" charset="0"/>
                 <a:cs typeface="Segoe UI" panose="020B0502040204020203" pitchFamily="34" charset="0"/>
@@ -8846,14 +8362,219 @@
               <a:defRPr/>
             </a:pPr>
             <a:r>
-              <a:rPr lang="en-US" sz="800">
-                <a:solidFill>
-                  <a:schemeClr val="tx1"/>
+              <a:rPr lang="en-US" sz="500">
+                <a:solidFill>
+                  <a:srgbClr val="C00000"/>
                 </a:solidFill>
                 <a:latin typeface="Segoe UI" panose="020B0502040204020203" pitchFamily="34" charset="0"/>
                 <a:cs typeface="Segoe UI" panose="020B0502040204020203" pitchFamily="34" charset="0"/>
               </a:rPr>
               <a:t>  4:IsDeleted</a:t>
+            </a:r>
+          </a:p>
+        </p:txBody>
+      </p:sp>
+      <p:sp>
+        <p:nvSpPr>
+          <p:cNvPr id="2" name="Rectangle: Rounded Corners 1">
+            <a:extLst>
+              <a:ext uri="{FF2B5EF4-FFF2-40B4-BE49-F238E27FC236}">
+                <a16:creationId xmlns:a16="http://schemas.microsoft.com/office/drawing/2014/main" id="{6A0D2D6C-AD44-BFED-2D51-29757378D5BB}"/>
+              </a:ext>
+            </a:extLst>
+          </p:cNvPr>
+          <p:cNvSpPr/>
+          <p:nvPr/>
+        </p:nvSpPr>
+        <p:spPr>
+          <a:xfrm>
+            <a:off x="2735908" y="6417263"/>
+            <a:ext cx="895415" cy="1634612"/>
+          </a:xfrm>
+          <a:prstGeom prst="roundRect">
+            <a:avLst>
+              <a:gd name="adj" fmla="val 1266"/>
+            </a:avLst>
+          </a:prstGeom>
+          <a:solidFill>
+            <a:schemeClr val="bg1"/>
+          </a:solidFill>
+          <a:ln>
+            <a:solidFill>
+              <a:schemeClr val="tx1">
+                <a:lumMod val="65000"/>
+                <a:lumOff val="35000"/>
+              </a:schemeClr>
+            </a:solidFill>
+          </a:ln>
+        </p:spPr>
+        <p:style>
+          <a:lnRef idx="1">
+            <a:schemeClr val="accent4"/>
+          </a:lnRef>
+          <a:fillRef idx="2">
+            <a:schemeClr val="accent4"/>
+          </a:fillRef>
+          <a:effectRef idx="1">
+            <a:schemeClr val="accent4"/>
+          </a:effectRef>
+          <a:fontRef idx="minor">
+            <a:schemeClr val="dk1"/>
+          </a:fontRef>
+        </p:style>
+        <p:txBody>
+          <a:bodyPr rtlCol="1" anchor="t"/>
+          <a:lstStyle/>
+          <a:p>
+            <a:pPr rtl="0"/>
+            <a:r>
+              <a:rPr lang="en-US" sz="1707" b="1" dirty="0">
+                <a:solidFill>
+                  <a:schemeClr val="bg1"/>
+                </a:solidFill>
+                <a:highlight>
+                  <a:srgbClr val="000000"/>
+                </a:highlight>
+              </a:rPr>
+              <a:t>N</a:t>
+            </a:r>
+            <a:r>
+              <a:rPr lang="en-US" sz="1280" b="1" dirty="0"/>
+              <a:t>otes</a:t>
+            </a:r>
+          </a:p>
+          <a:p>
+            <a:pPr rtl="0"/>
+            <a:r>
+              <a:rPr lang="en-US" sz="853" i="1">
+                <a:solidFill>
+                  <a:schemeClr val="accent5"/>
+                </a:solidFill>
+                <a:latin typeface="Segoe UI" panose="020B0502040204020203" pitchFamily="34" charset="0"/>
+                <a:cs typeface="Segoe UI" panose="020B0502040204020203" pitchFamily="34" charset="0"/>
+              </a:rPr>
+              <a:t>NoteId</a:t>
+            </a:r>
+          </a:p>
+          <a:p>
+            <a:pPr rtl="0"/>
+            <a:r>
+              <a:rPr lang="en-US" sz="853"/>
+              <a:t>NoteType</a:t>
+            </a:r>
+          </a:p>
+          <a:p>
+            <a:pPr rtl="0"/>
+            <a:r>
+              <a:rPr lang="en-US" sz="853"/>
+              <a:t>ReferenceId</a:t>
+            </a:r>
+          </a:p>
+          <a:p>
+            <a:pPr rtl="0"/>
+            <a:r>
+              <a:rPr lang="en-US" sz="853"/>
+              <a:t>NoteDateTime</a:t>
+            </a:r>
+            <a:endParaRPr lang="en-US" sz="853" dirty="0"/>
+          </a:p>
+          <a:p>
+            <a:pPr rtl="0"/>
+            <a:r>
+              <a:rPr lang="en-US" sz="853"/>
+              <a:t>NoteText</a:t>
+            </a:r>
+            <a:endParaRPr lang="en-US" sz="853" dirty="0"/>
+          </a:p>
+          <a:p>
+            <a:pPr rtl="0"/>
+            <a:r>
+              <a:rPr lang="en-US" sz="853">
+                <a:solidFill>
+                  <a:schemeClr val="tx1"/>
+                </a:solidFill>
+              </a:rPr>
+              <a:t>CreatorId</a:t>
+            </a:r>
+            <a:endParaRPr lang="fa-IR" sz="853">
+              <a:solidFill>
+                <a:schemeClr val="tx1"/>
+              </a:solidFill>
+            </a:endParaRPr>
+          </a:p>
+          <a:p>
+            <a:pPr rtl="0"/>
+            <a:r>
+              <a:rPr lang="en-US" sz="853">
+                <a:solidFill>
+                  <a:schemeClr val="tx1"/>
+                </a:solidFill>
+              </a:rPr>
+              <a:t>NoteTags</a:t>
+            </a:r>
+          </a:p>
+          <a:p>
+            <a:pPr rtl="0">
+              <a:buNone/>
+            </a:pPr>
+            <a:r>
+              <a:rPr lang="en-US" sz="500" kern="100">
+                <a:solidFill>
+                  <a:srgbClr val="C00000"/>
+                </a:solidFill>
+                <a:latin typeface="Consolas" panose="020B0609020204030204" pitchFamily="49" charset="0"/>
+                <a:ea typeface="Calibri" panose="020F0502020204030204" pitchFamily="34" charset="0"/>
+                <a:cs typeface="Calibri Light" panose="020F0302020204030204" pitchFamily="34" charset="0"/>
+              </a:rPr>
+              <a:t> 1:IsRtl</a:t>
+            </a:r>
+          </a:p>
+          <a:p>
+            <a:pPr rtl="0">
+              <a:buNone/>
+            </a:pPr>
+            <a:r>
+              <a:rPr lang="en-US" sz="500" kern="100">
+                <a:solidFill>
+                  <a:srgbClr val="C00000"/>
+                </a:solidFill>
+                <a:latin typeface="Consolas" panose="020B0609020204030204" pitchFamily="49" charset="0"/>
+                <a:ea typeface="Calibri" panose="020F0502020204030204" pitchFamily="34" charset="0"/>
+                <a:cs typeface="Calibri Light" panose="020F0302020204030204" pitchFamily="34" charset="0"/>
+              </a:rPr>
+              <a:t> 2:IsDone</a:t>
+            </a:r>
+          </a:p>
+          <a:p>
+            <a:pPr rtl="0">
+              <a:buNone/>
+            </a:pPr>
+            <a:r>
+              <a:rPr lang="en-US" sz="500" kern="100">
+                <a:solidFill>
+                  <a:srgbClr val="C00000"/>
+                </a:solidFill>
+                <a:latin typeface="Consolas" panose="020B0609020204030204" pitchFamily="49" charset="0"/>
+                <a:ea typeface="Calibri" panose="020F0502020204030204" pitchFamily="34" charset="0"/>
+                <a:cs typeface="Calibri Light" panose="020F0302020204030204" pitchFamily="34" charset="0"/>
+              </a:rPr>
+              <a:t> 4:IsShared</a:t>
+            </a:r>
+          </a:p>
+          <a:p>
+            <a:pPr rtl="0">
+              <a:buNone/>
+            </a:pPr>
+            <a:r>
+              <a:rPr lang="en-US" sz="500" kern="100">
+                <a:solidFill>
+                  <a:srgbClr val="C00000"/>
+                </a:solidFill>
+                <a:latin typeface="Consolas" panose="020B0609020204030204" pitchFamily="49" charset="0"/>
+                <a:ea typeface="Calibri" panose="020F0502020204030204" pitchFamily="34" charset="0"/>
+                <a:cs typeface="Calibri Light" panose="020F0302020204030204" pitchFamily="34" charset="0"/>
+              </a:rPr>
+              <a:t> 8:IsReadonly</a:t>
             </a:r>
           </a:p>
         </p:txBody>

--- a/ExaminerB/.appCatalog/ExaminerB notes 1404.pptx
+++ b/ExaminerB/.appCatalog/ExaminerB notes 1404.pptx
@@ -280,7 +280,7 @@
             </a:pPr>
             <a:fld id="{BCC18F51-09EC-435C-A3BA-64A766E099C0}" type="datetimeFigureOut">
               <a:rPr lang="fa-IR"/>
-              <a:t>14/01/1448</a:t>
+              <a:t>15/01/1448</a:t>
             </a:fld>
             <a:endParaRPr/>
           </a:p>
@@ -459,7 +459,7 @@
             </a:pPr>
             <a:fld id="{BCC18F51-09EC-435C-A3BA-64A766E099C0}" type="datetimeFigureOut">
               <a:rPr lang="fa-IR"/>
-              <a:t>14/01/1448</a:t>
+              <a:t>15/01/1448</a:t>
             </a:fld>
             <a:endParaRPr/>
           </a:p>
@@ -648,7 +648,7 @@
             </a:pPr>
             <a:fld id="{BCC18F51-09EC-435C-A3BA-64A766E099C0}" type="datetimeFigureOut">
               <a:rPr lang="fa-IR"/>
-              <a:t>14/01/1448</a:t>
+              <a:t>15/01/1448</a:t>
             </a:fld>
             <a:endParaRPr/>
           </a:p>
@@ -827,7 +827,7 @@
             </a:pPr>
             <a:fld id="{BCC18F51-09EC-435C-A3BA-64A766E099C0}" type="datetimeFigureOut">
               <a:rPr lang="fa-IR"/>
-              <a:t>14/01/1448</a:t>
+              <a:t>15/01/1448</a:t>
             </a:fld>
             <a:endParaRPr/>
           </a:p>
@@ -1079,7 +1079,7 @@
             </a:pPr>
             <a:fld id="{BCC18F51-09EC-435C-A3BA-64A766E099C0}" type="datetimeFigureOut">
               <a:rPr lang="fa-IR"/>
-              <a:t>14/01/1448</a:t>
+              <a:t>15/01/1448</a:t>
             </a:fld>
             <a:endParaRPr/>
           </a:p>
@@ -1324,7 +1324,7 @@
             </a:pPr>
             <a:fld id="{BCC18F51-09EC-435C-A3BA-64A766E099C0}" type="datetimeFigureOut">
               <a:rPr lang="fa-IR"/>
-              <a:t>14/01/1448</a:t>
+              <a:t>15/01/1448</a:t>
             </a:fld>
             <a:endParaRPr/>
           </a:p>
@@ -1706,7 +1706,7 @@
             </a:pPr>
             <a:fld id="{BCC18F51-09EC-435C-A3BA-64A766E099C0}" type="datetimeFigureOut">
               <a:rPr lang="fa-IR"/>
-              <a:t>14/01/1448</a:t>
+              <a:t>15/01/1448</a:t>
             </a:fld>
             <a:endParaRPr/>
           </a:p>
@@ -1829,7 +1829,7 @@
             </a:pPr>
             <a:fld id="{BCC18F51-09EC-435C-A3BA-64A766E099C0}" type="datetimeFigureOut">
               <a:rPr lang="fa-IR"/>
-              <a:t>14/01/1448</a:t>
+              <a:t>15/01/1448</a:t>
             </a:fld>
             <a:endParaRPr/>
           </a:p>
@@ -1928,7 +1928,7 @@
             </a:pPr>
             <a:fld id="{BCC18F51-09EC-435C-A3BA-64A766E099C0}" type="datetimeFigureOut">
               <a:rPr lang="fa-IR"/>
-              <a:t>14/01/1448</a:t>
+              <a:t>15/01/1448</a:t>
             </a:fld>
             <a:endParaRPr/>
           </a:p>
@@ -2215,7 +2215,7 @@
             </a:pPr>
             <a:fld id="{BCC18F51-09EC-435C-A3BA-64A766E099C0}" type="datetimeFigureOut">
               <a:rPr lang="fa-IR"/>
-              <a:t>14/01/1448</a:t>
+              <a:t>15/01/1448</a:t>
             </a:fld>
             <a:endParaRPr/>
           </a:p>
@@ -2479,7 +2479,7 @@
             </a:pPr>
             <a:fld id="{BCC18F51-09EC-435C-A3BA-64A766E099C0}" type="datetimeFigureOut">
               <a:rPr lang="fa-IR"/>
-              <a:t>14/01/1448</a:t>
+              <a:t>15/01/1448</a:t>
             </a:fld>
             <a:endParaRPr/>
           </a:p>
@@ -2701,7 +2701,7 @@
             </a:pPr>
             <a:fld id="{BCC18F51-09EC-435C-A3BA-64A766E099C0}" type="datetimeFigureOut">
               <a:rPr lang="fa-IR"/>
-              <a:t>14/01/1448</a:t>
+              <a:t>15/01/1448</a:t>
             </a:fld>
             <a:endParaRPr/>
           </a:p>
@@ -3127,8 +3127,8 @@
         </p:nvSpPr>
         <p:spPr bwMode="auto">
           <a:xfrm>
-            <a:off x="1359989" y="3712531"/>
-            <a:ext cx="1757728" cy="2257737"/>
+            <a:off x="1359989" y="3712532"/>
+            <a:ext cx="1757728" cy="1831986"/>
           </a:xfrm>
           <a:prstGeom prst="roundRect">
             <a:avLst>
@@ -3430,7 +3430,7 @@
         <p:spPr bwMode="auto">
           <a:xfrm>
             <a:off x="9107253" y="359941"/>
-            <a:ext cx="1261503" cy="1338752"/>
+            <a:ext cx="1261503" cy="1756036"/>
           </a:xfrm>
           <a:prstGeom prst="roundRect">
             <a:avLst>
@@ -3590,7 +3590,7 @@
             </a:r>
           </a:p>
           <a:p>
-            <a:pPr rtl="0">
+            <a:pPr marL="90488" rtl="0">
               <a:defRPr/>
             </a:pPr>
             <a:r>
@@ -3601,7 +3601,127 @@
                 <a:latin typeface="Segoe UI" panose="020B0502040204020203" pitchFamily="34" charset="0"/>
                 <a:cs typeface="Segoe UI" panose="020B0502040204020203" pitchFamily="34" charset="0"/>
               </a:rPr>
-              <a:t>1: active</a:t>
+              <a:t>1: IsActive</a:t>
+            </a:r>
+          </a:p>
+          <a:p>
+            <a:pPr marL="90488" rtl="0">
+              <a:defRPr/>
+            </a:pPr>
+            <a:r>
+              <a:rPr lang="en-US" sz="500">
+                <a:solidFill>
+                  <a:srgbClr val="C00000"/>
+                </a:solidFill>
+                <a:latin typeface="Segoe UI" panose="020B0502040204020203" pitchFamily="34" charset="0"/>
+                <a:cs typeface="Segoe UI" panose="020B0502040204020203" pitchFamily="34" charset="0"/>
+              </a:rPr>
+              <a:t>2: ChangePass</a:t>
+            </a:r>
+          </a:p>
+          <a:p>
+            <a:pPr marL="90488" rtl="0">
+              <a:defRPr/>
+            </a:pPr>
+            <a:r>
+              <a:rPr lang="en-US" sz="500">
+                <a:solidFill>
+                  <a:srgbClr val="C00000"/>
+                </a:solidFill>
+                <a:latin typeface="Segoe UI" panose="020B0502040204020203" pitchFamily="34" charset="0"/>
+                <a:cs typeface="Segoe UI" panose="020B0502040204020203" pitchFamily="34" charset="0"/>
+              </a:rPr>
+              <a:t>4: -</a:t>
+            </a:r>
+          </a:p>
+          <a:p>
+            <a:pPr marL="90488" rtl="0">
+              <a:defRPr/>
+            </a:pPr>
+            <a:r>
+              <a:rPr lang="en-US" sz="500">
+                <a:solidFill>
+                  <a:srgbClr val="C00000"/>
+                </a:solidFill>
+                <a:latin typeface="Segoe UI" panose="020B0502040204020203" pitchFamily="34" charset="0"/>
+                <a:cs typeface="Segoe UI" panose="020B0502040204020203" pitchFamily="34" charset="0"/>
+              </a:rPr>
+              <a:t>8: -</a:t>
+            </a:r>
+          </a:p>
+          <a:p>
+            <a:pPr marL="90488" rtl="0">
+              <a:defRPr/>
+            </a:pPr>
+            <a:r>
+              <a:rPr lang="en-US" sz="500">
+                <a:solidFill>
+                  <a:srgbClr val="C00000"/>
+                </a:solidFill>
+                <a:latin typeface="Segoe UI" panose="020B0502040204020203" pitchFamily="34" charset="0"/>
+                <a:cs typeface="Segoe UI" panose="020B0502040204020203" pitchFamily="34" charset="0"/>
+              </a:rPr>
+              <a:t>16: -</a:t>
+            </a:r>
+          </a:p>
+          <a:p>
+            <a:pPr marL="90488" rtl="0">
+              <a:defRPr/>
+            </a:pPr>
+            <a:r>
+              <a:rPr lang="en-US" sz="500">
+                <a:solidFill>
+                  <a:srgbClr val="C00000"/>
+                </a:solidFill>
+                <a:latin typeface="Segoe UI" panose="020B0502040204020203" pitchFamily="34" charset="0"/>
+                <a:cs typeface="Segoe UI" panose="020B0502040204020203" pitchFamily="34" charset="0"/>
+              </a:rPr>
+              <a:t>32: -</a:t>
+            </a:r>
+          </a:p>
+          <a:p>
+            <a:pPr marL="90488" rtl="0">
+              <a:defRPr/>
+            </a:pPr>
+            <a:r>
+              <a:rPr lang="en-US" sz="500">
+                <a:solidFill>
+                  <a:srgbClr val="C00000"/>
+                </a:solidFill>
+                <a:latin typeface="Segoe UI" panose="020B0502040204020203" pitchFamily="34" charset="0"/>
+                <a:cs typeface="Segoe UI" panose="020B0502040204020203" pitchFamily="34" charset="0"/>
+              </a:rPr>
+              <a:t>64: -</a:t>
+            </a:r>
+          </a:p>
+          <a:p>
+            <a:pPr marL="90488" rtl="0">
+              <a:defRPr/>
+            </a:pPr>
+            <a:r>
+              <a:rPr lang="en-US" sz="500">
+                <a:solidFill>
+                  <a:srgbClr val="C00000"/>
+                </a:solidFill>
+                <a:latin typeface="Segoe UI" panose="020B0502040204020203" pitchFamily="34" charset="0"/>
+                <a:cs typeface="Segoe UI" panose="020B0502040204020203" pitchFamily="34" charset="0"/>
+              </a:rPr>
+              <a:t>128: -</a:t>
+            </a:r>
+          </a:p>
+          <a:p>
+            <a:pPr marL="90488" rtl="0">
+              <a:defRPr/>
+            </a:pPr>
+            <a:r>
+              <a:rPr lang="en-US" sz="500">
+                <a:solidFill>
+                  <a:srgbClr val="C00000"/>
+                </a:solidFill>
+                <a:latin typeface="Segoe UI" panose="020B0502040204020203" pitchFamily="34" charset="0"/>
+                <a:cs typeface="Segoe UI" panose="020B0502040204020203" pitchFamily="34" charset="0"/>
+              </a:rPr>
+              <a:t>256: CalendarFa</a:t>
             </a:r>
           </a:p>
           <a:p>
@@ -4688,8 +4808,8 @@
         </p:nvSpPr>
         <p:spPr bwMode="auto">
           <a:xfrm>
-            <a:off x="2817830" y="4327039"/>
-            <a:ext cx="1182039" cy="1349000"/>
+            <a:off x="2794325" y="4552520"/>
+            <a:ext cx="1182039" cy="1199659"/>
           </a:xfrm>
           <a:prstGeom prst="roundRect">
             <a:avLst>

--- a/ExaminerB/.appCatalog/ExaminerB notes 1404.pptx
+++ b/ExaminerB/.appCatalog/ExaminerB notes 1404.pptx
@@ -280,7 +280,7 @@
             </a:pPr>
             <a:fld id="{BCC18F51-09EC-435C-A3BA-64A766E099C0}" type="datetimeFigureOut">
               <a:rPr lang="fa-IR"/>
-              <a:t>15/01/1448</a:t>
+              <a:t>18/01/1448</a:t>
             </a:fld>
             <a:endParaRPr/>
           </a:p>
@@ -459,7 +459,7 @@
             </a:pPr>
             <a:fld id="{BCC18F51-09EC-435C-A3BA-64A766E099C0}" type="datetimeFigureOut">
               <a:rPr lang="fa-IR"/>
-              <a:t>15/01/1448</a:t>
+              <a:t>18/01/1448</a:t>
             </a:fld>
             <a:endParaRPr/>
           </a:p>
@@ -648,7 +648,7 @@
             </a:pPr>
             <a:fld id="{BCC18F51-09EC-435C-A3BA-64A766E099C0}" type="datetimeFigureOut">
               <a:rPr lang="fa-IR"/>
-              <a:t>15/01/1448</a:t>
+              <a:t>18/01/1448</a:t>
             </a:fld>
             <a:endParaRPr/>
           </a:p>
@@ -827,7 +827,7 @@
             </a:pPr>
             <a:fld id="{BCC18F51-09EC-435C-A3BA-64A766E099C0}" type="datetimeFigureOut">
               <a:rPr lang="fa-IR"/>
-              <a:t>15/01/1448</a:t>
+              <a:t>18/01/1448</a:t>
             </a:fld>
             <a:endParaRPr/>
           </a:p>
@@ -1079,7 +1079,7 @@
             </a:pPr>
             <a:fld id="{BCC18F51-09EC-435C-A3BA-64A766E099C0}" type="datetimeFigureOut">
               <a:rPr lang="fa-IR"/>
-              <a:t>15/01/1448</a:t>
+              <a:t>18/01/1448</a:t>
             </a:fld>
             <a:endParaRPr/>
           </a:p>
@@ -1324,7 +1324,7 @@
             </a:pPr>
             <a:fld id="{BCC18F51-09EC-435C-A3BA-64A766E099C0}" type="datetimeFigureOut">
               <a:rPr lang="fa-IR"/>
-              <a:t>15/01/1448</a:t>
+              <a:t>18/01/1448</a:t>
             </a:fld>
             <a:endParaRPr/>
           </a:p>
@@ -1706,7 +1706,7 @@
             </a:pPr>
             <a:fld id="{BCC18F51-09EC-435C-A3BA-64A766E099C0}" type="datetimeFigureOut">
               <a:rPr lang="fa-IR"/>
-              <a:t>15/01/1448</a:t>
+              <a:t>18/01/1448</a:t>
             </a:fld>
             <a:endParaRPr/>
           </a:p>
@@ -1829,7 +1829,7 @@
             </a:pPr>
             <a:fld id="{BCC18F51-09EC-435C-A3BA-64A766E099C0}" type="datetimeFigureOut">
               <a:rPr lang="fa-IR"/>
-              <a:t>15/01/1448</a:t>
+              <a:t>18/01/1448</a:t>
             </a:fld>
             <a:endParaRPr/>
           </a:p>
@@ -1928,7 +1928,7 @@
             </a:pPr>
             <a:fld id="{BCC18F51-09EC-435C-A3BA-64A766E099C0}" type="datetimeFigureOut">
               <a:rPr lang="fa-IR"/>
-              <a:t>15/01/1448</a:t>
+              <a:t>18/01/1448</a:t>
             </a:fld>
             <a:endParaRPr/>
           </a:p>
@@ -2215,7 +2215,7 @@
             </a:pPr>
             <a:fld id="{BCC18F51-09EC-435C-A3BA-64A766E099C0}" type="datetimeFigureOut">
               <a:rPr lang="fa-IR"/>
-              <a:t>15/01/1448</a:t>
+              <a:t>18/01/1448</a:t>
             </a:fld>
             <a:endParaRPr/>
           </a:p>
@@ -2479,7 +2479,7 @@
             </a:pPr>
             <a:fld id="{BCC18F51-09EC-435C-A3BA-64A766E099C0}" type="datetimeFigureOut">
               <a:rPr lang="fa-IR"/>
-              <a:t>15/01/1448</a:t>
+              <a:t>18/01/1448</a:t>
             </a:fld>
             <a:endParaRPr/>
           </a:p>
@@ -2701,7 +2701,7 @@
             </a:pPr>
             <a:fld id="{BCC18F51-09EC-435C-A3BA-64A766E099C0}" type="datetimeFigureOut">
               <a:rPr lang="fa-IR"/>
-              <a:t>15/01/1448</a:t>
+              <a:t>18/01/1448</a:t>
             </a:fld>
             <a:endParaRPr/>
           </a:p>
@@ -3127,8 +3127,8 @@
         </p:nvSpPr>
         <p:spPr bwMode="auto">
           <a:xfrm>
-            <a:off x="1359989" y="3712532"/>
-            <a:ext cx="1757728" cy="1831986"/>
+            <a:off x="1359989" y="3928228"/>
+            <a:ext cx="1757728" cy="1759977"/>
           </a:xfrm>
           <a:prstGeom prst="roundRect">
             <a:avLst>
@@ -3395,7 +3395,7 @@
         </p:blipFill>
         <p:spPr>
           <a:xfrm>
-            <a:off x="10368756" y="8280821"/>
+            <a:off x="99748" y="8109307"/>
             <a:ext cx="1037872" cy="236733"/>
           </a:xfrm>
           <a:prstGeom prst="rect">
@@ -3417,329 +3417,6 @@
       </p:pic>
       <p:sp>
         <p:nvSpPr>
-          <p:cNvPr id="23" name="Rectangle: Rounded Corners 44">
-            <a:extLst>
-              <a:ext uri="{FF2B5EF4-FFF2-40B4-BE49-F238E27FC236}">
-                <a16:creationId xmlns:a16="http://schemas.microsoft.com/office/drawing/2014/main" id="{60EEA583-4825-92D1-3BD6-2EFF827734DE}"/>
-              </a:ext>
-            </a:extLst>
-          </p:cNvPr>
-          <p:cNvSpPr/>
-          <p:nvPr/>
-        </p:nvSpPr>
-        <p:spPr bwMode="auto">
-          <a:xfrm>
-            <a:off x="9107253" y="359941"/>
-            <a:ext cx="1261503" cy="1756036"/>
-          </a:xfrm>
-          <a:prstGeom prst="roundRect">
-            <a:avLst>
-              <a:gd name="adj" fmla="val 9941"/>
-            </a:avLst>
-          </a:prstGeom>
-          <a:solidFill>
-            <a:schemeClr val="bg1"/>
-          </a:solidFill>
-          <a:ln>
-            <a:solidFill>
-              <a:schemeClr val="tx1"/>
-            </a:solidFill>
-          </a:ln>
-          <a:effectLst/>
-        </p:spPr>
-        <p:style>
-          <a:lnRef idx="0">
-            <a:schemeClr val="accent4"/>
-          </a:lnRef>
-          <a:fillRef idx="3">
-            <a:schemeClr val="accent4"/>
-          </a:fillRef>
-          <a:effectRef idx="3">
-            <a:schemeClr val="accent4"/>
-          </a:effectRef>
-          <a:fontRef idx="minor">
-            <a:schemeClr val="lt1"/>
-          </a:fontRef>
-        </p:style>
-        <p:txBody>
-          <a:bodyPr rtlCol="1" anchor="ctr"/>
-          <a:lstStyle/>
-          <a:p>
-            <a:pPr rtl="0">
-              <a:defRPr/>
-            </a:pPr>
-            <a:r>
-              <a:rPr lang="en-US" sz="1707" b="1">
-                <a:solidFill>
-                  <a:schemeClr val="bg1"/>
-                </a:solidFill>
-                <a:highlight>
-                  <a:srgbClr val="008080"/>
-                </a:highlight>
-                <a:latin typeface="Segoe UI" panose="020B0502040204020203" pitchFamily="34" charset="0"/>
-                <a:cs typeface="Segoe UI" panose="020B0502040204020203" pitchFamily="34" charset="0"/>
-              </a:rPr>
-              <a:t>U</a:t>
-            </a:r>
-          </a:p>
-          <a:p>
-            <a:pPr rtl="0">
-              <a:defRPr/>
-            </a:pPr>
-            <a:r>
-              <a:rPr lang="en-US" sz="1280" b="1">
-                <a:solidFill>
-                  <a:schemeClr val="tx1"/>
-                </a:solidFill>
-                <a:latin typeface="Segoe UI" panose="020B0502040204020203" pitchFamily="34" charset="0"/>
-                <a:cs typeface="Segoe UI" panose="020B0502040204020203" pitchFamily="34" charset="0"/>
-              </a:rPr>
-              <a:t>usrs</a:t>
-            </a:r>
-            <a:endParaRPr sz="1280">
-              <a:solidFill>
-                <a:schemeClr val="tx1"/>
-              </a:solidFill>
-              <a:latin typeface="Segoe UI" panose="020B0502040204020203" pitchFamily="34" charset="0"/>
-              <a:cs typeface="Segoe UI" panose="020B0502040204020203" pitchFamily="34" charset="0"/>
-            </a:endParaRPr>
-          </a:p>
-          <a:p>
-            <a:pPr rtl="0">
-              <a:defRPr/>
-            </a:pPr>
-            <a:r>
-              <a:rPr lang="en-US" sz="853" i="1">
-                <a:solidFill>
-                  <a:schemeClr val="accent5"/>
-                </a:solidFill>
-                <a:latin typeface="Segoe UI" panose="020B0502040204020203" pitchFamily="34" charset="0"/>
-                <a:cs typeface="Segoe UI" panose="020B0502040204020203" pitchFamily="34" charset="0"/>
-              </a:rPr>
-              <a:t>UsrId</a:t>
-            </a:r>
-          </a:p>
-          <a:p>
-            <a:pPr rtl="0">
-              <a:defRPr/>
-            </a:pPr>
-            <a:r>
-              <a:rPr lang="en-US" sz="853">
-                <a:solidFill>
-                  <a:schemeClr val="tx1"/>
-                </a:solidFill>
-                <a:latin typeface="Segoe UI" panose="020B0502040204020203" pitchFamily="34" charset="0"/>
-                <a:cs typeface="Segoe UI" panose="020B0502040204020203" pitchFamily="34" charset="0"/>
-              </a:rPr>
-              <a:t>UsrName</a:t>
-            </a:r>
-          </a:p>
-          <a:p>
-            <a:pPr rtl="0">
-              <a:defRPr/>
-            </a:pPr>
-            <a:r>
-              <a:rPr lang="en-US" sz="853">
-                <a:solidFill>
-                  <a:schemeClr val="tx1"/>
-                </a:solidFill>
-                <a:latin typeface="Segoe UI" panose="020B0502040204020203" pitchFamily="34" charset="0"/>
-                <a:cs typeface="Segoe UI" panose="020B0502040204020203" pitchFamily="34" charset="0"/>
-              </a:rPr>
-              <a:t>UsrPass</a:t>
-            </a:r>
-          </a:p>
-          <a:p>
-            <a:pPr rtl="0">
-              <a:defRPr/>
-            </a:pPr>
-            <a:r>
-              <a:rPr lang="en-US" sz="853">
-                <a:solidFill>
-                  <a:schemeClr val="tx1"/>
-                </a:solidFill>
-                <a:latin typeface="Segoe UI" panose="020B0502040204020203" pitchFamily="34" charset="0"/>
-                <a:cs typeface="Segoe UI" panose="020B0502040204020203" pitchFamily="34" charset="0"/>
-              </a:rPr>
-              <a:t>UsrNickname</a:t>
-            </a:r>
-          </a:p>
-          <a:p>
-            <a:pPr rtl="0">
-              <a:defRPr/>
-            </a:pPr>
-            <a:r>
-              <a:rPr lang="en-US" sz="853">
-                <a:solidFill>
-                  <a:schemeClr val="tx1"/>
-                </a:solidFill>
-                <a:latin typeface="Segoe UI" panose="020B0502040204020203" pitchFamily="34" charset="0"/>
-                <a:cs typeface="Segoe UI" panose="020B0502040204020203" pitchFamily="34" charset="0"/>
-              </a:rPr>
-              <a:t>UsrTags</a:t>
-            </a:r>
-            <a:r>
-              <a:rPr lang="en-US" sz="853">
-                <a:solidFill>
-                  <a:srgbClr val="C00000"/>
-                </a:solidFill>
-                <a:latin typeface="Segoe UI" panose="020B0502040204020203" pitchFamily="34" charset="0"/>
-                <a:cs typeface="Segoe UI" panose="020B0502040204020203" pitchFamily="34" charset="0"/>
-              </a:rPr>
-              <a:t> </a:t>
-            </a:r>
-          </a:p>
-          <a:p>
-            <a:pPr marL="90488" rtl="0">
-              <a:defRPr/>
-            </a:pPr>
-            <a:r>
-              <a:rPr lang="en-US" sz="500">
-                <a:solidFill>
-                  <a:srgbClr val="C00000"/>
-                </a:solidFill>
-                <a:latin typeface="Segoe UI" panose="020B0502040204020203" pitchFamily="34" charset="0"/>
-                <a:cs typeface="Segoe UI" panose="020B0502040204020203" pitchFamily="34" charset="0"/>
-              </a:rPr>
-              <a:t>1: IsActive</a:t>
-            </a:r>
-          </a:p>
-          <a:p>
-            <a:pPr marL="90488" rtl="0">
-              <a:defRPr/>
-            </a:pPr>
-            <a:r>
-              <a:rPr lang="en-US" sz="500">
-                <a:solidFill>
-                  <a:srgbClr val="C00000"/>
-                </a:solidFill>
-                <a:latin typeface="Segoe UI" panose="020B0502040204020203" pitchFamily="34" charset="0"/>
-                <a:cs typeface="Segoe UI" panose="020B0502040204020203" pitchFamily="34" charset="0"/>
-              </a:rPr>
-              <a:t>2: ChangePass</a:t>
-            </a:r>
-          </a:p>
-          <a:p>
-            <a:pPr marL="90488" rtl="0">
-              <a:defRPr/>
-            </a:pPr>
-            <a:r>
-              <a:rPr lang="en-US" sz="500">
-                <a:solidFill>
-                  <a:srgbClr val="C00000"/>
-                </a:solidFill>
-                <a:latin typeface="Segoe UI" panose="020B0502040204020203" pitchFamily="34" charset="0"/>
-                <a:cs typeface="Segoe UI" panose="020B0502040204020203" pitchFamily="34" charset="0"/>
-              </a:rPr>
-              <a:t>4: -</a:t>
-            </a:r>
-          </a:p>
-          <a:p>
-            <a:pPr marL="90488" rtl="0">
-              <a:defRPr/>
-            </a:pPr>
-            <a:r>
-              <a:rPr lang="en-US" sz="500">
-                <a:solidFill>
-                  <a:srgbClr val="C00000"/>
-                </a:solidFill>
-                <a:latin typeface="Segoe UI" panose="020B0502040204020203" pitchFamily="34" charset="0"/>
-                <a:cs typeface="Segoe UI" panose="020B0502040204020203" pitchFamily="34" charset="0"/>
-              </a:rPr>
-              <a:t>8: -</a:t>
-            </a:r>
-          </a:p>
-          <a:p>
-            <a:pPr marL="90488" rtl="0">
-              <a:defRPr/>
-            </a:pPr>
-            <a:r>
-              <a:rPr lang="en-US" sz="500">
-                <a:solidFill>
-                  <a:srgbClr val="C00000"/>
-                </a:solidFill>
-                <a:latin typeface="Segoe UI" panose="020B0502040204020203" pitchFamily="34" charset="0"/>
-                <a:cs typeface="Segoe UI" panose="020B0502040204020203" pitchFamily="34" charset="0"/>
-              </a:rPr>
-              <a:t>16: -</a:t>
-            </a:r>
-          </a:p>
-          <a:p>
-            <a:pPr marL="90488" rtl="0">
-              <a:defRPr/>
-            </a:pPr>
-            <a:r>
-              <a:rPr lang="en-US" sz="500">
-                <a:solidFill>
-                  <a:srgbClr val="C00000"/>
-                </a:solidFill>
-                <a:latin typeface="Segoe UI" panose="020B0502040204020203" pitchFamily="34" charset="0"/>
-                <a:cs typeface="Segoe UI" panose="020B0502040204020203" pitchFamily="34" charset="0"/>
-              </a:rPr>
-              <a:t>32: -</a:t>
-            </a:r>
-          </a:p>
-          <a:p>
-            <a:pPr marL="90488" rtl="0">
-              <a:defRPr/>
-            </a:pPr>
-            <a:r>
-              <a:rPr lang="en-US" sz="500">
-                <a:solidFill>
-                  <a:srgbClr val="C00000"/>
-                </a:solidFill>
-                <a:latin typeface="Segoe UI" panose="020B0502040204020203" pitchFamily="34" charset="0"/>
-                <a:cs typeface="Segoe UI" panose="020B0502040204020203" pitchFamily="34" charset="0"/>
-              </a:rPr>
-              <a:t>64: -</a:t>
-            </a:r>
-          </a:p>
-          <a:p>
-            <a:pPr marL="90488" rtl="0">
-              <a:defRPr/>
-            </a:pPr>
-            <a:r>
-              <a:rPr lang="en-US" sz="500">
-                <a:solidFill>
-                  <a:srgbClr val="C00000"/>
-                </a:solidFill>
-                <a:latin typeface="Segoe UI" panose="020B0502040204020203" pitchFamily="34" charset="0"/>
-                <a:cs typeface="Segoe UI" panose="020B0502040204020203" pitchFamily="34" charset="0"/>
-              </a:rPr>
-              <a:t>128: -</a:t>
-            </a:r>
-          </a:p>
-          <a:p>
-            <a:pPr marL="90488" rtl="0">
-              <a:defRPr/>
-            </a:pPr>
-            <a:r>
-              <a:rPr lang="en-US" sz="500">
-                <a:solidFill>
-                  <a:srgbClr val="C00000"/>
-                </a:solidFill>
-                <a:latin typeface="Segoe UI" panose="020B0502040204020203" pitchFamily="34" charset="0"/>
-                <a:cs typeface="Segoe UI" panose="020B0502040204020203" pitchFamily="34" charset="0"/>
-              </a:rPr>
-              <a:t>256: CalendarFa</a:t>
-            </a:r>
-          </a:p>
-          <a:p>
-            <a:pPr rtl="0">
-              <a:defRPr/>
-            </a:pPr>
-            <a:endParaRPr lang="en-US" sz="500">
-              <a:solidFill>
-                <a:srgbClr val="C00000"/>
-              </a:solidFill>
-              <a:latin typeface="Segoe UI" panose="020B0502040204020203" pitchFamily="34" charset="0"/>
-              <a:cs typeface="Segoe UI" panose="020B0502040204020203" pitchFamily="34" charset="0"/>
-            </a:endParaRPr>
-          </a:p>
-        </p:txBody>
-      </p:sp>
-      <p:sp>
-        <p:nvSpPr>
           <p:cNvPr id="8" name="Rectangle: Rounded Corners 18">
             <a:extLst>
               <a:ext uri="{FF2B5EF4-FFF2-40B4-BE49-F238E27FC236}">
@@ -3752,8 +3429,8 @@
         </p:nvSpPr>
         <p:spPr bwMode="auto">
           <a:xfrm>
-            <a:off x="4511934" y="894865"/>
-            <a:ext cx="1824374" cy="1059998"/>
+            <a:off x="4398629" y="1152028"/>
+            <a:ext cx="1937679" cy="1179645"/>
           </a:xfrm>
           <a:prstGeom prst="roundRect">
             <a:avLst>
@@ -3873,6 +3550,30 @@
               <a:t>CourseTopicTitle</a:t>
             </a:r>
           </a:p>
+          <a:p>
+            <a:pPr rtl="0">
+              <a:defRPr/>
+            </a:pPr>
+            <a:endParaRPr lang="en-US" sz="853">
+              <a:solidFill>
+                <a:schemeClr val="tx1"/>
+              </a:solidFill>
+              <a:latin typeface="Segoe UI" panose="020B0502040204020203" pitchFamily="34" charset="0"/>
+              <a:cs typeface="Segoe UI" panose="020B0502040204020203" pitchFamily="34" charset="0"/>
+            </a:endParaRPr>
+          </a:p>
+          <a:p>
+            <a:pPr rtl="0">
+              <a:defRPr/>
+            </a:pPr>
+            <a:endParaRPr lang="en-US" sz="853">
+              <a:solidFill>
+                <a:schemeClr val="tx1"/>
+              </a:solidFill>
+              <a:latin typeface="Segoe UI" panose="020B0502040204020203" pitchFamily="34" charset="0"/>
+              <a:cs typeface="Segoe UI" panose="020B0502040204020203" pitchFamily="34" charset="0"/>
+            </a:endParaRPr>
+          </a:p>
         </p:txBody>
       </p:sp>
       <p:sp>
@@ -3889,7 +3590,7 @@
         </p:nvSpPr>
         <p:spPr bwMode="auto">
           <a:xfrm>
-            <a:off x="8050056" y="2944397"/>
+            <a:off x="8050056" y="3160093"/>
             <a:ext cx="2065492" cy="2435984"/>
           </a:xfrm>
           <a:prstGeom prst="roundRect">
@@ -4133,8 +3834,8 @@
         </p:nvSpPr>
         <p:spPr bwMode="auto">
           <a:xfrm>
-            <a:off x="9979322" y="3652993"/>
-            <a:ext cx="1261502" cy="1387474"/>
+            <a:off x="9792692" y="3888333"/>
+            <a:ext cx="1261502" cy="1243452"/>
           </a:xfrm>
           <a:prstGeom prst="roundRect">
             <a:avLst>
@@ -4323,8 +4024,8 @@
         </p:nvSpPr>
         <p:spPr bwMode="auto">
           <a:xfrm>
-            <a:off x="4686211" y="6369915"/>
-            <a:ext cx="1722105" cy="1226651"/>
+            <a:off x="4686211" y="6480621"/>
+            <a:ext cx="1722105" cy="1190826"/>
           </a:xfrm>
           <a:prstGeom prst="roundRect">
             <a:avLst>
@@ -4500,8 +4201,8 @@
         </p:nvSpPr>
         <p:spPr bwMode="auto">
           <a:xfrm>
-            <a:off x="3860208" y="2944397"/>
-            <a:ext cx="1855656" cy="2144040"/>
+            <a:off x="3860208" y="3160092"/>
+            <a:ext cx="1855656" cy="2078683"/>
           </a:xfrm>
           <a:prstGeom prst="roundRect">
             <a:avLst>
@@ -4589,208 +4290,228 @@
               </a:rPr>
               <a:t>StudentId</a:t>
             </a:r>
-            <a:endParaRPr lang="en-US" sz="853">
+          </a:p>
+          <a:p>
+            <a:pPr marL="189651" rtl="0">
+              <a:defRPr/>
+            </a:pPr>
+            <a:r>
+              <a:rPr lang="en-US" sz="853">
+                <a:solidFill>
+                  <a:schemeClr val="tx1"/>
+                </a:solidFill>
+                <a:latin typeface="Segoe UI" panose="020B0502040204020203" pitchFamily="34" charset="0"/>
+                <a:cs typeface="Segoe UI" panose="020B0502040204020203" pitchFamily="34" charset="0"/>
+              </a:rPr>
+              <a:t>DepartmentId</a:t>
+            </a:r>
+          </a:p>
+          <a:p>
+            <a:pPr marL="189651" rtl="0">
+              <a:defRPr/>
+            </a:pPr>
+            <a:r>
+              <a:rPr lang="en-US" sz="853">
+                <a:solidFill>
+                  <a:schemeClr val="tx1"/>
+                </a:solidFill>
+                <a:latin typeface="Segoe UI" panose="020B0502040204020203" pitchFamily="34" charset="0"/>
+                <a:cs typeface="Segoe UI" panose="020B0502040204020203" pitchFamily="34" charset="0"/>
+              </a:rPr>
+              <a:t>StudentName</a:t>
+            </a:r>
+          </a:p>
+          <a:p>
+            <a:pPr marL="189651" rtl="0">
+              <a:defRPr/>
+            </a:pPr>
+            <a:r>
+              <a:rPr lang="en-US" sz="853">
+                <a:solidFill>
+                  <a:schemeClr val="tx1"/>
+                </a:solidFill>
+                <a:latin typeface="Segoe UI" panose="020B0502040204020203" pitchFamily="34" charset="0"/>
+                <a:cs typeface="Segoe UI" panose="020B0502040204020203" pitchFamily="34" charset="0"/>
+              </a:rPr>
+              <a:t>StudentPass</a:t>
+            </a:r>
+          </a:p>
+          <a:p>
+            <a:pPr marL="189651" rtl="0">
+              <a:defRPr/>
+            </a:pPr>
+            <a:r>
+              <a:rPr lang="en-US" sz="853">
+                <a:solidFill>
+                  <a:schemeClr val="tx1"/>
+                </a:solidFill>
+                <a:latin typeface="Segoe UI" panose="020B0502040204020203" pitchFamily="34" charset="0"/>
+                <a:cs typeface="Segoe UI" panose="020B0502040204020203" pitchFamily="34" charset="0"/>
+              </a:rPr>
+              <a:t>StudentNickname</a:t>
+            </a:r>
+          </a:p>
+          <a:p>
+            <a:pPr marL="189651" rtl="0">
+              <a:defRPr/>
+            </a:pPr>
+            <a:r>
+              <a:rPr lang="en-US" sz="853">
+                <a:solidFill>
+                  <a:schemeClr val="tx1"/>
+                </a:solidFill>
+                <a:latin typeface="Segoe UI" panose="020B0502040204020203" pitchFamily="34" charset="0"/>
+                <a:cs typeface="Segoe UI" panose="020B0502040204020203" pitchFamily="34" charset="0"/>
+              </a:rPr>
+              <a:t>StudentTags</a:t>
+            </a:r>
+          </a:p>
+          <a:p>
+            <a:pPr marL="176213" rtl="0">
+              <a:defRPr/>
+            </a:pPr>
+            <a:r>
+              <a:rPr lang="en-US" sz="500">
+                <a:solidFill>
+                  <a:srgbClr val="C00000"/>
+                </a:solidFill>
+                <a:latin typeface="Segoe UI" panose="020B0502040204020203" pitchFamily="34" charset="0"/>
+                <a:cs typeface="Segoe UI" panose="020B0502040204020203" pitchFamily="34" charset="0"/>
+              </a:rPr>
+              <a:t>1: IsActive</a:t>
+            </a:r>
+          </a:p>
+          <a:p>
+            <a:pPr marL="176213" rtl="0">
+              <a:defRPr/>
+            </a:pPr>
+            <a:r>
+              <a:rPr lang="en-US" sz="500">
+                <a:solidFill>
+                  <a:srgbClr val="C00000"/>
+                </a:solidFill>
+                <a:latin typeface="Segoe UI" panose="020B0502040204020203" pitchFamily="34" charset="0"/>
+                <a:cs typeface="Segoe UI" panose="020B0502040204020203" pitchFamily="34" charset="0"/>
+              </a:rPr>
+              <a:t>2: ChangePass</a:t>
+            </a:r>
+          </a:p>
+          <a:p>
+            <a:pPr marL="176213" rtl="0">
+              <a:defRPr/>
+            </a:pPr>
+            <a:r>
+              <a:rPr lang="en-US" sz="500">
+                <a:solidFill>
+                  <a:srgbClr val="C00000"/>
+                </a:solidFill>
+                <a:latin typeface="Segoe UI" panose="020B0502040204020203" pitchFamily="34" charset="0"/>
+                <a:cs typeface="Segoe UI" panose="020B0502040204020203" pitchFamily="34" charset="0"/>
+              </a:rPr>
+              <a:t>4: ReviewEx</a:t>
+            </a:r>
+          </a:p>
+          <a:p>
+            <a:pPr marL="176213" rtl="0">
+              <a:defRPr/>
+            </a:pPr>
+            <a:r>
+              <a:rPr lang="en-US" sz="500">
+                <a:solidFill>
+                  <a:srgbClr val="C00000"/>
+                </a:solidFill>
+                <a:latin typeface="Segoe UI" panose="020B0502040204020203" pitchFamily="34" charset="0"/>
+                <a:cs typeface="Segoe UI" panose="020B0502040204020203" pitchFamily="34" charset="0"/>
+              </a:rPr>
+              <a:t>8: GetStExTests</a:t>
+            </a:r>
+          </a:p>
+          <a:p>
+            <a:pPr marL="176213" rtl="0">
+              <a:defRPr/>
+            </a:pPr>
+            <a:r>
+              <a:rPr lang="en-US" sz="500">
+                <a:solidFill>
+                  <a:srgbClr val="C00000"/>
+                </a:solidFill>
+                <a:latin typeface="Segoe UI" panose="020B0502040204020203" pitchFamily="34" charset="0"/>
+                <a:cs typeface="Segoe UI" panose="020B0502040204020203" pitchFamily="34" charset="0"/>
+              </a:rPr>
+              <a:t>16: CorrectStExTests</a:t>
+            </a:r>
+          </a:p>
+          <a:p>
+            <a:pPr marL="176213" rtl="0">
+              <a:defRPr/>
+            </a:pPr>
+            <a:r>
+              <a:rPr lang="en-US" sz="500">
+                <a:solidFill>
+                  <a:srgbClr val="C00000"/>
+                </a:solidFill>
+                <a:latin typeface="Segoe UI" panose="020B0502040204020203" pitchFamily="34" charset="0"/>
+                <a:cs typeface="Segoe UI" panose="020B0502040204020203" pitchFamily="34" charset="0"/>
+              </a:rPr>
+              <a:t>32: RevStExTests</a:t>
+            </a:r>
+          </a:p>
+          <a:p>
+            <a:pPr marL="176213" rtl="0">
+              <a:defRPr/>
+            </a:pPr>
+            <a:r>
+              <a:rPr lang="en-US" sz="500">
+                <a:solidFill>
+                  <a:srgbClr val="C00000"/>
+                </a:solidFill>
+                <a:latin typeface="Segoe UI" panose="020B0502040204020203" pitchFamily="34" charset="0"/>
+                <a:cs typeface="Segoe UI" panose="020B0502040204020203" pitchFamily="34" charset="0"/>
+              </a:rPr>
+              <a:t>64: IsSelected</a:t>
+            </a:r>
+          </a:p>
+          <a:p>
+            <a:pPr marL="176213" rtl="0">
+              <a:defRPr/>
+            </a:pPr>
+            <a:r>
+              <a:rPr lang="en-US" sz="500">
+                <a:solidFill>
+                  <a:srgbClr val="C00000"/>
+                </a:solidFill>
+                <a:latin typeface="Segoe UI" panose="020B0502040204020203" pitchFamily="34" charset="0"/>
+                <a:cs typeface="Segoe UI" panose="020B0502040204020203" pitchFamily="34" charset="0"/>
+              </a:rPr>
+              <a:t>128:</a:t>
+            </a:r>
+          </a:p>
+          <a:p>
+            <a:pPr marL="176213" rtl="0">
+              <a:defRPr/>
+            </a:pPr>
+            <a:r>
+              <a:rPr lang="en-US" sz="500">
+                <a:solidFill>
+                  <a:srgbClr val="C00000"/>
+                </a:solidFill>
+                <a:latin typeface="Segoe UI" panose="020B0502040204020203" pitchFamily="34" charset="0"/>
+                <a:cs typeface="Segoe UI" panose="020B0502040204020203" pitchFamily="34" charset="0"/>
+              </a:rPr>
+              <a:t>256: CalendarFa</a:t>
+            </a:r>
+          </a:p>
+          <a:p>
+            <a:pPr marL="176213" rtl="0">
+              <a:defRPr/>
+            </a:pPr>
+            <a:endParaRPr lang="en-US" sz="500">
               <a:solidFill>
-                <a:schemeClr val="tx1"/>
+                <a:srgbClr val="C00000"/>
               </a:solidFill>
               <a:latin typeface="Segoe UI" panose="020B0502040204020203" pitchFamily="34" charset="0"/>
               <a:cs typeface="Segoe UI" panose="020B0502040204020203" pitchFamily="34" charset="0"/>
             </a:endParaRPr>
-          </a:p>
-          <a:p>
-            <a:pPr marL="189651" rtl="0">
-              <a:defRPr/>
-            </a:pPr>
-            <a:r>
-              <a:rPr lang="en-US" sz="853">
-                <a:solidFill>
-                  <a:schemeClr val="tx1"/>
-                </a:solidFill>
-                <a:latin typeface="Segoe UI" panose="020B0502040204020203" pitchFamily="34" charset="0"/>
-                <a:cs typeface="Segoe UI" panose="020B0502040204020203" pitchFamily="34" charset="0"/>
-              </a:rPr>
-              <a:t>StudentName</a:t>
-            </a:r>
-          </a:p>
-          <a:p>
-            <a:pPr marL="189651" rtl="0">
-              <a:defRPr/>
-            </a:pPr>
-            <a:r>
-              <a:rPr lang="en-US" sz="853">
-                <a:solidFill>
-                  <a:schemeClr val="tx1"/>
-                </a:solidFill>
-                <a:latin typeface="Segoe UI" panose="020B0502040204020203" pitchFamily="34" charset="0"/>
-                <a:cs typeface="Segoe UI" panose="020B0502040204020203" pitchFamily="34" charset="0"/>
-              </a:rPr>
-              <a:t>StudentPass</a:t>
-            </a:r>
-          </a:p>
-          <a:p>
-            <a:pPr marL="189651" rtl="0">
-              <a:defRPr/>
-            </a:pPr>
-            <a:r>
-              <a:rPr lang="en-US" sz="853">
-                <a:solidFill>
-                  <a:schemeClr val="tx1"/>
-                </a:solidFill>
-                <a:latin typeface="Segoe UI" panose="020B0502040204020203" pitchFamily="34" charset="0"/>
-                <a:cs typeface="Segoe UI" panose="020B0502040204020203" pitchFamily="34" charset="0"/>
-              </a:rPr>
-              <a:t>StudentNickname</a:t>
-            </a:r>
-          </a:p>
-          <a:p>
-            <a:pPr marL="189651" rtl="0">
-              <a:defRPr/>
-            </a:pPr>
-            <a:r>
-              <a:rPr lang="en-US" sz="853">
-                <a:solidFill>
-                  <a:schemeClr val="tx1"/>
-                </a:solidFill>
-                <a:latin typeface="Segoe UI" panose="020B0502040204020203" pitchFamily="34" charset="0"/>
-                <a:cs typeface="Segoe UI" panose="020B0502040204020203" pitchFamily="34" charset="0"/>
-              </a:rPr>
-              <a:t>StudentTags</a:t>
-            </a:r>
-          </a:p>
-          <a:p>
-            <a:pPr marL="176213" rtl="0">
-              <a:defRPr/>
-            </a:pPr>
-            <a:r>
-              <a:rPr lang="en-US" sz="500">
-                <a:solidFill>
-                  <a:srgbClr val="C00000"/>
-                </a:solidFill>
-                <a:latin typeface="Segoe UI" panose="020B0502040204020203" pitchFamily="34" charset="0"/>
-                <a:cs typeface="Segoe UI" panose="020B0502040204020203" pitchFamily="34" charset="0"/>
-              </a:rPr>
-              <a:t>1: IsActive</a:t>
-            </a:r>
-          </a:p>
-          <a:p>
-            <a:pPr marL="176213" rtl="0">
-              <a:defRPr/>
-            </a:pPr>
-            <a:r>
-              <a:rPr lang="en-US" sz="500">
-                <a:solidFill>
-                  <a:srgbClr val="C00000"/>
-                </a:solidFill>
-                <a:latin typeface="Segoe UI" panose="020B0502040204020203" pitchFamily="34" charset="0"/>
-                <a:cs typeface="Segoe UI" panose="020B0502040204020203" pitchFamily="34" charset="0"/>
-              </a:rPr>
-              <a:t>2: ChangePass</a:t>
-            </a:r>
-          </a:p>
-          <a:p>
-            <a:pPr marL="176213" rtl="0">
-              <a:defRPr/>
-            </a:pPr>
-            <a:r>
-              <a:rPr lang="en-US" sz="500">
-                <a:solidFill>
-                  <a:srgbClr val="C00000"/>
-                </a:solidFill>
-                <a:latin typeface="Segoe UI" panose="020B0502040204020203" pitchFamily="34" charset="0"/>
-                <a:cs typeface="Segoe UI" panose="020B0502040204020203" pitchFamily="34" charset="0"/>
-              </a:rPr>
-              <a:t>4: ReviewEx</a:t>
-            </a:r>
-          </a:p>
-          <a:p>
-            <a:pPr marL="176213" rtl="0">
-              <a:defRPr/>
-            </a:pPr>
-            <a:r>
-              <a:rPr lang="en-US" sz="500">
-                <a:solidFill>
-                  <a:srgbClr val="C00000"/>
-                </a:solidFill>
-                <a:latin typeface="Segoe UI" panose="020B0502040204020203" pitchFamily="34" charset="0"/>
-                <a:cs typeface="Segoe UI" panose="020B0502040204020203" pitchFamily="34" charset="0"/>
-              </a:rPr>
-              <a:t>8: GetStExTests</a:t>
-            </a:r>
-          </a:p>
-          <a:p>
-            <a:pPr marL="176213" rtl="0">
-              <a:defRPr/>
-            </a:pPr>
-            <a:r>
-              <a:rPr lang="en-US" sz="500">
-                <a:solidFill>
-                  <a:srgbClr val="C00000"/>
-                </a:solidFill>
-                <a:latin typeface="Segoe UI" panose="020B0502040204020203" pitchFamily="34" charset="0"/>
-                <a:cs typeface="Segoe UI" panose="020B0502040204020203" pitchFamily="34" charset="0"/>
-              </a:rPr>
-              <a:t>16: CorrectStExTests</a:t>
-            </a:r>
-          </a:p>
-          <a:p>
-            <a:pPr marL="176213" rtl="0">
-              <a:defRPr/>
-            </a:pPr>
-            <a:r>
-              <a:rPr lang="en-US" sz="500">
-                <a:solidFill>
-                  <a:srgbClr val="C00000"/>
-                </a:solidFill>
-                <a:latin typeface="Segoe UI" panose="020B0502040204020203" pitchFamily="34" charset="0"/>
-                <a:cs typeface="Segoe UI" panose="020B0502040204020203" pitchFamily="34" charset="0"/>
-              </a:rPr>
-              <a:t>32: RevStExTests</a:t>
-            </a:r>
-          </a:p>
-          <a:p>
-            <a:pPr marL="176213" rtl="0">
-              <a:defRPr/>
-            </a:pPr>
-            <a:r>
-              <a:rPr lang="en-US" sz="500">
-                <a:solidFill>
-                  <a:srgbClr val="C00000"/>
-                </a:solidFill>
-                <a:latin typeface="Segoe UI" panose="020B0502040204020203" pitchFamily="34" charset="0"/>
-                <a:cs typeface="Segoe UI" panose="020B0502040204020203" pitchFamily="34" charset="0"/>
-              </a:rPr>
-              <a:t>64: IsSelected</a:t>
-            </a:r>
-          </a:p>
-          <a:p>
-            <a:pPr marL="176213" rtl="0">
-              <a:defRPr/>
-            </a:pPr>
-            <a:r>
-              <a:rPr lang="en-US" sz="500">
-                <a:solidFill>
-                  <a:srgbClr val="C00000"/>
-                </a:solidFill>
-                <a:latin typeface="Segoe UI" panose="020B0502040204020203" pitchFamily="34" charset="0"/>
-                <a:cs typeface="Segoe UI" panose="020B0502040204020203" pitchFamily="34" charset="0"/>
-              </a:rPr>
-              <a:t>128:</a:t>
-            </a:r>
-          </a:p>
-          <a:p>
-            <a:pPr marL="176213" rtl="0">
-              <a:defRPr/>
-            </a:pPr>
-            <a:r>
-              <a:rPr lang="en-US" sz="500">
-                <a:solidFill>
-                  <a:srgbClr val="C00000"/>
-                </a:solidFill>
-                <a:latin typeface="Segoe UI" panose="020B0502040204020203" pitchFamily="34" charset="0"/>
-                <a:cs typeface="Segoe UI" panose="020B0502040204020203" pitchFamily="34" charset="0"/>
-              </a:rPr>
-              <a:t>256: CalendarFa</a:t>
-            </a:r>
           </a:p>
         </p:txBody>
       </p:sp>
@@ -4808,7 +4529,7 @@
         </p:nvSpPr>
         <p:spPr bwMode="auto">
           <a:xfrm>
-            <a:off x="2794325" y="4552520"/>
+            <a:off x="2794325" y="4768216"/>
             <a:ext cx="1182039" cy="1199659"/>
           </a:xfrm>
           <a:prstGeom prst="roundRect">
@@ -4975,7 +4696,7 @@
         </p:nvSpPr>
         <p:spPr bwMode="auto">
           <a:xfrm>
-            <a:off x="5685945" y="670129"/>
+            <a:off x="5685945" y="885825"/>
             <a:ext cx="1366068" cy="1308924"/>
           </a:xfrm>
           <a:prstGeom prst="roundRect">
@@ -5143,8 +4864,8 @@
         </p:nvSpPr>
         <p:spPr bwMode="auto">
           <a:xfrm>
-            <a:off x="1359989" y="2115977"/>
-            <a:ext cx="1757728" cy="1442933"/>
+            <a:off x="1359989" y="2331674"/>
+            <a:ext cx="1757728" cy="1268300"/>
           </a:xfrm>
           <a:prstGeom prst="roundRect">
             <a:avLst>
@@ -5307,142 +5028,6 @@
       </p:sp>
       <p:sp>
         <p:nvSpPr>
-          <p:cNvPr id="22" name="Rectangle: Rounded Corners 44">
-            <a:extLst>
-              <a:ext uri="{FF2B5EF4-FFF2-40B4-BE49-F238E27FC236}">
-                <a16:creationId xmlns:a16="http://schemas.microsoft.com/office/drawing/2014/main" id="{1829AC77-A972-B3B8-4EF9-16E84E6DAF15}"/>
-              </a:ext>
-            </a:extLst>
-          </p:cNvPr>
-          <p:cNvSpPr/>
-          <p:nvPr/>
-        </p:nvSpPr>
-        <p:spPr bwMode="auto">
-          <a:xfrm>
-            <a:off x="10195069" y="524241"/>
-            <a:ext cx="1045755" cy="915820"/>
-          </a:xfrm>
-          <a:prstGeom prst="roundRect">
-            <a:avLst>
-              <a:gd name="adj" fmla="val 9941"/>
-            </a:avLst>
-          </a:prstGeom>
-          <a:solidFill>
-            <a:schemeClr val="bg1"/>
-          </a:solidFill>
-          <a:ln>
-            <a:solidFill>
-              <a:schemeClr val="tx1"/>
-            </a:solidFill>
-          </a:ln>
-          <a:effectLst/>
-        </p:spPr>
-        <p:style>
-          <a:lnRef idx="0">
-            <a:schemeClr val="accent4"/>
-          </a:lnRef>
-          <a:fillRef idx="3">
-            <a:schemeClr val="accent4"/>
-          </a:fillRef>
-          <a:effectRef idx="3">
-            <a:schemeClr val="accent4"/>
-          </a:effectRef>
-          <a:fontRef idx="minor">
-            <a:schemeClr val="lt1"/>
-          </a:fontRef>
-        </p:style>
-        <p:txBody>
-          <a:bodyPr rtlCol="1" anchor="ctr"/>
-          <a:lstStyle/>
-          <a:p>
-            <a:pPr rtl="0">
-              <a:defRPr/>
-            </a:pPr>
-            <a:r>
-              <a:rPr lang="en-US" sz="1707" b="1">
-                <a:solidFill>
-                  <a:schemeClr val="bg1"/>
-                </a:solidFill>
-                <a:highlight>
-                  <a:srgbClr val="008080"/>
-                </a:highlight>
-                <a:latin typeface="Segoe UI" panose="020B0502040204020203" pitchFamily="34" charset="0"/>
-                <a:cs typeface="Segoe UI" panose="020B0502040204020203" pitchFamily="34" charset="0"/>
-              </a:rPr>
-              <a:t>UL</a:t>
-            </a:r>
-          </a:p>
-          <a:p>
-            <a:pPr rtl="0">
-              <a:defRPr/>
-            </a:pPr>
-            <a:r>
-              <a:rPr lang="en-US" sz="1280" b="1">
-                <a:solidFill>
-                  <a:schemeClr val="tx1"/>
-                </a:solidFill>
-                <a:latin typeface="Segoe UI" panose="020B0502040204020203" pitchFamily="34" charset="0"/>
-                <a:cs typeface="Segoe UI" panose="020B0502040204020203" pitchFamily="34" charset="0"/>
-              </a:rPr>
-              <a:t>usrsLogs</a:t>
-            </a:r>
-            <a:endParaRPr sz="1280">
-              <a:solidFill>
-                <a:schemeClr val="tx1"/>
-              </a:solidFill>
-              <a:latin typeface="Segoe UI" panose="020B0502040204020203" pitchFamily="34" charset="0"/>
-              <a:cs typeface="Segoe UI" panose="020B0502040204020203" pitchFamily="34" charset="0"/>
-            </a:endParaRPr>
-          </a:p>
-          <a:p>
-            <a:pPr rtl="0">
-              <a:defRPr/>
-            </a:pPr>
-            <a:r>
-              <a:rPr lang="en-US" sz="853">
-                <a:solidFill>
-                  <a:schemeClr val="tx1"/>
-                </a:solidFill>
-                <a:latin typeface="Segoe UI" panose="020B0502040204020203" pitchFamily="34" charset="0"/>
-                <a:cs typeface="Segoe UI" panose="020B0502040204020203" pitchFamily="34" charset="0"/>
-              </a:rPr>
-              <a:t>UserId</a:t>
-            </a:r>
-          </a:p>
-          <a:p>
-            <a:pPr rtl="0">
-              <a:defRPr/>
-            </a:pPr>
-            <a:r>
-              <a:rPr lang="en-US" sz="853">
-                <a:solidFill>
-                  <a:schemeClr val="tx1"/>
-                </a:solidFill>
-                <a:latin typeface="Segoe UI" panose="020B0502040204020203" pitchFamily="34" charset="0"/>
-                <a:cs typeface="Segoe UI" panose="020B0502040204020203" pitchFamily="34" charset="0"/>
-              </a:rPr>
-              <a:t>UserLogText</a:t>
-            </a:r>
-          </a:p>
-          <a:p>
-            <a:pPr rtl="0">
-              <a:defRPr/>
-            </a:pPr>
-            <a:r>
-              <a:rPr lang="en-US" sz="853">
-                <a:solidFill>
-                  <a:schemeClr val="tx1"/>
-                </a:solidFill>
-                <a:latin typeface="Segoe UI" panose="020B0502040204020203" pitchFamily="34" charset="0"/>
-                <a:cs typeface="Segoe UI" panose="020B0502040204020203" pitchFamily="34" charset="0"/>
-              </a:rPr>
-              <a:t>DateTime</a:t>
-            </a:r>
-          </a:p>
-        </p:txBody>
-      </p:sp>
-      <p:sp>
-        <p:nvSpPr>
           <p:cNvPr id="80" name="TextBox 79">
             <a:extLst>
               <a:ext uri="{FF2B5EF4-FFF2-40B4-BE49-F238E27FC236}">
@@ -5455,7 +5040,7 @@
         </p:nvSpPr>
         <p:spPr>
           <a:xfrm>
-            <a:off x="-12559" y="8399187"/>
+            <a:off x="-8773" y="8384051"/>
             <a:ext cx="1467068" cy="230832"/>
           </a:xfrm>
           <a:prstGeom prst="rect">
@@ -5506,8 +5091,8 @@
         </p:nvSpPr>
         <p:spPr bwMode="auto">
           <a:xfrm>
-            <a:off x="5192945" y="4910537"/>
-            <a:ext cx="1869708" cy="1570084"/>
+            <a:off x="5192945" y="5126233"/>
+            <a:ext cx="1869708" cy="1498076"/>
           </a:xfrm>
           <a:prstGeom prst="roundRect">
             <a:avLst>
@@ -5727,8 +5312,8 @@
         </p:nvSpPr>
         <p:spPr bwMode="auto">
           <a:xfrm>
-            <a:off x="2833517" y="2242327"/>
-            <a:ext cx="1182038" cy="1075389"/>
+            <a:off x="2833517" y="2614045"/>
+            <a:ext cx="1182038" cy="1098548"/>
           </a:xfrm>
           <a:prstGeom prst="roundRect">
             <a:avLst>
@@ -5864,8 +5449,8 @@
         </p:nvSpPr>
         <p:spPr bwMode="auto">
           <a:xfrm>
-            <a:off x="5298327" y="1921275"/>
-            <a:ext cx="1764331" cy="1645829"/>
+            <a:off x="5298327" y="2136972"/>
+            <a:ext cx="1764331" cy="1174970"/>
           </a:xfrm>
           <a:prstGeom prst="roundRect">
             <a:avLst>
@@ -6034,8 +5619,8 @@
         </p:nvSpPr>
         <p:spPr bwMode="auto">
           <a:xfrm>
-            <a:off x="6641384" y="6096823"/>
-            <a:ext cx="1637820" cy="1649493"/>
+            <a:off x="6641384" y="6422704"/>
+            <a:ext cx="1637820" cy="1498077"/>
           </a:xfrm>
           <a:prstGeom prst="roundRect">
             <a:avLst>
@@ -6287,8 +5872,8 @@
         </p:nvSpPr>
         <p:spPr bwMode="auto">
           <a:xfrm>
-            <a:off x="6709586" y="2038905"/>
-            <a:ext cx="1545810" cy="1705412"/>
+            <a:off x="6709586" y="2254601"/>
+            <a:ext cx="1545810" cy="1528199"/>
           </a:xfrm>
           <a:prstGeom prst="roundRect">
             <a:avLst>
@@ -6529,8 +6114,8 @@
         </p:nvSpPr>
         <p:spPr bwMode="auto">
           <a:xfrm>
-            <a:off x="6641384" y="4578752"/>
-            <a:ext cx="1614017" cy="1387474"/>
+            <a:off x="6641384" y="4824437"/>
+            <a:ext cx="1614017" cy="1300022"/>
           </a:xfrm>
           <a:prstGeom prst="roundRect">
             <a:avLst>
@@ -6715,8 +6300,8 @@
         </p:nvSpPr>
         <p:spPr bwMode="auto">
           <a:xfrm>
-            <a:off x="8114731" y="2196769"/>
-            <a:ext cx="1864591" cy="1259516"/>
+            <a:off x="8114731" y="2412465"/>
+            <a:ext cx="1864591" cy="1152285"/>
           </a:xfrm>
           <a:prstGeom prst="roundRect">
             <a:avLst>
@@ -6903,8 +6488,8 @@
         </p:nvSpPr>
         <p:spPr bwMode="auto">
           <a:xfrm>
-            <a:off x="8136507" y="5248801"/>
-            <a:ext cx="2277663" cy="2599258"/>
+            <a:off x="8136507" y="5400501"/>
+            <a:ext cx="2247973" cy="2812402"/>
           </a:xfrm>
           <a:prstGeom prst="roundRect">
             <a:avLst>
@@ -6940,7 +6525,7 @@
           <a:bodyPr rtlCol="1" anchor="ctr"/>
           <a:lstStyle/>
           <a:p>
-            <a:pPr rtl="0">
+            <a:pPr marL="90488" rtl="0">
               <a:defRPr/>
             </a:pPr>
             <a:r>
@@ -6968,7 +6553,7 @@
             </a:endParaRPr>
           </a:p>
           <a:p>
-            <a:pPr rtl="0">
+            <a:pPr marL="90488" rtl="0">
               <a:defRPr/>
             </a:pPr>
             <a:r>
@@ -6990,7 +6575,7 @@
             </a:endParaRPr>
           </a:p>
           <a:p>
-            <a:pPr rtl="0">
+            <a:pPr marL="90488" rtl="0">
               <a:defRPr/>
             </a:pPr>
             <a:r>
@@ -7015,7 +6600,7 @@
             </a:r>
           </a:p>
           <a:p>
-            <a:pPr rtl="0">
+            <a:pPr marL="90488" rtl="0">
               <a:defRPr/>
             </a:pPr>
             <a:r>
@@ -7030,7 +6615,7 @@
             </a:r>
           </a:p>
           <a:p>
-            <a:pPr rtl="0">
+            <a:pPr marL="90488" rtl="0">
               <a:defRPr/>
             </a:pPr>
             <a:r>
@@ -7045,7 +6630,7 @@
             </a:r>
           </a:p>
           <a:p>
-            <a:pPr rtl="0">
+            <a:pPr marL="90488" rtl="0">
               <a:defRPr/>
             </a:pPr>
             <a:r>
@@ -7060,7 +6645,7 @@
             </a:r>
           </a:p>
           <a:p>
-            <a:pPr rtl="0">
+            <a:pPr marL="90488" rtl="0">
               <a:defRPr/>
             </a:pPr>
             <a:r>
@@ -7075,7 +6660,7 @@
             </a:r>
           </a:p>
           <a:p>
-            <a:pPr rtl="0">
+            <a:pPr marL="90488" rtl="0">
               <a:defRPr/>
             </a:pPr>
             <a:r>
@@ -7090,7 +6675,7 @@
             </a:r>
           </a:p>
           <a:p>
-            <a:pPr rtl="0">
+            <a:pPr marL="90488" rtl="0">
               <a:defRPr/>
             </a:pPr>
             <a:r>
@@ -7105,7 +6690,7 @@
             </a:r>
           </a:p>
           <a:p>
-            <a:pPr rtl="0">
+            <a:pPr marL="90488" rtl="0">
               <a:defRPr/>
             </a:pPr>
             <a:r>
@@ -7120,7 +6705,7 @@
             </a:r>
           </a:p>
           <a:p>
-            <a:pPr rtl="0">
+            <a:pPr marL="90488" rtl="0">
               <a:defRPr/>
             </a:pPr>
             <a:r>
@@ -7135,7 +6720,7 @@
             </a:r>
           </a:p>
           <a:p>
-            <a:pPr rtl="0">
+            <a:pPr marL="90488" rtl="0">
               <a:defRPr/>
             </a:pPr>
             <a:r>
@@ -7150,7 +6735,7 @@
             </a:r>
           </a:p>
           <a:p>
-            <a:pPr rtl="0">
+            <a:pPr marL="90488" rtl="0">
               <a:defRPr/>
             </a:pPr>
             <a:r>
@@ -7165,7 +6750,7 @@
             </a:r>
           </a:p>
           <a:p>
-            <a:pPr rtl="0">
+            <a:pPr marL="90488" rtl="0">
               <a:buNone/>
             </a:pPr>
             <a:r>
@@ -7181,7 +6766,7 @@
             </a:r>
           </a:p>
           <a:p>
-            <a:pPr rtl="0">
+            <a:pPr marL="90488" rtl="0">
               <a:buNone/>
             </a:pPr>
             <a:r>
@@ -7197,7 +6782,7 @@
             </a:r>
           </a:p>
           <a:p>
-            <a:pPr rtl="0">
+            <a:pPr marL="90488" rtl="0">
               <a:buNone/>
             </a:pPr>
             <a:r>
@@ -7213,7 +6798,7 @@
             </a:r>
           </a:p>
           <a:p>
-            <a:pPr rtl="0">
+            <a:pPr marL="90488" rtl="0">
               <a:buNone/>
             </a:pPr>
             <a:r>
@@ -7229,7 +6814,7 @@
             </a:r>
           </a:p>
           <a:p>
-            <a:pPr rtl="0">
+            <a:pPr marL="90488" rtl="0">
               <a:buNone/>
             </a:pPr>
             <a:r>
@@ -7245,7 +6830,7 @@
             </a:r>
           </a:p>
           <a:p>
-            <a:pPr rtl="0">
+            <a:pPr marL="90488" rtl="0">
               <a:buNone/>
             </a:pPr>
             <a:r>
@@ -7261,7 +6846,7 @@
             </a:r>
           </a:p>
           <a:p>
-            <a:pPr rtl="0"/>
+            <a:pPr marL="90488" rtl="0"/>
             <a:r>
               <a:rPr lang="en-US" sz="500" kern="100">
                 <a:solidFill>
@@ -7272,6 +6857,1810 @@
                 <a:cs typeface="Calibri Light" panose="020F0302020204030204" pitchFamily="34" charset="0"/>
               </a:rPr>
               <a:t>64 IsSelected</a:t>
+            </a:r>
+          </a:p>
+          <a:p>
+            <a:pPr rtl="0"/>
+            <a:endParaRPr lang="en-US" sz="500" kern="100">
+              <a:solidFill>
+                <a:srgbClr val="C00000"/>
+              </a:solidFill>
+              <a:latin typeface="Consolas" panose="020B0609020204030204" pitchFamily="49" charset="0"/>
+              <a:ea typeface="Calibri" panose="020F0502020204030204" pitchFamily="34" charset="0"/>
+              <a:cs typeface="Calibri Light" panose="020F0302020204030204" pitchFamily="34" charset="0"/>
+            </a:endParaRPr>
+          </a:p>
+          <a:p>
+            <a:pPr rtl="0"/>
+            <a:endParaRPr lang="en-US" sz="500" kern="100">
+              <a:solidFill>
+                <a:srgbClr val="C00000"/>
+              </a:solidFill>
+              <a:latin typeface="Consolas" panose="020B0609020204030204" pitchFamily="49" charset="0"/>
+              <a:ea typeface="Calibri" panose="020F0502020204030204" pitchFamily="34" charset="0"/>
+              <a:cs typeface="Calibri Light" panose="020F0302020204030204" pitchFamily="34" charset="0"/>
+            </a:endParaRPr>
+          </a:p>
+          <a:p>
+            <a:pPr rtl="0"/>
+            <a:endParaRPr lang="en-US" sz="500" kern="100">
+              <a:solidFill>
+                <a:srgbClr val="C00000"/>
+              </a:solidFill>
+              <a:latin typeface="Consolas" panose="020B0609020204030204" pitchFamily="49" charset="0"/>
+              <a:ea typeface="Calibri" panose="020F0502020204030204" pitchFamily="34" charset="0"/>
+              <a:cs typeface="Calibri Light" panose="020F0302020204030204" pitchFamily="34" charset="0"/>
+            </a:endParaRPr>
+          </a:p>
+          <a:p>
+            <a:pPr rtl="0"/>
+            <a:endParaRPr lang="en-US" sz="500" kern="100">
+              <a:solidFill>
+                <a:srgbClr val="C00000"/>
+              </a:solidFill>
+              <a:latin typeface="Consolas" panose="020B0609020204030204" pitchFamily="49" charset="0"/>
+              <a:ea typeface="Calibri" panose="020F0502020204030204" pitchFamily="34" charset="0"/>
+              <a:cs typeface="Calibri Light" panose="020F0302020204030204" pitchFamily="34" charset="0"/>
+            </a:endParaRPr>
+          </a:p>
+        </p:txBody>
+      </p:sp>
+      <p:sp>
+        <p:nvSpPr>
+          <p:cNvPr id="16" name="Rectangle: Rounded Corners 15">
+            <a:extLst>
+              <a:ext uri="{FF2B5EF4-FFF2-40B4-BE49-F238E27FC236}">
+                <a16:creationId xmlns:a16="http://schemas.microsoft.com/office/drawing/2014/main" id="{8EB7AD94-FB73-258B-E14F-D29425205938}"/>
+              </a:ext>
+            </a:extLst>
+          </p:cNvPr>
+          <p:cNvSpPr/>
+          <p:nvPr/>
+        </p:nvSpPr>
+        <p:spPr>
+          <a:xfrm>
+            <a:off x="215628" y="5832549"/>
+            <a:ext cx="1316312" cy="1301732"/>
+          </a:xfrm>
+          <a:prstGeom prst="roundRect">
+            <a:avLst>
+              <a:gd name="adj" fmla="val 8313"/>
+            </a:avLst>
+          </a:prstGeom>
+          <a:solidFill>
+            <a:schemeClr val="bg1"/>
+          </a:solidFill>
+          <a:ln>
+            <a:solidFill>
+              <a:schemeClr val="tx1">
+                <a:lumMod val="65000"/>
+                <a:lumOff val="35000"/>
+              </a:schemeClr>
+            </a:solidFill>
+          </a:ln>
+        </p:spPr>
+        <p:style>
+          <a:lnRef idx="1">
+            <a:schemeClr val="accent4"/>
+          </a:lnRef>
+          <a:fillRef idx="2">
+            <a:schemeClr val="accent4"/>
+          </a:fillRef>
+          <a:effectRef idx="1">
+            <a:schemeClr val="accent4"/>
+          </a:effectRef>
+          <a:fontRef idx="minor">
+            <a:schemeClr val="dk1"/>
+          </a:fontRef>
+        </p:style>
+        <p:txBody>
+          <a:bodyPr rtlCol="1" anchor="t"/>
+          <a:lstStyle/>
+          <a:p>
+            <a:pPr rtl="0"/>
+            <a:r>
+              <a:rPr lang="en-US" sz="1707" b="1" dirty="0">
+                <a:solidFill>
+                  <a:schemeClr val="bg1"/>
+                </a:solidFill>
+                <a:highlight>
+                  <a:srgbClr val="000000"/>
+                </a:highlight>
+              </a:rPr>
+              <a:t>P</a:t>
+            </a:r>
+            <a:r>
+              <a:rPr lang="en-US" sz="1280" b="1" dirty="0"/>
+              <a:t>rojects</a:t>
+            </a:r>
+            <a:endParaRPr lang="en-US" sz="853" b="1" dirty="0"/>
+          </a:p>
+          <a:p>
+            <a:pPr rtl="0"/>
+            <a:r>
+              <a:rPr lang="en-US" sz="853" i="1">
+                <a:solidFill>
+                  <a:schemeClr val="accent5"/>
+                </a:solidFill>
+                <a:latin typeface="Segoe UI" panose="020B0502040204020203" pitchFamily="34" charset="0"/>
+                <a:cs typeface="Segoe UI" panose="020B0502040204020203" pitchFamily="34" charset="0"/>
+              </a:rPr>
+              <a:t>ProjectId</a:t>
+            </a:r>
+          </a:p>
+          <a:p>
+            <a:pPr rtl="0"/>
+            <a:r>
+              <a:rPr lang="en-US" sz="853">
+                <a:solidFill>
+                  <a:schemeClr val="tx1"/>
+                </a:solidFill>
+              </a:rPr>
+              <a:t>UserId</a:t>
+            </a:r>
+          </a:p>
+          <a:p>
+            <a:pPr rtl="0"/>
+            <a:r>
+              <a:rPr lang="en-US" sz="853">
+                <a:solidFill>
+                  <a:schemeClr val="tx1"/>
+                </a:solidFill>
+              </a:rPr>
+              <a:t>UserType</a:t>
+            </a:r>
+          </a:p>
+          <a:p>
+            <a:pPr rtl="0">
+              <a:buNone/>
+            </a:pPr>
+            <a:r>
+              <a:rPr lang="en-US" sz="600" kern="100">
+                <a:solidFill>
+                  <a:schemeClr val="tx1"/>
+                </a:solidFill>
+                <a:latin typeface="Consolas" panose="020B0609020204030204" pitchFamily="49" charset="0"/>
+                <a:ea typeface="Calibri" panose="020F0502020204030204" pitchFamily="34" charset="0"/>
+                <a:cs typeface="Calibri Light" panose="020F0302020204030204" pitchFamily="34" charset="0"/>
+              </a:rPr>
+              <a:t> 1:Teacher</a:t>
+            </a:r>
+          </a:p>
+          <a:p>
+            <a:pPr rtl="0">
+              <a:buNone/>
+            </a:pPr>
+            <a:r>
+              <a:rPr lang="en-US" sz="600" kern="100">
+                <a:solidFill>
+                  <a:schemeClr val="tx1"/>
+                </a:solidFill>
+                <a:latin typeface="Consolas" panose="020B0609020204030204" pitchFamily="49" charset="0"/>
+                <a:ea typeface="Calibri" panose="020F0502020204030204" pitchFamily="34" charset="0"/>
+                <a:cs typeface="Calibri Light" panose="020F0302020204030204" pitchFamily="34" charset="0"/>
+              </a:rPr>
+              <a:t> 2:Student</a:t>
+            </a:r>
+            <a:endParaRPr lang="en-US" sz="853" dirty="0"/>
+          </a:p>
+          <a:p>
+            <a:pPr rtl="0"/>
+            <a:r>
+              <a:rPr lang="en-US" sz="853" dirty="0" err="1"/>
+              <a:t>ProjectName</a:t>
+            </a:r>
+            <a:endParaRPr lang="en-US" sz="853" dirty="0"/>
+          </a:p>
+          <a:p>
+            <a:pPr rtl="0"/>
+            <a:r>
+              <a:rPr lang="en-US" sz="853">
+                <a:solidFill>
+                  <a:schemeClr val="tx1"/>
+                </a:solidFill>
+              </a:rPr>
+              <a:t>ProjectTags</a:t>
+            </a:r>
+          </a:p>
+          <a:p>
+            <a:pPr rtl="0"/>
+            <a:r>
+              <a:rPr lang="en-US" sz="500" kern="100">
+                <a:solidFill>
+                  <a:srgbClr val="C00000"/>
+                </a:solidFill>
+                <a:latin typeface="Consolas" panose="020B0609020204030204" pitchFamily="49" charset="0"/>
+                <a:ea typeface="Calibri" panose="020F0502020204030204" pitchFamily="34" charset="0"/>
+                <a:cs typeface="Calibri Light" panose="020F0302020204030204" pitchFamily="34" charset="0"/>
+              </a:rPr>
+              <a:t> 1:active</a:t>
+            </a:r>
+          </a:p>
+        </p:txBody>
+      </p:sp>
+      <p:sp>
+        <p:nvSpPr>
+          <p:cNvPr id="17" name="Callout: Bent Line 16">
+            <a:extLst>
+              <a:ext uri="{FF2B5EF4-FFF2-40B4-BE49-F238E27FC236}">
+                <a16:creationId xmlns:a16="http://schemas.microsoft.com/office/drawing/2014/main" id="{D7A96907-C393-6D27-7271-FEC08798F246}"/>
+              </a:ext>
+            </a:extLst>
+          </p:cNvPr>
+          <p:cNvSpPr/>
+          <p:nvPr/>
+        </p:nvSpPr>
+        <p:spPr bwMode="auto">
+          <a:xfrm>
+            <a:off x="1799804" y="7640689"/>
+            <a:ext cx="1105070" cy="787849"/>
+          </a:xfrm>
+          <a:prstGeom prst="borderCallout2">
+            <a:avLst>
+              <a:gd name="adj1" fmla="val -1024"/>
+              <a:gd name="adj2" fmla="val 85567"/>
+              <a:gd name="adj3" fmla="val 366"/>
+              <a:gd name="adj4" fmla="val 82159"/>
+              <a:gd name="adj5" fmla="val 180"/>
+              <a:gd name="adj6" fmla="val 85711"/>
+            </a:avLst>
+          </a:prstGeom>
+          <a:noFill/>
+          <a:ln>
+            <a:prstDash val="dash"/>
+          </a:ln>
+        </p:spPr>
+        <p:style>
+          <a:lnRef idx="2">
+            <a:schemeClr val="accent1">
+              <a:shade val="15000"/>
+            </a:schemeClr>
+          </a:lnRef>
+          <a:fillRef idx="1">
+            <a:schemeClr val="accent1"/>
+          </a:fillRef>
+          <a:effectRef idx="0">
+            <a:schemeClr val="accent1"/>
+          </a:effectRef>
+          <a:fontRef idx="minor">
+            <a:schemeClr val="lt1"/>
+          </a:fontRef>
+        </p:style>
+        <p:txBody>
+          <a:bodyPr rtlCol="1" anchor="ctr"/>
+          <a:lstStyle/>
+          <a:p>
+            <a:pPr rtl="0">
+              <a:buNone/>
+            </a:pPr>
+            <a:r>
+              <a:rPr lang="en-US" sz="500" kern="100">
+                <a:solidFill>
+                  <a:schemeClr val="tx1"/>
+                </a:solidFill>
+                <a:latin typeface="Consolas" panose="020B0609020204030204" pitchFamily="49" charset="0"/>
+                <a:ea typeface="Calibri" panose="020F0502020204030204" pitchFamily="34" charset="0"/>
+                <a:cs typeface="Calibri Light" panose="020F0302020204030204" pitchFamily="34" charset="0"/>
+              </a:rPr>
+              <a:t>NoteTypes:</a:t>
+            </a:r>
+          </a:p>
+          <a:p>
+            <a:pPr rtl="0">
+              <a:buNone/>
+            </a:pPr>
+            <a:r>
+              <a:rPr lang="en-US" sz="500" kern="100">
+                <a:solidFill>
+                  <a:schemeClr val="tx1"/>
+                </a:solidFill>
+                <a:latin typeface="Consolas" panose="020B0609020204030204" pitchFamily="49" charset="0"/>
+                <a:ea typeface="Calibri" panose="020F0502020204030204" pitchFamily="34" charset="0"/>
+                <a:cs typeface="Calibri Light" panose="020F0302020204030204" pitchFamily="34" charset="0"/>
+              </a:rPr>
+              <a:t> 1: S: quickNote</a:t>
+            </a:r>
+          </a:p>
+          <a:p>
+            <a:pPr rtl="0">
+              <a:buNone/>
+            </a:pPr>
+            <a:r>
+              <a:rPr lang="en-US" sz="500" kern="100">
+                <a:solidFill>
+                  <a:schemeClr val="tx1"/>
+                </a:solidFill>
+                <a:latin typeface="Consolas" panose="020B0609020204030204" pitchFamily="49" charset="0"/>
+                <a:ea typeface="Calibri" panose="020F0502020204030204" pitchFamily="34" charset="0"/>
+                <a:cs typeface="Calibri Light" panose="020F0302020204030204" pitchFamily="34" charset="0"/>
+              </a:rPr>
+              <a:t> 2: S: sectionNote</a:t>
+            </a:r>
+          </a:p>
+          <a:p>
+            <a:pPr rtl="0">
+              <a:buNone/>
+            </a:pPr>
+            <a:r>
+              <a:rPr lang="en-US" sz="500" kern="100">
+                <a:solidFill>
+                  <a:schemeClr val="tx1"/>
+                </a:solidFill>
+                <a:latin typeface="Consolas" panose="020B0609020204030204" pitchFamily="49" charset="0"/>
+                <a:ea typeface="Calibri" panose="020F0502020204030204" pitchFamily="34" charset="0"/>
+                <a:cs typeface="Calibri Light" panose="020F0302020204030204" pitchFamily="34" charset="0"/>
+              </a:rPr>
+              <a:t>11: T: quickNote</a:t>
+            </a:r>
+          </a:p>
+          <a:p>
+            <a:pPr rtl="0">
+              <a:buNone/>
+            </a:pPr>
+            <a:r>
+              <a:rPr lang="en-US" sz="500" kern="100">
+                <a:solidFill>
+                  <a:schemeClr val="tx1"/>
+                </a:solidFill>
+                <a:latin typeface="Consolas" panose="020B0609020204030204" pitchFamily="49" charset="0"/>
+                <a:ea typeface="Calibri" panose="020F0502020204030204" pitchFamily="34" charset="0"/>
+                <a:cs typeface="Calibri Light" panose="020F0302020204030204" pitchFamily="34" charset="0"/>
+              </a:rPr>
+              <a:t>12: T: sectionNote</a:t>
+            </a:r>
+          </a:p>
+          <a:p>
+            <a:pPr rtl="0">
+              <a:buNone/>
+            </a:pPr>
+            <a:r>
+              <a:rPr lang="en-US" sz="500" kern="100">
+                <a:solidFill>
+                  <a:schemeClr val="tx1"/>
+                </a:solidFill>
+                <a:latin typeface="Consolas" panose="020B0609020204030204" pitchFamily="49" charset="0"/>
+                <a:ea typeface="Calibri" panose="020F0502020204030204" pitchFamily="34" charset="0"/>
+                <a:cs typeface="Calibri Light" panose="020F0302020204030204" pitchFamily="34" charset="0"/>
+              </a:rPr>
+              <a:t>13: T: note on Student</a:t>
+            </a:r>
+          </a:p>
+          <a:p>
+            <a:pPr rtl="0">
+              <a:buNone/>
+            </a:pPr>
+            <a:r>
+              <a:rPr lang="en-US" sz="500" kern="100">
+                <a:solidFill>
+                  <a:schemeClr val="tx1"/>
+                </a:solidFill>
+                <a:latin typeface="Consolas" panose="020B0609020204030204" pitchFamily="49" charset="0"/>
+                <a:ea typeface="Calibri" panose="020F0502020204030204" pitchFamily="34" charset="0"/>
+                <a:cs typeface="Calibri Light" panose="020F0302020204030204" pitchFamily="34" charset="0"/>
+              </a:rPr>
+              <a:t>14: T: note on Group</a:t>
+            </a:r>
+          </a:p>
+          <a:p>
+            <a:pPr rtl="0">
+              <a:buNone/>
+            </a:pPr>
+            <a:r>
+              <a:rPr lang="en-US" sz="500" kern="100">
+                <a:solidFill>
+                  <a:schemeClr val="tx1"/>
+                </a:solidFill>
+                <a:latin typeface="Consolas" panose="020B0609020204030204" pitchFamily="49" charset="0"/>
+                <a:ea typeface="Calibri" panose="020F0502020204030204" pitchFamily="34" charset="0"/>
+                <a:cs typeface="Calibri Light" panose="020F0302020204030204" pitchFamily="34" charset="0"/>
+              </a:rPr>
+              <a:t>15: T: note on Course</a:t>
+            </a:r>
+          </a:p>
+          <a:p>
+            <a:pPr rtl="0">
+              <a:buNone/>
+            </a:pPr>
+            <a:r>
+              <a:rPr lang="en-US" sz="500" kern="100">
+                <a:solidFill>
+                  <a:schemeClr val="tx1"/>
+                </a:solidFill>
+                <a:latin typeface="Consolas" panose="020B0609020204030204" pitchFamily="49" charset="0"/>
+                <a:ea typeface="Calibri" panose="020F0502020204030204" pitchFamily="34" charset="0"/>
+                <a:cs typeface="Calibri Light" panose="020F0302020204030204" pitchFamily="34" charset="0"/>
+              </a:rPr>
+              <a:t>16: T: note on Exam</a:t>
+            </a:r>
+          </a:p>
+          <a:p>
+            <a:pPr rtl="0">
+              <a:buNone/>
+            </a:pPr>
+            <a:r>
+              <a:rPr lang="en-US" sz="500" kern="100">
+                <a:solidFill>
+                  <a:schemeClr val="tx1"/>
+                </a:solidFill>
+                <a:latin typeface="Consolas" panose="020B0609020204030204" pitchFamily="49" charset="0"/>
+                <a:ea typeface="Calibri" panose="020F0502020204030204" pitchFamily="34" charset="0"/>
+                <a:cs typeface="Calibri Light" panose="020F0302020204030204" pitchFamily="34" charset="0"/>
+              </a:rPr>
+              <a:t>17: T: note on StudentExam</a:t>
+            </a:r>
+          </a:p>
+        </p:txBody>
+      </p:sp>
+      <p:sp>
+        <p:nvSpPr>
+          <p:cNvPr id="18" name="Rectangle: Rounded Corners 45">
+            <a:extLst>
+              <a:ext uri="{FF2B5EF4-FFF2-40B4-BE49-F238E27FC236}">
+                <a16:creationId xmlns:a16="http://schemas.microsoft.com/office/drawing/2014/main" id="{84CF63F6-9EC1-FF7B-5327-5C2174F26690}"/>
+              </a:ext>
+            </a:extLst>
+          </p:cNvPr>
+          <p:cNvSpPr/>
+          <p:nvPr/>
+        </p:nvSpPr>
+        <p:spPr bwMode="auto">
+          <a:xfrm>
+            <a:off x="2936700" y="501554"/>
+            <a:ext cx="1182037" cy="1712656"/>
+          </a:xfrm>
+          <a:prstGeom prst="roundRect">
+            <a:avLst>
+              <a:gd name="adj" fmla="val 8076"/>
+            </a:avLst>
+          </a:prstGeom>
+          <a:solidFill>
+            <a:schemeClr val="bg1"/>
+          </a:solidFill>
+          <a:ln w="28575">
+            <a:solidFill>
+              <a:schemeClr val="tx1"/>
+            </a:solidFill>
+            <a:prstDash val="solid"/>
+          </a:ln>
+          <a:effectLst/>
+        </p:spPr>
+        <p:style>
+          <a:lnRef idx="0">
+            <a:schemeClr val="accent4"/>
+          </a:lnRef>
+          <a:fillRef idx="3">
+            <a:schemeClr val="accent4"/>
+          </a:fillRef>
+          <a:effectRef idx="3">
+            <a:schemeClr val="accent4"/>
+          </a:effectRef>
+          <a:fontRef idx="minor">
+            <a:schemeClr val="lt1"/>
+          </a:fontRef>
+        </p:style>
+        <p:txBody>
+          <a:bodyPr rtlCol="1" anchor="ctr"/>
+          <a:lstStyle/>
+          <a:p>
+            <a:pPr algn="l" rtl="0">
+              <a:defRPr/>
+            </a:pPr>
+            <a:r>
+              <a:rPr lang="en-US" sz="1707" b="1">
+                <a:solidFill>
+                  <a:schemeClr val="bg1"/>
+                </a:solidFill>
+                <a:highlight>
+                  <a:srgbClr val="800080"/>
+                </a:highlight>
+                <a:latin typeface="Segoe UI" panose="020B0502040204020203" pitchFamily="34" charset="0"/>
+                <a:cs typeface="Segoe UI" panose="020B0502040204020203" pitchFamily="34" charset="0"/>
+              </a:rPr>
+              <a:t>CH</a:t>
+            </a:r>
+          </a:p>
+          <a:p>
+            <a:pPr rtl="0">
+              <a:defRPr/>
+            </a:pPr>
+            <a:r>
+              <a:rPr lang="en-US" sz="1280" b="1">
+                <a:solidFill>
+                  <a:schemeClr val="tx1"/>
+                </a:solidFill>
+                <a:latin typeface="Segoe UI" panose="020B0502040204020203" pitchFamily="34" charset="0"/>
+                <a:cs typeface="Segoe UI" panose="020B0502040204020203" pitchFamily="34" charset="0"/>
+              </a:rPr>
+              <a:t>Chats</a:t>
+            </a:r>
+            <a:endParaRPr sz="1280">
+              <a:solidFill>
+                <a:schemeClr val="tx1"/>
+              </a:solidFill>
+              <a:latin typeface="Segoe UI" panose="020B0502040204020203" pitchFamily="34" charset="0"/>
+              <a:cs typeface="Segoe UI" panose="020B0502040204020203" pitchFamily="34" charset="0"/>
+            </a:endParaRPr>
+          </a:p>
+          <a:p>
+            <a:pPr rtl="0">
+              <a:defRPr/>
+            </a:pPr>
+            <a:r>
+              <a:rPr lang="en-US" sz="853" i="1">
+                <a:solidFill>
+                  <a:schemeClr val="accent5"/>
+                </a:solidFill>
+                <a:latin typeface="Segoe UI" panose="020B0502040204020203" pitchFamily="34" charset="0"/>
+                <a:cs typeface="Segoe UI" panose="020B0502040204020203" pitchFamily="34" charset="0"/>
+              </a:rPr>
+              <a:t>ChatId</a:t>
+            </a:r>
+          </a:p>
+          <a:p>
+            <a:pPr rtl="0">
+              <a:defRPr/>
+            </a:pPr>
+            <a:r>
+              <a:rPr lang="en-US" sz="853">
+                <a:solidFill>
+                  <a:schemeClr val="tx1"/>
+                </a:solidFill>
+                <a:latin typeface="Segoe UI" panose="020B0502040204020203" pitchFamily="34" charset="0"/>
+                <a:cs typeface="Segoe UI" panose="020B0502040204020203" pitchFamily="34" charset="0"/>
+              </a:rPr>
+              <a:t>FromId</a:t>
+            </a:r>
+          </a:p>
+          <a:p>
+            <a:pPr rtl="0">
+              <a:defRPr/>
+            </a:pPr>
+            <a:r>
+              <a:rPr lang="en-US" sz="853">
+                <a:solidFill>
+                  <a:schemeClr val="tx1"/>
+                </a:solidFill>
+                <a:latin typeface="Segoe UI" panose="020B0502040204020203" pitchFamily="34" charset="0"/>
+                <a:cs typeface="Segoe UI" panose="020B0502040204020203" pitchFamily="34" charset="0"/>
+              </a:rPr>
+              <a:t>ToId</a:t>
+            </a:r>
+          </a:p>
+          <a:p>
+            <a:pPr rtl="0">
+              <a:defRPr/>
+            </a:pPr>
+            <a:r>
+              <a:rPr lang="en-US" sz="853">
+                <a:solidFill>
+                  <a:schemeClr val="tx1"/>
+                </a:solidFill>
+                <a:latin typeface="Segoe UI" panose="020B0502040204020203" pitchFamily="34" charset="0"/>
+                <a:cs typeface="Segoe UI" panose="020B0502040204020203" pitchFamily="34" charset="0"/>
+              </a:rPr>
+              <a:t>DateTimeSent</a:t>
+            </a:r>
+          </a:p>
+          <a:p>
+            <a:pPr rtl="0">
+              <a:defRPr/>
+            </a:pPr>
+            <a:r>
+              <a:rPr lang="en-US" sz="853">
+                <a:solidFill>
+                  <a:schemeClr val="tx1"/>
+                </a:solidFill>
+                <a:latin typeface="Segoe UI" panose="020B0502040204020203" pitchFamily="34" charset="0"/>
+                <a:cs typeface="Segoe UI" panose="020B0502040204020203" pitchFamily="34" charset="0"/>
+              </a:rPr>
+              <a:t>ChatText</a:t>
+            </a:r>
+          </a:p>
+          <a:p>
+            <a:pPr rtl="0">
+              <a:defRPr/>
+            </a:pPr>
+            <a:r>
+              <a:rPr lang="en-US" sz="853">
+                <a:solidFill>
+                  <a:schemeClr val="tx1"/>
+                </a:solidFill>
+                <a:latin typeface="Segoe UI" panose="020B0502040204020203" pitchFamily="34" charset="0"/>
+                <a:cs typeface="Segoe UI" panose="020B0502040204020203" pitchFamily="34" charset="0"/>
+              </a:rPr>
+              <a:t>ChatTags</a:t>
+            </a:r>
+          </a:p>
+          <a:p>
+            <a:pPr rtl="0">
+              <a:defRPr/>
+            </a:pPr>
+            <a:r>
+              <a:rPr lang="en-US" sz="600" kern="100">
+                <a:solidFill>
+                  <a:schemeClr val="tx1"/>
+                </a:solidFill>
+                <a:latin typeface="Consolas" panose="020B0609020204030204" pitchFamily="49" charset="0"/>
+                <a:ea typeface="Calibri" panose="020F0502020204030204" pitchFamily="34" charset="0"/>
+                <a:cs typeface="Calibri Light" panose="020F0302020204030204" pitchFamily="34" charset="0"/>
+              </a:rPr>
+              <a:t>1:Read </a:t>
+            </a:r>
+          </a:p>
+          <a:p>
+            <a:pPr rtl="0">
+              <a:defRPr/>
+            </a:pPr>
+            <a:r>
+              <a:rPr lang="en-US" sz="600" kern="100">
+                <a:solidFill>
+                  <a:schemeClr val="tx1"/>
+                </a:solidFill>
+                <a:latin typeface="Consolas" panose="020B0609020204030204" pitchFamily="49" charset="0"/>
+                <a:ea typeface="Calibri" panose="020F0502020204030204" pitchFamily="34" charset="0"/>
+                <a:cs typeface="Calibri Light" panose="020F0302020204030204" pitchFamily="34" charset="0"/>
+              </a:rPr>
+              <a:t>2:Imp </a:t>
+            </a:r>
+          </a:p>
+          <a:p>
+            <a:pPr rtl="0">
+              <a:defRPr/>
+            </a:pPr>
+            <a:r>
+              <a:rPr lang="en-US" sz="600" kern="100">
+                <a:solidFill>
+                  <a:schemeClr val="tx1"/>
+                </a:solidFill>
+                <a:latin typeface="Consolas" panose="020B0609020204030204" pitchFamily="49" charset="0"/>
+                <a:ea typeface="Calibri" panose="020F0502020204030204" pitchFamily="34" charset="0"/>
+                <a:cs typeface="Calibri Light" panose="020F0302020204030204" pitchFamily="34" charset="0"/>
+              </a:rPr>
+              <a:t>3:Bookmark </a:t>
+            </a:r>
+          </a:p>
+          <a:p>
+            <a:pPr rtl="0">
+              <a:defRPr/>
+            </a:pPr>
+            <a:r>
+              <a:rPr lang="en-US" sz="600" kern="100">
+                <a:solidFill>
+                  <a:schemeClr val="tx1"/>
+                </a:solidFill>
+                <a:latin typeface="Consolas" panose="020B0609020204030204" pitchFamily="49" charset="0"/>
+                <a:ea typeface="Calibri" panose="020F0502020204030204" pitchFamily="34" charset="0"/>
+                <a:cs typeface="Calibri Light" panose="020F0302020204030204" pitchFamily="34" charset="0"/>
+              </a:rPr>
+              <a:t>4:Del</a:t>
+            </a:r>
+          </a:p>
+        </p:txBody>
+      </p:sp>
+      <p:sp>
+        <p:nvSpPr>
+          <p:cNvPr id="28" name="Rectangle: Rounded Corners 44">
+            <a:extLst>
+              <a:ext uri="{FF2B5EF4-FFF2-40B4-BE49-F238E27FC236}">
+                <a16:creationId xmlns:a16="http://schemas.microsoft.com/office/drawing/2014/main" id="{96D765ED-D9C6-3463-0136-8A90C3A57F14}"/>
+              </a:ext>
+            </a:extLst>
+          </p:cNvPr>
+          <p:cNvSpPr/>
+          <p:nvPr/>
+        </p:nvSpPr>
+        <p:spPr bwMode="auto">
+          <a:xfrm>
+            <a:off x="188719" y="373335"/>
+            <a:ext cx="1467069" cy="1642462"/>
+          </a:xfrm>
+          <a:prstGeom prst="roundRect">
+            <a:avLst>
+              <a:gd name="adj" fmla="val 6742"/>
+            </a:avLst>
+          </a:prstGeom>
+          <a:solidFill>
+            <a:schemeClr val="bg1"/>
+          </a:solidFill>
+          <a:ln>
+            <a:solidFill>
+              <a:schemeClr val="tx1"/>
+            </a:solidFill>
+          </a:ln>
+          <a:effectLst/>
+        </p:spPr>
+        <p:style>
+          <a:lnRef idx="0">
+            <a:schemeClr val="accent4"/>
+          </a:lnRef>
+          <a:fillRef idx="3">
+            <a:schemeClr val="accent4"/>
+          </a:fillRef>
+          <a:effectRef idx="3">
+            <a:schemeClr val="accent4"/>
+          </a:effectRef>
+          <a:fontRef idx="minor">
+            <a:schemeClr val="lt1"/>
+          </a:fontRef>
+        </p:style>
+        <p:txBody>
+          <a:bodyPr rtlCol="1" anchor="ctr"/>
+          <a:lstStyle/>
+          <a:p>
+            <a:pPr rtl="0">
+              <a:defRPr/>
+            </a:pPr>
+            <a:r>
+              <a:rPr lang="en-US" sz="1707" b="1">
+                <a:solidFill>
+                  <a:schemeClr val="bg1"/>
+                </a:solidFill>
+                <a:highlight>
+                  <a:srgbClr val="808000"/>
+                </a:highlight>
+                <a:latin typeface="Segoe UI" panose="020B0502040204020203" pitchFamily="34" charset="0"/>
+                <a:cs typeface="Segoe UI" panose="020B0502040204020203" pitchFamily="34" charset="0"/>
+              </a:rPr>
+              <a:t>CHRP</a:t>
+            </a:r>
+          </a:p>
+          <a:p>
+            <a:pPr rtl="0">
+              <a:defRPr/>
+            </a:pPr>
+            <a:r>
+              <a:rPr lang="en-US" sz="1280" b="1">
+                <a:solidFill>
+                  <a:schemeClr val="tx1"/>
+                </a:solidFill>
+                <a:latin typeface="Segoe UI" panose="020B0502040204020203" pitchFamily="34" charset="0"/>
+                <a:cs typeface="Segoe UI" panose="020B0502040204020203" pitchFamily="34" charset="0"/>
+              </a:rPr>
+              <a:t>ChatroomPosts</a:t>
+            </a:r>
+            <a:endParaRPr sz="1280">
+              <a:solidFill>
+                <a:schemeClr val="tx1"/>
+              </a:solidFill>
+              <a:latin typeface="Segoe UI" panose="020B0502040204020203" pitchFamily="34" charset="0"/>
+              <a:cs typeface="Segoe UI" panose="020B0502040204020203" pitchFamily="34" charset="0"/>
+            </a:endParaRPr>
+          </a:p>
+          <a:p>
+            <a:pPr rtl="0">
+              <a:defRPr/>
+            </a:pPr>
+            <a:r>
+              <a:rPr lang="en-US" sz="853" i="1">
+                <a:solidFill>
+                  <a:schemeClr val="accent5"/>
+                </a:solidFill>
+                <a:latin typeface="Segoe UI" panose="020B0502040204020203" pitchFamily="34" charset="0"/>
+                <a:cs typeface="Segoe UI" panose="020B0502040204020203" pitchFamily="34" charset="0"/>
+              </a:rPr>
+              <a:t>ChatroomPostId</a:t>
+            </a:r>
+          </a:p>
+          <a:p>
+            <a:pPr rtl="0">
+              <a:defRPr/>
+            </a:pPr>
+            <a:r>
+              <a:rPr lang="en-US" sz="853">
+                <a:solidFill>
+                  <a:schemeClr val="tx1"/>
+                </a:solidFill>
+                <a:latin typeface="Segoe UI" panose="020B0502040204020203" pitchFamily="34" charset="0"/>
+                <a:cs typeface="Segoe UI" panose="020B0502040204020203" pitchFamily="34" charset="0"/>
+              </a:rPr>
+              <a:t>ChatroomId</a:t>
+            </a:r>
+          </a:p>
+          <a:p>
+            <a:pPr rtl="0">
+              <a:defRPr/>
+            </a:pPr>
+            <a:r>
+              <a:rPr lang="en-US" sz="853">
+                <a:solidFill>
+                  <a:schemeClr val="tx1"/>
+                </a:solidFill>
+                <a:latin typeface="Segoe UI" panose="020B0502040204020203" pitchFamily="34" charset="0"/>
+                <a:cs typeface="Segoe UI" panose="020B0502040204020203" pitchFamily="34" charset="0"/>
+              </a:rPr>
+              <a:t>SenderId</a:t>
+            </a:r>
+          </a:p>
+          <a:p>
+            <a:pPr rtl="0">
+              <a:defRPr/>
+            </a:pPr>
+            <a:r>
+              <a:rPr lang="en-US" sz="853">
+                <a:solidFill>
+                  <a:schemeClr val="tx1"/>
+                </a:solidFill>
+                <a:latin typeface="Segoe UI" panose="020B0502040204020203" pitchFamily="34" charset="0"/>
+                <a:cs typeface="Segoe UI" panose="020B0502040204020203" pitchFamily="34" charset="0"/>
+              </a:rPr>
+              <a:t>PostDateTime</a:t>
+            </a:r>
+          </a:p>
+          <a:p>
+            <a:pPr rtl="0">
+              <a:defRPr/>
+            </a:pPr>
+            <a:r>
+              <a:rPr lang="en-US" sz="853">
+                <a:solidFill>
+                  <a:schemeClr val="tx1"/>
+                </a:solidFill>
+                <a:latin typeface="Segoe UI" panose="020B0502040204020203" pitchFamily="34" charset="0"/>
+                <a:cs typeface="Segoe UI" panose="020B0502040204020203" pitchFamily="34" charset="0"/>
+              </a:rPr>
+              <a:t>PostText</a:t>
+            </a:r>
+          </a:p>
+          <a:p>
+            <a:pPr rtl="0">
+              <a:defRPr/>
+            </a:pPr>
+            <a:r>
+              <a:rPr lang="en-US" sz="853">
+                <a:solidFill>
+                  <a:schemeClr val="tx1"/>
+                </a:solidFill>
+                <a:latin typeface="Segoe UI" panose="020B0502040204020203" pitchFamily="34" charset="0"/>
+                <a:cs typeface="Segoe UI" panose="020B0502040204020203" pitchFamily="34" charset="0"/>
+              </a:rPr>
+              <a:t>PostTags</a:t>
+            </a:r>
+          </a:p>
+          <a:p>
+            <a:pPr rtl="0">
+              <a:defRPr/>
+            </a:pPr>
+            <a:r>
+              <a:rPr lang="en-US" sz="500">
+                <a:solidFill>
+                  <a:srgbClr val="C00000"/>
+                </a:solidFill>
+                <a:latin typeface="Segoe UI" panose="020B0502040204020203" pitchFamily="34" charset="0"/>
+                <a:cs typeface="Segoe UI" panose="020B0502040204020203" pitchFamily="34" charset="0"/>
+              </a:rPr>
+              <a:t>  1:NeedReply</a:t>
+            </a:r>
+          </a:p>
+          <a:p>
+            <a:pPr rtl="0">
+              <a:defRPr/>
+            </a:pPr>
+            <a:r>
+              <a:rPr lang="en-US" sz="500">
+                <a:solidFill>
+                  <a:srgbClr val="C00000"/>
+                </a:solidFill>
+                <a:latin typeface="Segoe UI" panose="020B0502040204020203" pitchFamily="34" charset="0"/>
+                <a:cs typeface="Segoe UI" panose="020B0502040204020203" pitchFamily="34" charset="0"/>
+              </a:rPr>
+              <a:t>  2:IsEdited</a:t>
+            </a:r>
+          </a:p>
+          <a:p>
+            <a:pPr rtl="0">
+              <a:defRPr/>
+            </a:pPr>
+            <a:r>
+              <a:rPr lang="en-US" sz="500">
+                <a:solidFill>
+                  <a:srgbClr val="C00000"/>
+                </a:solidFill>
+                <a:latin typeface="Segoe UI" panose="020B0502040204020203" pitchFamily="34" charset="0"/>
+                <a:cs typeface="Segoe UI" panose="020B0502040204020203" pitchFamily="34" charset="0"/>
+              </a:rPr>
+              <a:t>  4:IsDeleted</a:t>
+            </a:r>
+          </a:p>
+        </p:txBody>
+      </p:sp>
+      <p:sp>
+        <p:nvSpPr>
+          <p:cNvPr id="2" name="Rectangle: Rounded Corners 1">
+            <a:extLst>
+              <a:ext uri="{FF2B5EF4-FFF2-40B4-BE49-F238E27FC236}">
+                <a16:creationId xmlns:a16="http://schemas.microsoft.com/office/drawing/2014/main" id="{6A0D2D6C-AD44-BFED-2D51-29757378D5BB}"/>
+              </a:ext>
+            </a:extLst>
+          </p:cNvPr>
+          <p:cNvSpPr/>
+          <p:nvPr/>
+        </p:nvSpPr>
+        <p:spPr>
+          <a:xfrm>
+            <a:off x="2818874" y="6578291"/>
+            <a:ext cx="976113" cy="1634612"/>
+          </a:xfrm>
+          <a:prstGeom prst="roundRect">
+            <a:avLst>
+              <a:gd name="adj" fmla="val 1266"/>
+            </a:avLst>
+          </a:prstGeom>
+          <a:solidFill>
+            <a:schemeClr val="bg1"/>
+          </a:solidFill>
+          <a:ln>
+            <a:solidFill>
+              <a:schemeClr val="tx1">
+                <a:lumMod val="65000"/>
+                <a:lumOff val="35000"/>
+              </a:schemeClr>
+            </a:solidFill>
+          </a:ln>
+        </p:spPr>
+        <p:style>
+          <a:lnRef idx="1">
+            <a:schemeClr val="accent4"/>
+          </a:lnRef>
+          <a:fillRef idx="2">
+            <a:schemeClr val="accent4"/>
+          </a:fillRef>
+          <a:effectRef idx="1">
+            <a:schemeClr val="accent4"/>
+          </a:effectRef>
+          <a:fontRef idx="minor">
+            <a:schemeClr val="dk1"/>
+          </a:fontRef>
+        </p:style>
+        <p:txBody>
+          <a:bodyPr rtlCol="1" anchor="t"/>
+          <a:lstStyle/>
+          <a:p>
+            <a:pPr rtl="0"/>
+            <a:r>
+              <a:rPr lang="en-US" sz="1707" b="1" dirty="0">
+                <a:solidFill>
+                  <a:schemeClr val="bg1"/>
+                </a:solidFill>
+                <a:highlight>
+                  <a:srgbClr val="000000"/>
+                </a:highlight>
+              </a:rPr>
+              <a:t>N</a:t>
+            </a:r>
+            <a:r>
+              <a:rPr lang="en-US" sz="1280" b="1" dirty="0"/>
+              <a:t>otes</a:t>
+            </a:r>
+          </a:p>
+          <a:p>
+            <a:pPr rtl="0"/>
+            <a:r>
+              <a:rPr lang="en-US" sz="853" i="1">
+                <a:solidFill>
+                  <a:schemeClr val="accent5"/>
+                </a:solidFill>
+                <a:latin typeface="Segoe UI" panose="020B0502040204020203" pitchFamily="34" charset="0"/>
+                <a:cs typeface="Segoe UI" panose="020B0502040204020203" pitchFamily="34" charset="0"/>
+              </a:rPr>
+              <a:t>NoteId</a:t>
+            </a:r>
+          </a:p>
+          <a:p>
+            <a:pPr rtl="0"/>
+            <a:r>
+              <a:rPr lang="en-US" sz="853"/>
+              <a:t>NoteType</a:t>
+            </a:r>
+          </a:p>
+          <a:p>
+            <a:pPr rtl="0"/>
+            <a:r>
+              <a:rPr lang="en-US" sz="853"/>
+              <a:t>ReferenceId</a:t>
+            </a:r>
+          </a:p>
+          <a:p>
+            <a:pPr rtl="0"/>
+            <a:r>
+              <a:rPr lang="en-US" sz="853"/>
+              <a:t>NoteDateTime</a:t>
+            </a:r>
+            <a:endParaRPr lang="en-US" sz="853" dirty="0"/>
+          </a:p>
+          <a:p>
+            <a:pPr rtl="0"/>
+            <a:r>
+              <a:rPr lang="en-US" sz="853"/>
+              <a:t>NoteText</a:t>
+            </a:r>
+            <a:endParaRPr lang="en-US" sz="853" dirty="0"/>
+          </a:p>
+          <a:p>
+            <a:pPr rtl="0"/>
+            <a:r>
+              <a:rPr lang="en-US" sz="853">
+                <a:solidFill>
+                  <a:schemeClr val="tx1"/>
+                </a:solidFill>
+              </a:rPr>
+              <a:t>CreatorId</a:t>
+            </a:r>
+            <a:endParaRPr lang="fa-IR" sz="853">
+              <a:solidFill>
+                <a:schemeClr val="tx1"/>
+              </a:solidFill>
+            </a:endParaRPr>
+          </a:p>
+          <a:p>
+            <a:pPr rtl="0"/>
+            <a:r>
+              <a:rPr lang="en-US" sz="853">
+                <a:solidFill>
+                  <a:schemeClr val="tx1"/>
+                </a:solidFill>
+              </a:rPr>
+              <a:t>NoteTags</a:t>
+            </a:r>
+          </a:p>
+          <a:p>
+            <a:pPr rtl="0">
+              <a:buNone/>
+            </a:pPr>
+            <a:r>
+              <a:rPr lang="en-US" sz="500" kern="100">
+                <a:solidFill>
+                  <a:srgbClr val="C00000"/>
+                </a:solidFill>
+                <a:latin typeface="Consolas" panose="020B0609020204030204" pitchFamily="49" charset="0"/>
+                <a:ea typeface="Calibri" panose="020F0502020204030204" pitchFamily="34" charset="0"/>
+                <a:cs typeface="Calibri Light" panose="020F0302020204030204" pitchFamily="34" charset="0"/>
+              </a:rPr>
+              <a:t> 1:IsRtl</a:t>
+            </a:r>
+          </a:p>
+          <a:p>
+            <a:pPr rtl="0">
+              <a:buNone/>
+            </a:pPr>
+            <a:r>
+              <a:rPr lang="en-US" sz="500" kern="100">
+                <a:solidFill>
+                  <a:srgbClr val="C00000"/>
+                </a:solidFill>
+                <a:latin typeface="Consolas" panose="020B0609020204030204" pitchFamily="49" charset="0"/>
+                <a:ea typeface="Calibri" panose="020F0502020204030204" pitchFamily="34" charset="0"/>
+                <a:cs typeface="Calibri Light" panose="020F0302020204030204" pitchFamily="34" charset="0"/>
+              </a:rPr>
+              <a:t> 2:IsDone</a:t>
+            </a:r>
+          </a:p>
+          <a:p>
+            <a:pPr rtl="0">
+              <a:buNone/>
+            </a:pPr>
+            <a:r>
+              <a:rPr lang="en-US" sz="500" kern="100">
+                <a:solidFill>
+                  <a:srgbClr val="C00000"/>
+                </a:solidFill>
+                <a:latin typeface="Consolas" panose="020B0609020204030204" pitchFamily="49" charset="0"/>
+                <a:ea typeface="Calibri" panose="020F0502020204030204" pitchFamily="34" charset="0"/>
+                <a:cs typeface="Calibri Light" panose="020F0302020204030204" pitchFamily="34" charset="0"/>
+              </a:rPr>
+              <a:t> 4:IsShared</a:t>
+            </a:r>
+          </a:p>
+          <a:p>
+            <a:pPr rtl="0">
+              <a:buNone/>
+            </a:pPr>
+            <a:r>
+              <a:rPr lang="en-US" sz="500" kern="100">
+                <a:solidFill>
+                  <a:srgbClr val="C00000"/>
+                </a:solidFill>
+                <a:latin typeface="Consolas" panose="020B0609020204030204" pitchFamily="49" charset="0"/>
+                <a:ea typeface="Calibri" panose="020F0502020204030204" pitchFamily="34" charset="0"/>
+                <a:cs typeface="Calibri Light" panose="020F0302020204030204" pitchFamily="34" charset="0"/>
+              </a:rPr>
+              <a:t> 8:IsReadonly</a:t>
+            </a:r>
+          </a:p>
+        </p:txBody>
+      </p:sp>
+      <p:sp>
+        <p:nvSpPr>
+          <p:cNvPr id="3" name="Rectangle: Rounded Corners 2">
+            <a:extLst>
+              <a:ext uri="{FF2B5EF4-FFF2-40B4-BE49-F238E27FC236}">
+                <a16:creationId xmlns:a16="http://schemas.microsoft.com/office/drawing/2014/main" id="{4E95C3AB-3ADD-0B38-7306-5F78CAD1B483}"/>
+              </a:ext>
+            </a:extLst>
+          </p:cNvPr>
+          <p:cNvSpPr/>
+          <p:nvPr/>
+        </p:nvSpPr>
+        <p:spPr>
+          <a:xfrm>
+            <a:off x="3581379" y="7721770"/>
+            <a:ext cx="954729" cy="775075"/>
+          </a:xfrm>
+          <a:prstGeom prst="roundRect">
+            <a:avLst>
+              <a:gd name="adj" fmla="val 4805"/>
+            </a:avLst>
+          </a:prstGeom>
+          <a:solidFill>
+            <a:schemeClr val="bg1"/>
+          </a:solidFill>
+          <a:ln>
+            <a:solidFill>
+              <a:schemeClr val="tx1">
+                <a:lumMod val="65000"/>
+                <a:lumOff val="35000"/>
+              </a:schemeClr>
+            </a:solidFill>
+          </a:ln>
+        </p:spPr>
+        <p:style>
+          <a:lnRef idx="1">
+            <a:schemeClr val="accent4"/>
+          </a:lnRef>
+          <a:fillRef idx="2">
+            <a:schemeClr val="accent4"/>
+          </a:fillRef>
+          <a:effectRef idx="1">
+            <a:schemeClr val="accent4"/>
+          </a:effectRef>
+          <a:fontRef idx="minor">
+            <a:schemeClr val="dk1"/>
+          </a:fontRef>
+        </p:style>
+        <p:txBody>
+          <a:bodyPr rtlCol="1" anchor="t"/>
+          <a:lstStyle/>
+          <a:p>
+            <a:pPr rtl="0"/>
+            <a:r>
+              <a:rPr lang="en-US" sz="1707" b="1" dirty="0" err="1">
+                <a:solidFill>
+                  <a:schemeClr val="bg1"/>
+                </a:solidFill>
+                <a:highlight>
+                  <a:srgbClr val="000000"/>
+                </a:highlight>
+              </a:rPr>
+              <a:t>N</a:t>
+            </a:r>
+            <a:r>
+              <a:rPr lang="en-US" sz="1280" b="1" dirty="0" err="1"/>
+              <a:t>oteNet</a:t>
+            </a:r>
+            <a:endParaRPr lang="en-US" sz="1280" b="1" dirty="0"/>
+          </a:p>
+          <a:p>
+            <a:pPr rtl="0"/>
+            <a:r>
+              <a:rPr lang="en-US" sz="853" i="1">
+                <a:solidFill>
+                  <a:schemeClr val="accent5"/>
+                </a:solidFill>
+                <a:latin typeface="Segoe UI" panose="020B0502040204020203" pitchFamily="34" charset="0"/>
+                <a:cs typeface="Segoe UI" panose="020B0502040204020203" pitchFamily="34" charset="0"/>
+              </a:rPr>
+              <a:t>NoteNetId</a:t>
+            </a:r>
+            <a:endParaRPr lang="en-US" sz="853" i="1" dirty="0">
+              <a:solidFill>
+                <a:schemeClr val="accent5"/>
+              </a:solidFill>
+              <a:latin typeface="Segoe UI" panose="020B0502040204020203" pitchFamily="34" charset="0"/>
+              <a:cs typeface="Segoe UI" panose="020B0502040204020203" pitchFamily="34" charset="0"/>
+            </a:endParaRPr>
+          </a:p>
+          <a:p>
+            <a:pPr rtl="0"/>
+            <a:r>
+              <a:rPr lang="en-US" sz="853"/>
+              <a:t>NoteAId</a:t>
+            </a:r>
+          </a:p>
+          <a:p>
+            <a:pPr rtl="0"/>
+            <a:r>
+              <a:rPr lang="en-US" sz="853"/>
+              <a:t>NoteBId</a:t>
+            </a:r>
+            <a:endParaRPr lang="en-US" sz="853" dirty="0"/>
+          </a:p>
+        </p:txBody>
+      </p:sp>
+      <p:sp>
+        <p:nvSpPr>
+          <p:cNvPr id="25" name="Rectangle: Rounded Corners 44">
+            <a:extLst>
+              <a:ext uri="{FF2B5EF4-FFF2-40B4-BE49-F238E27FC236}">
+                <a16:creationId xmlns:a16="http://schemas.microsoft.com/office/drawing/2014/main" id="{A460627C-6A84-BFD9-020B-04D76A321D4A}"/>
+              </a:ext>
+            </a:extLst>
+          </p:cNvPr>
+          <p:cNvSpPr/>
+          <p:nvPr/>
+        </p:nvSpPr>
+        <p:spPr bwMode="auto">
+          <a:xfrm>
+            <a:off x="1531940" y="694119"/>
+            <a:ext cx="1210830" cy="1196534"/>
+          </a:xfrm>
+          <a:prstGeom prst="roundRect">
+            <a:avLst>
+              <a:gd name="adj" fmla="val 9941"/>
+            </a:avLst>
+          </a:prstGeom>
+          <a:solidFill>
+            <a:schemeClr val="bg1"/>
+          </a:solidFill>
+          <a:ln>
+            <a:solidFill>
+              <a:schemeClr val="tx1"/>
+            </a:solidFill>
+          </a:ln>
+          <a:effectLst/>
+        </p:spPr>
+        <p:style>
+          <a:lnRef idx="0">
+            <a:schemeClr val="accent4"/>
+          </a:lnRef>
+          <a:fillRef idx="3">
+            <a:schemeClr val="accent4"/>
+          </a:fillRef>
+          <a:effectRef idx="3">
+            <a:schemeClr val="accent4"/>
+          </a:effectRef>
+          <a:fontRef idx="minor">
+            <a:schemeClr val="lt1"/>
+          </a:fontRef>
+        </p:style>
+        <p:txBody>
+          <a:bodyPr rtlCol="1" anchor="ctr"/>
+          <a:lstStyle/>
+          <a:p>
+            <a:pPr rtl="0">
+              <a:defRPr/>
+            </a:pPr>
+            <a:r>
+              <a:rPr lang="en-US" sz="1707" b="1">
+                <a:solidFill>
+                  <a:schemeClr val="bg1"/>
+                </a:solidFill>
+                <a:highlight>
+                  <a:srgbClr val="808000"/>
+                </a:highlight>
+                <a:latin typeface="Segoe UI" panose="020B0502040204020203" pitchFamily="34" charset="0"/>
+                <a:cs typeface="Segoe UI" panose="020B0502040204020203" pitchFamily="34" charset="0"/>
+              </a:rPr>
+              <a:t>CHR</a:t>
+            </a:r>
+          </a:p>
+          <a:p>
+            <a:pPr rtl="0">
+              <a:defRPr/>
+            </a:pPr>
+            <a:r>
+              <a:rPr lang="en-US" sz="1280" b="1">
+                <a:solidFill>
+                  <a:schemeClr val="tx1"/>
+                </a:solidFill>
+                <a:latin typeface="Segoe UI" panose="020B0502040204020203" pitchFamily="34" charset="0"/>
+                <a:cs typeface="Segoe UI" panose="020B0502040204020203" pitchFamily="34" charset="0"/>
+              </a:rPr>
+              <a:t>Chatrooms</a:t>
+            </a:r>
+            <a:endParaRPr sz="1280">
+              <a:solidFill>
+                <a:schemeClr val="tx1"/>
+              </a:solidFill>
+              <a:latin typeface="Segoe UI" panose="020B0502040204020203" pitchFamily="34" charset="0"/>
+              <a:cs typeface="Segoe UI" panose="020B0502040204020203" pitchFamily="34" charset="0"/>
+            </a:endParaRPr>
+          </a:p>
+          <a:p>
+            <a:pPr rtl="0">
+              <a:defRPr/>
+            </a:pPr>
+            <a:r>
+              <a:rPr lang="en-US" sz="853" i="1">
+                <a:solidFill>
+                  <a:schemeClr val="accent5"/>
+                </a:solidFill>
+                <a:latin typeface="Segoe UI" panose="020B0502040204020203" pitchFamily="34" charset="0"/>
+                <a:cs typeface="Segoe UI" panose="020B0502040204020203" pitchFamily="34" charset="0"/>
+              </a:rPr>
+              <a:t>ChatroomId</a:t>
+            </a:r>
+          </a:p>
+          <a:p>
+            <a:pPr rtl="0">
+              <a:defRPr/>
+            </a:pPr>
+            <a:r>
+              <a:rPr lang="en-US" sz="853">
+                <a:solidFill>
+                  <a:schemeClr val="tx1"/>
+                </a:solidFill>
+                <a:latin typeface="Segoe UI" panose="020B0502040204020203" pitchFamily="34" charset="0"/>
+                <a:cs typeface="Segoe UI" panose="020B0502040204020203" pitchFamily="34" charset="0"/>
+              </a:rPr>
+              <a:t>ChatroomUserId</a:t>
+            </a:r>
+          </a:p>
+          <a:p>
+            <a:pPr rtl="0">
+              <a:defRPr/>
+            </a:pPr>
+            <a:r>
+              <a:rPr lang="en-US" sz="853">
+                <a:solidFill>
+                  <a:schemeClr val="tx1"/>
+                </a:solidFill>
+                <a:latin typeface="Segoe UI" panose="020B0502040204020203" pitchFamily="34" charset="0"/>
+                <a:cs typeface="Segoe UI" panose="020B0502040204020203" pitchFamily="34" charset="0"/>
+              </a:rPr>
+              <a:t>ChatroomAdminId</a:t>
+            </a:r>
+          </a:p>
+          <a:p>
+            <a:pPr rtl="0">
+              <a:defRPr/>
+            </a:pPr>
+            <a:r>
+              <a:rPr lang="en-US" sz="853">
+                <a:solidFill>
+                  <a:schemeClr val="tx1"/>
+                </a:solidFill>
+                <a:latin typeface="Segoe UI" panose="020B0502040204020203" pitchFamily="34" charset="0"/>
+                <a:cs typeface="Segoe UI" panose="020B0502040204020203" pitchFamily="34" charset="0"/>
+              </a:rPr>
+              <a:t>ChatroomName</a:t>
+            </a:r>
+          </a:p>
+          <a:p>
+            <a:pPr rtl="0">
+              <a:defRPr/>
+            </a:pPr>
+            <a:r>
+              <a:rPr lang="en-US" sz="853">
+                <a:solidFill>
+                  <a:schemeClr val="tx1"/>
+                </a:solidFill>
+                <a:latin typeface="Segoe UI" panose="020B0502040204020203" pitchFamily="34" charset="0"/>
+                <a:cs typeface="Segoe UI" panose="020B0502040204020203" pitchFamily="34" charset="0"/>
+              </a:rPr>
+              <a:t>ChatroomTerms</a:t>
+            </a:r>
+          </a:p>
+        </p:txBody>
+      </p:sp>
+      <p:sp>
+        <p:nvSpPr>
+          <p:cNvPr id="23" name="Rectangle: Rounded Corners 44">
+            <a:extLst>
+              <a:ext uri="{FF2B5EF4-FFF2-40B4-BE49-F238E27FC236}">
+                <a16:creationId xmlns:a16="http://schemas.microsoft.com/office/drawing/2014/main" id="{60EEA583-4825-92D1-3BD6-2EFF827734DE}"/>
+              </a:ext>
+            </a:extLst>
+          </p:cNvPr>
+          <p:cNvSpPr/>
+          <p:nvPr/>
+        </p:nvSpPr>
+        <p:spPr bwMode="auto">
+          <a:xfrm>
+            <a:off x="8933155" y="133499"/>
+            <a:ext cx="1366068" cy="1748618"/>
+          </a:xfrm>
+          <a:prstGeom prst="roundRect">
+            <a:avLst>
+              <a:gd name="adj" fmla="val 9941"/>
+            </a:avLst>
+          </a:prstGeom>
+          <a:solidFill>
+            <a:schemeClr val="bg1"/>
+          </a:solidFill>
+          <a:ln>
+            <a:solidFill>
+              <a:schemeClr val="tx1"/>
+            </a:solidFill>
+          </a:ln>
+          <a:effectLst/>
+        </p:spPr>
+        <p:style>
+          <a:lnRef idx="0">
+            <a:schemeClr val="accent4"/>
+          </a:lnRef>
+          <a:fillRef idx="3">
+            <a:schemeClr val="accent4"/>
+          </a:fillRef>
+          <a:effectRef idx="3">
+            <a:schemeClr val="accent4"/>
+          </a:effectRef>
+          <a:fontRef idx="minor">
+            <a:schemeClr val="lt1"/>
+          </a:fontRef>
+        </p:style>
+        <p:txBody>
+          <a:bodyPr rtlCol="1" anchor="ctr"/>
+          <a:lstStyle/>
+          <a:p>
+            <a:pPr rtl="0">
+              <a:defRPr/>
+            </a:pPr>
+            <a:r>
+              <a:rPr lang="en-US" sz="1707" b="1">
+                <a:solidFill>
+                  <a:schemeClr val="bg1"/>
+                </a:solidFill>
+                <a:highlight>
+                  <a:srgbClr val="008080"/>
+                </a:highlight>
+                <a:latin typeface="Segoe UI" panose="020B0502040204020203" pitchFamily="34" charset="0"/>
+                <a:cs typeface="Segoe UI" panose="020B0502040204020203" pitchFamily="34" charset="0"/>
+              </a:rPr>
+              <a:t>U</a:t>
+            </a:r>
+          </a:p>
+          <a:p>
+            <a:pPr rtl="0">
+              <a:defRPr/>
+            </a:pPr>
+            <a:r>
+              <a:rPr lang="en-US" sz="1280" b="1">
+                <a:solidFill>
+                  <a:schemeClr val="tx1"/>
+                </a:solidFill>
+                <a:latin typeface="Segoe UI" panose="020B0502040204020203" pitchFamily="34" charset="0"/>
+                <a:cs typeface="Segoe UI" panose="020B0502040204020203" pitchFamily="34" charset="0"/>
+              </a:rPr>
+              <a:t>usrs</a:t>
+            </a:r>
+            <a:endParaRPr sz="1280">
+              <a:solidFill>
+                <a:schemeClr val="tx1"/>
+              </a:solidFill>
+              <a:latin typeface="Segoe UI" panose="020B0502040204020203" pitchFamily="34" charset="0"/>
+              <a:cs typeface="Segoe UI" panose="020B0502040204020203" pitchFamily="34" charset="0"/>
+            </a:endParaRPr>
+          </a:p>
+          <a:p>
+            <a:pPr rtl="0">
+              <a:defRPr/>
+            </a:pPr>
+            <a:r>
+              <a:rPr lang="en-US" sz="853" i="1">
+                <a:solidFill>
+                  <a:schemeClr val="accent5"/>
+                </a:solidFill>
+                <a:latin typeface="Segoe UI" panose="020B0502040204020203" pitchFamily="34" charset="0"/>
+                <a:cs typeface="Segoe UI" panose="020B0502040204020203" pitchFamily="34" charset="0"/>
+              </a:rPr>
+              <a:t>UsrId</a:t>
+            </a:r>
+          </a:p>
+          <a:p>
+            <a:pPr rtl="0">
+              <a:defRPr/>
+            </a:pPr>
+            <a:r>
+              <a:rPr lang="en-US" sz="853">
+                <a:solidFill>
+                  <a:schemeClr val="tx1"/>
+                </a:solidFill>
+                <a:latin typeface="Segoe UI" panose="020B0502040204020203" pitchFamily="34" charset="0"/>
+                <a:cs typeface="Segoe UI" panose="020B0502040204020203" pitchFamily="34" charset="0"/>
+              </a:rPr>
+              <a:t>DepartmentId</a:t>
+            </a:r>
+            <a:endParaRPr lang="en-US" sz="853" i="1">
+              <a:solidFill>
+                <a:schemeClr val="accent5"/>
+              </a:solidFill>
+              <a:latin typeface="Segoe UI" panose="020B0502040204020203" pitchFamily="34" charset="0"/>
+              <a:cs typeface="Segoe UI" panose="020B0502040204020203" pitchFamily="34" charset="0"/>
+            </a:endParaRPr>
+          </a:p>
+          <a:p>
+            <a:pPr rtl="0">
+              <a:defRPr/>
+            </a:pPr>
+            <a:r>
+              <a:rPr lang="en-US" sz="853">
+                <a:solidFill>
+                  <a:schemeClr val="tx1"/>
+                </a:solidFill>
+                <a:latin typeface="Segoe UI" panose="020B0502040204020203" pitchFamily="34" charset="0"/>
+                <a:cs typeface="Segoe UI" panose="020B0502040204020203" pitchFamily="34" charset="0"/>
+              </a:rPr>
+              <a:t>UsrName</a:t>
+            </a:r>
+          </a:p>
+          <a:p>
+            <a:pPr rtl="0">
+              <a:defRPr/>
+            </a:pPr>
+            <a:r>
+              <a:rPr lang="en-US" sz="853">
+                <a:solidFill>
+                  <a:schemeClr val="tx1"/>
+                </a:solidFill>
+                <a:latin typeface="Segoe UI" panose="020B0502040204020203" pitchFamily="34" charset="0"/>
+                <a:cs typeface="Segoe UI" panose="020B0502040204020203" pitchFamily="34" charset="0"/>
+              </a:rPr>
+              <a:t>UsrPass</a:t>
+            </a:r>
+          </a:p>
+          <a:p>
+            <a:pPr rtl="0">
+              <a:defRPr/>
+            </a:pPr>
+            <a:r>
+              <a:rPr lang="en-US" sz="853">
+                <a:solidFill>
+                  <a:schemeClr val="tx1"/>
+                </a:solidFill>
+                <a:latin typeface="Segoe UI" panose="020B0502040204020203" pitchFamily="34" charset="0"/>
+                <a:cs typeface="Segoe UI" panose="020B0502040204020203" pitchFamily="34" charset="0"/>
+              </a:rPr>
+              <a:t>UsrNickname</a:t>
+            </a:r>
+          </a:p>
+          <a:p>
+            <a:pPr rtl="0">
+              <a:defRPr/>
+            </a:pPr>
+            <a:r>
+              <a:rPr lang="en-US" sz="853">
+                <a:solidFill>
+                  <a:schemeClr val="tx1"/>
+                </a:solidFill>
+                <a:latin typeface="Segoe UI" panose="020B0502040204020203" pitchFamily="34" charset="0"/>
+                <a:cs typeface="Segoe UI" panose="020B0502040204020203" pitchFamily="34" charset="0"/>
+              </a:rPr>
+              <a:t>UsrTags</a:t>
+            </a:r>
+            <a:r>
+              <a:rPr lang="en-US" sz="853">
+                <a:solidFill>
+                  <a:srgbClr val="C00000"/>
+                </a:solidFill>
+                <a:latin typeface="Segoe UI" panose="020B0502040204020203" pitchFamily="34" charset="0"/>
+                <a:cs typeface="Segoe UI" panose="020B0502040204020203" pitchFamily="34" charset="0"/>
+              </a:rPr>
+              <a:t> </a:t>
+            </a:r>
+          </a:p>
+          <a:p>
+            <a:pPr marL="90488" rtl="0">
+              <a:defRPr/>
+            </a:pPr>
+            <a:r>
+              <a:rPr lang="en-US" sz="500">
+                <a:solidFill>
+                  <a:srgbClr val="C00000"/>
+                </a:solidFill>
+                <a:latin typeface="Segoe UI" panose="020B0502040204020203" pitchFamily="34" charset="0"/>
+                <a:cs typeface="Segoe UI" panose="020B0502040204020203" pitchFamily="34" charset="0"/>
+              </a:rPr>
+              <a:t>1: IsActive</a:t>
+            </a:r>
+          </a:p>
+          <a:p>
+            <a:pPr marL="90488" rtl="0">
+              <a:defRPr/>
+            </a:pPr>
+            <a:r>
+              <a:rPr lang="en-US" sz="500">
+                <a:solidFill>
+                  <a:srgbClr val="C00000"/>
+                </a:solidFill>
+                <a:latin typeface="Segoe UI" panose="020B0502040204020203" pitchFamily="34" charset="0"/>
+                <a:cs typeface="Segoe UI" panose="020B0502040204020203" pitchFamily="34" charset="0"/>
+              </a:rPr>
+              <a:t>2: ChangePass</a:t>
+            </a:r>
+          </a:p>
+          <a:p>
+            <a:pPr marL="90488" rtl="0">
+              <a:defRPr/>
+            </a:pPr>
+            <a:r>
+              <a:rPr lang="en-US" sz="500">
+                <a:solidFill>
+                  <a:srgbClr val="C00000"/>
+                </a:solidFill>
+                <a:latin typeface="Segoe UI" panose="020B0502040204020203" pitchFamily="34" charset="0"/>
+                <a:cs typeface="Segoe UI" panose="020B0502040204020203" pitchFamily="34" charset="0"/>
+              </a:rPr>
+              <a:t>4    : -          8    : -</a:t>
+            </a:r>
+          </a:p>
+          <a:p>
+            <a:pPr marL="90488" rtl="0">
+              <a:defRPr/>
+            </a:pPr>
+            <a:r>
+              <a:rPr lang="en-US" sz="500">
+                <a:solidFill>
+                  <a:srgbClr val="C00000"/>
+                </a:solidFill>
+                <a:latin typeface="Segoe UI" panose="020B0502040204020203" pitchFamily="34" charset="0"/>
+                <a:cs typeface="Segoe UI" panose="020B0502040204020203" pitchFamily="34" charset="0"/>
+              </a:rPr>
+              <a:t>16  : -          32  : -</a:t>
+            </a:r>
+          </a:p>
+          <a:p>
+            <a:pPr marL="90488" rtl="0">
+              <a:defRPr/>
+            </a:pPr>
+            <a:r>
+              <a:rPr lang="en-US" sz="500">
+                <a:solidFill>
+                  <a:srgbClr val="C00000"/>
+                </a:solidFill>
+                <a:latin typeface="Segoe UI" panose="020B0502040204020203" pitchFamily="34" charset="0"/>
+                <a:cs typeface="Segoe UI" panose="020B0502040204020203" pitchFamily="34" charset="0"/>
+              </a:rPr>
+              <a:t>64  : -          128: SuperUser</a:t>
+            </a:r>
+          </a:p>
+          <a:p>
+            <a:pPr marL="90488" rtl="0">
+              <a:defRPr/>
+            </a:pPr>
+            <a:r>
+              <a:rPr lang="en-US" sz="500">
+                <a:solidFill>
+                  <a:srgbClr val="C00000"/>
+                </a:solidFill>
+                <a:latin typeface="Segoe UI" panose="020B0502040204020203" pitchFamily="34" charset="0"/>
+                <a:cs typeface="Segoe UI" panose="020B0502040204020203" pitchFamily="34" charset="0"/>
+              </a:rPr>
+              <a:t>256: CalendarFa</a:t>
+            </a:r>
+          </a:p>
+        </p:txBody>
+      </p:sp>
+      <p:sp>
+        <p:nvSpPr>
+          <p:cNvPr id="20" name="Rectangle: Rounded Corners 44">
+            <a:extLst>
+              <a:ext uri="{FF2B5EF4-FFF2-40B4-BE49-F238E27FC236}">
+                <a16:creationId xmlns:a16="http://schemas.microsoft.com/office/drawing/2014/main" id="{C1A287B8-4523-C3A6-B4FC-EC364E463395}"/>
+              </a:ext>
+            </a:extLst>
+          </p:cNvPr>
+          <p:cNvSpPr/>
+          <p:nvPr/>
+        </p:nvSpPr>
+        <p:spPr bwMode="auto">
+          <a:xfrm>
+            <a:off x="10104553" y="236209"/>
+            <a:ext cx="1344323" cy="915820"/>
+          </a:xfrm>
+          <a:prstGeom prst="roundRect">
+            <a:avLst>
+              <a:gd name="adj" fmla="val 9941"/>
+            </a:avLst>
+          </a:prstGeom>
+          <a:solidFill>
+            <a:schemeClr val="bg1"/>
+          </a:solidFill>
+          <a:ln>
+            <a:solidFill>
+              <a:schemeClr val="tx1"/>
+            </a:solidFill>
+          </a:ln>
+          <a:effectLst/>
+        </p:spPr>
+        <p:style>
+          <a:lnRef idx="0">
+            <a:schemeClr val="accent4"/>
+          </a:lnRef>
+          <a:fillRef idx="3">
+            <a:schemeClr val="accent4"/>
+          </a:fillRef>
+          <a:effectRef idx="3">
+            <a:schemeClr val="accent4"/>
+          </a:effectRef>
+          <a:fontRef idx="minor">
+            <a:schemeClr val="lt1"/>
+          </a:fontRef>
+        </p:style>
+        <p:txBody>
+          <a:bodyPr rtlCol="1" anchor="ctr"/>
+          <a:lstStyle/>
+          <a:p>
+            <a:pPr rtl="0">
+              <a:defRPr/>
+            </a:pPr>
+            <a:r>
+              <a:rPr lang="en-US" sz="1707" b="1">
+                <a:solidFill>
+                  <a:schemeClr val="bg1"/>
+                </a:solidFill>
+                <a:highlight>
+                  <a:srgbClr val="C0C0C0"/>
+                </a:highlight>
+                <a:latin typeface="Segoe UI" panose="020B0502040204020203" pitchFamily="34" charset="0"/>
+                <a:cs typeface="Segoe UI" panose="020B0502040204020203" pitchFamily="34" charset="0"/>
+              </a:rPr>
+              <a:t>D</a:t>
+            </a:r>
+          </a:p>
+          <a:p>
+            <a:pPr rtl="0">
+              <a:defRPr/>
+            </a:pPr>
+            <a:r>
+              <a:rPr lang="en-US" sz="1280" b="1">
+                <a:solidFill>
+                  <a:schemeClr val="tx1"/>
+                </a:solidFill>
+                <a:latin typeface="Segoe UI" panose="020B0502040204020203" pitchFamily="34" charset="0"/>
+                <a:cs typeface="Segoe UI" panose="020B0502040204020203" pitchFamily="34" charset="0"/>
+              </a:rPr>
+              <a:t>Departments</a:t>
+            </a:r>
+            <a:endParaRPr sz="1280">
+              <a:solidFill>
+                <a:schemeClr val="tx1"/>
+              </a:solidFill>
+              <a:latin typeface="Segoe UI" panose="020B0502040204020203" pitchFamily="34" charset="0"/>
+              <a:cs typeface="Segoe UI" panose="020B0502040204020203" pitchFamily="34" charset="0"/>
+            </a:endParaRPr>
+          </a:p>
+          <a:p>
+            <a:pPr rtl="0">
+              <a:defRPr/>
+            </a:pPr>
+            <a:r>
+              <a:rPr lang="en-US" sz="853">
+                <a:solidFill>
+                  <a:schemeClr val="tx1"/>
+                </a:solidFill>
+                <a:latin typeface="Segoe UI" panose="020B0502040204020203" pitchFamily="34" charset="0"/>
+                <a:cs typeface="Segoe UI" panose="020B0502040204020203" pitchFamily="34" charset="0"/>
+              </a:rPr>
+              <a:t>DepartmentId</a:t>
+            </a:r>
+          </a:p>
+          <a:p>
+            <a:pPr rtl="0">
+              <a:defRPr/>
+            </a:pPr>
+            <a:r>
+              <a:rPr lang="en-US" sz="853">
+                <a:solidFill>
+                  <a:schemeClr val="tx1"/>
+                </a:solidFill>
+                <a:latin typeface="Segoe UI" panose="020B0502040204020203" pitchFamily="34" charset="0"/>
+                <a:cs typeface="Segoe UI" panose="020B0502040204020203" pitchFamily="34" charset="0"/>
+              </a:rPr>
+              <a:t>DepartmentName</a:t>
+            </a:r>
+          </a:p>
+          <a:p>
+            <a:pPr rtl="0">
+              <a:defRPr/>
+            </a:pPr>
+            <a:r>
+              <a:rPr lang="en-US" sz="853">
+                <a:solidFill>
+                  <a:schemeClr val="tx1"/>
+                </a:solidFill>
+                <a:latin typeface="Segoe UI" panose="020B0502040204020203" pitchFamily="34" charset="0"/>
+                <a:cs typeface="Segoe UI" panose="020B0502040204020203" pitchFamily="34" charset="0"/>
+              </a:rPr>
+              <a:t>DepartmentInfo</a:t>
             </a:r>
           </a:p>
         </p:txBody>
@@ -7290,7 +8679,7 @@
         </p:nvSpPr>
         <p:spPr>
           <a:xfrm>
-            <a:off x="1585325" y="6149940"/>
+            <a:off x="1106851" y="6294666"/>
             <a:ext cx="1316313" cy="1122060"/>
           </a:xfrm>
           <a:prstGeom prst="roundRect">
@@ -7413,290 +8802,10 @@
       </p:sp>
       <p:sp>
         <p:nvSpPr>
-          <p:cNvPr id="16" name="Rectangle: Rounded Corners 15">
+          <p:cNvPr id="22" name="Rectangle: Rounded Corners 44">
             <a:extLst>
               <a:ext uri="{FF2B5EF4-FFF2-40B4-BE49-F238E27FC236}">
-                <a16:creationId xmlns:a16="http://schemas.microsoft.com/office/drawing/2014/main" id="{8EB7AD94-FB73-258B-E14F-D29425205938}"/>
-              </a:ext>
-            </a:extLst>
-          </p:cNvPr>
-          <p:cNvSpPr/>
-          <p:nvPr/>
-        </p:nvSpPr>
-        <p:spPr>
-          <a:xfrm>
-            <a:off x="632108" y="6149941"/>
-            <a:ext cx="997025" cy="1301732"/>
-          </a:xfrm>
-          <a:prstGeom prst="roundRect">
-            <a:avLst>
-              <a:gd name="adj" fmla="val 8313"/>
-            </a:avLst>
-          </a:prstGeom>
-          <a:solidFill>
-            <a:schemeClr val="bg1"/>
-          </a:solidFill>
-          <a:ln>
-            <a:solidFill>
-              <a:schemeClr val="tx1">
-                <a:lumMod val="65000"/>
-                <a:lumOff val="35000"/>
-              </a:schemeClr>
-            </a:solidFill>
-          </a:ln>
-        </p:spPr>
-        <p:style>
-          <a:lnRef idx="1">
-            <a:schemeClr val="accent4"/>
-          </a:lnRef>
-          <a:fillRef idx="2">
-            <a:schemeClr val="accent4"/>
-          </a:fillRef>
-          <a:effectRef idx="1">
-            <a:schemeClr val="accent4"/>
-          </a:effectRef>
-          <a:fontRef idx="minor">
-            <a:schemeClr val="dk1"/>
-          </a:fontRef>
-        </p:style>
-        <p:txBody>
-          <a:bodyPr rtlCol="1" anchor="t"/>
-          <a:lstStyle/>
-          <a:p>
-            <a:pPr rtl="0"/>
-            <a:r>
-              <a:rPr lang="en-US" sz="1707" b="1" dirty="0">
-                <a:solidFill>
-                  <a:schemeClr val="bg1"/>
-                </a:solidFill>
-                <a:highlight>
-                  <a:srgbClr val="000000"/>
-                </a:highlight>
-              </a:rPr>
-              <a:t>P</a:t>
-            </a:r>
-            <a:r>
-              <a:rPr lang="en-US" sz="1280" b="1" dirty="0"/>
-              <a:t>rojects</a:t>
-            </a:r>
-            <a:endParaRPr lang="en-US" sz="853" b="1" dirty="0"/>
-          </a:p>
-          <a:p>
-            <a:pPr rtl="0"/>
-            <a:r>
-              <a:rPr lang="en-US" sz="853" i="1">
-                <a:solidFill>
-                  <a:schemeClr val="accent5"/>
-                </a:solidFill>
-                <a:latin typeface="Segoe UI" panose="020B0502040204020203" pitchFamily="34" charset="0"/>
-                <a:cs typeface="Segoe UI" panose="020B0502040204020203" pitchFamily="34" charset="0"/>
-              </a:rPr>
-              <a:t>ProjectId</a:t>
-            </a:r>
-          </a:p>
-          <a:p>
-            <a:pPr rtl="0"/>
-            <a:r>
-              <a:rPr lang="en-US" sz="853">
-                <a:solidFill>
-                  <a:schemeClr val="tx1"/>
-                </a:solidFill>
-              </a:rPr>
-              <a:t>UserId</a:t>
-            </a:r>
-          </a:p>
-          <a:p>
-            <a:pPr rtl="0"/>
-            <a:r>
-              <a:rPr lang="en-US" sz="853">
-                <a:solidFill>
-                  <a:schemeClr val="tx1"/>
-                </a:solidFill>
-              </a:rPr>
-              <a:t>UserType</a:t>
-            </a:r>
-          </a:p>
-          <a:p>
-            <a:pPr rtl="0">
-              <a:buNone/>
-            </a:pPr>
-            <a:r>
-              <a:rPr lang="en-US" sz="600" kern="100">
-                <a:solidFill>
-                  <a:schemeClr val="tx1"/>
-                </a:solidFill>
-                <a:latin typeface="Consolas" panose="020B0609020204030204" pitchFamily="49" charset="0"/>
-                <a:ea typeface="Calibri" panose="020F0502020204030204" pitchFamily="34" charset="0"/>
-                <a:cs typeface="Calibri Light" panose="020F0302020204030204" pitchFamily="34" charset="0"/>
-              </a:rPr>
-              <a:t> 1:Teacher</a:t>
-            </a:r>
-          </a:p>
-          <a:p>
-            <a:pPr rtl="0">
-              <a:buNone/>
-            </a:pPr>
-            <a:r>
-              <a:rPr lang="en-US" sz="600" kern="100">
-                <a:solidFill>
-                  <a:schemeClr val="tx1"/>
-                </a:solidFill>
-                <a:latin typeface="Consolas" panose="020B0609020204030204" pitchFamily="49" charset="0"/>
-                <a:ea typeface="Calibri" panose="020F0502020204030204" pitchFamily="34" charset="0"/>
-                <a:cs typeface="Calibri Light" panose="020F0302020204030204" pitchFamily="34" charset="0"/>
-              </a:rPr>
-              <a:t> 2:Student</a:t>
-            </a:r>
-            <a:endParaRPr lang="en-US" sz="853" dirty="0"/>
-          </a:p>
-          <a:p>
-            <a:pPr rtl="0"/>
-            <a:r>
-              <a:rPr lang="en-US" sz="853" dirty="0" err="1"/>
-              <a:t>ProjectName</a:t>
-            </a:r>
-            <a:endParaRPr lang="en-US" sz="853" dirty="0"/>
-          </a:p>
-          <a:p>
-            <a:pPr rtl="0"/>
-            <a:r>
-              <a:rPr lang="en-US" sz="853">
-                <a:solidFill>
-                  <a:schemeClr val="tx1"/>
-                </a:solidFill>
-              </a:rPr>
-              <a:t>ProjectTags</a:t>
-            </a:r>
-          </a:p>
-          <a:p>
-            <a:pPr rtl="0"/>
-            <a:r>
-              <a:rPr lang="en-US" sz="500" kern="100">
-                <a:solidFill>
-                  <a:srgbClr val="C00000"/>
-                </a:solidFill>
-                <a:latin typeface="Consolas" panose="020B0609020204030204" pitchFamily="49" charset="0"/>
-                <a:ea typeface="Calibri" panose="020F0502020204030204" pitchFamily="34" charset="0"/>
-                <a:cs typeface="Calibri Light" panose="020F0302020204030204" pitchFamily="34" charset="0"/>
-              </a:rPr>
-              <a:t> 1:active</a:t>
-            </a:r>
-          </a:p>
-        </p:txBody>
-      </p:sp>
-      <p:sp>
-        <p:nvSpPr>
-          <p:cNvPr id="3" name="Rectangle: Rounded Corners 2">
-            <a:extLst>
-              <a:ext uri="{FF2B5EF4-FFF2-40B4-BE49-F238E27FC236}">
-                <a16:creationId xmlns:a16="http://schemas.microsoft.com/office/drawing/2014/main" id="{4E95C3AB-3ADD-0B38-7306-5F78CAD1B483}"/>
-              </a:ext>
-            </a:extLst>
-          </p:cNvPr>
-          <p:cNvSpPr/>
-          <p:nvPr/>
-        </p:nvSpPr>
-        <p:spPr>
-          <a:xfrm>
-            <a:off x="3440149" y="6209602"/>
-            <a:ext cx="909928" cy="721108"/>
-          </a:xfrm>
-          <a:prstGeom prst="roundRect">
-            <a:avLst>
-              <a:gd name="adj" fmla="val 4805"/>
-            </a:avLst>
-          </a:prstGeom>
-          <a:solidFill>
-            <a:schemeClr val="bg1"/>
-          </a:solidFill>
-          <a:ln>
-            <a:solidFill>
-              <a:schemeClr val="tx1">
-                <a:lumMod val="65000"/>
-                <a:lumOff val="35000"/>
-              </a:schemeClr>
-            </a:solidFill>
-          </a:ln>
-        </p:spPr>
-        <p:style>
-          <a:lnRef idx="1">
-            <a:schemeClr val="accent4"/>
-          </a:lnRef>
-          <a:fillRef idx="2">
-            <a:schemeClr val="accent4"/>
-          </a:fillRef>
-          <a:effectRef idx="1">
-            <a:schemeClr val="accent4"/>
-          </a:effectRef>
-          <a:fontRef idx="minor">
-            <a:schemeClr val="dk1"/>
-          </a:fontRef>
-        </p:style>
-        <p:txBody>
-          <a:bodyPr rtlCol="1" anchor="t"/>
-          <a:lstStyle/>
-          <a:p>
-            <a:pPr rtl="0"/>
-            <a:r>
-              <a:rPr lang="en-US" sz="1707" b="1" dirty="0" err="1">
-                <a:solidFill>
-                  <a:schemeClr val="bg1"/>
-                </a:solidFill>
-                <a:highlight>
-                  <a:srgbClr val="000000"/>
-                </a:highlight>
-              </a:rPr>
-              <a:t>N</a:t>
-            </a:r>
-            <a:r>
-              <a:rPr lang="en-US" sz="1280" b="1" dirty="0" err="1"/>
-              <a:t>oteNet</a:t>
-            </a:r>
-            <a:endParaRPr lang="en-US" sz="1280" b="1" dirty="0"/>
-          </a:p>
-          <a:p>
-            <a:pPr rtl="0"/>
-            <a:r>
-              <a:rPr lang="en-US" sz="853" i="1">
-                <a:solidFill>
-                  <a:schemeClr val="accent5"/>
-                </a:solidFill>
-                <a:latin typeface="Segoe UI" panose="020B0502040204020203" pitchFamily="34" charset="0"/>
-                <a:cs typeface="Segoe UI" panose="020B0502040204020203" pitchFamily="34" charset="0"/>
-              </a:rPr>
-              <a:t>NoteNetId</a:t>
-            </a:r>
-            <a:endParaRPr lang="en-US" sz="853" i="1" dirty="0">
-              <a:solidFill>
-                <a:schemeClr val="accent5"/>
-              </a:solidFill>
-              <a:latin typeface="Segoe UI" panose="020B0502040204020203" pitchFamily="34" charset="0"/>
-              <a:cs typeface="Segoe UI" panose="020B0502040204020203" pitchFamily="34" charset="0"/>
-            </a:endParaRPr>
-          </a:p>
-          <a:p>
-            <a:pPr rtl="0"/>
-            <a:r>
-              <a:rPr lang="en-US" sz="853"/>
-              <a:t>NoteAId</a:t>
-            </a:r>
-          </a:p>
-          <a:p>
-            <a:pPr rtl="0"/>
-            <a:r>
-              <a:rPr lang="en-US" sz="853"/>
-              <a:t>NoteBId</a:t>
-            </a:r>
-            <a:endParaRPr lang="en-US" sz="853" dirty="0"/>
-          </a:p>
-        </p:txBody>
-      </p:sp>
-      <p:sp>
-        <p:nvSpPr>
-          <p:cNvPr id="17" name="Callout: Bent Line 16">
-            <a:extLst>
-              <a:ext uri="{FF2B5EF4-FFF2-40B4-BE49-F238E27FC236}">
-                <a16:creationId xmlns:a16="http://schemas.microsoft.com/office/drawing/2014/main" id="{D7A96907-C393-6D27-7271-FEC08798F246}"/>
+                <a16:creationId xmlns:a16="http://schemas.microsoft.com/office/drawing/2014/main" id="{1829AC77-A972-B3B8-4EF9-16E84E6DAF15}"/>
               </a:ext>
             </a:extLst>
           </p:cNvPr>
@@ -7705,419 +8814,8 @@
         </p:nvSpPr>
         <p:spPr bwMode="auto">
           <a:xfrm>
-            <a:off x="1796568" y="7479661"/>
-            <a:ext cx="1105070" cy="787849"/>
-          </a:xfrm>
-          <a:prstGeom prst="borderCallout2">
-            <a:avLst>
-              <a:gd name="adj1" fmla="val -1024"/>
-              <a:gd name="adj2" fmla="val 85567"/>
-              <a:gd name="adj3" fmla="val 366"/>
-              <a:gd name="adj4" fmla="val 82159"/>
-              <a:gd name="adj5" fmla="val 180"/>
-              <a:gd name="adj6" fmla="val 85711"/>
-            </a:avLst>
-          </a:prstGeom>
-          <a:noFill/>
-          <a:ln>
-            <a:prstDash val="dash"/>
-          </a:ln>
-        </p:spPr>
-        <p:style>
-          <a:lnRef idx="2">
-            <a:schemeClr val="accent1">
-              <a:shade val="15000"/>
-            </a:schemeClr>
-          </a:lnRef>
-          <a:fillRef idx="1">
-            <a:schemeClr val="accent1"/>
-          </a:fillRef>
-          <a:effectRef idx="0">
-            <a:schemeClr val="accent1"/>
-          </a:effectRef>
-          <a:fontRef idx="minor">
-            <a:schemeClr val="lt1"/>
-          </a:fontRef>
-        </p:style>
-        <p:txBody>
-          <a:bodyPr rtlCol="1" anchor="ctr"/>
-          <a:lstStyle/>
-          <a:p>
-            <a:pPr rtl="0">
-              <a:buNone/>
-            </a:pPr>
-            <a:r>
-              <a:rPr lang="en-US" sz="500" kern="100">
-                <a:solidFill>
-                  <a:schemeClr val="tx1"/>
-                </a:solidFill>
-                <a:latin typeface="Consolas" panose="020B0609020204030204" pitchFamily="49" charset="0"/>
-                <a:ea typeface="Calibri" panose="020F0502020204030204" pitchFamily="34" charset="0"/>
-                <a:cs typeface="Calibri Light" panose="020F0302020204030204" pitchFamily="34" charset="0"/>
-              </a:rPr>
-              <a:t>NoteTypes:</a:t>
-            </a:r>
-          </a:p>
-          <a:p>
-            <a:pPr rtl="0">
-              <a:buNone/>
-            </a:pPr>
-            <a:r>
-              <a:rPr lang="en-US" sz="500" kern="100">
-                <a:solidFill>
-                  <a:schemeClr val="tx1"/>
-                </a:solidFill>
-                <a:latin typeface="Consolas" panose="020B0609020204030204" pitchFamily="49" charset="0"/>
-                <a:ea typeface="Calibri" panose="020F0502020204030204" pitchFamily="34" charset="0"/>
-                <a:cs typeface="Calibri Light" panose="020F0302020204030204" pitchFamily="34" charset="0"/>
-              </a:rPr>
-              <a:t> 1: S: quickNote</a:t>
-            </a:r>
-          </a:p>
-          <a:p>
-            <a:pPr rtl="0">
-              <a:buNone/>
-            </a:pPr>
-            <a:r>
-              <a:rPr lang="en-US" sz="500" kern="100">
-                <a:solidFill>
-                  <a:schemeClr val="tx1"/>
-                </a:solidFill>
-                <a:latin typeface="Consolas" panose="020B0609020204030204" pitchFamily="49" charset="0"/>
-                <a:ea typeface="Calibri" panose="020F0502020204030204" pitchFamily="34" charset="0"/>
-                <a:cs typeface="Calibri Light" panose="020F0302020204030204" pitchFamily="34" charset="0"/>
-              </a:rPr>
-              <a:t> 2: S: sectionNote</a:t>
-            </a:r>
-          </a:p>
-          <a:p>
-            <a:pPr rtl="0">
-              <a:buNone/>
-            </a:pPr>
-            <a:r>
-              <a:rPr lang="en-US" sz="500" kern="100">
-                <a:solidFill>
-                  <a:schemeClr val="tx1"/>
-                </a:solidFill>
-                <a:latin typeface="Consolas" panose="020B0609020204030204" pitchFamily="49" charset="0"/>
-                <a:ea typeface="Calibri" panose="020F0502020204030204" pitchFamily="34" charset="0"/>
-                <a:cs typeface="Calibri Light" panose="020F0302020204030204" pitchFamily="34" charset="0"/>
-              </a:rPr>
-              <a:t>11: T: quickNote</a:t>
-            </a:r>
-          </a:p>
-          <a:p>
-            <a:pPr rtl="0">
-              <a:buNone/>
-            </a:pPr>
-            <a:r>
-              <a:rPr lang="en-US" sz="500" kern="100">
-                <a:solidFill>
-                  <a:schemeClr val="tx1"/>
-                </a:solidFill>
-                <a:latin typeface="Consolas" panose="020B0609020204030204" pitchFamily="49" charset="0"/>
-                <a:ea typeface="Calibri" panose="020F0502020204030204" pitchFamily="34" charset="0"/>
-                <a:cs typeface="Calibri Light" panose="020F0302020204030204" pitchFamily="34" charset="0"/>
-              </a:rPr>
-              <a:t>12: T: sectionNote</a:t>
-            </a:r>
-          </a:p>
-          <a:p>
-            <a:pPr rtl="0">
-              <a:buNone/>
-            </a:pPr>
-            <a:r>
-              <a:rPr lang="en-US" sz="500" kern="100">
-                <a:solidFill>
-                  <a:schemeClr val="tx1"/>
-                </a:solidFill>
-                <a:latin typeface="Consolas" panose="020B0609020204030204" pitchFamily="49" charset="0"/>
-                <a:ea typeface="Calibri" panose="020F0502020204030204" pitchFamily="34" charset="0"/>
-                <a:cs typeface="Calibri Light" panose="020F0302020204030204" pitchFamily="34" charset="0"/>
-              </a:rPr>
-              <a:t>13: T: note on Student</a:t>
-            </a:r>
-          </a:p>
-          <a:p>
-            <a:pPr rtl="0">
-              <a:buNone/>
-            </a:pPr>
-            <a:r>
-              <a:rPr lang="en-US" sz="500" kern="100">
-                <a:solidFill>
-                  <a:schemeClr val="tx1"/>
-                </a:solidFill>
-                <a:latin typeface="Consolas" panose="020B0609020204030204" pitchFamily="49" charset="0"/>
-                <a:ea typeface="Calibri" panose="020F0502020204030204" pitchFamily="34" charset="0"/>
-                <a:cs typeface="Calibri Light" panose="020F0302020204030204" pitchFamily="34" charset="0"/>
-              </a:rPr>
-              <a:t>14: T: note on Group</a:t>
-            </a:r>
-          </a:p>
-          <a:p>
-            <a:pPr rtl="0">
-              <a:buNone/>
-            </a:pPr>
-            <a:r>
-              <a:rPr lang="en-US" sz="500" kern="100">
-                <a:solidFill>
-                  <a:schemeClr val="tx1"/>
-                </a:solidFill>
-                <a:latin typeface="Consolas" panose="020B0609020204030204" pitchFamily="49" charset="0"/>
-                <a:ea typeface="Calibri" panose="020F0502020204030204" pitchFamily="34" charset="0"/>
-                <a:cs typeface="Calibri Light" panose="020F0302020204030204" pitchFamily="34" charset="0"/>
-              </a:rPr>
-              <a:t>15: T: note on Course</a:t>
-            </a:r>
-          </a:p>
-          <a:p>
-            <a:pPr rtl="0">
-              <a:buNone/>
-            </a:pPr>
-            <a:r>
-              <a:rPr lang="en-US" sz="500" kern="100">
-                <a:solidFill>
-                  <a:schemeClr val="tx1"/>
-                </a:solidFill>
-                <a:latin typeface="Consolas" panose="020B0609020204030204" pitchFamily="49" charset="0"/>
-                <a:ea typeface="Calibri" panose="020F0502020204030204" pitchFamily="34" charset="0"/>
-                <a:cs typeface="Calibri Light" panose="020F0302020204030204" pitchFamily="34" charset="0"/>
-              </a:rPr>
-              <a:t>16: T: note on Exam</a:t>
-            </a:r>
-          </a:p>
-          <a:p>
-            <a:pPr rtl="0">
-              <a:buNone/>
-            </a:pPr>
-            <a:r>
-              <a:rPr lang="en-US" sz="500" kern="100">
-                <a:solidFill>
-                  <a:schemeClr val="tx1"/>
-                </a:solidFill>
-                <a:latin typeface="Consolas" panose="020B0609020204030204" pitchFamily="49" charset="0"/>
-                <a:ea typeface="Calibri" panose="020F0502020204030204" pitchFamily="34" charset="0"/>
-                <a:cs typeface="Calibri Light" panose="020F0302020204030204" pitchFamily="34" charset="0"/>
-              </a:rPr>
-              <a:t>17: T: note on StudentExam</a:t>
-            </a:r>
-          </a:p>
-        </p:txBody>
-      </p:sp>
-      <p:sp>
-        <p:nvSpPr>
-          <p:cNvPr id="18" name="Rectangle: Rounded Corners 45">
-            <a:extLst>
-              <a:ext uri="{FF2B5EF4-FFF2-40B4-BE49-F238E27FC236}">
-                <a16:creationId xmlns:a16="http://schemas.microsoft.com/office/drawing/2014/main" id="{84CF63F6-9EC1-FF7B-5327-5C2174F26690}"/>
-              </a:ext>
-            </a:extLst>
-          </p:cNvPr>
-          <p:cNvSpPr/>
-          <p:nvPr/>
-        </p:nvSpPr>
-        <p:spPr bwMode="auto">
-          <a:xfrm>
-            <a:off x="2794325" y="588887"/>
-            <a:ext cx="1516599" cy="1411701"/>
-          </a:xfrm>
-          <a:prstGeom prst="roundRect">
-            <a:avLst>
-              <a:gd name="adj" fmla="val 8076"/>
-            </a:avLst>
-          </a:prstGeom>
-          <a:solidFill>
-            <a:schemeClr val="bg1"/>
-          </a:solidFill>
-          <a:ln w="28575">
-            <a:solidFill>
-              <a:schemeClr val="tx1"/>
-            </a:solidFill>
-            <a:prstDash val="solid"/>
-          </a:ln>
-          <a:effectLst/>
-        </p:spPr>
-        <p:style>
-          <a:lnRef idx="0">
-            <a:schemeClr val="accent4"/>
-          </a:lnRef>
-          <a:fillRef idx="3">
-            <a:schemeClr val="accent4"/>
-          </a:fillRef>
-          <a:effectRef idx="3">
-            <a:schemeClr val="accent4"/>
-          </a:effectRef>
-          <a:fontRef idx="minor">
-            <a:schemeClr val="lt1"/>
-          </a:fontRef>
-        </p:style>
-        <p:txBody>
-          <a:bodyPr rtlCol="1" anchor="ctr"/>
-          <a:lstStyle/>
-          <a:p>
-            <a:pPr algn="l" rtl="0">
-              <a:defRPr/>
-            </a:pPr>
-            <a:r>
-              <a:rPr lang="en-US" sz="1707" b="1">
-                <a:solidFill>
-                  <a:schemeClr val="bg1"/>
-                </a:solidFill>
-                <a:highlight>
-                  <a:srgbClr val="800080"/>
-                </a:highlight>
-                <a:latin typeface="Segoe UI" panose="020B0502040204020203" pitchFamily="34" charset="0"/>
-                <a:cs typeface="Segoe UI" panose="020B0502040204020203" pitchFamily="34" charset="0"/>
-              </a:rPr>
-              <a:t>CH</a:t>
-            </a:r>
-          </a:p>
-          <a:p>
-            <a:pPr rtl="0">
-              <a:defRPr/>
-            </a:pPr>
-            <a:r>
-              <a:rPr lang="en-US" sz="1280" b="1">
-                <a:solidFill>
-                  <a:schemeClr val="tx1"/>
-                </a:solidFill>
-                <a:latin typeface="Segoe UI" panose="020B0502040204020203" pitchFamily="34" charset="0"/>
-                <a:cs typeface="Segoe UI" panose="020B0502040204020203" pitchFamily="34" charset="0"/>
-              </a:rPr>
-              <a:t>Chats</a:t>
-            </a:r>
-            <a:endParaRPr sz="1280">
-              <a:solidFill>
-                <a:schemeClr val="tx1"/>
-              </a:solidFill>
-              <a:latin typeface="Segoe UI" panose="020B0502040204020203" pitchFamily="34" charset="0"/>
-              <a:cs typeface="Segoe UI" panose="020B0502040204020203" pitchFamily="34" charset="0"/>
-            </a:endParaRPr>
-          </a:p>
-          <a:p>
-            <a:pPr rtl="0">
-              <a:defRPr/>
-            </a:pPr>
-            <a:r>
-              <a:rPr lang="en-US" sz="853" i="1">
-                <a:solidFill>
-                  <a:schemeClr val="accent5"/>
-                </a:solidFill>
-                <a:latin typeface="Segoe UI" panose="020B0502040204020203" pitchFamily="34" charset="0"/>
-                <a:cs typeface="Segoe UI" panose="020B0502040204020203" pitchFamily="34" charset="0"/>
-              </a:rPr>
-              <a:t>ChatId</a:t>
-            </a:r>
-          </a:p>
-          <a:p>
-            <a:pPr rtl="0">
-              <a:defRPr/>
-            </a:pPr>
-            <a:r>
-              <a:rPr lang="en-US" sz="853">
-                <a:solidFill>
-                  <a:schemeClr val="tx1"/>
-                </a:solidFill>
-                <a:latin typeface="Segoe UI" panose="020B0502040204020203" pitchFamily="34" charset="0"/>
-                <a:cs typeface="Segoe UI" panose="020B0502040204020203" pitchFamily="34" charset="0"/>
-              </a:rPr>
-              <a:t>FromId</a:t>
-            </a:r>
-          </a:p>
-          <a:p>
-            <a:pPr rtl="0">
-              <a:defRPr/>
-            </a:pPr>
-            <a:r>
-              <a:rPr lang="en-US" sz="853">
-                <a:solidFill>
-                  <a:schemeClr val="tx1"/>
-                </a:solidFill>
-                <a:latin typeface="Segoe UI" panose="020B0502040204020203" pitchFamily="34" charset="0"/>
-                <a:cs typeface="Segoe UI" panose="020B0502040204020203" pitchFamily="34" charset="0"/>
-              </a:rPr>
-              <a:t>ToId</a:t>
-            </a:r>
-          </a:p>
-          <a:p>
-            <a:pPr rtl="0">
-              <a:defRPr/>
-            </a:pPr>
-            <a:r>
-              <a:rPr lang="en-US" sz="853">
-                <a:solidFill>
-                  <a:schemeClr val="tx1"/>
-                </a:solidFill>
-                <a:latin typeface="Segoe UI" panose="020B0502040204020203" pitchFamily="34" charset="0"/>
-                <a:cs typeface="Segoe UI" panose="020B0502040204020203" pitchFamily="34" charset="0"/>
-              </a:rPr>
-              <a:t>DateTimeSent</a:t>
-            </a:r>
-          </a:p>
-          <a:p>
-            <a:pPr rtl="0">
-              <a:defRPr/>
-            </a:pPr>
-            <a:r>
-              <a:rPr lang="en-US" sz="853">
-                <a:solidFill>
-                  <a:schemeClr val="tx1"/>
-                </a:solidFill>
-                <a:latin typeface="Segoe UI" panose="020B0502040204020203" pitchFamily="34" charset="0"/>
-                <a:cs typeface="Segoe UI" panose="020B0502040204020203" pitchFamily="34" charset="0"/>
-              </a:rPr>
-              <a:t>ChatText</a:t>
-            </a:r>
-          </a:p>
-          <a:p>
-            <a:pPr rtl="0">
-              <a:defRPr/>
-            </a:pPr>
-            <a:r>
-              <a:rPr lang="en-US" sz="853">
-                <a:solidFill>
-                  <a:schemeClr val="tx1"/>
-                </a:solidFill>
-                <a:latin typeface="Segoe UI" panose="020B0502040204020203" pitchFamily="34" charset="0"/>
-                <a:cs typeface="Segoe UI" panose="020B0502040204020203" pitchFamily="34" charset="0"/>
-              </a:rPr>
-              <a:t>ChatTags</a:t>
-            </a:r>
-          </a:p>
-          <a:p>
-            <a:pPr rtl="0">
-              <a:defRPr/>
-            </a:pPr>
-            <a:r>
-              <a:rPr lang="en-US" sz="600" kern="100">
-                <a:solidFill>
-                  <a:schemeClr val="tx1"/>
-                </a:solidFill>
-                <a:latin typeface="Consolas" panose="020B0609020204030204" pitchFamily="49" charset="0"/>
-                <a:ea typeface="Calibri" panose="020F0502020204030204" pitchFamily="34" charset="0"/>
-                <a:cs typeface="Calibri Light" panose="020F0302020204030204" pitchFamily="34" charset="0"/>
-              </a:rPr>
-              <a:t>1:Read 2:Imp 3:Bookmark 4:Del</a:t>
-            </a:r>
-          </a:p>
-        </p:txBody>
-      </p:sp>
-      <p:sp>
-        <p:nvSpPr>
-          <p:cNvPr id="25" name="Rectangle: Rounded Corners 44">
-            <a:extLst>
-              <a:ext uri="{FF2B5EF4-FFF2-40B4-BE49-F238E27FC236}">
-                <a16:creationId xmlns:a16="http://schemas.microsoft.com/office/drawing/2014/main" id="{A460627C-6A84-BFD9-020B-04D76A321D4A}"/>
-              </a:ext>
-            </a:extLst>
-          </p:cNvPr>
-          <p:cNvSpPr/>
-          <p:nvPr/>
-        </p:nvSpPr>
-        <p:spPr bwMode="auto">
-          <a:xfrm>
-            <a:off x="1544309" y="157639"/>
-            <a:ext cx="1210830" cy="1196534"/>
+            <a:off x="10120219" y="1540287"/>
+            <a:ext cx="1077711" cy="915820"/>
           </a:xfrm>
           <a:prstGeom prst="roundRect">
             <a:avLst>
@@ -8161,12 +8859,12 @@
                   <a:schemeClr val="bg1"/>
                 </a:solidFill>
                 <a:highlight>
-                  <a:srgbClr val="808000"/>
+                  <a:srgbClr val="008080"/>
                 </a:highlight>
                 <a:latin typeface="Segoe UI" panose="020B0502040204020203" pitchFamily="34" charset="0"/>
                 <a:cs typeface="Segoe UI" panose="020B0502040204020203" pitchFamily="34" charset="0"/>
               </a:rPr>
-              <a:t>CHR</a:t>
+              <a:t>UL</a:t>
             </a:r>
           </a:p>
           <a:p>
@@ -8181,7 +8879,7 @@
                 <a:latin typeface="Segoe UI" panose="020B0502040204020203" pitchFamily="34" charset="0"/>
                 <a:cs typeface="Segoe UI" panose="020B0502040204020203" pitchFamily="34" charset="0"/>
               </a:rPr>
-              <a:t>Chatrooms</a:t>
+              <a:t>usrsLogs</a:t>
             </a:r>
             <a:endParaRPr sz="1280">
               <a:solidFill>
@@ -8196,14 +8894,14 @@
               <a:defRPr/>
             </a:pPr>
             <a:r>
-              <a:rPr lang="en-US" sz="853" i="1">
-                <a:solidFill>
-                  <a:schemeClr val="accent5"/>
+              <a:rPr lang="en-US" sz="853">
+                <a:solidFill>
+                  <a:schemeClr val="tx1"/>
                 </a:solidFill>
                 <a:latin typeface="Segoe UI" panose="020B0502040204020203" pitchFamily="34" charset="0"/>
                 <a:cs typeface="Segoe UI" panose="020B0502040204020203" pitchFamily="34" charset="0"/>
               </a:rPr>
-              <a:t>ChatroomId</a:t>
+              <a:t>UserId</a:t>
             </a:r>
           </a:p>
           <a:p>
@@ -8218,7 +8916,7 @@
                 <a:latin typeface="Segoe UI" panose="020B0502040204020203" pitchFamily="34" charset="0"/>
                 <a:cs typeface="Segoe UI" panose="020B0502040204020203" pitchFamily="34" charset="0"/>
               </a:rPr>
-              <a:t>ChatroomUserId</a:t>
+              <a:t>UserLogText</a:t>
             </a:r>
           </a:p>
           <a:p>
@@ -8233,468 +8931,7 @@
                 <a:latin typeface="Segoe UI" panose="020B0502040204020203" pitchFamily="34" charset="0"/>
                 <a:cs typeface="Segoe UI" panose="020B0502040204020203" pitchFamily="34" charset="0"/>
               </a:rPr>
-              <a:t>ChatroomAdminId</a:t>
-            </a:r>
-          </a:p>
-          <a:p>
-            <a:pPr rtl="0">
-              <a:defRPr/>
-            </a:pPr>
-            <a:r>
-              <a:rPr lang="en-US" sz="853">
-                <a:solidFill>
-                  <a:schemeClr val="tx1"/>
-                </a:solidFill>
-                <a:latin typeface="Segoe UI" panose="020B0502040204020203" pitchFamily="34" charset="0"/>
-                <a:cs typeface="Segoe UI" panose="020B0502040204020203" pitchFamily="34" charset="0"/>
-              </a:rPr>
-              <a:t>ChatroomName</a:t>
-            </a:r>
-          </a:p>
-          <a:p>
-            <a:pPr rtl="0">
-              <a:defRPr/>
-            </a:pPr>
-            <a:r>
-              <a:rPr lang="en-US" sz="853">
-                <a:solidFill>
-                  <a:schemeClr val="tx1"/>
-                </a:solidFill>
-                <a:latin typeface="Segoe UI" panose="020B0502040204020203" pitchFamily="34" charset="0"/>
-                <a:cs typeface="Segoe UI" panose="020B0502040204020203" pitchFamily="34" charset="0"/>
-              </a:rPr>
-              <a:t>ChatroomTerms</a:t>
-            </a:r>
-          </a:p>
-        </p:txBody>
-      </p:sp>
-      <p:sp>
-        <p:nvSpPr>
-          <p:cNvPr id="28" name="Rectangle: Rounded Corners 44">
-            <a:extLst>
-              <a:ext uri="{FF2B5EF4-FFF2-40B4-BE49-F238E27FC236}">
-                <a16:creationId xmlns:a16="http://schemas.microsoft.com/office/drawing/2014/main" id="{96D765ED-D9C6-3463-0136-8A90C3A57F14}"/>
-              </a:ext>
-            </a:extLst>
-          </p:cNvPr>
-          <p:cNvSpPr/>
-          <p:nvPr/>
-        </p:nvSpPr>
-        <p:spPr bwMode="auto">
-          <a:xfrm>
-            <a:off x="48639" y="157639"/>
-            <a:ext cx="1445914" cy="1642462"/>
-          </a:xfrm>
-          <a:prstGeom prst="roundRect">
-            <a:avLst>
-              <a:gd name="adj" fmla="val 6742"/>
-            </a:avLst>
-          </a:prstGeom>
-          <a:solidFill>
-            <a:schemeClr val="bg1"/>
-          </a:solidFill>
-          <a:ln>
-            <a:solidFill>
-              <a:schemeClr val="tx1"/>
-            </a:solidFill>
-          </a:ln>
-          <a:effectLst/>
-        </p:spPr>
-        <p:style>
-          <a:lnRef idx="0">
-            <a:schemeClr val="accent4"/>
-          </a:lnRef>
-          <a:fillRef idx="3">
-            <a:schemeClr val="accent4"/>
-          </a:fillRef>
-          <a:effectRef idx="3">
-            <a:schemeClr val="accent4"/>
-          </a:effectRef>
-          <a:fontRef idx="minor">
-            <a:schemeClr val="lt1"/>
-          </a:fontRef>
-        </p:style>
-        <p:txBody>
-          <a:bodyPr rtlCol="1" anchor="ctr"/>
-          <a:lstStyle/>
-          <a:p>
-            <a:pPr rtl="0">
-              <a:defRPr/>
-            </a:pPr>
-            <a:r>
-              <a:rPr lang="en-US" sz="1707" b="1">
-                <a:solidFill>
-                  <a:schemeClr val="bg1"/>
-                </a:solidFill>
-                <a:highlight>
-                  <a:srgbClr val="808000"/>
-                </a:highlight>
-                <a:latin typeface="Segoe UI" panose="020B0502040204020203" pitchFamily="34" charset="0"/>
-                <a:cs typeface="Segoe UI" panose="020B0502040204020203" pitchFamily="34" charset="0"/>
-              </a:rPr>
-              <a:t>CHRP</a:t>
-            </a:r>
-          </a:p>
-          <a:p>
-            <a:pPr rtl="0">
-              <a:defRPr/>
-            </a:pPr>
-            <a:r>
-              <a:rPr lang="en-US" sz="1280" b="1">
-                <a:solidFill>
-                  <a:schemeClr val="tx1"/>
-                </a:solidFill>
-                <a:latin typeface="Segoe UI" panose="020B0502040204020203" pitchFamily="34" charset="0"/>
-                <a:cs typeface="Segoe UI" panose="020B0502040204020203" pitchFamily="34" charset="0"/>
-              </a:rPr>
-              <a:t>ChatroomPosts</a:t>
-            </a:r>
-            <a:endParaRPr sz="1280">
-              <a:solidFill>
-                <a:schemeClr val="tx1"/>
-              </a:solidFill>
-              <a:latin typeface="Segoe UI" panose="020B0502040204020203" pitchFamily="34" charset="0"/>
-              <a:cs typeface="Segoe UI" panose="020B0502040204020203" pitchFamily="34" charset="0"/>
-            </a:endParaRPr>
-          </a:p>
-          <a:p>
-            <a:pPr rtl="0">
-              <a:defRPr/>
-            </a:pPr>
-            <a:r>
-              <a:rPr lang="en-US" sz="853" i="1">
-                <a:solidFill>
-                  <a:schemeClr val="accent5"/>
-                </a:solidFill>
-                <a:latin typeface="Segoe UI" panose="020B0502040204020203" pitchFamily="34" charset="0"/>
-                <a:cs typeface="Segoe UI" panose="020B0502040204020203" pitchFamily="34" charset="0"/>
-              </a:rPr>
-              <a:t>ChatroomPostId</a:t>
-            </a:r>
-          </a:p>
-          <a:p>
-            <a:pPr rtl="0">
-              <a:defRPr/>
-            </a:pPr>
-            <a:r>
-              <a:rPr lang="en-US" sz="853">
-                <a:solidFill>
-                  <a:schemeClr val="tx1"/>
-                </a:solidFill>
-                <a:latin typeface="Segoe UI" panose="020B0502040204020203" pitchFamily="34" charset="0"/>
-                <a:cs typeface="Segoe UI" panose="020B0502040204020203" pitchFamily="34" charset="0"/>
-              </a:rPr>
-              <a:t>ChatroomId</a:t>
-            </a:r>
-          </a:p>
-          <a:p>
-            <a:pPr rtl="0">
-              <a:defRPr/>
-            </a:pPr>
-            <a:r>
-              <a:rPr lang="en-US" sz="853">
-                <a:solidFill>
-                  <a:schemeClr val="tx1"/>
-                </a:solidFill>
-                <a:latin typeface="Segoe UI" panose="020B0502040204020203" pitchFamily="34" charset="0"/>
-                <a:cs typeface="Segoe UI" panose="020B0502040204020203" pitchFamily="34" charset="0"/>
-              </a:rPr>
-              <a:t>SenderId</a:t>
-            </a:r>
-          </a:p>
-          <a:p>
-            <a:pPr rtl="0">
-              <a:defRPr/>
-            </a:pPr>
-            <a:r>
-              <a:rPr lang="en-US" sz="853">
-                <a:solidFill>
-                  <a:schemeClr val="tx1"/>
-                </a:solidFill>
-                <a:latin typeface="Segoe UI" panose="020B0502040204020203" pitchFamily="34" charset="0"/>
-                <a:cs typeface="Segoe UI" panose="020B0502040204020203" pitchFamily="34" charset="0"/>
-              </a:rPr>
-              <a:t>PostDateTime</a:t>
-            </a:r>
-          </a:p>
-          <a:p>
-            <a:pPr rtl="0">
-              <a:defRPr/>
-            </a:pPr>
-            <a:r>
-              <a:rPr lang="en-US" sz="853">
-                <a:solidFill>
-                  <a:schemeClr val="tx1"/>
-                </a:solidFill>
-                <a:latin typeface="Segoe UI" panose="020B0502040204020203" pitchFamily="34" charset="0"/>
-                <a:cs typeface="Segoe UI" panose="020B0502040204020203" pitchFamily="34" charset="0"/>
-              </a:rPr>
-              <a:t>PostText</a:t>
-            </a:r>
-          </a:p>
-          <a:p>
-            <a:pPr rtl="0">
-              <a:defRPr/>
-            </a:pPr>
-            <a:r>
-              <a:rPr lang="en-US" sz="853">
-                <a:solidFill>
-                  <a:schemeClr val="tx1"/>
-                </a:solidFill>
-                <a:latin typeface="Segoe UI" panose="020B0502040204020203" pitchFamily="34" charset="0"/>
-                <a:cs typeface="Segoe UI" panose="020B0502040204020203" pitchFamily="34" charset="0"/>
-              </a:rPr>
-              <a:t>PostTags</a:t>
-            </a:r>
-          </a:p>
-          <a:p>
-            <a:pPr rtl="0">
-              <a:defRPr/>
-            </a:pPr>
-            <a:r>
-              <a:rPr lang="en-US" sz="500">
-                <a:solidFill>
-                  <a:srgbClr val="C00000"/>
-                </a:solidFill>
-                <a:latin typeface="Segoe UI" panose="020B0502040204020203" pitchFamily="34" charset="0"/>
-                <a:cs typeface="Segoe UI" panose="020B0502040204020203" pitchFamily="34" charset="0"/>
-              </a:rPr>
-              <a:t>  1:NeedReply</a:t>
-            </a:r>
-          </a:p>
-          <a:p>
-            <a:pPr rtl="0">
-              <a:defRPr/>
-            </a:pPr>
-            <a:r>
-              <a:rPr lang="en-US" sz="500">
-                <a:solidFill>
-                  <a:srgbClr val="C00000"/>
-                </a:solidFill>
-                <a:latin typeface="Segoe UI" panose="020B0502040204020203" pitchFamily="34" charset="0"/>
-                <a:cs typeface="Segoe UI" panose="020B0502040204020203" pitchFamily="34" charset="0"/>
-              </a:rPr>
-              <a:t>  2:IsEdited</a:t>
-            </a:r>
-          </a:p>
-          <a:p>
-            <a:pPr rtl="0">
-              <a:defRPr/>
-            </a:pPr>
-            <a:r>
-              <a:rPr lang="en-US" sz="500">
-                <a:solidFill>
-                  <a:srgbClr val="C00000"/>
-                </a:solidFill>
-                <a:latin typeface="Segoe UI" panose="020B0502040204020203" pitchFamily="34" charset="0"/>
-                <a:cs typeface="Segoe UI" panose="020B0502040204020203" pitchFamily="34" charset="0"/>
-              </a:rPr>
-              <a:t>  4:IsDeleted</a:t>
-            </a:r>
-          </a:p>
-        </p:txBody>
-      </p:sp>
-      <p:sp>
-        <p:nvSpPr>
-          <p:cNvPr id="2" name="Rectangle: Rounded Corners 1">
-            <a:extLst>
-              <a:ext uri="{FF2B5EF4-FFF2-40B4-BE49-F238E27FC236}">
-                <a16:creationId xmlns:a16="http://schemas.microsoft.com/office/drawing/2014/main" id="{6A0D2D6C-AD44-BFED-2D51-29757378D5BB}"/>
-              </a:ext>
-            </a:extLst>
-          </p:cNvPr>
-          <p:cNvSpPr/>
-          <p:nvPr/>
-        </p:nvSpPr>
-        <p:spPr>
-          <a:xfrm>
-            <a:off x="2735908" y="6417263"/>
-            <a:ext cx="895415" cy="1634612"/>
-          </a:xfrm>
-          <a:prstGeom prst="roundRect">
-            <a:avLst>
-              <a:gd name="adj" fmla="val 1266"/>
-            </a:avLst>
-          </a:prstGeom>
-          <a:solidFill>
-            <a:schemeClr val="bg1"/>
-          </a:solidFill>
-          <a:ln>
-            <a:solidFill>
-              <a:schemeClr val="tx1">
-                <a:lumMod val="65000"/>
-                <a:lumOff val="35000"/>
-              </a:schemeClr>
-            </a:solidFill>
-          </a:ln>
-        </p:spPr>
-        <p:style>
-          <a:lnRef idx="1">
-            <a:schemeClr val="accent4"/>
-          </a:lnRef>
-          <a:fillRef idx="2">
-            <a:schemeClr val="accent4"/>
-          </a:fillRef>
-          <a:effectRef idx="1">
-            <a:schemeClr val="accent4"/>
-          </a:effectRef>
-          <a:fontRef idx="minor">
-            <a:schemeClr val="dk1"/>
-          </a:fontRef>
-        </p:style>
-        <p:txBody>
-          <a:bodyPr rtlCol="1" anchor="t"/>
-          <a:lstStyle/>
-          <a:p>
-            <a:pPr rtl="0"/>
-            <a:r>
-              <a:rPr lang="en-US" sz="1707" b="1" dirty="0">
-                <a:solidFill>
-                  <a:schemeClr val="bg1"/>
-                </a:solidFill>
-                <a:highlight>
-                  <a:srgbClr val="000000"/>
-                </a:highlight>
-              </a:rPr>
-              <a:t>N</a:t>
-            </a:r>
-            <a:r>
-              <a:rPr lang="en-US" sz="1280" b="1" dirty="0"/>
-              <a:t>otes</a:t>
-            </a:r>
-          </a:p>
-          <a:p>
-            <a:pPr rtl="0"/>
-            <a:r>
-              <a:rPr lang="en-US" sz="853" i="1">
-                <a:solidFill>
-                  <a:schemeClr val="accent5"/>
-                </a:solidFill>
-                <a:latin typeface="Segoe UI" panose="020B0502040204020203" pitchFamily="34" charset="0"/>
-                <a:cs typeface="Segoe UI" panose="020B0502040204020203" pitchFamily="34" charset="0"/>
-              </a:rPr>
-              <a:t>NoteId</a:t>
-            </a:r>
-          </a:p>
-          <a:p>
-            <a:pPr rtl="0"/>
-            <a:r>
-              <a:rPr lang="en-US" sz="853"/>
-              <a:t>NoteType</a:t>
-            </a:r>
-          </a:p>
-          <a:p>
-            <a:pPr rtl="0"/>
-            <a:r>
-              <a:rPr lang="en-US" sz="853"/>
-              <a:t>ReferenceId</a:t>
-            </a:r>
-          </a:p>
-          <a:p>
-            <a:pPr rtl="0"/>
-            <a:r>
-              <a:rPr lang="en-US" sz="853"/>
-              <a:t>NoteDateTime</a:t>
-            </a:r>
-            <a:endParaRPr lang="en-US" sz="853" dirty="0"/>
-          </a:p>
-          <a:p>
-            <a:pPr rtl="0"/>
-            <a:r>
-              <a:rPr lang="en-US" sz="853"/>
-              <a:t>NoteText</a:t>
-            </a:r>
-            <a:endParaRPr lang="en-US" sz="853" dirty="0"/>
-          </a:p>
-          <a:p>
-            <a:pPr rtl="0"/>
-            <a:r>
-              <a:rPr lang="en-US" sz="853">
-                <a:solidFill>
-                  <a:schemeClr val="tx1"/>
-                </a:solidFill>
-              </a:rPr>
-              <a:t>CreatorId</a:t>
-            </a:r>
-            <a:endParaRPr lang="fa-IR" sz="853">
-              <a:solidFill>
-                <a:schemeClr val="tx1"/>
-              </a:solidFill>
-            </a:endParaRPr>
-          </a:p>
-          <a:p>
-            <a:pPr rtl="0"/>
-            <a:r>
-              <a:rPr lang="en-US" sz="853">
-                <a:solidFill>
-                  <a:schemeClr val="tx1"/>
-                </a:solidFill>
-              </a:rPr>
-              <a:t>NoteTags</a:t>
-            </a:r>
-          </a:p>
-          <a:p>
-            <a:pPr rtl="0">
-              <a:buNone/>
-            </a:pPr>
-            <a:r>
-              <a:rPr lang="en-US" sz="500" kern="100">
-                <a:solidFill>
-                  <a:srgbClr val="C00000"/>
-                </a:solidFill>
-                <a:latin typeface="Consolas" panose="020B0609020204030204" pitchFamily="49" charset="0"/>
-                <a:ea typeface="Calibri" panose="020F0502020204030204" pitchFamily="34" charset="0"/>
-                <a:cs typeface="Calibri Light" panose="020F0302020204030204" pitchFamily="34" charset="0"/>
-              </a:rPr>
-              <a:t> 1:IsRtl</a:t>
-            </a:r>
-          </a:p>
-          <a:p>
-            <a:pPr rtl="0">
-              <a:buNone/>
-            </a:pPr>
-            <a:r>
-              <a:rPr lang="en-US" sz="500" kern="100">
-                <a:solidFill>
-                  <a:srgbClr val="C00000"/>
-                </a:solidFill>
-                <a:latin typeface="Consolas" panose="020B0609020204030204" pitchFamily="49" charset="0"/>
-                <a:ea typeface="Calibri" panose="020F0502020204030204" pitchFamily="34" charset="0"/>
-                <a:cs typeface="Calibri Light" panose="020F0302020204030204" pitchFamily="34" charset="0"/>
-              </a:rPr>
-              <a:t> 2:IsDone</a:t>
-            </a:r>
-          </a:p>
-          <a:p>
-            <a:pPr rtl="0">
-              <a:buNone/>
-            </a:pPr>
-            <a:r>
-              <a:rPr lang="en-US" sz="500" kern="100">
-                <a:solidFill>
-                  <a:srgbClr val="C00000"/>
-                </a:solidFill>
-                <a:latin typeface="Consolas" panose="020B0609020204030204" pitchFamily="49" charset="0"/>
-                <a:ea typeface="Calibri" panose="020F0502020204030204" pitchFamily="34" charset="0"/>
-                <a:cs typeface="Calibri Light" panose="020F0302020204030204" pitchFamily="34" charset="0"/>
-              </a:rPr>
-              <a:t> 4:IsShared</a:t>
-            </a:r>
-          </a:p>
-          <a:p>
-            <a:pPr rtl="0">
-              <a:buNone/>
-            </a:pPr>
-            <a:r>
-              <a:rPr lang="en-US" sz="500" kern="100">
-                <a:solidFill>
-                  <a:srgbClr val="C00000"/>
-                </a:solidFill>
-                <a:latin typeface="Consolas" panose="020B0609020204030204" pitchFamily="49" charset="0"/>
-                <a:ea typeface="Calibri" panose="020F0502020204030204" pitchFamily="34" charset="0"/>
-                <a:cs typeface="Calibri Light" panose="020F0302020204030204" pitchFamily="34" charset="0"/>
-              </a:rPr>
-              <a:t> 8:IsReadonly</a:t>
+              <a:t>DateTime</a:t>
             </a:r>
           </a:p>
         </p:txBody>

--- a/ExaminerB/.appCatalog/ExaminerB notes 1404.pptx
+++ b/ExaminerB/.appCatalog/ExaminerB notes 1404.pptx
@@ -280,7 +280,7 @@
             </a:pPr>
             <a:fld id="{BCC18F51-09EC-435C-A3BA-64A766E099C0}" type="datetimeFigureOut">
               <a:rPr lang="fa-IR"/>
-              <a:t>18/01/1448</a:t>
+              <a:t>26/01/1448</a:t>
             </a:fld>
             <a:endParaRPr/>
           </a:p>
@@ -459,7 +459,7 @@
             </a:pPr>
             <a:fld id="{BCC18F51-09EC-435C-A3BA-64A766E099C0}" type="datetimeFigureOut">
               <a:rPr lang="fa-IR"/>
-              <a:t>18/01/1448</a:t>
+              <a:t>26/01/1448</a:t>
             </a:fld>
             <a:endParaRPr/>
           </a:p>
@@ -648,7 +648,7 @@
             </a:pPr>
             <a:fld id="{BCC18F51-09EC-435C-A3BA-64A766E099C0}" type="datetimeFigureOut">
               <a:rPr lang="fa-IR"/>
-              <a:t>18/01/1448</a:t>
+              <a:t>26/01/1448</a:t>
             </a:fld>
             <a:endParaRPr/>
           </a:p>
@@ -827,7 +827,7 @@
             </a:pPr>
             <a:fld id="{BCC18F51-09EC-435C-A3BA-64A766E099C0}" type="datetimeFigureOut">
               <a:rPr lang="fa-IR"/>
-              <a:t>18/01/1448</a:t>
+              <a:t>26/01/1448</a:t>
             </a:fld>
             <a:endParaRPr/>
           </a:p>
@@ -1079,7 +1079,7 @@
             </a:pPr>
             <a:fld id="{BCC18F51-09EC-435C-A3BA-64A766E099C0}" type="datetimeFigureOut">
               <a:rPr lang="fa-IR"/>
-              <a:t>18/01/1448</a:t>
+              <a:t>26/01/1448</a:t>
             </a:fld>
             <a:endParaRPr/>
           </a:p>
@@ -1324,7 +1324,7 @@
             </a:pPr>
             <a:fld id="{BCC18F51-09EC-435C-A3BA-64A766E099C0}" type="datetimeFigureOut">
               <a:rPr lang="fa-IR"/>
-              <a:t>18/01/1448</a:t>
+              <a:t>26/01/1448</a:t>
             </a:fld>
             <a:endParaRPr/>
           </a:p>
@@ -1706,7 +1706,7 @@
             </a:pPr>
             <a:fld id="{BCC18F51-09EC-435C-A3BA-64A766E099C0}" type="datetimeFigureOut">
               <a:rPr lang="fa-IR"/>
-              <a:t>18/01/1448</a:t>
+              <a:t>26/01/1448</a:t>
             </a:fld>
             <a:endParaRPr/>
           </a:p>
@@ -1829,7 +1829,7 @@
             </a:pPr>
             <a:fld id="{BCC18F51-09EC-435C-A3BA-64A766E099C0}" type="datetimeFigureOut">
               <a:rPr lang="fa-IR"/>
-              <a:t>18/01/1448</a:t>
+              <a:t>26/01/1448</a:t>
             </a:fld>
             <a:endParaRPr/>
           </a:p>
@@ -1928,7 +1928,7 @@
             </a:pPr>
             <a:fld id="{BCC18F51-09EC-435C-A3BA-64A766E099C0}" type="datetimeFigureOut">
               <a:rPr lang="fa-IR"/>
-              <a:t>18/01/1448</a:t>
+              <a:t>26/01/1448</a:t>
             </a:fld>
             <a:endParaRPr/>
           </a:p>
@@ -2215,7 +2215,7 @@
             </a:pPr>
             <a:fld id="{BCC18F51-09EC-435C-A3BA-64A766E099C0}" type="datetimeFigureOut">
               <a:rPr lang="fa-IR"/>
-              <a:t>18/01/1448</a:t>
+              <a:t>26/01/1448</a:t>
             </a:fld>
             <a:endParaRPr/>
           </a:p>
@@ -2479,7 +2479,7 @@
             </a:pPr>
             <a:fld id="{BCC18F51-09EC-435C-A3BA-64A766E099C0}" type="datetimeFigureOut">
               <a:rPr lang="fa-IR"/>
-              <a:t>18/01/1448</a:t>
+              <a:t>26/01/1448</a:t>
             </a:fld>
             <a:endParaRPr/>
           </a:p>
@@ -2701,7 +2701,7 @@
             </a:pPr>
             <a:fld id="{BCC18F51-09EC-435C-A3BA-64A766E099C0}" type="datetimeFigureOut">
               <a:rPr lang="fa-IR"/>
-              <a:t>18/01/1448</a:t>
+              <a:t>26/01/1448</a:t>
             </a:fld>
             <a:endParaRPr/>
           </a:p>
@@ -3115,6 +3115,1278 @@
       </p:grpSpPr>
       <p:sp>
         <p:nvSpPr>
+          <p:cNvPr id="9" name="Rectangle: Rounded Corners 19">
+            <a:extLst>
+              <a:ext uri="{FF2B5EF4-FFF2-40B4-BE49-F238E27FC236}">
+                <a16:creationId xmlns:a16="http://schemas.microsoft.com/office/drawing/2014/main" id="{DD6B732D-B216-0CD6-2673-6626C242CCCB}"/>
+              </a:ext>
+            </a:extLst>
+          </p:cNvPr>
+          <p:cNvSpPr/>
+          <p:nvPr/>
+        </p:nvSpPr>
+        <p:spPr bwMode="auto">
+          <a:xfrm>
+            <a:off x="3735761" y="6245248"/>
+            <a:ext cx="1808459" cy="1190826"/>
+          </a:xfrm>
+          <a:prstGeom prst="roundRect">
+            <a:avLst>
+              <a:gd name="adj" fmla="val 8737"/>
+            </a:avLst>
+          </a:prstGeom>
+          <a:solidFill>
+            <a:schemeClr val="bg1"/>
+          </a:solidFill>
+          <a:ln>
+            <a:solidFill>
+              <a:schemeClr val="accent5"/>
+            </a:solidFill>
+            <a:prstDash val="lgDash"/>
+          </a:ln>
+          <a:effectLst/>
+        </p:spPr>
+        <p:style>
+          <a:lnRef idx="0">
+            <a:schemeClr val="accent4"/>
+          </a:lnRef>
+          <a:fillRef idx="3">
+            <a:schemeClr val="accent4"/>
+          </a:fillRef>
+          <a:effectRef idx="3">
+            <a:schemeClr val="accent4"/>
+          </a:effectRef>
+          <a:fontRef idx="minor">
+            <a:schemeClr val="lt1"/>
+          </a:fontRef>
+        </p:style>
+        <p:txBody>
+          <a:bodyPr rtlCol="1" anchor="ctr"/>
+          <a:lstStyle/>
+          <a:p>
+            <a:pPr rtl="0">
+              <a:defRPr/>
+            </a:pPr>
+            <a:r>
+              <a:rPr lang="en-US" sz="1707" b="1">
+                <a:solidFill>
+                  <a:schemeClr val="bg1"/>
+                </a:solidFill>
+                <a:highlight>
+                  <a:srgbClr val="0000FF"/>
+                </a:highlight>
+                <a:latin typeface="Segoe UI" panose="020B0502040204020203" pitchFamily="34" charset="0"/>
+                <a:cs typeface="Segoe UI" panose="020B0502040204020203" pitchFamily="34" charset="0"/>
+              </a:rPr>
+              <a:t>EC</a:t>
+            </a:r>
+            <a:endParaRPr lang="en-US" sz="1280" b="1">
+              <a:solidFill>
+                <a:schemeClr val="bg1"/>
+              </a:solidFill>
+              <a:highlight>
+                <a:srgbClr val="0000FF"/>
+              </a:highlight>
+              <a:latin typeface="Segoe UI" panose="020B0502040204020203" pitchFamily="34" charset="0"/>
+              <a:cs typeface="Segoe UI" panose="020B0502040204020203" pitchFamily="34" charset="0"/>
+            </a:endParaRPr>
+          </a:p>
+          <a:p>
+            <a:pPr rtl="0">
+              <a:defRPr/>
+            </a:pPr>
+            <a:r>
+              <a:rPr lang="en-US" sz="1280" b="1">
+                <a:solidFill>
+                  <a:schemeClr val="tx1"/>
+                </a:solidFill>
+                <a:latin typeface="Segoe UI" panose="020B0502040204020203" pitchFamily="34" charset="0"/>
+                <a:cs typeface="Segoe UI" panose="020B0502040204020203" pitchFamily="34" charset="0"/>
+              </a:rPr>
+              <a:t>ExamCompositions</a:t>
+            </a:r>
+            <a:endParaRPr sz="1280" b="1">
+              <a:solidFill>
+                <a:schemeClr val="tx1"/>
+              </a:solidFill>
+              <a:latin typeface="Segoe UI" panose="020B0502040204020203" pitchFamily="34" charset="0"/>
+              <a:cs typeface="Segoe UI" panose="020B0502040204020203" pitchFamily="34" charset="0"/>
+            </a:endParaRPr>
+          </a:p>
+          <a:p>
+            <a:pPr rtl="0">
+              <a:defRPr/>
+            </a:pPr>
+            <a:r>
+              <a:rPr lang="en-US" sz="853" i="1">
+                <a:solidFill>
+                  <a:schemeClr val="accent5"/>
+                </a:solidFill>
+                <a:latin typeface="Segoe UI" panose="020B0502040204020203" pitchFamily="34" charset="0"/>
+                <a:cs typeface="Segoe UI" panose="020B0502040204020203" pitchFamily="34" charset="0"/>
+              </a:rPr>
+              <a:t>ExamCompositionId</a:t>
+            </a:r>
+          </a:p>
+          <a:p>
+            <a:pPr rtl="0">
+              <a:defRPr/>
+            </a:pPr>
+            <a:r>
+              <a:rPr lang="en-US" sz="853">
+                <a:solidFill>
+                  <a:schemeClr val="tx1"/>
+                </a:solidFill>
+                <a:latin typeface="Segoe UI" panose="020B0502040204020203" pitchFamily="34" charset="0"/>
+                <a:cs typeface="Segoe UI" panose="020B0502040204020203" pitchFamily="34" charset="0"/>
+              </a:rPr>
+              <a:t>ExamId</a:t>
+            </a:r>
+          </a:p>
+          <a:p>
+            <a:pPr rtl="0">
+              <a:defRPr/>
+            </a:pPr>
+            <a:r>
+              <a:rPr lang="en-US" sz="853">
+                <a:solidFill>
+                  <a:schemeClr val="tx1"/>
+                </a:solidFill>
+                <a:latin typeface="Segoe UI" panose="020B0502040204020203" pitchFamily="34" charset="0"/>
+                <a:cs typeface="Segoe UI" panose="020B0502040204020203" pitchFamily="34" charset="0"/>
+              </a:rPr>
+              <a:t>TopicId</a:t>
+            </a:r>
+          </a:p>
+          <a:p>
+            <a:pPr rtl="0">
+              <a:defRPr/>
+            </a:pPr>
+            <a:r>
+              <a:rPr lang="en-US" sz="853">
+                <a:solidFill>
+                  <a:schemeClr val="tx1"/>
+                </a:solidFill>
+                <a:latin typeface="Segoe UI" panose="020B0502040204020203" pitchFamily="34" charset="0"/>
+                <a:cs typeface="Segoe UI" panose="020B0502040204020203" pitchFamily="34" charset="0"/>
+              </a:rPr>
+              <a:t>TopicNTests</a:t>
+            </a:r>
+          </a:p>
+          <a:p>
+            <a:pPr rtl="0">
+              <a:defRPr/>
+            </a:pPr>
+            <a:r>
+              <a:rPr lang="en-US" sz="853">
+                <a:solidFill>
+                  <a:schemeClr val="tx1"/>
+                </a:solidFill>
+                <a:latin typeface="Segoe UI" panose="020B0502040204020203" pitchFamily="34" charset="0"/>
+                <a:cs typeface="Segoe UI" panose="020B0502040204020203" pitchFamily="34" charset="0"/>
+              </a:rPr>
+              <a:t>TestsLevel</a:t>
+            </a:r>
+          </a:p>
+        </p:txBody>
+      </p:sp>
+      <p:sp>
+        <p:nvSpPr>
+          <p:cNvPr id="5" name="Rectangle: Rounded Corners 15">
+            <a:extLst>
+              <a:ext uri="{FF2B5EF4-FFF2-40B4-BE49-F238E27FC236}">
+                <a16:creationId xmlns:a16="http://schemas.microsoft.com/office/drawing/2014/main" id="{5C397EF3-C98C-AF05-D30B-E81FD4229C99}"/>
+              </a:ext>
+            </a:extLst>
+          </p:cNvPr>
+          <p:cNvSpPr/>
+          <p:nvPr/>
+        </p:nvSpPr>
+        <p:spPr bwMode="auto">
+          <a:xfrm>
+            <a:off x="5415117" y="6048573"/>
+            <a:ext cx="1230158" cy="1634612"/>
+          </a:xfrm>
+          <a:prstGeom prst="roundRect">
+            <a:avLst>
+              <a:gd name="adj" fmla="val 5608"/>
+            </a:avLst>
+          </a:prstGeom>
+          <a:solidFill>
+            <a:schemeClr val="bg1"/>
+          </a:solidFill>
+          <a:ln w="28575">
+            <a:solidFill>
+              <a:schemeClr val="accent5"/>
+            </a:solidFill>
+          </a:ln>
+          <a:effectLst/>
+        </p:spPr>
+        <p:style>
+          <a:lnRef idx="0">
+            <a:schemeClr val="accent4"/>
+          </a:lnRef>
+          <a:fillRef idx="3">
+            <a:schemeClr val="accent4"/>
+          </a:fillRef>
+          <a:effectRef idx="3">
+            <a:schemeClr val="accent4"/>
+          </a:effectRef>
+          <a:fontRef idx="minor">
+            <a:schemeClr val="lt1"/>
+          </a:fontRef>
+        </p:style>
+        <p:txBody>
+          <a:bodyPr rtlCol="1" anchor="ctr"/>
+          <a:lstStyle/>
+          <a:p>
+            <a:pPr rtl="0">
+              <a:defRPr/>
+            </a:pPr>
+            <a:r>
+              <a:rPr lang="en-US" sz="1707" b="1">
+                <a:solidFill>
+                  <a:schemeClr val="bg1"/>
+                </a:solidFill>
+                <a:highlight>
+                  <a:srgbClr val="0000FF"/>
+                </a:highlight>
+                <a:latin typeface="Segoe UI" panose="020B0502040204020203" pitchFamily="34" charset="0"/>
+                <a:cs typeface="Segoe UI" panose="020B0502040204020203" pitchFamily="34" charset="0"/>
+              </a:rPr>
+              <a:t>E</a:t>
+            </a:r>
+          </a:p>
+          <a:p>
+            <a:pPr rtl="0">
+              <a:defRPr/>
+            </a:pPr>
+            <a:r>
+              <a:rPr lang="en-US" sz="1280" b="1">
+                <a:solidFill>
+                  <a:schemeClr val="tx1"/>
+                </a:solidFill>
+                <a:latin typeface="Segoe UI" panose="020B0502040204020203" pitchFamily="34" charset="0"/>
+                <a:cs typeface="Segoe UI" panose="020B0502040204020203" pitchFamily="34" charset="0"/>
+              </a:rPr>
+              <a:t>Exams</a:t>
+            </a:r>
+            <a:endParaRPr sz="1280">
+              <a:solidFill>
+                <a:schemeClr val="tx1"/>
+              </a:solidFill>
+              <a:latin typeface="Segoe UI" panose="020B0502040204020203" pitchFamily="34" charset="0"/>
+              <a:cs typeface="Segoe UI" panose="020B0502040204020203" pitchFamily="34" charset="0"/>
+            </a:endParaRPr>
+          </a:p>
+          <a:p>
+            <a:pPr rtl="0">
+              <a:defRPr/>
+            </a:pPr>
+            <a:r>
+              <a:rPr lang="en-US" sz="853" i="1">
+                <a:solidFill>
+                  <a:schemeClr val="accent5"/>
+                </a:solidFill>
+                <a:latin typeface="Segoe UI" panose="020B0502040204020203" pitchFamily="34" charset="0"/>
+                <a:cs typeface="Segoe UI" panose="020B0502040204020203" pitchFamily="34" charset="0"/>
+              </a:rPr>
+              <a:t>ExamId</a:t>
+            </a:r>
+          </a:p>
+          <a:p>
+            <a:pPr rtl="0">
+              <a:defRPr/>
+            </a:pPr>
+            <a:r>
+              <a:rPr lang="en-US" sz="853">
+                <a:solidFill>
+                  <a:schemeClr val="tx1"/>
+                </a:solidFill>
+                <a:latin typeface="Segoe UI" panose="020B0502040204020203" pitchFamily="34" charset="0"/>
+                <a:cs typeface="Segoe UI" panose="020B0502040204020203" pitchFamily="34" charset="0"/>
+              </a:rPr>
+              <a:t>CourseId</a:t>
+            </a:r>
+          </a:p>
+          <a:p>
+            <a:pPr rtl="0">
+              <a:defRPr/>
+            </a:pPr>
+            <a:r>
+              <a:rPr lang="en-US" sz="853">
+                <a:solidFill>
+                  <a:schemeClr val="tx1"/>
+                </a:solidFill>
+                <a:latin typeface="Segoe UI" panose="020B0502040204020203" pitchFamily="34" charset="0"/>
+                <a:cs typeface="Segoe UI" panose="020B0502040204020203" pitchFamily="34" charset="0"/>
+              </a:rPr>
+              <a:t>ExamTitle</a:t>
+            </a:r>
+          </a:p>
+          <a:p>
+            <a:pPr rtl="0">
+              <a:defRPr/>
+            </a:pPr>
+            <a:r>
+              <a:rPr lang="en-US" sz="853">
+                <a:solidFill>
+                  <a:schemeClr val="tx1"/>
+                </a:solidFill>
+                <a:latin typeface="Segoe UI" panose="020B0502040204020203" pitchFamily="34" charset="0"/>
+                <a:cs typeface="Segoe UI" panose="020B0502040204020203" pitchFamily="34" charset="0"/>
+              </a:rPr>
+              <a:t>ExamDateTime</a:t>
+            </a:r>
+          </a:p>
+          <a:p>
+            <a:pPr rtl="0">
+              <a:defRPr/>
+            </a:pPr>
+            <a:r>
+              <a:rPr lang="en-US" sz="853">
+                <a:solidFill>
+                  <a:schemeClr val="tx1"/>
+                </a:solidFill>
+                <a:latin typeface="Segoe UI" panose="020B0502040204020203" pitchFamily="34" charset="0"/>
+                <a:cs typeface="Segoe UI" panose="020B0502040204020203" pitchFamily="34" charset="0"/>
+              </a:rPr>
+              <a:t>ExamDuration</a:t>
+            </a:r>
+          </a:p>
+          <a:p>
+            <a:pPr rtl="0">
+              <a:defRPr/>
+            </a:pPr>
+            <a:r>
+              <a:rPr lang="en-US" sz="853">
+                <a:solidFill>
+                  <a:schemeClr val="tx1"/>
+                </a:solidFill>
+                <a:latin typeface="Segoe UI" panose="020B0502040204020203" pitchFamily="34" charset="0"/>
+                <a:cs typeface="Segoe UI" panose="020B0502040204020203" pitchFamily="34" charset="0"/>
+              </a:rPr>
+              <a:t>ExamNTests</a:t>
+            </a:r>
+          </a:p>
+          <a:p>
+            <a:pPr rtl="0">
+              <a:defRPr/>
+            </a:pPr>
+            <a:r>
+              <a:rPr lang="en-US" sz="853">
+                <a:solidFill>
+                  <a:schemeClr val="tx1"/>
+                </a:solidFill>
+                <a:latin typeface="Segoe UI" panose="020B0502040204020203" pitchFamily="34" charset="0"/>
+                <a:cs typeface="Segoe UI" panose="020B0502040204020203" pitchFamily="34" charset="0"/>
+              </a:rPr>
+              <a:t>ExamTags</a:t>
+            </a:r>
+            <a:r>
+              <a:rPr lang="en-US" sz="853">
+                <a:solidFill>
+                  <a:srgbClr val="C00000"/>
+                </a:solidFill>
+                <a:latin typeface="Segoe UI" panose="020B0502040204020203" pitchFamily="34" charset="0"/>
+                <a:cs typeface="Segoe UI" panose="020B0502040204020203" pitchFamily="34" charset="0"/>
+              </a:rPr>
+              <a:t> </a:t>
+            </a:r>
+          </a:p>
+          <a:p>
+            <a:pPr rtl="0">
+              <a:defRPr/>
+            </a:pPr>
+            <a:r>
+              <a:rPr lang="en-US" sz="500">
+                <a:solidFill>
+                  <a:srgbClr val="C00000"/>
+                </a:solidFill>
+                <a:latin typeface="Segoe UI" panose="020B0502040204020203" pitchFamily="34" charset="0"/>
+                <a:cs typeface="Segoe UI" panose="020B0502040204020203" pitchFamily="34" charset="0"/>
+              </a:rPr>
+              <a:t>1:act 2:training</a:t>
+            </a:r>
+          </a:p>
+        </p:txBody>
+      </p:sp>
+      <p:sp>
+        <p:nvSpPr>
+          <p:cNvPr id="97" name="Rectangle: Rounded Corners 45">
+            <a:extLst>
+              <a:ext uri="{FF2B5EF4-FFF2-40B4-BE49-F238E27FC236}">
+                <a16:creationId xmlns:a16="http://schemas.microsoft.com/office/drawing/2014/main" id="{E6BA6EAB-7AC6-19DD-11F7-782C47CCE5CC}"/>
+              </a:ext>
+            </a:extLst>
+          </p:cNvPr>
+          <p:cNvSpPr/>
+          <p:nvPr/>
+        </p:nvSpPr>
+        <p:spPr bwMode="auto">
+          <a:xfrm>
+            <a:off x="1598050" y="4720286"/>
+            <a:ext cx="1182039" cy="1199659"/>
+          </a:xfrm>
+          <a:prstGeom prst="roundRect">
+            <a:avLst>
+              <a:gd name="adj" fmla="val 8076"/>
+            </a:avLst>
+          </a:prstGeom>
+          <a:solidFill>
+            <a:schemeClr val="bg1"/>
+          </a:solidFill>
+          <a:ln w="28575">
+            <a:solidFill>
+              <a:schemeClr val="tx1"/>
+            </a:solidFill>
+            <a:prstDash val="solid"/>
+          </a:ln>
+          <a:effectLst/>
+        </p:spPr>
+        <p:style>
+          <a:lnRef idx="0">
+            <a:schemeClr val="accent4"/>
+          </a:lnRef>
+          <a:fillRef idx="3">
+            <a:schemeClr val="accent4"/>
+          </a:fillRef>
+          <a:effectRef idx="3">
+            <a:schemeClr val="accent4"/>
+          </a:effectRef>
+          <a:fontRef idx="minor">
+            <a:schemeClr val="lt1"/>
+          </a:fontRef>
+        </p:style>
+        <p:txBody>
+          <a:bodyPr rtlCol="1" anchor="ctr"/>
+          <a:lstStyle/>
+          <a:p>
+            <a:pPr algn="l" rtl="0">
+              <a:defRPr/>
+            </a:pPr>
+            <a:r>
+              <a:rPr lang="en-US" sz="1707" b="1">
+                <a:solidFill>
+                  <a:schemeClr val="bg1"/>
+                </a:solidFill>
+                <a:highlight>
+                  <a:srgbClr val="800080"/>
+                </a:highlight>
+                <a:latin typeface="Segoe UI" panose="020B0502040204020203" pitchFamily="34" charset="0"/>
+                <a:cs typeface="Segoe UI" panose="020B0502040204020203" pitchFamily="34" charset="0"/>
+              </a:rPr>
+              <a:t>M</a:t>
+            </a:r>
+          </a:p>
+          <a:p>
+            <a:pPr rtl="0">
+              <a:defRPr/>
+            </a:pPr>
+            <a:r>
+              <a:rPr lang="en-US" sz="1280" b="1">
+                <a:solidFill>
+                  <a:schemeClr val="tx1"/>
+                </a:solidFill>
+                <a:latin typeface="Segoe UI" panose="020B0502040204020203" pitchFamily="34" charset="0"/>
+                <a:cs typeface="Segoe UI" panose="020B0502040204020203" pitchFamily="34" charset="0"/>
+              </a:rPr>
+              <a:t>Messages</a:t>
+            </a:r>
+            <a:endParaRPr sz="1280">
+              <a:solidFill>
+                <a:schemeClr val="tx1"/>
+              </a:solidFill>
+              <a:latin typeface="Segoe UI" panose="020B0502040204020203" pitchFamily="34" charset="0"/>
+              <a:cs typeface="Segoe UI" panose="020B0502040204020203" pitchFamily="34" charset="0"/>
+            </a:endParaRPr>
+          </a:p>
+          <a:p>
+            <a:pPr rtl="0">
+              <a:defRPr/>
+            </a:pPr>
+            <a:r>
+              <a:rPr lang="en-US" sz="853" i="1">
+                <a:solidFill>
+                  <a:schemeClr val="accent5"/>
+                </a:solidFill>
+                <a:latin typeface="Segoe UI" panose="020B0502040204020203" pitchFamily="34" charset="0"/>
+                <a:cs typeface="Segoe UI" panose="020B0502040204020203" pitchFamily="34" charset="0"/>
+              </a:rPr>
+              <a:t>MessageId</a:t>
+            </a:r>
+          </a:p>
+          <a:p>
+            <a:pPr rtl="0">
+              <a:defRPr/>
+            </a:pPr>
+            <a:r>
+              <a:rPr lang="en-US" sz="853">
+                <a:solidFill>
+                  <a:schemeClr val="tx1"/>
+                </a:solidFill>
+                <a:latin typeface="Segoe UI" panose="020B0502040204020203" pitchFamily="34" charset="0"/>
+                <a:cs typeface="Segoe UI" panose="020B0502040204020203" pitchFamily="34" charset="0"/>
+              </a:rPr>
+              <a:t>UserId</a:t>
+            </a:r>
+          </a:p>
+          <a:p>
+            <a:pPr rtl="0">
+              <a:defRPr/>
+            </a:pPr>
+            <a:r>
+              <a:rPr lang="en-US" sz="853">
+                <a:solidFill>
+                  <a:schemeClr val="tx1"/>
+                </a:solidFill>
+                <a:latin typeface="Segoe UI" panose="020B0502040204020203" pitchFamily="34" charset="0"/>
+                <a:cs typeface="Segoe UI" panose="020B0502040204020203" pitchFamily="34" charset="0"/>
+              </a:rPr>
+              <a:t>DateTimeCreated</a:t>
+            </a:r>
+          </a:p>
+          <a:p>
+            <a:pPr rtl="0">
+              <a:defRPr/>
+            </a:pPr>
+            <a:r>
+              <a:rPr lang="en-US" sz="853">
+                <a:solidFill>
+                  <a:schemeClr val="tx1"/>
+                </a:solidFill>
+                <a:latin typeface="Segoe UI" panose="020B0502040204020203" pitchFamily="34" charset="0"/>
+                <a:cs typeface="Segoe UI" panose="020B0502040204020203" pitchFamily="34" charset="0"/>
+              </a:rPr>
+              <a:t>MessageTitle</a:t>
+            </a:r>
+          </a:p>
+          <a:p>
+            <a:pPr rtl="0">
+              <a:defRPr/>
+            </a:pPr>
+            <a:r>
+              <a:rPr lang="en-US" sz="853">
+                <a:solidFill>
+                  <a:schemeClr val="tx1"/>
+                </a:solidFill>
+                <a:latin typeface="Segoe UI" panose="020B0502040204020203" pitchFamily="34" charset="0"/>
+                <a:cs typeface="Segoe UI" panose="020B0502040204020203" pitchFamily="34" charset="0"/>
+              </a:rPr>
+              <a:t>MessageBody</a:t>
+            </a:r>
+          </a:p>
+        </p:txBody>
+      </p:sp>
+      <p:sp>
+        <p:nvSpPr>
+          <p:cNvPr id="11" name="Rectangle: Rounded Corners 44">
+            <a:extLst>
+              <a:ext uri="{FF2B5EF4-FFF2-40B4-BE49-F238E27FC236}">
+                <a16:creationId xmlns:a16="http://schemas.microsoft.com/office/drawing/2014/main" id="{5D5FF3D4-447A-77CB-8B35-8B1F447EF331}"/>
+              </a:ext>
+            </a:extLst>
+          </p:cNvPr>
+          <p:cNvSpPr/>
+          <p:nvPr/>
+        </p:nvSpPr>
+        <p:spPr bwMode="auto">
+          <a:xfrm>
+            <a:off x="1956422" y="2085954"/>
+            <a:ext cx="1182038" cy="900550"/>
+          </a:xfrm>
+          <a:prstGeom prst="roundRect">
+            <a:avLst>
+              <a:gd name="adj" fmla="val 9941"/>
+            </a:avLst>
+          </a:prstGeom>
+          <a:solidFill>
+            <a:schemeClr val="bg1"/>
+          </a:solidFill>
+          <a:ln w="28575">
+            <a:solidFill>
+              <a:schemeClr val="tx1"/>
+            </a:solidFill>
+            <a:prstDash val="solid"/>
+          </a:ln>
+          <a:effectLst/>
+        </p:spPr>
+        <p:style>
+          <a:lnRef idx="0">
+            <a:schemeClr val="accent4"/>
+          </a:lnRef>
+          <a:fillRef idx="3">
+            <a:schemeClr val="accent4"/>
+          </a:fillRef>
+          <a:effectRef idx="3">
+            <a:schemeClr val="accent4"/>
+          </a:effectRef>
+          <a:fontRef idx="minor">
+            <a:schemeClr val="lt1"/>
+          </a:fontRef>
+        </p:style>
+        <p:txBody>
+          <a:bodyPr rtlCol="1" anchor="ctr"/>
+          <a:lstStyle/>
+          <a:p>
+            <a:pPr algn="l" rtl="0">
+              <a:defRPr/>
+            </a:pPr>
+            <a:r>
+              <a:rPr lang="en-US" sz="1707" b="1">
+                <a:solidFill>
+                  <a:schemeClr val="bg1"/>
+                </a:solidFill>
+                <a:highlight>
+                  <a:srgbClr val="008080"/>
+                </a:highlight>
+                <a:latin typeface="Segoe UI" panose="020B0502040204020203" pitchFamily="34" charset="0"/>
+                <a:cs typeface="Segoe UI" panose="020B0502040204020203" pitchFamily="34" charset="0"/>
+              </a:rPr>
+              <a:t>G</a:t>
+            </a:r>
+          </a:p>
+          <a:p>
+            <a:pPr rtl="0">
+              <a:defRPr/>
+            </a:pPr>
+            <a:r>
+              <a:rPr lang="en-US" sz="1280" b="1">
+                <a:solidFill>
+                  <a:schemeClr val="tx1"/>
+                </a:solidFill>
+                <a:latin typeface="Segoe UI" panose="020B0502040204020203" pitchFamily="34" charset="0"/>
+                <a:cs typeface="Segoe UI" panose="020B0502040204020203" pitchFamily="34" charset="0"/>
+              </a:rPr>
+              <a:t>Groups</a:t>
+            </a:r>
+            <a:endParaRPr sz="1280" b="1">
+              <a:solidFill>
+                <a:schemeClr val="tx1"/>
+              </a:solidFill>
+              <a:latin typeface="Segoe UI" panose="020B0502040204020203" pitchFamily="34" charset="0"/>
+              <a:cs typeface="Segoe UI" panose="020B0502040204020203" pitchFamily="34" charset="0"/>
+            </a:endParaRPr>
+          </a:p>
+          <a:p>
+            <a:pPr rtl="0">
+              <a:defRPr/>
+            </a:pPr>
+            <a:r>
+              <a:rPr lang="en-US" sz="853" i="1">
+                <a:solidFill>
+                  <a:schemeClr val="accent5"/>
+                </a:solidFill>
+                <a:latin typeface="Segoe UI" panose="020B0502040204020203" pitchFamily="34" charset="0"/>
+                <a:cs typeface="Segoe UI" panose="020B0502040204020203" pitchFamily="34" charset="0"/>
+              </a:rPr>
+              <a:t>GroupId</a:t>
+            </a:r>
+          </a:p>
+          <a:p>
+            <a:pPr rtl="0">
+              <a:defRPr/>
+            </a:pPr>
+            <a:r>
+              <a:rPr lang="en-US" sz="853">
+                <a:solidFill>
+                  <a:schemeClr val="tx1"/>
+                </a:solidFill>
+                <a:latin typeface="Segoe UI" panose="020B0502040204020203" pitchFamily="34" charset="0"/>
+                <a:cs typeface="Segoe UI" panose="020B0502040204020203" pitchFamily="34" charset="0"/>
+              </a:rPr>
+              <a:t>GroupName</a:t>
+            </a:r>
+          </a:p>
+          <a:p>
+            <a:pPr rtl="0">
+              <a:defRPr/>
+            </a:pPr>
+            <a:r>
+              <a:rPr lang="en-US" sz="853">
+                <a:solidFill>
+                  <a:schemeClr val="tx1"/>
+                </a:solidFill>
+                <a:latin typeface="Segoe UI" panose="020B0502040204020203" pitchFamily="34" charset="0"/>
+                <a:cs typeface="Segoe UI" panose="020B0502040204020203" pitchFamily="34" charset="0"/>
+              </a:rPr>
+              <a:t>UserId</a:t>
+            </a:r>
+          </a:p>
+        </p:txBody>
+      </p:sp>
+      <p:sp>
+        <p:nvSpPr>
+          <p:cNvPr id="12" name="Rectangle: Rounded Corners 45">
+            <a:extLst>
+              <a:ext uri="{FF2B5EF4-FFF2-40B4-BE49-F238E27FC236}">
+                <a16:creationId xmlns:a16="http://schemas.microsoft.com/office/drawing/2014/main" id="{BA734567-42EC-389F-1475-ABC0C5B466CF}"/>
+              </a:ext>
+            </a:extLst>
+          </p:cNvPr>
+          <p:cNvSpPr/>
+          <p:nvPr/>
+        </p:nvSpPr>
+        <p:spPr bwMode="auto">
+          <a:xfrm>
+            <a:off x="4235094" y="2930674"/>
+            <a:ext cx="1855656" cy="2078683"/>
+          </a:xfrm>
+          <a:prstGeom prst="roundRect">
+            <a:avLst>
+              <a:gd name="adj" fmla="val 3991"/>
+            </a:avLst>
+          </a:prstGeom>
+          <a:solidFill>
+            <a:schemeClr val="bg1"/>
+          </a:solidFill>
+          <a:ln w="28575">
+            <a:solidFill>
+              <a:schemeClr val="tx1"/>
+            </a:solidFill>
+          </a:ln>
+          <a:effectLst/>
+        </p:spPr>
+        <p:style>
+          <a:lnRef idx="0">
+            <a:schemeClr val="accent4"/>
+          </a:lnRef>
+          <a:fillRef idx="3">
+            <a:schemeClr val="accent4"/>
+          </a:fillRef>
+          <a:effectRef idx="3">
+            <a:schemeClr val="accent4"/>
+          </a:effectRef>
+          <a:fontRef idx="minor">
+            <a:schemeClr val="lt1"/>
+          </a:fontRef>
+        </p:style>
+        <p:txBody>
+          <a:bodyPr rtlCol="1" anchor="ctr"/>
+          <a:lstStyle/>
+          <a:p>
+            <a:pPr marL="189651" algn="l" rtl="0">
+              <a:defRPr/>
+            </a:pPr>
+            <a:r>
+              <a:rPr lang="en-US" sz="1707" b="1">
+                <a:solidFill>
+                  <a:schemeClr val="bg1"/>
+                </a:solidFill>
+                <a:highlight>
+                  <a:srgbClr val="000000"/>
+                </a:highlight>
+                <a:latin typeface="Segoe UI" panose="020B0502040204020203" pitchFamily="34" charset="0"/>
+                <a:cs typeface="Segoe UI" panose="020B0502040204020203" pitchFamily="34" charset="0"/>
+              </a:rPr>
+              <a:t>S</a:t>
+            </a:r>
+          </a:p>
+          <a:p>
+            <a:pPr marL="189651" rtl="0">
+              <a:defRPr/>
+            </a:pPr>
+            <a:r>
+              <a:rPr lang="en-US" sz="1280" b="1">
+                <a:solidFill>
+                  <a:schemeClr val="tx1"/>
+                </a:solidFill>
+                <a:latin typeface="Segoe UI" panose="020B0502040204020203" pitchFamily="34" charset="0"/>
+                <a:cs typeface="Segoe UI" panose="020B0502040204020203" pitchFamily="34" charset="0"/>
+              </a:rPr>
+              <a:t>Students</a:t>
+            </a:r>
+            <a:endParaRPr sz="1280">
+              <a:solidFill>
+                <a:schemeClr val="tx1"/>
+              </a:solidFill>
+              <a:latin typeface="Segoe UI" panose="020B0502040204020203" pitchFamily="34" charset="0"/>
+              <a:cs typeface="Segoe UI" panose="020B0502040204020203" pitchFamily="34" charset="0"/>
+            </a:endParaRPr>
+          </a:p>
+          <a:p>
+            <a:pPr marL="189651" rtl="0">
+              <a:defRPr/>
+            </a:pPr>
+            <a:r>
+              <a:rPr lang="en-US" sz="853" i="1">
+                <a:solidFill>
+                  <a:schemeClr val="accent5"/>
+                </a:solidFill>
+                <a:latin typeface="Segoe UI" panose="020B0502040204020203" pitchFamily="34" charset="0"/>
+                <a:cs typeface="Segoe UI" panose="020B0502040204020203" pitchFamily="34" charset="0"/>
+              </a:rPr>
+              <a:t>StudentId</a:t>
+            </a:r>
+          </a:p>
+          <a:p>
+            <a:pPr marL="189651" rtl="0">
+              <a:defRPr/>
+            </a:pPr>
+            <a:r>
+              <a:rPr lang="en-US" sz="853">
+                <a:solidFill>
+                  <a:schemeClr val="tx1"/>
+                </a:solidFill>
+                <a:latin typeface="Segoe UI" panose="020B0502040204020203" pitchFamily="34" charset="0"/>
+                <a:cs typeface="Segoe UI" panose="020B0502040204020203" pitchFamily="34" charset="0"/>
+              </a:rPr>
+              <a:t>DepartmentId</a:t>
+            </a:r>
+          </a:p>
+          <a:p>
+            <a:pPr marL="189651" rtl="0">
+              <a:defRPr/>
+            </a:pPr>
+            <a:r>
+              <a:rPr lang="en-US" sz="853">
+                <a:solidFill>
+                  <a:schemeClr val="tx1"/>
+                </a:solidFill>
+                <a:latin typeface="Segoe UI" panose="020B0502040204020203" pitchFamily="34" charset="0"/>
+                <a:cs typeface="Segoe UI" panose="020B0502040204020203" pitchFamily="34" charset="0"/>
+              </a:rPr>
+              <a:t>StudentName</a:t>
+            </a:r>
+          </a:p>
+          <a:p>
+            <a:pPr marL="189651" rtl="0">
+              <a:defRPr/>
+            </a:pPr>
+            <a:r>
+              <a:rPr lang="en-US" sz="853">
+                <a:solidFill>
+                  <a:schemeClr val="tx1"/>
+                </a:solidFill>
+                <a:latin typeface="Segoe UI" panose="020B0502040204020203" pitchFamily="34" charset="0"/>
+                <a:cs typeface="Segoe UI" panose="020B0502040204020203" pitchFamily="34" charset="0"/>
+              </a:rPr>
+              <a:t>StudentPass</a:t>
+            </a:r>
+          </a:p>
+          <a:p>
+            <a:pPr marL="189651" rtl="0">
+              <a:defRPr/>
+            </a:pPr>
+            <a:r>
+              <a:rPr lang="en-US" sz="853">
+                <a:solidFill>
+                  <a:schemeClr val="tx1"/>
+                </a:solidFill>
+                <a:latin typeface="Segoe UI" panose="020B0502040204020203" pitchFamily="34" charset="0"/>
+                <a:cs typeface="Segoe UI" panose="020B0502040204020203" pitchFamily="34" charset="0"/>
+              </a:rPr>
+              <a:t>StudentNickname</a:t>
+            </a:r>
+          </a:p>
+          <a:p>
+            <a:pPr marL="189651" rtl="0">
+              <a:defRPr/>
+            </a:pPr>
+            <a:r>
+              <a:rPr lang="en-US" sz="853">
+                <a:solidFill>
+                  <a:schemeClr val="tx1"/>
+                </a:solidFill>
+                <a:latin typeface="Segoe UI" panose="020B0502040204020203" pitchFamily="34" charset="0"/>
+                <a:cs typeface="Segoe UI" panose="020B0502040204020203" pitchFamily="34" charset="0"/>
+              </a:rPr>
+              <a:t>StudentTags</a:t>
+            </a:r>
+          </a:p>
+          <a:p>
+            <a:pPr marL="176213" rtl="0">
+              <a:defRPr/>
+            </a:pPr>
+            <a:r>
+              <a:rPr lang="en-US" sz="500">
+                <a:solidFill>
+                  <a:srgbClr val="C00000"/>
+                </a:solidFill>
+                <a:latin typeface="Segoe UI" panose="020B0502040204020203" pitchFamily="34" charset="0"/>
+                <a:cs typeface="Segoe UI" panose="020B0502040204020203" pitchFamily="34" charset="0"/>
+              </a:rPr>
+              <a:t>1: IsActive</a:t>
+            </a:r>
+          </a:p>
+          <a:p>
+            <a:pPr marL="176213" rtl="0">
+              <a:defRPr/>
+            </a:pPr>
+            <a:r>
+              <a:rPr lang="en-US" sz="500">
+                <a:solidFill>
+                  <a:srgbClr val="C00000"/>
+                </a:solidFill>
+                <a:latin typeface="Segoe UI" panose="020B0502040204020203" pitchFamily="34" charset="0"/>
+                <a:cs typeface="Segoe UI" panose="020B0502040204020203" pitchFamily="34" charset="0"/>
+              </a:rPr>
+              <a:t>2: ChangePass</a:t>
+            </a:r>
+          </a:p>
+          <a:p>
+            <a:pPr marL="176213" rtl="0">
+              <a:defRPr/>
+            </a:pPr>
+            <a:r>
+              <a:rPr lang="en-US" sz="500">
+                <a:solidFill>
+                  <a:srgbClr val="C00000"/>
+                </a:solidFill>
+                <a:latin typeface="Segoe UI" panose="020B0502040204020203" pitchFamily="34" charset="0"/>
+                <a:cs typeface="Segoe UI" panose="020B0502040204020203" pitchFamily="34" charset="0"/>
+              </a:rPr>
+              <a:t>4: ReviewEx</a:t>
+            </a:r>
+          </a:p>
+          <a:p>
+            <a:pPr marL="176213" rtl="0">
+              <a:defRPr/>
+            </a:pPr>
+            <a:r>
+              <a:rPr lang="en-US" sz="500">
+                <a:solidFill>
+                  <a:srgbClr val="C00000"/>
+                </a:solidFill>
+                <a:latin typeface="Segoe UI" panose="020B0502040204020203" pitchFamily="34" charset="0"/>
+                <a:cs typeface="Segoe UI" panose="020B0502040204020203" pitchFamily="34" charset="0"/>
+              </a:rPr>
+              <a:t>8: GetStExTests</a:t>
+            </a:r>
+          </a:p>
+          <a:p>
+            <a:pPr marL="176213" rtl="0">
+              <a:defRPr/>
+            </a:pPr>
+            <a:r>
+              <a:rPr lang="en-US" sz="500">
+                <a:solidFill>
+                  <a:srgbClr val="C00000"/>
+                </a:solidFill>
+                <a:latin typeface="Segoe UI" panose="020B0502040204020203" pitchFamily="34" charset="0"/>
+                <a:cs typeface="Segoe UI" panose="020B0502040204020203" pitchFamily="34" charset="0"/>
+              </a:rPr>
+              <a:t>16: CorrectStExTests</a:t>
+            </a:r>
+          </a:p>
+          <a:p>
+            <a:pPr marL="176213" rtl="0">
+              <a:defRPr/>
+            </a:pPr>
+            <a:r>
+              <a:rPr lang="en-US" sz="500">
+                <a:solidFill>
+                  <a:srgbClr val="C00000"/>
+                </a:solidFill>
+                <a:latin typeface="Segoe UI" panose="020B0502040204020203" pitchFamily="34" charset="0"/>
+                <a:cs typeface="Segoe UI" panose="020B0502040204020203" pitchFamily="34" charset="0"/>
+              </a:rPr>
+              <a:t>32: RevStExTests</a:t>
+            </a:r>
+          </a:p>
+          <a:p>
+            <a:pPr marL="176213" rtl="0">
+              <a:defRPr/>
+            </a:pPr>
+            <a:r>
+              <a:rPr lang="en-US" sz="500">
+                <a:solidFill>
+                  <a:srgbClr val="C00000"/>
+                </a:solidFill>
+                <a:latin typeface="Segoe UI" panose="020B0502040204020203" pitchFamily="34" charset="0"/>
+                <a:cs typeface="Segoe UI" panose="020B0502040204020203" pitchFamily="34" charset="0"/>
+              </a:rPr>
+              <a:t>64: IsSelected</a:t>
+            </a:r>
+          </a:p>
+          <a:p>
+            <a:pPr marL="176213" rtl="0">
+              <a:defRPr/>
+            </a:pPr>
+            <a:r>
+              <a:rPr lang="en-US" sz="500">
+                <a:solidFill>
+                  <a:srgbClr val="C00000"/>
+                </a:solidFill>
+                <a:latin typeface="Segoe UI" panose="020B0502040204020203" pitchFamily="34" charset="0"/>
+                <a:cs typeface="Segoe UI" panose="020B0502040204020203" pitchFamily="34" charset="0"/>
+              </a:rPr>
+              <a:t>128:</a:t>
+            </a:r>
+          </a:p>
+          <a:p>
+            <a:pPr marL="176213" rtl="0">
+              <a:defRPr/>
+            </a:pPr>
+            <a:r>
+              <a:rPr lang="en-US" sz="500">
+                <a:solidFill>
+                  <a:srgbClr val="C00000"/>
+                </a:solidFill>
+                <a:latin typeface="Segoe UI" panose="020B0502040204020203" pitchFamily="34" charset="0"/>
+                <a:cs typeface="Segoe UI" panose="020B0502040204020203" pitchFamily="34" charset="0"/>
+              </a:rPr>
+              <a:t>256: CalendarFa</a:t>
+            </a:r>
+          </a:p>
+          <a:p>
+            <a:pPr marL="176213" rtl="0">
+              <a:defRPr/>
+            </a:pPr>
+            <a:endParaRPr lang="en-US" sz="500">
+              <a:solidFill>
+                <a:srgbClr val="C00000"/>
+              </a:solidFill>
+              <a:latin typeface="Segoe UI" panose="020B0502040204020203" pitchFamily="34" charset="0"/>
+              <a:cs typeface="Segoe UI" panose="020B0502040204020203" pitchFamily="34" charset="0"/>
+            </a:endParaRPr>
+          </a:p>
+        </p:txBody>
+      </p:sp>
+      <p:sp>
+        <p:nvSpPr>
+          <p:cNvPr id="71" name="Rectangle: Rounded Corners 1">
+            <a:extLst>
+              <a:ext uri="{FF2B5EF4-FFF2-40B4-BE49-F238E27FC236}">
+                <a16:creationId xmlns:a16="http://schemas.microsoft.com/office/drawing/2014/main" id="{955CB0B1-CE89-9B80-8575-451D6A2177CB}"/>
+              </a:ext>
+            </a:extLst>
+          </p:cNvPr>
+          <p:cNvSpPr/>
+          <p:nvPr/>
+        </p:nvSpPr>
+        <p:spPr bwMode="auto">
+          <a:xfrm>
+            <a:off x="5612526" y="2562764"/>
+            <a:ext cx="1545810" cy="1528199"/>
+          </a:xfrm>
+          <a:prstGeom prst="roundRect">
+            <a:avLst>
+              <a:gd name="adj" fmla="val 8076"/>
+            </a:avLst>
+          </a:prstGeom>
+          <a:solidFill>
+            <a:schemeClr val="bg1"/>
+          </a:solidFill>
+          <a:ln>
+            <a:solidFill>
+              <a:srgbClr val="C00000"/>
+            </a:solidFill>
+            <a:prstDash val="lgDash"/>
+          </a:ln>
+          <a:effectLst/>
+        </p:spPr>
+        <p:style>
+          <a:lnRef idx="0">
+            <a:schemeClr val="accent4"/>
+          </a:lnRef>
+          <a:fillRef idx="3">
+            <a:schemeClr val="accent4"/>
+          </a:fillRef>
+          <a:effectRef idx="3">
+            <a:schemeClr val="accent4"/>
+          </a:effectRef>
+          <a:fontRef idx="minor">
+            <a:schemeClr val="lt1"/>
+          </a:fontRef>
+        </p:style>
+        <p:txBody>
+          <a:bodyPr rtlCol="1" anchor="ctr"/>
+          <a:lstStyle/>
+          <a:p>
+            <a:pPr algn="l" rtl="0">
+              <a:defRPr/>
+            </a:pPr>
+            <a:r>
+              <a:rPr lang="en-US" sz="1707" b="1">
+                <a:solidFill>
+                  <a:schemeClr val="bg1"/>
+                </a:solidFill>
+                <a:highlight>
+                  <a:srgbClr val="800000"/>
+                </a:highlight>
+                <a:latin typeface="Segoe UI" panose="020B0502040204020203" pitchFamily="34" charset="0"/>
+                <a:ea typeface="Arial"/>
+                <a:cs typeface="Segoe UI" panose="020B0502040204020203" pitchFamily="34" charset="0"/>
+              </a:rPr>
+              <a:t>SC</a:t>
+            </a:r>
+          </a:p>
+          <a:p>
+            <a:pPr rtl="0">
+              <a:defRPr/>
+            </a:pPr>
+            <a:r>
+              <a:rPr lang="en-US" sz="1280" b="1">
+                <a:solidFill>
+                  <a:schemeClr val="tx1"/>
+                </a:solidFill>
+                <a:latin typeface="Segoe UI" panose="020B0502040204020203" pitchFamily="34" charset="0"/>
+                <a:ea typeface="Arial"/>
+                <a:cs typeface="Segoe UI" panose="020B0502040204020203" pitchFamily="34" charset="0"/>
+              </a:rPr>
+              <a:t>StudentCourse</a:t>
+            </a:r>
+            <a:r>
+              <a:rPr lang="en-US" sz="1280" b="1">
+                <a:solidFill>
+                  <a:schemeClr val="tx1"/>
+                </a:solidFill>
+                <a:latin typeface="Segoe UI" panose="020B0502040204020203" pitchFamily="34" charset="0"/>
+                <a:cs typeface="Segoe UI" panose="020B0502040204020203" pitchFamily="34" charset="0"/>
+              </a:rPr>
+              <a:t>s</a:t>
+            </a:r>
+            <a:endParaRPr sz="1280" b="1">
+              <a:solidFill>
+                <a:schemeClr val="tx1"/>
+              </a:solidFill>
+              <a:latin typeface="Segoe UI" panose="020B0502040204020203" pitchFamily="34" charset="0"/>
+              <a:cs typeface="Segoe UI" panose="020B0502040204020203" pitchFamily="34" charset="0"/>
+            </a:endParaRPr>
+          </a:p>
+          <a:p>
+            <a:pPr rtl="0">
+              <a:defRPr/>
+            </a:pPr>
+            <a:r>
+              <a:rPr lang="en-US" sz="853" i="1">
+                <a:solidFill>
+                  <a:schemeClr val="accent5"/>
+                </a:solidFill>
+                <a:latin typeface="Segoe UI" panose="020B0502040204020203" pitchFamily="34" charset="0"/>
+                <a:cs typeface="Segoe UI" panose="020B0502040204020203" pitchFamily="34" charset="0"/>
+              </a:rPr>
+              <a:t>StudentCourseId</a:t>
+            </a:r>
+          </a:p>
+          <a:p>
+            <a:pPr rtl="0">
+              <a:defRPr/>
+            </a:pPr>
+            <a:r>
+              <a:rPr lang="en-US" sz="853">
+                <a:solidFill>
+                  <a:schemeClr val="tx1"/>
+                </a:solidFill>
+                <a:latin typeface="Segoe UI" panose="020B0502040204020203" pitchFamily="34" charset="0"/>
+                <a:cs typeface="Segoe UI" panose="020B0502040204020203" pitchFamily="34" charset="0"/>
+              </a:rPr>
+              <a:t>StudentId</a:t>
+            </a:r>
+          </a:p>
+          <a:p>
+            <a:pPr rtl="0">
+              <a:defRPr/>
+            </a:pPr>
+            <a:r>
+              <a:rPr lang="en-US" sz="853">
+                <a:solidFill>
+                  <a:schemeClr val="tx1"/>
+                </a:solidFill>
+                <a:latin typeface="Segoe UI" panose="020B0502040204020203" pitchFamily="34" charset="0"/>
+                <a:cs typeface="Segoe UI" panose="020B0502040204020203" pitchFamily="34" charset="0"/>
+              </a:rPr>
+              <a:t>CourseId</a:t>
+            </a:r>
+          </a:p>
+          <a:p>
+            <a:pPr rtl="0">
+              <a:defRPr/>
+            </a:pPr>
+            <a:r>
+              <a:rPr lang="en-US" sz="853">
+                <a:solidFill>
+                  <a:schemeClr val="tx1"/>
+                </a:solidFill>
+                <a:latin typeface="Segoe UI" panose="020B0502040204020203" pitchFamily="34" charset="0"/>
+                <a:cs typeface="Segoe UI" panose="020B0502040204020203" pitchFamily="34" charset="0"/>
+              </a:rPr>
+              <a:t>NumberOfTests</a:t>
+            </a:r>
+          </a:p>
+          <a:p>
+            <a:pPr rtl="0">
+              <a:defRPr/>
+            </a:pPr>
+            <a:r>
+              <a:rPr lang="en-US" sz="853">
+                <a:solidFill>
+                  <a:schemeClr val="tx1"/>
+                </a:solidFill>
+                <a:latin typeface="Segoe UI" panose="020B0502040204020203" pitchFamily="34" charset="0"/>
+                <a:cs typeface="Segoe UI" panose="020B0502040204020203" pitchFamily="34" charset="0"/>
+              </a:rPr>
+              <a:t>CorrectAnswers</a:t>
+            </a:r>
+          </a:p>
+          <a:p>
+            <a:pPr rtl="0">
+              <a:defRPr/>
+            </a:pPr>
+            <a:r>
+              <a:rPr lang="en-US" sz="853">
+                <a:solidFill>
+                  <a:schemeClr val="tx1"/>
+                </a:solidFill>
+                <a:latin typeface="Segoe UI" panose="020B0502040204020203" pitchFamily="34" charset="0"/>
+                <a:cs typeface="Segoe UI" panose="020B0502040204020203" pitchFamily="34" charset="0"/>
+              </a:rPr>
+              <a:t>StudentCourseTags</a:t>
+            </a:r>
+          </a:p>
+          <a:p>
+            <a:pPr rtl="0">
+              <a:buNone/>
+            </a:pPr>
+            <a:r>
+              <a:rPr lang="en-US" sz="500" kern="100">
+                <a:solidFill>
+                  <a:srgbClr val="C00000"/>
+                </a:solidFill>
+                <a:latin typeface="Segoe UI" panose="020B0502040204020203" pitchFamily="34" charset="0"/>
+                <a:ea typeface="Calibri" panose="020F0502020204030204" pitchFamily="34" charset="0"/>
+                <a:cs typeface="Segoe UI" panose="020B0502040204020203" pitchFamily="34" charset="0"/>
+              </a:rPr>
+              <a:t>1: act</a:t>
+            </a:r>
+          </a:p>
+          <a:p>
+            <a:pPr rtl="0">
+              <a:buNone/>
+            </a:pPr>
+            <a:r>
+              <a:rPr lang="en-US" sz="500" kern="100">
+                <a:solidFill>
+                  <a:srgbClr val="C00000"/>
+                </a:solidFill>
+                <a:latin typeface="Segoe UI" panose="020B0502040204020203" pitchFamily="34" charset="0"/>
+                <a:ea typeface="Calibri" panose="020F0502020204030204" pitchFamily="34" charset="0"/>
+                <a:cs typeface="Segoe UI" panose="020B0502040204020203" pitchFamily="34" charset="0"/>
+              </a:rPr>
+              <a:t>2: retry</a:t>
+            </a:r>
+          </a:p>
+          <a:p>
+            <a:pPr rtl="0">
+              <a:buNone/>
+            </a:pPr>
+            <a:r>
+              <a:rPr lang="en-US" sz="500" kern="100">
+                <a:solidFill>
+                  <a:srgbClr val="C00000"/>
+                </a:solidFill>
+                <a:latin typeface="Segoe UI" panose="020B0502040204020203" pitchFamily="34" charset="0"/>
+                <a:ea typeface="Calibri" panose="020F0502020204030204" pitchFamily="34" charset="0"/>
+                <a:cs typeface="Segoe UI" panose="020B0502040204020203" pitchFamily="34" charset="0"/>
+              </a:rPr>
+              <a:t>4: rev</a:t>
+            </a:r>
+          </a:p>
+        </p:txBody>
+      </p:sp>
+      <p:sp>
+        <p:nvSpPr>
           <p:cNvPr id="26" name="Rectangle: Rounded Corners 45">
             <a:extLst>
               <a:ext uri="{FF2B5EF4-FFF2-40B4-BE49-F238E27FC236}">
@@ -3127,7 +4399,7 @@
         </p:nvSpPr>
         <p:spPr bwMode="auto">
           <a:xfrm>
-            <a:off x="1359989" y="3928228"/>
+            <a:off x="2579479" y="3750647"/>
             <a:ext cx="1757728" cy="1759977"/>
           </a:xfrm>
           <a:prstGeom prst="roundRect">
@@ -3373,48 +4645,6 @@
           </a:p>
         </p:txBody>
       </p:sp>
-      <p:pic>
-        <p:nvPicPr>
-          <p:cNvPr id="44" name="Picture 43">
-            <a:extLst>
-              <a:ext uri="{FF2B5EF4-FFF2-40B4-BE49-F238E27FC236}">
-                <a16:creationId xmlns:a16="http://schemas.microsoft.com/office/drawing/2014/main" id="{0AC991BF-6836-D27B-9C74-D06170447989}"/>
-              </a:ext>
-            </a:extLst>
-          </p:cNvPr>
-          <p:cNvPicPr>
-            <a:picLocks noChangeAspect="1"/>
-          </p:cNvPicPr>
-          <p:nvPr/>
-        </p:nvPicPr>
-        <p:blipFill>
-          <a:blip r:embed="rId3"/>
-          <a:stretch>
-            <a:fillRect/>
-          </a:stretch>
-        </p:blipFill>
-        <p:spPr>
-          <a:xfrm>
-            <a:off x="99748" y="8109307"/>
-            <a:ext cx="1037872" cy="236733"/>
-          </a:xfrm>
-          <a:prstGeom prst="rect">
-            <a:avLst/>
-          </a:prstGeom>
-          <a:solidFill>
-            <a:srgbClr val="FFFFFF">
-              <a:shade val="85000"/>
-            </a:srgbClr>
-          </a:solidFill>
-          <a:ln w="88900" cap="sq">
-            <a:solidFill>
-              <a:srgbClr val="FFFFFF"/>
-            </a:solidFill>
-            <a:miter lim="800000"/>
-          </a:ln>
-          <a:effectLst/>
-        </p:spPr>
-      </p:pic>
       <p:sp>
         <p:nvSpPr>
           <p:cNvPr id="8" name="Rectangle: Rounded Corners 18">
@@ -3429,8 +4659,8 @@
         </p:nvSpPr>
         <p:spPr bwMode="auto">
           <a:xfrm>
-            <a:off x="4398629" y="1152028"/>
-            <a:ext cx="1937679" cy="1179645"/>
+            <a:off x="6927218" y="548448"/>
+            <a:ext cx="1366069" cy="1179645"/>
           </a:xfrm>
           <a:prstGeom prst="roundRect">
             <a:avLst>
@@ -3590,8 +4820,8 @@
         </p:nvSpPr>
         <p:spPr bwMode="auto">
           <a:xfrm>
-            <a:off x="8050056" y="3160093"/>
-            <a:ext cx="2065492" cy="2435984"/>
+            <a:off x="8424942" y="4090963"/>
+            <a:ext cx="2065492" cy="3588570"/>
           </a:xfrm>
           <a:prstGeom prst="roundRect">
             <a:avLst>
@@ -3626,7 +4856,7 @@
           <a:bodyPr rtlCol="1" anchor="ctr"/>
           <a:lstStyle/>
           <a:p>
-            <a:pPr marL="189651" rtl="0">
+            <a:pPr marL="625475" rtl="0">
               <a:defRPr/>
             </a:pPr>
             <a:endParaRPr lang="en-US" sz="1707" b="1">
@@ -3641,7 +4871,7 @@
             </a:endParaRPr>
           </a:p>
           <a:p>
-            <a:pPr marL="189651" rtl="0">
+            <a:pPr marL="625475" rtl="0">
               <a:defRPr/>
             </a:pPr>
             <a:r>
@@ -3659,7 +4889,7 @@
             </a:r>
           </a:p>
           <a:p>
-            <a:pPr marL="189651" rtl="0">
+            <a:pPr marL="625475" rtl="0">
               <a:defRPr/>
             </a:pPr>
             <a:r>
@@ -3681,7 +4911,7 @@
             </a:endParaRPr>
           </a:p>
           <a:p>
-            <a:pPr marL="189651" rtl="0">
+            <a:pPr marL="625475" rtl="0">
               <a:defRPr/>
             </a:pPr>
             <a:r>
@@ -3696,7 +4926,7 @@
             </a:r>
           </a:p>
           <a:p>
-            <a:pPr marL="189651" rtl="0">
+            <a:pPr marL="625475" rtl="0">
               <a:defRPr/>
             </a:pPr>
             <a:r>
@@ -3711,7 +4941,7 @@
             </a:r>
           </a:p>
           <a:p>
-            <a:pPr marL="189651" rtl="0">
+            <a:pPr marL="625475" rtl="0">
               <a:defRPr/>
             </a:pPr>
             <a:r>
@@ -3726,7 +4956,7 @@
             </a:r>
           </a:p>
           <a:p>
-            <a:pPr marL="189651" rtl="0">
+            <a:pPr marL="625475" rtl="0">
               <a:defRPr/>
             </a:pPr>
             <a:r>
@@ -3741,7 +4971,7 @@
             </a:r>
           </a:p>
           <a:p>
-            <a:pPr marL="189651" rtl="0">
+            <a:pPr marL="625475" rtl="0">
               <a:defRPr/>
             </a:pPr>
             <a:r>
@@ -3752,26 +4982,18 @@
                 <a:latin typeface="Segoe UI" panose="020B0502040204020203" pitchFamily="34" charset="0"/>
                 <a:cs typeface="Segoe UI" panose="020B0502040204020203" pitchFamily="34" charset="0"/>
               </a:rPr>
-              <a:t>TestType</a:t>
-            </a:r>
-          </a:p>
-          <a:p>
-            <a:pPr marL="189651" rtl="0">
-              <a:defRPr/>
-            </a:pPr>
-            <a:r>
-              <a:rPr lang="en-US" sz="853">
+              <a:t>TestType {</a:t>
+            </a:r>
+            <a:r>
+              <a:rPr lang="en-US" sz="853" b="1">
                 <a:solidFill>
                   <a:schemeClr val="tx1"/>
                 </a:solidFill>
                 <a:latin typeface="Segoe UI" panose="020B0502040204020203" pitchFamily="34" charset="0"/>
                 <a:cs typeface="Segoe UI" panose="020B0502040204020203" pitchFamily="34" charset="0"/>
               </a:rPr>
-              <a:t>TestLevel</a:t>
-            </a:r>
-          </a:p>
-          <a:p>
-            <a:pPr marL="189651" rtl="0"/>
+              <a:t>1</a:t>
+            </a:r>
             <a:r>
               <a:rPr lang="en-US" sz="853">
                 <a:solidFill>
@@ -3780,11 +5002,39 @@
                 <a:latin typeface="Segoe UI" panose="020B0502040204020203" pitchFamily="34" charset="0"/>
                 <a:cs typeface="Segoe UI" panose="020B0502040204020203" pitchFamily="34" charset="0"/>
               </a:rPr>
+              <a:t>, 2:5}</a:t>
+            </a:r>
+          </a:p>
+          <a:p>
+            <a:pPr marL="625475" rtl="0">
+              <a:defRPr/>
+            </a:pPr>
+            <a:r>
+              <a:rPr lang="en-US" sz="853">
+                <a:solidFill>
+                  <a:schemeClr val="tx1"/>
+                </a:solidFill>
+                <a:latin typeface="Segoe UI" panose="020B0502040204020203" pitchFamily="34" charset="0"/>
+                <a:cs typeface="Segoe UI" panose="020B0502040204020203" pitchFamily="34" charset="0"/>
+              </a:rPr>
+              <a:t>TestLevel</a:t>
+            </a:r>
+          </a:p>
+          <a:p>
+            <a:pPr marL="625475" rtl="0"/>
+            <a:r>
+              <a:rPr lang="en-US" sz="853">
+                <a:solidFill>
+                  <a:schemeClr val="tx1"/>
+                </a:solidFill>
+                <a:latin typeface="Segoe UI" panose="020B0502040204020203" pitchFamily="34" charset="0"/>
+                <a:cs typeface="Segoe UI" panose="020B0502040204020203" pitchFamily="34" charset="0"/>
+              </a:rPr>
               <a:t>TestTags</a:t>
             </a:r>
           </a:p>
           <a:p>
-            <a:pPr marL="189651" rtl="0"/>
+            <a:pPr marL="625475" rtl="0"/>
             <a:r>
               <a:rPr lang="en-US" sz="500" kern="100">
                 <a:solidFill>
@@ -3798,7 +5048,7 @@
             </a:r>
           </a:p>
           <a:p>
-            <a:pPr marL="189651" rtl="0"/>
+            <a:pPr marL="625475" rtl="0"/>
             <a:r>
               <a:rPr lang="en-US" sz="500" kern="100">
                 <a:solidFill>
@@ -3810,12 +5060,137 @@
               </a:rPr>
               <a:t> optRtl</a:t>
             </a:r>
-            <a:endParaRPr lang="en-US" sz="500">
+          </a:p>
+          <a:p>
+            <a:pPr marL="625475" rtl="0"/>
+            <a:endParaRPr lang="en-US" sz="500" kern="100">
               <a:solidFill>
                 <a:srgbClr val="C00000"/>
               </a:solidFill>
-              <a:latin typeface="Segoe UI" panose="020B0502040204020203" pitchFamily="34" charset="0"/>
-              <a:cs typeface="Segoe UI" panose="020B0502040204020203" pitchFamily="34" charset="0"/>
+              <a:latin typeface="Consolas" panose="020B0609020204030204" pitchFamily="49" charset="0"/>
+              <a:ea typeface="Calibri" panose="020F0502020204030204" pitchFamily="34" charset="0"/>
+              <a:cs typeface="Calibri Light" panose="020F0302020204030204" pitchFamily="34" charset="0"/>
+            </a:endParaRPr>
+          </a:p>
+          <a:p>
+            <a:pPr marL="625475" rtl="0"/>
+            <a:endParaRPr lang="en-US" sz="500" kern="100">
+              <a:solidFill>
+                <a:srgbClr val="C00000"/>
+              </a:solidFill>
+              <a:latin typeface="Consolas" panose="020B0609020204030204" pitchFamily="49" charset="0"/>
+              <a:ea typeface="Calibri" panose="020F0502020204030204" pitchFamily="34" charset="0"/>
+              <a:cs typeface="Calibri Light" panose="020F0302020204030204" pitchFamily="34" charset="0"/>
+            </a:endParaRPr>
+          </a:p>
+          <a:p>
+            <a:pPr marL="625475" rtl="0"/>
+            <a:endParaRPr lang="en-US" sz="500" kern="100">
+              <a:solidFill>
+                <a:srgbClr val="C00000"/>
+              </a:solidFill>
+              <a:latin typeface="Consolas" panose="020B0609020204030204" pitchFamily="49" charset="0"/>
+              <a:ea typeface="Calibri" panose="020F0502020204030204" pitchFamily="34" charset="0"/>
+              <a:cs typeface="Calibri Light" panose="020F0302020204030204" pitchFamily="34" charset="0"/>
+            </a:endParaRPr>
+          </a:p>
+          <a:p>
+            <a:pPr marL="625475" rtl="0"/>
+            <a:endParaRPr lang="en-US" sz="500" kern="100">
+              <a:solidFill>
+                <a:srgbClr val="C00000"/>
+              </a:solidFill>
+              <a:latin typeface="Consolas" panose="020B0609020204030204" pitchFamily="49" charset="0"/>
+              <a:ea typeface="Calibri" panose="020F0502020204030204" pitchFamily="34" charset="0"/>
+              <a:cs typeface="Calibri Light" panose="020F0302020204030204" pitchFamily="34" charset="0"/>
+            </a:endParaRPr>
+          </a:p>
+          <a:p>
+            <a:pPr marL="625475" rtl="0"/>
+            <a:endParaRPr lang="en-US" sz="500" kern="100">
+              <a:solidFill>
+                <a:srgbClr val="C00000"/>
+              </a:solidFill>
+              <a:latin typeface="Consolas" panose="020B0609020204030204" pitchFamily="49" charset="0"/>
+              <a:ea typeface="Calibri" panose="020F0502020204030204" pitchFamily="34" charset="0"/>
+              <a:cs typeface="Calibri Light" panose="020F0302020204030204" pitchFamily="34" charset="0"/>
+            </a:endParaRPr>
+          </a:p>
+          <a:p>
+            <a:pPr marL="625475" rtl="0"/>
+            <a:endParaRPr lang="en-US" sz="500" kern="100">
+              <a:solidFill>
+                <a:srgbClr val="C00000"/>
+              </a:solidFill>
+              <a:latin typeface="Consolas" panose="020B0609020204030204" pitchFamily="49" charset="0"/>
+              <a:ea typeface="Calibri" panose="020F0502020204030204" pitchFamily="34" charset="0"/>
+              <a:cs typeface="Calibri Light" panose="020F0302020204030204" pitchFamily="34" charset="0"/>
+            </a:endParaRPr>
+          </a:p>
+          <a:p>
+            <a:pPr marL="625475" rtl="0"/>
+            <a:endParaRPr lang="en-US" sz="500" kern="100">
+              <a:solidFill>
+                <a:srgbClr val="C00000"/>
+              </a:solidFill>
+              <a:latin typeface="Consolas" panose="020B0609020204030204" pitchFamily="49" charset="0"/>
+              <a:ea typeface="Calibri" panose="020F0502020204030204" pitchFamily="34" charset="0"/>
+              <a:cs typeface="Calibri Light" panose="020F0302020204030204" pitchFamily="34" charset="0"/>
+            </a:endParaRPr>
+          </a:p>
+          <a:p>
+            <a:pPr marL="625475" rtl="0"/>
+            <a:endParaRPr lang="en-US" sz="500" kern="100">
+              <a:solidFill>
+                <a:srgbClr val="C00000"/>
+              </a:solidFill>
+              <a:latin typeface="Consolas" panose="020B0609020204030204" pitchFamily="49" charset="0"/>
+              <a:ea typeface="Calibri" panose="020F0502020204030204" pitchFamily="34" charset="0"/>
+              <a:cs typeface="Calibri Light" panose="020F0302020204030204" pitchFamily="34" charset="0"/>
+            </a:endParaRPr>
+          </a:p>
+          <a:p>
+            <a:pPr marL="625475" rtl="0"/>
+            <a:endParaRPr lang="en-US" sz="500" kern="100">
+              <a:solidFill>
+                <a:srgbClr val="C00000"/>
+              </a:solidFill>
+              <a:latin typeface="Consolas" panose="020B0609020204030204" pitchFamily="49" charset="0"/>
+              <a:ea typeface="Calibri" panose="020F0502020204030204" pitchFamily="34" charset="0"/>
+              <a:cs typeface="Calibri Light" panose="020F0302020204030204" pitchFamily="34" charset="0"/>
+            </a:endParaRPr>
+          </a:p>
+          <a:p>
+            <a:pPr marL="625475" rtl="0"/>
+            <a:endParaRPr lang="en-US" sz="500" kern="100">
+              <a:solidFill>
+                <a:srgbClr val="C00000"/>
+              </a:solidFill>
+              <a:latin typeface="Consolas" panose="020B0609020204030204" pitchFamily="49" charset="0"/>
+              <a:ea typeface="Calibri" panose="020F0502020204030204" pitchFamily="34" charset="0"/>
+              <a:cs typeface="Calibri Light" panose="020F0302020204030204" pitchFamily="34" charset="0"/>
+            </a:endParaRPr>
+          </a:p>
+          <a:p>
+            <a:pPr marL="625475" rtl="0"/>
+            <a:endParaRPr lang="en-US" sz="500" kern="100">
+              <a:solidFill>
+                <a:srgbClr val="C00000"/>
+              </a:solidFill>
+              <a:latin typeface="Consolas" panose="020B0609020204030204" pitchFamily="49" charset="0"/>
+              <a:ea typeface="Calibri" panose="020F0502020204030204" pitchFamily="34" charset="0"/>
+              <a:cs typeface="Calibri Light" panose="020F0302020204030204" pitchFamily="34" charset="0"/>
+            </a:endParaRPr>
+          </a:p>
+          <a:p>
+            <a:pPr marL="625475" rtl="0"/>
+            <a:endParaRPr lang="en-US" sz="500" kern="100">
+              <a:solidFill>
+                <a:srgbClr val="C00000"/>
+              </a:solidFill>
+              <a:latin typeface="Consolas" panose="020B0609020204030204" pitchFamily="49" charset="0"/>
+              <a:ea typeface="Calibri" panose="020F0502020204030204" pitchFamily="34" charset="0"/>
+              <a:cs typeface="Calibri Light" panose="020F0302020204030204" pitchFamily="34" charset="0"/>
             </a:endParaRPr>
           </a:p>
         </p:txBody>
@@ -3834,7 +5209,7 @@
         </p:nvSpPr>
         <p:spPr bwMode="auto">
           <a:xfrm>
-            <a:off x="9792692" y="3888333"/>
+            <a:off x="10097733" y="5155703"/>
             <a:ext cx="1261502" cy="1243452"/>
           </a:xfrm>
           <a:prstGeom prst="roundRect">
@@ -4012,678 +5387,6 @@
       </p:sp>
       <p:sp>
         <p:nvSpPr>
-          <p:cNvPr id="9" name="Rectangle: Rounded Corners 19">
-            <a:extLst>
-              <a:ext uri="{FF2B5EF4-FFF2-40B4-BE49-F238E27FC236}">
-                <a16:creationId xmlns:a16="http://schemas.microsoft.com/office/drawing/2014/main" id="{DD6B732D-B216-0CD6-2673-6626C242CCCB}"/>
-              </a:ext>
-            </a:extLst>
-          </p:cNvPr>
-          <p:cNvSpPr/>
-          <p:nvPr/>
-        </p:nvSpPr>
-        <p:spPr bwMode="auto">
-          <a:xfrm>
-            <a:off x="4686211" y="6480621"/>
-            <a:ext cx="1722105" cy="1190826"/>
-          </a:xfrm>
-          <a:prstGeom prst="roundRect">
-            <a:avLst>
-              <a:gd name="adj" fmla="val 8737"/>
-            </a:avLst>
-          </a:prstGeom>
-          <a:solidFill>
-            <a:schemeClr val="bg1"/>
-          </a:solidFill>
-          <a:ln>
-            <a:solidFill>
-              <a:schemeClr val="accent5"/>
-            </a:solidFill>
-            <a:prstDash val="lgDash"/>
-          </a:ln>
-          <a:effectLst/>
-        </p:spPr>
-        <p:style>
-          <a:lnRef idx="0">
-            <a:schemeClr val="accent4"/>
-          </a:lnRef>
-          <a:fillRef idx="3">
-            <a:schemeClr val="accent4"/>
-          </a:fillRef>
-          <a:effectRef idx="3">
-            <a:schemeClr val="accent4"/>
-          </a:effectRef>
-          <a:fontRef idx="minor">
-            <a:schemeClr val="lt1"/>
-          </a:fontRef>
-        </p:style>
-        <p:txBody>
-          <a:bodyPr rtlCol="1" anchor="ctr"/>
-          <a:lstStyle/>
-          <a:p>
-            <a:pPr rtl="0">
-              <a:defRPr/>
-            </a:pPr>
-            <a:r>
-              <a:rPr lang="en-US" sz="1707" b="1">
-                <a:solidFill>
-                  <a:schemeClr val="bg1"/>
-                </a:solidFill>
-                <a:highlight>
-                  <a:srgbClr val="0000FF"/>
-                </a:highlight>
-                <a:latin typeface="Segoe UI" panose="020B0502040204020203" pitchFamily="34" charset="0"/>
-                <a:cs typeface="Segoe UI" panose="020B0502040204020203" pitchFamily="34" charset="0"/>
-              </a:rPr>
-              <a:t>EC</a:t>
-            </a:r>
-            <a:endParaRPr lang="en-US" sz="1280" b="1">
-              <a:solidFill>
-                <a:schemeClr val="bg1"/>
-              </a:solidFill>
-              <a:highlight>
-                <a:srgbClr val="0000FF"/>
-              </a:highlight>
-              <a:latin typeface="Segoe UI" panose="020B0502040204020203" pitchFamily="34" charset="0"/>
-              <a:cs typeface="Segoe UI" panose="020B0502040204020203" pitchFamily="34" charset="0"/>
-            </a:endParaRPr>
-          </a:p>
-          <a:p>
-            <a:pPr rtl="0">
-              <a:defRPr/>
-            </a:pPr>
-            <a:r>
-              <a:rPr lang="en-US" sz="1280" b="1">
-                <a:solidFill>
-                  <a:schemeClr val="tx1"/>
-                </a:solidFill>
-                <a:latin typeface="Segoe UI" panose="020B0502040204020203" pitchFamily="34" charset="0"/>
-                <a:cs typeface="Segoe UI" panose="020B0502040204020203" pitchFamily="34" charset="0"/>
-              </a:rPr>
-              <a:t>ExamCompositions</a:t>
-            </a:r>
-            <a:endParaRPr sz="1280" b="1">
-              <a:solidFill>
-                <a:schemeClr val="tx1"/>
-              </a:solidFill>
-              <a:latin typeface="Segoe UI" panose="020B0502040204020203" pitchFamily="34" charset="0"/>
-              <a:cs typeface="Segoe UI" panose="020B0502040204020203" pitchFamily="34" charset="0"/>
-            </a:endParaRPr>
-          </a:p>
-          <a:p>
-            <a:pPr rtl="0">
-              <a:defRPr/>
-            </a:pPr>
-            <a:r>
-              <a:rPr lang="en-US" sz="853" i="1">
-                <a:solidFill>
-                  <a:schemeClr val="accent5"/>
-                </a:solidFill>
-                <a:latin typeface="Segoe UI" panose="020B0502040204020203" pitchFamily="34" charset="0"/>
-                <a:cs typeface="Segoe UI" panose="020B0502040204020203" pitchFamily="34" charset="0"/>
-              </a:rPr>
-              <a:t>ExamCompositionId</a:t>
-            </a:r>
-          </a:p>
-          <a:p>
-            <a:pPr rtl="0">
-              <a:defRPr/>
-            </a:pPr>
-            <a:r>
-              <a:rPr lang="en-US" sz="853">
-                <a:solidFill>
-                  <a:schemeClr val="tx1"/>
-                </a:solidFill>
-                <a:latin typeface="Segoe UI" panose="020B0502040204020203" pitchFamily="34" charset="0"/>
-                <a:cs typeface="Segoe UI" panose="020B0502040204020203" pitchFamily="34" charset="0"/>
-              </a:rPr>
-              <a:t>ExamId</a:t>
-            </a:r>
-          </a:p>
-          <a:p>
-            <a:pPr rtl="0">
-              <a:defRPr/>
-            </a:pPr>
-            <a:r>
-              <a:rPr lang="en-US" sz="853">
-                <a:solidFill>
-                  <a:schemeClr val="tx1"/>
-                </a:solidFill>
-                <a:latin typeface="Segoe UI" panose="020B0502040204020203" pitchFamily="34" charset="0"/>
-                <a:cs typeface="Segoe UI" panose="020B0502040204020203" pitchFamily="34" charset="0"/>
-              </a:rPr>
-              <a:t>TopicId</a:t>
-            </a:r>
-          </a:p>
-          <a:p>
-            <a:pPr rtl="0">
-              <a:defRPr/>
-            </a:pPr>
-            <a:r>
-              <a:rPr lang="en-US" sz="853">
-                <a:solidFill>
-                  <a:schemeClr val="tx1"/>
-                </a:solidFill>
-                <a:latin typeface="Segoe UI" panose="020B0502040204020203" pitchFamily="34" charset="0"/>
-                <a:cs typeface="Segoe UI" panose="020B0502040204020203" pitchFamily="34" charset="0"/>
-              </a:rPr>
-              <a:t>TopicNTests</a:t>
-            </a:r>
-          </a:p>
-          <a:p>
-            <a:pPr rtl="0">
-              <a:defRPr/>
-            </a:pPr>
-            <a:r>
-              <a:rPr lang="en-US" sz="853">
-                <a:solidFill>
-                  <a:schemeClr val="tx1"/>
-                </a:solidFill>
-                <a:latin typeface="Segoe UI" panose="020B0502040204020203" pitchFamily="34" charset="0"/>
-                <a:cs typeface="Segoe UI" panose="020B0502040204020203" pitchFamily="34" charset="0"/>
-              </a:rPr>
-              <a:t>TestsLevel</a:t>
-            </a:r>
-          </a:p>
-        </p:txBody>
-      </p:sp>
-      <p:sp>
-        <p:nvSpPr>
-          <p:cNvPr id="12" name="Rectangle: Rounded Corners 45">
-            <a:extLst>
-              <a:ext uri="{FF2B5EF4-FFF2-40B4-BE49-F238E27FC236}">
-                <a16:creationId xmlns:a16="http://schemas.microsoft.com/office/drawing/2014/main" id="{BA734567-42EC-389F-1475-ABC0C5B466CF}"/>
-              </a:ext>
-            </a:extLst>
-          </p:cNvPr>
-          <p:cNvSpPr/>
-          <p:nvPr/>
-        </p:nvSpPr>
-        <p:spPr bwMode="auto">
-          <a:xfrm>
-            <a:off x="3860208" y="3160092"/>
-            <a:ext cx="1855656" cy="2078683"/>
-          </a:xfrm>
-          <a:prstGeom prst="roundRect">
-            <a:avLst>
-              <a:gd name="adj" fmla="val 3991"/>
-            </a:avLst>
-          </a:prstGeom>
-          <a:solidFill>
-            <a:schemeClr val="bg1"/>
-          </a:solidFill>
-          <a:ln w="28575">
-            <a:solidFill>
-              <a:schemeClr val="tx1"/>
-            </a:solidFill>
-          </a:ln>
-          <a:effectLst/>
-        </p:spPr>
-        <p:style>
-          <a:lnRef idx="0">
-            <a:schemeClr val="accent4"/>
-          </a:lnRef>
-          <a:fillRef idx="3">
-            <a:schemeClr val="accent4"/>
-          </a:fillRef>
-          <a:effectRef idx="3">
-            <a:schemeClr val="accent4"/>
-          </a:effectRef>
-          <a:fontRef idx="minor">
-            <a:schemeClr val="lt1"/>
-          </a:fontRef>
-        </p:style>
-        <p:txBody>
-          <a:bodyPr rtlCol="1" anchor="ctr"/>
-          <a:lstStyle/>
-          <a:p>
-            <a:pPr marL="189651" algn="l" rtl="0">
-              <a:defRPr/>
-            </a:pPr>
-            <a:r>
-              <a:rPr lang="en-US" sz="1707" b="1">
-                <a:solidFill>
-                  <a:schemeClr val="bg1"/>
-                </a:solidFill>
-                <a:highlight>
-                  <a:srgbClr val="000000"/>
-                </a:highlight>
-                <a:latin typeface="Segoe UI" panose="020B0502040204020203" pitchFamily="34" charset="0"/>
-                <a:cs typeface="Segoe UI" panose="020B0502040204020203" pitchFamily="34" charset="0"/>
-              </a:rPr>
-              <a:t>S</a:t>
-            </a:r>
-          </a:p>
-          <a:p>
-            <a:pPr marL="189651" rtl="0">
-              <a:defRPr/>
-            </a:pPr>
-            <a:r>
-              <a:rPr lang="en-US" sz="1280" b="1">
-                <a:solidFill>
-                  <a:schemeClr val="tx1"/>
-                </a:solidFill>
-                <a:latin typeface="Segoe UI" panose="020B0502040204020203" pitchFamily="34" charset="0"/>
-                <a:cs typeface="Segoe UI" panose="020B0502040204020203" pitchFamily="34" charset="0"/>
-              </a:rPr>
-              <a:t>Students</a:t>
-            </a:r>
-            <a:endParaRPr sz="1280">
-              <a:solidFill>
-                <a:schemeClr val="tx1"/>
-              </a:solidFill>
-              <a:latin typeface="Segoe UI" panose="020B0502040204020203" pitchFamily="34" charset="0"/>
-              <a:cs typeface="Segoe UI" panose="020B0502040204020203" pitchFamily="34" charset="0"/>
-            </a:endParaRPr>
-          </a:p>
-          <a:p>
-            <a:pPr marL="189651" rtl="0">
-              <a:defRPr/>
-            </a:pPr>
-            <a:r>
-              <a:rPr lang="en-US" sz="853" i="1">
-                <a:solidFill>
-                  <a:schemeClr val="accent5"/>
-                </a:solidFill>
-                <a:latin typeface="Segoe UI" panose="020B0502040204020203" pitchFamily="34" charset="0"/>
-                <a:cs typeface="Segoe UI" panose="020B0502040204020203" pitchFamily="34" charset="0"/>
-              </a:rPr>
-              <a:t>StudentId</a:t>
-            </a:r>
-          </a:p>
-          <a:p>
-            <a:pPr marL="189651" rtl="0">
-              <a:defRPr/>
-            </a:pPr>
-            <a:r>
-              <a:rPr lang="en-US" sz="853">
-                <a:solidFill>
-                  <a:schemeClr val="tx1"/>
-                </a:solidFill>
-                <a:latin typeface="Segoe UI" panose="020B0502040204020203" pitchFamily="34" charset="0"/>
-                <a:cs typeface="Segoe UI" panose="020B0502040204020203" pitchFamily="34" charset="0"/>
-              </a:rPr>
-              <a:t>DepartmentId</a:t>
-            </a:r>
-          </a:p>
-          <a:p>
-            <a:pPr marL="189651" rtl="0">
-              <a:defRPr/>
-            </a:pPr>
-            <a:r>
-              <a:rPr lang="en-US" sz="853">
-                <a:solidFill>
-                  <a:schemeClr val="tx1"/>
-                </a:solidFill>
-                <a:latin typeface="Segoe UI" panose="020B0502040204020203" pitchFamily="34" charset="0"/>
-                <a:cs typeface="Segoe UI" panose="020B0502040204020203" pitchFamily="34" charset="0"/>
-              </a:rPr>
-              <a:t>StudentName</a:t>
-            </a:r>
-          </a:p>
-          <a:p>
-            <a:pPr marL="189651" rtl="0">
-              <a:defRPr/>
-            </a:pPr>
-            <a:r>
-              <a:rPr lang="en-US" sz="853">
-                <a:solidFill>
-                  <a:schemeClr val="tx1"/>
-                </a:solidFill>
-                <a:latin typeface="Segoe UI" panose="020B0502040204020203" pitchFamily="34" charset="0"/>
-                <a:cs typeface="Segoe UI" panose="020B0502040204020203" pitchFamily="34" charset="0"/>
-              </a:rPr>
-              <a:t>StudentPass</a:t>
-            </a:r>
-          </a:p>
-          <a:p>
-            <a:pPr marL="189651" rtl="0">
-              <a:defRPr/>
-            </a:pPr>
-            <a:r>
-              <a:rPr lang="en-US" sz="853">
-                <a:solidFill>
-                  <a:schemeClr val="tx1"/>
-                </a:solidFill>
-                <a:latin typeface="Segoe UI" panose="020B0502040204020203" pitchFamily="34" charset="0"/>
-                <a:cs typeface="Segoe UI" panose="020B0502040204020203" pitchFamily="34" charset="0"/>
-              </a:rPr>
-              <a:t>StudentNickname</a:t>
-            </a:r>
-          </a:p>
-          <a:p>
-            <a:pPr marL="189651" rtl="0">
-              <a:defRPr/>
-            </a:pPr>
-            <a:r>
-              <a:rPr lang="en-US" sz="853">
-                <a:solidFill>
-                  <a:schemeClr val="tx1"/>
-                </a:solidFill>
-                <a:latin typeface="Segoe UI" panose="020B0502040204020203" pitchFamily="34" charset="0"/>
-                <a:cs typeface="Segoe UI" panose="020B0502040204020203" pitchFamily="34" charset="0"/>
-              </a:rPr>
-              <a:t>StudentTags</a:t>
-            </a:r>
-          </a:p>
-          <a:p>
-            <a:pPr marL="176213" rtl="0">
-              <a:defRPr/>
-            </a:pPr>
-            <a:r>
-              <a:rPr lang="en-US" sz="500">
-                <a:solidFill>
-                  <a:srgbClr val="C00000"/>
-                </a:solidFill>
-                <a:latin typeface="Segoe UI" panose="020B0502040204020203" pitchFamily="34" charset="0"/>
-                <a:cs typeface="Segoe UI" panose="020B0502040204020203" pitchFamily="34" charset="0"/>
-              </a:rPr>
-              <a:t>1: IsActive</a:t>
-            </a:r>
-          </a:p>
-          <a:p>
-            <a:pPr marL="176213" rtl="0">
-              <a:defRPr/>
-            </a:pPr>
-            <a:r>
-              <a:rPr lang="en-US" sz="500">
-                <a:solidFill>
-                  <a:srgbClr val="C00000"/>
-                </a:solidFill>
-                <a:latin typeface="Segoe UI" panose="020B0502040204020203" pitchFamily="34" charset="0"/>
-                <a:cs typeface="Segoe UI" panose="020B0502040204020203" pitchFamily="34" charset="0"/>
-              </a:rPr>
-              <a:t>2: ChangePass</a:t>
-            </a:r>
-          </a:p>
-          <a:p>
-            <a:pPr marL="176213" rtl="0">
-              <a:defRPr/>
-            </a:pPr>
-            <a:r>
-              <a:rPr lang="en-US" sz="500">
-                <a:solidFill>
-                  <a:srgbClr val="C00000"/>
-                </a:solidFill>
-                <a:latin typeface="Segoe UI" panose="020B0502040204020203" pitchFamily="34" charset="0"/>
-                <a:cs typeface="Segoe UI" panose="020B0502040204020203" pitchFamily="34" charset="0"/>
-              </a:rPr>
-              <a:t>4: ReviewEx</a:t>
-            </a:r>
-          </a:p>
-          <a:p>
-            <a:pPr marL="176213" rtl="0">
-              <a:defRPr/>
-            </a:pPr>
-            <a:r>
-              <a:rPr lang="en-US" sz="500">
-                <a:solidFill>
-                  <a:srgbClr val="C00000"/>
-                </a:solidFill>
-                <a:latin typeface="Segoe UI" panose="020B0502040204020203" pitchFamily="34" charset="0"/>
-                <a:cs typeface="Segoe UI" panose="020B0502040204020203" pitchFamily="34" charset="0"/>
-              </a:rPr>
-              <a:t>8: GetStExTests</a:t>
-            </a:r>
-          </a:p>
-          <a:p>
-            <a:pPr marL="176213" rtl="0">
-              <a:defRPr/>
-            </a:pPr>
-            <a:r>
-              <a:rPr lang="en-US" sz="500">
-                <a:solidFill>
-                  <a:srgbClr val="C00000"/>
-                </a:solidFill>
-                <a:latin typeface="Segoe UI" panose="020B0502040204020203" pitchFamily="34" charset="0"/>
-                <a:cs typeface="Segoe UI" panose="020B0502040204020203" pitchFamily="34" charset="0"/>
-              </a:rPr>
-              <a:t>16: CorrectStExTests</a:t>
-            </a:r>
-          </a:p>
-          <a:p>
-            <a:pPr marL="176213" rtl="0">
-              <a:defRPr/>
-            </a:pPr>
-            <a:r>
-              <a:rPr lang="en-US" sz="500">
-                <a:solidFill>
-                  <a:srgbClr val="C00000"/>
-                </a:solidFill>
-                <a:latin typeface="Segoe UI" panose="020B0502040204020203" pitchFamily="34" charset="0"/>
-                <a:cs typeface="Segoe UI" panose="020B0502040204020203" pitchFamily="34" charset="0"/>
-              </a:rPr>
-              <a:t>32: RevStExTests</a:t>
-            </a:r>
-          </a:p>
-          <a:p>
-            <a:pPr marL="176213" rtl="0">
-              <a:defRPr/>
-            </a:pPr>
-            <a:r>
-              <a:rPr lang="en-US" sz="500">
-                <a:solidFill>
-                  <a:srgbClr val="C00000"/>
-                </a:solidFill>
-                <a:latin typeface="Segoe UI" panose="020B0502040204020203" pitchFamily="34" charset="0"/>
-                <a:cs typeface="Segoe UI" panose="020B0502040204020203" pitchFamily="34" charset="0"/>
-              </a:rPr>
-              <a:t>64: IsSelected</a:t>
-            </a:r>
-          </a:p>
-          <a:p>
-            <a:pPr marL="176213" rtl="0">
-              <a:defRPr/>
-            </a:pPr>
-            <a:r>
-              <a:rPr lang="en-US" sz="500">
-                <a:solidFill>
-                  <a:srgbClr val="C00000"/>
-                </a:solidFill>
-                <a:latin typeface="Segoe UI" panose="020B0502040204020203" pitchFamily="34" charset="0"/>
-                <a:cs typeface="Segoe UI" panose="020B0502040204020203" pitchFamily="34" charset="0"/>
-              </a:rPr>
-              <a:t>128:</a:t>
-            </a:r>
-          </a:p>
-          <a:p>
-            <a:pPr marL="176213" rtl="0">
-              <a:defRPr/>
-            </a:pPr>
-            <a:r>
-              <a:rPr lang="en-US" sz="500">
-                <a:solidFill>
-                  <a:srgbClr val="C00000"/>
-                </a:solidFill>
-                <a:latin typeface="Segoe UI" panose="020B0502040204020203" pitchFamily="34" charset="0"/>
-                <a:cs typeface="Segoe UI" panose="020B0502040204020203" pitchFamily="34" charset="0"/>
-              </a:rPr>
-              <a:t>256: CalendarFa</a:t>
-            </a:r>
-          </a:p>
-          <a:p>
-            <a:pPr marL="176213" rtl="0">
-              <a:defRPr/>
-            </a:pPr>
-            <a:endParaRPr lang="en-US" sz="500">
-              <a:solidFill>
-                <a:srgbClr val="C00000"/>
-              </a:solidFill>
-              <a:latin typeface="Segoe UI" panose="020B0502040204020203" pitchFamily="34" charset="0"/>
-              <a:cs typeface="Segoe UI" panose="020B0502040204020203" pitchFamily="34" charset="0"/>
-            </a:endParaRPr>
-          </a:p>
-        </p:txBody>
-      </p:sp>
-      <p:sp>
-        <p:nvSpPr>
-          <p:cNvPr id="97" name="Rectangle: Rounded Corners 45">
-            <a:extLst>
-              <a:ext uri="{FF2B5EF4-FFF2-40B4-BE49-F238E27FC236}">
-                <a16:creationId xmlns:a16="http://schemas.microsoft.com/office/drawing/2014/main" id="{E6BA6EAB-7AC6-19DD-11F7-782C47CCE5CC}"/>
-              </a:ext>
-            </a:extLst>
-          </p:cNvPr>
-          <p:cNvSpPr/>
-          <p:nvPr/>
-        </p:nvSpPr>
-        <p:spPr bwMode="auto">
-          <a:xfrm>
-            <a:off x="2794325" y="4768216"/>
-            <a:ext cx="1182039" cy="1199659"/>
-          </a:xfrm>
-          <a:prstGeom prst="roundRect">
-            <a:avLst>
-              <a:gd name="adj" fmla="val 8076"/>
-            </a:avLst>
-          </a:prstGeom>
-          <a:solidFill>
-            <a:schemeClr val="bg1"/>
-          </a:solidFill>
-          <a:ln w="28575">
-            <a:solidFill>
-              <a:schemeClr val="tx1"/>
-            </a:solidFill>
-            <a:prstDash val="solid"/>
-          </a:ln>
-          <a:effectLst/>
-        </p:spPr>
-        <p:style>
-          <a:lnRef idx="0">
-            <a:schemeClr val="accent4"/>
-          </a:lnRef>
-          <a:fillRef idx="3">
-            <a:schemeClr val="accent4"/>
-          </a:fillRef>
-          <a:effectRef idx="3">
-            <a:schemeClr val="accent4"/>
-          </a:effectRef>
-          <a:fontRef idx="minor">
-            <a:schemeClr val="lt1"/>
-          </a:fontRef>
-        </p:style>
-        <p:txBody>
-          <a:bodyPr rtlCol="1" anchor="ctr"/>
-          <a:lstStyle/>
-          <a:p>
-            <a:pPr algn="l" rtl="0">
-              <a:defRPr/>
-            </a:pPr>
-            <a:r>
-              <a:rPr lang="en-US" sz="1707" b="1">
-                <a:solidFill>
-                  <a:schemeClr val="bg1"/>
-                </a:solidFill>
-                <a:highlight>
-                  <a:srgbClr val="800080"/>
-                </a:highlight>
-                <a:latin typeface="Segoe UI" panose="020B0502040204020203" pitchFamily="34" charset="0"/>
-                <a:cs typeface="Segoe UI" panose="020B0502040204020203" pitchFamily="34" charset="0"/>
-              </a:rPr>
-              <a:t>M</a:t>
-            </a:r>
-          </a:p>
-          <a:p>
-            <a:pPr rtl="0">
-              <a:defRPr/>
-            </a:pPr>
-            <a:r>
-              <a:rPr lang="en-US" sz="1280" b="1">
-                <a:solidFill>
-                  <a:schemeClr val="tx1"/>
-                </a:solidFill>
-                <a:latin typeface="Segoe UI" panose="020B0502040204020203" pitchFamily="34" charset="0"/>
-                <a:cs typeface="Segoe UI" panose="020B0502040204020203" pitchFamily="34" charset="0"/>
-              </a:rPr>
-              <a:t>Messages</a:t>
-            </a:r>
-            <a:endParaRPr sz="1280">
-              <a:solidFill>
-                <a:schemeClr val="tx1"/>
-              </a:solidFill>
-              <a:latin typeface="Segoe UI" panose="020B0502040204020203" pitchFamily="34" charset="0"/>
-              <a:cs typeface="Segoe UI" panose="020B0502040204020203" pitchFamily="34" charset="0"/>
-            </a:endParaRPr>
-          </a:p>
-          <a:p>
-            <a:pPr rtl="0">
-              <a:defRPr/>
-            </a:pPr>
-            <a:r>
-              <a:rPr lang="en-US" sz="853" i="1">
-                <a:solidFill>
-                  <a:schemeClr val="accent5"/>
-                </a:solidFill>
-                <a:latin typeface="Segoe UI" panose="020B0502040204020203" pitchFamily="34" charset="0"/>
-                <a:cs typeface="Segoe UI" panose="020B0502040204020203" pitchFamily="34" charset="0"/>
-              </a:rPr>
-              <a:t>MessageId</a:t>
-            </a:r>
-          </a:p>
-          <a:p>
-            <a:pPr rtl="0">
-              <a:defRPr/>
-            </a:pPr>
-            <a:r>
-              <a:rPr lang="en-US" sz="853">
-                <a:solidFill>
-                  <a:schemeClr val="tx1"/>
-                </a:solidFill>
-                <a:latin typeface="Segoe UI" panose="020B0502040204020203" pitchFamily="34" charset="0"/>
-                <a:cs typeface="Segoe UI" panose="020B0502040204020203" pitchFamily="34" charset="0"/>
-              </a:rPr>
-              <a:t>UserId</a:t>
-            </a:r>
-          </a:p>
-          <a:p>
-            <a:pPr rtl="0">
-              <a:defRPr/>
-            </a:pPr>
-            <a:r>
-              <a:rPr lang="en-US" sz="853">
-                <a:solidFill>
-                  <a:schemeClr val="tx1"/>
-                </a:solidFill>
-                <a:latin typeface="Segoe UI" panose="020B0502040204020203" pitchFamily="34" charset="0"/>
-                <a:cs typeface="Segoe UI" panose="020B0502040204020203" pitchFamily="34" charset="0"/>
-              </a:rPr>
-              <a:t>DateTimeCreated</a:t>
-            </a:r>
-          </a:p>
-          <a:p>
-            <a:pPr rtl="0">
-              <a:defRPr/>
-            </a:pPr>
-            <a:r>
-              <a:rPr lang="en-US" sz="853">
-                <a:solidFill>
-                  <a:schemeClr val="tx1"/>
-                </a:solidFill>
-                <a:latin typeface="Segoe UI" panose="020B0502040204020203" pitchFamily="34" charset="0"/>
-                <a:cs typeface="Segoe UI" panose="020B0502040204020203" pitchFamily="34" charset="0"/>
-              </a:rPr>
-              <a:t>MessageTitle</a:t>
-            </a:r>
-          </a:p>
-          <a:p>
-            <a:pPr rtl="0">
-              <a:defRPr/>
-            </a:pPr>
-            <a:r>
-              <a:rPr lang="en-US" sz="853">
-                <a:solidFill>
-                  <a:schemeClr val="tx1"/>
-                </a:solidFill>
-                <a:latin typeface="Segoe UI" panose="020B0502040204020203" pitchFamily="34" charset="0"/>
-                <a:cs typeface="Segoe UI" panose="020B0502040204020203" pitchFamily="34" charset="0"/>
-              </a:rPr>
-              <a:t>MessageBody</a:t>
-            </a:r>
-          </a:p>
-        </p:txBody>
-      </p:sp>
-      <p:sp>
-        <p:nvSpPr>
           <p:cNvPr id="21" name="Rectangle: Rounded Corners 14">
             <a:extLst>
               <a:ext uri="{FF2B5EF4-FFF2-40B4-BE49-F238E27FC236}">
@@ -4696,8 +5399,8 @@
         </p:nvSpPr>
         <p:spPr bwMode="auto">
           <a:xfrm>
-            <a:off x="5685945" y="885825"/>
-            <a:ext cx="1366068" cy="1308924"/>
+            <a:off x="5246027" y="805462"/>
+            <a:ext cx="1414020" cy="1346672"/>
           </a:xfrm>
           <a:prstGeom prst="roundRect">
             <a:avLst>
@@ -4848,6 +5551,18 @@
               <a:t>CourseFolderActive</a:t>
             </a:r>
           </a:p>
+          <a:p>
+            <a:pPr rtl="0">
+              <a:defRPr/>
+            </a:pPr>
+            <a:endParaRPr lang="en-US" sz="853">
+              <a:solidFill>
+                <a:schemeClr val="tx1"/>
+              </a:solidFill>
+              <a:latin typeface="Segoe UI" panose="020B0502040204020203" pitchFamily="34" charset="0"/>
+              <a:cs typeface="Segoe UI" panose="020B0502040204020203" pitchFamily="34" charset="0"/>
+            </a:endParaRPr>
+          </a:p>
         </p:txBody>
       </p:sp>
       <p:sp>
@@ -4864,8 +5579,8 @@
         </p:nvSpPr>
         <p:spPr bwMode="auto">
           <a:xfrm>
-            <a:off x="1359989" y="2331674"/>
-            <a:ext cx="1757728" cy="1268300"/>
+            <a:off x="2894769" y="2260598"/>
+            <a:ext cx="1467637" cy="1268300"/>
           </a:xfrm>
           <a:prstGeom prst="roundRect">
             <a:avLst>
@@ -5040,7 +5755,7 @@
         </p:nvSpPr>
         <p:spPr>
           <a:xfrm>
-            <a:off x="-8773" y="8384051"/>
+            <a:off x="71612" y="8154633"/>
             <a:ext cx="1467068" cy="230832"/>
           </a:xfrm>
           <a:prstGeom prst="rect">
@@ -5074,364 +5789,6 @@
               </a:solidFill>
               <a:latin typeface="Consolas" panose="020B0609020204030204" pitchFamily="49" charset="0"/>
             </a:endParaRPr>
-          </a:p>
-        </p:txBody>
-      </p:sp>
-      <p:sp>
-        <p:nvSpPr>
-          <p:cNvPr id="5" name="Rectangle: Rounded Corners 15">
-            <a:extLst>
-              <a:ext uri="{FF2B5EF4-FFF2-40B4-BE49-F238E27FC236}">
-                <a16:creationId xmlns:a16="http://schemas.microsoft.com/office/drawing/2014/main" id="{5C397EF3-C98C-AF05-D30B-E81FD4229C99}"/>
-              </a:ext>
-            </a:extLst>
-          </p:cNvPr>
-          <p:cNvSpPr/>
-          <p:nvPr/>
-        </p:nvSpPr>
-        <p:spPr bwMode="auto">
-          <a:xfrm>
-            <a:off x="5192945" y="5126233"/>
-            <a:ext cx="1869708" cy="1498076"/>
-          </a:xfrm>
-          <a:prstGeom prst="roundRect">
-            <a:avLst>
-              <a:gd name="adj" fmla="val 5608"/>
-            </a:avLst>
-          </a:prstGeom>
-          <a:solidFill>
-            <a:schemeClr val="bg1"/>
-          </a:solidFill>
-          <a:ln w="28575">
-            <a:solidFill>
-              <a:schemeClr val="accent5"/>
-            </a:solidFill>
-          </a:ln>
-          <a:effectLst/>
-        </p:spPr>
-        <p:style>
-          <a:lnRef idx="0">
-            <a:schemeClr val="accent4"/>
-          </a:lnRef>
-          <a:fillRef idx="3">
-            <a:schemeClr val="accent4"/>
-          </a:fillRef>
-          <a:effectRef idx="3">
-            <a:schemeClr val="accent4"/>
-          </a:effectRef>
-          <a:fontRef idx="minor">
-            <a:schemeClr val="lt1"/>
-          </a:fontRef>
-        </p:style>
-        <p:txBody>
-          <a:bodyPr rtlCol="1" anchor="ctr"/>
-          <a:lstStyle/>
-          <a:p>
-            <a:pPr rtl="0">
-              <a:defRPr/>
-            </a:pPr>
-            <a:r>
-              <a:rPr lang="en-US" sz="1707" b="1">
-                <a:solidFill>
-                  <a:schemeClr val="bg1"/>
-                </a:solidFill>
-                <a:highlight>
-                  <a:srgbClr val="0000FF"/>
-                </a:highlight>
-                <a:latin typeface="Segoe UI" panose="020B0502040204020203" pitchFamily="34" charset="0"/>
-                <a:cs typeface="Segoe UI" panose="020B0502040204020203" pitchFamily="34" charset="0"/>
-              </a:rPr>
-              <a:t>E</a:t>
-            </a:r>
-          </a:p>
-          <a:p>
-            <a:pPr rtl="0">
-              <a:defRPr/>
-            </a:pPr>
-            <a:r>
-              <a:rPr lang="en-US" sz="1280" b="1">
-                <a:solidFill>
-                  <a:schemeClr val="tx1"/>
-                </a:solidFill>
-                <a:latin typeface="Segoe UI" panose="020B0502040204020203" pitchFamily="34" charset="0"/>
-                <a:cs typeface="Segoe UI" panose="020B0502040204020203" pitchFamily="34" charset="0"/>
-              </a:rPr>
-              <a:t>Exams</a:t>
-            </a:r>
-            <a:endParaRPr sz="1280">
-              <a:solidFill>
-                <a:schemeClr val="tx1"/>
-              </a:solidFill>
-              <a:latin typeface="Segoe UI" panose="020B0502040204020203" pitchFamily="34" charset="0"/>
-              <a:cs typeface="Segoe UI" panose="020B0502040204020203" pitchFamily="34" charset="0"/>
-            </a:endParaRPr>
-          </a:p>
-          <a:p>
-            <a:pPr rtl="0">
-              <a:defRPr/>
-            </a:pPr>
-            <a:r>
-              <a:rPr lang="en-US" sz="853" i="1">
-                <a:solidFill>
-                  <a:schemeClr val="accent5"/>
-                </a:solidFill>
-                <a:latin typeface="Segoe UI" panose="020B0502040204020203" pitchFamily="34" charset="0"/>
-                <a:cs typeface="Segoe UI" panose="020B0502040204020203" pitchFamily="34" charset="0"/>
-              </a:rPr>
-              <a:t>ExamId</a:t>
-            </a:r>
-          </a:p>
-          <a:p>
-            <a:pPr rtl="0">
-              <a:defRPr/>
-            </a:pPr>
-            <a:r>
-              <a:rPr lang="en-US" sz="853">
-                <a:solidFill>
-                  <a:schemeClr val="tx1"/>
-                </a:solidFill>
-                <a:latin typeface="Segoe UI" panose="020B0502040204020203" pitchFamily="34" charset="0"/>
-                <a:cs typeface="Segoe UI" panose="020B0502040204020203" pitchFamily="34" charset="0"/>
-              </a:rPr>
-              <a:t>CourseId</a:t>
-            </a:r>
-          </a:p>
-          <a:p>
-            <a:pPr rtl="0">
-              <a:defRPr/>
-            </a:pPr>
-            <a:r>
-              <a:rPr lang="en-US" sz="853">
-                <a:solidFill>
-                  <a:schemeClr val="tx1"/>
-                </a:solidFill>
-                <a:latin typeface="Segoe UI" panose="020B0502040204020203" pitchFamily="34" charset="0"/>
-                <a:cs typeface="Segoe UI" panose="020B0502040204020203" pitchFamily="34" charset="0"/>
-              </a:rPr>
-              <a:t>ExamTitle</a:t>
-            </a:r>
-          </a:p>
-          <a:p>
-            <a:pPr rtl="0">
-              <a:defRPr/>
-            </a:pPr>
-            <a:r>
-              <a:rPr lang="en-US" sz="853">
-                <a:solidFill>
-                  <a:schemeClr val="tx1"/>
-                </a:solidFill>
-                <a:latin typeface="Segoe UI" panose="020B0502040204020203" pitchFamily="34" charset="0"/>
-                <a:cs typeface="Segoe UI" panose="020B0502040204020203" pitchFamily="34" charset="0"/>
-              </a:rPr>
-              <a:t>ExamDateTime</a:t>
-            </a:r>
-          </a:p>
-          <a:p>
-            <a:pPr rtl="0">
-              <a:defRPr/>
-            </a:pPr>
-            <a:r>
-              <a:rPr lang="en-US" sz="853">
-                <a:solidFill>
-                  <a:schemeClr val="tx1"/>
-                </a:solidFill>
-                <a:latin typeface="Segoe UI" panose="020B0502040204020203" pitchFamily="34" charset="0"/>
-                <a:cs typeface="Segoe UI" panose="020B0502040204020203" pitchFamily="34" charset="0"/>
-              </a:rPr>
-              <a:t>ExamDuration</a:t>
-            </a:r>
-          </a:p>
-          <a:p>
-            <a:pPr rtl="0">
-              <a:defRPr/>
-            </a:pPr>
-            <a:r>
-              <a:rPr lang="en-US" sz="853">
-                <a:solidFill>
-                  <a:schemeClr val="tx1"/>
-                </a:solidFill>
-                <a:latin typeface="Segoe UI" panose="020B0502040204020203" pitchFamily="34" charset="0"/>
-                <a:cs typeface="Segoe UI" panose="020B0502040204020203" pitchFamily="34" charset="0"/>
-              </a:rPr>
-              <a:t>ExamNTests</a:t>
-            </a:r>
-          </a:p>
-          <a:p>
-            <a:pPr rtl="0">
-              <a:defRPr/>
-            </a:pPr>
-            <a:r>
-              <a:rPr lang="en-US" sz="853">
-                <a:solidFill>
-                  <a:schemeClr val="tx1"/>
-                </a:solidFill>
-                <a:latin typeface="Segoe UI" panose="020B0502040204020203" pitchFamily="34" charset="0"/>
-                <a:cs typeface="Segoe UI" panose="020B0502040204020203" pitchFamily="34" charset="0"/>
-              </a:rPr>
-              <a:t>ExamTags</a:t>
-            </a:r>
-            <a:r>
-              <a:rPr lang="en-US" sz="853">
-                <a:solidFill>
-                  <a:srgbClr val="C00000"/>
-                </a:solidFill>
-                <a:latin typeface="Segoe UI" panose="020B0502040204020203" pitchFamily="34" charset="0"/>
-                <a:cs typeface="Segoe UI" panose="020B0502040204020203" pitchFamily="34" charset="0"/>
-              </a:rPr>
-              <a:t> </a:t>
-            </a:r>
-          </a:p>
-          <a:p>
-            <a:pPr rtl="0">
-              <a:defRPr/>
-            </a:pPr>
-            <a:r>
-              <a:rPr lang="en-US" sz="500">
-                <a:solidFill>
-                  <a:srgbClr val="C00000"/>
-                </a:solidFill>
-                <a:latin typeface="Segoe UI" panose="020B0502040204020203" pitchFamily="34" charset="0"/>
-                <a:cs typeface="Segoe UI" panose="020B0502040204020203" pitchFamily="34" charset="0"/>
-              </a:rPr>
-              <a:t>1:act 2:training</a:t>
-            </a:r>
-          </a:p>
-        </p:txBody>
-      </p:sp>
-      <p:sp>
-        <p:nvSpPr>
-          <p:cNvPr id="11" name="Rectangle: Rounded Corners 44">
-            <a:extLst>
-              <a:ext uri="{FF2B5EF4-FFF2-40B4-BE49-F238E27FC236}">
-                <a16:creationId xmlns:a16="http://schemas.microsoft.com/office/drawing/2014/main" id="{5D5FF3D4-447A-77CB-8B35-8B1F447EF331}"/>
-              </a:ext>
-            </a:extLst>
-          </p:cNvPr>
-          <p:cNvSpPr/>
-          <p:nvPr/>
-        </p:nvSpPr>
-        <p:spPr bwMode="auto">
-          <a:xfrm>
-            <a:off x="2833517" y="2614045"/>
-            <a:ext cx="1182038" cy="1098548"/>
-          </a:xfrm>
-          <a:prstGeom prst="roundRect">
-            <a:avLst>
-              <a:gd name="adj" fmla="val 9941"/>
-            </a:avLst>
-          </a:prstGeom>
-          <a:solidFill>
-            <a:schemeClr val="bg1"/>
-          </a:solidFill>
-          <a:ln w="28575">
-            <a:solidFill>
-              <a:schemeClr val="tx1"/>
-            </a:solidFill>
-            <a:prstDash val="solid"/>
-          </a:ln>
-          <a:effectLst/>
-        </p:spPr>
-        <p:style>
-          <a:lnRef idx="0">
-            <a:schemeClr val="accent4"/>
-          </a:lnRef>
-          <a:fillRef idx="3">
-            <a:schemeClr val="accent4"/>
-          </a:fillRef>
-          <a:effectRef idx="3">
-            <a:schemeClr val="accent4"/>
-          </a:effectRef>
-          <a:fontRef idx="minor">
-            <a:schemeClr val="lt1"/>
-          </a:fontRef>
-        </p:style>
-        <p:txBody>
-          <a:bodyPr rtlCol="1" anchor="ctr"/>
-          <a:lstStyle/>
-          <a:p>
-            <a:pPr algn="l" rtl="0">
-              <a:defRPr/>
-            </a:pPr>
-            <a:r>
-              <a:rPr lang="en-US" sz="1707" b="1">
-                <a:solidFill>
-                  <a:schemeClr val="bg1"/>
-                </a:solidFill>
-                <a:highlight>
-                  <a:srgbClr val="008080"/>
-                </a:highlight>
-                <a:latin typeface="Segoe UI" panose="020B0502040204020203" pitchFamily="34" charset="0"/>
-                <a:cs typeface="Segoe UI" panose="020B0502040204020203" pitchFamily="34" charset="0"/>
-              </a:rPr>
-              <a:t>G</a:t>
-            </a:r>
-          </a:p>
-          <a:p>
-            <a:pPr rtl="0">
-              <a:defRPr/>
-            </a:pPr>
-            <a:r>
-              <a:rPr lang="en-US" sz="1280" b="1">
-                <a:solidFill>
-                  <a:schemeClr val="tx1"/>
-                </a:solidFill>
-                <a:latin typeface="Segoe UI" panose="020B0502040204020203" pitchFamily="34" charset="0"/>
-                <a:cs typeface="Segoe UI" panose="020B0502040204020203" pitchFamily="34" charset="0"/>
-              </a:rPr>
-              <a:t>Groups</a:t>
-            </a:r>
-            <a:endParaRPr sz="1280" b="1">
-              <a:solidFill>
-                <a:schemeClr val="tx1"/>
-              </a:solidFill>
-              <a:latin typeface="Segoe UI" panose="020B0502040204020203" pitchFamily="34" charset="0"/>
-              <a:cs typeface="Segoe UI" panose="020B0502040204020203" pitchFamily="34" charset="0"/>
-            </a:endParaRPr>
-          </a:p>
-          <a:p>
-            <a:pPr rtl="0">
-              <a:defRPr/>
-            </a:pPr>
-            <a:r>
-              <a:rPr lang="en-US" sz="853" i="1">
-                <a:solidFill>
-                  <a:schemeClr val="accent5"/>
-                </a:solidFill>
-                <a:latin typeface="Segoe UI" panose="020B0502040204020203" pitchFamily="34" charset="0"/>
-                <a:cs typeface="Segoe UI" panose="020B0502040204020203" pitchFamily="34" charset="0"/>
-              </a:rPr>
-              <a:t>GroupId</a:t>
-            </a:r>
-          </a:p>
-          <a:p>
-            <a:pPr rtl="0">
-              <a:defRPr/>
-            </a:pPr>
-            <a:r>
-              <a:rPr lang="en-US" sz="853">
-                <a:solidFill>
-                  <a:schemeClr val="tx1"/>
-                </a:solidFill>
-                <a:latin typeface="Segoe UI" panose="020B0502040204020203" pitchFamily="34" charset="0"/>
-                <a:cs typeface="Segoe UI" panose="020B0502040204020203" pitchFamily="34" charset="0"/>
-              </a:rPr>
-              <a:t>GroupName</a:t>
-            </a:r>
-          </a:p>
-          <a:p>
-            <a:pPr rtl="0">
-              <a:defRPr/>
-            </a:pPr>
-            <a:r>
-              <a:rPr lang="en-US" sz="853">
-                <a:solidFill>
-                  <a:schemeClr val="tx1"/>
-                </a:solidFill>
-                <a:latin typeface="Segoe UI" panose="020B0502040204020203" pitchFamily="34" charset="0"/>
-                <a:cs typeface="Segoe UI" panose="020B0502040204020203" pitchFamily="34" charset="0"/>
-              </a:rPr>
-              <a:t>UserId</a:t>
-            </a:r>
           </a:p>
         </p:txBody>
       </p:sp>
@@ -5449,7 +5806,7 @@
         </p:nvSpPr>
         <p:spPr bwMode="auto">
           <a:xfrm>
-            <a:off x="5298327" y="2136972"/>
+            <a:off x="6365162" y="1570707"/>
             <a:ext cx="1764331" cy="1174970"/>
           </a:xfrm>
           <a:prstGeom prst="roundRect">
@@ -5619,8 +5976,8 @@
         </p:nvSpPr>
         <p:spPr bwMode="auto">
           <a:xfrm>
-            <a:off x="6641384" y="6422704"/>
-            <a:ext cx="1637820" cy="1498077"/>
+            <a:off x="5289398" y="4422044"/>
+            <a:ext cx="1637820" cy="1663618"/>
           </a:xfrm>
           <a:prstGeom prst="roundRect">
             <a:avLst>
@@ -5856,247 +6213,17 @@
               <a:t>double</a:t>
             </a:r>
           </a:p>
-        </p:txBody>
-      </p:sp>
-      <p:sp>
-        <p:nvSpPr>
-          <p:cNvPr id="71" name="Rectangle: Rounded Corners 1">
-            <a:extLst>
-              <a:ext uri="{FF2B5EF4-FFF2-40B4-BE49-F238E27FC236}">
-                <a16:creationId xmlns:a16="http://schemas.microsoft.com/office/drawing/2014/main" id="{955CB0B1-CE89-9B80-8575-451D6A2177CB}"/>
-              </a:ext>
-            </a:extLst>
-          </p:cNvPr>
-          <p:cNvSpPr/>
-          <p:nvPr/>
-        </p:nvSpPr>
-        <p:spPr bwMode="auto">
-          <a:xfrm>
-            <a:off x="6709586" y="2254601"/>
-            <a:ext cx="1545810" cy="1528199"/>
-          </a:xfrm>
-          <a:prstGeom prst="roundRect">
-            <a:avLst>
-              <a:gd name="adj" fmla="val 8076"/>
-            </a:avLst>
-          </a:prstGeom>
-          <a:solidFill>
-            <a:schemeClr val="bg1"/>
-          </a:solidFill>
-          <a:ln>
-            <a:solidFill>
-              <a:srgbClr val="C00000"/>
-            </a:solidFill>
-            <a:prstDash val="lgDash"/>
-          </a:ln>
-          <a:effectLst/>
-        </p:spPr>
-        <p:style>
-          <a:lnRef idx="0">
-            <a:schemeClr val="accent4"/>
-          </a:lnRef>
-          <a:fillRef idx="3">
-            <a:schemeClr val="accent4"/>
-          </a:fillRef>
-          <a:effectRef idx="3">
-            <a:schemeClr val="accent4"/>
-          </a:effectRef>
-          <a:fontRef idx="minor">
-            <a:schemeClr val="lt1"/>
-          </a:fontRef>
-        </p:style>
-        <p:txBody>
-          <a:bodyPr rtlCol="1" anchor="ctr"/>
-          <a:lstStyle/>
-          <a:p>
-            <a:pPr algn="l" rtl="0">
-              <a:defRPr/>
-            </a:pPr>
-            <a:r>
-              <a:rPr lang="en-US" sz="1707" b="1">
-                <a:solidFill>
-                  <a:schemeClr val="bg1"/>
-                </a:solidFill>
-                <a:highlight>
-                  <a:srgbClr val="800000"/>
-                </a:highlight>
-                <a:latin typeface="Segoe UI" panose="020B0502040204020203" pitchFamily="34" charset="0"/>
-                <a:ea typeface="Arial"/>
-                <a:cs typeface="Segoe UI" panose="020B0502040204020203" pitchFamily="34" charset="0"/>
-              </a:rPr>
-              <a:t>SC</a:t>
-            </a:r>
-          </a:p>
           <a:p>
             <a:pPr rtl="0">
               <a:defRPr/>
             </a:pPr>
-            <a:r>
-              <a:rPr lang="en-US" sz="1280" b="1">
-                <a:solidFill>
-                  <a:schemeClr val="tx1"/>
-                </a:solidFill>
-                <a:latin typeface="Segoe UI" panose="020B0502040204020203" pitchFamily="34" charset="0"/>
-                <a:ea typeface="Arial"/>
-                <a:cs typeface="Segoe UI" panose="020B0502040204020203" pitchFamily="34" charset="0"/>
-              </a:rPr>
-              <a:t>StudentCourse</a:t>
-            </a:r>
-            <a:r>
-              <a:rPr lang="en-US" sz="1280" b="1">
-                <a:solidFill>
-                  <a:schemeClr val="tx1"/>
-                </a:solidFill>
-                <a:latin typeface="Segoe UI" panose="020B0502040204020203" pitchFamily="34" charset="0"/>
-                <a:cs typeface="Segoe UI" panose="020B0502040204020203" pitchFamily="34" charset="0"/>
-              </a:rPr>
-              <a:t>s</a:t>
-            </a:r>
-            <a:endParaRPr sz="1280" b="1">
+            <a:endParaRPr lang="en-US" sz="853" i="1">
               <a:solidFill>
-                <a:schemeClr val="tx1"/>
+                <a:srgbClr val="FF0000"/>
               </a:solidFill>
               <a:latin typeface="Segoe UI" panose="020B0502040204020203" pitchFamily="34" charset="0"/>
               <a:cs typeface="Segoe UI" panose="020B0502040204020203" pitchFamily="34" charset="0"/>
             </a:endParaRPr>
-          </a:p>
-          <a:p>
-            <a:pPr rtl="0">
-              <a:defRPr/>
-            </a:pPr>
-            <a:r>
-              <a:rPr lang="en-US" sz="853" i="1">
-                <a:solidFill>
-                  <a:schemeClr val="accent5"/>
-                </a:solidFill>
-                <a:latin typeface="Segoe UI" panose="020B0502040204020203" pitchFamily="34" charset="0"/>
-                <a:cs typeface="Segoe UI" panose="020B0502040204020203" pitchFamily="34" charset="0"/>
-              </a:rPr>
-              <a:t>StudentCourseId</a:t>
-            </a:r>
-          </a:p>
-          <a:p>
-            <a:pPr rtl="0">
-              <a:defRPr/>
-            </a:pPr>
-            <a:r>
-              <a:rPr lang="en-US" sz="853">
-                <a:solidFill>
-                  <a:schemeClr val="tx1"/>
-                </a:solidFill>
-                <a:latin typeface="Segoe UI" panose="020B0502040204020203" pitchFamily="34" charset="0"/>
-                <a:cs typeface="Segoe UI" panose="020B0502040204020203" pitchFamily="34" charset="0"/>
-              </a:rPr>
-              <a:t>StudentId</a:t>
-            </a:r>
-          </a:p>
-          <a:p>
-            <a:pPr rtl="0">
-              <a:defRPr/>
-            </a:pPr>
-            <a:r>
-              <a:rPr lang="en-US" sz="853">
-                <a:solidFill>
-                  <a:schemeClr val="tx1"/>
-                </a:solidFill>
-                <a:latin typeface="Segoe UI" panose="020B0502040204020203" pitchFamily="34" charset="0"/>
-                <a:cs typeface="Segoe UI" panose="020B0502040204020203" pitchFamily="34" charset="0"/>
-              </a:rPr>
-              <a:t>CourseId</a:t>
-            </a:r>
-          </a:p>
-          <a:p>
-            <a:pPr rtl="0">
-              <a:defRPr/>
-            </a:pPr>
-            <a:r>
-              <a:rPr lang="en-US" sz="853">
-                <a:solidFill>
-                  <a:schemeClr val="tx1"/>
-                </a:solidFill>
-                <a:latin typeface="Segoe UI" panose="020B0502040204020203" pitchFamily="34" charset="0"/>
-                <a:cs typeface="Segoe UI" panose="020B0502040204020203" pitchFamily="34" charset="0"/>
-              </a:rPr>
-              <a:t>NumberOfTests</a:t>
-            </a:r>
-          </a:p>
-          <a:p>
-            <a:pPr rtl="0">
-              <a:defRPr/>
-            </a:pPr>
-            <a:r>
-              <a:rPr lang="en-US" sz="853">
-                <a:solidFill>
-                  <a:schemeClr val="tx1"/>
-                </a:solidFill>
-                <a:latin typeface="Segoe UI" panose="020B0502040204020203" pitchFamily="34" charset="0"/>
-                <a:cs typeface="Segoe UI" panose="020B0502040204020203" pitchFamily="34" charset="0"/>
-              </a:rPr>
-              <a:t>CorrectAnswers</a:t>
-            </a:r>
-          </a:p>
-          <a:p>
-            <a:pPr rtl="0">
-              <a:defRPr/>
-            </a:pPr>
-            <a:r>
-              <a:rPr lang="en-US" sz="853">
-                <a:solidFill>
-                  <a:schemeClr val="tx1"/>
-                </a:solidFill>
-                <a:latin typeface="Segoe UI" panose="020B0502040204020203" pitchFamily="34" charset="0"/>
-                <a:cs typeface="Segoe UI" panose="020B0502040204020203" pitchFamily="34" charset="0"/>
-              </a:rPr>
-              <a:t>StudentCourseTags</a:t>
-            </a:r>
-          </a:p>
-          <a:p>
-            <a:pPr rtl="0">
-              <a:buNone/>
-            </a:pPr>
-            <a:r>
-              <a:rPr lang="en-US" sz="500" kern="100">
-                <a:solidFill>
-                  <a:srgbClr val="C00000"/>
-                </a:solidFill>
-                <a:latin typeface="Segoe UI" panose="020B0502040204020203" pitchFamily="34" charset="0"/>
-                <a:ea typeface="Calibri" panose="020F0502020204030204" pitchFamily="34" charset="0"/>
-                <a:cs typeface="Segoe UI" panose="020B0502040204020203" pitchFamily="34" charset="0"/>
-              </a:rPr>
-              <a:t>1: act</a:t>
-            </a:r>
-          </a:p>
-          <a:p>
-            <a:pPr rtl="0">
-              <a:buNone/>
-            </a:pPr>
-            <a:r>
-              <a:rPr lang="en-US" sz="500" kern="100">
-                <a:solidFill>
-                  <a:srgbClr val="C00000"/>
-                </a:solidFill>
-                <a:latin typeface="Segoe UI" panose="020B0502040204020203" pitchFamily="34" charset="0"/>
-                <a:ea typeface="Calibri" panose="020F0502020204030204" pitchFamily="34" charset="0"/>
-                <a:cs typeface="Segoe UI" panose="020B0502040204020203" pitchFamily="34" charset="0"/>
-              </a:rPr>
-              <a:t>2: retry</a:t>
-            </a:r>
-          </a:p>
-          <a:p>
-            <a:pPr rtl="0">
-              <a:buNone/>
-            </a:pPr>
-            <a:r>
-              <a:rPr lang="en-US" sz="500" kern="100">
-                <a:solidFill>
-                  <a:srgbClr val="C00000"/>
-                </a:solidFill>
-                <a:latin typeface="Segoe UI" panose="020B0502040204020203" pitchFamily="34" charset="0"/>
-                <a:ea typeface="Calibri" panose="020F0502020204030204" pitchFamily="34" charset="0"/>
-                <a:cs typeface="Segoe UI" panose="020B0502040204020203" pitchFamily="34" charset="0"/>
-              </a:rPr>
-              <a:t>4: rev</a:t>
-            </a:r>
           </a:p>
         </p:txBody>
       </p:sp>
@@ -6114,8 +6241,8 @@
         </p:nvSpPr>
         <p:spPr bwMode="auto">
           <a:xfrm>
-            <a:off x="6641384" y="4824437"/>
-            <a:ext cx="1614017" cy="1300022"/>
+            <a:off x="6231514" y="7235667"/>
+            <a:ext cx="2389880" cy="1300022"/>
           </a:xfrm>
           <a:prstGeom prst="roundRect">
             <a:avLst>
@@ -6300,7 +6427,7 @@
         </p:nvSpPr>
         <p:spPr bwMode="auto">
           <a:xfrm>
-            <a:off x="8114731" y="2412465"/>
+            <a:off x="7057976" y="3246024"/>
             <a:ext cx="1864591" cy="1152285"/>
           </a:xfrm>
           <a:prstGeom prst="roundRect">
@@ -6488,8 +6615,8 @@
         </p:nvSpPr>
         <p:spPr bwMode="auto">
           <a:xfrm>
-            <a:off x="8136507" y="5400501"/>
-            <a:ext cx="2247973" cy="2812402"/>
+            <a:off x="6765737" y="4523011"/>
+            <a:ext cx="1855657" cy="2508836"/>
           </a:xfrm>
           <a:prstGeom prst="roundRect">
             <a:avLst>
@@ -6859,50 +6986,6 @@
               <a:t>64 IsSelected</a:t>
             </a:r>
           </a:p>
-          <a:p>
-            <a:pPr rtl="0"/>
-            <a:endParaRPr lang="en-US" sz="500" kern="100">
-              <a:solidFill>
-                <a:srgbClr val="C00000"/>
-              </a:solidFill>
-              <a:latin typeface="Consolas" panose="020B0609020204030204" pitchFamily="49" charset="0"/>
-              <a:ea typeface="Calibri" panose="020F0502020204030204" pitchFamily="34" charset="0"/>
-              <a:cs typeface="Calibri Light" panose="020F0302020204030204" pitchFamily="34" charset="0"/>
-            </a:endParaRPr>
-          </a:p>
-          <a:p>
-            <a:pPr rtl="0"/>
-            <a:endParaRPr lang="en-US" sz="500" kern="100">
-              <a:solidFill>
-                <a:srgbClr val="C00000"/>
-              </a:solidFill>
-              <a:latin typeface="Consolas" panose="020B0609020204030204" pitchFamily="49" charset="0"/>
-              <a:ea typeface="Calibri" panose="020F0502020204030204" pitchFamily="34" charset="0"/>
-              <a:cs typeface="Calibri Light" panose="020F0302020204030204" pitchFamily="34" charset="0"/>
-            </a:endParaRPr>
-          </a:p>
-          <a:p>
-            <a:pPr rtl="0"/>
-            <a:endParaRPr lang="en-US" sz="500" kern="100">
-              <a:solidFill>
-                <a:srgbClr val="C00000"/>
-              </a:solidFill>
-              <a:latin typeface="Consolas" panose="020B0609020204030204" pitchFamily="49" charset="0"/>
-              <a:ea typeface="Calibri" panose="020F0502020204030204" pitchFamily="34" charset="0"/>
-              <a:cs typeface="Calibri Light" panose="020F0302020204030204" pitchFamily="34" charset="0"/>
-            </a:endParaRPr>
-          </a:p>
-          <a:p>
-            <a:pPr rtl="0"/>
-            <a:endParaRPr lang="en-US" sz="500" kern="100">
-              <a:solidFill>
-                <a:srgbClr val="C00000"/>
-              </a:solidFill>
-              <a:latin typeface="Consolas" panose="020B0609020204030204" pitchFamily="49" charset="0"/>
-              <a:ea typeface="Calibri" panose="020F0502020204030204" pitchFamily="34" charset="0"/>
-              <a:cs typeface="Calibri Light" panose="020F0302020204030204" pitchFamily="34" charset="0"/>
-            </a:endParaRPr>
-          </a:p>
         </p:txBody>
       </p:sp>
       <p:sp>
@@ -6919,8 +7002,8 @@
         </p:nvSpPr>
         <p:spPr>
           <a:xfrm>
-            <a:off x="215628" y="5832549"/>
-            <a:ext cx="1316312" cy="1301732"/>
+            <a:off x="123452" y="5492279"/>
+            <a:ext cx="1105305" cy="1348382"/>
           </a:xfrm>
           <a:prstGeom prst="roundRect">
             <a:avLst>
@@ -7092,7 +7175,7 @@
         </p:nvSpPr>
         <p:spPr bwMode="auto">
           <a:xfrm>
-            <a:off x="1799804" y="7640689"/>
+            <a:off x="1592157" y="7679533"/>
             <a:ext cx="1105070" cy="787849"/>
           </a:xfrm>
           <a:prstGeom prst="borderCallout2">
@@ -7305,7 +7388,7 @@
         </p:nvSpPr>
         <p:spPr bwMode="auto">
           <a:xfrm>
-            <a:off x="2936700" y="501554"/>
+            <a:off x="2989856" y="83344"/>
             <a:ext cx="1182037" cy="1712656"/>
           </a:xfrm>
           <a:prstGeom prst="roundRect">
@@ -7551,7 +7634,7 @@
         </p:nvSpPr>
         <p:spPr bwMode="auto">
           <a:xfrm>
-            <a:off x="188719" y="373335"/>
+            <a:off x="143620" y="143917"/>
             <a:ext cx="1467069" cy="1642462"/>
           </a:xfrm>
           <a:prstGeom prst="roundRect">
@@ -7777,7 +7860,7 @@
         </p:nvSpPr>
         <p:spPr>
           <a:xfrm>
-            <a:off x="2818874" y="6578291"/>
+            <a:off x="2504076" y="6678264"/>
             <a:ext cx="976113" cy="1634612"/>
           </a:xfrm>
           <a:prstGeom prst="roundRect">
@@ -7982,7 +8065,7 @@
         </p:nvSpPr>
         <p:spPr>
           <a:xfrm>
-            <a:off x="3581379" y="7721770"/>
+            <a:off x="3373732" y="7760614"/>
             <a:ext cx="954729" cy="775075"/>
           </a:xfrm>
           <a:prstGeom prst="roundRect">
@@ -8089,7 +8172,7 @@
         </p:nvSpPr>
         <p:spPr bwMode="auto">
           <a:xfrm>
-            <a:off x="1531940" y="694119"/>
+            <a:off x="1486841" y="464701"/>
             <a:ext cx="1210830" cy="1196534"/>
           </a:xfrm>
           <a:prstGeom prst="roundRect">
@@ -8255,7 +8338,7 @@
         </p:nvSpPr>
         <p:spPr bwMode="auto">
           <a:xfrm>
-            <a:off x="8933155" y="133499"/>
+            <a:off x="8933155" y="125565"/>
             <a:ext cx="1366068" cy="1748618"/>
           </a:xfrm>
           <a:prstGeom prst="roundRect">
@@ -8543,7 +8626,7 @@
         </p:nvSpPr>
         <p:spPr bwMode="auto">
           <a:xfrm>
-            <a:off x="10104553" y="236209"/>
+            <a:off x="10104553" y="228275"/>
             <a:ext cx="1344323" cy="915820"/>
           </a:xfrm>
           <a:prstGeom prst="roundRect">
@@ -8679,8 +8762,8 @@
         </p:nvSpPr>
         <p:spPr>
           <a:xfrm>
-            <a:off x="1106851" y="6294666"/>
-            <a:ext cx="1316313" cy="1122060"/>
+            <a:off x="920722" y="6393675"/>
+            <a:ext cx="1315682" cy="966599"/>
           </a:xfrm>
           <a:prstGeom prst="roundRect">
             <a:avLst>
@@ -8814,7 +8897,7 @@
         </p:nvSpPr>
         <p:spPr bwMode="auto">
           <a:xfrm>
-            <a:off x="10120219" y="1540287"/>
+            <a:off x="10120219" y="1532353"/>
             <a:ext cx="1077711" cy="915820"/>
           </a:xfrm>
           <a:prstGeom prst="roundRect">
@@ -8936,6 +9019,36 @@
           </a:p>
         </p:txBody>
       </p:sp>
+      <p:pic>
+        <p:nvPicPr>
+          <p:cNvPr id="24" name="Picture 23">
+            <a:extLst>
+              <a:ext uri="{FF2B5EF4-FFF2-40B4-BE49-F238E27FC236}">
+                <a16:creationId xmlns:a16="http://schemas.microsoft.com/office/drawing/2014/main" id="{6BB31EC6-BE38-7894-9735-BF8813D2FBC0}"/>
+              </a:ext>
+            </a:extLst>
+          </p:cNvPr>
+          <p:cNvPicPr>
+            <a:picLocks noChangeAspect="1"/>
+          </p:cNvPicPr>
+          <p:nvPr/>
+        </p:nvPicPr>
+        <p:blipFill>
+          <a:blip r:embed="rId3"/>
+          <a:stretch>
+            <a:fillRect/>
+          </a:stretch>
+        </p:blipFill>
+        <p:spPr bwMode="auto">
+          <a:xfrm>
+            <a:off x="57517" y="7659240"/>
+            <a:ext cx="1414177" cy="525095"/>
+          </a:xfrm>
+          <a:prstGeom prst="rect">
+            <a:avLst/>
+          </a:prstGeom>
+        </p:spPr>
+      </p:pic>
     </p:spTree>
     <p:extLst>
       <p:ext uri="{BB962C8B-B14F-4D97-AF65-F5344CB8AC3E}">
@@ -8980,7 +9093,7 @@
         </p:nvGrpSpPr>
         <p:grpSpPr>
           <a:xfrm>
-            <a:off x="3196081" y="3961225"/>
+            <a:off x="6402536" y="1005087"/>
             <a:ext cx="5128326" cy="1296144"/>
             <a:chOff x="1193312" y="2814092"/>
             <a:chExt cx="4807496" cy="1839044"/>
@@ -9827,7 +9940,7 @@
         </p:nvGrpSpPr>
         <p:grpSpPr>
           <a:xfrm>
-            <a:off x="3621400" y="1008013"/>
+            <a:off x="159124" y="181431"/>
             <a:ext cx="4120968" cy="1014077"/>
             <a:chOff x="3049665" y="977311"/>
             <a:chExt cx="4120968" cy="1014077"/>
@@ -10667,7 +10780,7 @@
         </p:nvGrpSpPr>
         <p:grpSpPr>
           <a:xfrm>
-            <a:off x="3926063" y="2939091"/>
+            <a:off x="4658903" y="136238"/>
             <a:ext cx="3668362" cy="665661"/>
             <a:chOff x="235732" y="4393940"/>
             <a:chExt cx="3668362" cy="665661"/>
@@ -11306,6 +11419,407 @@
           </p:txBody>
         </p:sp>
       </p:grpSp>
+      <p:sp>
+        <p:nvSpPr>
+          <p:cNvPr id="2" name="TextBox 1">
+            <a:extLst>
+              <a:ext uri="{FF2B5EF4-FFF2-40B4-BE49-F238E27FC236}">
+                <a16:creationId xmlns:a16="http://schemas.microsoft.com/office/drawing/2014/main" id="{EF0A10CE-6A6D-93CB-3361-D45F7F446E1E}"/>
+              </a:ext>
+            </a:extLst>
+          </p:cNvPr>
+          <p:cNvSpPr txBox="1"/>
+          <p:nvPr/>
+        </p:nvSpPr>
+        <p:spPr>
+          <a:xfrm>
+            <a:off x="440760" y="4715522"/>
+            <a:ext cx="6088719" cy="1446550"/>
+          </a:xfrm>
+          <a:prstGeom prst="rect">
+            <a:avLst/>
+          </a:prstGeom>
+          <a:noFill/>
+        </p:spPr>
+        <p:txBody>
+          <a:bodyPr wrap="square" rtlCol="0">
+            <a:spAutoFit/>
+          </a:bodyPr>
+          <a:lstStyle/>
+          <a:p>
+            <a:pPr algn="l" rtl="0"/>
+            <a:r>
+              <a:rPr lang="en-US" sz="8800">
+                <a:solidFill>
+                  <a:schemeClr val="tx1"/>
+                </a:solidFill>
+                <a:latin typeface="Rastanty Cortez" panose="020F0502020204030204" pitchFamily="2" charset="0"/>
+                <a:ea typeface="Dotum" panose="020B0600000101010101" pitchFamily="34" charset="-127"/>
+                <a:cs typeface="Biome Light" panose="020B0303030204020804" pitchFamily="34" charset="0"/>
+              </a:rPr>
+              <a:t>E</a:t>
+            </a:r>
+            <a:r>
+              <a:rPr lang="en-US" sz="8800">
+                <a:solidFill>
+                  <a:srgbClr val="C00000"/>
+                </a:solidFill>
+                <a:latin typeface="Rastanty Cortez" panose="020F0502020204030204" pitchFamily="2" charset="0"/>
+                <a:ea typeface="Dotum" panose="020B0600000101010101" pitchFamily="34" charset="-127"/>
+                <a:cs typeface="Biome Light" panose="020B0303030204020804" pitchFamily="34" charset="0"/>
+              </a:rPr>
+              <a:t>x</a:t>
+            </a:r>
+            <a:r>
+              <a:rPr lang="en-US" sz="8800">
+                <a:solidFill>
+                  <a:schemeClr val="tx1"/>
+                </a:solidFill>
+                <a:latin typeface="Rastanty Cortez" panose="020F0502020204030204" pitchFamily="2" charset="0"/>
+                <a:ea typeface="Dotum" panose="020B0600000101010101" pitchFamily="34" charset="-127"/>
+                <a:cs typeface="Biome Light" panose="020B0303030204020804" pitchFamily="34" charset="0"/>
+              </a:rPr>
+              <a:t>aminerv - </a:t>
+            </a:r>
+            <a:r>
+              <a:rPr lang="en-US" sz="8800">
+                <a:solidFill>
+                  <a:srgbClr val="C00000"/>
+                </a:solidFill>
+                <a:latin typeface="Rastanty Cortez" panose="020F0502020204030204" pitchFamily="2" charset="0"/>
+                <a:ea typeface="Dotum" panose="020B0600000101010101" pitchFamily="34" charset="-127"/>
+                <a:cs typeface="Biome Light" panose="020B0303030204020804" pitchFamily="34" charset="0"/>
+              </a:rPr>
+              <a:t>T</a:t>
+            </a:r>
+            <a:r>
+              <a:rPr lang="en-US" sz="8800">
+                <a:solidFill>
+                  <a:schemeClr val="tx1"/>
+                </a:solidFill>
+                <a:latin typeface="Rastanty Cortez" panose="020F0502020204030204" pitchFamily="2" charset="0"/>
+                <a:ea typeface="Dotum" panose="020B0600000101010101" pitchFamily="34" charset="-127"/>
+                <a:cs typeface="Biome Light" panose="020B0303030204020804" pitchFamily="34" charset="0"/>
+              </a:rPr>
+              <a:t>eacher</a:t>
+            </a:r>
+          </a:p>
+        </p:txBody>
+      </p:sp>
+      <p:sp>
+        <p:nvSpPr>
+          <p:cNvPr id="4" name="TextBox 3">
+            <a:extLst>
+              <a:ext uri="{FF2B5EF4-FFF2-40B4-BE49-F238E27FC236}">
+                <a16:creationId xmlns:a16="http://schemas.microsoft.com/office/drawing/2014/main" id="{3424201D-5DC4-100F-F42A-7C9F1AA47335}"/>
+              </a:ext>
+            </a:extLst>
+          </p:cNvPr>
+          <p:cNvSpPr txBox="1"/>
+          <p:nvPr/>
+        </p:nvSpPr>
+        <p:spPr>
+          <a:xfrm>
+            <a:off x="123728" y="1092689"/>
+            <a:ext cx="6161968" cy="1446550"/>
+          </a:xfrm>
+          <a:prstGeom prst="rect">
+            <a:avLst/>
+          </a:prstGeom>
+          <a:noFill/>
+        </p:spPr>
+        <p:txBody>
+          <a:bodyPr wrap="square" rtlCol="0">
+            <a:spAutoFit/>
+          </a:bodyPr>
+          <a:lstStyle/>
+          <a:p>
+            <a:pPr algn="l" rtl="0"/>
+            <a:r>
+              <a:rPr lang="en-US" sz="8800">
+                <a:solidFill>
+                  <a:srgbClr val="C00000"/>
+                </a:solidFill>
+                <a:latin typeface="Rastanty Cortez" panose="020F0502020204030204" pitchFamily="2" charset="0"/>
+                <a:ea typeface="Dotum" panose="020B0600000101010101" pitchFamily="34" charset="-127"/>
+                <a:cs typeface="Biome Light" panose="020B0303030204020804" pitchFamily="34" charset="0"/>
+              </a:rPr>
+              <a:t>M</a:t>
+            </a:r>
+            <a:r>
+              <a:rPr lang="en-US" sz="8800">
+                <a:solidFill>
+                  <a:schemeClr val="tx1"/>
+                </a:solidFill>
+                <a:latin typeface="Rastanty Cortez" panose="020F0502020204030204" pitchFamily="2" charset="0"/>
+                <a:ea typeface="Dotum" panose="020B0600000101010101" pitchFamily="34" charset="-127"/>
+                <a:cs typeface="Biome Light" panose="020B0303030204020804" pitchFamily="34" charset="0"/>
+              </a:rPr>
+              <a:t>ajid</a:t>
+            </a:r>
+            <a:r>
+              <a:rPr lang="en-US" sz="8800">
+                <a:solidFill>
+                  <a:srgbClr val="C00000"/>
+                </a:solidFill>
+                <a:latin typeface="Rastanty Cortez" panose="020F0502020204030204" pitchFamily="2" charset="0"/>
+                <a:ea typeface="Dotum" panose="020B0600000101010101" pitchFamily="34" charset="-127"/>
+                <a:cs typeface="Biome Light" panose="020B0303030204020804" pitchFamily="34" charset="0"/>
+              </a:rPr>
+              <a:t>Sh</a:t>
+            </a:r>
+            <a:r>
+              <a:rPr lang="en-US" sz="8800">
+                <a:solidFill>
+                  <a:schemeClr val="tx1"/>
+                </a:solidFill>
+                <a:latin typeface="Rastanty Cortez" panose="020F0502020204030204" pitchFamily="2" charset="0"/>
+                <a:ea typeface="Dotum" panose="020B0600000101010101" pitchFamily="34" charset="-127"/>
+                <a:cs typeface="Biome Light" panose="020B0303030204020804" pitchFamily="34" charset="0"/>
+              </a:rPr>
+              <a:t>arifi</a:t>
+            </a:r>
+            <a:r>
+              <a:rPr lang="en-US" sz="8800">
+                <a:solidFill>
+                  <a:srgbClr val="C00000"/>
+                </a:solidFill>
+                <a:latin typeface="Rastanty Cortez" panose="020F0502020204030204" pitchFamily="2" charset="0"/>
+                <a:ea typeface="Dotum" panose="020B0600000101010101" pitchFamily="34" charset="-127"/>
+                <a:cs typeface="Biome Light" panose="020B0303030204020804" pitchFamily="34" charset="0"/>
+              </a:rPr>
+              <a:t>T</a:t>
+            </a:r>
+            <a:r>
+              <a:rPr lang="en-US" sz="8800">
+                <a:solidFill>
+                  <a:schemeClr val="tx1"/>
+                </a:solidFill>
+                <a:latin typeface="Rastanty Cortez" panose="020F0502020204030204" pitchFamily="2" charset="0"/>
+                <a:ea typeface="Dotum" panose="020B0600000101010101" pitchFamily="34" charset="-127"/>
+                <a:cs typeface="Biome Light" panose="020B0303030204020804" pitchFamily="34" charset="0"/>
+              </a:rPr>
+              <a:t>ehrani</a:t>
+            </a:r>
+          </a:p>
+        </p:txBody>
+      </p:sp>
+      <p:sp>
+        <p:nvSpPr>
+          <p:cNvPr id="6" name="TextBox 5">
+            <a:extLst>
+              <a:ext uri="{FF2B5EF4-FFF2-40B4-BE49-F238E27FC236}">
+                <a16:creationId xmlns:a16="http://schemas.microsoft.com/office/drawing/2014/main" id="{A8822D1A-B801-D9EF-12B5-9308532E5786}"/>
+              </a:ext>
+            </a:extLst>
+          </p:cNvPr>
+          <p:cNvSpPr txBox="1"/>
+          <p:nvPr/>
+        </p:nvSpPr>
+        <p:spPr>
+          <a:xfrm>
+            <a:off x="80137" y="2181992"/>
+            <a:ext cx="5992835" cy="1446550"/>
+          </a:xfrm>
+          <a:prstGeom prst="rect">
+            <a:avLst/>
+          </a:prstGeom>
+          <a:noFill/>
+        </p:spPr>
+        <p:txBody>
+          <a:bodyPr wrap="square" rtlCol="0">
+            <a:spAutoFit/>
+          </a:bodyPr>
+          <a:lstStyle/>
+          <a:p>
+            <a:pPr algn="l" rtl="0"/>
+            <a:r>
+              <a:rPr lang="en-US" sz="8800">
+                <a:solidFill>
+                  <a:schemeClr val="tx1"/>
+                </a:solidFill>
+                <a:latin typeface="Rastanty Cortez" panose="020F0502020204030204" pitchFamily="2" charset="0"/>
+                <a:ea typeface="Dotum" panose="020B0600000101010101" pitchFamily="34" charset="-127"/>
+                <a:cs typeface="Biome Light" panose="020B0303030204020804" pitchFamily="34" charset="0"/>
+              </a:rPr>
+              <a:t>PouyaSharifiTehrani</a:t>
+            </a:r>
+          </a:p>
+        </p:txBody>
+      </p:sp>
+      <p:sp>
+        <p:nvSpPr>
+          <p:cNvPr id="8" name="TextBox 7">
+            <a:extLst>
+              <a:ext uri="{FF2B5EF4-FFF2-40B4-BE49-F238E27FC236}">
+                <a16:creationId xmlns:a16="http://schemas.microsoft.com/office/drawing/2014/main" id="{DD43A0E2-273F-3466-526C-374B1C7B0BDA}"/>
+              </a:ext>
+            </a:extLst>
+          </p:cNvPr>
+          <p:cNvSpPr txBox="1"/>
+          <p:nvPr/>
+        </p:nvSpPr>
+        <p:spPr>
+          <a:xfrm>
+            <a:off x="6508051" y="1988592"/>
+            <a:ext cx="3787035" cy="1446550"/>
+          </a:xfrm>
+          <a:prstGeom prst="rect">
+            <a:avLst/>
+          </a:prstGeom>
+          <a:noFill/>
+        </p:spPr>
+        <p:txBody>
+          <a:bodyPr wrap="square" rtlCol="0">
+            <a:spAutoFit/>
+          </a:bodyPr>
+          <a:lstStyle/>
+          <a:p>
+            <a:pPr algn="l" rtl="0"/>
+            <a:r>
+              <a:rPr lang="en-US" sz="8800">
+                <a:solidFill>
+                  <a:schemeClr val="tx1"/>
+                </a:solidFill>
+                <a:latin typeface="Rastanty Cortez" panose="020F0502020204030204" pitchFamily="2" charset="0"/>
+                <a:ea typeface="Dotum" panose="020B0600000101010101" pitchFamily="34" charset="-127"/>
+                <a:cs typeface="Biome Light" panose="020B0303030204020804" pitchFamily="34" charset="0"/>
+              </a:rPr>
+              <a:t>LeilaShabani</a:t>
+            </a:r>
+          </a:p>
+        </p:txBody>
+      </p:sp>
+      <p:sp>
+        <p:nvSpPr>
+          <p:cNvPr id="10" name="TextBox 9">
+            <a:extLst>
+              <a:ext uri="{FF2B5EF4-FFF2-40B4-BE49-F238E27FC236}">
+                <a16:creationId xmlns:a16="http://schemas.microsoft.com/office/drawing/2014/main" id="{253E3251-06DA-7AAB-649A-9C22EBBF9CD0}"/>
+              </a:ext>
+            </a:extLst>
+          </p:cNvPr>
+          <p:cNvSpPr txBox="1"/>
+          <p:nvPr/>
+        </p:nvSpPr>
+        <p:spPr>
+          <a:xfrm>
+            <a:off x="8295419" y="3175554"/>
+            <a:ext cx="2617555" cy="1446550"/>
+          </a:xfrm>
+          <a:prstGeom prst="rect">
+            <a:avLst/>
+          </a:prstGeom>
+          <a:noFill/>
+        </p:spPr>
+        <p:txBody>
+          <a:bodyPr wrap="square" rtlCol="0">
+            <a:spAutoFit/>
+          </a:bodyPr>
+          <a:lstStyle/>
+          <a:p>
+            <a:pPr algn="l" rtl="0"/>
+            <a:r>
+              <a:rPr lang="en-US" sz="8800">
+                <a:solidFill>
+                  <a:schemeClr val="tx1"/>
+                </a:solidFill>
+                <a:latin typeface="Rastanty Cortez" panose="020F0502020204030204" pitchFamily="2" charset="0"/>
+                <a:ea typeface="Dotum" panose="020B0600000101010101" pitchFamily="34" charset="-127"/>
+                <a:cs typeface="Biome Light" panose="020B0303030204020804" pitchFamily="34" charset="0"/>
+              </a:rPr>
+              <a:t>MShT</a:t>
+            </a:r>
+          </a:p>
+        </p:txBody>
+      </p:sp>
+      <p:sp>
+        <p:nvSpPr>
+          <p:cNvPr id="20" name="TextBox 19">
+            <a:extLst>
+              <a:ext uri="{FF2B5EF4-FFF2-40B4-BE49-F238E27FC236}">
+                <a16:creationId xmlns:a16="http://schemas.microsoft.com/office/drawing/2014/main" id="{38370BD1-AA52-1C19-2408-C4514B831CEF}"/>
+              </a:ext>
+            </a:extLst>
+          </p:cNvPr>
+          <p:cNvSpPr txBox="1"/>
+          <p:nvPr/>
+        </p:nvSpPr>
+        <p:spPr>
+          <a:xfrm>
+            <a:off x="440759" y="6042833"/>
+            <a:ext cx="6088719" cy="1446550"/>
+          </a:xfrm>
+          <a:prstGeom prst="rect">
+            <a:avLst/>
+          </a:prstGeom>
+          <a:noFill/>
+        </p:spPr>
+        <p:txBody>
+          <a:bodyPr wrap="square" rtlCol="0">
+            <a:spAutoFit/>
+          </a:bodyPr>
+          <a:lstStyle/>
+          <a:p>
+            <a:pPr algn="l" rtl="0"/>
+            <a:r>
+              <a:rPr lang="en-US" sz="8800">
+                <a:solidFill>
+                  <a:schemeClr val="tx1"/>
+                </a:solidFill>
+                <a:latin typeface="Rastanty Cortez" panose="020F0502020204030204" pitchFamily="2" charset="0"/>
+                <a:ea typeface="Dotum" panose="020B0600000101010101" pitchFamily="34" charset="-127"/>
+                <a:cs typeface="Biome Light" panose="020B0303030204020804" pitchFamily="34" charset="0"/>
+              </a:rPr>
+              <a:t>E</a:t>
+            </a:r>
+            <a:r>
+              <a:rPr lang="en-US" sz="8800">
+                <a:solidFill>
+                  <a:srgbClr val="C00000"/>
+                </a:solidFill>
+                <a:latin typeface="Rastanty Cortez" panose="020F0502020204030204" pitchFamily="2" charset="0"/>
+                <a:ea typeface="Dotum" panose="020B0600000101010101" pitchFamily="34" charset="-127"/>
+                <a:cs typeface="Biome Light" panose="020B0303030204020804" pitchFamily="34" charset="0"/>
+              </a:rPr>
+              <a:t>x</a:t>
+            </a:r>
+            <a:r>
+              <a:rPr lang="en-US" sz="8800">
+                <a:solidFill>
+                  <a:schemeClr val="tx1"/>
+                </a:solidFill>
+                <a:latin typeface="Rastanty Cortez" panose="020F0502020204030204" pitchFamily="2" charset="0"/>
+                <a:ea typeface="Dotum" panose="020B0600000101010101" pitchFamily="34" charset="-127"/>
+                <a:cs typeface="Biome Light" panose="020B0303030204020804" pitchFamily="34" charset="0"/>
+              </a:rPr>
+              <a:t>aminerv - </a:t>
+            </a:r>
+            <a:r>
+              <a:rPr lang="en-US" sz="8800">
+                <a:solidFill>
+                  <a:srgbClr val="C00000"/>
+                </a:solidFill>
+                <a:latin typeface="Rastanty Cortez" panose="020F0502020204030204" pitchFamily="2" charset="0"/>
+                <a:ea typeface="Dotum" panose="020B0600000101010101" pitchFamily="34" charset="-127"/>
+                <a:cs typeface="Biome Light" panose="020B0303030204020804" pitchFamily="34" charset="0"/>
+              </a:rPr>
+              <a:t>S</a:t>
+            </a:r>
+            <a:r>
+              <a:rPr lang="en-US" sz="8800">
+                <a:solidFill>
+                  <a:schemeClr val="tx1"/>
+                </a:solidFill>
+                <a:latin typeface="Rastanty Cortez" panose="020F0502020204030204" pitchFamily="2" charset="0"/>
+                <a:ea typeface="Dotum" panose="020B0600000101010101" pitchFamily="34" charset="-127"/>
+                <a:cs typeface="Biome Light" panose="020B0303030204020804" pitchFamily="34" charset="0"/>
+              </a:rPr>
+              <a:t>tudent</a:t>
+            </a:r>
+          </a:p>
+        </p:txBody>
+      </p:sp>
     </p:spTree>
     <p:extLst>
       <p:ext uri="{BB962C8B-B14F-4D97-AF65-F5344CB8AC3E}">

--- a/ExaminerB/.appCatalog/ExaminerB notes 1404.pptx
+++ b/ExaminerB/.appCatalog/ExaminerB notes 1404.pptx
@@ -280,7 +280,7 @@
             </a:pPr>
             <a:fld id="{BCC18F51-09EC-435C-A3BA-64A766E099C0}" type="datetimeFigureOut">
               <a:rPr lang="fa-IR"/>
-              <a:t>26/01/1448</a:t>
+              <a:t>03/02/1448</a:t>
             </a:fld>
             <a:endParaRPr/>
           </a:p>
@@ -459,7 +459,7 @@
             </a:pPr>
             <a:fld id="{BCC18F51-09EC-435C-A3BA-64A766E099C0}" type="datetimeFigureOut">
               <a:rPr lang="fa-IR"/>
-              <a:t>26/01/1448</a:t>
+              <a:t>03/02/1448</a:t>
             </a:fld>
             <a:endParaRPr/>
           </a:p>
@@ -648,7 +648,7 @@
             </a:pPr>
             <a:fld id="{BCC18F51-09EC-435C-A3BA-64A766E099C0}" type="datetimeFigureOut">
               <a:rPr lang="fa-IR"/>
-              <a:t>26/01/1448</a:t>
+              <a:t>03/02/1448</a:t>
             </a:fld>
             <a:endParaRPr/>
           </a:p>
@@ -827,7 +827,7 @@
             </a:pPr>
             <a:fld id="{BCC18F51-09EC-435C-A3BA-64A766E099C0}" type="datetimeFigureOut">
               <a:rPr lang="fa-IR"/>
-              <a:t>26/01/1448</a:t>
+              <a:t>03/02/1448</a:t>
             </a:fld>
             <a:endParaRPr/>
           </a:p>
@@ -1079,7 +1079,7 @@
             </a:pPr>
             <a:fld id="{BCC18F51-09EC-435C-A3BA-64A766E099C0}" type="datetimeFigureOut">
               <a:rPr lang="fa-IR"/>
-              <a:t>26/01/1448</a:t>
+              <a:t>03/02/1448</a:t>
             </a:fld>
             <a:endParaRPr/>
           </a:p>
@@ -1324,7 +1324,7 @@
             </a:pPr>
             <a:fld id="{BCC18F51-09EC-435C-A3BA-64A766E099C0}" type="datetimeFigureOut">
               <a:rPr lang="fa-IR"/>
-              <a:t>26/01/1448</a:t>
+              <a:t>03/02/1448</a:t>
             </a:fld>
             <a:endParaRPr/>
           </a:p>
@@ -1706,7 +1706,7 @@
             </a:pPr>
             <a:fld id="{BCC18F51-09EC-435C-A3BA-64A766E099C0}" type="datetimeFigureOut">
               <a:rPr lang="fa-IR"/>
-              <a:t>26/01/1448</a:t>
+              <a:t>03/02/1448</a:t>
             </a:fld>
             <a:endParaRPr/>
           </a:p>
@@ -1829,7 +1829,7 @@
             </a:pPr>
             <a:fld id="{BCC18F51-09EC-435C-A3BA-64A766E099C0}" type="datetimeFigureOut">
               <a:rPr lang="fa-IR"/>
-              <a:t>26/01/1448</a:t>
+              <a:t>03/02/1448</a:t>
             </a:fld>
             <a:endParaRPr/>
           </a:p>
@@ -1928,7 +1928,7 @@
             </a:pPr>
             <a:fld id="{BCC18F51-09EC-435C-A3BA-64A766E099C0}" type="datetimeFigureOut">
               <a:rPr lang="fa-IR"/>
-              <a:t>26/01/1448</a:t>
+              <a:t>03/02/1448</a:t>
             </a:fld>
             <a:endParaRPr/>
           </a:p>
@@ -2215,7 +2215,7 @@
             </a:pPr>
             <a:fld id="{BCC18F51-09EC-435C-A3BA-64A766E099C0}" type="datetimeFigureOut">
               <a:rPr lang="fa-IR"/>
-              <a:t>26/01/1448</a:t>
+              <a:t>03/02/1448</a:t>
             </a:fld>
             <a:endParaRPr/>
           </a:p>
@@ -2479,7 +2479,7 @@
             </a:pPr>
             <a:fld id="{BCC18F51-09EC-435C-A3BA-64A766E099C0}" type="datetimeFigureOut">
               <a:rPr lang="fa-IR"/>
-              <a:t>26/01/1448</a:t>
+              <a:t>03/02/1448</a:t>
             </a:fld>
             <a:endParaRPr/>
           </a:p>
@@ -2701,7 +2701,7 @@
             </a:pPr>
             <a:fld id="{BCC18F51-09EC-435C-A3BA-64A766E099C0}" type="datetimeFigureOut">
               <a:rPr lang="fa-IR"/>
-              <a:t>26/01/1448</a:t>
+              <a:t>03/02/1448</a:t>
             </a:fld>
             <a:endParaRPr/>
           </a:p>
@@ -3115,6 +3115,2983 @@
       </p:grpSpPr>
       <p:sp>
         <p:nvSpPr>
+          <p:cNvPr id="36" name="Oval 29">
+            <a:extLst>
+              <a:ext uri="{FF2B5EF4-FFF2-40B4-BE49-F238E27FC236}">
+                <a16:creationId xmlns:a16="http://schemas.microsoft.com/office/drawing/2014/main" id="{C79AE5C5-D274-8815-77E4-73289B05943E}"/>
+              </a:ext>
+            </a:extLst>
+          </p:cNvPr>
+          <p:cNvSpPr/>
+          <p:nvPr/>
+        </p:nvSpPr>
+        <p:spPr bwMode="auto">
+          <a:xfrm rot="18907748">
+            <a:off x="6632976" y="420957"/>
+            <a:ext cx="5319787" cy="7091336"/>
+          </a:xfrm>
+          <a:custGeom>
+            <a:avLst/>
+            <a:gdLst>
+              <a:gd name="csX0" fmla="*/ 0 w 5678600"/>
+              <a:gd name="csY0" fmla="*/ 3658973 h 7317945"/>
+              <a:gd name="csX1" fmla="*/ 2839300 w 5678600"/>
+              <a:gd name="csY1" fmla="*/ 0 h 7317945"/>
+              <a:gd name="csX2" fmla="*/ 5678600 w 5678600"/>
+              <a:gd name="csY2" fmla="*/ 3658973 h 7317945"/>
+              <a:gd name="csX3" fmla="*/ 2839300 w 5678600"/>
+              <a:gd name="csY3" fmla="*/ 7317946 h 7317945"/>
+              <a:gd name="csX4" fmla="*/ 0 w 5678600"/>
+              <a:gd name="csY4" fmla="*/ 3658973 h 7317945"/>
+              <a:gd name="csX0" fmla="*/ 0 w 5127434"/>
+              <a:gd name="csY0" fmla="*/ 3659351 h 7318665"/>
+              <a:gd name="csX1" fmla="*/ 2839300 w 5127434"/>
+              <a:gd name="csY1" fmla="*/ 378 h 7318665"/>
+              <a:gd name="csX2" fmla="*/ 5127434 w 5127434"/>
+              <a:gd name="csY2" fmla="*/ 3492962 h 7318665"/>
+              <a:gd name="csX3" fmla="*/ 2839300 w 5127434"/>
+              <a:gd name="csY3" fmla="*/ 7318324 h 7318665"/>
+              <a:gd name="csX4" fmla="*/ 0 w 5127434"/>
+              <a:gd name="csY4" fmla="*/ 3659351 h 7318665"/>
+              <a:gd name="csX0" fmla="*/ 0 w 5637665"/>
+              <a:gd name="csY0" fmla="*/ 3659309 h 7318623"/>
+              <a:gd name="csX1" fmla="*/ 2839300 w 5637665"/>
+              <a:gd name="csY1" fmla="*/ 336 h 7318623"/>
+              <a:gd name="csX2" fmla="*/ 5127434 w 5637665"/>
+              <a:gd name="csY2" fmla="*/ 3492920 h 7318623"/>
+              <a:gd name="csX3" fmla="*/ 2839300 w 5637665"/>
+              <a:gd name="csY3" fmla="*/ 7318282 h 7318623"/>
+              <a:gd name="csX4" fmla="*/ 0 w 5637665"/>
+              <a:gd name="csY4" fmla="*/ 3659309 h 7318623"/>
+              <a:gd name="csX0" fmla="*/ 0 w 5637665"/>
+              <a:gd name="csY0" fmla="*/ 3659309 h 7318623"/>
+              <a:gd name="csX1" fmla="*/ 2839300 w 5637665"/>
+              <a:gd name="csY1" fmla="*/ 336 h 7318623"/>
+              <a:gd name="csX2" fmla="*/ 5127434 w 5637665"/>
+              <a:gd name="csY2" fmla="*/ 3492920 h 7318623"/>
+              <a:gd name="csX3" fmla="*/ 2839300 w 5637665"/>
+              <a:gd name="csY3" fmla="*/ 7318282 h 7318623"/>
+              <a:gd name="csX4" fmla="*/ 0 w 5637665"/>
+              <a:gd name="csY4" fmla="*/ 3659309 h 7318623"/>
+              <a:gd name="csX0" fmla="*/ 0 w 5556500"/>
+              <a:gd name="csY0" fmla="*/ 3659563 h 7318877"/>
+              <a:gd name="csX1" fmla="*/ 2839300 w 5556500"/>
+              <a:gd name="csY1" fmla="*/ 590 h 7318877"/>
+              <a:gd name="csX2" fmla="*/ 5127434 w 5556500"/>
+              <a:gd name="csY2" fmla="*/ 3493174 h 7318877"/>
+              <a:gd name="csX3" fmla="*/ 2839300 w 5556500"/>
+              <a:gd name="csY3" fmla="*/ 7318536 h 7318877"/>
+              <a:gd name="csX4" fmla="*/ 0 w 5556500"/>
+              <a:gd name="csY4" fmla="*/ 3659563 h 7318877"/>
+              <a:gd name="csX0" fmla="*/ 43 w 5563315"/>
+              <a:gd name="csY0" fmla="*/ 3308805 h 6968004"/>
+              <a:gd name="csX1" fmla="*/ 2903994 w 5563315"/>
+              <a:gd name="csY1" fmla="*/ 913 h 6968004"/>
+              <a:gd name="csX2" fmla="*/ 5127477 w 5563315"/>
+              <a:gd name="csY2" fmla="*/ 3142416 h 6968004"/>
+              <a:gd name="csX3" fmla="*/ 2839343 w 5563315"/>
+              <a:gd name="csY3" fmla="*/ 6967778 h 6968004"/>
+              <a:gd name="csX4" fmla="*/ 43 w 5563315"/>
+              <a:gd name="csY4" fmla="*/ 3308805 h 6968004"/>
+              <a:gd name="csX0" fmla="*/ 60 w 4894157"/>
+              <a:gd name="csY0" fmla="*/ 1630203 h 7043433"/>
+              <a:gd name="csX1" fmla="*/ 2245373 w 4894157"/>
+              <a:gd name="csY1" fmla="*/ 55990 h 7043433"/>
+              <a:gd name="csX2" fmla="*/ 4468856 w 4894157"/>
+              <a:gd name="csY2" fmla="*/ 3197493 h 7043433"/>
+              <a:gd name="csX3" fmla="*/ 2180722 w 4894157"/>
+              <a:gd name="csY3" fmla="*/ 7022855 h 7043433"/>
+              <a:gd name="csX4" fmla="*/ 60 w 4894157"/>
+              <a:gd name="csY4" fmla="*/ 1630203 h 7043433"/>
+              <a:gd name="csX0" fmla="*/ 120413 w 5014510"/>
+              <a:gd name="csY0" fmla="*/ 1631920 h 7230796"/>
+              <a:gd name="csX1" fmla="*/ 2365726 w 5014510"/>
+              <a:gd name="csY1" fmla="*/ 57707 h 7230796"/>
+              <a:gd name="csX2" fmla="*/ 4589209 w 5014510"/>
+              <a:gd name="csY2" fmla="*/ 3199210 h 7230796"/>
+              <a:gd name="csX3" fmla="*/ 760880 w 5014510"/>
+              <a:gd name="csY3" fmla="*/ 7211640 h 7230796"/>
+              <a:gd name="csX4" fmla="*/ 120413 w 5014510"/>
+              <a:gd name="csY4" fmla="*/ 1631920 h 7230796"/>
+              <a:gd name="csX0" fmla="*/ 346956 w 5241053"/>
+              <a:gd name="csY0" fmla="*/ 1631920 h 7259305"/>
+              <a:gd name="csX1" fmla="*/ 2592269 w 5241053"/>
+              <a:gd name="csY1" fmla="*/ 57707 h 7259305"/>
+              <a:gd name="csX2" fmla="*/ 4815752 w 5241053"/>
+              <a:gd name="csY2" fmla="*/ 3199210 h 7259305"/>
+              <a:gd name="csX3" fmla="*/ 987423 w 5241053"/>
+              <a:gd name="csY3" fmla="*/ 7211640 h 7259305"/>
+              <a:gd name="csX4" fmla="*/ 346956 w 5241053"/>
+              <a:gd name="csY4" fmla="*/ 1631920 h 7259305"/>
+              <a:gd name="csX0" fmla="*/ 349977 w 5248987"/>
+              <a:gd name="csY0" fmla="*/ 1677593 h 7304978"/>
+              <a:gd name="csX1" fmla="*/ 2643077 w 5248987"/>
+              <a:gd name="csY1" fmla="*/ 55378 h 7304978"/>
+              <a:gd name="csX2" fmla="*/ 4818773 w 5248987"/>
+              <a:gd name="csY2" fmla="*/ 3244883 h 7304978"/>
+              <a:gd name="csX3" fmla="*/ 990444 w 5248987"/>
+              <a:gd name="csY3" fmla="*/ 7257313 h 7304978"/>
+              <a:gd name="csX4" fmla="*/ 349977 w 5248987"/>
+              <a:gd name="csY4" fmla="*/ 1677593 h 7304978"/>
+              <a:gd name="csX0" fmla="*/ 349977 w 5236960"/>
+              <a:gd name="csY0" fmla="*/ 1627449 h 7254834"/>
+              <a:gd name="csX1" fmla="*/ 2643077 w 5236960"/>
+              <a:gd name="csY1" fmla="*/ 5234 h 7254834"/>
+              <a:gd name="csX2" fmla="*/ 4818773 w 5236960"/>
+              <a:gd name="csY2" fmla="*/ 3194739 h 7254834"/>
+              <a:gd name="csX3" fmla="*/ 990444 w 5236960"/>
+              <a:gd name="csY3" fmla="*/ 7207169 h 7254834"/>
+              <a:gd name="csX4" fmla="*/ 349977 w 5236960"/>
+              <a:gd name="csY4" fmla="*/ 1627449 h 7254834"/>
+              <a:gd name="csX0" fmla="*/ 119626 w 5043533"/>
+              <a:gd name="csY0" fmla="*/ 1463253 h 7315371"/>
+              <a:gd name="csX1" fmla="*/ 2437231 w 5043533"/>
+              <a:gd name="csY1" fmla="*/ 88439 h 7315371"/>
+              <a:gd name="csX2" fmla="*/ 4612927 w 5043533"/>
+              <a:gd name="csY2" fmla="*/ 3277944 h 7315371"/>
+              <a:gd name="csX3" fmla="*/ 784598 w 5043533"/>
+              <a:gd name="csY3" fmla="*/ 7290374 h 7315371"/>
+              <a:gd name="csX4" fmla="*/ 119626 w 5043533"/>
+              <a:gd name="csY4" fmla="*/ 1463253 h 7315371"/>
+              <a:gd name="csX0" fmla="*/ 105918 w 5029825"/>
+              <a:gd name="csY0" fmla="*/ 1443927 h 7296045"/>
+              <a:gd name="csX1" fmla="*/ 2423523 w 5029825"/>
+              <a:gd name="csY1" fmla="*/ 69113 h 7296045"/>
+              <a:gd name="csX2" fmla="*/ 4599219 w 5029825"/>
+              <a:gd name="csY2" fmla="*/ 3258618 h 7296045"/>
+              <a:gd name="csX3" fmla="*/ 770890 w 5029825"/>
+              <a:gd name="csY3" fmla="*/ 7271048 h 7296045"/>
+              <a:gd name="csX4" fmla="*/ 105918 w 5029825"/>
+              <a:gd name="csY4" fmla="*/ 1443927 h 7296045"/>
+              <a:gd name="csX0" fmla="*/ 183921 w 5107828"/>
+              <a:gd name="csY0" fmla="*/ 1443927 h 7398576"/>
+              <a:gd name="csX1" fmla="*/ 2501526 w 5107828"/>
+              <a:gd name="csY1" fmla="*/ 69113 h 7398576"/>
+              <a:gd name="csX2" fmla="*/ 4677222 w 5107828"/>
+              <a:gd name="csY2" fmla="*/ 3258618 h 7398576"/>
+              <a:gd name="csX3" fmla="*/ 848893 w 5107828"/>
+              <a:gd name="csY3" fmla="*/ 7271048 h 7398576"/>
+              <a:gd name="csX4" fmla="*/ 183921 w 5107828"/>
+              <a:gd name="csY4" fmla="*/ 1443927 h 7398576"/>
+              <a:gd name="csX0" fmla="*/ 395880 w 5319787"/>
+              <a:gd name="csY0" fmla="*/ 1458340 h 7091336"/>
+              <a:gd name="csX1" fmla="*/ 2713485 w 5319787"/>
+              <a:gd name="csY1" fmla="*/ 83526 h 7091336"/>
+              <a:gd name="csX2" fmla="*/ 4889181 w 5319787"/>
+              <a:gd name="csY2" fmla="*/ 3273031 h 7091336"/>
+              <a:gd name="csX3" fmla="*/ 676940 w 5319787"/>
+              <a:gd name="csY3" fmla="*/ 6951063 h 7091336"/>
+              <a:gd name="csX4" fmla="*/ 395880 w 5319787"/>
+              <a:gd name="csY4" fmla="*/ 1458340 h 7091336"/>
+            </a:gdLst>
+            <a:ahLst/>
+            <a:cxnLst>
+              <a:cxn ang="0">
+                <a:pos x="csX0" y="csY0"/>
+              </a:cxn>
+              <a:cxn ang="0">
+                <a:pos x="csX1" y="csY1"/>
+              </a:cxn>
+              <a:cxn ang="0">
+                <a:pos x="csX2" y="csY2"/>
+              </a:cxn>
+              <a:cxn ang="0">
+                <a:pos x="csX3" y="csY3"/>
+              </a:cxn>
+              <a:cxn ang="0">
+                <a:pos x="csX4" y="csY4"/>
+              </a:cxn>
+            </a:cxnLst>
+            <a:rect l="l" t="t" r="r" b="b"/>
+            <a:pathLst>
+              <a:path w="5319787" h="7091336">
+                <a:moveTo>
+                  <a:pt x="395880" y="1458340"/>
+                </a:moveTo>
+                <a:cubicBezTo>
+                  <a:pt x="735304" y="313751"/>
+                  <a:pt x="1964602" y="-218922"/>
+                  <a:pt x="2713485" y="83526"/>
+                </a:cubicBezTo>
+                <a:cubicBezTo>
+                  <a:pt x="3462368" y="385974"/>
+                  <a:pt x="6412583" y="698013"/>
+                  <a:pt x="4889181" y="3273031"/>
+                </a:cubicBezTo>
+                <a:cubicBezTo>
+                  <a:pt x="3667384" y="5081053"/>
+                  <a:pt x="1762164" y="7731701"/>
+                  <a:pt x="676940" y="6951063"/>
+                </a:cubicBezTo>
+                <a:cubicBezTo>
+                  <a:pt x="-408284" y="6170425"/>
+                  <a:pt x="56456" y="2602929"/>
+                  <a:pt x="395880" y="1458340"/>
+                </a:cubicBezTo>
+                <a:close/>
+              </a:path>
+            </a:pathLst>
+          </a:custGeom>
+          <a:solidFill>
+            <a:schemeClr val="accent6">
+              <a:lumMod val="20000"/>
+              <a:lumOff val="80000"/>
+            </a:schemeClr>
+          </a:solidFill>
+          <a:ln w="28575">
+            <a:noFill/>
+            <a:prstDash val="solid"/>
+          </a:ln>
+          <a:effectLst/>
+        </p:spPr>
+        <p:style>
+          <a:lnRef idx="0">
+            <a:schemeClr val="accent4"/>
+          </a:lnRef>
+          <a:fillRef idx="3">
+            <a:schemeClr val="accent4"/>
+          </a:fillRef>
+          <a:effectRef idx="3">
+            <a:schemeClr val="accent4"/>
+          </a:effectRef>
+          <a:fontRef idx="minor">
+            <a:schemeClr val="lt1"/>
+          </a:fontRef>
+        </p:style>
+        <p:txBody>
+          <a:bodyPr rtlCol="1" anchor="ctr"/>
+          <a:lstStyle/>
+          <a:p>
+            <a:pPr algn="r" rtl="1"/>
+            <a:endParaRPr lang="en-US" sz="4400" b="1">
+              <a:solidFill>
+                <a:schemeClr val="bg1"/>
+              </a:solidFill>
+              <a:highlight>
+                <a:srgbClr val="800080"/>
+              </a:highlight>
+              <a:latin typeface="Segoe UI" panose="020B0502040204020203" pitchFamily="34" charset="0"/>
+              <a:cs typeface="Segoe UI" panose="020B0502040204020203" pitchFamily="34" charset="0"/>
+            </a:endParaRPr>
+          </a:p>
+        </p:txBody>
+      </p:sp>
+      <p:sp>
+        <p:nvSpPr>
+          <p:cNvPr id="32" name="Oval 31">
+            <a:extLst>
+              <a:ext uri="{FF2B5EF4-FFF2-40B4-BE49-F238E27FC236}">
+                <a16:creationId xmlns:a16="http://schemas.microsoft.com/office/drawing/2014/main" id="{9EEB699C-818A-8863-67F4-83623F06B2C8}"/>
+              </a:ext>
+            </a:extLst>
+          </p:cNvPr>
+          <p:cNvSpPr/>
+          <p:nvPr/>
+        </p:nvSpPr>
+        <p:spPr bwMode="auto">
+          <a:xfrm>
+            <a:off x="2334549" y="19079"/>
+            <a:ext cx="4116856" cy="6721957"/>
+          </a:xfrm>
+          <a:custGeom>
+            <a:avLst/>
+            <a:gdLst>
+              <a:gd name="csX0" fmla="*/ 0 w 2888469"/>
+              <a:gd name="csY0" fmla="*/ 2952627 h 5905253"/>
+              <a:gd name="csX1" fmla="*/ 1444235 w 2888469"/>
+              <a:gd name="csY1" fmla="*/ 0 h 5905253"/>
+              <a:gd name="csX2" fmla="*/ 2888470 w 2888469"/>
+              <a:gd name="csY2" fmla="*/ 2952627 h 5905253"/>
+              <a:gd name="csX3" fmla="*/ 1444235 w 2888469"/>
+              <a:gd name="csY3" fmla="*/ 5905254 h 5905253"/>
+              <a:gd name="csX4" fmla="*/ 0 w 2888469"/>
+              <a:gd name="csY4" fmla="*/ 2952627 h 5905253"/>
+              <a:gd name="csX0" fmla="*/ 0 w 3712559"/>
+              <a:gd name="csY0" fmla="*/ 2549514 h 5910917"/>
+              <a:gd name="csX1" fmla="*/ 2268324 w 3712559"/>
+              <a:gd name="csY1" fmla="*/ 3287 h 5910917"/>
+              <a:gd name="csX2" fmla="*/ 3712559 w 3712559"/>
+              <a:gd name="csY2" fmla="*/ 2955914 h 5910917"/>
+              <a:gd name="csX3" fmla="*/ 2268324 w 3712559"/>
+              <a:gd name="csY3" fmla="*/ 5908541 h 5910917"/>
+              <a:gd name="csX4" fmla="*/ 0 w 3712559"/>
+              <a:gd name="csY4" fmla="*/ 2549514 h 5910917"/>
+              <a:gd name="csX0" fmla="*/ 3960 w 3716519"/>
+              <a:gd name="csY0" fmla="*/ 2221291 h 5582694"/>
+              <a:gd name="csX1" fmla="*/ 1775573 w 3716519"/>
+              <a:gd name="csY1" fmla="*/ 2441 h 5582694"/>
+              <a:gd name="csX2" fmla="*/ 3716519 w 3716519"/>
+              <a:gd name="csY2" fmla="*/ 2627691 h 5582694"/>
+              <a:gd name="csX3" fmla="*/ 2272284 w 3716519"/>
+              <a:gd name="csY3" fmla="*/ 5580318 h 5582694"/>
+              <a:gd name="csX4" fmla="*/ 3960 w 3716519"/>
+              <a:gd name="csY4" fmla="*/ 2221291 h 5582694"/>
+              <a:gd name="csX0" fmla="*/ 23609 w 3736168"/>
+              <a:gd name="csY0" fmla="*/ 2222937 h 5584340"/>
+              <a:gd name="csX1" fmla="*/ 1795222 w 3736168"/>
+              <a:gd name="csY1" fmla="*/ 4087 h 5584340"/>
+              <a:gd name="csX2" fmla="*/ 3736168 w 3736168"/>
+              <a:gd name="csY2" fmla="*/ 2629337 h 5584340"/>
+              <a:gd name="csX3" fmla="*/ 2291933 w 3736168"/>
+              <a:gd name="csY3" fmla="*/ 5581964 h 5584340"/>
+              <a:gd name="csX4" fmla="*/ 23609 w 3736168"/>
+              <a:gd name="csY4" fmla="*/ 2222937 h 5584340"/>
+              <a:gd name="csX0" fmla="*/ 3950 w 3693932"/>
+              <a:gd name="csY0" fmla="*/ 2256570 h 5619122"/>
+              <a:gd name="csX1" fmla="*/ 1775563 w 3693932"/>
+              <a:gd name="csY1" fmla="*/ 37720 h 5619122"/>
+              <a:gd name="csX2" fmla="*/ 3693932 w 3693932"/>
+              <a:gd name="csY2" fmla="*/ 1590526 h 5619122"/>
+              <a:gd name="csX3" fmla="*/ 2272274 w 3693932"/>
+              <a:gd name="csY3" fmla="*/ 5615597 h 5619122"/>
+              <a:gd name="csX4" fmla="*/ 3950 w 3693932"/>
+              <a:gd name="csY4" fmla="*/ 2256570 h 5619122"/>
+              <a:gd name="csX0" fmla="*/ 3950 w 3693932"/>
+              <a:gd name="csY0" fmla="*/ 2256570 h 5619122"/>
+              <a:gd name="csX1" fmla="*/ 1775563 w 3693932"/>
+              <a:gd name="csY1" fmla="*/ 37720 h 5619122"/>
+              <a:gd name="csX2" fmla="*/ 3693932 w 3693932"/>
+              <a:gd name="csY2" fmla="*/ 1590526 h 5619122"/>
+              <a:gd name="csX3" fmla="*/ 2272274 w 3693932"/>
+              <a:gd name="csY3" fmla="*/ 5615597 h 5619122"/>
+              <a:gd name="csX4" fmla="*/ 3950 w 3693932"/>
+              <a:gd name="csY4" fmla="*/ 2256570 h 5619122"/>
+              <a:gd name="csX0" fmla="*/ 826914 w 4516896"/>
+              <a:gd name="csY0" fmla="*/ 2256570 h 6779981"/>
+              <a:gd name="csX1" fmla="*/ 2598527 w 4516896"/>
+              <a:gd name="csY1" fmla="*/ 37720 h 6779981"/>
+              <a:gd name="csX2" fmla="*/ 4516896 w 4516896"/>
+              <a:gd name="csY2" fmla="*/ 1590526 h 6779981"/>
+              <a:gd name="csX3" fmla="*/ 3095238 w 4516896"/>
+              <a:gd name="csY3" fmla="*/ 5615597 h 6779981"/>
+              <a:gd name="csX4" fmla="*/ 110535 w 4516896"/>
+              <a:gd name="csY4" fmla="*/ 6577156 h 6779981"/>
+              <a:gd name="csX5" fmla="*/ 826914 w 4516896"/>
+              <a:gd name="csY5" fmla="*/ 2256570 h 6779981"/>
+              <a:gd name="csX0" fmla="*/ 822638 w 4512620"/>
+              <a:gd name="csY0" fmla="*/ 2256570 h 6697946"/>
+              <a:gd name="csX1" fmla="*/ 2594251 w 4512620"/>
+              <a:gd name="csY1" fmla="*/ 37720 h 6697946"/>
+              <a:gd name="csX2" fmla="*/ 4512620 w 4512620"/>
+              <a:gd name="csY2" fmla="*/ 1590526 h 6697946"/>
+              <a:gd name="csX3" fmla="*/ 3090962 w 4512620"/>
+              <a:gd name="csY3" fmla="*/ 5615597 h 6697946"/>
+              <a:gd name="csX4" fmla="*/ 106259 w 4512620"/>
+              <a:gd name="csY4" fmla="*/ 6577156 h 6697946"/>
+              <a:gd name="csX5" fmla="*/ 851326 w 4512620"/>
+              <a:gd name="csY5" fmla="*/ 3754933 h 6697946"/>
+              <a:gd name="csX6" fmla="*/ 822638 w 4512620"/>
+              <a:gd name="csY6" fmla="*/ 2256570 h 6697946"/>
+              <a:gd name="csX0" fmla="*/ 822638 w 4512620"/>
+              <a:gd name="csY0" fmla="*/ 2256570 h 6697946"/>
+              <a:gd name="csX1" fmla="*/ 2594251 w 4512620"/>
+              <a:gd name="csY1" fmla="*/ 37720 h 6697946"/>
+              <a:gd name="csX2" fmla="*/ 4512620 w 4512620"/>
+              <a:gd name="csY2" fmla="*/ 1590526 h 6697946"/>
+              <a:gd name="csX3" fmla="*/ 3090962 w 4512620"/>
+              <a:gd name="csY3" fmla="*/ 5615597 h 6697946"/>
+              <a:gd name="csX4" fmla="*/ 106259 w 4512620"/>
+              <a:gd name="csY4" fmla="*/ 6577156 h 6697946"/>
+              <a:gd name="csX5" fmla="*/ 851326 w 4512620"/>
+              <a:gd name="csY5" fmla="*/ 3754933 h 6697946"/>
+              <a:gd name="csX6" fmla="*/ 822638 w 4512620"/>
+              <a:gd name="csY6" fmla="*/ 2256570 h 6697946"/>
+              <a:gd name="csX0" fmla="*/ 1364505 w 4512620"/>
+              <a:gd name="csY0" fmla="*/ 1228595 h 6663393"/>
+              <a:gd name="csX1" fmla="*/ 2594251 w 4512620"/>
+              <a:gd name="csY1" fmla="*/ 3167 h 6663393"/>
+              <a:gd name="csX2" fmla="*/ 4512620 w 4512620"/>
+              <a:gd name="csY2" fmla="*/ 1555973 h 6663393"/>
+              <a:gd name="csX3" fmla="*/ 3090962 w 4512620"/>
+              <a:gd name="csY3" fmla="*/ 5581044 h 6663393"/>
+              <a:gd name="csX4" fmla="*/ 106259 w 4512620"/>
+              <a:gd name="csY4" fmla="*/ 6542603 h 6663393"/>
+              <a:gd name="csX5" fmla="*/ 851326 w 4512620"/>
+              <a:gd name="csY5" fmla="*/ 3720380 h 6663393"/>
+              <a:gd name="csX6" fmla="*/ 1364505 w 4512620"/>
+              <a:gd name="csY6" fmla="*/ 1228595 h 6663393"/>
+              <a:gd name="csX0" fmla="*/ 1364505 w 4512620"/>
+              <a:gd name="csY0" fmla="*/ 1228804 h 6663602"/>
+              <a:gd name="csX1" fmla="*/ 2594251 w 4512620"/>
+              <a:gd name="csY1" fmla="*/ 3376 h 6663602"/>
+              <a:gd name="csX2" fmla="*/ 4512620 w 4512620"/>
+              <a:gd name="csY2" fmla="*/ 1556182 h 6663602"/>
+              <a:gd name="csX3" fmla="*/ 3090962 w 4512620"/>
+              <a:gd name="csY3" fmla="*/ 5581253 h 6663602"/>
+              <a:gd name="csX4" fmla="*/ 106259 w 4512620"/>
+              <a:gd name="csY4" fmla="*/ 6542812 h 6663602"/>
+              <a:gd name="csX5" fmla="*/ 851326 w 4512620"/>
+              <a:gd name="csY5" fmla="*/ 3720589 h 6663602"/>
+              <a:gd name="csX6" fmla="*/ 1364505 w 4512620"/>
+              <a:gd name="csY6" fmla="*/ 1228804 h 6663602"/>
+              <a:gd name="csX0" fmla="*/ 1251616 w 4512620"/>
+              <a:gd name="csY0" fmla="*/ 1086996 h 6668550"/>
+              <a:gd name="csX1" fmla="*/ 2594251 w 4512620"/>
+              <a:gd name="csY1" fmla="*/ 8324 h 6668550"/>
+              <a:gd name="csX2" fmla="*/ 4512620 w 4512620"/>
+              <a:gd name="csY2" fmla="*/ 1561130 h 6668550"/>
+              <a:gd name="csX3" fmla="*/ 3090962 w 4512620"/>
+              <a:gd name="csY3" fmla="*/ 5586201 h 6668550"/>
+              <a:gd name="csX4" fmla="*/ 106259 w 4512620"/>
+              <a:gd name="csY4" fmla="*/ 6547760 h 6668550"/>
+              <a:gd name="csX5" fmla="*/ 851326 w 4512620"/>
+              <a:gd name="csY5" fmla="*/ 3725537 h 6668550"/>
+              <a:gd name="csX6" fmla="*/ 1251616 w 4512620"/>
+              <a:gd name="csY6" fmla="*/ 1086996 h 6668550"/>
+              <a:gd name="csX0" fmla="*/ 1251616 w 4512620"/>
+              <a:gd name="csY0" fmla="*/ 1087496 h 6669050"/>
+              <a:gd name="csX1" fmla="*/ 2594251 w 4512620"/>
+              <a:gd name="csY1" fmla="*/ 8824 h 6669050"/>
+              <a:gd name="csX2" fmla="*/ 4512620 w 4512620"/>
+              <a:gd name="csY2" fmla="*/ 1561630 h 6669050"/>
+              <a:gd name="csX3" fmla="*/ 3090962 w 4512620"/>
+              <a:gd name="csY3" fmla="*/ 5586701 h 6669050"/>
+              <a:gd name="csX4" fmla="*/ 106259 w 4512620"/>
+              <a:gd name="csY4" fmla="*/ 6548260 h 6669050"/>
+              <a:gd name="csX5" fmla="*/ 851326 w 4512620"/>
+              <a:gd name="csY5" fmla="*/ 3726037 h 6669050"/>
+              <a:gd name="csX6" fmla="*/ 1251616 w 4512620"/>
+              <a:gd name="csY6" fmla="*/ 1087496 h 6669050"/>
+              <a:gd name="csX0" fmla="*/ 1208967 w 4469971"/>
+              <a:gd name="csY0" fmla="*/ 1086454 h 6668008"/>
+              <a:gd name="csX1" fmla="*/ 2551602 w 4469971"/>
+              <a:gd name="csY1" fmla="*/ 7782 h 6668008"/>
+              <a:gd name="csX2" fmla="*/ 4469971 w 4469971"/>
+              <a:gd name="csY2" fmla="*/ 1560588 h 6668008"/>
+              <a:gd name="csX3" fmla="*/ 3048313 w 4469971"/>
+              <a:gd name="csY3" fmla="*/ 5585659 h 6668008"/>
+              <a:gd name="csX4" fmla="*/ 63610 w 4469971"/>
+              <a:gd name="csY4" fmla="*/ 6547218 h 6668008"/>
+              <a:gd name="csX5" fmla="*/ 1734365 w 4469971"/>
+              <a:gd name="csY5" fmla="*/ 3747573 h 6668008"/>
+              <a:gd name="csX6" fmla="*/ 1208967 w 4469971"/>
+              <a:gd name="csY6" fmla="*/ 1086454 h 6668008"/>
+              <a:gd name="csX0" fmla="*/ 1262979 w 4523983"/>
+              <a:gd name="csY0" fmla="*/ 1086454 h 6668008"/>
+              <a:gd name="csX1" fmla="*/ 2605614 w 4523983"/>
+              <a:gd name="csY1" fmla="*/ 7782 h 6668008"/>
+              <a:gd name="csX2" fmla="*/ 4523983 w 4523983"/>
+              <a:gd name="csY2" fmla="*/ 1560588 h 6668008"/>
+              <a:gd name="csX3" fmla="*/ 3102325 w 4523983"/>
+              <a:gd name="csY3" fmla="*/ 5585659 h 6668008"/>
+              <a:gd name="csX4" fmla="*/ 117622 w 4523983"/>
+              <a:gd name="csY4" fmla="*/ 6547218 h 6668008"/>
+              <a:gd name="csX5" fmla="*/ 1788377 w 4523983"/>
+              <a:gd name="csY5" fmla="*/ 3747573 h 6668008"/>
+              <a:gd name="csX6" fmla="*/ 1262979 w 4523983"/>
+              <a:gd name="csY6" fmla="*/ 1086454 h 6668008"/>
+              <a:gd name="csX0" fmla="*/ 1330713 w 4523983"/>
+              <a:gd name="csY0" fmla="*/ 824813 h 6688589"/>
+              <a:gd name="csX1" fmla="*/ 2605614 w 4523983"/>
+              <a:gd name="csY1" fmla="*/ 28363 h 6688589"/>
+              <a:gd name="csX2" fmla="*/ 4523983 w 4523983"/>
+              <a:gd name="csY2" fmla="*/ 1581169 h 6688589"/>
+              <a:gd name="csX3" fmla="*/ 3102325 w 4523983"/>
+              <a:gd name="csY3" fmla="*/ 5606240 h 6688589"/>
+              <a:gd name="csX4" fmla="*/ 117622 w 4523983"/>
+              <a:gd name="csY4" fmla="*/ 6567799 h 6688589"/>
+              <a:gd name="csX5" fmla="*/ 1788377 w 4523983"/>
+              <a:gd name="csY5" fmla="*/ 3768154 h 6688589"/>
+              <a:gd name="csX6" fmla="*/ 1330713 w 4523983"/>
+              <a:gd name="csY6" fmla="*/ 824813 h 6688589"/>
+              <a:gd name="csX0" fmla="*/ 1330713 w 4523983"/>
+              <a:gd name="csY0" fmla="*/ 824813 h 6688589"/>
+              <a:gd name="csX1" fmla="*/ 2605614 w 4523983"/>
+              <a:gd name="csY1" fmla="*/ 28363 h 6688589"/>
+              <a:gd name="csX2" fmla="*/ 4523983 w 4523983"/>
+              <a:gd name="csY2" fmla="*/ 1581169 h 6688589"/>
+              <a:gd name="csX3" fmla="*/ 3102325 w 4523983"/>
+              <a:gd name="csY3" fmla="*/ 5606240 h 6688589"/>
+              <a:gd name="csX4" fmla="*/ 117622 w 4523983"/>
+              <a:gd name="csY4" fmla="*/ 6567799 h 6688589"/>
+              <a:gd name="csX5" fmla="*/ 1788377 w 4523983"/>
+              <a:gd name="csY5" fmla="*/ 3768154 h 6688589"/>
+              <a:gd name="csX6" fmla="*/ 1330713 w 4523983"/>
+              <a:gd name="csY6" fmla="*/ 824813 h 6688589"/>
+              <a:gd name="csX0" fmla="*/ 1330713 w 4523983"/>
+              <a:gd name="csY0" fmla="*/ 977840 h 6841616"/>
+              <a:gd name="csX1" fmla="*/ 2605614 w 4523983"/>
+              <a:gd name="csY1" fmla="*/ 181390 h 6841616"/>
+              <a:gd name="csX2" fmla="*/ 4523983 w 4523983"/>
+              <a:gd name="csY2" fmla="*/ 1734196 h 6841616"/>
+              <a:gd name="csX3" fmla="*/ 3102325 w 4523983"/>
+              <a:gd name="csY3" fmla="*/ 5759267 h 6841616"/>
+              <a:gd name="csX4" fmla="*/ 117622 w 4523983"/>
+              <a:gd name="csY4" fmla="*/ 6720826 h 6841616"/>
+              <a:gd name="csX5" fmla="*/ 1788377 w 4523983"/>
+              <a:gd name="csY5" fmla="*/ 3921181 h 6841616"/>
+              <a:gd name="csX6" fmla="*/ 1330713 w 4523983"/>
+              <a:gd name="csY6" fmla="*/ 977840 h 6841616"/>
+              <a:gd name="csX0" fmla="*/ 1330713 w 4523983"/>
+              <a:gd name="csY0" fmla="*/ 842023 h 6705799"/>
+              <a:gd name="csX1" fmla="*/ 2605614 w 4523983"/>
+              <a:gd name="csY1" fmla="*/ 45573 h 6705799"/>
+              <a:gd name="csX2" fmla="*/ 4523983 w 4523983"/>
+              <a:gd name="csY2" fmla="*/ 1598379 h 6705799"/>
+              <a:gd name="csX3" fmla="*/ 3102325 w 4523983"/>
+              <a:gd name="csY3" fmla="*/ 5623450 h 6705799"/>
+              <a:gd name="csX4" fmla="*/ 117622 w 4523983"/>
+              <a:gd name="csY4" fmla="*/ 6585009 h 6705799"/>
+              <a:gd name="csX5" fmla="*/ 1788377 w 4523983"/>
+              <a:gd name="csY5" fmla="*/ 3785364 h 6705799"/>
+              <a:gd name="csX6" fmla="*/ 1330713 w 4523983"/>
+              <a:gd name="csY6" fmla="*/ 842023 h 6705799"/>
+              <a:gd name="csX0" fmla="*/ 1330713 w 4523983"/>
+              <a:gd name="csY0" fmla="*/ 739993 h 6603769"/>
+              <a:gd name="csX1" fmla="*/ 2718503 w 4523983"/>
+              <a:gd name="csY1" fmla="*/ 33854 h 6603769"/>
+              <a:gd name="csX2" fmla="*/ 4523983 w 4523983"/>
+              <a:gd name="csY2" fmla="*/ 1496349 h 6603769"/>
+              <a:gd name="csX3" fmla="*/ 3102325 w 4523983"/>
+              <a:gd name="csY3" fmla="*/ 5521420 h 6603769"/>
+              <a:gd name="csX4" fmla="*/ 117622 w 4523983"/>
+              <a:gd name="csY4" fmla="*/ 6482979 h 6603769"/>
+              <a:gd name="csX5" fmla="*/ 1788377 w 4523983"/>
+              <a:gd name="csY5" fmla="*/ 3683334 h 6603769"/>
+              <a:gd name="csX6" fmla="*/ 1330713 w 4523983"/>
+              <a:gd name="csY6" fmla="*/ 739993 h 6603769"/>
+              <a:gd name="csX0" fmla="*/ 1330713 w 4523983"/>
+              <a:gd name="csY0" fmla="*/ 718603 h 6582379"/>
+              <a:gd name="csX1" fmla="*/ 2718503 w 4523983"/>
+              <a:gd name="csY1" fmla="*/ 12464 h 6582379"/>
+              <a:gd name="csX2" fmla="*/ 4523983 w 4523983"/>
+              <a:gd name="csY2" fmla="*/ 1474959 h 6582379"/>
+              <a:gd name="csX3" fmla="*/ 3102325 w 4523983"/>
+              <a:gd name="csY3" fmla="*/ 5500030 h 6582379"/>
+              <a:gd name="csX4" fmla="*/ 117622 w 4523983"/>
+              <a:gd name="csY4" fmla="*/ 6461589 h 6582379"/>
+              <a:gd name="csX5" fmla="*/ 1788377 w 4523983"/>
+              <a:gd name="csY5" fmla="*/ 3661944 h 6582379"/>
+              <a:gd name="csX6" fmla="*/ 1330713 w 4523983"/>
+              <a:gd name="csY6" fmla="*/ 718603 h 6582379"/>
+              <a:gd name="csX0" fmla="*/ 1330713 w 4523983"/>
+              <a:gd name="csY0" fmla="*/ 711483 h 6575259"/>
+              <a:gd name="csX1" fmla="*/ 2718503 w 4523983"/>
+              <a:gd name="csY1" fmla="*/ 5344 h 6575259"/>
+              <a:gd name="csX2" fmla="*/ 4523983 w 4523983"/>
+              <a:gd name="csY2" fmla="*/ 1467839 h 6575259"/>
+              <a:gd name="csX3" fmla="*/ 3102325 w 4523983"/>
+              <a:gd name="csY3" fmla="*/ 5492910 h 6575259"/>
+              <a:gd name="csX4" fmla="*/ 117622 w 4523983"/>
+              <a:gd name="csY4" fmla="*/ 6454469 h 6575259"/>
+              <a:gd name="csX5" fmla="*/ 1788377 w 4523983"/>
+              <a:gd name="csY5" fmla="*/ 3654824 h 6575259"/>
+              <a:gd name="csX6" fmla="*/ 1330713 w 4523983"/>
+              <a:gd name="csY6" fmla="*/ 711483 h 6575259"/>
+              <a:gd name="csX0" fmla="*/ 1330713 w 4523983"/>
+              <a:gd name="csY0" fmla="*/ 711483 h 6575259"/>
+              <a:gd name="csX1" fmla="*/ 2718503 w 4523983"/>
+              <a:gd name="csY1" fmla="*/ 5344 h 6575259"/>
+              <a:gd name="csX2" fmla="*/ 4523983 w 4523983"/>
+              <a:gd name="csY2" fmla="*/ 1467839 h 6575259"/>
+              <a:gd name="csX3" fmla="*/ 3102325 w 4523983"/>
+              <a:gd name="csY3" fmla="*/ 5492910 h 6575259"/>
+              <a:gd name="csX4" fmla="*/ 117622 w 4523983"/>
+              <a:gd name="csY4" fmla="*/ 6454469 h 6575259"/>
+              <a:gd name="csX5" fmla="*/ 1788377 w 4523983"/>
+              <a:gd name="csY5" fmla="*/ 3654824 h 6575259"/>
+              <a:gd name="csX6" fmla="*/ 1330713 w 4523983"/>
+              <a:gd name="csY6" fmla="*/ 711483 h 6575259"/>
+              <a:gd name="csX0" fmla="*/ 1330713 w 4523983"/>
+              <a:gd name="csY0" fmla="*/ 711483 h 6573787"/>
+              <a:gd name="csX1" fmla="*/ 2718503 w 4523983"/>
+              <a:gd name="csY1" fmla="*/ 5344 h 6573787"/>
+              <a:gd name="csX2" fmla="*/ 4523983 w 4523983"/>
+              <a:gd name="csY2" fmla="*/ 1467839 h 6573787"/>
+              <a:gd name="csX3" fmla="*/ 2989437 w 4523983"/>
+              <a:gd name="csY3" fmla="*/ 5481621 h 6573787"/>
+              <a:gd name="csX4" fmla="*/ 117622 w 4523983"/>
+              <a:gd name="csY4" fmla="*/ 6454469 h 6573787"/>
+              <a:gd name="csX5" fmla="*/ 1788377 w 4523983"/>
+              <a:gd name="csY5" fmla="*/ 3654824 h 6573787"/>
+              <a:gd name="csX6" fmla="*/ 1330713 w 4523983"/>
+              <a:gd name="csY6" fmla="*/ 711483 h 6573787"/>
+              <a:gd name="csX0" fmla="*/ 1330713 w 4523983"/>
+              <a:gd name="csY0" fmla="*/ 711483 h 6562714"/>
+              <a:gd name="csX1" fmla="*/ 2718503 w 4523983"/>
+              <a:gd name="csY1" fmla="*/ 5344 h 6562714"/>
+              <a:gd name="csX2" fmla="*/ 4523983 w 4523983"/>
+              <a:gd name="csY2" fmla="*/ 1467839 h 6562714"/>
+              <a:gd name="csX3" fmla="*/ 2989437 w 4523983"/>
+              <a:gd name="csY3" fmla="*/ 5481621 h 6562714"/>
+              <a:gd name="csX4" fmla="*/ 117622 w 4523983"/>
+              <a:gd name="csY4" fmla="*/ 6454469 h 6562714"/>
+              <a:gd name="csX5" fmla="*/ 1788377 w 4523983"/>
+              <a:gd name="csY5" fmla="*/ 3654824 h 6562714"/>
+              <a:gd name="csX6" fmla="*/ 1330713 w 4523983"/>
+              <a:gd name="csY6" fmla="*/ 711483 h 6562714"/>
+              <a:gd name="csX0" fmla="*/ 1327142 w 4520412"/>
+              <a:gd name="csY0" fmla="*/ 711483 h 6562714"/>
+              <a:gd name="csX1" fmla="*/ 2714932 w 4520412"/>
+              <a:gd name="csY1" fmla="*/ 5344 h 6562714"/>
+              <a:gd name="csX2" fmla="*/ 4520412 w 4520412"/>
+              <a:gd name="csY2" fmla="*/ 1467839 h 6562714"/>
+              <a:gd name="csX3" fmla="*/ 2985866 w 4520412"/>
+              <a:gd name="csY3" fmla="*/ 5481621 h 6562714"/>
+              <a:gd name="csX4" fmla="*/ 114051 w 4520412"/>
+              <a:gd name="csY4" fmla="*/ 6454469 h 6562714"/>
+              <a:gd name="csX5" fmla="*/ 1784806 w 4520412"/>
+              <a:gd name="csY5" fmla="*/ 3654824 h 6562714"/>
+              <a:gd name="csX6" fmla="*/ 1327142 w 4520412"/>
+              <a:gd name="csY6" fmla="*/ 711483 h 6562714"/>
+              <a:gd name="csX0" fmla="*/ 1327142 w 4520412"/>
+              <a:gd name="csY0" fmla="*/ 711483 h 6562714"/>
+              <a:gd name="csX1" fmla="*/ 2714932 w 4520412"/>
+              <a:gd name="csY1" fmla="*/ 5344 h 6562714"/>
+              <a:gd name="csX2" fmla="*/ 4520412 w 4520412"/>
+              <a:gd name="csY2" fmla="*/ 1467839 h 6562714"/>
+              <a:gd name="csX3" fmla="*/ 2985866 w 4520412"/>
+              <a:gd name="csY3" fmla="*/ 5481621 h 6562714"/>
+              <a:gd name="csX4" fmla="*/ 114051 w 4520412"/>
+              <a:gd name="csY4" fmla="*/ 6454469 h 6562714"/>
+              <a:gd name="csX5" fmla="*/ 1784806 w 4520412"/>
+              <a:gd name="csY5" fmla="*/ 3654824 h 6562714"/>
+              <a:gd name="csX6" fmla="*/ 1327142 w 4520412"/>
+              <a:gd name="csY6" fmla="*/ 711483 h 6562714"/>
+              <a:gd name="csX0" fmla="*/ 1331984 w 4525254"/>
+              <a:gd name="csY0" fmla="*/ 711037 h 6562268"/>
+              <a:gd name="csX1" fmla="*/ 2719774 w 4525254"/>
+              <a:gd name="csY1" fmla="*/ 4898 h 6562268"/>
+              <a:gd name="csX2" fmla="*/ 4525254 w 4525254"/>
+              <a:gd name="csY2" fmla="*/ 1467393 h 6562268"/>
+              <a:gd name="csX3" fmla="*/ 2990708 w 4525254"/>
+              <a:gd name="csY3" fmla="*/ 5481175 h 6562268"/>
+              <a:gd name="csX4" fmla="*/ 118893 w 4525254"/>
+              <a:gd name="csY4" fmla="*/ 6454023 h 6562268"/>
+              <a:gd name="csX5" fmla="*/ 1733203 w 4525254"/>
+              <a:gd name="csY5" fmla="*/ 3541489 h 6562268"/>
+              <a:gd name="csX6" fmla="*/ 1331984 w 4525254"/>
+              <a:gd name="csY6" fmla="*/ 711037 h 6562268"/>
+              <a:gd name="csX0" fmla="*/ 1324874 w 4518144"/>
+              <a:gd name="csY0" fmla="*/ 711037 h 6562268"/>
+              <a:gd name="csX1" fmla="*/ 2712664 w 4518144"/>
+              <a:gd name="csY1" fmla="*/ 4898 h 6562268"/>
+              <a:gd name="csX2" fmla="*/ 4518144 w 4518144"/>
+              <a:gd name="csY2" fmla="*/ 1467393 h 6562268"/>
+              <a:gd name="csX3" fmla="*/ 2983598 w 4518144"/>
+              <a:gd name="csY3" fmla="*/ 5481175 h 6562268"/>
+              <a:gd name="csX4" fmla="*/ 111783 w 4518144"/>
+              <a:gd name="csY4" fmla="*/ 6454023 h 6562268"/>
+              <a:gd name="csX5" fmla="*/ 1726093 w 4518144"/>
+              <a:gd name="csY5" fmla="*/ 3541489 h 6562268"/>
+              <a:gd name="csX6" fmla="*/ 1324874 w 4518144"/>
+              <a:gd name="csY6" fmla="*/ 711037 h 6562268"/>
+              <a:gd name="csX0" fmla="*/ 1413614 w 4606884"/>
+              <a:gd name="csY0" fmla="*/ 711037 h 6562268"/>
+              <a:gd name="csX1" fmla="*/ 2801404 w 4606884"/>
+              <a:gd name="csY1" fmla="*/ 4898 h 6562268"/>
+              <a:gd name="csX2" fmla="*/ 4606884 w 4606884"/>
+              <a:gd name="csY2" fmla="*/ 1467393 h 6562268"/>
+              <a:gd name="csX3" fmla="*/ 3072338 w 4606884"/>
+              <a:gd name="csY3" fmla="*/ 5481175 h 6562268"/>
+              <a:gd name="csX4" fmla="*/ 200523 w 4606884"/>
+              <a:gd name="csY4" fmla="*/ 6454023 h 6562268"/>
+              <a:gd name="csX5" fmla="*/ 1814833 w 4606884"/>
+              <a:gd name="csY5" fmla="*/ 3541489 h 6562268"/>
+              <a:gd name="csX6" fmla="*/ 1413614 w 4606884"/>
+              <a:gd name="csY6" fmla="*/ 711037 h 6562268"/>
+              <a:gd name="csX0" fmla="*/ 1413614 w 4606884"/>
+              <a:gd name="csY0" fmla="*/ 711037 h 6630146"/>
+              <a:gd name="csX1" fmla="*/ 2801404 w 4606884"/>
+              <a:gd name="csY1" fmla="*/ 4898 h 6630146"/>
+              <a:gd name="csX2" fmla="*/ 4606884 w 4606884"/>
+              <a:gd name="csY2" fmla="*/ 1467393 h 6630146"/>
+              <a:gd name="csX3" fmla="*/ 3072338 w 4606884"/>
+              <a:gd name="csY3" fmla="*/ 5481175 h 6630146"/>
+              <a:gd name="csX4" fmla="*/ 200523 w 4606884"/>
+              <a:gd name="csY4" fmla="*/ 6454023 h 6630146"/>
+              <a:gd name="csX5" fmla="*/ 1814833 w 4606884"/>
+              <a:gd name="csY5" fmla="*/ 3541489 h 6630146"/>
+              <a:gd name="csX6" fmla="*/ 1413614 w 4606884"/>
+              <a:gd name="csY6" fmla="*/ 711037 h 6630146"/>
+              <a:gd name="csX0" fmla="*/ 1413614 w 4606884"/>
+              <a:gd name="csY0" fmla="*/ 714544 h 6633653"/>
+              <a:gd name="csX1" fmla="*/ 2801404 w 4606884"/>
+              <a:gd name="csY1" fmla="*/ 8405 h 6633653"/>
+              <a:gd name="csX2" fmla="*/ 4606884 w 4606884"/>
+              <a:gd name="csY2" fmla="*/ 1470900 h 6633653"/>
+              <a:gd name="csX3" fmla="*/ 3072338 w 4606884"/>
+              <a:gd name="csY3" fmla="*/ 5484682 h 6633653"/>
+              <a:gd name="csX4" fmla="*/ 200523 w 4606884"/>
+              <a:gd name="csY4" fmla="*/ 6457530 h 6633653"/>
+              <a:gd name="csX5" fmla="*/ 1814833 w 4606884"/>
+              <a:gd name="csY5" fmla="*/ 3544996 h 6633653"/>
+              <a:gd name="csX6" fmla="*/ 1413614 w 4606884"/>
+              <a:gd name="csY6" fmla="*/ 714544 h 6633653"/>
+              <a:gd name="csX0" fmla="*/ 1413614 w 4606884"/>
+              <a:gd name="csY0" fmla="*/ 721519 h 6640628"/>
+              <a:gd name="csX1" fmla="*/ 2801404 w 4606884"/>
+              <a:gd name="csY1" fmla="*/ 15380 h 6640628"/>
+              <a:gd name="csX2" fmla="*/ 4606884 w 4606884"/>
+              <a:gd name="csY2" fmla="*/ 1477875 h 6640628"/>
+              <a:gd name="csX3" fmla="*/ 3072338 w 4606884"/>
+              <a:gd name="csY3" fmla="*/ 5491657 h 6640628"/>
+              <a:gd name="csX4" fmla="*/ 200523 w 4606884"/>
+              <a:gd name="csY4" fmla="*/ 6464505 h 6640628"/>
+              <a:gd name="csX5" fmla="*/ 1814833 w 4606884"/>
+              <a:gd name="csY5" fmla="*/ 3551971 h 6640628"/>
+              <a:gd name="csX6" fmla="*/ 1413614 w 4606884"/>
+              <a:gd name="csY6" fmla="*/ 721519 h 6640628"/>
+              <a:gd name="csX0" fmla="*/ 1481347 w 4606884"/>
+              <a:gd name="csY0" fmla="*/ 685139 h 6705848"/>
+              <a:gd name="csX1" fmla="*/ 2801404 w 4606884"/>
+              <a:gd name="csY1" fmla="*/ 80600 h 6705848"/>
+              <a:gd name="csX2" fmla="*/ 4606884 w 4606884"/>
+              <a:gd name="csY2" fmla="*/ 1543095 h 6705848"/>
+              <a:gd name="csX3" fmla="*/ 3072338 w 4606884"/>
+              <a:gd name="csY3" fmla="*/ 5556877 h 6705848"/>
+              <a:gd name="csX4" fmla="*/ 200523 w 4606884"/>
+              <a:gd name="csY4" fmla="*/ 6529725 h 6705848"/>
+              <a:gd name="csX5" fmla="*/ 1814833 w 4606884"/>
+              <a:gd name="csY5" fmla="*/ 3617191 h 6705848"/>
+              <a:gd name="csX6" fmla="*/ 1481347 w 4606884"/>
+              <a:gd name="csY6" fmla="*/ 685139 h 6705848"/>
+              <a:gd name="csX0" fmla="*/ 1481347 w 4606884"/>
+              <a:gd name="csY0" fmla="*/ 623980 h 6644689"/>
+              <a:gd name="csX1" fmla="*/ 3061048 w 4606884"/>
+              <a:gd name="csY1" fmla="*/ 53307 h 6644689"/>
+              <a:gd name="csX2" fmla="*/ 4606884 w 4606884"/>
+              <a:gd name="csY2" fmla="*/ 1481936 h 6644689"/>
+              <a:gd name="csX3" fmla="*/ 3072338 w 4606884"/>
+              <a:gd name="csY3" fmla="*/ 5495718 h 6644689"/>
+              <a:gd name="csX4" fmla="*/ 200523 w 4606884"/>
+              <a:gd name="csY4" fmla="*/ 6468566 h 6644689"/>
+              <a:gd name="csX5" fmla="*/ 1814833 w 4606884"/>
+              <a:gd name="csY5" fmla="*/ 3556032 h 6644689"/>
+              <a:gd name="csX6" fmla="*/ 1481347 w 4606884"/>
+              <a:gd name="csY6" fmla="*/ 623980 h 6644689"/>
+              <a:gd name="csX0" fmla="*/ 1481347 w 4606884"/>
+              <a:gd name="csY0" fmla="*/ 591938 h 6612647"/>
+              <a:gd name="csX1" fmla="*/ 3061048 w 4606884"/>
+              <a:gd name="csY1" fmla="*/ 21265 h 6612647"/>
+              <a:gd name="csX2" fmla="*/ 4606884 w 4606884"/>
+              <a:gd name="csY2" fmla="*/ 1449894 h 6612647"/>
+              <a:gd name="csX3" fmla="*/ 3072338 w 4606884"/>
+              <a:gd name="csY3" fmla="*/ 5463676 h 6612647"/>
+              <a:gd name="csX4" fmla="*/ 200523 w 4606884"/>
+              <a:gd name="csY4" fmla="*/ 6436524 h 6612647"/>
+              <a:gd name="csX5" fmla="*/ 1814833 w 4606884"/>
+              <a:gd name="csY5" fmla="*/ 3523990 h 6612647"/>
+              <a:gd name="csX6" fmla="*/ 1481347 w 4606884"/>
+              <a:gd name="csY6" fmla="*/ 591938 h 6612647"/>
+              <a:gd name="csX0" fmla="*/ 1391036 w 4606884"/>
+              <a:gd name="csY0" fmla="*/ 572824 h 6661267"/>
+              <a:gd name="csX1" fmla="*/ 3061048 w 4606884"/>
+              <a:gd name="csY1" fmla="*/ 69885 h 6661267"/>
+              <a:gd name="csX2" fmla="*/ 4606884 w 4606884"/>
+              <a:gd name="csY2" fmla="*/ 1498514 h 6661267"/>
+              <a:gd name="csX3" fmla="*/ 3072338 w 4606884"/>
+              <a:gd name="csY3" fmla="*/ 5512296 h 6661267"/>
+              <a:gd name="csX4" fmla="*/ 200523 w 4606884"/>
+              <a:gd name="csY4" fmla="*/ 6485144 h 6661267"/>
+              <a:gd name="csX5" fmla="*/ 1814833 w 4606884"/>
+              <a:gd name="csY5" fmla="*/ 3572610 h 6661267"/>
+              <a:gd name="csX6" fmla="*/ 1391036 w 4606884"/>
+              <a:gd name="csY6" fmla="*/ 572824 h 6661267"/>
+              <a:gd name="csX0" fmla="*/ 1384424 w 4600272"/>
+              <a:gd name="csY0" fmla="*/ 572824 h 6661267"/>
+              <a:gd name="csX1" fmla="*/ 3054436 w 4600272"/>
+              <a:gd name="csY1" fmla="*/ 69885 h 6661267"/>
+              <a:gd name="csX2" fmla="*/ 4600272 w 4600272"/>
+              <a:gd name="csY2" fmla="*/ 1498514 h 6661267"/>
+              <a:gd name="csX3" fmla="*/ 3065726 w 4600272"/>
+              <a:gd name="csY3" fmla="*/ 5512296 h 6661267"/>
+              <a:gd name="csX4" fmla="*/ 193911 w 4600272"/>
+              <a:gd name="csY4" fmla="*/ 6485144 h 6661267"/>
+              <a:gd name="csX5" fmla="*/ 1808221 w 4600272"/>
+              <a:gd name="csY5" fmla="*/ 3572610 h 6661267"/>
+              <a:gd name="csX6" fmla="*/ 1384424 w 4600272"/>
+              <a:gd name="csY6" fmla="*/ 572824 h 6661267"/>
+              <a:gd name="csX0" fmla="*/ 1399338 w 4615186"/>
+              <a:gd name="csY0" fmla="*/ 565951 h 6654394"/>
+              <a:gd name="csX1" fmla="*/ 3069350 w 4615186"/>
+              <a:gd name="csY1" fmla="*/ 63012 h 6654394"/>
+              <a:gd name="csX2" fmla="*/ 4615186 w 4615186"/>
+              <a:gd name="csY2" fmla="*/ 1491641 h 6654394"/>
+              <a:gd name="csX3" fmla="*/ 3080640 w 4615186"/>
+              <a:gd name="csY3" fmla="*/ 5505423 h 6654394"/>
+              <a:gd name="csX4" fmla="*/ 208825 w 4615186"/>
+              <a:gd name="csY4" fmla="*/ 6478271 h 6654394"/>
+              <a:gd name="csX5" fmla="*/ 1687669 w 4615186"/>
+              <a:gd name="csY5" fmla="*/ 3317381 h 6654394"/>
+              <a:gd name="csX6" fmla="*/ 1399338 w 4615186"/>
+              <a:gd name="csY6" fmla="*/ 565951 h 6654394"/>
+              <a:gd name="csX0" fmla="*/ 1382281 w 4598129"/>
+              <a:gd name="csY0" fmla="*/ 565951 h 6654394"/>
+              <a:gd name="csX1" fmla="*/ 3052293 w 4598129"/>
+              <a:gd name="csY1" fmla="*/ 63012 h 6654394"/>
+              <a:gd name="csX2" fmla="*/ 4598129 w 4598129"/>
+              <a:gd name="csY2" fmla="*/ 1491641 h 6654394"/>
+              <a:gd name="csX3" fmla="*/ 3063583 w 4598129"/>
+              <a:gd name="csY3" fmla="*/ 5505423 h 6654394"/>
+              <a:gd name="csX4" fmla="*/ 191768 w 4598129"/>
+              <a:gd name="csY4" fmla="*/ 6478271 h 6654394"/>
+              <a:gd name="csX5" fmla="*/ 1670612 w 4598129"/>
+              <a:gd name="csY5" fmla="*/ 3317381 h 6654394"/>
+              <a:gd name="csX6" fmla="*/ 1382281 w 4598129"/>
+              <a:gd name="csY6" fmla="*/ 565951 h 6654394"/>
+              <a:gd name="csX0" fmla="*/ 1382281 w 4598129"/>
+              <a:gd name="csY0" fmla="*/ 573492 h 6661935"/>
+              <a:gd name="csX1" fmla="*/ 3052293 w 4598129"/>
+              <a:gd name="csY1" fmla="*/ 70553 h 6661935"/>
+              <a:gd name="csX2" fmla="*/ 4598129 w 4598129"/>
+              <a:gd name="csY2" fmla="*/ 1499182 h 6661935"/>
+              <a:gd name="csX3" fmla="*/ 3063583 w 4598129"/>
+              <a:gd name="csY3" fmla="*/ 5512964 h 6661935"/>
+              <a:gd name="csX4" fmla="*/ 191768 w 4598129"/>
+              <a:gd name="csY4" fmla="*/ 6485812 h 6661935"/>
+              <a:gd name="csX5" fmla="*/ 1670612 w 4598129"/>
+              <a:gd name="csY5" fmla="*/ 3324922 h 6661935"/>
+              <a:gd name="csX6" fmla="*/ 1382281 w 4598129"/>
+              <a:gd name="csY6" fmla="*/ 573492 h 6661935"/>
+              <a:gd name="csX0" fmla="*/ 1416148 w 4598129"/>
+              <a:gd name="csY0" fmla="*/ 688391 h 6630078"/>
+              <a:gd name="csX1" fmla="*/ 3052293 w 4598129"/>
+              <a:gd name="csY1" fmla="*/ 38696 h 6630078"/>
+              <a:gd name="csX2" fmla="*/ 4598129 w 4598129"/>
+              <a:gd name="csY2" fmla="*/ 1467325 h 6630078"/>
+              <a:gd name="csX3" fmla="*/ 3063583 w 4598129"/>
+              <a:gd name="csY3" fmla="*/ 5481107 h 6630078"/>
+              <a:gd name="csX4" fmla="*/ 191768 w 4598129"/>
+              <a:gd name="csY4" fmla="*/ 6453955 h 6630078"/>
+              <a:gd name="csX5" fmla="*/ 1670612 w 4598129"/>
+              <a:gd name="csY5" fmla="*/ 3293065 h 6630078"/>
+              <a:gd name="csX6" fmla="*/ 1416148 w 4598129"/>
+              <a:gd name="csY6" fmla="*/ 688391 h 6630078"/>
+              <a:gd name="csX0" fmla="*/ 1416148 w 4598129"/>
+              <a:gd name="csY0" fmla="*/ 687355 h 6629042"/>
+              <a:gd name="csX1" fmla="*/ 3052293 w 4598129"/>
+              <a:gd name="csY1" fmla="*/ 37660 h 6629042"/>
+              <a:gd name="csX2" fmla="*/ 4598129 w 4598129"/>
+              <a:gd name="csY2" fmla="*/ 1466289 h 6629042"/>
+              <a:gd name="csX3" fmla="*/ 3063583 w 4598129"/>
+              <a:gd name="csY3" fmla="*/ 5480071 h 6629042"/>
+              <a:gd name="csX4" fmla="*/ 191768 w 4598129"/>
+              <a:gd name="csY4" fmla="*/ 6452919 h 6629042"/>
+              <a:gd name="csX5" fmla="*/ 1670612 w 4598129"/>
+              <a:gd name="csY5" fmla="*/ 3292029 h 6629042"/>
+              <a:gd name="csX6" fmla="*/ 1416148 w 4598129"/>
+              <a:gd name="csY6" fmla="*/ 687355 h 6629042"/>
+              <a:gd name="csX0" fmla="*/ 1416148 w 4598129"/>
+              <a:gd name="csY0" fmla="*/ 690596 h 6632283"/>
+              <a:gd name="csX1" fmla="*/ 3052293 w 4598129"/>
+              <a:gd name="csY1" fmla="*/ 40901 h 6632283"/>
+              <a:gd name="csX2" fmla="*/ 4598129 w 4598129"/>
+              <a:gd name="csY2" fmla="*/ 1469530 h 6632283"/>
+              <a:gd name="csX3" fmla="*/ 3063583 w 4598129"/>
+              <a:gd name="csY3" fmla="*/ 5483312 h 6632283"/>
+              <a:gd name="csX4" fmla="*/ 191768 w 4598129"/>
+              <a:gd name="csY4" fmla="*/ 6456160 h 6632283"/>
+              <a:gd name="csX5" fmla="*/ 1670612 w 4598129"/>
+              <a:gd name="csY5" fmla="*/ 3295270 h 6632283"/>
+              <a:gd name="csX6" fmla="*/ 1416148 w 4598129"/>
+              <a:gd name="csY6" fmla="*/ 690596 h 6632283"/>
+              <a:gd name="csX0" fmla="*/ 1416148 w 4598129"/>
+              <a:gd name="csY0" fmla="*/ 684492 h 6626179"/>
+              <a:gd name="csX1" fmla="*/ 3108737 w 4598129"/>
+              <a:gd name="csY1" fmla="*/ 34797 h 6626179"/>
+              <a:gd name="csX2" fmla="*/ 4598129 w 4598129"/>
+              <a:gd name="csY2" fmla="*/ 1463426 h 6626179"/>
+              <a:gd name="csX3" fmla="*/ 3063583 w 4598129"/>
+              <a:gd name="csY3" fmla="*/ 5477208 h 6626179"/>
+              <a:gd name="csX4" fmla="*/ 191768 w 4598129"/>
+              <a:gd name="csY4" fmla="*/ 6450056 h 6626179"/>
+              <a:gd name="csX5" fmla="*/ 1670612 w 4598129"/>
+              <a:gd name="csY5" fmla="*/ 3289166 h 6626179"/>
+              <a:gd name="csX6" fmla="*/ 1416148 w 4598129"/>
+              <a:gd name="csY6" fmla="*/ 684492 h 6626179"/>
+              <a:gd name="csX0" fmla="*/ 1416148 w 4598129"/>
+              <a:gd name="csY0" fmla="*/ 658667 h 6600354"/>
+              <a:gd name="csX1" fmla="*/ 3108737 w 4598129"/>
+              <a:gd name="csY1" fmla="*/ 8972 h 6600354"/>
+              <a:gd name="csX2" fmla="*/ 4598129 w 4598129"/>
+              <a:gd name="csY2" fmla="*/ 1437601 h 6600354"/>
+              <a:gd name="csX3" fmla="*/ 3063583 w 4598129"/>
+              <a:gd name="csY3" fmla="*/ 5451383 h 6600354"/>
+              <a:gd name="csX4" fmla="*/ 191768 w 4598129"/>
+              <a:gd name="csY4" fmla="*/ 6424231 h 6600354"/>
+              <a:gd name="csX5" fmla="*/ 1670612 w 4598129"/>
+              <a:gd name="csY5" fmla="*/ 3263341 h 6600354"/>
+              <a:gd name="csX6" fmla="*/ 1416148 w 4598129"/>
+              <a:gd name="csY6" fmla="*/ 658667 h 6600354"/>
+              <a:gd name="csX0" fmla="*/ 1416148 w 4598129"/>
+              <a:gd name="csY0" fmla="*/ 591947 h 6646523"/>
+              <a:gd name="csX1" fmla="*/ 3108737 w 4598129"/>
+              <a:gd name="csY1" fmla="*/ 55141 h 6646523"/>
+              <a:gd name="csX2" fmla="*/ 4598129 w 4598129"/>
+              <a:gd name="csY2" fmla="*/ 1483770 h 6646523"/>
+              <a:gd name="csX3" fmla="*/ 3063583 w 4598129"/>
+              <a:gd name="csY3" fmla="*/ 5497552 h 6646523"/>
+              <a:gd name="csX4" fmla="*/ 191768 w 4598129"/>
+              <a:gd name="csY4" fmla="*/ 6470400 h 6646523"/>
+              <a:gd name="csX5" fmla="*/ 1670612 w 4598129"/>
+              <a:gd name="csY5" fmla="*/ 3309510 h 6646523"/>
+              <a:gd name="csX6" fmla="*/ 1416148 w 4598129"/>
+              <a:gd name="csY6" fmla="*/ 591947 h 6646523"/>
+              <a:gd name="csX0" fmla="*/ 1416148 w 4598129"/>
+              <a:gd name="csY0" fmla="*/ 591947 h 6646523"/>
+              <a:gd name="csX1" fmla="*/ 3108737 w 4598129"/>
+              <a:gd name="csY1" fmla="*/ 55141 h 6646523"/>
+              <a:gd name="csX2" fmla="*/ 4598129 w 4598129"/>
+              <a:gd name="csY2" fmla="*/ 1483770 h 6646523"/>
+              <a:gd name="csX3" fmla="*/ 3063583 w 4598129"/>
+              <a:gd name="csY3" fmla="*/ 5497552 h 6646523"/>
+              <a:gd name="csX4" fmla="*/ 191768 w 4598129"/>
+              <a:gd name="csY4" fmla="*/ 6470400 h 6646523"/>
+              <a:gd name="csX5" fmla="*/ 1670612 w 4598129"/>
+              <a:gd name="csY5" fmla="*/ 3309510 h 6646523"/>
+              <a:gd name="csX6" fmla="*/ 1416148 w 4598129"/>
+              <a:gd name="csY6" fmla="*/ 591947 h 6646523"/>
+              <a:gd name="csX0" fmla="*/ 1416148 w 4598129"/>
+              <a:gd name="csY0" fmla="*/ 534007 h 6588583"/>
+              <a:gd name="csX1" fmla="*/ 3266782 w 4598129"/>
+              <a:gd name="csY1" fmla="*/ 64934 h 6588583"/>
+              <a:gd name="csX2" fmla="*/ 4598129 w 4598129"/>
+              <a:gd name="csY2" fmla="*/ 1425830 h 6588583"/>
+              <a:gd name="csX3" fmla="*/ 3063583 w 4598129"/>
+              <a:gd name="csY3" fmla="*/ 5439612 h 6588583"/>
+              <a:gd name="csX4" fmla="*/ 191768 w 4598129"/>
+              <a:gd name="csY4" fmla="*/ 6412460 h 6588583"/>
+              <a:gd name="csX5" fmla="*/ 1670612 w 4598129"/>
+              <a:gd name="csY5" fmla="*/ 3251570 h 6588583"/>
+              <a:gd name="csX6" fmla="*/ 1416148 w 4598129"/>
+              <a:gd name="csY6" fmla="*/ 534007 h 6588583"/>
+              <a:gd name="csX0" fmla="*/ 1416148 w 4598129"/>
+              <a:gd name="csY0" fmla="*/ 534007 h 6588583"/>
+              <a:gd name="csX1" fmla="*/ 3266782 w 4598129"/>
+              <a:gd name="csY1" fmla="*/ 64934 h 6588583"/>
+              <a:gd name="csX2" fmla="*/ 4598129 w 4598129"/>
+              <a:gd name="csY2" fmla="*/ 1425830 h 6588583"/>
+              <a:gd name="csX3" fmla="*/ 3063583 w 4598129"/>
+              <a:gd name="csY3" fmla="*/ 5439612 h 6588583"/>
+              <a:gd name="csX4" fmla="*/ 191768 w 4598129"/>
+              <a:gd name="csY4" fmla="*/ 6412460 h 6588583"/>
+              <a:gd name="csX5" fmla="*/ 1670612 w 4598129"/>
+              <a:gd name="csY5" fmla="*/ 3251570 h 6588583"/>
+              <a:gd name="csX6" fmla="*/ 1416148 w 4598129"/>
+              <a:gd name="csY6" fmla="*/ 534007 h 6588583"/>
+              <a:gd name="csX0" fmla="*/ 1416148 w 4598129"/>
+              <a:gd name="csY0" fmla="*/ 601833 h 6656409"/>
+              <a:gd name="csX1" fmla="*/ 3368382 w 4598129"/>
+              <a:gd name="csY1" fmla="*/ 53738 h 6656409"/>
+              <a:gd name="csX2" fmla="*/ 4598129 w 4598129"/>
+              <a:gd name="csY2" fmla="*/ 1493656 h 6656409"/>
+              <a:gd name="csX3" fmla="*/ 3063583 w 4598129"/>
+              <a:gd name="csY3" fmla="*/ 5507438 h 6656409"/>
+              <a:gd name="csX4" fmla="*/ 191768 w 4598129"/>
+              <a:gd name="csY4" fmla="*/ 6480286 h 6656409"/>
+              <a:gd name="csX5" fmla="*/ 1670612 w 4598129"/>
+              <a:gd name="csY5" fmla="*/ 3319396 h 6656409"/>
+              <a:gd name="csX6" fmla="*/ 1416148 w 4598129"/>
+              <a:gd name="csY6" fmla="*/ 601833 h 6656409"/>
+              <a:gd name="csX0" fmla="*/ 1416148 w 4598129"/>
+              <a:gd name="csY0" fmla="*/ 578877 h 6633453"/>
+              <a:gd name="csX1" fmla="*/ 3368382 w 4598129"/>
+              <a:gd name="csY1" fmla="*/ 30782 h 6633453"/>
+              <a:gd name="csX2" fmla="*/ 4598129 w 4598129"/>
+              <a:gd name="csY2" fmla="*/ 1470700 h 6633453"/>
+              <a:gd name="csX3" fmla="*/ 3063583 w 4598129"/>
+              <a:gd name="csY3" fmla="*/ 5484482 h 6633453"/>
+              <a:gd name="csX4" fmla="*/ 191768 w 4598129"/>
+              <a:gd name="csY4" fmla="*/ 6457330 h 6633453"/>
+              <a:gd name="csX5" fmla="*/ 1670612 w 4598129"/>
+              <a:gd name="csY5" fmla="*/ 3296440 h 6633453"/>
+              <a:gd name="csX6" fmla="*/ 1416148 w 4598129"/>
+              <a:gd name="csY6" fmla="*/ 578877 h 6633453"/>
+              <a:gd name="csX0" fmla="*/ 1416148 w 4598129"/>
+              <a:gd name="csY0" fmla="*/ 558677 h 6613253"/>
+              <a:gd name="csX1" fmla="*/ 3390960 w 4598129"/>
+              <a:gd name="csY1" fmla="*/ 33160 h 6613253"/>
+              <a:gd name="csX2" fmla="*/ 4598129 w 4598129"/>
+              <a:gd name="csY2" fmla="*/ 1450500 h 6613253"/>
+              <a:gd name="csX3" fmla="*/ 3063583 w 4598129"/>
+              <a:gd name="csY3" fmla="*/ 5464282 h 6613253"/>
+              <a:gd name="csX4" fmla="*/ 191768 w 4598129"/>
+              <a:gd name="csY4" fmla="*/ 6437130 h 6613253"/>
+              <a:gd name="csX5" fmla="*/ 1670612 w 4598129"/>
+              <a:gd name="csY5" fmla="*/ 3276240 h 6613253"/>
+              <a:gd name="csX6" fmla="*/ 1416148 w 4598129"/>
+              <a:gd name="csY6" fmla="*/ 558677 h 6613253"/>
+              <a:gd name="csX0" fmla="*/ 1438726 w 4598129"/>
+              <a:gd name="csY0" fmla="*/ 515668 h 6660556"/>
+              <a:gd name="csX1" fmla="*/ 3390960 w 4598129"/>
+              <a:gd name="csY1" fmla="*/ 80463 h 6660556"/>
+              <a:gd name="csX2" fmla="*/ 4598129 w 4598129"/>
+              <a:gd name="csY2" fmla="*/ 1497803 h 6660556"/>
+              <a:gd name="csX3" fmla="*/ 3063583 w 4598129"/>
+              <a:gd name="csY3" fmla="*/ 5511585 h 6660556"/>
+              <a:gd name="csX4" fmla="*/ 191768 w 4598129"/>
+              <a:gd name="csY4" fmla="*/ 6484433 h 6660556"/>
+              <a:gd name="csX5" fmla="*/ 1670612 w 4598129"/>
+              <a:gd name="csY5" fmla="*/ 3323543 h 6660556"/>
+              <a:gd name="csX6" fmla="*/ 1438726 w 4598129"/>
+              <a:gd name="csY6" fmla="*/ 515668 h 6660556"/>
+              <a:gd name="csX0" fmla="*/ 1438726 w 4598129"/>
+              <a:gd name="csY0" fmla="*/ 494822 h 6639710"/>
+              <a:gd name="csX1" fmla="*/ 3390960 w 4598129"/>
+              <a:gd name="csY1" fmla="*/ 59617 h 6639710"/>
+              <a:gd name="csX2" fmla="*/ 4598129 w 4598129"/>
+              <a:gd name="csY2" fmla="*/ 1476957 h 6639710"/>
+              <a:gd name="csX3" fmla="*/ 3063583 w 4598129"/>
+              <a:gd name="csY3" fmla="*/ 5490739 h 6639710"/>
+              <a:gd name="csX4" fmla="*/ 191768 w 4598129"/>
+              <a:gd name="csY4" fmla="*/ 6463587 h 6639710"/>
+              <a:gd name="csX5" fmla="*/ 1670612 w 4598129"/>
+              <a:gd name="csY5" fmla="*/ 3302697 h 6639710"/>
+              <a:gd name="csX6" fmla="*/ 1438726 w 4598129"/>
+              <a:gd name="csY6" fmla="*/ 494822 h 6639710"/>
+              <a:gd name="csX0" fmla="*/ 1393570 w 4598129"/>
+              <a:gd name="csY0" fmla="*/ 468927 h 6647682"/>
+              <a:gd name="csX1" fmla="*/ 3390960 w 4598129"/>
+              <a:gd name="csY1" fmla="*/ 67589 h 6647682"/>
+              <a:gd name="csX2" fmla="*/ 4598129 w 4598129"/>
+              <a:gd name="csY2" fmla="*/ 1484929 h 6647682"/>
+              <a:gd name="csX3" fmla="*/ 3063583 w 4598129"/>
+              <a:gd name="csY3" fmla="*/ 5498711 h 6647682"/>
+              <a:gd name="csX4" fmla="*/ 191768 w 4598129"/>
+              <a:gd name="csY4" fmla="*/ 6471559 h 6647682"/>
+              <a:gd name="csX5" fmla="*/ 1670612 w 4598129"/>
+              <a:gd name="csY5" fmla="*/ 3310669 h 6647682"/>
+              <a:gd name="csX6" fmla="*/ 1393570 w 4598129"/>
+              <a:gd name="csY6" fmla="*/ 468927 h 6647682"/>
+              <a:gd name="csX0" fmla="*/ 1393570 w 4598129"/>
+              <a:gd name="csY0" fmla="*/ 492668 h 6671423"/>
+              <a:gd name="csX1" fmla="*/ 3424827 w 4598129"/>
+              <a:gd name="csY1" fmla="*/ 91330 h 6671423"/>
+              <a:gd name="csX2" fmla="*/ 4598129 w 4598129"/>
+              <a:gd name="csY2" fmla="*/ 1508670 h 6671423"/>
+              <a:gd name="csX3" fmla="*/ 3063583 w 4598129"/>
+              <a:gd name="csY3" fmla="*/ 5522452 h 6671423"/>
+              <a:gd name="csX4" fmla="*/ 191768 w 4598129"/>
+              <a:gd name="csY4" fmla="*/ 6495300 h 6671423"/>
+              <a:gd name="csX5" fmla="*/ 1670612 w 4598129"/>
+              <a:gd name="csY5" fmla="*/ 3334410 h 6671423"/>
+              <a:gd name="csX6" fmla="*/ 1393570 w 4598129"/>
+              <a:gd name="csY6" fmla="*/ 492668 h 6671423"/>
+              <a:gd name="csX0" fmla="*/ 1393570 w 4598129"/>
+              <a:gd name="csY0" fmla="*/ 467585 h 6646340"/>
+              <a:gd name="csX1" fmla="*/ 3424827 w 4598129"/>
+              <a:gd name="csY1" fmla="*/ 66247 h 6646340"/>
+              <a:gd name="csX2" fmla="*/ 4598129 w 4598129"/>
+              <a:gd name="csY2" fmla="*/ 1483587 h 6646340"/>
+              <a:gd name="csX3" fmla="*/ 3063583 w 4598129"/>
+              <a:gd name="csY3" fmla="*/ 5497369 h 6646340"/>
+              <a:gd name="csX4" fmla="*/ 191768 w 4598129"/>
+              <a:gd name="csY4" fmla="*/ 6470217 h 6646340"/>
+              <a:gd name="csX5" fmla="*/ 1670612 w 4598129"/>
+              <a:gd name="csY5" fmla="*/ 3309327 h 6646340"/>
+              <a:gd name="csX6" fmla="*/ 1393570 w 4598129"/>
+              <a:gd name="csY6" fmla="*/ 467585 h 6646340"/>
+              <a:gd name="csX0" fmla="*/ 1393570 w 4598129"/>
+              <a:gd name="csY0" fmla="*/ 467585 h 6646340"/>
+              <a:gd name="csX1" fmla="*/ 3424827 w 4598129"/>
+              <a:gd name="csY1" fmla="*/ 66247 h 6646340"/>
+              <a:gd name="csX2" fmla="*/ 4598129 w 4598129"/>
+              <a:gd name="csY2" fmla="*/ 1483587 h 6646340"/>
+              <a:gd name="csX3" fmla="*/ 3063583 w 4598129"/>
+              <a:gd name="csY3" fmla="*/ 5497369 h 6646340"/>
+              <a:gd name="csX4" fmla="*/ 191768 w 4598129"/>
+              <a:gd name="csY4" fmla="*/ 6470217 h 6646340"/>
+              <a:gd name="csX5" fmla="*/ 1670612 w 4598129"/>
+              <a:gd name="csY5" fmla="*/ 3309327 h 6646340"/>
+              <a:gd name="csX6" fmla="*/ 1393570 w 4598129"/>
+              <a:gd name="csY6" fmla="*/ 467585 h 6646340"/>
+              <a:gd name="csX0" fmla="*/ 1393570 w 4598129"/>
+              <a:gd name="csY0" fmla="*/ 467585 h 6646340"/>
+              <a:gd name="csX1" fmla="*/ 3797360 w 4598129"/>
+              <a:gd name="csY1" fmla="*/ 66247 h 6646340"/>
+              <a:gd name="csX2" fmla="*/ 4598129 w 4598129"/>
+              <a:gd name="csY2" fmla="*/ 1483587 h 6646340"/>
+              <a:gd name="csX3" fmla="*/ 3063583 w 4598129"/>
+              <a:gd name="csY3" fmla="*/ 5497369 h 6646340"/>
+              <a:gd name="csX4" fmla="*/ 191768 w 4598129"/>
+              <a:gd name="csY4" fmla="*/ 6470217 h 6646340"/>
+              <a:gd name="csX5" fmla="*/ 1670612 w 4598129"/>
+              <a:gd name="csY5" fmla="*/ 3309327 h 6646340"/>
+              <a:gd name="csX6" fmla="*/ 1393570 w 4598129"/>
+              <a:gd name="csY6" fmla="*/ 467585 h 6646340"/>
+              <a:gd name="csX0" fmla="*/ 1393570 w 4598129"/>
+              <a:gd name="csY0" fmla="*/ 487651 h 6666406"/>
+              <a:gd name="csX1" fmla="*/ 3797360 w 4598129"/>
+              <a:gd name="csY1" fmla="*/ 86313 h 6666406"/>
+              <a:gd name="csX2" fmla="*/ 4598129 w 4598129"/>
+              <a:gd name="csY2" fmla="*/ 1503653 h 6666406"/>
+              <a:gd name="csX3" fmla="*/ 3063583 w 4598129"/>
+              <a:gd name="csY3" fmla="*/ 5517435 h 6666406"/>
+              <a:gd name="csX4" fmla="*/ 191768 w 4598129"/>
+              <a:gd name="csY4" fmla="*/ 6490283 h 6666406"/>
+              <a:gd name="csX5" fmla="*/ 1670612 w 4598129"/>
+              <a:gd name="csY5" fmla="*/ 3329393 h 6666406"/>
+              <a:gd name="csX6" fmla="*/ 1393570 w 4598129"/>
+              <a:gd name="csY6" fmla="*/ 487651 h 6666406"/>
+              <a:gd name="csX0" fmla="*/ 1393570 w 4598129"/>
+              <a:gd name="csY0" fmla="*/ 547856 h 6726611"/>
+              <a:gd name="csX1" fmla="*/ 3797360 w 4598129"/>
+              <a:gd name="csY1" fmla="*/ 146518 h 6726611"/>
+              <a:gd name="csX2" fmla="*/ 4598129 w 4598129"/>
+              <a:gd name="csY2" fmla="*/ 1563858 h 6726611"/>
+              <a:gd name="csX3" fmla="*/ 3063583 w 4598129"/>
+              <a:gd name="csY3" fmla="*/ 5577640 h 6726611"/>
+              <a:gd name="csX4" fmla="*/ 191768 w 4598129"/>
+              <a:gd name="csY4" fmla="*/ 6550488 h 6726611"/>
+              <a:gd name="csX5" fmla="*/ 1670612 w 4598129"/>
+              <a:gd name="csY5" fmla="*/ 3389598 h 6726611"/>
+              <a:gd name="csX6" fmla="*/ 1393570 w 4598129"/>
+              <a:gd name="csY6" fmla="*/ 547856 h 6726611"/>
+              <a:gd name="csX0" fmla="*/ 1393570 w 4599402"/>
+              <a:gd name="csY0" fmla="*/ 547856 h 6726611"/>
+              <a:gd name="csX1" fmla="*/ 3797360 w 4599402"/>
+              <a:gd name="csY1" fmla="*/ 146518 h 6726611"/>
+              <a:gd name="csX2" fmla="*/ 4598129 w 4599402"/>
+              <a:gd name="csY2" fmla="*/ 1563858 h 6726611"/>
+              <a:gd name="csX3" fmla="*/ 3063583 w 4599402"/>
+              <a:gd name="csY3" fmla="*/ 5577640 h 6726611"/>
+              <a:gd name="csX4" fmla="*/ 191768 w 4599402"/>
+              <a:gd name="csY4" fmla="*/ 6550488 h 6726611"/>
+              <a:gd name="csX5" fmla="*/ 1670612 w 4599402"/>
+              <a:gd name="csY5" fmla="*/ 3389598 h 6726611"/>
+              <a:gd name="csX6" fmla="*/ 1393570 w 4599402"/>
+              <a:gd name="csY6" fmla="*/ 547856 h 6726611"/>
+              <a:gd name="csX0" fmla="*/ 1393570 w 4603890"/>
+              <a:gd name="csY0" fmla="*/ 488366 h 6667121"/>
+              <a:gd name="csX1" fmla="*/ 4057005 w 4603890"/>
+              <a:gd name="csY1" fmla="*/ 166050 h 6667121"/>
+              <a:gd name="csX2" fmla="*/ 4598129 w 4603890"/>
+              <a:gd name="csY2" fmla="*/ 1504368 h 6667121"/>
+              <a:gd name="csX3" fmla="*/ 3063583 w 4603890"/>
+              <a:gd name="csY3" fmla="*/ 5518150 h 6667121"/>
+              <a:gd name="csX4" fmla="*/ 191768 w 4603890"/>
+              <a:gd name="csY4" fmla="*/ 6490998 h 6667121"/>
+              <a:gd name="csX5" fmla="*/ 1670612 w 4603890"/>
+              <a:gd name="csY5" fmla="*/ 3330108 h 6667121"/>
+              <a:gd name="csX6" fmla="*/ 1393570 w 4603890"/>
+              <a:gd name="csY6" fmla="*/ 488366 h 6667121"/>
+              <a:gd name="csX0" fmla="*/ 1393570 w 4615934"/>
+              <a:gd name="csY0" fmla="*/ 458638 h 6637393"/>
+              <a:gd name="csX1" fmla="*/ 4057005 w 4615934"/>
+              <a:gd name="csY1" fmla="*/ 136322 h 6637393"/>
+              <a:gd name="csX2" fmla="*/ 4598129 w 4615934"/>
+              <a:gd name="csY2" fmla="*/ 1474640 h 6637393"/>
+              <a:gd name="csX3" fmla="*/ 3063583 w 4615934"/>
+              <a:gd name="csY3" fmla="*/ 5488422 h 6637393"/>
+              <a:gd name="csX4" fmla="*/ 191768 w 4615934"/>
+              <a:gd name="csY4" fmla="*/ 6461270 h 6637393"/>
+              <a:gd name="csX5" fmla="*/ 1670612 w 4615934"/>
+              <a:gd name="csY5" fmla="*/ 3300380 h 6637393"/>
+              <a:gd name="csX6" fmla="*/ 1393570 w 4615934"/>
+              <a:gd name="csY6" fmla="*/ 458638 h 6637393"/>
+              <a:gd name="csX0" fmla="*/ 1630636 w 4601822"/>
+              <a:gd name="csY0" fmla="*/ 321391 h 6737213"/>
+              <a:gd name="csX1" fmla="*/ 4057005 w 4601822"/>
+              <a:gd name="csY1" fmla="*/ 236142 h 6737213"/>
+              <a:gd name="csX2" fmla="*/ 4598129 w 4601822"/>
+              <a:gd name="csY2" fmla="*/ 1574460 h 6737213"/>
+              <a:gd name="csX3" fmla="*/ 3063583 w 4601822"/>
+              <a:gd name="csY3" fmla="*/ 5588242 h 6737213"/>
+              <a:gd name="csX4" fmla="*/ 191768 w 4601822"/>
+              <a:gd name="csY4" fmla="*/ 6561090 h 6737213"/>
+              <a:gd name="csX5" fmla="*/ 1670612 w 4601822"/>
+              <a:gd name="csY5" fmla="*/ 3400200 h 6737213"/>
+              <a:gd name="csX6" fmla="*/ 1630636 w 4601822"/>
+              <a:gd name="csY6" fmla="*/ 321391 h 6737213"/>
+              <a:gd name="csX0" fmla="*/ 1499940 w 4471126"/>
+              <a:gd name="csY0" fmla="*/ 321391 h 6859664"/>
+              <a:gd name="csX1" fmla="*/ 3926309 w 4471126"/>
+              <a:gd name="csY1" fmla="*/ 236142 h 6859664"/>
+              <a:gd name="csX2" fmla="*/ 4467433 w 4471126"/>
+              <a:gd name="csY2" fmla="*/ 1574460 h 6859664"/>
+              <a:gd name="csX3" fmla="*/ 2932887 w 4471126"/>
+              <a:gd name="csY3" fmla="*/ 5588242 h 6859664"/>
+              <a:gd name="csX4" fmla="*/ 207827 w 4471126"/>
+              <a:gd name="csY4" fmla="*/ 6685268 h 6859664"/>
+              <a:gd name="csX5" fmla="*/ 1539916 w 4471126"/>
+              <a:gd name="csY5" fmla="*/ 3400200 h 6859664"/>
+              <a:gd name="csX6" fmla="*/ 1499940 w 4471126"/>
+              <a:gd name="csY6" fmla="*/ 321391 h 6859664"/>
+              <a:gd name="csX0" fmla="*/ 1453694 w 4424880"/>
+              <a:gd name="csY0" fmla="*/ 330618 h 6868891"/>
+              <a:gd name="csX1" fmla="*/ 3880063 w 4424880"/>
+              <a:gd name="csY1" fmla="*/ 245369 h 6868891"/>
+              <a:gd name="csX2" fmla="*/ 4421187 w 4424880"/>
+              <a:gd name="csY2" fmla="*/ 1583687 h 6868891"/>
+              <a:gd name="csX3" fmla="*/ 2886641 w 4424880"/>
+              <a:gd name="csY3" fmla="*/ 5597469 h 6868891"/>
+              <a:gd name="csX4" fmla="*/ 161581 w 4424880"/>
+              <a:gd name="csY4" fmla="*/ 6694495 h 6868891"/>
+              <a:gd name="csX5" fmla="*/ 1990381 w 4424880"/>
+              <a:gd name="csY5" fmla="*/ 3544894 h 6868891"/>
+              <a:gd name="csX6" fmla="*/ 1453694 w 4424880"/>
+              <a:gd name="csY6" fmla="*/ 330618 h 6868891"/>
+              <a:gd name="csX0" fmla="*/ 1482302 w 4453488"/>
+              <a:gd name="csY0" fmla="*/ 330618 h 6868891"/>
+              <a:gd name="csX1" fmla="*/ 3908671 w 4453488"/>
+              <a:gd name="csY1" fmla="*/ 245369 h 6868891"/>
+              <a:gd name="csX2" fmla="*/ 4449795 w 4453488"/>
+              <a:gd name="csY2" fmla="*/ 1583687 h 6868891"/>
+              <a:gd name="csX3" fmla="*/ 2915249 w 4453488"/>
+              <a:gd name="csY3" fmla="*/ 5597469 h 6868891"/>
+              <a:gd name="csX4" fmla="*/ 190189 w 4453488"/>
+              <a:gd name="csY4" fmla="*/ 6694495 h 6868891"/>
+              <a:gd name="csX5" fmla="*/ 2018989 w 4453488"/>
+              <a:gd name="csY5" fmla="*/ 3544894 h 6868891"/>
+              <a:gd name="csX6" fmla="*/ 1482302 w 4453488"/>
+              <a:gd name="csY6" fmla="*/ 330618 h 6868891"/>
+              <a:gd name="csX0" fmla="*/ 1482302 w 4453488"/>
+              <a:gd name="csY0" fmla="*/ 330618 h 6868891"/>
+              <a:gd name="csX1" fmla="*/ 3908671 w 4453488"/>
+              <a:gd name="csY1" fmla="*/ 245369 h 6868891"/>
+              <a:gd name="csX2" fmla="*/ 4449795 w 4453488"/>
+              <a:gd name="csY2" fmla="*/ 1583687 h 6868891"/>
+              <a:gd name="csX3" fmla="*/ 2915249 w 4453488"/>
+              <a:gd name="csY3" fmla="*/ 5597469 h 6868891"/>
+              <a:gd name="csX4" fmla="*/ 190189 w 4453488"/>
+              <a:gd name="csY4" fmla="*/ 6694495 h 6868891"/>
+              <a:gd name="csX5" fmla="*/ 2018989 w 4453488"/>
+              <a:gd name="csY5" fmla="*/ 3544894 h 6868891"/>
+              <a:gd name="csX6" fmla="*/ 1482302 w 4453488"/>
+              <a:gd name="csY6" fmla="*/ 330618 h 6868891"/>
+              <a:gd name="csX0" fmla="*/ 1459724 w 4453599"/>
+              <a:gd name="csY0" fmla="*/ 433979 h 6746474"/>
+              <a:gd name="csX1" fmla="*/ 3908671 w 4453599"/>
+              <a:gd name="csY1" fmla="*/ 122952 h 6746474"/>
+              <a:gd name="csX2" fmla="*/ 4449795 w 4453599"/>
+              <a:gd name="csY2" fmla="*/ 1461270 h 6746474"/>
+              <a:gd name="csX3" fmla="*/ 2915249 w 4453599"/>
+              <a:gd name="csY3" fmla="*/ 5475052 h 6746474"/>
+              <a:gd name="csX4" fmla="*/ 190189 w 4453599"/>
+              <a:gd name="csY4" fmla="*/ 6572078 h 6746474"/>
+              <a:gd name="csX5" fmla="*/ 2018989 w 4453599"/>
+              <a:gd name="csY5" fmla="*/ 3422477 h 6746474"/>
+              <a:gd name="csX6" fmla="*/ 1459724 w 4453599"/>
+              <a:gd name="csY6" fmla="*/ 433979 h 6746474"/>
+              <a:gd name="csX0" fmla="*/ 1459724 w 4453599"/>
+              <a:gd name="csY0" fmla="*/ 368091 h 6680586"/>
+              <a:gd name="csX1" fmla="*/ 3908671 w 4453599"/>
+              <a:gd name="csY1" fmla="*/ 57064 h 6680586"/>
+              <a:gd name="csX2" fmla="*/ 4449795 w 4453599"/>
+              <a:gd name="csY2" fmla="*/ 1395382 h 6680586"/>
+              <a:gd name="csX3" fmla="*/ 2915249 w 4453599"/>
+              <a:gd name="csY3" fmla="*/ 5409164 h 6680586"/>
+              <a:gd name="csX4" fmla="*/ 190189 w 4453599"/>
+              <a:gd name="csY4" fmla="*/ 6506190 h 6680586"/>
+              <a:gd name="csX5" fmla="*/ 2018989 w 4453599"/>
+              <a:gd name="csY5" fmla="*/ 3356589 h 6680586"/>
+              <a:gd name="csX6" fmla="*/ 1544854 w 4453599"/>
+              <a:gd name="csY6" fmla="*/ 1471347 h 6680586"/>
+              <a:gd name="csX7" fmla="*/ 1459724 w 4453599"/>
+              <a:gd name="csY7" fmla="*/ 368091 h 6680586"/>
+              <a:gd name="csX0" fmla="*/ 1459724 w 4453599"/>
+              <a:gd name="csY0" fmla="*/ 368091 h 6680586"/>
+              <a:gd name="csX1" fmla="*/ 3908671 w 4453599"/>
+              <a:gd name="csY1" fmla="*/ 57064 h 6680586"/>
+              <a:gd name="csX2" fmla="*/ 4449795 w 4453599"/>
+              <a:gd name="csY2" fmla="*/ 1395382 h 6680586"/>
+              <a:gd name="csX3" fmla="*/ 2915249 w 4453599"/>
+              <a:gd name="csY3" fmla="*/ 5409164 h 6680586"/>
+              <a:gd name="csX4" fmla="*/ 190189 w 4453599"/>
+              <a:gd name="csY4" fmla="*/ 6506190 h 6680586"/>
+              <a:gd name="csX5" fmla="*/ 2018989 w 4453599"/>
+              <a:gd name="csY5" fmla="*/ 3356589 h 6680586"/>
+              <a:gd name="csX6" fmla="*/ 1544854 w 4453599"/>
+              <a:gd name="csY6" fmla="*/ 1471347 h 6680586"/>
+              <a:gd name="csX7" fmla="*/ 1459724 w 4453599"/>
+              <a:gd name="csY7" fmla="*/ 368091 h 6680586"/>
+              <a:gd name="csX0" fmla="*/ 1459724 w 4453599"/>
+              <a:gd name="csY0" fmla="*/ 368091 h 6680586"/>
+              <a:gd name="csX1" fmla="*/ 3908671 w 4453599"/>
+              <a:gd name="csY1" fmla="*/ 57064 h 6680586"/>
+              <a:gd name="csX2" fmla="*/ 4449795 w 4453599"/>
+              <a:gd name="csY2" fmla="*/ 1395382 h 6680586"/>
+              <a:gd name="csX3" fmla="*/ 2915249 w 4453599"/>
+              <a:gd name="csY3" fmla="*/ 5409164 h 6680586"/>
+              <a:gd name="csX4" fmla="*/ 190189 w 4453599"/>
+              <a:gd name="csY4" fmla="*/ 6506190 h 6680586"/>
+              <a:gd name="csX5" fmla="*/ 2018989 w 4453599"/>
+              <a:gd name="csY5" fmla="*/ 3356589 h 6680586"/>
+              <a:gd name="csX6" fmla="*/ 1544854 w 4453599"/>
+              <a:gd name="csY6" fmla="*/ 1471347 h 6680586"/>
+              <a:gd name="csX7" fmla="*/ 1459724 w 4453599"/>
+              <a:gd name="csY7" fmla="*/ 368091 h 6680586"/>
+              <a:gd name="csX0" fmla="*/ 1459724 w 4453599"/>
+              <a:gd name="csY0" fmla="*/ 383247 h 6695742"/>
+              <a:gd name="csX1" fmla="*/ 3908671 w 4453599"/>
+              <a:gd name="csY1" fmla="*/ 72220 h 6695742"/>
+              <a:gd name="csX2" fmla="*/ 4449795 w 4453599"/>
+              <a:gd name="csY2" fmla="*/ 1410538 h 6695742"/>
+              <a:gd name="csX3" fmla="*/ 2915249 w 4453599"/>
+              <a:gd name="csY3" fmla="*/ 5424320 h 6695742"/>
+              <a:gd name="csX4" fmla="*/ 190189 w 4453599"/>
+              <a:gd name="csY4" fmla="*/ 6521346 h 6695742"/>
+              <a:gd name="csX5" fmla="*/ 2018989 w 4453599"/>
+              <a:gd name="csY5" fmla="*/ 3371745 h 6695742"/>
+              <a:gd name="csX6" fmla="*/ 1544854 w 4453599"/>
+              <a:gd name="csY6" fmla="*/ 1486503 h 6695742"/>
+              <a:gd name="csX7" fmla="*/ 1459724 w 4453599"/>
+              <a:gd name="csY7" fmla="*/ 383247 h 6695742"/>
+              <a:gd name="csX0" fmla="*/ 1459724 w 4160496"/>
+              <a:gd name="csY0" fmla="*/ 403883 h 6710874"/>
+              <a:gd name="csX1" fmla="*/ 3908671 w 4160496"/>
+              <a:gd name="csY1" fmla="*/ 92856 h 6710874"/>
+              <a:gd name="csX2" fmla="*/ 4065972 w 4160496"/>
+              <a:gd name="csY2" fmla="*/ 1713396 h 6710874"/>
+              <a:gd name="csX3" fmla="*/ 2915249 w 4160496"/>
+              <a:gd name="csY3" fmla="*/ 5444956 h 6710874"/>
+              <a:gd name="csX4" fmla="*/ 190189 w 4160496"/>
+              <a:gd name="csY4" fmla="*/ 6541982 h 6710874"/>
+              <a:gd name="csX5" fmla="*/ 2018989 w 4160496"/>
+              <a:gd name="csY5" fmla="*/ 3392381 h 6710874"/>
+              <a:gd name="csX6" fmla="*/ 1544854 w 4160496"/>
+              <a:gd name="csY6" fmla="*/ 1507139 h 6710874"/>
+              <a:gd name="csX7" fmla="*/ 1459724 w 4160496"/>
+              <a:gd name="csY7" fmla="*/ 403883 h 6710874"/>
+              <a:gd name="csX0" fmla="*/ 1459724 w 4133482"/>
+              <a:gd name="csY0" fmla="*/ 518594 h 6825585"/>
+              <a:gd name="csX1" fmla="*/ 3908671 w 4133482"/>
+              <a:gd name="csY1" fmla="*/ 207567 h 6825585"/>
+              <a:gd name="csX2" fmla="*/ 4065972 w 4133482"/>
+              <a:gd name="csY2" fmla="*/ 1828107 h 6825585"/>
+              <a:gd name="csX3" fmla="*/ 2915249 w 4133482"/>
+              <a:gd name="csY3" fmla="*/ 5559667 h 6825585"/>
+              <a:gd name="csX4" fmla="*/ 190189 w 4133482"/>
+              <a:gd name="csY4" fmla="*/ 6656693 h 6825585"/>
+              <a:gd name="csX5" fmla="*/ 2018989 w 4133482"/>
+              <a:gd name="csY5" fmla="*/ 3507092 h 6825585"/>
+              <a:gd name="csX6" fmla="*/ 1544854 w 4133482"/>
+              <a:gd name="csY6" fmla="*/ 1621850 h 6825585"/>
+              <a:gd name="csX7" fmla="*/ 1459724 w 4133482"/>
+              <a:gd name="csY7" fmla="*/ 518594 h 6825585"/>
+              <a:gd name="csX0" fmla="*/ 1459724 w 4210480"/>
+              <a:gd name="csY0" fmla="*/ 407707 h 6714698"/>
+              <a:gd name="csX1" fmla="*/ 4032849 w 4210480"/>
+              <a:gd name="csY1" fmla="*/ 209569 h 6714698"/>
+              <a:gd name="csX2" fmla="*/ 4065972 w 4210480"/>
+              <a:gd name="csY2" fmla="*/ 1717220 h 6714698"/>
+              <a:gd name="csX3" fmla="*/ 2915249 w 4210480"/>
+              <a:gd name="csY3" fmla="*/ 5448780 h 6714698"/>
+              <a:gd name="csX4" fmla="*/ 190189 w 4210480"/>
+              <a:gd name="csY4" fmla="*/ 6545806 h 6714698"/>
+              <a:gd name="csX5" fmla="*/ 2018989 w 4210480"/>
+              <a:gd name="csY5" fmla="*/ 3396205 h 6714698"/>
+              <a:gd name="csX6" fmla="*/ 1544854 w 4210480"/>
+              <a:gd name="csY6" fmla="*/ 1510963 h 6714698"/>
+              <a:gd name="csX7" fmla="*/ 1459724 w 4210480"/>
+              <a:gd name="csY7" fmla="*/ 407707 h 6714698"/>
+              <a:gd name="csX0" fmla="*/ 1459724 w 4150964"/>
+              <a:gd name="csY0" fmla="*/ 442784 h 6749775"/>
+              <a:gd name="csX1" fmla="*/ 4032849 w 4150964"/>
+              <a:gd name="csY1" fmla="*/ 244646 h 6749775"/>
+              <a:gd name="csX2" fmla="*/ 4065972 w 4150964"/>
+              <a:gd name="csY2" fmla="*/ 1752297 h 6749775"/>
+              <a:gd name="csX3" fmla="*/ 2915249 w 4150964"/>
+              <a:gd name="csY3" fmla="*/ 5483857 h 6749775"/>
+              <a:gd name="csX4" fmla="*/ 190189 w 4150964"/>
+              <a:gd name="csY4" fmla="*/ 6580883 h 6749775"/>
+              <a:gd name="csX5" fmla="*/ 2018989 w 4150964"/>
+              <a:gd name="csY5" fmla="*/ 3431282 h 6749775"/>
+              <a:gd name="csX6" fmla="*/ 1544854 w 4150964"/>
+              <a:gd name="csY6" fmla="*/ 1546040 h 6749775"/>
+              <a:gd name="csX7" fmla="*/ 1459724 w 4150964"/>
+              <a:gd name="csY7" fmla="*/ 442784 h 6749775"/>
+              <a:gd name="csX0" fmla="*/ 1459724 w 4262613"/>
+              <a:gd name="csY0" fmla="*/ 296778 h 6602702"/>
+              <a:gd name="csX1" fmla="*/ 4032849 w 4262613"/>
+              <a:gd name="csY1" fmla="*/ 98640 h 6602702"/>
+              <a:gd name="csX2" fmla="*/ 4122417 w 4262613"/>
+              <a:gd name="csY2" fmla="*/ 1662736 h 6602702"/>
+              <a:gd name="csX3" fmla="*/ 2915249 w 4262613"/>
+              <a:gd name="csY3" fmla="*/ 5337851 h 6602702"/>
+              <a:gd name="csX4" fmla="*/ 190189 w 4262613"/>
+              <a:gd name="csY4" fmla="*/ 6434877 h 6602702"/>
+              <a:gd name="csX5" fmla="*/ 2018989 w 4262613"/>
+              <a:gd name="csY5" fmla="*/ 3285276 h 6602702"/>
+              <a:gd name="csX6" fmla="*/ 1544854 w 4262613"/>
+              <a:gd name="csY6" fmla="*/ 1400034 h 6602702"/>
+              <a:gd name="csX7" fmla="*/ 1459724 w 4262613"/>
+              <a:gd name="csY7" fmla="*/ 296778 h 6602702"/>
+              <a:gd name="csX0" fmla="*/ 1459724 w 4262613"/>
+              <a:gd name="csY0" fmla="*/ 296778 h 6602702"/>
+              <a:gd name="csX1" fmla="*/ 4032849 w 4262613"/>
+              <a:gd name="csY1" fmla="*/ 98640 h 6602702"/>
+              <a:gd name="csX2" fmla="*/ 4122417 w 4262613"/>
+              <a:gd name="csY2" fmla="*/ 1662736 h 6602702"/>
+              <a:gd name="csX3" fmla="*/ 2915249 w 4262613"/>
+              <a:gd name="csY3" fmla="*/ 5337851 h 6602702"/>
+              <a:gd name="csX4" fmla="*/ 190189 w 4262613"/>
+              <a:gd name="csY4" fmla="*/ 6434877 h 6602702"/>
+              <a:gd name="csX5" fmla="*/ 2018989 w 4262613"/>
+              <a:gd name="csY5" fmla="*/ 3285276 h 6602702"/>
+              <a:gd name="csX6" fmla="*/ 1544854 w 4262613"/>
+              <a:gd name="csY6" fmla="*/ 1400034 h 6602702"/>
+              <a:gd name="csX7" fmla="*/ 1459724 w 4262613"/>
+              <a:gd name="csY7" fmla="*/ 296778 h 6602702"/>
+              <a:gd name="csX0" fmla="*/ 1459724 w 4262613"/>
+              <a:gd name="csY0" fmla="*/ 296778 h 6613004"/>
+              <a:gd name="csX1" fmla="*/ 4032849 w 4262613"/>
+              <a:gd name="csY1" fmla="*/ 98640 h 6613004"/>
+              <a:gd name="csX2" fmla="*/ 4122417 w 4262613"/>
+              <a:gd name="csY2" fmla="*/ 1662736 h 6613004"/>
+              <a:gd name="csX3" fmla="*/ 2441116 w 4262613"/>
+              <a:gd name="csY3" fmla="*/ 5416873 h 6613004"/>
+              <a:gd name="csX4" fmla="*/ 190189 w 4262613"/>
+              <a:gd name="csY4" fmla="*/ 6434877 h 6613004"/>
+              <a:gd name="csX5" fmla="*/ 2018989 w 4262613"/>
+              <a:gd name="csY5" fmla="*/ 3285276 h 6613004"/>
+              <a:gd name="csX6" fmla="*/ 1544854 w 4262613"/>
+              <a:gd name="csY6" fmla="*/ 1400034 h 6613004"/>
+              <a:gd name="csX7" fmla="*/ 1459724 w 4262613"/>
+              <a:gd name="csY7" fmla="*/ 296778 h 6613004"/>
+              <a:gd name="csX0" fmla="*/ 1507371 w 4310260"/>
+              <a:gd name="csY0" fmla="*/ 296778 h 6613004"/>
+              <a:gd name="csX1" fmla="*/ 4080496 w 4310260"/>
+              <a:gd name="csY1" fmla="*/ 98640 h 6613004"/>
+              <a:gd name="csX2" fmla="*/ 4170064 w 4310260"/>
+              <a:gd name="csY2" fmla="*/ 1662736 h 6613004"/>
+              <a:gd name="csX3" fmla="*/ 2488763 w 4310260"/>
+              <a:gd name="csY3" fmla="*/ 5416873 h 6613004"/>
+              <a:gd name="csX4" fmla="*/ 237836 w 4310260"/>
+              <a:gd name="csY4" fmla="*/ 6434877 h 6613004"/>
+              <a:gd name="csX5" fmla="*/ 1671525 w 4310260"/>
+              <a:gd name="csY5" fmla="*/ 3612654 h 6613004"/>
+              <a:gd name="csX6" fmla="*/ 1592501 w 4310260"/>
+              <a:gd name="csY6" fmla="*/ 1400034 h 6613004"/>
+              <a:gd name="csX7" fmla="*/ 1507371 w 4310260"/>
+              <a:gd name="csY7" fmla="*/ 296778 h 6613004"/>
+              <a:gd name="csX0" fmla="*/ 1486388 w 4289277"/>
+              <a:gd name="csY0" fmla="*/ 296778 h 6613004"/>
+              <a:gd name="csX1" fmla="*/ 4059513 w 4289277"/>
+              <a:gd name="csY1" fmla="*/ 98640 h 6613004"/>
+              <a:gd name="csX2" fmla="*/ 4149081 w 4289277"/>
+              <a:gd name="csY2" fmla="*/ 1662736 h 6613004"/>
+              <a:gd name="csX3" fmla="*/ 2467780 w 4289277"/>
+              <a:gd name="csY3" fmla="*/ 5416873 h 6613004"/>
+              <a:gd name="csX4" fmla="*/ 216853 w 4289277"/>
+              <a:gd name="csY4" fmla="*/ 6434877 h 6613004"/>
+              <a:gd name="csX5" fmla="*/ 1650542 w 4289277"/>
+              <a:gd name="csY5" fmla="*/ 3612654 h 6613004"/>
+              <a:gd name="csX6" fmla="*/ 1571518 w 4289277"/>
+              <a:gd name="csY6" fmla="*/ 1400034 h 6613004"/>
+              <a:gd name="csX7" fmla="*/ 1486388 w 4289277"/>
+              <a:gd name="csY7" fmla="*/ 296778 h 6613004"/>
+              <a:gd name="csX0" fmla="*/ 1486388 w 4190291"/>
+              <a:gd name="csY0" fmla="*/ 271841 h 6588067"/>
+              <a:gd name="csX1" fmla="*/ 4059513 w 4190291"/>
+              <a:gd name="csY1" fmla="*/ 73703 h 6588067"/>
+              <a:gd name="csX2" fmla="*/ 4149081 w 4190291"/>
+              <a:gd name="csY2" fmla="*/ 1637799 h 6588067"/>
+              <a:gd name="csX3" fmla="*/ 2467780 w 4190291"/>
+              <a:gd name="csY3" fmla="*/ 5391936 h 6588067"/>
+              <a:gd name="csX4" fmla="*/ 216853 w 4190291"/>
+              <a:gd name="csY4" fmla="*/ 6409940 h 6588067"/>
+              <a:gd name="csX5" fmla="*/ 1650542 w 4190291"/>
+              <a:gd name="csY5" fmla="*/ 3587717 h 6588067"/>
+              <a:gd name="csX6" fmla="*/ 1571518 w 4190291"/>
+              <a:gd name="csY6" fmla="*/ 1375097 h 6588067"/>
+              <a:gd name="csX7" fmla="*/ 1486388 w 4190291"/>
+              <a:gd name="csY7" fmla="*/ 271841 h 6588067"/>
+              <a:gd name="csX0" fmla="*/ 1486388 w 4231052"/>
+              <a:gd name="csY0" fmla="*/ 271841 h 6588067"/>
+              <a:gd name="csX1" fmla="*/ 4059513 w 4231052"/>
+              <a:gd name="csY1" fmla="*/ 73703 h 6588067"/>
+              <a:gd name="csX2" fmla="*/ 4149081 w 4231052"/>
+              <a:gd name="csY2" fmla="*/ 1637799 h 6588067"/>
+              <a:gd name="csX3" fmla="*/ 2467780 w 4231052"/>
+              <a:gd name="csY3" fmla="*/ 5391936 h 6588067"/>
+              <a:gd name="csX4" fmla="*/ 216853 w 4231052"/>
+              <a:gd name="csY4" fmla="*/ 6409940 h 6588067"/>
+              <a:gd name="csX5" fmla="*/ 1650542 w 4231052"/>
+              <a:gd name="csY5" fmla="*/ 3587717 h 6588067"/>
+              <a:gd name="csX6" fmla="*/ 1571518 w 4231052"/>
+              <a:gd name="csY6" fmla="*/ 1375097 h 6588067"/>
+              <a:gd name="csX7" fmla="*/ 1486388 w 4231052"/>
+              <a:gd name="csY7" fmla="*/ 271841 h 6588067"/>
+              <a:gd name="csX0" fmla="*/ 1486388 w 4231052"/>
+              <a:gd name="csY0" fmla="*/ 271841 h 6588067"/>
+              <a:gd name="csX1" fmla="*/ 4059513 w 4231052"/>
+              <a:gd name="csY1" fmla="*/ 73703 h 6588067"/>
+              <a:gd name="csX2" fmla="*/ 4149081 w 4231052"/>
+              <a:gd name="csY2" fmla="*/ 1637799 h 6588067"/>
+              <a:gd name="csX3" fmla="*/ 2467780 w 4231052"/>
+              <a:gd name="csY3" fmla="*/ 5391936 h 6588067"/>
+              <a:gd name="csX4" fmla="*/ 216853 w 4231052"/>
+              <a:gd name="csY4" fmla="*/ 6409940 h 6588067"/>
+              <a:gd name="csX5" fmla="*/ 1650542 w 4231052"/>
+              <a:gd name="csY5" fmla="*/ 3587717 h 6588067"/>
+              <a:gd name="csX6" fmla="*/ 1571518 w 4231052"/>
+              <a:gd name="csY6" fmla="*/ 1375097 h 6588067"/>
+              <a:gd name="csX7" fmla="*/ 1486388 w 4231052"/>
+              <a:gd name="csY7" fmla="*/ 271841 h 6588067"/>
+              <a:gd name="csX0" fmla="*/ 1486388 w 4231052"/>
+              <a:gd name="csY0" fmla="*/ 271841 h 6588067"/>
+              <a:gd name="csX1" fmla="*/ 4059513 w 4231052"/>
+              <a:gd name="csY1" fmla="*/ 73703 h 6588067"/>
+              <a:gd name="csX2" fmla="*/ 4149081 w 4231052"/>
+              <a:gd name="csY2" fmla="*/ 1637799 h 6588067"/>
+              <a:gd name="csX3" fmla="*/ 2467780 w 4231052"/>
+              <a:gd name="csY3" fmla="*/ 5391936 h 6588067"/>
+              <a:gd name="csX4" fmla="*/ 216853 w 4231052"/>
+              <a:gd name="csY4" fmla="*/ 6409940 h 6588067"/>
+              <a:gd name="csX5" fmla="*/ 1650542 w 4231052"/>
+              <a:gd name="csY5" fmla="*/ 3587717 h 6588067"/>
+              <a:gd name="csX6" fmla="*/ 1571518 w 4231052"/>
+              <a:gd name="csY6" fmla="*/ 1375097 h 6588067"/>
+              <a:gd name="csX7" fmla="*/ 1486388 w 4231052"/>
+              <a:gd name="csY7" fmla="*/ 271841 h 6588067"/>
+              <a:gd name="csX0" fmla="*/ 1486388 w 4299528"/>
+              <a:gd name="csY0" fmla="*/ 282638 h 6602932"/>
+              <a:gd name="csX1" fmla="*/ 4059513 w 4299528"/>
+              <a:gd name="csY1" fmla="*/ 84500 h 6602932"/>
+              <a:gd name="csX2" fmla="*/ 4103925 w 4299528"/>
+              <a:gd name="csY2" fmla="*/ 1456685 h 6602932"/>
+              <a:gd name="csX3" fmla="*/ 2467780 w 4299528"/>
+              <a:gd name="csY3" fmla="*/ 5402733 h 6602932"/>
+              <a:gd name="csX4" fmla="*/ 216853 w 4299528"/>
+              <a:gd name="csY4" fmla="*/ 6420737 h 6602932"/>
+              <a:gd name="csX5" fmla="*/ 1650542 w 4299528"/>
+              <a:gd name="csY5" fmla="*/ 3598514 h 6602932"/>
+              <a:gd name="csX6" fmla="*/ 1571518 w 4299528"/>
+              <a:gd name="csY6" fmla="*/ 1385894 h 6602932"/>
+              <a:gd name="csX7" fmla="*/ 1486388 w 4299528"/>
+              <a:gd name="csY7" fmla="*/ 282638 h 6602932"/>
+              <a:gd name="csX0" fmla="*/ 1486388 w 4192078"/>
+              <a:gd name="csY0" fmla="*/ 291844 h 6612138"/>
+              <a:gd name="csX1" fmla="*/ 3845024 w 4192078"/>
+              <a:gd name="csY1" fmla="*/ 82417 h 6612138"/>
+              <a:gd name="csX2" fmla="*/ 4103925 w 4192078"/>
+              <a:gd name="csY2" fmla="*/ 1465891 h 6612138"/>
+              <a:gd name="csX3" fmla="*/ 2467780 w 4192078"/>
+              <a:gd name="csY3" fmla="*/ 5411939 h 6612138"/>
+              <a:gd name="csX4" fmla="*/ 216853 w 4192078"/>
+              <a:gd name="csY4" fmla="*/ 6429943 h 6612138"/>
+              <a:gd name="csX5" fmla="*/ 1650542 w 4192078"/>
+              <a:gd name="csY5" fmla="*/ 3607720 h 6612138"/>
+              <a:gd name="csX6" fmla="*/ 1571518 w 4192078"/>
+              <a:gd name="csY6" fmla="*/ 1395100 h 6612138"/>
+              <a:gd name="csX7" fmla="*/ 1486388 w 4192078"/>
+              <a:gd name="csY7" fmla="*/ 291844 h 6612138"/>
+              <a:gd name="csX0" fmla="*/ 1644433 w 4184699"/>
+              <a:gd name="csY0" fmla="*/ 171346 h 6694840"/>
+              <a:gd name="csX1" fmla="*/ 3845024 w 4184699"/>
+              <a:gd name="csY1" fmla="*/ 165119 h 6694840"/>
+              <a:gd name="csX2" fmla="*/ 4103925 w 4184699"/>
+              <a:gd name="csY2" fmla="*/ 1548593 h 6694840"/>
+              <a:gd name="csX3" fmla="*/ 2467780 w 4184699"/>
+              <a:gd name="csY3" fmla="*/ 5494641 h 6694840"/>
+              <a:gd name="csX4" fmla="*/ 216853 w 4184699"/>
+              <a:gd name="csY4" fmla="*/ 6512645 h 6694840"/>
+              <a:gd name="csX5" fmla="*/ 1650542 w 4184699"/>
+              <a:gd name="csY5" fmla="*/ 3690422 h 6694840"/>
+              <a:gd name="csX6" fmla="*/ 1571518 w 4184699"/>
+              <a:gd name="csY6" fmla="*/ 1477802 h 6694840"/>
+              <a:gd name="csX7" fmla="*/ 1644433 w 4184699"/>
+              <a:gd name="csY7" fmla="*/ 171346 h 6694840"/>
+              <a:gd name="csX0" fmla="*/ 1644433 w 4184699"/>
+              <a:gd name="csY0" fmla="*/ 198463 h 6721957"/>
+              <a:gd name="csX1" fmla="*/ 3845024 w 4184699"/>
+              <a:gd name="csY1" fmla="*/ 192236 h 6721957"/>
+              <a:gd name="csX2" fmla="*/ 4103925 w 4184699"/>
+              <a:gd name="csY2" fmla="*/ 1575710 h 6721957"/>
+              <a:gd name="csX3" fmla="*/ 2467780 w 4184699"/>
+              <a:gd name="csY3" fmla="*/ 5521758 h 6721957"/>
+              <a:gd name="csX4" fmla="*/ 216853 w 4184699"/>
+              <a:gd name="csY4" fmla="*/ 6539762 h 6721957"/>
+              <a:gd name="csX5" fmla="*/ 1650542 w 4184699"/>
+              <a:gd name="csY5" fmla="*/ 3717539 h 6721957"/>
+              <a:gd name="csX6" fmla="*/ 1797296 w 4184699"/>
+              <a:gd name="csY6" fmla="*/ 1933897 h 6721957"/>
+              <a:gd name="csX7" fmla="*/ 1644433 w 4184699"/>
+              <a:gd name="csY7" fmla="*/ 198463 h 6721957"/>
+              <a:gd name="csX0" fmla="*/ 1632274 w 4172540"/>
+              <a:gd name="csY0" fmla="*/ 198463 h 6721957"/>
+              <a:gd name="csX1" fmla="*/ 3832865 w 4172540"/>
+              <a:gd name="csY1" fmla="*/ 192236 h 6721957"/>
+              <a:gd name="csX2" fmla="*/ 4091766 w 4172540"/>
+              <a:gd name="csY2" fmla="*/ 1575710 h 6721957"/>
+              <a:gd name="csX3" fmla="*/ 2455621 w 4172540"/>
+              <a:gd name="csY3" fmla="*/ 5521758 h 6721957"/>
+              <a:gd name="csX4" fmla="*/ 204694 w 4172540"/>
+              <a:gd name="csY4" fmla="*/ 6539762 h 6721957"/>
+              <a:gd name="csX5" fmla="*/ 1739983 w 4172540"/>
+              <a:gd name="csY5" fmla="*/ 3570784 h 6721957"/>
+              <a:gd name="csX6" fmla="*/ 1785137 w 4172540"/>
+              <a:gd name="csY6" fmla="*/ 1933897 h 6721957"/>
+              <a:gd name="csX7" fmla="*/ 1632274 w 4172540"/>
+              <a:gd name="csY7" fmla="*/ 198463 h 6721957"/>
+              <a:gd name="csX0" fmla="*/ 1582183 w 4122449"/>
+              <a:gd name="csY0" fmla="*/ 198463 h 6721957"/>
+              <a:gd name="csX1" fmla="*/ 3782774 w 4122449"/>
+              <a:gd name="csY1" fmla="*/ 192236 h 6721957"/>
+              <a:gd name="csX2" fmla="*/ 4041675 w 4122449"/>
+              <a:gd name="csY2" fmla="*/ 1575710 h 6721957"/>
+              <a:gd name="csX3" fmla="*/ 2405530 w 4122449"/>
+              <a:gd name="csY3" fmla="*/ 5521758 h 6721957"/>
+              <a:gd name="csX4" fmla="*/ 154603 w 4122449"/>
+              <a:gd name="csY4" fmla="*/ 6539762 h 6721957"/>
+              <a:gd name="csX5" fmla="*/ 1689892 w 4122449"/>
+              <a:gd name="csY5" fmla="*/ 3570784 h 6721957"/>
+              <a:gd name="csX6" fmla="*/ 1735046 w 4122449"/>
+              <a:gd name="csY6" fmla="*/ 1933897 h 6721957"/>
+              <a:gd name="csX7" fmla="*/ 1582183 w 4122449"/>
+              <a:gd name="csY7" fmla="*/ 198463 h 6721957"/>
+              <a:gd name="csX0" fmla="*/ 1582183 w 4122449"/>
+              <a:gd name="csY0" fmla="*/ 198463 h 6721957"/>
+              <a:gd name="csX1" fmla="*/ 3782774 w 4122449"/>
+              <a:gd name="csY1" fmla="*/ 192236 h 6721957"/>
+              <a:gd name="csX2" fmla="*/ 4041675 w 4122449"/>
+              <a:gd name="csY2" fmla="*/ 1575710 h 6721957"/>
+              <a:gd name="csX3" fmla="*/ 2405530 w 4122449"/>
+              <a:gd name="csY3" fmla="*/ 5521758 h 6721957"/>
+              <a:gd name="csX4" fmla="*/ 154603 w 4122449"/>
+              <a:gd name="csY4" fmla="*/ 6539762 h 6721957"/>
+              <a:gd name="csX5" fmla="*/ 1689892 w 4122449"/>
+              <a:gd name="csY5" fmla="*/ 3570784 h 6721957"/>
+              <a:gd name="csX6" fmla="*/ 1735046 w 4122449"/>
+              <a:gd name="csY6" fmla="*/ 1933897 h 6721957"/>
+              <a:gd name="csX7" fmla="*/ 1582183 w 4122449"/>
+              <a:gd name="csY7" fmla="*/ 198463 h 6721957"/>
+              <a:gd name="csX0" fmla="*/ 1576590 w 4116856"/>
+              <a:gd name="csY0" fmla="*/ 198463 h 6721957"/>
+              <a:gd name="csX1" fmla="*/ 3777181 w 4116856"/>
+              <a:gd name="csY1" fmla="*/ 192236 h 6721957"/>
+              <a:gd name="csX2" fmla="*/ 4036082 w 4116856"/>
+              <a:gd name="csY2" fmla="*/ 1575710 h 6721957"/>
+              <a:gd name="csX3" fmla="*/ 2399937 w 4116856"/>
+              <a:gd name="csY3" fmla="*/ 5521758 h 6721957"/>
+              <a:gd name="csX4" fmla="*/ 149010 w 4116856"/>
+              <a:gd name="csY4" fmla="*/ 6539762 h 6721957"/>
+              <a:gd name="csX5" fmla="*/ 1684299 w 4116856"/>
+              <a:gd name="csY5" fmla="*/ 3570784 h 6721957"/>
+              <a:gd name="csX6" fmla="*/ 1729453 w 4116856"/>
+              <a:gd name="csY6" fmla="*/ 1933897 h 6721957"/>
+              <a:gd name="csX7" fmla="*/ 1576590 w 4116856"/>
+              <a:gd name="csY7" fmla="*/ 198463 h 6721957"/>
+            </a:gdLst>
+            <a:ahLst/>
+            <a:cxnLst>
+              <a:cxn ang="0">
+                <a:pos x="csX0" y="csY0"/>
+              </a:cxn>
+              <a:cxn ang="0">
+                <a:pos x="csX1" y="csY1"/>
+              </a:cxn>
+              <a:cxn ang="0">
+                <a:pos x="csX2" y="csY2"/>
+              </a:cxn>
+              <a:cxn ang="0">
+                <a:pos x="csX3" y="csY3"/>
+              </a:cxn>
+              <a:cxn ang="0">
+                <a:pos x="csX4" y="csY4"/>
+              </a:cxn>
+              <a:cxn ang="0">
+                <a:pos x="csX5" y="csY5"/>
+              </a:cxn>
+              <a:cxn ang="0">
+                <a:pos x="csX6" y="csY6"/>
+              </a:cxn>
+              <a:cxn ang="0">
+                <a:pos x="csX7" y="csY7"/>
+              </a:cxn>
+            </a:cxnLst>
+            <a:rect l="l" t="t" r="r" b="b"/>
+            <a:pathLst>
+              <a:path w="4116856" h="6721957">
+                <a:moveTo>
+                  <a:pt x="1576590" y="198463"/>
+                </a:moveTo>
+                <a:cubicBezTo>
+                  <a:pt x="1917878" y="-91814"/>
+                  <a:pt x="3367266" y="-37305"/>
+                  <a:pt x="3777181" y="192236"/>
+                </a:cubicBezTo>
+                <a:cubicBezTo>
+                  <a:pt x="4187096" y="421777"/>
+                  <a:pt x="4160259" y="938442"/>
+                  <a:pt x="4036082" y="1575710"/>
+                </a:cubicBezTo>
+                <a:cubicBezTo>
+                  <a:pt x="3731283" y="2201688"/>
+                  <a:pt x="3047782" y="4694416"/>
+                  <a:pt x="2399937" y="5521758"/>
+                </a:cubicBezTo>
+                <a:cubicBezTo>
+                  <a:pt x="1752092" y="6349100"/>
+                  <a:pt x="939971" y="7071887"/>
+                  <a:pt x="149010" y="6539762"/>
+                </a:cubicBezTo>
+                <a:cubicBezTo>
+                  <a:pt x="-529062" y="5872170"/>
+                  <a:pt x="1305259" y="4076394"/>
+                  <a:pt x="1684299" y="3570784"/>
+                </a:cubicBezTo>
+                <a:cubicBezTo>
+                  <a:pt x="2101987" y="2944250"/>
+                  <a:pt x="1980708" y="2431980"/>
+                  <a:pt x="1729453" y="1933897"/>
+                </a:cubicBezTo>
+                <a:cubicBezTo>
+                  <a:pt x="1500775" y="1435814"/>
+                  <a:pt x="1235302" y="488740"/>
+                  <a:pt x="1576590" y="198463"/>
+                </a:cubicBezTo>
+                <a:close/>
+              </a:path>
+            </a:pathLst>
+          </a:custGeom>
+          <a:solidFill>
+            <a:schemeClr val="bg1">
+              <a:lumMod val="95000"/>
+            </a:schemeClr>
+          </a:solidFill>
+          <a:ln w="28575">
+            <a:noFill/>
+            <a:prstDash val="solid"/>
+          </a:ln>
+          <a:effectLst/>
+        </p:spPr>
+        <p:style>
+          <a:lnRef idx="0">
+            <a:schemeClr val="accent4"/>
+          </a:lnRef>
+          <a:fillRef idx="3">
+            <a:schemeClr val="accent4"/>
+          </a:fillRef>
+          <a:effectRef idx="3">
+            <a:schemeClr val="accent4"/>
+          </a:effectRef>
+          <a:fontRef idx="minor">
+            <a:schemeClr val="lt1"/>
+          </a:fontRef>
+        </p:style>
+        <p:txBody>
+          <a:bodyPr rtlCol="1" anchor="ctr"/>
+          <a:lstStyle/>
+          <a:p>
+            <a:pPr algn="r" rtl="1"/>
+            <a:endParaRPr lang="en-US" sz="4400" b="1">
+              <a:solidFill>
+                <a:schemeClr val="bg1"/>
+              </a:solidFill>
+              <a:highlight>
+                <a:srgbClr val="800080"/>
+              </a:highlight>
+              <a:latin typeface="Segoe UI" panose="020B0502040204020203" pitchFamily="34" charset="0"/>
+              <a:cs typeface="Segoe UI" panose="020B0502040204020203" pitchFamily="34" charset="0"/>
+            </a:endParaRPr>
+          </a:p>
+        </p:txBody>
+      </p:sp>
+      <p:sp>
+        <p:nvSpPr>
+          <p:cNvPr id="34" name="Oval 33">
+            <a:extLst>
+              <a:ext uri="{FF2B5EF4-FFF2-40B4-BE49-F238E27FC236}">
+                <a16:creationId xmlns:a16="http://schemas.microsoft.com/office/drawing/2014/main" id="{E0086E13-B4E8-8FDE-07F8-5DA29A30F952}"/>
+              </a:ext>
+            </a:extLst>
+          </p:cNvPr>
+          <p:cNvSpPr/>
+          <p:nvPr/>
+        </p:nvSpPr>
+        <p:spPr bwMode="auto">
+          <a:xfrm rot="1935669">
+            <a:off x="4237895" y="4679288"/>
+            <a:ext cx="4870584" cy="4854020"/>
+          </a:xfrm>
+          <a:custGeom>
+            <a:avLst/>
+            <a:gdLst>
+              <a:gd name="csX0" fmla="*/ 0 w 4818094"/>
+              <a:gd name="csY0" fmla="*/ 2593800 h 5187600"/>
+              <a:gd name="csX1" fmla="*/ 2409047 w 4818094"/>
+              <a:gd name="csY1" fmla="*/ 0 h 5187600"/>
+              <a:gd name="csX2" fmla="*/ 4818094 w 4818094"/>
+              <a:gd name="csY2" fmla="*/ 2593800 h 5187600"/>
+              <a:gd name="csX3" fmla="*/ 2409047 w 4818094"/>
+              <a:gd name="csY3" fmla="*/ 5187600 h 5187600"/>
+              <a:gd name="csX4" fmla="*/ 0 w 4818094"/>
+              <a:gd name="csY4" fmla="*/ 2593800 h 5187600"/>
+              <a:gd name="csX0" fmla="*/ 0 w 5187760"/>
+              <a:gd name="csY0" fmla="*/ 2594828 h 5189910"/>
+              <a:gd name="csX1" fmla="*/ 2409047 w 5187760"/>
+              <a:gd name="csY1" fmla="*/ 1028 h 5189910"/>
+              <a:gd name="csX2" fmla="*/ 5187760 w 5187760"/>
+              <a:gd name="csY2" fmla="*/ 2842077 h 5189910"/>
+              <a:gd name="csX3" fmla="*/ 2409047 w 5187760"/>
+              <a:gd name="csY3" fmla="*/ 5188628 h 5189910"/>
+              <a:gd name="csX4" fmla="*/ 0 w 5187760"/>
+              <a:gd name="csY4" fmla="*/ 2594828 h 5189910"/>
+              <a:gd name="csX0" fmla="*/ 42041 w 5229801"/>
+              <a:gd name="csY0" fmla="*/ 2594508 h 5203334"/>
+              <a:gd name="csX1" fmla="*/ 2451088 w 5229801"/>
+              <a:gd name="csY1" fmla="*/ 708 h 5203334"/>
+              <a:gd name="csX2" fmla="*/ 5229801 w 5229801"/>
+              <a:gd name="csY2" fmla="*/ 2841757 h 5203334"/>
+              <a:gd name="csX3" fmla="*/ 1244945 w 5229801"/>
+              <a:gd name="csY3" fmla="*/ 5202069 h 5203334"/>
+              <a:gd name="csX4" fmla="*/ 42041 w 5229801"/>
+              <a:gd name="csY4" fmla="*/ 2594508 h 5203334"/>
+              <a:gd name="csX0" fmla="*/ 74467 w 4841053"/>
+              <a:gd name="csY0" fmla="*/ 1799631 h 5238998"/>
+              <a:gd name="csX1" fmla="*/ 2062340 w 4841053"/>
+              <a:gd name="csY1" fmla="*/ 19027 h 5238998"/>
+              <a:gd name="csX2" fmla="*/ 4841053 w 4841053"/>
+              <a:gd name="csY2" fmla="*/ 2860076 h 5238998"/>
+              <a:gd name="csX3" fmla="*/ 856197 w 4841053"/>
+              <a:gd name="csY3" fmla="*/ 5220388 h 5238998"/>
+              <a:gd name="csX4" fmla="*/ 74467 w 4841053"/>
+              <a:gd name="csY4" fmla="*/ 1799631 h 5238998"/>
+              <a:gd name="csX0" fmla="*/ 109724 w 4876310"/>
+              <a:gd name="csY0" fmla="*/ 1799261 h 5087365"/>
+              <a:gd name="csX1" fmla="*/ 2097597 w 4876310"/>
+              <a:gd name="csY1" fmla="*/ 18657 h 5087365"/>
+              <a:gd name="csX2" fmla="*/ 4876310 w 4876310"/>
+              <a:gd name="csY2" fmla="*/ 2859706 h 5087365"/>
+              <a:gd name="csX3" fmla="*/ 754352 w 4876310"/>
+              <a:gd name="csY3" fmla="*/ 5066265 h 5087365"/>
+              <a:gd name="csX4" fmla="*/ 109724 w 4876310"/>
+              <a:gd name="csY4" fmla="*/ 1799261 h 5087365"/>
+              <a:gd name="csX0" fmla="*/ 133227 w 4899813"/>
+              <a:gd name="csY0" fmla="*/ 1799261 h 5263847"/>
+              <a:gd name="csX1" fmla="*/ 2121100 w 4899813"/>
+              <a:gd name="csY1" fmla="*/ 18657 h 5263847"/>
+              <a:gd name="csX2" fmla="*/ 4899813 w 4899813"/>
+              <a:gd name="csY2" fmla="*/ 2859706 h 5263847"/>
+              <a:gd name="csX3" fmla="*/ 777855 w 4899813"/>
+              <a:gd name="csY3" fmla="*/ 5066265 h 5263847"/>
+              <a:gd name="csX4" fmla="*/ 133227 w 4899813"/>
+              <a:gd name="csY4" fmla="*/ 1799261 h 5263847"/>
+              <a:gd name="csX0" fmla="*/ 116725 w 5089331"/>
+              <a:gd name="csY0" fmla="*/ 1792871 h 5071472"/>
+              <a:gd name="csX1" fmla="*/ 2104598 w 5089331"/>
+              <a:gd name="csY1" fmla="*/ 12267 h 5071472"/>
+              <a:gd name="csX2" fmla="*/ 5089331 w 5089331"/>
+              <a:gd name="csY2" fmla="*/ 2629823 h 5071472"/>
+              <a:gd name="csX3" fmla="*/ 761353 w 5089331"/>
+              <a:gd name="csY3" fmla="*/ 5059875 h 5071472"/>
+              <a:gd name="csX4" fmla="*/ 116725 w 5089331"/>
+              <a:gd name="csY4" fmla="*/ 1792871 h 5071472"/>
+              <a:gd name="csX0" fmla="*/ 116725 w 5089331"/>
+              <a:gd name="csY0" fmla="*/ 1792871 h 5069573"/>
+              <a:gd name="csX1" fmla="*/ 2104598 w 5089331"/>
+              <a:gd name="csY1" fmla="*/ 12267 h 5069573"/>
+              <a:gd name="csX2" fmla="*/ 5089331 w 5089331"/>
+              <a:gd name="csY2" fmla="*/ 2629823 h 5069573"/>
+              <a:gd name="csX3" fmla="*/ 761353 w 5089331"/>
+              <a:gd name="csY3" fmla="*/ 5059875 h 5069573"/>
+              <a:gd name="csX4" fmla="*/ 116725 w 5089331"/>
+              <a:gd name="csY4" fmla="*/ 1792871 h 5069573"/>
+              <a:gd name="csX0" fmla="*/ 84154 w 5056760"/>
+              <a:gd name="csY0" fmla="*/ 1790420 h 5062474"/>
+              <a:gd name="csX1" fmla="*/ 2072027 w 5056760"/>
+              <a:gd name="csY1" fmla="*/ 9816 h 5062474"/>
+              <a:gd name="csX2" fmla="*/ 5056760 w 5056760"/>
+              <a:gd name="csY2" fmla="*/ 2627372 h 5062474"/>
+              <a:gd name="csX3" fmla="*/ 728782 w 5056760"/>
+              <a:gd name="csY3" fmla="*/ 5057424 h 5062474"/>
+              <a:gd name="csX4" fmla="*/ 404231 w 5056760"/>
+              <a:gd name="csY4" fmla="*/ 3222753 h 5062474"/>
+              <a:gd name="csX5" fmla="*/ 84154 w 5056760"/>
+              <a:gd name="csY5" fmla="*/ 1790420 h 5062474"/>
+              <a:gd name="csX0" fmla="*/ 79747 w 5052353"/>
+              <a:gd name="csY0" fmla="*/ 1790420 h 5062474"/>
+              <a:gd name="csX1" fmla="*/ 2067620 w 5052353"/>
+              <a:gd name="csY1" fmla="*/ 9816 h 5062474"/>
+              <a:gd name="csX2" fmla="*/ 5052353 w 5052353"/>
+              <a:gd name="csY2" fmla="*/ 2627372 h 5062474"/>
+              <a:gd name="csX3" fmla="*/ 724375 w 5052353"/>
+              <a:gd name="csY3" fmla="*/ 5057424 h 5062474"/>
+              <a:gd name="csX4" fmla="*/ 399824 w 5052353"/>
+              <a:gd name="csY4" fmla="*/ 3222753 h 5062474"/>
+              <a:gd name="csX5" fmla="*/ 79747 w 5052353"/>
+              <a:gd name="csY5" fmla="*/ 1790420 h 5062474"/>
+              <a:gd name="csX0" fmla="*/ 751 w 4973357"/>
+              <a:gd name="csY0" fmla="*/ 1791382 h 5063436"/>
+              <a:gd name="csX1" fmla="*/ 1988624 w 4973357"/>
+              <a:gd name="csY1" fmla="*/ 10778 h 5063436"/>
+              <a:gd name="csX2" fmla="*/ 4973357 w 4973357"/>
+              <a:gd name="csY2" fmla="*/ 2628334 h 5063436"/>
+              <a:gd name="csX3" fmla="*/ 645379 w 4973357"/>
+              <a:gd name="csY3" fmla="*/ 5058386 h 5063436"/>
+              <a:gd name="csX4" fmla="*/ 320828 w 4973357"/>
+              <a:gd name="csY4" fmla="*/ 3223715 h 5063436"/>
+              <a:gd name="csX5" fmla="*/ 751 w 4973357"/>
+              <a:gd name="csY5" fmla="*/ 1791382 h 5063436"/>
+              <a:gd name="csX0" fmla="*/ 755 w 4966384"/>
+              <a:gd name="csY0" fmla="*/ 2008354 h 5057866"/>
+              <a:gd name="csX1" fmla="*/ 1981651 w 4966384"/>
+              <a:gd name="csY1" fmla="*/ 5208 h 5057866"/>
+              <a:gd name="csX2" fmla="*/ 4966384 w 4966384"/>
+              <a:gd name="csY2" fmla="*/ 2622764 h 5057866"/>
+              <a:gd name="csX3" fmla="*/ 638406 w 4966384"/>
+              <a:gd name="csY3" fmla="*/ 5052816 h 5057866"/>
+              <a:gd name="csX4" fmla="*/ 313855 w 4966384"/>
+              <a:gd name="csY4" fmla="*/ 3218145 h 5057866"/>
+              <a:gd name="csX5" fmla="*/ 755 w 4966384"/>
+              <a:gd name="csY5" fmla="*/ 2008354 h 5057866"/>
+              <a:gd name="csX0" fmla="*/ 4502 w 4970131"/>
+              <a:gd name="csY0" fmla="*/ 2008285 h 5057797"/>
+              <a:gd name="csX1" fmla="*/ 1985398 w 4970131"/>
+              <a:gd name="csY1" fmla="*/ 5139 h 5057797"/>
+              <a:gd name="csX2" fmla="*/ 4970131 w 4970131"/>
+              <a:gd name="csY2" fmla="*/ 2622695 h 5057797"/>
+              <a:gd name="csX3" fmla="*/ 642153 w 4970131"/>
+              <a:gd name="csY3" fmla="*/ 5052747 h 5057797"/>
+              <a:gd name="csX4" fmla="*/ 317602 w 4970131"/>
+              <a:gd name="csY4" fmla="*/ 3218076 h 5057797"/>
+              <a:gd name="csX5" fmla="*/ 4502 w 4970131"/>
+              <a:gd name="csY5" fmla="*/ 2008285 h 5057797"/>
+              <a:gd name="csX0" fmla="*/ 4853 w 4856467"/>
+              <a:gd name="csY0" fmla="*/ 2081855 h 5056489"/>
+              <a:gd name="csX1" fmla="*/ 1871734 w 4856467"/>
+              <a:gd name="csY1" fmla="*/ 3831 h 5056489"/>
+              <a:gd name="csX2" fmla="*/ 4856467 w 4856467"/>
+              <a:gd name="csY2" fmla="*/ 2621387 h 5056489"/>
+              <a:gd name="csX3" fmla="*/ 528489 w 4856467"/>
+              <a:gd name="csY3" fmla="*/ 5051439 h 5056489"/>
+              <a:gd name="csX4" fmla="*/ 203938 w 4856467"/>
+              <a:gd name="csY4" fmla="*/ 3216768 h 5056489"/>
+              <a:gd name="csX5" fmla="*/ 4853 w 4856467"/>
+              <a:gd name="csY5" fmla="*/ 2081855 h 5056489"/>
+              <a:gd name="csX0" fmla="*/ 42894 w 4894508"/>
+              <a:gd name="csY0" fmla="*/ 1888260 h 4862894"/>
+              <a:gd name="csX1" fmla="*/ 1137616 w 4894508"/>
+              <a:gd name="csY1" fmla="*/ 3948 h 4862894"/>
+              <a:gd name="csX2" fmla="*/ 4894508 w 4894508"/>
+              <a:gd name="csY2" fmla="*/ 2427792 h 4862894"/>
+              <a:gd name="csX3" fmla="*/ 566530 w 4894508"/>
+              <a:gd name="csY3" fmla="*/ 4857844 h 4862894"/>
+              <a:gd name="csX4" fmla="*/ 241979 w 4894508"/>
+              <a:gd name="csY4" fmla="*/ 3023173 h 4862894"/>
+              <a:gd name="csX5" fmla="*/ 42894 w 4894508"/>
+              <a:gd name="csY5" fmla="*/ 1888260 h 4862894"/>
+              <a:gd name="csX0" fmla="*/ 42894 w 4894508"/>
+              <a:gd name="csY0" fmla="*/ 1983654 h 4958288"/>
+              <a:gd name="csX1" fmla="*/ 1137616 w 4894508"/>
+              <a:gd name="csY1" fmla="*/ 99342 h 4958288"/>
+              <a:gd name="csX2" fmla="*/ 4894508 w 4894508"/>
+              <a:gd name="csY2" fmla="*/ 2523186 h 4958288"/>
+              <a:gd name="csX3" fmla="*/ 566530 w 4894508"/>
+              <a:gd name="csY3" fmla="*/ 4953238 h 4958288"/>
+              <a:gd name="csX4" fmla="*/ 241979 w 4894508"/>
+              <a:gd name="csY4" fmla="*/ 3118567 h 4958288"/>
+              <a:gd name="csX5" fmla="*/ 42894 w 4894508"/>
+              <a:gd name="csY5" fmla="*/ 1983654 h 4958288"/>
+              <a:gd name="csX0" fmla="*/ 35178 w 4973722"/>
+              <a:gd name="csY0" fmla="*/ 1981804 h 4861515"/>
+              <a:gd name="csX1" fmla="*/ 1216830 w 4973722"/>
+              <a:gd name="csY1" fmla="*/ 2569 h 4861515"/>
+              <a:gd name="csX2" fmla="*/ 4973722 w 4973722"/>
+              <a:gd name="csY2" fmla="*/ 2426413 h 4861515"/>
+              <a:gd name="csX3" fmla="*/ 645744 w 4973722"/>
+              <a:gd name="csY3" fmla="*/ 4856465 h 4861515"/>
+              <a:gd name="csX4" fmla="*/ 321193 w 4973722"/>
+              <a:gd name="csY4" fmla="*/ 3021794 h 4861515"/>
+              <a:gd name="csX5" fmla="*/ 35178 w 4973722"/>
+              <a:gd name="csY5" fmla="*/ 1981804 h 4861515"/>
+              <a:gd name="csX0" fmla="*/ 1802 w 4940346"/>
+              <a:gd name="csY0" fmla="*/ 1981685 h 4861396"/>
+              <a:gd name="csX1" fmla="*/ 1183454 w 4940346"/>
+              <a:gd name="csY1" fmla="*/ 2450 h 4861396"/>
+              <a:gd name="csX2" fmla="*/ 4940346 w 4940346"/>
+              <a:gd name="csY2" fmla="*/ 2426294 h 4861396"/>
+              <a:gd name="csX3" fmla="*/ 612368 w 4940346"/>
+              <a:gd name="csY3" fmla="*/ 4856346 h 4861396"/>
+              <a:gd name="csX4" fmla="*/ 287817 w 4940346"/>
+              <a:gd name="csY4" fmla="*/ 3021675 h 4861396"/>
+              <a:gd name="csX5" fmla="*/ 1802 w 4940346"/>
+              <a:gd name="csY5" fmla="*/ 1981685 h 4861396"/>
+              <a:gd name="csX0" fmla="*/ 24863 w 4747430"/>
+              <a:gd name="csY0" fmla="*/ 2111059 h 4860104"/>
+              <a:gd name="csX1" fmla="*/ 990538 w 4747430"/>
+              <a:gd name="csY1" fmla="*/ 1158 h 4860104"/>
+              <a:gd name="csX2" fmla="*/ 4747430 w 4747430"/>
+              <a:gd name="csY2" fmla="*/ 2425002 h 4860104"/>
+              <a:gd name="csX3" fmla="*/ 419452 w 4747430"/>
+              <a:gd name="csY3" fmla="*/ 4855054 h 4860104"/>
+              <a:gd name="csX4" fmla="*/ 94901 w 4747430"/>
+              <a:gd name="csY4" fmla="*/ 3020383 h 4860104"/>
+              <a:gd name="csX5" fmla="*/ 24863 w 4747430"/>
+              <a:gd name="csY5" fmla="*/ 2111059 h 4860104"/>
+              <a:gd name="csX0" fmla="*/ 43013 w 5023801"/>
+              <a:gd name="csY0" fmla="*/ 2110689 h 4860667"/>
+              <a:gd name="csX1" fmla="*/ 1008688 w 5023801"/>
+              <a:gd name="csY1" fmla="*/ 788 h 4860667"/>
+              <a:gd name="csX2" fmla="*/ 5023801 w 5023801"/>
+              <a:gd name="csY2" fmla="*/ 2368434 h 4860667"/>
+              <a:gd name="csX3" fmla="*/ 437602 w 5023801"/>
+              <a:gd name="csY3" fmla="*/ 4854684 h 4860667"/>
+              <a:gd name="csX4" fmla="*/ 113051 w 5023801"/>
+              <a:gd name="csY4" fmla="*/ 3020013 h 4860667"/>
+              <a:gd name="csX5" fmla="*/ 43013 w 5023801"/>
+              <a:gd name="csY5" fmla="*/ 2110689 h 4860667"/>
+              <a:gd name="csX0" fmla="*/ 8874 w 4989662"/>
+              <a:gd name="csY0" fmla="*/ 2110689 h 4865235"/>
+              <a:gd name="csX1" fmla="*/ 974549 w 4989662"/>
+              <a:gd name="csY1" fmla="*/ 788 h 4865235"/>
+              <a:gd name="csX2" fmla="*/ 4989662 w 4989662"/>
+              <a:gd name="csY2" fmla="*/ 2368434 h 4865235"/>
+              <a:gd name="csX3" fmla="*/ 403463 w 4989662"/>
+              <a:gd name="csY3" fmla="*/ 4854684 h 4865235"/>
+              <a:gd name="csX4" fmla="*/ 78912 w 4989662"/>
+              <a:gd name="csY4" fmla="*/ 3020013 h 4865235"/>
+              <a:gd name="csX5" fmla="*/ 8874 w 4989662"/>
+              <a:gd name="csY5" fmla="*/ 2110689 h 4865235"/>
+              <a:gd name="csX0" fmla="*/ 65222 w 5046010"/>
+              <a:gd name="csY0" fmla="*/ 2110748 h 4869039"/>
+              <a:gd name="csX1" fmla="*/ 1030897 w 5046010"/>
+              <a:gd name="csY1" fmla="*/ 847 h 4869039"/>
+              <a:gd name="csX2" fmla="*/ 5046010 w 5046010"/>
+              <a:gd name="csY2" fmla="*/ 2368493 h 4869039"/>
+              <a:gd name="csX3" fmla="*/ 459811 w 5046010"/>
+              <a:gd name="csY3" fmla="*/ 4854743 h 4869039"/>
+              <a:gd name="csX4" fmla="*/ 128155 w 5046010"/>
+              <a:gd name="csY4" fmla="*/ 3304902 h 4869039"/>
+              <a:gd name="csX5" fmla="*/ 65222 w 5046010"/>
+              <a:gd name="csY5" fmla="*/ 2110748 h 4869039"/>
+              <a:gd name="csX0" fmla="*/ 86577 w 5067365"/>
+              <a:gd name="csY0" fmla="*/ 2110748 h 4869459"/>
+              <a:gd name="csX1" fmla="*/ 1052252 w 5067365"/>
+              <a:gd name="csY1" fmla="*/ 847 h 4869459"/>
+              <a:gd name="csX2" fmla="*/ 5067365 w 5067365"/>
+              <a:gd name="csY2" fmla="*/ 2368493 h 4869459"/>
+              <a:gd name="csX3" fmla="*/ 481166 w 5067365"/>
+              <a:gd name="csY3" fmla="*/ 4854743 h 4869459"/>
+              <a:gd name="csX4" fmla="*/ 149510 w 5067365"/>
+              <a:gd name="csY4" fmla="*/ 3304902 h 4869459"/>
+              <a:gd name="csX5" fmla="*/ 86577 w 5067365"/>
+              <a:gd name="csY5" fmla="*/ 2110748 h 4869459"/>
+              <a:gd name="csX0" fmla="*/ 86577 w 5067365"/>
+              <a:gd name="csY0" fmla="*/ 2110748 h 4869459"/>
+              <a:gd name="csX1" fmla="*/ 1052252 w 5067365"/>
+              <a:gd name="csY1" fmla="*/ 847 h 4869459"/>
+              <a:gd name="csX2" fmla="*/ 5067365 w 5067365"/>
+              <a:gd name="csY2" fmla="*/ 2368493 h 4869459"/>
+              <a:gd name="csX3" fmla="*/ 481166 w 5067365"/>
+              <a:gd name="csY3" fmla="*/ 4854743 h 4869459"/>
+              <a:gd name="csX4" fmla="*/ 149510 w 5067365"/>
+              <a:gd name="csY4" fmla="*/ 3304902 h 4869459"/>
+              <a:gd name="csX5" fmla="*/ 86577 w 5067365"/>
+              <a:gd name="csY5" fmla="*/ 2110748 h 4869459"/>
+              <a:gd name="csX0" fmla="*/ 171393 w 5152181"/>
+              <a:gd name="csY0" fmla="*/ 2110758 h 4874910"/>
+              <a:gd name="csX1" fmla="*/ 1137068 w 5152181"/>
+              <a:gd name="csY1" fmla="*/ 857 h 4874910"/>
+              <a:gd name="csX2" fmla="*/ 5152181 w 5152181"/>
+              <a:gd name="csY2" fmla="*/ 2368503 h 4874910"/>
+              <a:gd name="csX3" fmla="*/ 565982 w 5152181"/>
+              <a:gd name="csY3" fmla="*/ 4854753 h 4874910"/>
+              <a:gd name="csX4" fmla="*/ 84093 w 5152181"/>
+              <a:gd name="csY4" fmla="*/ 3426443 h 4874910"/>
+              <a:gd name="csX5" fmla="*/ 171393 w 5152181"/>
+              <a:gd name="csY5" fmla="*/ 2110758 h 4874910"/>
+              <a:gd name="csX0" fmla="*/ 171060 w 5151848"/>
+              <a:gd name="csY0" fmla="*/ 2110758 h 4874910"/>
+              <a:gd name="csX1" fmla="*/ 1136735 w 5151848"/>
+              <a:gd name="csY1" fmla="*/ 857 h 4874910"/>
+              <a:gd name="csX2" fmla="*/ 5151848 w 5151848"/>
+              <a:gd name="csY2" fmla="*/ 2368503 h 4874910"/>
+              <a:gd name="csX3" fmla="*/ 565649 w 5151848"/>
+              <a:gd name="csY3" fmla="*/ 4854753 h 4874910"/>
+              <a:gd name="csX4" fmla="*/ 83760 w 5151848"/>
+              <a:gd name="csY4" fmla="*/ 3426443 h 4874910"/>
+              <a:gd name="csX5" fmla="*/ 171060 w 5151848"/>
+              <a:gd name="csY5" fmla="*/ 2110758 h 4874910"/>
+              <a:gd name="csX0" fmla="*/ 150001 w 5130789"/>
+              <a:gd name="csY0" fmla="*/ 2110906 h 4854901"/>
+              <a:gd name="csX1" fmla="*/ 1115676 w 5130789"/>
+              <a:gd name="csY1" fmla="*/ 1005 h 4854901"/>
+              <a:gd name="csX2" fmla="*/ 5130789 w 5130789"/>
+              <a:gd name="csY2" fmla="*/ 2368651 h 4854901"/>
+              <a:gd name="csX3" fmla="*/ 544590 w 5130789"/>
+              <a:gd name="csY3" fmla="*/ 4854901 h 4854901"/>
+              <a:gd name="csX4" fmla="*/ 150001 w 5130789"/>
+              <a:gd name="csY4" fmla="*/ 2110906 h 4854901"/>
+              <a:gd name="csX0" fmla="*/ 141325 w 5143299"/>
+              <a:gd name="csY0" fmla="*/ 2457192 h 4854172"/>
+              <a:gd name="csX1" fmla="*/ 1128186 w 5143299"/>
+              <a:gd name="csY1" fmla="*/ 173 h 4854172"/>
+              <a:gd name="csX2" fmla="*/ 5143299 w 5143299"/>
+              <a:gd name="csY2" fmla="*/ 2367819 h 4854172"/>
+              <a:gd name="csX3" fmla="*/ 557100 w 5143299"/>
+              <a:gd name="csY3" fmla="*/ 4854069 h 4854172"/>
+              <a:gd name="csX4" fmla="*/ 141325 w 5143299"/>
+              <a:gd name="csY4" fmla="*/ 2457192 h 4854172"/>
+              <a:gd name="csX0" fmla="*/ 120587 w 4762853"/>
+              <a:gd name="csY0" fmla="*/ 2457023 h 4853905"/>
+              <a:gd name="csX1" fmla="*/ 1107448 w 4762853"/>
+              <a:gd name="csY1" fmla="*/ 4 h 4853905"/>
+              <a:gd name="csX2" fmla="*/ 4762853 w 4762853"/>
+              <a:gd name="csY2" fmla="*/ 2474560 h 4853905"/>
+              <a:gd name="csX3" fmla="*/ 536362 w 4762853"/>
+              <a:gd name="csY3" fmla="*/ 4853900 h 4853905"/>
+              <a:gd name="csX4" fmla="*/ 120587 w 4762853"/>
+              <a:gd name="csY4" fmla="*/ 2457023 h 4853905"/>
+              <a:gd name="csX0" fmla="*/ 134579 w 5021524"/>
+              <a:gd name="csY0" fmla="*/ 2457357 h 4854429"/>
+              <a:gd name="csX1" fmla="*/ 1121440 w 5021524"/>
+              <a:gd name="csY1" fmla="*/ 338 h 4854429"/>
+              <a:gd name="csX2" fmla="*/ 5021524 w 5021524"/>
+              <a:gd name="csY2" fmla="*/ 2333796 h 4854429"/>
+              <a:gd name="csX3" fmla="*/ 550354 w 5021524"/>
+              <a:gd name="csY3" fmla="*/ 4854234 h 4854429"/>
+              <a:gd name="csX4" fmla="*/ 134579 w 5021524"/>
+              <a:gd name="csY4" fmla="*/ 2457357 h 4854429"/>
+              <a:gd name="csX0" fmla="*/ 126356 w 4870584"/>
+              <a:gd name="csY0" fmla="*/ 2457087 h 4854059"/>
+              <a:gd name="csX1" fmla="*/ 1113217 w 4870584"/>
+              <a:gd name="csY1" fmla="*/ 68 h 4854059"/>
+              <a:gd name="csX2" fmla="*/ 4870584 w 4870584"/>
+              <a:gd name="csY2" fmla="*/ 2530410 h 4854059"/>
+              <a:gd name="csX3" fmla="*/ 542131 w 4870584"/>
+              <a:gd name="csY3" fmla="*/ 4853964 h 4854059"/>
+              <a:gd name="csX4" fmla="*/ 126356 w 4870584"/>
+              <a:gd name="csY4" fmla="*/ 2457087 h 4854059"/>
+              <a:gd name="csX0" fmla="*/ 126356 w 4870584"/>
+              <a:gd name="csY0" fmla="*/ 2457087 h 4854020"/>
+              <a:gd name="csX1" fmla="*/ 1113217 w 4870584"/>
+              <a:gd name="csY1" fmla="*/ 68 h 4854020"/>
+              <a:gd name="csX2" fmla="*/ 4870584 w 4870584"/>
+              <a:gd name="csY2" fmla="*/ 2530410 h 4854020"/>
+              <a:gd name="csX3" fmla="*/ 542131 w 4870584"/>
+              <a:gd name="csY3" fmla="*/ 4853964 h 4854020"/>
+              <a:gd name="csX4" fmla="*/ 126356 w 4870584"/>
+              <a:gd name="csY4" fmla="*/ 2457087 h 4854020"/>
+            </a:gdLst>
+            <a:ahLst/>
+            <a:cxnLst>
+              <a:cxn ang="0">
+                <a:pos x="csX0" y="csY0"/>
+              </a:cxn>
+              <a:cxn ang="0">
+                <a:pos x="csX1" y="csY1"/>
+              </a:cxn>
+              <a:cxn ang="0">
+                <a:pos x="csX2" y="csY2"/>
+              </a:cxn>
+              <a:cxn ang="0">
+                <a:pos x="csX3" y="csY3"/>
+              </a:cxn>
+              <a:cxn ang="0">
+                <a:pos x="csX4" y="csY4"/>
+              </a:cxn>
+            </a:cxnLst>
+            <a:rect l="l" t="t" r="r" b="b"/>
+            <a:pathLst>
+              <a:path w="4870584" h="4854020">
+                <a:moveTo>
+                  <a:pt x="126356" y="2457087"/>
+                </a:moveTo>
+                <a:cubicBezTo>
+                  <a:pt x="221537" y="1648104"/>
+                  <a:pt x="322512" y="-12153"/>
+                  <a:pt x="1113217" y="68"/>
+                </a:cubicBezTo>
+                <a:cubicBezTo>
+                  <a:pt x="1903922" y="12289"/>
+                  <a:pt x="4870584" y="1097894"/>
+                  <a:pt x="4870584" y="2530410"/>
+                </a:cubicBezTo>
+                <a:cubicBezTo>
+                  <a:pt x="4865830" y="2897944"/>
+                  <a:pt x="1332836" y="4866185"/>
+                  <a:pt x="542131" y="4853964"/>
+                </a:cubicBezTo>
+                <a:cubicBezTo>
+                  <a:pt x="-248574" y="4841744"/>
+                  <a:pt x="31175" y="3266070"/>
+                  <a:pt x="126356" y="2457087"/>
+                </a:cubicBezTo>
+                <a:close/>
+              </a:path>
+            </a:pathLst>
+          </a:custGeom>
+          <a:solidFill>
+            <a:schemeClr val="accent1">
+              <a:lumMod val="20000"/>
+              <a:lumOff val="80000"/>
+            </a:schemeClr>
+          </a:solidFill>
+          <a:ln w="28575">
+            <a:noFill/>
+            <a:prstDash val="solid"/>
+          </a:ln>
+          <a:effectLst/>
+        </p:spPr>
+        <p:style>
+          <a:lnRef idx="0">
+            <a:schemeClr val="accent4"/>
+          </a:lnRef>
+          <a:fillRef idx="3">
+            <a:schemeClr val="accent4"/>
+          </a:fillRef>
+          <a:effectRef idx="3">
+            <a:schemeClr val="accent4"/>
+          </a:effectRef>
+          <a:fontRef idx="minor">
+            <a:schemeClr val="lt1"/>
+          </a:fontRef>
+        </p:style>
+        <p:txBody>
+          <a:bodyPr rtlCol="1" anchor="ctr"/>
+          <a:lstStyle/>
+          <a:p>
+            <a:pPr algn="r" rtl="1"/>
+            <a:endParaRPr lang="en-US" sz="4400" b="1">
+              <a:solidFill>
+                <a:schemeClr val="bg1"/>
+              </a:solidFill>
+              <a:highlight>
+                <a:srgbClr val="800080"/>
+              </a:highlight>
+              <a:latin typeface="Segoe UI" panose="020B0502040204020203" pitchFamily="34" charset="0"/>
+              <a:cs typeface="Segoe UI" panose="020B0502040204020203" pitchFamily="34" charset="0"/>
+            </a:endParaRPr>
+          </a:p>
+        </p:txBody>
+      </p:sp>
+      <p:sp>
+        <p:nvSpPr>
+          <p:cNvPr id="30" name="Oval 29">
+            <a:extLst>
+              <a:ext uri="{FF2B5EF4-FFF2-40B4-BE49-F238E27FC236}">
+                <a16:creationId xmlns:a16="http://schemas.microsoft.com/office/drawing/2014/main" id="{86160FD4-CFD2-290E-53C8-BCF84A71AE40}"/>
+              </a:ext>
+            </a:extLst>
+          </p:cNvPr>
+          <p:cNvSpPr/>
+          <p:nvPr/>
+        </p:nvSpPr>
+        <p:spPr bwMode="auto">
+          <a:xfrm rot="9456563">
+            <a:off x="-1367282" y="52925"/>
+            <a:ext cx="5827645" cy="8318068"/>
+          </a:xfrm>
+          <a:custGeom>
+            <a:avLst/>
+            <a:gdLst>
+              <a:gd name="csX0" fmla="*/ 0 w 5678600"/>
+              <a:gd name="csY0" fmla="*/ 3658973 h 7317945"/>
+              <a:gd name="csX1" fmla="*/ 2839300 w 5678600"/>
+              <a:gd name="csY1" fmla="*/ 0 h 7317945"/>
+              <a:gd name="csX2" fmla="*/ 5678600 w 5678600"/>
+              <a:gd name="csY2" fmla="*/ 3658973 h 7317945"/>
+              <a:gd name="csX3" fmla="*/ 2839300 w 5678600"/>
+              <a:gd name="csY3" fmla="*/ 7317946 h 7317945"/>
+              <a:gd name="csX4" fmla="*/ 0 w 5678600"/>
+              <a:gd name="csY4" fmla="*/ 3658973 h 7317945"/>
+              <a:gd name="csX0" fmla="*/ 0 w 5127434"/>
+              <a:gd name="csY0" fmla="*/ 3659351 h 7318665"/>
+              <a:gd name="csX1" fmla="*/ 2839300 w 5127434"/>
+              <a:gd name="csY1" fmla="*/ 378 h 7318665"/>
+              <a:gd name="csX2" fmla="*/ 5127434 w 5127434"/>
+              <a:gd name="csY2" fmla="*/ 3492962 h 7318665"/>
+              <a:gd name="csX3" fmla="*/ 2839300 w 5127434"/>
+              <a:gd name="csY3" fmla="*/ 7318324 h 7318665"/>
+              <a:gd name="csX4" fmla="*/ 0 w 5127434"/>
+              <a:gd name="csY4" fmla="*/ 3659351 h 7318665"/>
+              <a:gd name="csX0" fmla="*/ 0 w 5637665"/>
+              <a:gd name="csY0" fmla="*/ 3659309 h 7318623"/>
+              <a:gd name="csX1" fmla="*/ 2839300 w 5637665"/>
+              <a:gd name="csY1" fmla="*/ 336 h 7318623"/>
+              <a:gd name="csX2" fmla="*/ 5127434 w 5637665"/>
+              <a:gd name="csY2" fmla="*/ 3492920 h 7318623"/>
+              <a:gd name="csX3" fmla="*/ 2839300 w 5637665"/>
+              <a:gd name="csY3" fmla="*/ 7318282 h 7318623"/>
+              <a:gd name="csX4" fmla="*/ 0 w 5637665"/>
+              <a:gd name="csY4" fmla="*/ 3659309 h 7318623"/>
+              <a:gd name="csX0" fmla="*/ 0 w 5637665"/>
+              <a:gd name="csY0" fmla="*/ 3659309 h 7318623"/>
+              <a:gd name="csX1" fmla="*/ 2839300 w 5637665"/>
+              <a:gd name="csY1" fmla="*/ 336 h 7318623"/>
+              <a:gd name="csX2" fmla="*/ 5127434 w 5637665"/>
+              <a:gd name="csY2" fmla="*/ 3492920 h 7318623"/>
+              <a:gd name="csX3" fmla="*/ 2839300 w 5637665"/>
+              <a:gd name="csY3" fmla="*/ 7318282 h 7318623"/>
+              <a:gd name="csX4" fmla="*/ 0 w 5637665"/>
+              <a:gd name="csY4" fmla="*/ 3659309 h 7318623"/>
+              <a:gd name="csX0" fmla="*/ 0 w 5556500"/>
+              <a:gd name="csY0" fmla="*/ 3659563 h 7318877"/>
+              <a:gd name="csX1" fmla="*/ 2839300 w 5556500"/>
+              <a:gd name="csY1" fmla="*/ 590 h 7318877"/>
+              <a:gd name="csX2" fmla="*/ 5127434 w 5556500"/>
+              <a:gd name="csY2" fmla="*/ 3493174 h 7318877"/>
+              <a:gd name="csX3" fmla="*/ 2839300 w 5556500"/>
+              <a:gd name="csY3" fmla="*/ 7318536 h 7318877"/>
+              <a:gd name="csX4" fmla="*/ 0 w 5556500"/>
+              <a:gd name="csY4" fmla="*/ 3659563 h 7318877"/>
+              <a:gd name="csX0" fmla="*/ 43 w 5563315"/>
+              <a:gd name="csY0" fmla="*/ 3308805 h 6968004"/>
+              <a:gd name="csX1" fmla="*/ 2903994 w 5563315"/>
+              <a:gd name="csY1" fmla="*/ 913 h 6968004"/>
+              <a:gd name="csX2" fmla="*/ 5127477 w 5563315"/>
+              <a:gd name="csY2" fmla="*/ 3142416 h 6968004"/>
+              <a:gd name="csX3" fmla="*/ 2839343 w 5563315"/>
+              <a:gd name="csY3" fmla="*/ 6967778 h 6968004"/>
+              <a:gd name="csX4" fmla="*/ 43 w 5563315"/>
+              <a:gd name="csY4" fmla="*/ 3308805 h 6968004"/>
+              <a:gd name="csX0" fmla="*/ 60 w 4894157"/>
+              <a:gd name="csY0" fmla="*/ 1630203 h 7043433"/>
+              <a:gd name="csX1" fmla="*/ 2245373 w 4894157"/>
+              <a:gd name="csY1" fmla="*/ 55990 h 7043433"/>
+              <a:gd name="csX2" fmla="*/ 4468856 w 4894157"/>
+              <a:gd name="csY2" fmla="*/ 3197493 h 7043433"/>
+              <a:gd name="csX3" fmla="*/ 2180722 w 4894157"/>
+              <a:gd name="csY3" fmla="*/ 7022855 h 7043433"/>
+              <a:gd name="csX4" fmla="*/ 60 w 4894157"/>
+              <a:gd name="csY4" fmla="*/ 1630203 h 7043433"/>
+              <a:gd name="csX0" fmla="*/ 120413 w 5014510"/>
+              <a:gd name="csY0" fmla="*/ 1631920 h 7230796"/>
+              <a:gd name="csX1" fmla="*/ 2365726 w 5014510"/>
+              <a:gd name="csY1" fmla="*/ 57707 h 7230796"/>
+              <a:gd name="csX2" fmla="*/ 4589209 w 5014510"/>
+              <a:gd name="csY2" fmla="*/ 3199210 h 7230796"/>
+              <a:gd name="csX3" fmla="*/ 760880 w 5014510"/>
+              <a:gd name="csY3" fmla="*/ 7211640 h 7230796"/>
+              <a:gd name="csX4" fmla="*/ 120413 w 5014510"/>
+              <a:gd name="csY4" fmla="*/ 1631920 h 7230796"/>
+              <a:gd name="csX0" fmla="*/ 346956 w 5241053"/>
+              <a:gd name="csY0" fmla="*/ 1631920 h 7259305"/>
+              <a:gd name="csX1" fmla="*/ 2592269 w 5241053"/>
+              <a:gd name="csY1" fmla="*/ 57707 h 7259305"/>
+              <a:gd name="csX2" fmla="*/ 4815752 w 5241053"/>
+              <a:gd name="csY2" fmla="*/ 3199210 h 7259305"/>
+              <a:gd name="csX3" fmla="*/ 987423 w 5241053"/>
+              <a:gd name="csY3" fmla="*/ 7211640 h 7259305"/>
+              <a:gd name="csX4" fmla="*/ 346956 w 5241053"/>
+              <a:gd name="csY4" fmla="*/ 1631920 h 7259305"/>
+              <a:gd name="csX0" fmla="*/ 414639 w 5449346"/>
+              <a:gd name="csY0" fmla="*/ 2902198 h 8529583"/>
+              <a:gd name="csX1" fmla="*/ 3708963 w 5449346"/>
+              <a:gd name="csY1" fmla="*/ 26423 h 8529583"/>
+              <a:gd name="csX2" fmla="*/ 4883435 w 5449346"/>
+              <a:gd name="csY2" fmla="*/ 4469488 h 8529583"/>
+              <a:gd name="csX3" fmla="*/ 1055106 w 5449346"/>
+              <a:gd name="csY3" fmla="*/ 8481918 h 8529583"/>
+              <a:gd name="csX4" fmla="*/ 414639 w 5449346"/>
+              <a:gd name="csY4" fmla="*/ 2902198 h 8529583"/>
+              <a:gd name="csX0" fmla="*/ 183453 w 4839523"/>
+              <a:gd name="csY0" fmla="*/ 2878424 h 8459374"/>
+              <a:gd name="csX1" fmla="*/ 3477777 w 4839523"/>
+              <a:gd name="csY1" fmla="*/ 2649 h 8459374"/>
+              <a:gd name="csX2" fmla="*/ 4196225 w 4839523"/>
+              <a:gd name="csY2" fmla="*/ 3329929 h 8459374"/>
+              <a:gd name="csX3" fmla="*/ 823920 w 4839523"/>
+              <a:gd name="csY3" fmla="*/ 8458144 h 8459374"/>
+              <a:gd name="csX4" fmla="*/ 183453 w 4839523"/>
+              <a:gd name="csY4" fmla="*/ 2878424 h 8459374"/>
+              <a:gd name="csX0" fmla="*/ 183453 w 4839523"/>
+              <a:gd name="csY0" fmla="*/ 2878424 h 8459459"/>
+              <a:gd name="csX1" fmla="*/ 3477777 w 4839523"/>
+              <a:gd name="csY1" fmla="*/ 2649 h 8459459"/>
+              <a:gd name="csX2" fmla="*/ 4196225 w 4839523"/>
+              <a:gd name="csY2" fmla="*/ 3329929 h 8459459"/>
+              <a:gd name="csX3" fmla="*/ 823920 w 4839523"/>
+              <a:gd name="csY3" fmla="*/ 8458144 h 8459459"/>
+              <a:gd name="csX4" fmla="*/ 183453 w 4839523"/>
+              <a:gd name="csY4" fmla="*/ 2878424 h 8459459"/>
+              <a:gd name="csX0" fmla="*/ 50689 w 4706759"/>
+              <a:gd name="csY0" fmla="*/ 2878472 h 8635821"/>
+              <a:gd name="csX1" fmla="*/ 3345013 w 4706759"/>
+              <a:gd name="csY1" fmla="*/ 2697 h 8635821"/>
+              <a:gd name="csX2" fmla="*/ 4063461 w 4706759"/>
+              <a:gd name="csY2" fmla="*/ 3329977 h 8635821"/>
+              <a:gd name="csX3" fmla="*/ 1534192 w 4706759"/>
+              <a:gd name="csY3" fmla="*/ 8634574 h 8635821"/>
+              <a:gd name="csX4" fmla="*/ 50689 w 4706759"/>
+              <a:gd name="csY4" fmla="*/ 2878472 h 8635821"/>
+              <a:gd name="csX0" fmla="*/ 347528 w 5003598"/>
+              <a:gd name="csY0" fmla="*/ 2878472 h 8712612"/>
+              <a:gd name="csX1" fmla="*/ 3641852 w 5003598"/>
+              <a:gd name="csY1" fmla="*/ 2697 h 8712612"/>
+              <a:gd name="csX2" fmla="*/ 4360300 w 5003598"/>
+              <a:gd name="csY2" fmla="*/ 3329977 h 8712612"/>
+              <a:gd name="csX3" fmla="*/ 1831031 w 5003598"/>
+              <a:gd name="csY3" fmla="*/ 8634574 h 8712612"/>
+              <a:gd name="csX4" fmla="*/ 347528 w 5003598"/>
+              <a:gd name="csY4" fmla="*/ 2878472 h 8712612"/>
+              <a:gd name="csX0" fmla="*/ 755949 w 5412019"/>
+              <a:gd name="csY0" fmla="*/ 2878371 h 8343041"/>
+              <a:gd name="csX1" fmla="*/ 4050273 w 5412019"/>
+              <a:gd name="csY1" fmla="*/ 2596 h 8343041"/>
+              <a:gd name="csX2" fmla="*/ 4768721 w 5412019"/>
+              <a:gd name="csY2" fmla="*/ 3329876 h 8343041"/>
+              <a:gd name="csX3" fmla="*/ 1503293 w 5412019"/>
+              <a:gd name="csY3" fmla="*/ 8257937 h 8343041"/>
+              <a:gd name="csX4" fmla="*/ 755949 w 5412019"/>
+              <a:gd name="csY4" fmla="*/ 2878371 h 8343041"/>
+              <a:gd name="csX0" fmla="*/ 755949 w 5180572"/>
+              <a:gd name="csY0" fmla="*/ 2878371 h 8343041"/>
+              <a:gd name="csX1" fmla="*/ 4050273 w 5180572"/>
+              <a:gd name="csY1" fmla="*/ 2596 h 8343041"/>
+              <a:gd name="csX2" fmla="*/ 4768721 w 5180572"/>
+              <a:gd name="csY2" fmla="*/ 3329876 h 8343041"/>
+              <a:gd name="csX3" fmla="*/ 1503293 w 5180572"/>
+              <a:gd name="csY3" fmla="*/ 8257937 h 8343041"/>
+              <a:gd name="csX4" fmla="*/ 755949 w 5180572"/>
+              <a:gd name="csY4" fmla="*/ 2878371 h 8343041"/>
+              <a:gd name="csX0" fmla="*/ 755949 w 5180572"/>
+              <a:gd name="csY0" fmla="*/ 2878371 h 8337890"/>
+              <a:gd name="csX1" fmla="*/ 4050273 w 5180572"/>
+              <a:gd name="csY1" fmla="*/ 2596 h 8337890"/>
+              <a:gd name="csX2" fmla="*/ 4768721 w 5180572"/>
+              <a:gd name="csY2" fmla="*/ 3329876 h 8337890"/>
+              <a:gd name="csX3" fmla="*/ 1503293 w 5180572"/>
+              <a:gd name="csY3" fmla="*/ 8257937 h 8337890"/>
+              <a:gd name="csX4" fmla="*/ 755949 w 5180572"/>
+              <a:gd name="csY4" fmla="*/ 2878371 h 8337890"/>
+              <a:gd name="csX0" fmla="*/ 755949 w 5601609"/>
+              <a:gd name="csY0" fmla="*/ 2962031 h 8421550"/>
+              <a:gd name="csX1" fmla="*/ 4050273 w 5601609"/>
+              <a:gd name="csY1" fmla="*/ 86256 h 8421550"/>
+              <a:gd name="csX2" fmla="*/ 5577491 w 5601609"/>
+              <a:gd name="csY2" fmla="*/ 989920 h 8421550"/>
+              <a:gd name="csX3" fmla="*/ 4768721 w 5601609"/>
+              <a:gd name="csY3" fmla="*/ 3413536 h 8421550"/>
+              <a:gd name="csX4" fmla="*/ 1503293 w 5601609"/>
+              <a:gd name="csY4" fmla="*/ 8341597 h 8421550"/>
+              <a:gd name="csX5" fmla="*/ 755949 w 5601609"/>
+              <a:gd name="csY5" fmla="*/ 2962031 h 8421550"/>
+              <a:gd name="csX0" fmla="*/ 755949 w 5601609"/>
+              <a:gd name="csY0" fmla="*/ 2954571 h 8414090"/>
+              <a:gd name="csX1" fmla="*/ 4050273 w 5601609"/>
+              <a:gd name="csY1" fmla="*/ 78796 h 8414090"/>
+              <a:gd name="csX2" fmla="*/ 5577491 w 5601609"/>
+              <a:gd name="csY2" fmla="*/ 982460 h 8414090"/>
+              <a:gd name="csX3" fmla="*/ 4768721 w 5601609"/>
+              <a:gd name="csY3" fmla="*/ 3406076 h 8414090"/>
+              <a:gd name="csX4" fmla="*/ 1503293 w 5601609"/>
+              <a:gd name="csY4" fmla="*/ 8334137 h 8414090"/>
+              <a:gd name="csX5" fmla="*/ 755949 w 5601609"/>
+              <a:gd name="csY5" fmla="*/ 2954571 h 8414090"/>
+              <a:gd name="csX0" fmla="*/ 746220 w 5591880"/>
+              <a:gd name="csY0" fmla="*/ 2863760 h 8323279"/>
+              <a:gd name="csX1" fmla="*/ 3865525 w 5591880"/>
+              <a:gd name="csY1" fmla="*/ 86813 h 8323279"/>
+              <a:gd name="csX2" fmla="*/ 5567762 w 5591880"/>
+              <a:gd name="csY2" fmla="*/ 891649 h 8323279"/>
+              <a:gd name="csX3" fmla="*/ 4758992 w 5591880"/>
+              <a:gd name="csY3" fmla="*/ 3315265 h 8323279"/>
+              <a:gd name="csX4" fmla="*/ 1493564 w 5591880"/>
+              <a:gd name="csY4" fmla="*/ 8243326 h 8323279"/>
+              <a:gd name="csX5" fmla="*/ 746220 w 5591880"/>
+              <a:gd name="csY5" fmla="*/ 2863760 h 8323279"/>
+              <a:gd name="csX0" fmla="*/ 746220 w 5591880"/>
+              <a:gd name="csY0" fmla="*/ 2777767 h 8237286"/>
+              <a:gd name="csX1" fmla="*/ 3865525 w 5591880"/>
+              <a:gd name="csY1" fmla="*/ 820 h 8237286"/>
+              <a:gd name="csX2" fmla="*/ 5567762 w 5591880"/>
+              <a:gd name="csY2" fmla="*/ 805656 h 8237286"/>
+              <a:gd name="csX3" fmla="*/ 4758992 w 5591880"/>
+              <a:gd name="csY3" fmla="*/ 3229272 h 8237286"/>
+              <a:gd name="csX4" fmla="*/ 1493564 w 5591880"/>
+              <a:gd name="csY4" fmla="*/ 8157333 h 8237286"/>
+              <a:gd name="csX5" fmla="*/ 746220 w 5591880"/>
+              <a:gd name="csY5" fmla="*/ 2777767 h 8237286"/>
+              <a:gd name="csX0" fmla="*/ 679331 w 5524991"/>
+              <a:gd name="csY0" fmla="*/ 2851449 h 8310968"/>
+              <a:gd name="csX1" fmla="*/ 2562394 w 5524991"/>
+              <a:gd name="csY1" fmla="*/ 2647832 h 8310968"/>
+              <a:gd name="csX2" fmla="*/ 3798636 w 5524991"/>
+              <a:gd name="csY2" fmla="*/ 74502 h 8310968"/>
+              <a:gd name="csX3" fmla="*/ 5500873 w 5524991"/>
+              <a:gd name="csY3" fmla="*/ 879338 h 8310968"/>
+              <a:gd name="csX4" fmla="*/ 4692103 w 5524991"/>
+              <a:gd name="csY4" fmla="*/ 3302954 h 8310968"/>
+              <a:gd name="csX5" fmla="*/ 1426675 w 5524991"/>
+              <a:gd name="csY5" fmla="*/ 8231015 h 8310968"/>
+              <a:gd name="csX6" fmla="*/ 679331 w 5524991"/>
+              <a:gd name="csY6" fmla="*/ 2851449 h 8310968"/>
+              <a:gd name="csX0" fmla="*/ 250758 w 4418662"/>
+              <a:gd name="csY0" fmla="*/ 3606835 h 8231523"/>
+              <a:gd name="csX1" fmla="*/ 1456065 w 4418662"/>
+              <a:gd name="csY1" fmla="*/ 2647832 h 8231523"/>
+              <a:gd name="csX2" fmla="*/ 2692307 w 4418662"/>
+              <a:gd name="csY2" fmla="*/ 74502 h 8231523"/>
+              <a:gd name="csX3" fmla="*/ 4394544 w 4418662"/>
+              <a:gd name="csY3" fmla="*/ 879338 h 8231523"/>
+              <a:gd name="csX4" fmla="*/ 3585774 w 4418662"/>
+              <a:gd name="csY4" fmla="*/ 3302954 h 8231523"/>
+              <a:gd name="csX5" fmla="*/ 320346 w 4418662"/>
+              <a:gd name="csY5" fmla="*/ 8231015 h 8231523"/>
+              <a:gd name="csX6" fmla="*/ 250758 w 4418662"/>
+              <a:gd name="csY6" fmla="*/ 3606835 h 8231523"/>
+              <a:gd name="csX0" fmla="*/ 508860 w 4676764"/>
+              <a:gd name="csY0" fmla="*/ 3606835 h 8231501"/>
+              <a:gd name="csX1" fmla="*/ 1714167 w 4676764"/>
+              <a:gd name="csY1" fmla="*/ 2647832 h 8231501"/>
+              <a:gd name="csX2" fmla="*/ 2950409 w 4676764"/>
+              <a:gd name="csY2" fmla="*/ 74502 h 8231501"/>
+              <a:gd name="csX3" fmla="*/ 4652646 w 4676764"/>
+              <a:gd name="csY3" fmla="*/ 879338 h 8231501"/>
+              <a:gd name="csX4" fmla="*/ 3843876 w 4676764"/>
+              <a:gd name="csY4" fmla="*/ 3302954 h 8231501"/>
+              <a:gd name="csX5" fmla="*/ 578448 w 4676764"/>
+              <a:gd name="csY5" fmla="*/ 8231015 h 8231501"/>
+              <a:gd name="csX6" fmla="*/ 508860 w 4676764"/>
+              <a:gd name="csY6" fmla="*/ 3606835 h 8231501"/>
+              <a:gd name="csX0" fmla="*/ 248083 w 4415987"/>
+              <a:gd name="csY0" fmla="*/ 3610697 h 8235384"/>
+              <a:gd name="csX1" fmla="*/ 1402413 w 4415987"/>
+              <a:gd name="csY1" fmla="*/ 2716158 h 8235384"/>
+              <a:gd name="csX2" fmla="*/ 2689632 w 4415987"/>
+              <a:gd name="csY2" fmla="*/ 78364 h 8235384"/>
+              <a:gd name="csX3" fmla="*/ 4391869 w 4415987"/>
+              <a:gd name="csY3" fmla="*/ 883200 h 8235384"/>
+              <a:gd name="csX4" fmla="*/ 3583099 w 4415987"/>
+              <a:gd name="csY4" fmla="*/ 3306816 h 8235384"/>
+              <a:gd name="csX5" fmla="*/ 317671 w 4415987"/>
+              <a:gd name="csY5" fmla="*/ 8234877 h 8235384"/>
+              <a:gd name="csX6" fmla="*/ 248083 w 4415987"/>
+              <a:gd name="csY6" fmla="*/ 3610697 h 8235384"/>
+              <a:gd name="csX0" fmla="*/ 248083 w 4415987"/>
+              <a:gd name="csY0" fmla="*/ 3610697 h 8235384"/>
+              <a:gd name="csX1" fmla="*/ 1402413 w 4415987"/>
+              <a:gd name="csY1" fmla="*/ 2716158 h 8235384"/>
+              <a:gd name="csX2" fmla="*/ 2689632 w 4415987"/>
+              <a:gd name="csY2" fmla="*/ 78364 h 8235384"/>
+              <a:gd name="csX3" fmla="*/ 4391869 w 4415987"/>
+              <a:gd name="csY3" fmla="*/ 883200 h 8235384"/>
+              <a:gd name="csX4" fmla="*/ 3583099 w 4415987"/>
+              <a:gd name="csY4" fmla="*/ 3306816 h 8235384"/>
+              <a:gd name="csX5" fmla="*/ 317671 w 4415987"/>
+              <a:gd name="csY5" fmla="*/ 8234877 h 8235384"/>
+              <a:gd name="csX6" fmla="*/ 248083 w 4415987"/>
+              <a:gd name="csY6" fmla="*/ 3610697 h 8235384"/>
+              <a:gd name="csX0" fmla="*/ 85435 w 4710329"/>
+              <a:gd name="csY0" fmla="*/ 4423597 h 8242968"/>
+              <a:gd name="csX1" fmla="*/ 1696755 w 4710329"/>
+              <a:gd name="csY1" fmla="*/ 2716158 h 8242968"/>
+              <a:gd name="csX2" fmla="*/ 2983974 w 4710329"/>
+              <a:gd name="csY2" fmla="*/ 78364 h 8242968"/>
+              <a:gd name="csX3" fmla="*/ 4686211 w 4710329"/>
+              <a:gd name="csY3" fmla="*/ 883200 h 8242968"/>
+              <a:gd name="csX4" fmla="*/ 3877441 w 4710329"/>
+              <a:gd name="csY4" fmla="*/ 3306816 h 8242968"/>
+              <a:gd name="csX5" fmla="*/ 612013 w 4710329"/>
+              <a:gd name="csY5" fmla="*/ 8234877 h 8242968"/>
+              <a:gd name="csX6" fmla="*/ 85435 w 4710329"/>
+              <a:gd name="csY6" fmla="*/ 4423597 h 8242968"/>
+              <a:gd name="csX0" fmla="*/ 243944 w 4868838"/>
+              <a:gd name="csY0" fmla="*/ 4423597 h 8242846"/>
+              <a:gd name="csX1" fmla="*/ 1855264 w 4868838"/>
+              <a:gd name="csY1" fmla="*/ 2716158 h 8242846"/>
+              <a:gd name="csX2" fmla="*/ 3142483 w 4868838"/>
+              <a:gd name="csY2" fmla="*/ 78364 h 8242846"/>
+              <a:gd name="csX3" fmla="*/ 4844720 w 4868838"/>
+              <a:gd name="csY3" fmla="*/ 883200 h 8242846"/>
+              <a:gd name="csX4" fmla="*/ 4035950 w 4868838"/>
+              <a:gd name="csY4" fmla="*/ 3306816 h 8242846"/>
+              <a:gd name="csX5" fmla="*/ 770522 w 4868838"/>
+              <a:gd name="csY5" fmla="*/ 8234877 h 8242846"/>
+              <a:gd name="csX6" fmla="*/ 243944 w 4868838"/>
+              <a:gd name="csY6" fmla="*/ 4423597 h 8242846"/>
+              <a:gd name="csX0" fmla="*/ 1033724 w 5658618"/>
+              <a:gd name="csY0" fmla="*/ 4423597 h 8297012"/>
+              <a:gd name="csX1" fmla="*/ 2645044 w 5658618"/>
+              <a:gd name="csY1" fmla="*/ 2716158 h 8297012"/>
+              <a:gd name="csX2" fmla="*/ 3932263 w 5658618"/>
+              <a:gd name="csY2" fmla="*/ 78364 h 8297012"/>
+              <a:gd name="csX3" fmla="*/ 5634500 w 5658618"/>
+              <a:gd name="csY3" fmla="*/ 883200 h 8297012"/>
+              <a:gd name="csX4" fmla="*/ 4825730 w 5658618"/>
+              <a:gd name="csY4" fmla="*/ 3306816 h 8297012"/>
+              <a:gd name="csX5" fmla="*/ 1560302 w 5658618"/>
+              <a:gd name="csY5" fmla="*/ 8234877 h 8297012"/>
+              <a:gd name="csX6" fmla="*/ 7783 w 5658618"/>
+              <a:gd name="csY6" fmla="*/ 5976200 h 8297012"/>
+              <a:gd name="csX7" fmla="*/ 1033724 w 5658618"/>
+              <a:gd name="csY7" fmla="*/ 4423597 h 8297012"/>
+              <a:gd name="csX0" fmla="*/ 1033724 w 5658618"/>
+              <a:gd name="csY0" fmla="*/ 4423597 h 8392010"/>
+              <a:gd name="csX1" fmla="*/ 2645044 w 5658618"/>
+              <a:gd name="csY1" fmla="*/ 2716158 h 8392010"/>
+              <a:gd name="csX2" fmla="*/ 3932263 w 5658618"/>
+              <a:gd name="csY2" fmla="*/ 78364 h 8392010"/>
+              <a:gd name="csX3" fmla="*/ 5634500 w 5658618"/>
+              <a:gd name="csY3" fmla="*/ 883200 h 8392010"/>
+              <a:gd name="csX4" fmla="*/ 4825730 w 5658618"/>
+              <a:gd name="csY4" fmla="*/ 3306816 h 8392010"/>
+              <a:gd name="csX5" fmla="*/ 3076421 w 5658618"/>
+              <a:gd name="csY5" fmla="*/ 7655532 h 8392010"/>
+              <a:gd name="csX6" fmla="*/ 1560302 w 5658618"/>
+              <a:gd name="csY6" fmla="*/ 8234877 h 8392010"/>
+              <a:gd name="csX7" fmla="*/ 7783 w 5658618"/>
+              <a:gd name="csY7" fmla="*/ 5976200 h 8392010"/>
+              <a:gd name="csX8" fmla="*/ 1033724 w 5658618"/>
+              <a:gd name="csY8" fmla="*/ 4423597 h 8392010"/>
+              <a:gd name="csX0" fmla="*/ 1033724 w 5658618"/>
+              <a:gd name="csY0" fmla="*/ 4423597 h 8417076"/>
+              <a:gd name="csX1" fmla="*/ 2645044 w 5658618"/>
+              <a:gd name="csY1" fmla="*/ 2716158 h 8417076"/>
+              <a:gd name="csX2" fmla="*/ 3932263 w 5658618"/>
+              <a:gd name="csY2" fmla="*/ 78364 h 8417076"/>
+              <a:gd name="csX3" fmla="*/ 5634500 w 5658618"/>
+              <a:gd name="csY3" fmla="*/ 883200 h 8417076"/>
+              <a:gd name="csX4" fmla="*/ 4825730 w 5658618"/>
+              <a:gd name="csY4" fmla="*/ 3306816 h 8417076"/>
+              <a:gd name="csX5" fmla="*/ 3076421 w 5658618"/>
+              <a:gd name="csY5" fmla="*/ 7655532 h 8417076"/>
+              <a:gd name="csX6" fmla="*/ 1643805 w 5658618"/>
+              <a:gd name="csY6" fmla="*/ 8269278 h 8417076"/>
+              <a:gd name="csX7" fmla="*/ 7783 w 5658618"/>
+              <a:gd name="csY7" fmla="*/ 5976200 h 8417076"/>
+              <a:gd name="csX8" fmla="*/ 1033724 w 5658618"/>
+              <a:gd name="csY8" fmla="*/ 4423597 h 8417076"/>
+              <a:gd name="csX0" fmla="*/ 1036919 w 5661813"/>
+              <a:gd name="csY0" fmla="*/ 4423597 h 8314732"/>
+              <a:gd name="csX1" fmla="*/ 2648239 w 5661813"/>
+              <a:gd name="csY1" fmla="*/ 2716158 h 8314732"/>
+              <a:gd name="csX2" fmla="*/ 3935458 w 5661813"/>
+              <a:gd name="csY2" fmla="*/ 78364 h 8314732"/>
+              <a:gd name="csX3" fmla="*/ 5637695 w 5661813"/>
+              <a:gd name="csY3" fmla="*/ 883200 h 8314732"/>
+              <a:gd name="csX4" fmla="*/ 4828925 w 5661813"/>
+              <a:gd name="csY4" fmla="*/ 3306816 h 8314732"/>
+              <a:gd name="csX5" fmla="*/ 3079616 w 5661813"/>
+              <a:gd name="csY5" fmla="*/ 7655532 h 8314732"/>
+              <a:gd name="csX6" fmla="*/ 1647000 w 5661813"/>
+              <a:gd name="csY6" fmla="*/ 8269278 h 8314732"/>
+              <a:gd name="csX7" fmla="*/ 430726 w 5661813"/>
+              <a:gd name="csY7" fmla="*/ 7357855 h 8314732"/>
+              <a:gd name="csX8" fmla="*/ 10978 w 5661813"/>
+              <a:gd name="csY8" fmla="*/ 5976200 h 8314732"/>
+              <a:gd name="csX9" fmla="*/ 1036919 w 5661813"/>
+              <a:gd name="csY9" fmla="*/ 4423597 h 8314732"/>
+              <a:gd name="csX0" fmla="*/ 1036919 w 5713201"/>
+              <a:gd name="csY0" fmla="*/ 4423597 h 8314732"/>
+              <a:gd name="csX1" fmla="*/ 2648239 w 5713201"/>
+              <a:gd name="csY1" fmla="*/ 2716158 h 8314732"/>
+              <a:gd name="csX2" fmla="*/ 3935458 w 5713201"/>
+              <a:gd name="csY2" fmla="*/ 78364 h 8314732"/>
+              <a:gd name="csX3" fmla="*/ 5637695 w 5713201"/>
+              <a:gd name="csY3" fmla="*/ 883200 h 8314732"/>
+              <a:gd name="csX4" fmla="*/ 4828925 w 5713201"/>
+              <a:gd name="csY4" fmla="*/ 3306816 h 8314732"/>
+              <a:gd name="csX5" fmla="*/ 3079616 w 5713201"/>
+              <a:gd name="csY5" fmla="*/ 7655532 h 8314732"/>
+              <a:gd name="csX6" fmla="*/ 1647000 w 5713201"/>
+              <a:gd name="csY6" fmla="*/ 8269278 h 8314732"/>
+              <a:gd name="csX7" fmla="*/ 430726 w 5713201"/>
+              <a:gd name="csY7" fmla="*/ 7357855 h 8314732"/>
+              <a:gd name="csX8" fmla="*/ 10978 w 5713201"/>
+              <a:gd name="csY8" fmla="*/ 5976200 h 8314732"/>
+              <a:gd name="csX9" fmla="*/ 1036919 w 5713201"/>
+              <a:gd name="csY9" fmla="*/ 4423597 h 8314732"/>
+              <a:gd name="csX0" fmla="*/ 1036919 w 5713201"/>
+              <a:gd name="csY0" fmla="*/ 4423790 h 8314925"/>
+              <a:gd name="csX1" fmla="*/ 2648239 w 5713201"/>
+              <a:gd name="csY1" fmla="*/ 2716351 h 8314925"/>
+              <a:gd name="csX2" fmla="*/ 3935458 w 5713201"/>
+              <a:gd name="csY2" fmla="*/ 78557 h 8314925"/>
+              <a:gd name="csX3" fmla="*/ 5637695 w 5713201"/>
+              <a:gd name="csY3" fmla="*/ 883393 h 8314925"/>
+              <a:gd name="csX4" fmla="*/ 4828925 w 5713201"/>
+              <a:gd name="csY4" fmla="*/ 3307009 h 8314925"/>
+              <a:gd name="csX5" fmla="*/ 3079616 w 5713201"/>
+              <a:gd name="csY5" fmla="*/ 7655725 h 8314925"/>
+              <a:gd name="csX6" fmla="*/ 1647000 w 5713201"/>
+              <a:gd name="csY6" fmla="*/ 8269471 h 8314925"/>
+              <a:gd name="csX7" fmla="*/ 430726 w 5713201"/>
+              <a:gd name="csY7" fmla="*/ 7358048 h 8314925"/>
+              <a:gd name="csX8" fmla="*/ 10978 w 5713201"/>
+              <a:gd name="csY8" fmla="*/ 5976393 h 8314925"/>
+              <a:gd name="csX9" fmla="*/ 1036919 w 5713201"/>
+              <a:gd name="csY9" fmla="*/ 4423790 h 8314925"/>
+              <a:gd name="csX0" fmla="*/ 1036919 w 5713201"/>
+              <a:gd name="csY0" fmla="*/ 4391860 h 8282995"/>
+              <a:gd name="csX1" fmla="*/ 2648239 w 5713201"/>
+              <a:gd name="csY1" fmla="*/ 2684421 h 8282995"/>
+              <a:gd name="csX2" fmla="*/ 3872206 w 5713201"/>
+              <a:gd name="csY2" fmla="*/ 81616 h 8282995"/>
+              <a:gd name="csX3" fmla="*/ 5637695 w 5713201"/>
+              <a:gd name="csY3" fmla="*/ 851463 h 8282995"/>
+              <a:gd name="csX4" fmla="*/ 4828925 w 5713201"/>
+              <a:gd name="csY4" fmla="*/ 3275079 h 8282995"/>
+              <a:gd name="csX5" fmla="*/ 3079616 w 5713201"/>
+              <a:gd name="csY5" fmla="*/ 7623795 h 8282995"/>
+              <a:gd name="csX6" fmla="*/ 1647000 w 5713201"/>
+              <a:gd name="csY6" fmla="*/ 8237541 h 8282995"/>
+              <a:gd name="csX7" fmla="*/ 430726 w 5713201"/>
+              <a:gd name="csY7" fmla="*/ 7326118 h 8282995"/>
+              <a:gd name="csX8" fmla="*/ 10978 w 5713201"/>
+              <a:gd name="csY8" fmla="*/ 5944463 h 8282995"/>
+              <a:gd name="csX9" fmla="*/ 1036919 w 5713201"/>
+              <a:gd name="csY9" fmla="*/ 4391860 h 8282995"/>
+              <a:gd name="csX0" fmla="*/ 1036919 w 5713201"/>
+              <a:gd name="csY0" fmla="*/ 4339825 h 8230960"/>
+              <a:gd name="csX1" fmla="*/ 2648239 w 5713201"/>
+              <a:gd name="csY1" fmla="*/ 2632386 h 8230960"/>
+              <a:gd name="csX2" fmla="*/ 3872206 w 5713201"/>
+              <a:gd name="csY2" fmla="*/ 29581 h 8230960"/>
+              <a:gd name="csX3" fmla="*/ 5637695 w 5713201"/>
+              <a:gd name="csY3" fmla="*/ 799428 h 8230960"/>
+              <a:gd name="csX4" fmla="*/ 4828925 w 5713201"/>
+              <a:gd name="csY4" fmla="*/ 3223044 h 8230960"/>
+              <a:gd name="csX5" fmla="*/ 3079616 w 5713201"/>
+              <a:gd name="csY5" fmla="*/ 7571760 h 8230960"/>
+              <a:gd name="csX6" fmla="*/ 1647000 w 5713201"/>
+              <a:gd name="csY6" fmla="*/ 8185506 h 8230960"/>
+              <a:gd name="csX7" fmla="*/ 430726 w 5713201"/>
+              <a:gd name="csY7" fmla="*/ 7274083 h 8230960"/>
+              <a:gd name="csX8" fmla="*/ 10978 w 5713201"/>
+              <a:gd name="csY8" fmla="*/ 5892428 h 8230960"/>
+              <a:gd name="csX9" fmla="*/ 1036919 w 5713201"/>
+              <a:gd name="csY9" fmla="*/ 4339825 h 8230960"/>
+              <a:gd name="csX0" fmla="*/ 1036919 w 5714556"/>
+              <a:gd name="csY0" fmla="*/ 4339825 h 8230960"/>
+              <a:gd name="csX1" fmla="*/ 2648239 w 5714556"/>
+              <a:gd name="csY1" fmla="*/ 2632386 h 8230960"/>
+              <a:gd name="csX2" fmla="*/ 3872206 w 5714556"/>
+              <a:gd name="csY2" fmla="*/ 29581 h 8230960"/>
+              <a:gd name="csX3" fmla="*/ 5637695 w 5714556"/>
+              <a:gd name="csY3" fmla="*/ 799428 h 8230960"/>
+              <a:gd name="csX4" fmla="*/ 4842450 w 5714556"/>
+              <a:gd name="csY4" fmla="*/ 3130941 h 8230960"/>
+              <a:gd name="csX5" fmla="*/ 3079616 w 5714556"/>
+              <a:gd name="csY5" fmla="*/ 7571760 h 8230960"/>
+              <a:gd name="csX6" fmla="*/ 1647000 w 5714556"/>
+              <a:gd name="csY6" fmla="*/ 8185506 h 8230960"/>
+              <a:gd name="csX7" fmla="*/ 430726 w 5714556"/>
+              <a:gd name="csY7" fmla="*/ 7274083 h 8230960"/>
+              <a:gd name="csX8" fmla="*/ 10978 w 5714556"/>
+              <a:gd name="csY8" fmla="*/ 5892428 h 8230960"/>
+              <a:gd name="csX9" fmla="*/ 1036919 w 5714556"/>
+              <a:gd name="csY9" fmla="*/ 4339825 h 8230960"/>
+              <a:gd name="csX0" fmla="*/ 1036919 w 5714556"/>
+              <a:gd name="csY0" fmla="*/ 4339825 h 8300703"/>
+              <a:gd name="csX1" fmla="*/ 2648239 w 5714556"/>
+              <a:gd name="csY1" fmla="*/ 2632386 h 8300703"/>
+              <a:gd name="csX2" fmla="*/ 3872206 w 5714556"/>
+              <a:gd name="csY2" fmla="*/ 29581 h 8300703"/>
+              <a:gd name="csX3" fmla="*/ 5637695 w 5714556"/>
+              <a:gd name="csY3" fmla="*/ 799428 h 8300703"/>
+              <a:gd name="csX4" fmla="*/ 4842450 w 5714556"/>
+              <a:gd name="csY4" fmla="*/ 3130941 h 8300703"/>
+              <a:gd name="csX5" fmla="*/ 3035989 w 5714556"/>
+              <a:gd name="csY5" fmla="*/ 7736927 h 8300703"/>
+              <a:gd name="csX6" fmla="*/ 1647000 w 5714556"/>
+              <a:gd name="csY6" fmla="*/ 8185506 h 8300703"/>
+              <a:gd name="csX7" fmla="*/ 430726 w 5714556"/>
+              <a:gd name="csY7" fmla="*/ 7274083 h 8300703"/>
+              <a:gd name="csX8" fmla="*/ 10978 w 5714556"/>
+              <a:gd name="csY8" fmla="*/ 5892428 h 8300703"/>
+              <a:gd name="csX9" fmla="*/ 1036919 w 5714556"/>
+              <a:gd name="csY9" fmla="*/ 4339825 h 8300703"/>
+              <a:gd name="csX0" fmla="*/ 1036919 w 5714556"/>
+              <a:gd name="csY0" fmla="*/ 4339825 h 8315686"/>
+              <a:gd name="csX1" fmla="*/ 2648239 w 5714556"/>
+              <a:gd name="csY1" fmla="*/ 2632386 h 8315686"/>
+              <a:gd name="csX2" fmla="*/ 3872206 w 5714556"/>
+              <a:gd name="csY2" fmla="*/ 29581 h 8315686"/>
+              <a:gd name="csX3" fmla="*/ 5637695 w 5714556"/>
+              <a:gd name="csY3" fmla="*/ 799428 h 8315686"/>
+              <a:gd name="csX4" fmla="*/ 4842450 w 5714556"/>
+              <a:gd name="csY4" fmla="*/ 3130941 h 8315686"/>
+              <a:gd name="csX5" fmla="*/ 3035989 w 5714556"/>
+              <a:gd name="csY5" fmla="*/ 7736927 h 8315686"/>
+              <a:gd name="csX6" fmla="*/ 1709626 w 5714556"/>
+              <a:gd name="csY6" fmla="*/ 8211307 h 8315686"/>
+              <a:gd name="csX7" fmla="*/ 430726 w 5714556"/>
+              <a:gd name="csY7" fmla="*/ 7274083 h 8315686"/>
+              <a:gd name="csX8" fmla="*/ 10978 w 5714556"/>
+              <a:gd name="csY8" fmla="*/ 5892428 h 8315686"/>
+              <a:gd name="csX9" fmla="*/ 1036919 w 5714556"/>
+              <a:gd name="csY9" fmla="*/ 4339825 h 8315686"/>
+              <a:gd name="csX0" fmla="*/ 1041511 w 5719148"/>
+              <a:gd name="csY0" fmla="*/ 4339825 h 8318068"/>
+              <a:gd name="csX1" fmla="*/ 2652831 w 5719148"/>
+              <a:gd name="csY1" fmla="*/ 2632386 h 8318068"/>
+              <a:gd name="csX2" fmla="*/ 3876798 w 5719148"/>
+              <a:gd name="csY2" fmla="*/ 29581 h 8318068"/>
+              <a:gd name="csX3" fmla="*/ 5642287 w 5719148"/>
+              <a:gd name="csY3" fmla="*/ 799428 h 8318068"/>
+              <a:gd name="csX4" fmla="*/ 4847042 w 5719148"/>
+              <a:gd name="csY4" fmla="*/ 3130941 h 8318068"/>
+              <a:gd name="csX5" fmla="*/ 3040581 w 5719148"/>
+              <a:gd name="csY5" fmla="*/ 7736927 h 8318068"/>
+              <a:gd name="csX6" fmla="*/ 1714218 w 5719148"/>
+              <a:gd name="csY6" fmla="*/ 8211307 h 8318068"/>
+              <a:gd name="csX7" fmla="*/ 351816 w 5719148"/>
+              <a:gd name="csY7" fmla="*/ 7239682 h 8318068"/>
+              <a:gd name="csX8" fmla="*/ 15570 w 5719148"/>
+              <a:gd name="csY8" fmla="*/ 5892428 h 8318068"/>
+              <a:gd name="csX9" fmla="*/ 1041511 w 5719148"/>
+              <a:gd name="csY9" fmla="*/ 4339825 h 8318068"/>
+              <a:gd name="csX0" fmla="*/ 1150008 w 5827645"/>
+              <a:gd name="csY0" fmla="*/ 4339825 h 8318068"/>
+              <a:gd name="csX1" fmla="*/ 2761328 w 5827645"/>
+              <a:gd name="csY1" fmla="*/ 2632386 h 8318068"/>
+              <a:gd name="csX2" fmla="*/ 3985295 w 5827645"/>
+              <a:gd name="csY2" fmla="*/ 29581 h 8318068"/>
+              <a:gd name="csX3" fmla="*/ 5750784 w 5827645"/>
+              <a:gd name="csY3" fmla="*/ 799428 h 8318068"/>
+              <a:gd name="csX4" fmla="*/ 4955539 w 5827645"/>
+              <a:gd name="csY4" fmla="*/ 3130941 h 8318068"/>
+              <a:gd name="csX5" fmla="*/ 3149078 w 5827645"/>
+              <a:gd name="csY5" fmla="*/ 7736927 h 8318068"/>
+              <a:gd name="csX6" fmla="*/ 1822715 w 5827645"/>
+              <a:gd name="csY6" fmla="*/ 8211307 h 8318068"/>
+              <a:gd name="csX7" fmla="*/ 460313 w 5827645"/>
+              <a:gd name="csY7" fmla="*/ 7239682 h 8318068"/>
+              <a:gd name="csX8" fmla="*/ 9876 w 5827645"/>
+              <a:gd name="csY8" fmla="*/ 5784338 h 8318068"/>
+              <a:gd name="csX9" fmla="*/ 1150008 w 5827645"/>
+              <a:gd name="csY9" fmla="*/ 4339825 h 8318068"/>
+              <a:gd name="csX0" fmla="*/ 959078 w 5827645"/>
+              <a:gd name="csY0" fmla="*/ 4151281 h 8318068"/>
+              <a:gd name="csX1" fmla="*/ 2761328 w 5827645"/>
+              <a:gd name="csY1" fmla="*/ 2632386 h 8318068"/>
+              <a:gd name="csX2" fmla="*/ 3985295 w 5827645"/>
+              <a:gd name="csY2" fmla="*/ 29581 h 8318068"/>
+              <a:gd name="csX3" fmla="*/ 5750784 w 5827645"/>
+              <a:gd name="csY3" fmla="*/ 799428 h 8318068"/>
+              <a:gd name="csX4" fmla="*/ 4955539 w 5827645"/>
+              <a:gd name="csY4" fmla="*/ 3130941 h 8318068"/>
+              <a:gd name="csX5" fmla="*/ 3149078 w 5827645"/>
+              <a:gd name="csY5" fmla="*/ 7736927 h 8318068"/>
+              <a:gd name="csX6" fmla="*/ 1822715 w 5827645"/>
+              <a:gd name="csY6" fmla="*/ 8211307 h 8318068"/>
+              <a:gd name="csX7" fmla="*/ 460313 w 5827645"/>
+              <a:gd name="csY7" fmla="*/ 7239682 h 8318068"/>
+              <a:gd name="csX8" fmla="*/ 9876 w 5827645"/>
+              <a:gd name="csY8" fmla="*/ 5784338 h 8318068"/>
+              <a:gd name="csX9" fmla="*/ 959078 w 5827645"/>
+              <a:gd name="csY9" fmla="*/ 4151281 h 8318068"/>
+            </a:gdLst>
+            <a:ahLst/>
+            <a:cxnLst>
+              <a:cxn ang="0">
+                <a:pos x="csX0" y="csY0"/>
+              </a:cxn>
+              <a:cxn ang="0">
+                <a:pos x="csX1" y="csY1"/>
+              </a:cxn>
+              <a:cxn ang="0">
+                <a:pos x="csX2" y="csY2"/>
+              </a:cxn>
+              <a:cxn ang="0">
+                <a:pos x="csX3" y="csY3"/>
+              </a:cxn>
+              <a:cxn ang="0">
+                <a:pos x="csX4" y="csY4"/>
+              </a:cxn>
+              <a:cxn ang="0">
+                <a:pos x="csX5" y="csY5"/>
+              </a:cxn>
+              <a:cxn ang="0">
+                <a:pos x="csX6" y="csY6"/>
+              </a:cxn>
+              <a:cxn ang="0">
+                <a:pos x="csX7" y="csY7"/>
+              </a:cxn>
+              <a:cxn ang="0">
+                <a:pos x="csX8" y="csY8"/>
+              </a:cxn>
+              <a:cxn ang="0">
+                <a:pos x="csX9" y="csY9"/>
+              </a:cxn>
+            </a:cxnLst>
+            <a:rect l="l" t="t" r="r" b="b"/>
+            <a:pathLst>
+              <a:path w="5827645" h="8318068">
+                <a:moveTo>
+                  <a:pt x="959078" y="4151281"/>
+                </a:moveTo>
+                <a:cubicBezTo>
+                  <a:pt x="1417653" y="3625956"/>
+                  <a:pt x="1953373" y="3586998"/>
+                  <a:pt x="2761328" y="2632386"/>
+                </a:cubicBezTo>
+                <a:cubicBezTo>
+                  <a:pt x="3281212" y="2169562"/>
+                  <a:pt x="3293659" y="182144"/>
+                  <a:pt x="3985295" y="29581"/>
+                </a:cubicBezTo>
+                <a:cubicBezTo>
+                  <a:pt x="4676931" y="-122982"/>
+                  <a:pt x="5273657" y="341831"/>
+                  <a:pt x="5750784" y="799428"/>
+                </a:cubicBezTo>
+                <a:cubicBezTo>
+                  <a:pt x="6017903" y="1292599"/>
+                  <a:pt x="5549121" y="1890807"/>
+                  <a:pt x="4955539" y="3130941"/>
+                </a:cubicBezTo>
+                <a:cubicBezTo>
+                  <a:pt x="4448772" y="4163450"/>
+                  <a:pt x="3693316" y="6915584"/>
+                  <a:pt x="3149078" y="7736927"/>
+                </a:cubicBezTo>
+                <a:cubicBezTo>
+                  <a:pt x="2604840" y="8558270"/>
+                  <a:pt x="2270843" y="8294181"/>
+                  <a:pt x="1822715" y="8211307"/>
+                </a:cubicBezTo>
+                <a:cubicBezTo>
+                  <a:pt x="1374587" y="8128433"/>
+                  <a:pt x="732983" y="7621862"/>
+                  <a:pt x="460313" y="7239682"/>
+                </a:cubicBezTo>
+                <a:cubicBezTo>
+                  <a:pt x="187643" y="6857502"/>
+                  <a:pt x="-52161" y="6252818"/>
+                  <a:pt x="9876" y="5784338"/>
+                </a:cubicBezTo>
+                <a:cubicBezTo>
+                  <a:pt x="-77887" y="5149125"/>
+                  <a:pt x="500503" y="4676606"/>
+                  <a:pt x="959078" y="4151281"/>
+                </a:cubicBezTo>
+                <a:close/>
+              </a:path>
+            </a:pathLst>
+          </a:custGeom>
+          <a:solidFill>
+            <a:schemeClr val="accent2">
+              <a:lumMod val="20000"/>
+              <a:lumOff val="80000"/>
+            </a:schemeClr>
+          </a:solidFill>
+          <a:ln w="28575">
+            <a:noFill/>
+            <a:prstDash val="solid"/>
+          </a:ln>
+          <a:effectLst/>
+        </p:spPr>
+        <p:style>
+          <a:lnRef idx="0">
+            <a:schemeClr val="accent4"/>
+          </a:lnRef>
+          <a:fillRef idx="3">
+            <a:schemeClr val="accent4"/>
+          </a:fillRef>
+          <a:effectRef idx="3">
+            <a:schemeClr val="accent4"/>
+          </a:effectRef>
+          <a:fontRef idx="minor">
+            <a:schemeClr val="lt1"/>
+          </a:fontRef>
+        </p:style>
+        <p:txBody>
+          <a:bodyPr rtlCol="1" anchor="ctr"/>
+          <a:lstStyle/>
+          <a:p>
+            <a:pPr algn="r" rtl="1"/>
+            <a:endParaRPr lang="en-US" sz="4400" b="1">
+              <a:solidFill>
+                <a:schemeClr val="bg1"/>
+              </a:solidFill>
+              <a:highlight>
+                <a:srgbClr val="800080"/>
+              </a:highlight>
+              <a:latin typeface="Segoe UI" panose="020B0502040204020203" pitchFamily="34" charset="0"/>
+              <a:cs typeface="Segoe UI" panose="020B0502040204020203" pitchFamily="34" charset="0"/>
+            </a:endParaRPr>
+          </a:p>
+        </p:txBody>
+      </p:sp>
+      <p:sp>
+        <p:nvSpPr>
           <p:cNvPr id="9" name="Rectangle: Rounded Corners 19">
             <a:extLst>
               <a:ext uri="{FF2B5EF4-FFF2-40B4-BE49-F238E27FC236}">
@@ -3127,7 +6104,7 @@
         </p:nvSpPr>
         <p:spPr bwMode="auto">
           <a:xfrm>
-            <a:off x="3735761" y="6245248"/>
+            <a:off x="3877268" y="7156549"/>
             <a:ext cx="1808459" cy="1190826"/>
           </a:xfrm>
           <a:prstGeom prst="roundRect">
@@ -3304,8 +6281,8 @@
         </p:nvSpPr>
         <p:spPr bwMode="auto">
           <a:xfrm>
-            <a:off x="5415117" y="6048573"/>
-            <a:ext cx="1230158" cy="1634612"/>
+            <a:off x="4870016" y="5792663"/>
+            <a:ext cx="1560817" cy="1634612"/>
           </a:xfrm>
           <a:prstGeom prst="roundRect">
             <a:avLst>
@@ -3525,7 +6502,7 @@
         </p:nvSpPr>
         <p:spPr bwMode="auto">
           <a:xfrm>
-            <a:off x="1598050" y="4720286"/>
+            <a:off x="1641714" y="3131727"/>
             <a:ext cx="1182039" cy="1199659"/>
           </a:xfrm>
           <a:prstGeom prst="roundRect">
@@ -3692,7 +6669,7 @@
         </p:nvSpPr>
         <p:spPr bwMode="auto">
           <a:xfrm>
-            <a:off x="1956422" y="2085954"/>
+            <a:off x="2433261" y="5434973"/>
             <a:ext cx="1182038" cy="900550"/>
           </a:xfrm>
           <a:prstGeom prst="roundRect">
@@ -3738,7 +6715,7 @@
                   <a:schemeClr val="bg1"/>
                 </a:solidFill>
                 <a:highlight>
-                  <a:srgbClr val="008080"/>
+                  <a:srgbClr val="000000"/>
                 </a:highlight>
                 <a:latin typeface="Segoe UI" panose="020B0502040204020203" pitchFamily="34" charset="0"/>
                 <a:cs typeface="Segoe UI" panose="020B0502040204020203" pitchFamily="34" charset="0"/>
@@ -4158,7 +7135,7 @@
         <p:spPr bwMode="auto">
           <a:xfrm>
             <a:off x="5612526" y="2562764"/>
-            <a:ext cx="1545810" cy="1528199"/>
+            <a:ext cx="1614208" cy="1528199"/>
           </a:xfrm>
           <a:prstGeom prst="roundRect">
             <a:avLst>
@@ -4170,7 +7147,7 @@
           </a:solidFill>
           <a:ln>
             <a:solidFill>
-              <a:srgbClr val="C00000"/>
+              <a:schemeClr val="accent6"/>
             </a:solidFill>
             <a:prstDash val="lgDash"/>
           </a:ln>
@@ -4203,7 +7180,7 @@
                   <a:schemeClr val="bg1"/>
                 </a:solidFill>
                 <a:highlight>
-                  <a:srgbClr val="800000"/>
+                  <a:srgbClr val="008080"/>
                 </a:highlight>
                 <a:latin typeface="Segoe UI" panose="020B0502040204020203" pitchFamily="34" charset="0"/>
                 <a:ea typeface="Arial"/>
@@ -4399,7 +7376,7 @@
         </p:nvSpPr>
         <p:spPr bwMode="auto">
           <a:xfrm>
-            <a:off x="2579479" y="3750647"/>
+            <a:off x="2599790" y="2128356"/>
             <a:ext cx="1757728" cy="1759977"/>
           </a:xfrm>
           <a:prstGeom prst="roundRect">
@@ -4647,167 +7624,6 @@
       </p:sp>
       <p:sp>
         <p:nvSpPr>
-          <p:cNvPr id="8" name="Rectangle: Rounded Corners 18">
-            <a:extLst>
-              <a:ext uri="{FF2B5EF4-FFF2-40B4-BE49-F238E27FC236}">
-                <a16:creationId xmlns:a16="http://schemas.microsoft.com/office/drawing/2014/main" id="{CF51E3CE-E401-764F-903E-3F496D6649AD}"/>
-              </a:ext>
-            </a:extLst>
-          </p:cNvPr>
-          <p:cNvSpPr/>
-          <p:nvPr/>
-        </p:nvSpPr>
-        <p:spPr bwMode="auto">
-          <a:xfrm>
-            <a:off x="6927218" y="548448"/>
-            <a:ext cx="1366069" cy="1179645"/>
-          </a:xfrm>
-          <a:prstGeom prst="roundRect">
-            <a:avLst>
-              <a:gd name="adj" fmla="val 5397"/>
-            </a:avLst>
-          </a:prstGeom>
-          <a:solidFill>
-            <a:schemeClr val="bg1"/>
-          </a:solidFill>
-          <a:ln>
-            <a:solidFill>
-              <a:srgbClr val="C00000"/>
-            </a:solidFill>
-            <a:prstDash val="lgDash"/>
-          </a:ln>
-          <a:effectLst/>
-        </p:spPr>
-        <p:style>
-          <a:lnRef idx="0">
-            <a:schemeClr val="accent4"/>
-          </a:lnRef>
-          <a:fillRef idx="3">
-            <a:schemeClr val="accent4"/>
-          </a:fillRef>
-          <a:effectRef idx="3">
-            <a:schemeClr val="accent4"/>
-          </a:effectRef>
-          <a:fontRef idx="minor">
-            <a:schemeClr val="lt1"/>
-          </a:fontRef>
-        </p:style>
-        <p:txBody>
-          <a:bodyPr rtlCol="1" anchor="ctr"/>
-          <a:lstStyle/>
-          <a:p>
-            <a:pPr algn="l" rtl="0">
-              <a:defRPr/>
-            </a:pPr>
-            <a:r>
-              <a:rPr lang="en-US" sz="1707" b="1">
-                <a:solidFill>
-                  <a:schemeClr val="bg1"/>
-                </a:solidFill>
-                <a:highlight>
-                  <a:srgbClr val="800000"/>
-                </a:highlight>
-                <a:latin typeface="Segoe UI" panose="020B0502040204020203" pitchFamily="34" charset="0"/>
-                <a:cs typeface="Segoe UI" panose="020B0502040204020203" pitchFamily="34" charset="0"/>
-              </a:rPr>
-              <a:t>CT</a:t>
-            </a:r>
-          </a:p>
-          <a:p>
-            <a:pPr rtl="0">
-              <a:defRPr/>
-            </a:pPr>
-            <a:r>
-              <a:rPr lang="en-US" sz="1280" b="1">
-                <a:solidFill>
-                  <a:schemeClr val="tx1"/>
-                </a:solidFill>
-                <a:latin typeface="Segoe UI" panose="020B0502040204020203" pitchFamily="34" charset="0"/>
-                <a:cs typeface="Segoe UI" panose="020B0502040204020203" pitchFamily="34" charset="0"/>
-              </a:rPr>
-              <a:t>CourseTopics</a:t>
-            </a:r>
-            <a:endParaRPr sz="1280">
-              <a:solidFill>
-                <a:schemeClr val="tx1"/>
-              </a:solidFill>
-              <a:latin typeface="Segoe UI" panose="020B0502040204020203" pitchFamily="34" charset="0"/>
-              <a:cs typeface="Segoe UI" panose="020B0502040204020203" pitchFamily="34" charset="0"/>
-            </a:endParaRPr>
-          </a:p>
-          <a:p>
-            <a:pPr rtl="0">
-              <a:defRPr/>
-            </a:pPr>
-            <a:r>
-              <a:rPr lang="en-US" sz="853" i="1">
-                <a:solidFill>
-                  <a:schemeClr val="accent5"/>
-                </a:solidFill>
-                <a:latin typeface="Segoe UI" panose="020B0502040204020203" pitchFamily="34" charset="0"/>
-                <a:cs typeface="Segoe UI" panose="020B0502040204020203" pitchFamily="34" charset="0"/>
-              </a:rPr>
-              <a:t>CourseTopicId</a:t>
-            </a:r>
-          </a:p>
-          <a:p>
-            <a:pPr rtl="0">
-              <a:defRPr/>
-            </a:pPr>
-            <a:r>
-              <a:rPr lang="en-US" sz="853">
-                <a:solidFill>
-                  <a:schemeClr val="tx1"/>
-                </a:solidFill>
-                <a:latin typeface="Segoe UI" panose="020B0502040204020203" pitchFamily="34" charset="0"/>
-                <a:cs typeface="Segoe UI" panose="020B0502040204020203" pitchFamily="34" charset="0"/>
-              </a:rPr>
-              <a:t>CourseId</a:t>
-            </a:r>
-          </a:p>
-          <a:p>
-            <a:pPr rtl="0">
-              <a:defRPr/>
-            </a:pPr>
-            <a:r>
-              <a:rPr lang="en-US" sz="853">
-                <a:solidFill>
-                  <a:schemeClr val="tx1"/>
-                </a:solidFill>
-                <a:latin typeface="Segoe UI" panose="020B0502040204020203" pitchFamily="34" charset="0"/>
-                <a:cs typeface="Segoe UI" panose="020B0502040204020203" pitchFamily="34" charset="0"/>
-              </a:rPr>
-              <a:t>CourseTopicTitle</a:t>
-            </a:r>
-          </a:p>
-          <a:p>
-            <a:pPr rtl="0">
-              <a:defRPr/>
-            </a:pPr>
-            <a:endParaRPr lang="en-US" sz="853">
-              <a:solidFill>
-                <a:schemeClr val="tx1"/>
-              </a:solidFill>
-              <a:latin typeface="Segoe UI" panose="020B0502040204020203" pitchFamily="34" charset="0"/>
-              <a:cs typeface="Segoe UI" panose="020B0502040204020203" pitchFamily="34" charset="0"/>
-            </a:endParaRPr>
-          </a:p>
-          <a:p>
-            <a:pPr rtl="0">
-              <a:defRPr/>
-            </a:pPr>
-            <a:endParaRPr lang="en-US" sz="853">
-              <a:solidFill>
-                <a:schemeClr val="tx1"/>
-              </a:solidFill>
-              <a:latin typeface="Segoe UI" panose="020B0502040204020203" pitchFamily="34" charset="0"/>
-              <a:cs typeface="Segoe UI" panose="020B0502040204020203" pitchFamily="34" charset="0"/>
-            </a:endParaRPr>
-          </a:p>
-        </p:txBody>
-      </p:sp>
-      <p:sp>
-        <p:nvSpPr>
           <p:cNvPr id="6" name="Rectangle: Rounded Corners 8">
             <a:extLst>
               <a:ext uri="{FF2B5EF4-FFF2-40B4-BE49-F238E27FC236}">
@@ -4821,7 +7637,7 @@
         <p:spPr bwMode="auto">
           <a:xfrm>
             <a:off x="8424942" y="4090963"/>
-            <a:ext cx="2065492" cy="3588570"/>
+            <a:ext cx="1816421" cy="3387560"/>
           </a:xfrm>
           <a:prstGeom prst="roundRect">
             <a:avLst>
@@ -4871,7 +7687,7 @@
             </a:endParaRPr>
           </a:p>
           <a:p>
-            <a:pPr marL="625475" rtl="0">
+            <a:pPr marL="450850" rtl="0">
               <a:defRPr/>
             </a:pPr>
             <a:r>
@@ -4880,7 +7696,7 @@
                   <a:schemeClr val="bg1"/>
                 </a:solidFill>
                 <a:highlight>
-                  <a:srgbClr val="000000"/>
+                  <a:srgbClr val="008080"/>
                 </a:highlight>
                 <a:latin typeface="Segoe UI" panose="020B0502040204020203" pitchFamily="34" charset="0"/>
                 <a:cs typeface="Segoe UI" panose="020B0502040204020203" pitchFamily="34" charset="0"/>
@@ -4889,7 +7705,7 @@
             </a:r>
           </a:p>
           <a:p>
-            <a:pPr marL="625475" rtl="0">
+            <a:pPr marL="450850" rtl="0">
               <a:defRPr/>
             </a:pPr>
             <a:r>
@@ -4911,7 +7727,7 @@
             </a:endParaRPr>
           </a:p>
           <a:p>
-            <a:pPr marL="625475" rtl="0">
+            <a:pPr marL="450850" rtl="0">
               <a:defRPr/>
             </a:pPr>
             <a:r>
@@ -4926,7 +7742,7 @@
             </a:r>
           </a:p>
           <a:p>
-            <a:pPr marL="625475" rtl="0">
+            <a:pPr marL="450850" rtl="0">
               <a:defRPr/>
             </a:pPr>
             <a:r>
@@ -4941,7 +7757,7 @@
             </a:r>
           </a:p>
           <a:p>
-            <a:pPr marL="625475" rtl="0">
+            <a:pPr marL="450850" rtl="0">
               <a:defRPr/>
             </a:pPr>
             <a:r>
@@ -4956,7 +7772,7 @@
             </a:r>
           </a:p>
           <a:p>
-            <a:pPr marL="625475" rtl="0">
+            <a:pPr marL="450850" rtl="0">
               <a:defRPr/>
             </a:pPr>
             <a:r>
@@ -4971,7 +7787,7 @@
             </a:r>
           </a:p>
           <a:p>
-            <a:pPr marL="625475" rtl="0">
+            <a:pPr marL="450850" rtl="0">
               <a:defRPr/>
             </a:pPr>
             <a:r>
@@ -5006,7 +7822,7 @@
             </a:r>
           </a:p>
           <a:p>
-            <a:pPr marL="625475" rtl="0">
+            <a:pPr marL="450850" rtl="0">
               <a:defRPr/>
             </a:pPr>
             <a:r>
@@ -5021,7 +7837,7 @@
             </a:r>
           </a:p>
           <a:p>
-            <a:pPr marL="625475" rtl="0"/>
+            <a:pPr marL="450850" rtl="0"/>
             <a:r>
               <a:rPr lang="en-US" sz="853">
                 <a:solidFill>
@@ -5034,7 +7850,7 @@
             </a:r>
           </a:p>
           <a:p>
-            <a:pPr marL="625475" rtl="0"/>
+            <a:pPr marL="450850" rtl="0"/>
             <a:r>
               <a:rPr lang="en-US" sz="500" kern="100">
                 <a:solidFill>
@@ -5048,7 +7864,7 @@
             </a:r>
           </a:p>
           <a:p>
-            <a:pPr marL="625475" rtl="0"/>
+            <a:pPr marL="450850" rtl="0"/>
             <a:r>
               <a:rPr lang="en-US" sz="500" kern="100">
                 <a:solidFill>
@@ -5062,7 +7878,7 @@
             </a:r>
           </a:p>
           <a:p>
-            <a:pPr marL="625475" rtl="0"/>
+            <a:pPr marL="450850" rtl="0"/>
             <a:endParaRPr lang="en-US" sz="500" kern="100">
               <a:solidFill>
                 <a:srgbClr val="C00000"/>
@@ -5073,7 +7889,7 @@
             </a:endParaRPr>
           </a:p>
           <a:p>
-            <a:pPr marL="625475" rtl="0"/>
+            <a:pPr marL="450850" rtl="0"/>
             <a:endParaRPr lang="en-US" sz="500" kern="100">
               <a:solidFill>
                 <a:srgbClr val="C00000"/>
@@ -5084,7 +7900,7 @@
             </a:endParaRPr>
           </a:p>
           <a:p>
-            <a:pPr marL="625475" rtl="0"/>
+            <a:pPr marL="450850" rtl="0"/>
             <a:endParaRPr lang="en-US" sz="500" kern="100">
               <a:solidFill>
                 <a:srgbClr val="C00000"/>
@@ -5095,7 +7911,7 @@
             </a:endParaRPr>
           </a:p>
           <a:p>
-            <a:pPr marL="625475" rtl="0"/>
+            <a:pPr marL="450850" rtl="0"/>
             <a:endParaRPr lang="en-US" sz="500" kern="100">
               <a:solidFill>
                 <a:srgbClr val="C00000"/>
@@ -5106,7 +7922,7 @@
             </a:endParaRPr>
           </a:p>
           <a:p>
-            <a:pPr marL="625475" rtl="0"/>
+            <a:pPr marL="450850" rtl="0"/>
             <a:endParaRPr lang="en-US" sz="500" kern="100">
               <a:solidFill>
                 <a:srgbClr val="C00000"/>
@@ -5117,7 +7933,7 @@
             </a:endParaRPr>
           </a:p>
           <a:p>
-            <a:pPr marL="625475" rtl="0"/>
+            <a:pPr marL="450850" rtl="0"/>
             <a:endParaRPr lang="en-US" sz="500" kern="100">
               <a:solidFill>
                 <a:srgbClr val="C00000"/>
@@ -5128,7 +7944,7 @@
             </a:endParaRPr>
           </a:p>
           <a:p>
-            <a:pPr marL="625475" rtl="0"/>
+            <a:pPr marL="450850" rtl="0"/>
             <a:endParaRPr lang="en-US" sz="500" kern="100">
               <a:solidFill>
                 <a:srgbClr val="C00000"/>
@@ -5139,7 +7955,7 @@
             </a:endParaRPr>
           </a:p>
           <a:p>
-            <a:pPr marL="625475" rtl="0"/>
+            <a:pPr marL="450850" rtl="0"/>
             <a:endParaRPr lang="en-US" sz="500" kern="100">
               <a:solidFill>
                 <a:srgbClr val="C00000"/>
@@ -5150,7 +7966,7 @@
             </a:endParaRPr>
           </a:p>
           <a:p>
-            <a:pPr marL="625475" rtl="0"/>
+            <a:pPr marL="450850" rtl="0"/>
             <a:endParaRPr lang="en-US" sz="500" kern="100">
               <a:solidFill>
                 <a:srgbClr val="C00000"/>
@@ -5161,7 +7977,7 @@
             </a:endParaRPr>
           </a:p>
           <a:p>
-            <a:pPr marL="625475" rtl="0"/>
+            <a:pPr marL="450850" rtl="0"/>
             <a:endParaRPr lang="en-US" sz="500" kern="100">
               <a:solidFill>
                 <a:srgbClr val="C00000"/>
@@ -5172,7 +7988,7 @@
             </a:endParaRPr>
           </a:p>
           <a:p>
-            <a:pPr marL="625475" rtl="0"/>
+            <a:pPr marL="450850" rtl="0"/>
             <a:endParaRPr lang="en-US" sz="500" kern="100">
               <a:solidFill>
                 <a:srgbClr val="C00000"/>
@@ -5209,7 +8025,7 @@
         </p:nvSpPr>
         <p:spPr bwMode="auto">
           <a:xfrm>
-            <a:off x="10097733" y="5155703"/>
+            <a:off x="9867313" y="5009357"/>
             <a:ext cx="1261502" cy="1243452"/>
           </a:xfrm>
           <a:prstGeom prst="roundRect">
@@ -5255,7 +8071,7 @@
                   <a:schemeClr val="bg1"/>
                 </a:solidFill>
                 <a:highlight>
-                  <a:srgbClr val="000000"/>
+                  <a:srgbClr val="008080"/>
                 </a:highlight>
                 <a:latin typeface="Segoe UI" panose="020B0502040204020203" pitchFamily="34" charset="0"/>
                 <a:cs typeface="Segoe UI" panose="020B0502040204020203" pitchFamily="34" charset="0"/>
@@ -5382,186 +8198,6 @@
               </a:rPr>
               <a:t>2: isAns</a:t>
             </a:r>
-          </a:p>
-        </p:txBody>
-      </p:sp>
-      <p:sp>
-        <p:nvSpPr>
-          <p:cNvPr id="21" name="Rectangle: Rounded Corners 14">
-            <a:extLst>
-              <a:ext uri="{FF2B5EF4-FFF2-40B4-BE49-F238E27FC236}">
-                <a16:creationId xmlns:a16="http://schemas.microsoft.com/office/drawing/2014/main" id="{2CAA5E73-6596-454B-3046-FFE7FE6C87F7}"/>
-              </a:ext>
-            </a:extLst>
-          </p:cNvPr>
-          <p:cNvSpPr/>
-          <p:nvPr/>
-        </p:nvSpPr>
-        <p:spPr bwMode="auto">
-          <a:xfrm>
-            <a:off x="5246027" y="805462"/>
-            <a:ext cx="1414020" cy="1346672"/>
-          </a:xfrm>
-          <a:prstGeom prst="roundRect">
-            <a:avLst>
-              <a:gd name="adj" fmla="val 8023"/>
-            </a:avLst>
-          </a:prstGeom>
-          <a:solidFill>
-            <a:schemeClr val="bg1"/>
-          </a:solidFill>
-          <a:ln>
-            <a:solidFill>
-              <a:srgbClr val="C00000"/>
-            </a:solidFill>
-            <a:prstDash val="lgDash"/>
-          </a:ln>
-          <a:effectLst/>
-        </p:spPr>
-        <p:style>
-          <a:lnRef idx="0">
-            <a:schemeClr val="accent4"/>
-          </a:lnRef>
-          <a:fillRef idx="3">
-            <a:schemeClr val="accent4"/>
-          </a:fillRef>
-          <a:effectRef idx="3">
-            <a:schemeClr val="accent4"/>
-          </a:effectRef>
-          <a:fontRef idx="minor">
-            <a:schemeClr val="lt1"/>
-          </a:fontRef>
-        </p:style>
-        <p:txBody>
-          <a:bodyPr rtlCol="1" anchor="ctr"/>
-          <a:lstStyle/>
-          <a:p>
-            <a:pPr rtl="0">
-              <a:defRPr/>
-            </a:pPr>
-            <a:r>
-              <a:rPr lang="en-US" sz="1707" b="1">
-                <a:solidFill>
-                  <a:schemeClr val="bg1"/>
-                </a:solidFill>
-                <a:highlight>
-                  <a:srgbClr val="800000"/>
-                </a:highlight>
-                <a:latin typeface="Segoe UI" panose="020B0502040204020203" pitchFamily="34" charset="0"/>
-                <a:cs typeface="Segoe UI" panose="020B0502040204020203" pitchFamily="34" charset="0"/>
-              </a:rPr>
-              <a:t>CF</a:t>
-            </a:r>
-          </a:p>
-          <a:p>
-            <a:pPr rtl="0">
-              <a:defRPr/>
-            </a:pPr>
-            <a:r>
-              <a:rPr lang="en-US" sz="1280" b="1">
-                <a:solidFill>
-                  <a:schemeClr val="tx1"/>
-                </a:solidFill>
-                <a:latin typeface="Segoe UI" panose="020B0502040204020203" pitchFamily="34" charset="0"/>
-                <a:cs typeface="Segoe UI" panose="020B0502040204020203" pitchFamily="34" charset="0"/>
-              </a:rPr>
-              <a:t>CourseFolders</a:t>
-            </a:r>
-            <a:endParaRPr sz="1280" b="1">
-              <a:solidFill>
-                <a:schemeClr val="tx1"/>
-              </a:solidFill>
-              <a:latin typeface="Segoe UI" panose="020B0502040204020203" pitchFamily="34" charset="0"/>
-              <a:cs typeface="Segoe UI" panose="020B0502040204020203" pitchFamily="34" charset="0"/>
-            </a:endParaRPr>
-          </a:p>
-          <a:p>
-            <a:pPr rtl="0">
-              <a:defRPr/>
-            </a:pPr>
-            <a:r>
-              <a:rPr lang="en-US" sz="853" i="1">
-                <a:solidFill>
-                  <a:schemeClr val="accent5"/>
-                </a:solidFill>
-                <a:latin typeface="Segoe UI" panose="020B0502040204020203" pitchFamily="34" charset="0"/>
-                <a:cs typeface="Segoe UI" panose="020B0502040204020203" pitchFamily="34" charset="0"/>
-              </a:rPr>
-              <a:t>CourseFolderId</a:t>
-            </a:r>
-          </a:p>
-          <a:p>
-            <a:pPr rtl="0">
-              <a:defRPr/>
-            </a:pPr>
-            <a:r>
-              <a:rPr lang="en-US" sz="853">
-                <a:solidFill>
-                  <a:schemeClr val="tx1"/>
-                </a:solidFill>
-                <a:latin typeface="Segoe UI" panose="020B0502040204020203" pitchFamily="34" charset="0"/>
-                <a:cs typeface="Segoe UI" panose="020B0502040204020203" pitchFamily="34" charset="0"/>
-              </a:rPr>
-              <a:t>CourseId</a:t>
-            </a:r>
-          </a:p>
-          <a:p>
-            <a:pPr rtl="0">
-              <a:defRPr/>
-            </a:pPr>
-            <a:r>
-              <a:rPr lang="en-US" sz="853">
-                <a:solidFill>
-                  <a:schemeClr val="tx1"/>
-                </a:solidFill>
-                <a:latin typeface="Segoe UI" panose="020B0502040204020203" pitchFamily="34" charset="0"/>
-                <a:cs typeface="Segoe UI" panose="020B0502040204020203" pitchFamily="34" charset="0"/>
-              </a:rPr>
-              <a:t>CourseFolderTitle</a:t>
-            </a:r>
-          </a:p>
-          <a:p>
-            <a:pPr rtl="0">
-              <a:defRPr/>
-            </a:pPr>
-            <a:r>
-              <a:rPr lang="en-US" sz="853">
-                <a:solidFill>
-                  <a:schemeClr val="tx1"/>
-                </a:solidFill>
-                <a:latin typeface="Segoe UI" panose="020B0502040204020203" pitchFamily="34" charset="0"/>
-                <a:ea typeface="Arial"/>
-                <a:cs typeface="Segoe UI" panose="020B0502040204020203" pitchFamily="34" charset="0"/>
-              </a:rPr>
-              <a:t>CourseFolderUrl</a:t>
-            </a:r>
-          </a:p>
-          <a:p>
-            <a:pPr rtl="0">
-              <a:defRPr/>
-            </a:pPr>
-            <a:r>
-              <a:rPr lang="en-US" sz="853">
-                <a:solidFill>
-                  <a:schemeClr val="tx1"/>
-                </a:solidFill>
-                <a:latin typeface="Segoe UI" panose="020B0502040204020203" pitchFamily="34" charset="0"/>
-                <a:cs typeface="Segoe UI" panose="020B0502040204020203" pitchFamily="34" charset="0"/>
-              </a:rPr>
-              <a:t>CourseFolderActive</a:t>
-            </a:r>
-          </a:p>
-          <a:p>
-            <a:pPr rtl="0">
-              <a:defRPr/>
-            </a:pPr>
-            <a:endParaRPr lang="en-US" sz="853">
-              <a:solidFill>
-                <a:schemeClr val="tx1"/>
-              </a:solidFill>
-              <a:latin typeface="Segoe UI" panose="020B0502040204020203" pitchFamily="34" charset="0"/>
-              <a:cs typeface="Segoe UI" panose="020B0502040204020203" pitchFamily="34" charset="0"/>
-            </a:endParaRPr>
           </a:p>
         </p:txBody>
       </p:sp>
@@ -5579,7 +8215,7 @@
         </p:nvSpPr>
         <p:spPr bwMode="auto">
           <a:xfrm>
-            <a:off x="2894769" y="2260598"/>
+            <a:off x="2931927" y="4398309"/>
             <a:ext cx="1467637" cy="1268300"/>
           </a:xfrm>
           <a:prstGeom prst="roundRect">
@@ -5623,7 +8259,7 @@
                   <a:schemeClr val="bg1"/>
                 </a:solidFill>
                 <a:highlight>
-                  <a:srgbClr val="008080"/>
+                  <a:srgbClr val="000000"/>
                 </a:highlight>
                 <a:latin typeface="Segoe UI" panose="020B0502040204020203" pitchFamily="34" charset="0"/>
                 <a:cs typeface="Segoe UI" panose="020B0502040204020203" pitchFamily="34" charset="0"/>
@@ -5755,7 +8391,7 @@
         </p:nvSpPr>
         <p:spPr>
           <a:xfrm>
-            <a:off x="71612" y="8154633"/>
+            <a:off x="10063108" y="8393387"/>
             <a:ext cx="1467068" cy="230832"/>
           </a:xfrm>
           <a:prstGeom prst="rect">
@@ -5806,8 +8442,8 @@
         </p:nvSpPr>
         <p:spPr bwMode="auto">
           <a:xfrm>
-            <a:off x="6365162" y="1570707"/>
-            <a:ext cx="1764331" cy="1174970"/>
+            <a:off x="6904870" y="1316632"/>
+            <a:ext cx="1764331" cy="1468239"/>
           </a:xfrm>
           <a:prstGeom prst="roundRect">
             <a:avLst>
@@ -5819,7 +8455,7 @@
           </a:solidFill>
           <a:ln w="28575">
             <a:solidFill>
-              <a:srgbClr val="C00000"/>
+              <a:schemeClr val="accent6"/>
             </a:solidFill>
           </a:ln>
           <a:effectLst/>
@@ -5851,7 +8487,7 @@
                   <a:schemeClr val="bg1"/>
                 </a:solidFill>
                 <a:highlight>
-                  <a:srgbClr val="800000"/>
+                  <a:srgbClr val="008080"/>
                 </a:highlight>
                 <a:latin typeface="Segoe UI" panose="020B0502040204020203" pitchFamily="34" charset="0"/>
                 <a:cs typeface="Segoe UI" panose="020B0502040204020203" pitchFamily="34" charset="0"/>
@@ -5959,6 +8595,32 @@
               </a:rPr>
               <a:t>CourseRtl</a:t>
             </a:r>
+          </a:p>
+          <a:p>
+            <a:pPr rtl="0">
+              <a:defRPr/>
+            </a:pPr>
+            <a:endParaRPr lang="en-US" sz="853">
+              <a:solidFill>
+                <a:schemeClr val="tx1"/>
+              </a:solidFill>
+              <a:latin typeface="Segoe UI" panose="020B0502040204020203" pitchFamily="34" charset="0"/>
+              <a:ea typeface="Arial"/>
+              <a:cs typeface="Segoe UI" panose="020B0502040204020203" pitchFamily="34" charset="0"/>
+            </a:endParaRPr>
+          </a:p>
+          <a:p>
+            <a:pPr rtl="0">
+              <a:defRPr/>
+            </a:pPr>
+            <a:endParaRPr lang="en-US" sz="853">
+              <a:solidFill>
+                <a:schemeClr val="tx1"/>
+              </a:solidFill>
+              <a:latin typeface="Segoe UI" panose="020B0502040204020203" pitchFamily="34" charset="0"/>
+              <a:ea typeface="Arial"/>
+              <a:cs typeface="Segoe UI" panose="020B0502040204020203" pitchFamily="34" charset="0"/>
+            </a:endParaRPr>
           </a:p>
         </p:txBody>
       </p:sp>
@@ -6140,7 +8802,7 @@
                 <a:latin typeface="Segoe UI" panose="020B0502040204020203" pitchFamily="34" charset="0"/>
                 <a:cs typeface="Segoe UI" panose="020B0502040204020203" pitchFamily="34" charset="0"/>
               </a:rPr>
-              <a:t>StartDateTime</a:t>
+              <a:t>DateTimeStart</a:t>
             </a:r>
           </a:p>
           <a:p>
@@ -6155,7 +8817,7 @@
                 <a:latin typeface="Segoe UI" panose="020B0502040204020203" pitchFamily="34" charset="0"/>
                 <a:cs typeface="Segoe UI" panose="020B0502040204020203" pitchFamily="34" charset="0"/>
               </a:rPr>
-              <a:t>FinishDateTime</a:t>
+              <a:t>DateTimeFinish</a:t>
             </a:r>
           </a:p>
           <a:p>
@@ -6241,8 +8903,8 @@
         </p:nvSpPr>
         <p:spPr bwMode="auto">
           <a:xfrm>
-            <a:off x="6231514" y="7235667"/>
-            <a:ext cx="2389880" cy="1300022"/>
+            <a:off x="6108307" y="7156549"/>
+            <a:ext cx="2656717" cy="1300022"/>
           </a:xfrm>
           <a:prstGeom prst="roundRect">
             <a:avLst>
@@ -6440,7 +9102,7 @@
           </a:solidFill>
           <a:ln>
             <a:solidFill>
-              <a:srgbClr val="C00000"/>
+              <a:schemeClr val="accent6"/>
             </a:solidFill>
             <a:prstDash val="lgDash"/>
           </a:ln>
@@ -6473,7 +9135,7 @@
                   <a:schemeClr val="bg1"/>
                 </a:solidFill>
                 <a:highlight>
-                  <a:srgbClr val="800000"/>
+                  <a:srgbClr val="008080"/>
                 </a:highlight>
                 <a:latin typeface="Segoe UI" panose="020B0502040204020203" pitchFamily="34" charset="0"/>
                 <a:cs typeface="Segoe UI" panose="020B0502040204020203" pitchFamily="34" charset="0"/>
@@ -7002,8 +9664,8 @@
         </p:nvSpPr>
         <p:spPr>
           <a:xfrm>
-            <a:off x="123452" y="5492279"/>
-            <a:ext cx="1105305" cy="1348382"/>
+            <a:off x="143620" y="3744317"/>
+            <a:ext cx="1105305" cy="1634612"/>
           </a:xfrm>
           <a:prstGeom prst="roundRect">
             <a:avLst>
@@ -7042,19 +9704,22 @@
           <a:p>
             <a:pPr rtl="0"/>
             <a:r>
-              <a:rPr lang="en-US" sz="1707" b="1" dirty="0">
+              <a:rPr lang="en-US" sz="1707" b="1">
                 <a:solidFill>
                   <a:schemeClr val="bg1"/>
                 </a:solidFill>
                 <a:highlight>
-                  <a:srgbClr val="000000"/>
+                  <a:srgbClr val="800080"/>
                 </a:highlight>
               </a:rPr>
               <a:t>P</a:t>
             </a:r>
-            <a:r>
-              <a:rPr lang="en-US" sz="1280" b="1" dirty="0"/>
-              <a:t>rojects</a:t>
+          </a:p>
+          <a:p>
+            <a:pPr rtl="0"/>
+            <a:r>
+              <a:rPr lang="en-US" sz="1280" b="1"/>
+              <a:t>Projects</a:t>
             </a:r>
             <a:endParaRPr lang="en-US" sz="853" b="1" dirty="0"/>
           </a:p>
@@ -7158,6 +9823,17 @@
               </a:rPr>
               <a:t> 1:active</a:t>
             </a:r>
+          </a:p>
+          <a:p>
+            <a:pPr rtl="0"/>
+            <a:endParaRPr lang="en-US" sz="900" kern="100">
+              <a:solidFill>
+                <a:srgbClr val="C00000"/>
+              </a:solidFill>
+              <a:latin typeface="Consolas" panose="020B0609020204030204" pitchFamily="49" charset="0"/>
+              <a:ea typeface="Calibri" panose="020F0502020204030204" pitchFamily="34" charset="0"/>
+              <a:cs typeface="Calibri Light" panose="020F0302020204030204" pitchFamily="34" charset="0"/>
+            </a:endParaRPr>
           </a:p>
         </p:txBody>
       </p:sp>
@@ -7175,7 +9851,7 @@
         </p:nvSpPr>
         <p:spPr bwMode="auto">
           <a:xfrm>
-            <a:off x="1592157" y="7679533"/>
+            <a:off x="1154352" y="6690674"/>
             <a:ext cx="1105070" cy="787849"/>
           </a:xfrm>
           <a:prstGeom prst="borderCallout2">
@@ -7388,8 +10064,8 @@
         </p:nvSpPr>
         <p:spPr bwMode="auto">
           <a:xfrm>
-            <a:off x="2989856" y="83344"/>
-            <a:ext cx="1182037" cy="1712656"/>
+            <a:off x="180740" y="1926523"/>
+            <a:ext cx="1105305" cy="1712656"/>
           </a:xfrm>
           <a:prstGeom prst="roundRect">
             <a:avLst>
@@ -7679,7 +10355,7 @@
                   <a:schemeClr val="bg1"/>
                 </a:solidFill>
                 <a:highlight>
-                  <a:srgbClr val="808000"/>
+                  <a:srgbClr val="800080"/>
                 </a:highlight>
                 <a:latin typeface="Segoe UI" panose="020B0502040204020203" pitchFamily="34" charset="0"/>
                 <a:cs typeface="Segoe UI" panose="020B0502040204020203" pitchFamily="34" charset="0"/>
@@ -7860,8 +10536,8 @@
         </p:nvSpPr>
         <p:spPr>
           <a:xfrm>
-            <a:off x="2504076" y="6678264"/>
-            <a:ext cx="976113" cy="1634612"/>
+            <a:off x="139591" y="6459549"/>
+            <a:ext cx="976113" cy="1787289"/>
           </a:xfrm>
           <a:prstGeom prst="roundRect">
             <a:avLst>
@@ -7900,20 +10576,24 @@
           <a:p>
             <a:pPr rtl="0"/>
             <a:r>
-              <a:rPr lang="en-US" sz="1707" b="1" dirty="0">
+              <a:rPr lang="en-US" sz="1707" b="1">
                 <a:solidFill>
                   <a:schemeClr val="bg1"/>
                 </a:solidFill>
                 <a:highlight>
-                  <a:srgbClr val="000000"/>
+                  <a:srgbClr val="800080"/>
                 </a:highlight>
               </a:rPr>
               <a:t>N</a:t>
             </a:r>
-            <a:r>
-              <a:rPr lang="en-US" sz="1280" b="1" dirty="0"/>
-              <a:t>otes</a:t>
-            </a:r>
+          </a:p>
+          <a:p>
+            <a:pPr rtl="0"/>
+            <a:r>
+              <a:rPr lang="en-US" sz="1280" b="1"/>
+              <a:t>Notes</a:t>
+            </a:r>
+            <a:endParaRPr lang="en-US" sz="1280" b="1" dirty="0"/>
           </a:p>
           <a:p>
             <a:pPr rtl="0"/>
@@ -7932,14 +10612,14 @@
             <a:pPr rtl="0"/>
             <a:r>
               <a:rPr lang="en-US" sz="853"/>
-              <a:t>NoteType</a:t>
+              <a:t>ReferenceId</a:t>
             </a:r>
           </a:p>
           <a:p>
             <a:pPr rtl="0"/>
             <a:r>
               <a:rPr lang="en-US" sz="853"/>
-              <a:t>ReferenceId</a:t>
+              <a:t>ReferenceType</a:t>
             </a:r>
           </a:p>
           <a:p>
@@ -8065,8 +10745,8 @@
         </p:nvSpPr>
         <p:spPr>
           <a:xfrm>
-            <a:off x="3373732" y="7760614"/>
-            <a:ext cx="954729" cy="775075"/>
+            <a:off x="928564" y="7596296"/>
+            <a:ext cx="954729" cy="900550"/>
           </a:xfrm>
           <a:prstGeom prst="roundRect">
             <a:avLst>
@@ -8105,19 +10785,22 @@
           <a:p>
             <a:pPr rtl="0"/>
             <a:r>
-              <a:rPr lang="en-US" sz="1707" b="1" dirty="0" err="1">
+              <a:rPr lang="en-US" sz="1707" b="1">
                 <a:solidFill>
                   <a:schemeClr val="bg1"/>
                 </a:solidFill>
                 <a:highlight>
-                  <a:srgbClr val="000000"/>
+                  <a:srgbClr val="800080"/>
                 </a:highlight>
               </a:rPr>
-              <a:t>N</a:t>
-            </a:r>
-            <a:r>
-              <a:rPr lang="en-US" sz="1280" b="1" dirty="0" err="1"/>
-              <a:t>oteNet</a:t>
+              <a:t>NN</a:t>
+            </a:r>
+          </a:p>
+          <a:p>
+            <a:pPr rtl="0"/>
+            <a:r>
+              <a:rPr lang="en-US" sz="1280" b="1"/>
+              <a:t>NoteNet</a:t>
             </a:r>
             <a:endParaRPr lang="en-US" sz="1280" b="1" dirty="0"/>
           </a:p>
@@ -8183,7 +10866,7 @@
           <a:solidFill>
             <a:schemeClr val="bg1"/>
           </a:solidFill>
-          <a:ln>
+          <a:ln w="28575">
             <a:solidFill>
               <a:schemeClr val="tx1"/>
             </a:solidFill>
@@ -8217,7 +10900,7 @@
                   <a:schemeClr val="bg1"/>
                 </a:solidFill>
                 <a:highlight>
-                  <a:srgbClr val="808000"/>
+                  <a:srgbClr val="800080"/>
                 </a:highlight>
                 <a:latin typeface="Segoe UI" panose="020B0502040204020203" pitchFamily="34" charset="0"/>
                 <a:cs typeface="Segoe UI" panose="020B0502040204020203" pitchFamily="34" charset="0"/>
@@ -8338,7 +11021,7 @@
         </p:nvSpPr>
         <p:spPr bwMode="auto">
           <a:xfrm>
-            <a:off x="8933155" y="125565"/>
+            <a:off x="3888036" y="90839"/>
             <a:ext cx="1366068" cy="1748618"/>
           </a:xfrm>
           <a:prstGeom prst="roundRect">
@@ -8349,7 +11032,7 @@
           <a:solidFill>
             <a:schemeClr val="bg1"/>
           </a:solidFill>
-          <a:ln>
+          <a:ln w="28575">
             <a:solidFill>
               <a:schemeClr val="tx1"/>
             </a:solidFill>
@@ -8383,7 +11066,7 @@
                   <a:schemeClr val="bg1"/>
                 </a:solidFill>
                 <a:highlight>
-                  <a:srgbClr val="008080"/>
+                  <a:srgbClr val="000000"/>
                 </a:highlight>
                 <a:latin typeface="Segoe UI" panose="020B0502040204020203" pitchFamily="34" charset="0"/>
                 <a:cs typeface="Segoe UI" panose="020B0502040204020203" pitchFamily="34" charset="0"/>
@@ -8626,7 +11309,7 @@
         </p:nvSpPr>
         <p:spPr bwMode="auto">
           <a:xfrm>
-            <a:off x="10104553" y="228275"/>
+            <a:off x="4968156" y="215925"/>
             <a:ext cx="1344323" cy="915820"/>
           </a:xfrm>
           <a:prstGeom prst="roundRect">
@@ -8637,7 +11320,7 @@
           <a:solidFill>
             <a:schemeClr val="bg1"/>
           </a:solidFill>
-          <a:ln>
+          <a:ln w="28575">
             <a:solidFill>
               <a:schemeClr val="tx1"/>
             </a:solidFill>
@@ -8671,7 +11354,7 @@
                   <a:schemeClr val="bg1"/>
                 </a:solidFill>
                 <a:highlight>
-                  <a:srgbClr val="C0C0C0"/>
+                  <a:srgbClr val="000000"/>
                 </a:highlight>
                 <a:latin typeface="Segoe UI" panose="020B0502040204020203" pitchFamily="34" charset="0"/>
                 <a:cs typeface="Segoe UI" panose="020B0502040204020203" pitchFamily="34" charset="0"/>
@@ -8762,8 +11445,8 @@
         </p:nvSpPr>
         <p:spPr>
           <a:xfrm>
-            <a:off x="920722" y="6393675"/>
-            <a:ext cx="1315682" cy="966599"/>
+            <a:off x="260916" y="5218875"/>
+            <a:ext cx="1315682" cy="1059364"/>
           </a:xfrm>
           <a:prstGeom prst="roundRect">
             <a:avLst>
@@ -8802,19 +11485,22 @@
           <a:p>
             <a:pPr rtl="0"/>
             <a:r>
-              <a:rPr lang="en-US" sz="1707" b="1" dirty="0" err="1">
+              <a:rPr lang="en-US" sz="1707" b="1">
                 <a:solidFill>
                   <a:schemeClr val="bg1"/>
                 </a:solidFill>
                 <a:highlight>
-                  <a:srgbClr val="000000"/>
+                  <a:srgbClr val="800080"/>
                 </a:highlight>
               </a:rPr>
-              <a:t>S</a:t>
-            </a:r>
-            <a:r>
-              <a:rPr lang="en-US" sz="1280" b="1" dirty="0" err="1"/>
-              <a:t>ubProjects</a:t>
+              <a:t>SP</a:t>
+            </a:r>
+          </a:p>
+          <a:p>
+            <a:pPr rtl="0"/>
+            <a:r>
+              <a:rPr lang="en-US" sz="1280" b="1"/>
+              <a:t>SuubProjects</a:t>
             </a:r>
             <a:endParaRPr lang="en-US" sz="853" b="1" dirty="0"/>
           </a:p>
@@ -8897,7 +11583,7 @@
         </p:nvSpPr>
         <p:spPr bwMode="auto">
           <a:xfrm>
-            <a:off x="10120219" y="1532353"/>
+            <a:off x="5007411" y="1296045"/>
             <a:ext cx="1077711" cy="915820"/>
           </a:xfrm>
           <a:prstGeom prst="roundRect">
@@ -8908,7 +11594,7 @@
           <a:solidFill>
             <a:schemeClr val="bg1"/>
           </a:solidFill>
-          <a:ln>
+          <a:ln w="28575">
             <a:solidFill>
               <a:schemeClr val="tx1"/>
             </a:solidFill>
@@ -8942,7 +11628,7 @@
                   <a:schemeClr val="bg1"/>
                 </a:solidFill>
                 <a:highlight>
-                  <a:srgbClr val="008080"/>
+                  <a:srgbClr val="000000"/>
                 </a:highlight>
                 <a:latin typeface="Segoe UI" panose="020B0502040204020203" pitchFamily="34" charset="0"/>
                 <a:cs typeface="Segoe UI" panose="020B0502040204020203" pitchFamily="34" charset="0"/>
@@ -9041,7 +11727,7 @@
         </p:blipFill>
         <p:spPr bwMode="auto">
           <a:xfrm>
-            <a:off x="57517" y="7659240"/>
+            <a:off x="10049013" y="7897994"/>
             <a:ext cx="1414177" cy="525095"/>
           </a:xfrm>
           <a:prstGeom prst="rect">
@@ -9049,6 +11735,335 @@
           </a:prstGeom>
         </p:spPr>
       </p:pic>
+      <p:sp>
+        <p:nvSpPr>
+          <p:cNvPr id="8" name="Rectangle: Rounded Corners 18">
+            <a:extLst>
+              <a:ext uri="{FF2B5EF4-FFF2-40B4-BE49-F238E27FC236}">
+                <a16:creationId xmlns:a16="http://schemas.microsoft.com/office/drawing/2014/main" id="{CF51E3CE-E401-764F-903E-3F496D6649AD}"/>
+              </a:ext>
+            </a:extLst>
+          </p:cNvPr>
+          <p:cNvSpPr/>
+          <p:nvPr/>
+        </p:nvSpPr>
+        <p:spPr bwMode="auto">
+          <a:xfrm>
+            <a:off x="8036893" y="575965"/>
+            <a:ext cx="1366069" cy="1179645"/>
+          </a:xfrm>
+          <a:prstGeom prst="roundRect">
+            <a:avLst>
+              <a:gd name="adj" fmla="val 5397"/>
+            </a:avLst>
+          </a:prstGeom>
+          <a:solidFill>
+            <a:schemeClr val="bg1"/>
+          </a:solidFill>
+          <a:ln>
+            <a:solidFill>
+              <a:schemeClr val="accent6"/>
+            </a:solidFill>
+            <a:prstDash val="lgDash"/>
+          </a:ln>
+          <a:effectLst/>
+        </p:spPr>
+        <p:style>
+          <a:lnRef idx="0">
+            <a:schemeClr val="accent4"/>
+          </a:lnRef>
+          <a:fillRef idx="3">
+            <a:schemeClr val="accent4"/>
+          </a:fillRef>
+          <a:effectRef idx="3">
+            <a:schemeClr val="accent4"/>
+          </a:effectRef>
+          <a:fontRef idx="minor">
+            <a:schemeClr val="lt1"/>
+          </a:fontRef>
+        </p:style>
+        <p:txBody>
+          <a:bodyPr rtlCol="1" anchor="ctr"/>
+          <a:lstStyle/>
+          <a:p>
+            <a:pPr algn="l" rtl="0">
+              <a:defRPr/>
+            </a:pPr>
+            <a:r>
+              <a:rPr lang="en-US" sz="1707" b="1">
+                <a:solidFill>
+                  <a:schemeClr val="bg1"/>
+                </a:solidFill>
+                <a:highlight>
+                  <a:srgbClr val="008080"/>
+                </a:highlight>
+                <a:latin typeface="Segoe UI" panose="020B0502040204020203" pitchFamily="34" charset="0"/>
+                <a:cs typeface="Segoe UI" panose="020B0502040204020203" pitchFamily="34" charset="0"/>
+              </a:rPr>
+              <a:t>CT</a:t>
+            </a:r>
+          </a:p>
+          <a:p>
+            <a:pPr rtl="0">
+              <a:defRPr/>
+            </a:pPr>
+            <a:r>
+              <a:rPr lang="en-US" sz="1280" b="1">
+                <a:solidFill>
+                  <a:schemeClr val="tx1"/>
+                </a:solidFill>
+                <a:latin typeface="Segoe UI" panose="020B0502040204020203" pitchFamily="34" charset="0"/>
+                <a:cs typeface="Segoe UI" panose="020B0502040204020203" pitchFamily="34" charset="0"/>
+              </a:rPr>
+              <a:t>CourseTopics</a:t>
+            </a:r>
+            <a:endParaRPr sz="1280">
+              <a:solidFill>
+                <a:schemeClr val="tx1"/>
+              </a:solidFill>
+              <a:latin typeface="Segoe UI" panose="020B0502040204020203" pitchFamily="34" charset="0"/>
+              <a:cs typeface="Segoe UI" panose="020B0502040204020203" pitchFamily="34" charset="0"/>
+            </a:endParaRPr>
+          </a:p>
+          <a:p>
+            <a:pPr rtl="0">
+              <a:defRPr/>
+            </a:pPr>
+            <a:r>
+              <a:rPr lang="en-US" sz="853" i="1">
+                <a:solidFill>
+                  <a:schemeClr val="accent5"/>
+                </a:solidFill>
+                <a:latin typeface="Segoe UI" panose="020B0502040204020203" pitchFamily="34" charset="0"/>
+                <a:cs typeface="Segoe UI" panose="020B0502040204020203" pitchFamily="34" charset="0"/>
+              </a:rPr>
+              <a:t>CourseTopicId</a:t>
+            </a:r>
+          </a:p>
+          <a:p>
+            <a:pPr rtl="0">
+              <a:defRPr/>
+            </a:pPr>
+            <a:r>
+              <a:rPr lang="en-US" sz="853">
+                <a:solidFill>
+                  <a:schemeClr val="tx1"/>
+                </a:solidFill>
+                <a:latin typeface="Segoe UI" panose="020B0502040204020203" pitchFamily="34" charset="0"/>
+                <a:cs typeface="Segoe UI" panose="020B0502040204020203" pitchFamily="34" charset="0"/>
+              </a:rPr>
+              <a:t>CourseId</a:t>
+            </a:r>
+          </a:p>
+          <a:p>
+            <a:pPr rtl="0">
+              <a:defRPr/>
+            </a:pPr>
+            <a:r>
+              <a:rPr lang="en-US" sz="853">
+                <a:solidFill>
+                  <a:schemeClr val="tx1"/>
+                </a:solidFill>
+                <a:latin typeface="Segoe UI" panose="020B0502040204020203" pitchFamily="34" charset="0"/>
+                <a:cs typeface="Segoe UI" panose="020B0502040204020203" pitchFamily="34" charset="0"/>
+              </a:rPr>
+              <a:t>CourseTopicTitle</a:t>
+            </a:r>
+          </a:p>
+          <a:p>
+            <a:pPr rtl="0">
+              <a:defRPr/>
+            </a:pPr>
+            <a:endParaRPr lang="en-US" sz="853">
+              <a:solidFill>
+                <a:schemeClr val="tx1"/>
+              </a:solidFill>
+              <a:latin typeface="Segoe UI" panose="020B0502040204020203" pitchFamily="34" charset="0"/>
+              <a:cs typeface="Segoe UI" panose="020B0502040204020203" pitchFamily="34" charset="0"/>
+            </a:endParaRPr>
+          </a:p>
+          <a:p>
+            <a:pPr rtl="0">
+              <a:defRPr/>
+            </a:pPr>
+            <a:endParaRPr lang="en-US" sz="853">
+              <a:solidFill>
+                <a:schemeClr val="tx1"/>
+              </a:solidFill>
+              <a:latin typeface="Segoe UI" panose="020B0502040204020203" pitchFamily="34" charset="0"/>
+              <a:cs typeface="Segoe UI" panose="020B0502040204020203" pitchFamily="34" charset="0"/>
+            </a:endParaRPr>
+          </a:p>
+        </p:txBody>
+      </p:sp>
+      <p:sp>
+        <p:nvSpPr>
+          <p:cNvPr id="21" name="Rectangle: Rounded Corners 14">
+            <a:extLst>
+              <a:ext uri="{FF2B5EF4-FFF2-40B4-BE49-F238E27FC236}">
+                <a16:creationId xmlns:a16="http://schemas.microsoft.com/office/drawing/2014/main" id="{2CAA5E73-6596-454B-3046-FFE7FE6C87F7}"/>
+              </a:ext>
+            </a:extLst>
+          </p:cNvPr>
+          <p:cNvSpPr/>
+          <p:nvPr/>
+        </p:nvSpPr>
+        <p:spPr bwMode="auto">
+          <a:xfrm>
+            <a:off x="8450680" y="1920134"/>
+            <a:ext cx="1414020" cy="1152285"/>
+          </a:xfrm>
+          <a:prstGeom prst="roundRect">
+            <a:avLst>
+              <a:gd name="adj" fmla="val 8023"/>
+            </a:avLst>
+          </a:prstGeom>
+          <a:solidFill>
+            <a:schemeClr val="bg1"/>
+          </a:solidFill>
+          <a:ln>
+            <a:solidFill>
+              <a:schemeClr val="accent6"/>
+            </a:solidFill>
+            <a:prstDash val="lgDash"/>
+          </a:ln>
+          <a:effectLst/>
+        </p:spPr>
+        <p:style>
+          <a:lnRef idx="0">
+            <a:schemeClr val="accent4"/>
+          </a:lnRef>
+          <a:fillRef idx="3">
+            <a:schemeClr val="accent4"/>
+          </a:fillRef>
+          <a:effectRef idx="3">
+            <a:schemeClr val="accent4"/>
+          </a:effectRef>
+          <a:fontRef idx="minor">
+            <a:schemeClr val="lt1"/>
+          </a:fontRef>
+        </p:style>
+        <p:txBody>
+          <a:bodyPr rtlCol="1" anchor="ctr"/>
+          <a:lstStyle/>
+          <a:p>
+            <a:pPr rtl="0">
+              <a:defRPr/>
+            </a:pPr>
+            <a:r>
+              <a:rPr lang="en-US" sz="1707" b="1">
+                <a:solidFill>
+                  <a:schemeClr val="bg1"/>
+                </a:solidFill>
+                <a:highlight>
+                  <a:srgbClr val="008080"/>
+                </a:highlight>
+                <a:latin typeface="Segoe UI" panose="020B0502040204020203" pitchFamily="34" charset="0"/>
+                <a:cs typeface="Segoe UI" panose="020B0502040204020203" pitchFamily="34" charset="0"/>
+              </a:rPr>
+              <a:t>CF</a:t>
+            </a:r>
+          </a:p>
+          <a:p>
+            <a:pPr rtl="0">
+              <a:defRPr/>
+            </a:pPr>
+            <a:r>
+              <a:rPr lang="en-US" sz="1280" b="1">
+                <a:solidFill>
+                  <a:schemeClr val="tx1"/>
+                </a:solidFill>
+                <a:latin typeface="Segoe UI" panose="020B0502040204020203" pitchFamily="34" charset="0"/>
+                <a:cs typeface="Segoe UI" panose="020B0502040204020203" pitchFamily="34" charset="0"/>
+              </a:rPr>
+              <a:t>CourseFolders</a:t>
+            </a:r>
+            <a:endParaRPr sz="1280" b="1">
+              <a:solidFill>
+                <a:schemeClr val="tx1"/>
+              </a:solidFill>
+              <a:latin typeface="Segoe UI" panose="020B0502040204020203" pitchFamily="34" charset="0"/>
+              <a:cs typeface="Segoe UI" panose="020B0502040204020203" pitchFamily="34" charset="0"/>
+            </a:endParaRPr>
+          </a:p>
+          <a:p>
+            <a:pPr rtl="0">
+              <a:defRPr/>
+            </a:pPr>
+            <a:r>
+              <a:rPr lang="en-US" sz="853" i="1">
+                <a:solidFill>
+                  <a:schemeClr val="accent5"/>
+                </a:solidFill>
+                <a:latin typeface="Segoe UI" panose="020B0502040204020203" pitchFamily="34" charset="0"/>
+                <a:cs typeface="Segoe UI" panose="020B0502040204020203" pitchFamily="34" charset="0"/>
+              </a:rPr>
+              <a:t>CourseFolderId</a:t>
+            </a:r>
+          </a:p>
+          <a:p>
+            <a:pPr rtl="0">
+              <a:defRPr/>
+            </a:pPr>
+            <a:r>
+              <a:rPr lang="en-US" sz="853">
+                <a:solidFill>
+                  <a:schemeClr val="tx1"/>
+                </a:solidFill>
+                <a:latin typeface="Segoe UI" panose="020B0502040204020203" pitchFamily="34" charset="0"/>
+                <a:cs typeface="Segoe UI" panose="020B0502040204020203" pitchFamily="34" charset="0"/>
+              </a:rPr>
+              <a:t>CourseId</a:t>
+            </a:r>
+          </a:p>
+          <a:p>
+            <a:pPr rtl="0">
+              <a:defRPr/>
+            </a:pPr>
+            <a:r>
+              <a:rPr lang="en-US" sz="853">
+                <a:solidFill>
+                  <a:schemeClr val="tx1"/>
+                </a:solidFill>
+                <a:latin typeface="Segoe UI" panose="020B0502040204020203" pitchFamily="34" charset="0"/>
+                <a:cs typeface="Segoe UI" panose="020B0502040204020203" pitchFamily="34" charset="0"/>
+              </a:rPr>
+              <a:t>CourseFolderTitle</a:t>
+            </a:r>
+          </a:p>
+          <a:p>
+            <a:pPr rtl="0">
+              <a:defRPr/>
+            </a:pPr>
+            <a:r>
+              <a:rPr lang="en-US" sz="853">
+                <a:solidFill>
+                  <a:schemeClr val="tx1"/>
+                </a:solidFill>
+                <a:latin typeface="Segoe UI" panose="020B0502040204020203" pitchFamily="34" charset="0"/>
+                <a:ea typeface="Arial"/>
+                <a:cs typeface="Segoe UI" panose="020B0502040204020203" pitchFamily="34" charset="0"/>
+              </a:rPr>
+              <a:t>CourseFolderUrl</a:t>
+            </a:r>
+          </a:p>
+          <a:p>
+            <a:pPr rtl="0">
+              <a:defRPr/>
+            </a:pPr>
+            <a:r>
+              <a:rPr lang="en-US" sz="853">
+                <a:solidFill>
+                  <a:schemeClr val="tx1"/>
+                </a:solidFill>
+                <a:latin typeface="Segoe UI" panose="020B0502040204020203" pitchFamily="34" charset="0"/>
+                <a:cs typeface="Segoe UI" panose="020B0502040204020203" pitchFamily="34" charset="0"/>
+              </a:rPr>
+              <a:t>CourseFolderActive</a:t>
+            </a:r>
+          </a:p>
+        </p:txBody>
+      </p:sp>
     </p:spTree>
     <p:extLst>
       <p:ext uri="{BB962C8B-B14F-4D97-AF65-F5344CB8AC3E}">
@@ -9093,7 +12108,7 @@
         </p:nvGrpSpPr>
         <p:grpSpPr>
           <a:xfrm>
-            <a:off x="6402536" y="1005087"/>
+            <a:off x="6264300" y="129342"/>
             <a:ext cx="5128326" cy="1296144"/>
             <a:chOff x="1193312" y="2814092"/>
             <a:chExt cx="4807496" cy="1839044"/>
@@ -10780,7 +13795,7 @@
         </p:nvGrpSpPr>
         <p:grpSpPr>
           <a:xfrm>
-            <a:off x="4658903" y="136238"/>
+            <a:off x="2476329" y="1234286"/>
             <a:ext cx="3668362" cy="665661"/>
             <a:chOff x="235732" y="4393940"/>
             <a:chExt cx="3668362" cy="665661"/>
@@ -11421,320 +14436,6 @@
       </p:grpSp>
       <p:sp>
         <p:nvSpPr>
-          <p:cNvPr id="2" name="TextBox 1">
-            <a:extLst>
-              <a:ext uri="{FF2B5EF4-FFF2-40B4-BE49-F238E27FC236}">
-                <a16:creationId xmlns:a16="http://schemas.microsoft.com/office/drawing/2014/main" id="{EF0A10CE-6A6D-93CB-3361-D45F7F446E1E}"/>
-              </a:ext>
-            </a:extLst>
-          </p:cNvPr>
-          <p:cNvSpPr txBox="1"/>
-          <p:nvPr/>
-        </p:nvSpPr>
-        <p:spPr>
-          <a:xfrm>
-            <a:off x="440760" y="4715522"/>
-            <a:ext cx="6088719" cy="1446550"/>
-          </a:xfrm>
-          <a:prstGeom prst="rect">
-            <a:avLst/>
-          </a:prstGeom>
-          <a:noFill/>
-        </p:spPr>
-        <p:txBody>
-          <a:bodyPr wrap="square" rtlCol="0">
-            <a:spAutoFit/>
-          </a:bodyPr>
-          <a:lstStyle/>
-          <a:p>
-            <a:pPr algn="l" rtl="0"/>
-            <a:r>
-              <a:rPr lang="en-US" sz="8800">
-                <a:solidFill>
-                  <a:schemeClr val="tx1"/>
-                </a:solidFill>
-                <a:latin typeface="Rastanty Cortez" panose="020F0502020204030204" pitchFamily="2" charset="0"/>
-                <a:ea typeface="Dotum" panose="020B0600000101010101" pitchFamily="34" charset="-127"/>
-                <a:cs typeface="Biome Light" panose="020B0303030204020804" pitchFamily="34" charset="0"/>
-              </a:rPr>
-              <a:t>E</a:t>
-            </a:r>
-            <a:r>
-              <a:rPr lang="en-US" sz="8800">
-                <a:solidFill>
-                  <a:srgbClr val="C00000"/>
-                </a:solidFill>
-                <a:latin typeface="Rastanty Cortez" panose="020F0502020204030204" pitchFamily="2" charset="0"/>
-                <a:ea typeface="Dotum" panose="020B0600000101010101" pitchFamily="34" charset="-127"/>
-                <a:cs typeface="Biome Light" panose="020B0303030204020804" pitchFamily="34" charset="0"/>
-              </a:rPr>
-              <a:t>x</a:t>
-            </a:r>
-            <a:r>
-              <a:rPr lang="en-US" sz="8800">
-                <a:solidFill>
-                  <a:schemeClr val="tx1"/>
-                </a:solidFill>
-                <a:latin typeface="Rastanty Cortez" panose="020F0502020204030204" pitchFamily="2" charset="0"/>
-                <a:ea typeface="Dotum" panose="020B0600000101010101" pitchFamily="34" charset="-127"/>
-                <a:cs typeface="Biome Light" panose="020B0303030204020804" pitchFamily="34" charset="0"/>
-              </a:rPr>
-              <a:t>aminerv - </a:t>
-            </a:r>
-            <a:r>
-              <a:rPr lang="en-US" sz="8800">
-                <a:solidFill>
-                  <a:srgbClr val="C00000"/>
-                </a:solidFill>
-                <a:latin typeface="Rastanty Cortez" panose="020F0502020204030204" pitchFamily="2" charset="0"/>
-                <a:ea typeface="Dotum" panose="020B0600000101010101" pitchFamily="34" charset="-127"/>
-                <a:cs typeface="Biome Light" panose="020B0303030204020804" pitchFamily="34" charset="0"/>
-              </a:rPr>
-              <a:t>T</a:t>
-            </a:r>
-            <a:r>
-              <a:rPr lang="en-US" sz="8800">
-                <a:solidFill>
-                  <a:schemeClr val="tx1"/>
-                </a:solidFill>
-                <a:latin typeface="Rastanty Cortez" panose="020F0502020204030204" pitchFamily="2" charset="0"/>
-                <a:ea typeface="Dotum" panose="020B0600000101010101" pitchFamily="34" charset="-127"/>
-                <a:cs typeface="Biome Light" panose="020B0303030204020804" pitchFamily="34" charset="0"/>
-              </a:rPr>
-              <a:t>eacher</a:t>
-            </a:r>
-          </a:p>
-        </p:txBody>
-      </p:sp>
-      <p:sp>
-        <p:nvSpPr>
-          <p:cNvPr id="4" name="TextBox 3">
-            <a:extLst>
-              <a:ext uri="{FF2B5EF4-FFF2-40B4-BE49-F238E27FC236}">
-                <a16:creationId xmlns:a16="http://schemas.microsoft.com/office/drawing/2014/main" id="{3424201D-5DC4-100F-F42A-7C9F1AA47335}"/>
-              </a:ext>
-            </a:extLst>
-          </p:cNvPr>
-          <p:cNvSpPr txBox="1"/>
-          <p:nvPr/>
-        </p:nvSpPr>
-        <p:spPr>
-          <a:xfrm>
-            <a:off x="123728" y="1092689"/>
-            <a:ext cx="6161968" cy="1446550"/>
-          </a:xfrm>
-          <a:prstGeom prst="rect">
-            <a:avLst/>
-          </a:prstGeom>
-          <a:noFill/>
-        </p:spPr>
-        <p:txBody>
-          <a:bodyPr wrap="square" rtlCol="0">
-            <a:spAutoFit/>
-          </a:bodyPr>
-          <a:lstStyle/>
-          <a:p>
-            <a:pPr algn="l" rtl="0"/>
-            <a:r>
-              <a:rPr lang="en-US" sz="8800">
-                <a:solidFill>
-                  <a:srgbClr val="C00000"/>
-                </a:solidFill>
-                <a:latin typeface="Rastanty Cortez" panose="020F0502020204030204" pitchFamily="2" charset="0"/>
-                <a:ea typeface="Dotum" panose="020B0600000101010101" pitchFamily="34" charset="-127"/>
-                <a:cs typeface="Biome Light" panose="020B0303030204020804" pitchFamily="34" charset="0"/>
-              </a:rPr>
-              <a:t>M</a:t>
-            </a:r>
-            <a:r>
-              <a:rPr lang="en-US" sz="8800">
-                <a:solidFill>
-                  <a:schemeClr val="tx1"/>
-                </a:solidFill>
-                <a:latin typeface="Rastanty Cortez" panose="020F0502020204030204" pitchFamily="2" charset="0"/>
-                <a:ea typeface="Dotum" panose="020B0600000101010101" pitchFamily="34" charset="-127"/>
-                <a:cs typeface="Biome Light" panose="020B0303030204020804" pitchFamily="34" charset="0"/>
-              </a:rPr>
-              <a:t>ajid</a:t>
-            </a:r>
-            <a:r>
-              <a:rPr lang="en-US" sz="8800">
-                <a:solidFill>
-                  <a:srgbClr val="C00000"/>
-                </a:solidFill>
-                <a:latin typeface="Rastanty Cortez" panose="020F0502020204030204" pitchFamily="2" charset="0"/>
-                <a:ea typeface="Dotum" panose="020B0600000101010101" pitchFamily="34" charset="-127"/>
-                <a:cs typeface="Biome Light" panose="020B0303030204020804" pitchFamily="34" charset="0"/>
-              </a:rPr>
-              <a:t>Sh</a:t>
-            </a:r>
-            <a:r>
-              <a:rPr lang="en-US" sz="8800">
-                <a:solidFill>
-                  <a:schemeClr val="tx1"/>
-                </a:solidFill>
-                <a:latin typeface="Rastanty Cortez" panose="020F0502020204030204" pitchFamily="2" charset="0"/>
-                <a:ea typeface="Dotum" panose="020B0600000101010101" pitchFamily="34" charset="-127"/>
-                <a:cs typeface="Biome Light" panose="020B0303030204020804" pitchFamily="34" charset="0"/>
-              </a:rPr>
-              <a:t>arifi</a:t>
-            </a:r>
-            <a:r>
-              <a:rPr lang="en-US" sz="8800">
-                <a:solidFill>
-                  <a:srgbClr val="C00000"/>
-                </a:solidFill>
-                <a:latin typeface="Rastanty Cortez" panose="020F0502020204030204" pitchFamily="2" charset="0"/>
-                <a:ea typeface="Dotum" panose="020B0600000101010101" pitchFamily="34" charset="-127"/>
-                <a:cs typeface="Biome Light" panose="020B0303030204020804" pitchFamily="34" charset="0"/>
-              </a:rPr>
-              <a:t>T</a:t>
-            </a:r>
-            <a:r>
-              <a:rPr lang="en-US" sz="8800">
-                <a:solidFill>
-                  <a:schemeClr val="tx1"/>
-                </a:solidFill>
-                <a:latin typeface="Rastanty Cortez" panose="020F0502020204030204" pitchFamily="2" charset="0"/>
-                <a:ea typeface="Dotum" panose="020B0600000101010101" pitchFamily="34" charset="-127"/>
-                <a:cs typeface="Biome Light" panose="020B0303030204020804" pitchFamily="34" charset="0"/>
-              </a:rPr>
-              <a:t>ehrani</a:t>
-            </a:r>
-          </a:p>
-        </p:txBody>
-      </p:sp>
-      <p:sp>
-        <p:nvSpPr>
-          <p:cNvPr id="6" name="TextBox 5">
-            <a:extLst>
-              <a:ext uri="{FF2B5EF4-FFF2-40B4-BE49-F238E27FC236}">
-                <a16:creationId xmlns:a16="http://schemas.microsoft.com/office/drawing/2014/main" id="{A8822D1A-B801-D9EF-12B5-9308532E5786}"/>
-              </a:ext>
-            </a:extLst>
-          </p:cNvPr>
-          <p:cNvSpPr txBox="1"/>
-          <p:nvPr/>
-        </p:nvSpPr>
-        <p:spPr>
-          <a:xfrm>
-            <a:off x="80137" y="2181992"/>
-            <a:ext cx="5992835" cy="1446550"/>
-          </a:xfrm>
-          <a:prstGeom prst="rect">
-            <a:avLst/>
-          </a:prstGeom>
-          <a:noFill/>
-        </p:spPr>
-        <p:txBody>
-          <a:bodyPr wrap="square" rtlCol="0">
-            <a:spAutoFit/>
-          </a:bodyPr>
-          <a:lstStyle/>
-          <a:p>
-            <a:pPr algn="l" rtl="0"/>
-            <a:r>
-              <a:rPr lang="en-US" sz="8800">
-                <a:solidFill>
-                  <a:schemeClr val="tx1"/>
-                </a:solidFill>
-                <a:latin typeface="Rastanty Cortez" panose="020F0502020204030204" pitchFamily="2" charset="0"/>
-                <a:ea typeface="Dotum" panose="020B0600000101010101" pitchFamily="34" charset="-127"/>
-                <a:cs typeface="Biome Light" panose="020B0303030204020804" pitchFamily="34" charset="0"/>
-              </a:rPr>
-              <a:t>PouyaSharifiTehrani</a:t>
-            </a:r>
-          </a:p>
-        </p:txBody>
-      </p:sp>
-      <p:sp>
-        <p:nvSpPr>
-          <p:cNvPr id="8" name="TextBox 7">
-            <a:extLst>
-              <a:ext uri="{FF2B5EF4-FFF2-40B4-BE49-F238E27FC236}">
-                <a16:creationId xmlns:a16="http://schemas.microsoft.com/office/drawing/2014/main" id="{DD43A0E2-273F-3466-526C-374B1C7B0BDA}"/>
-              </a:ext>
-            </a:extLst>
-          </p:cNvPr>
-          <p:cNvSpPr txBox="1"/>
-          <p:nvPr/>
-        </p:nvSpPr>
-        <p:spPr>
-          <a:xfrm>
-            <a:off x="6508051" y="1988592"/>
-            <a:ext cx="3787035" cy="1446550"/>
-          </a:xfrm>
-          <a:prstGeom prst="rect">
-            <a:avLst/>
-          </a:prstGeom>
-          <a:noFill/>
-        </p:spPr>
-        <p:txBody>
-          <a:bodyPr wrap="square" rtlCol="0">
-            <a:spAutoFit/>
-          </a:bodyPr>
-          <a:lstStyle/>
-          <a:p>
-            <a:pPr algn="l" rtl="0"/>
-            <a:r>
-              <a:rPr lang="en-US" sz="8800">
-                <a:solidFill>
-                  <a:schemeClr val="tx1"/>
-                </a:solidFill>
-                <a:latin typeface="Rastanty Cortez" panose="020F0502020204030204" pitchFamily="2" charset="0"/>
-                <a:ea typeface="Dotum" panose="020B0600000101010101" pitchFamily="34" charset="-127"/>
-                <a:cs typeface="Biome Light" panose="020B0303030204020804" pitchFamily="34" charset="0"/>
-              </a:rPr>
-              <a:t>LeilaShabani</a:t>
-            </a:r>
-          </a:p>
-        </p:txBody>
-      </p:sp>
-      <p:sp>
-        <p:nvSpPr>
-          <p:cNvPr id="10" name="TextBox 9">
-            <a:extLst>
-              <a:ext uri="{FF2B5EF4-FFF2-40B4-BE49-F238E27FC236}">
-                <a16:creationId xmlns:a16="http://schemas.microsoft.com/office/drawing/2014/main" id="{253E3251-06DA-7AAB-649A-9C22EBBF9CD0}"/>
-              </a:ext>
-            </a:extLst>
-          </p:cNvPr>
-          <p:cNvSpPr txBox="1"/>
-          <p:nvPr/>
-        </p:nvSpPr>
-        <p:spPr>
-          <a:xfrm>
-            <a:off x="8295419" y="3175554"/>
-            <a:ext cx="2617555" cy="1446550"/>
-          </a:xfrm>
-          <a:prstGeom prst="rect">
-            <a:avLst/>
-          </a:prstGeom>
-          <a:noFill/>
-        </p:spPr>
-        <p:txBody>
-          <a:bodyPr wrap="square" rtlCol="0">
-            <a:spAutoFit/>
-          </a:bodyPr>
-          <a:lstStyle/>
-          <a:p>
-            <a:pPr algn="l" rtl="0"/>
-            <a:r>
-              <a:rPr lang="en-US" sz="8800">
-                <a:solidFill>
-                  <a:schemeClr val="tx1"/>
-                </a:solidFill>
-                <a:latin typeface="Rastanty Cortez" panose="020F0502020204030204" pitchFamily="2" charset="0"/>
-                <a:ea typeface="Dotum" panose="020B0600000101010101" pitchFamily="34" charset="-127"/>
-                <a:cs typeface="Biome Light" panose="020B0303030204020804" pitchFamily="34" charset="0"/>
-              </a:rPr>
-              <a:t>MShT</a:t>
-            </a:r>
-          </a:p>
-        </p:txBody>
-      </p:sp>
-      <p:sp>
-        <p:nvSpPr>
           <p:cNvPr id="20" name="TextBox 19">
             <a:extLst>
               <a:ext uri="{FF2B5EF4-FFF2-40B4-BE49-F238E27FC236}">
@@ -11747,8 +14448,8 @@
         </p:nvSpPr>
         <p:spPr>
           <a:xfrm>
-            <a:off x="440759" y="6042833"/>
-            <a:ext cx="6088719" cy="1446550"/>
+            <a:off x="5473749" y="7194213"/>
+            <a:ext cx="5864920" cy="1446550"/>
           </a:xfrm>
           <a:prstGeom prst="rect">
             <a:avLst/>
@@ -11816,6 +14517,291 @@
                 <a:cs typeface="Biome Light" panose="020B0303030204020804" pitchFamily="34" charset="0"/>
               </a:rPr>
               <a:t>tudent</a:t>
+            </a:r>
+          </a:p>
+        </p:txBody>
+      </p:sp>
+      <p:sp>
+        <p:nvSpPr>
+          <p:cNvPr id="4" name="TextBox 3">
+            <a:extLst>
+              <a:ext uri="{FF2B5EF4-FFF2-40B4-BE49-F238E27FC236}">
+                <a16:creationId xmlns:a16="http://schemas.microsoft.com/office/drawing/2014/main" id="{102F6D86-6AF3-4A0E-2F22-5EE0548A7A53}"/>
+              </a:ext>
+            </a:extLst>
+          </p:cNvPr>
+          <p:cNvSpPr txBox="1"/>
+          <p:nvPr/>
+        </p:nvSpPr>
+        <p:spPr>
+          <a:xfrm>
+            <a:off x="161822" y="2057444"/>
+            <a:ext cx="11361364" cy="3785652"/>
+          </a:xfrm>
+          <a:prstGeom prst="rect">
+            <a:avLst/>
+          </a:prstGeom>
+          <a:noFill/>
+        </p:spPr>
+        <p:txBody>
+          <a:bodyPr wrap="square" rtlCol="0">
+            <a:spAutoFit/>
+          </a:bodyPr>
+          <a:lstStyle/>
+          <a:p>
+            <a:pPr algn="l" rtl="0"/>
+            <a:r>
+              <a:rPr lang="en-US" sz="8000">
+                <a:solidFill>
+                  <a:schemeClr val="tx1"/>
+                </a:solidFill>
+                <a:latin typeface="Rastanty Cortez" panose="020F0502020204030204" pitchFamily="2" charset="0"/>
+                <a:ea typeface="Dotum" panose="020B0600000101010101" pitchFamily="34" charset="-127"/>
+                <a:cs typeface="Biome Light" panose="020B0303030204020804" pitchFamily="34" charset="0"/>
+              </a:rPr>
+              <a:t>Al</a:t>
+            </a:r>
+            <a:r>
+              <a:rPr lang="en-US" sz="8000">
+                <a:solidFill>
+                  <a:srgbClr val="C00000"/>
+                </a:solidFill>
+                <a:latin typeface="Rastanty Cortez" panose="020F0502020204030204" pitchFamily="2" charset="0"/>
+                <a:ea typeface="Dotum" panose="020B0600000101010101" pitchFamily="34" charset="-127"/>
+                <a:cs typeface="Biome Light" panose="020B0303030204020804" pitchFamily="34" charset="0"/>
+              </a:rPr>
+              <a:t>a</a:t>
+            </a:r>
+            <a:r>
+              <a:rPr lang="en-US" sz="8000">
+                <a:solidFill>
+                  <a:schemeClr val="tx1"/>
+                </a:solidFill>
+                <a:latin typeface="Rastanty Cortez" panose="020F0502020204030204" pitchFamily="2" charset="0"/>
+                <a:ea typeface="Dotum" panose="020B0600000101010101" pitchFamily="34" charset="-127"/>
+                <a:cs typeface="Biome Light" panose="020B0303030204020804" pitchFamily="34" charset="0"/>
+              </a:rPr>
+              <a:t>mut – </a:t>
+            </a:r>
+            <a:r>
+              <a:rPr lang="en-US" sz="8000">
+                <a:solidFill>
+                  <a:srgbClr val="C00000"/>
+                </a:solidFill>
+                <a:latin typeface="Rastanty Cortez" panose="020F0502020204030204" pitchFamily="2" charset="0"/>
+                <a:ea typeface="Dotum" panose="020B0600000101010101" pitchFamily="34" charset="-127"/>
+                <a:cs typeface="Biome Light" panose="020B0303030204020804" pitchFamily="34" charset="0"/>
+              </a:rPr>
+              <a:t>e</a:t>
+            </a:r>
+            <a:r>
+              <a:rPr lang="en-US" sz="8000">
+                <a:solidFill>
+                  <a:schemeClr val="tx1"/>
+                </a:solidFill>
+                <a:latin typeface="Rastanty Cortez" panose="020F0502020204030204" pitchFamily="2" charset="0"/>
+                <a:ea typeface="Dotum" panose="020B0600000101010101" pitchFamily="34" charset="-127"/>
+                <a:cs typeface="Biome Light" panose="020B0303030204020804" pitchFamily="34" charset="0"/>
+              </a:rPr>
+              <a:t>Lib – </a:t>
+            </a:r>
+            <a:r>
+              <a:rPr lang="en-US" sz="8000">
+                <a:solidFill>
+                  <a:srgbClr val="C00000"/>
+                </a:solidFill>
+                <a:latin typeface="Rastanty Cortez" panose="020F0502020204030204" pitchFamily="2" charset="0"/>
+                <a:ea typeface="Dotum" panose="020B0600000101010101" pitchFamily="34" charset="-127"/>
+                <a:cs typeface="Biome Light" panose="020B0303030204020804" pitchFamily="34" charset="0"/>
+              </a:rPr>
+              <a:t>i</a:t>
+            </a:r>
+            <a:r>
+              <a:rPr lang="en-US" sz="8000">
+                <a:solidFill>
+                  <a:schemeClr val="tx1"/>
+                </a:solidFill>
+                <a:latin typeface="Rastanty Cortez" panose="020F0502020204030204" pitchFamily="2" charset="0"/>
+                <a:ea typeface="Dotum" panose="020B0600000101010101" pitchFamily="34" charset="-127"/>
+                <a:cs typeface="Biome Light" panose="020B0303030204020804" pitchFamily="34" charset="0"/>
+              </a:rPr>
+              <a:t>Herbs – S</a:t>
+            </a:r>
+            <a:r>
+              <a:rPr lang="en-US" sz="8000">
+                <a:solidFill>
+                  <a:srgbClr val="C00000"/>
+                </a:solidFill>
+                <a:latin typeface="Rastanty Cortez" panose="020F0502020204030204" pitchFamily="2" charset="0"/>
+                <a:ea typeface="Dotum" panose="020B0600000101010101" pitchFamily="34" charset="-127"/>
+                <a:cs typeface="Biome Light" panose="020B0303030204020804" pitchFamily="34" charset="0"/>
+              </a:rPr>
+              <a:t>u</a:t>
+            </a:r>
+            <a:r>
+              <a:rPr lang="en-US" sz="8000">
+                <a:solidFill>
+                  <a:schemeClr val="tx1"/>
+                </a:solidFill>
+                <a:latin typeface="Rastanty Cortez" panose="020F0502020204030204" pitchFamily="2" charset="0"/>
+                <a:ea typeface="Dotum" panose="020B0600000101010101" pitchFamily="34" charset="-127"/>
+                <a:cs typeface="Biome Light" panose="020B0303030204020804" pitchFamily="34" charset="0"/>
+              </a:rPr>
+              <a:t>Papers – IR</a:t>
+            </a:r>
+            <a:r>
+              <a:rPr lang="en-US" sz="8000">
+                <a:solidFill>
+                  <a:srgbClr val="C00000"/>
+                </a:solidFill>
+                <a:latin typeface="Rastanty Cortez" panose="020F0502020204030204" pitchFamily="2" charset="0"/>
+                <a:ea typeface="Dotum" panose="020B0600000101010101" pitchFamily="34" charset="-127"/>
+                <a:cs typeface="Biome Light" panose="020B0303030204020804" pitchFamily="34" charset="0"/>
+              </a:rPr>
+              <a:t>I</a:t>
+            </a:r>
+            <a:r>
+              <a:rPr lang="en-US" sz="8000">
+                <a:solidFill>
+                  <a:schemeClr val="tx1"/>
+                </a:solidFill>
+                <a:latin typeface="Rastanty Cortez" panose="020F0502020204030204" pitchFamily="2" charset="0"/>
+                <a:ea typeface="Dotum" panose="020B0600000101010101" pitchFamily="34" charset="-127"/>
+                <a:cs typeface="Biome Light" panose="020B0303030204020804" pitchFamily="34" charset="0"/>
+              </a:rPr>
+              <a:t>S – St</a:t>
+            </a:r>
+            <a:r>
+              <a:rPr lang="en-US" sz="8000">
+                <a:solidFill>
+                  <a:srgbClr val="C00000"/>
+                </a:solidFill>
+                <a:latin typeface="Rastanty Cortez" panose="020F0502020204030204" pitchFamily="2" charset="0"/>
+                <a:ea typeface="Dotum" panose="020B0600000101010101" pitchFamily="34" charset="-127"/>
+                <a:cs typeface="Biome Light" panose="020B0303030204020804" pitchFamily="34" charset="0"/>
+              </a:rPr>
+              <a:t>u</a:t>
+            </a:r>
+            <a:r>
+              <a:rPr lang="en-US" sz="8000">
+                <a:solidFill>
+                  <a:schemeClr val="tx1"/>
+                </a:solidFill>
+                <a:latin typeface="Rastanty Cortez" panose="020F0502020204030204" pitchFamily="2" charset="0"/>
+                <a:ea typeface="Dotum" panose="020B0600000101010101" pitchFamily="34" charset="-127"/>
+                <a:cs typeface="Biome Light" panose="020B0303030204020804" pitchFamily="34" charset="0"/>
+              </a:rPr>
+              <a:t>cturEasy - Ne</a:t>
+            </a:r>
+            <a:r>
+              <a:rPr lang="en-US" sz="8000">
+                <a:solidFill>
+                  <a:srgbClr val="C00000"/>
+                </a:solidFill>
+                <a:latin typeface="Rastanty Cortez" panose="020F0502020204030204" pitchFamily="2" charset="0"/>
+                <a:ea typeface="Dotum" panose="020B0600000101010101" pitchFamily="34" charset="-127"/>
+                <a:cs typeface="Biome Light" panose="020B0303030204020804" pitchFamily="34" charset="0"/>
+              </a:rPr>
+              <a:t>x</a:t>
+            </a:r>
+            <a:r>
+              <a:rPr lang="en-US" sz="8000">
+                <a:solidFill>
+                  <a:schemeClr val="tx1"/>
+                </a:solidFill>
+                <a:latin typeface="Rastanty Cortez" panose="020F0502020204030204" pitchFamily="2" charset="0"/>
+                <a:ea typeface="Dotum" panose="020B0600000101010101" pitchFamily="34" charset="-127"/>
+                <a:cs typeface="Biome Light" panose="020B0303030204020804" pitchFamily="34" charset="0"/>
+              </a:rPr>
+              <a:t>term – Re</a:t>
+            </a:r>
+            <a:r>
+              <a:rPr lang="en-US" sz="8000">
+                <a:solidFill>
+                  <a:srgbClr val="C00000"/>
+                </a:solidFill>
+                <a:latin typeface="Rastanty Cortez" panose="020F0502020204030204" pitchFamily="2" charset="0"/>
+                <a:ea typeface="Dotum" panose="020B0600000101010101" pitchFamily="34" charset="-127"/>
+                <a:cs typeface="Biome Light" panose="020B0303030204020804" pitchFamily="34" charset="0"/>
+              </a:rPr>
+              <a:t>s</a:t>
+            </a:r>
+            <a:r>
+              <a:rPr lang="en-US" sz="8000">
+                <a:solidFill>
+                  <a:schemeClr val="tx1"/>
+                </a:solidFill>
+                <a:latin typeface="Rastanty Cortez" panose="020F0502020204030204" pitchFamily="2" charset="0"/>
+                <a:ea typeface="Dotum" panose="020B0600000101010101" pitchFamily="34" charset="-127"/>
+                <a:cs typeface="Biome Light" panose="020B0303030204020804" pitchFamily="34" charset="0"/>
+              </a:rPr>
+              <a:t>ident – SKU</a:t>
+            </a:r>
+            <a:r>
+              <a:rPr lang="en-US" sz="8000">
+                <a:solidFill>
+                  <a:srgbClr val="C00000"/>
+                </a:solidFill>
+                <a:latin typeface="Rastanty Cortez" panose="020F0502020204030204" pitchFamily="2" charset="0"/>
+                <a:ea typeface="Dotum" panose="020B0600000101010101" pitchFamily="34" charset="-127"/>
+                <a:cs typeface="Biome Light" panose="020B0303030204020804" pitchFamily="34" charset="0"/>
+              </a:rPr>
+              <a:t>B</a:t>
+            </a:r>
+            <a:r>
+              <a:rPr lang="en-US" sz="8000">
+                <a:solidFill>
+                  <a:schemeClr val="tx1"/>
+                </a:solidFill>
+                <a:latin typeface="Rastanty Cortez" panose="020F0502020204030204" pitchFamily="2" charset="0"/>
+                <a:ea typeface="Dotum" panose="020B0600000101010101" pitchFamily="34" charset="-127"/>
+                <a:cs typeface="Biome Light" panose="020B0303030204020804" pitchFamily="34" charset="0"/>
+              </a:rPr>
+              <a:t>ioDigi – SI</a:t>
+            </a:r>
+            <a:r>
+              <a:rPr lang="en-US" sz="8000">
+                <a:solidFill>
+                  <a:srgbClr val="C00000"/>
+                </a:solidFill>
+                <a:latin typeface="Rastanty Cortez" panose="020F0502020204030204" pitchFamily="2" charset="0"/>
+                <a:ea typeface="Dotum" panose="020B0600000101010101" pitchFamily="34" charset="-127"/>
+                <a:cs typeface="Biome Light" panose="020B0303030204020804" pitchFamily="34" charset="0"/>
+              </a:rPr>
+              <a:t>K</a:t>
+            </a:r>
+            <a:r>
+              <a:rPr lang="en-US" sz="8000">
+                <a:solidFill>
+                  <a:schemeClr val="tx1"/>
+                </a:solidFill>
+                <a:latin typeface="Rastanty Cortez" panose="020F0502020204030204" pitchFamily="2" charset="0"/>
+                <a:ea typeface="Dotum" panose="020B0600000101010101" pitchFamily="34" charset="-127"/>
+                <a:cs typeface="Biome Light" panose="020B0303030204020804" pitchFamily="34" charset="0"/>
+              </a:rPr>
+              <a:t>AD - E</a:t>
+            </a:r>
+            <a:r>
+              <a:rPr lang="en-US" sz="8000">
+                <a:solidFill>
+                  <a:srgbClr val="C00000"/>
+                </a:solidFill>
+                <a:latin typeface="Rastanty Cortez" panose="020F0502020204030204" pitchFamily="2" charset="0"/>
+                <a:ea typeface="Dotum" panose="020B0600000101010101" pitchFamily="34" charset="-127"/>
+                <a:cs typeface="Biome Light" panose="020B0303030204020804" pitchFamily="34" charset="0"/>
+              </a:rPr>
+              <a:t>x</a:t>
+            </a:r>
+            <a:r>
+              <a:rPr lang="en-US" sz="8000">
+                <a:solidFill>
+                  <a:schemeClr val="tx1"/>
+                </a:solidFill>
+                <a:latin typeface="Rastanty Cortez" panose="020F0502020204030204" pitchFamily="2" charset="0"/>
+                <a:ea typeface="Dotum" panose="020B0600000101010101" pitchFamily="34" charset="-127"/>
+                <a:cs typeface="Biome Light" panose="020B0303030204020804" pitchFamily="34" charset="0"/>
+              </a:rPr>
+              <a:t>aminer</a:t>
             </a:r>
           </a:p>
         </p:txBody>

--- a/ExaminerB/.appCatalog/ExaminerB notes 1404.pptx
+++ b/ExaminerB/.appCatalog/ExaminerB notes 1404.pptx
@@ -280,7 +280,7 @@
             </a:pPr>
             <a:fld id="{BCC18F51-09EC-435C-A3BA-64A766E099C0}" type="datetimeFigureOut">
               <a:rPr lang="fa-IR"/>
-              <a:t>03/02/1448</a:t>
+              <a:t>05/02/1448</a:t>
             </a:fld>
             <a:endParaRPr/>
           </a:p>
@@ -459,7 +459,7 @@
             </a:pPr>
             <a:fld id="{BCC18F51-09EC-435C-A3BA-64A766E099C0}" type="datetimeFigureOut">
               <a:rPr lang="fa-IR"/>
-              <a:t>03/02/1448</a:t>
+              <a:t>05/02/1448</a:t>
             </a:fld>
             <a:endParaRPr/>
           </a:p>
@@ -648,7 +648,7 @@
             </a:pPr>
             <a:fld id="{BCC18F51-09EC-435C-A3BA-64A766E099C0}" type="datetimeFigureOut">
               <a:rPr lang="fa-IR"/>
-              <a:t>03/02/1448</a:t>
+              <a:t>05/02/1448</a:t>
             </a:fld>
             <a:endParaRPr/>
           </a:p>
@@ -827,7 +827,7 @@
             </a:pPr>
             <a:fld id="{BCC18F51-09EC-435C-A3BA-64A766E099C0}" type="datetimeFigureOut">
               <a:rPr lang="fa-IR"/>
-              <a:t>03/02/1448</a:t>
+              <a:t>05/02/1448</a:t>
             </a:fld>
             <a:endParaRPr/>
           </a:p>
@@ -1079,7 +1079,7 @@
             </a:pPr>
             <a:fld id="{BCC18F51-09EC-435C-A3BA-64A766E099C0}" type="datetimeFigureOut">
               <a:rPr lang="fa-IR"/>
-              <a:t>03/02/1448</a:t>
+              <a:t>05/02/1448</a:t>
             </a:fld>
             <a:endParaRPr/>
           </a:p>
@@ -1324,7 +1324,7 @@
             </a:pPr>
             <a:fld id="{BCC18F51-09EC-435C-A3BA-64A766E099C0}" type="datetimeFigureOut">
               <a:rPr lang="fa-IR"/>
-              <a:t>03/02/1448</a:t>
+              <a:t>05/02/1448</a:t>
             </a:fld>
             <a:endParaRPr/>
           </a:p>
@@ -1706,7 +1706,7 @@
             </a:pPr>
             <a:fld id="{BCC18F51-09EC-435C-A3BA-64A766E099C0}" type="datetimeFigureOut">
               <a:rPr lang="fa-IR"/>
-              <a:t>03/02/1448</a:t>
+              <a:t>05/02/1448</a:t>
             </a:fld>
             <a:endParaRPr/>
           </a:p>
@@ -1829,7 +1829,7 @@
             </a:pPr>
             <a:fld id="{BCC18F51-09EC-435C-A3BA-64A766E099C0}" type="datetimeFigureOut">
               <a:rPr lang="fa-IR"/>
-              <a:t>03/02/1448</a:t>
+              <a:t>05/02/1448</a:t>
             </a:fld>
             <a:endParaRPr/>
           </a:p>
@@ -1928,7 +1928,7 @@
             </a:pPr>
             <a:fld id="{BCC18F51-09EC-435C-A3BA-64A766E099C0}" type="datetimeFigureOut">
               <a:rPr lang="fa-IR"/>
-              <a:t>03/02/1448</a:t>
+              <a:t>05/02/1448</a:t>
             </a:fld>
             <a:endParaRPr/>
           </a:p>
@@ -2215,7 +2215,7 @@
             </a:pPr>
             <a:fld id="{BCC18F51-09EC-435C-A3BA-64A766E099C0}" type="datetimeFigureOut">
               <a:rPr lang="fa-IR"/>
-              <a:t>03/02/1448</a:t>
+              <a:t>05/02/1448</a:t>
             </a:fld>
             <a:endParaRPr/>
           </a:p>
@@ -2479,7 +2479,7 @@
             </a:pPr>
             <a:fld id="{BCC18F51-09EC-435C-A3BA-64A766E099C0}" type="datetimeFigureOut">
               <a:rPr lang="fa-IR"/>
-              <a:t>03/02/1448</a:t>
+              <a:t>05/02/1448</a:t>
             </a:fld>
             <a:endParaRPr/>
           </a:p>
@@ -2701,7 +2701,7 @@
             </a:pPr>
             <a:fld id="{BCC18F51-09EC-435C-A3BA-64A766E099C0}" type="datetimeFigureOut">
               <a:rPr lang="fa-IR"/>
-              <a:t>03/02/1448</a:t>
+              <a:t>05/02/1448</a:t>
             </a:fld>
             <a:endParaRPr/>
           </a:p>
@@ -9277,8 +9277,8 @@
         </p:nvSpPr>
         <p:spPr bwMode="auto">
           <a:xfrm>
-            <a:off x="6765737" y="4523011"/>
-            <a:ext cx="1855657" cy="2508836"/>
+            <a:off x="6765737" y="4503438"/>
+            <a:ext cx="1855657" cy="2573059"/>
           </a:xfrm>
           <a:prstGeom prst="roundRect">
             <a:avLst>
@@ -9646,6 +9646,20 @@
                 <a:cs typeface="Calibri Light" panose="020F0302020204030204" pitchFamily="34" charset="0"/>
               </a:rPr>
               <a:t>64 IsSelected</a:t>
+            </a:r>
+          </a:p>
+          <a:p>
+            <a:pPr marL="90488" rtl="0"/>
+            <a:r>
+              <a:rPr lang="en-US" sz="500" kern="100">
+                <a:solidFill>
+                  <a:srgbClr val="C00000"/>
+                </a:solidFill>
+                <a:latin typeface="Consolas" panose="020B0609020204030204" pitchFamily="49" charset="0"/>
+                <a:ea typeface="Calibri" panose="020F0502020204030204" pitchFamily="34" charset="0"/>
+                <a:cs typeface="Calibri Light" panose="020F0302020204030204" pitchFamily="34" charset="0"/>
+              </a:rPr>
+              <a:t>128 AnswerTextAcceptedByTeacher</a:t>
             </a:r>
           </a:p>
         </p:txBody>

--- a/ExaminerB/.appCatalog/ExaminerB notes 1404.pptx
+++ b/ExaminerB/.appCatalog/ExaminerB notes 1404.pptx
@@ -280,7 +280,7 @@
             </a:pPr>
             <a:fld id="{BCC18F51-09EC-435C-A3BA-64A766E099C0}" type="datetimeFigureOut">
               <a:rPr lang="fa-IR"/>
-              <a:t>05/02/1448</a:t>
+              <a:t>06/02/1448</a:t>
             </a:fld>
             <a:endParaRPr/>
           </a:p>
@@ -459,7 +459,7 @@
             </a:pPr>
             <a:fld id="{BCC18F51-09EC-435C-A3BA-64A766E099C0}" type="datetimeFigureOut">
               <a:rPr lang="fa-IR"/>
-              <a:t>05/02/1448</a:t>
+              <a:t>06/02/1448</a:t>
             </a:fld>
             <a:endParaRPr/>
           </a:p>
@@ -648,7 +648,7 @@
             </a:pPr>
             <a:fld id="{BCC18F51-09EC-435C-A3BA-64A766E099C0}" type="datetimeFigureOut">
               <a:rPr lang="fa-IR"/>
-              <a:t>05/02/1448</a:t>
+              <a:t>06/02/1448</a:t>
             </a:fld>
             <a:endParaRPr/>
           </a:p>
@@ -827,7 +827,7 @@
             </a:pPr>
             <a:fld id="{BCC18F51-09EC-435C-A3BA-64A766E099C0}" type="datetimeFigureOut">
               <a:rPr lang="fa-IR"/>
-              <a:t>05/02/1448</a:t>
+              <a:t>06/02/1448</a:t>
             </a:fld>
             <a:endParaRPr/>
           </a:p>
@@ -1079,7 +1079,7 @@
             </a:pPr>
             <a:fld id="{BCC18F51-09EC-435C-A3BA-64A766E099C0}" type="datetimeFigureOut">
               <a:rPr lang="fa-IR"/>
-              <a:t>05/02/1448</a:t>
+              <a:t>06/02/1448</a:t>
             </a:fld>
             <a:endParaRPr/>
           </a:p>
@@ -1324,7 +1324,7 @@
             </a:pPr>
             <a:fld id="{BCC18F51-09EC-435C-A3BA-64A766E099C0}" type="datetimeFigureOut">
               <a:rPr lang="fa-IR"/>
-              <a:t>05/02/1448</a:t>
+              <a:t>06/02/1448</a:t>
             </a:fld>
             <a:endParaRPr/>
           </a:p>
@@ -1706,7 +1706,7 @@
             </a:pPr>
             <a:fld id="{BCC18F51-09EC-435C-A3BA-64A766E099C0}" type="datetimeFigureOut">
               <a:rPr lang="fa-IR"/>
-              <a:t>05/02/1448</a:t>
+              <a:t>06/02/1448</a:t>
             </a:fld>
             <a:endParaRPr/>
           </a:p>
@@ -1829,7 +1829,7 @@
             </a:pPr>
             <a:fld id="{BCC18F51-09EC-435C-A3BA-64A766E099C0}" type="datetimeFigureOut">
               <a:rPr lang="fa-IR"/>
-              <a:t>05/02/1448</a:t>
+              <a:t>06/02/1448</a:t>
             </a:fld>
             <a:endParaRPr/>
           </a:p>
@@ -1928,7 +1928,7 @@
             </a:pPr>
             <a:fld id="{BCC18F51-09EC-435C-A3BA-64A766E099C0}" type="datetimeFigureOut">
               <a:rPr lang="fa-IR"/>
-              <a:t>05/02/1448</a:t>
+              <a:t>06/02/1448</a:t>
             </a:fld>
             <a:endParaRPr/>
           </a:p>
@@ -2215,7 +2215,7 @@
             </a:pPr>
             <a:fld id="{BCC18F51-09EC-435C-A3BA-64A766E099C0}" type="datetimeFigureOut">
               <a:rPr lang="fa-IR"/>
-              <a:t>05/02/1448</a:t>
+              <a:t>06/02/1448</a:t>
             </a:fld>
             <a:endParaRPr/>
           </a:p>
@@ -2479,7 +2479,7 @@
             </a:pPr>
             <a:fld id="{BCC18F51-09EC-435C-A3BA-64A766E099C0}" type="datetimeFigureOut">
               <a:rPr lang="fa-IR"/>
-              <a:t>05/02/1448</a:t>
+              <a:t>06/02/1448</a:t>
             </a:fld>
             <a:endParaRPr/>
           </a:p>
@@ -2701,7 +2701,7 @@
             </a:pPr>
             <a:fld id="{BCC18F51-09EC-435C-A3BA-64A766E099C0}" type="datetimeFigureOut">
               <a:rPr lang="fa-IR"/>
-              <a:t>05/02/1448</a:t>
+              <a:t>06/02/1448</a:t>
             </a:fld>
             <a:endParaRPr/>
           </a:p>
@@ -9865,7 +9865,7 @@
         </p:nvSpPr>
         <p:spPr bwMode="auto">
           <a:xfrm>
-            <a:off x="1154352" y="6690674"/>
+            <a:off x="1311283" y="6765485"/>
             <a:ext cx="1105070" cy="787849"/>
           </a:xfrm>
           <a:prstGeom prst="borderCallout2">
@@ -10550,8 +10550,8 @@
         </p:nvSpPr>
         <p:spPr>
           <a:xfrm>
-            <a:off x="139591" y="6459549"/>
-            <a:ext cx="976113" cy="1787289"/>
+            <a:off x="139591" y="6480621"/>
+            <a:ext cx="1105070" cy="1975950"/>
           </a:xfrm>
           <a:prstGeom prst="roundRect">
             <a:avLst>
@@ -10642,6 +10642,13 @@
               <a:rPr lang="en-US" sz="853"/>
               <a:t>NoteDateTime</a:t>
             </a:r>
+          </a:p>
+          <a:p>
+            <a:pPr rtl="0"/>
+            <a:r>
+              <a:rPr lang="en-US" sz="853"/>
+              <a:t>NoteDueDateTime</a:t>
+            </a:r>
             <a:endParaRPr lang="en-US" sz="853" dirty="0"/>
           </a:p>
           <a:p>
@@ -10696,9 +10703,7 @@
             </a:r>
           </a:p>
           <a:p>
-            <a:pPr rtl="0">
-              <a:buNone/>
-            </a:pPr>
+            <a:pPr rtl="0"/>
             <a:r>
               <a:rPr lang="en-US" sz="500" kern="100">
                 <a:solidFill>
@@ -10708,7 +10713,7 @@
                 <a:ea typeface="Calibri" panose="020F0502020204030204" pitchFamily="34" charset="0"/>
                 <a:cs typeface="Calibri Light" panose="020F0302020204030204" pitchFamily="34" charset="0"/>
               </a:rPr>
-              <a:t> 2:IsDone</a:t>
+              <a:t> 2:IsTodo</a:t>
             </a:r>
           </a:p>
           <a:p>
@@ -10724,7 +10729,7 @@
                 <a:ea typeface="Calibri" panose="020F0502020204030204" pitchFamily="34" charset="0"/>
                 <a:cs typeface="Calibri Light" panose="020F0302020204030204" pitchFamily="34" charset="0"/>
               </a:rPr>
-              <a:t> 4:IsShared</a:t>
+              <a:t> 4:IsDone</a:t>
             </a:r>
           </a:p>
           <a:p>
@@ -10740,7 +10745,23 @@
                 <a:ea typeface="Calibri" panose="020F0502020204030204" pitchFamily="34" charset="0"/>
                 <a:cs typeface="Calibri Light" panose="020F0302020204030204" pitchFamily="34" charset="0"/>
               </a:rPr>
-              <a:t> 8:IsReadonly</a:t>
+              <a:t> 8:IsShared</a:t>
+            </a:r>
+          </a:p>
+          <a:p>
+            <a:pPr rtl="0">
+              <a:buNone/>
+            </a:pPr>
+            <a:r>
+              <a:rPr lang="en-US" sz="500" kern="100">
+                <a:solidFill>
+                  <a:srgbClr val="C00000"/>
+                </a:solidFill>
+                <a:latin typeface="Consolas" panose="020B0609020204030204" pitchFamily="49" charset="0"/>
+                <a:ea typeface="Calibri" panose="020F0502020204030204" pitchFamily="34" charset="0"/>
+                <a:cs typeface="Calibri Light" panose="020F0302020204030204" pitchFamily="34" charset="0"/>
+              </a:rPr>
+              <a:t>16:IsReadonly</a:t>
             </a:r>
           </a:p>
         </p:txBody>
@@ -10759,7 +10780,7 @@
         </p:nvSpPr>
         <p:spPr>
           <a:xfrm>
-            <a:off x="928564" y="7596296"/>
+            <a:off x="1048111" y="7703030"/>
             <a:ext cx="954729" cy="900550"/>
           </a:xfrm>
           <a:prstGeom prst="roundRect">

--- a/ExaminerB/.appCatalog/ExaminerB notes 1404.pptx
+++ b/ExaminerB/.appCatalog/ExaminerB notes 1404.pptx
@@ -280,7 +280,7 @@
             </a:pPr>
             <a:fld id="{BCC18F51-09EC-435C-A3BA-64A766E099C0}" type="datetimeFigureOut">
               <a:rPr lang="fa-IR"/>
-              <a:t>06/02/1448</a:t>
+              <a:t>07/02/1448</a:t>
             </a:fld>
             <a:endParaRPr/>
           </a:p>
@@ -459,7 +459,7 @@
             </a:pPr>
             <a:fld id="{BCC18F51-09EC-435C-A3BA-64A766E099C0}" type="datetimeFigureOut">
               <a:rPr lang="fa-IR"/>
-              <a:t>06/02/1448</a:t>
+              <a:t>07/02/1448</a:t>
             </a:fld>
             <a:endParaRPr/>
           </a:p>
@@ -648,7 +648,7 @@
             </a:pPr>
             <a:fld id="{BCC18F51-09EC-435C-A3BA-64A766E099C0}" type="datetimeFigureOut">
               <a:rPr lang="fa-IR"/>
-              <a:t>06/02/1448</a:t>
+              <a:t>07/02/1448</a:t>
             </a:fld>
             <a:endParaRPr/>
           </a:p>
@@ -827,7 +827,7 @@
             </a:pPr>
             <a:fld id="{BCC18F51-09EC-435C-A3BA-64A766E099C0}" type="datetimeFigureOut">
               <a:rPr lang="fa-IR"/>
-              <a:t>06/02/1448</a:t>
+              <a:t>07/02/1448</a:t>
             </a:fld>
             <a:endParaRPr/>
           </a:p>
@@ -1079,7 +1079,7 @@
             </a:pPr>
             <a:fld id="{BCC18F51-09EC-435C-A3BA-64A766E099C0}" type="datetimeFigureOut">
               <a:rPr lang="fa-IR"/>
-              <a:t>06/02/1448</a:t>
+              <a:t>07/02/1448</a:t>
             </a:fld>
             <a:endParaRPr/>
           </a:p>
@@ -1324,7 +1324,7 @@
             </a:pPr>
             <a:fld id="{BCC18F51-09EC-435C-A3BA-64A766E099C0}" type="datetimeFigureOut">
               <a:rPr lang="fa-IR"/>
-              <a:t>06/02/1448</a:t>
+              <a:t>07/02/1448</a:t>
             </a:fld>
             <a:endParaRPr/>
           </a:p>
@@ -1706,7 +1706,7 @@
             </a:pPr>
             <a:fld id="{BCC18F51-09EC-435C-A3BA-64A766E099C0}" type="datetimeFigureOut">
               <a:rPr lang="fa-IR"/>
-              <a:t>06/02/1448</a:t>
+              <a:t>07/02/1448</a:t>
             </a:fld>
             <a:endParaRPr/>
           </a:p>
@@ -1829,7 +1829,7 @@
             </a:pPr>
             <a:fld id="{BCC18F51-09EC-435C-A3BA-64A766E099C0}" type="datetimeFigureOut">
               <a:rPr lang="fa-IR"/>
-              <a:t>06/02/1448</a:t>
+              <a:t>07/02/1448</a:t>
             </a:fld>
             <a:endParaRPr/>
           </a:p>
@@ -1928,7 +1928,7 @@
             </a:pPr>
             <a:fld id="{BCC18F51-09EC-435C-A3BA-64A766E099C0}" type="datetimeFigureOut">
               <a:rPr lang="fa-IR"/>
-              <a:t>06/02/1448</a:t>
+              <a:t>07/02/1448</a:t>
             </a:fld>
             <a:endParaRPr/>
           </a:p>
@@ -2215,7 +2215,7 @@
             </a:pPr>
             <a:fld id="{BCC18F51-09EC-435C-A3BA-64A766E099C0}" type="datetimeFigureOut">
               <a:rPr lang="fa-IR"/>
-              <a:t>06/02/1448</a:t>
+              <a:t>07/02/1448</a:t>
             </a:fld>
             <a:endParaRPr/>
           </a:p>
@@ -2479,7 +2479,7 @@
             </a:pPr>
             <a:fld id="{BCC18F51-09EC-435C-A3BA-64A766E099C0}" type="datetimeFigureOut">
               <a:rPr lang="fa-IR"/>
-              <a:t>06/02/1448</a:t>
+              <a:t>07/02/1448</a:t>
             </a:fld>
             <a:endParaRPr/>
           </a:p>
@@ -2701,7 +2701,7 @@
             </a:pPr>
             <a:fld id="{BCC18F51-09EC-435C-A3BA-64A766E099C0}" type="datetimeFigureOut">
               <a:rPr lang="fa-IR"/>
-              <a:t>06/02/1448</a:t>
+              <a:t>07/02/1448</a:t>
             </a:fld>
             <a:endParaRPr/>
           </a:p>
@@ -11056,8 +11056,8 @@
         </p:nvSpPr>
         <p:spPr bwMode="auto">
           <a:xfrm>
-            <a:off x="3888036" y="90839"/>
-            <a:ext cx="1366068" cy="1748618"/>
+            <a:off x="3829694" y="90838"/>
+            <a:ext cx="1424410" cy="1936967"/>
           </a:xfrm>
           <a:prstGeom prst="roundRect">
             <a:avLst>
@@ -11295,7 +11295,7 @@
                 <a:latin typeface="Segoe UI" panose="020B0502040204020203" pitchFamily="34" charset="0"/>
                 <a:cs typeface="Segoe UI" panose="020B0502040204020203" pitchFamily="34" charset="0"/>
               </a:rPr>
-              <a:t>16  : -          32  : -</a:t>
+              <a:t>16  : ShowDueNotes</a:t>
             </a:r>
           </a:p>
           <a:p>
@@ -11310,7 +11310,37 @@
                 <a:latin typeface="Segoe UI" panose="020B0502040204020203" pitchFamily="34" charset="0"/>
                 <a:cs typeface="Segoe UI" panose="020B0502040204020203" pitchFamily="34" charset="0"/>
               </a:rPr>
-              <a:t>64  : -          128: SuperUser</a:t>
+              <a:t>32  : DueNotesDays=7 (default=3)</a:t>
+            </a:r>
+          </a:p>
+          <a:p>
+            <a:pPr marL="90488" rtl="0">
+              <a:defRPr/>
+            </a:pPr>
+            <a:r>
+              <a:rPr lang="en-US" sz="500">
+                <a:solidFill>
+                  <a:srgbClr val="C00000"/>
+                </a:solidFill>
+                <a:latin typeface="Segoe UI" panose="020B0502040204020203" pitchFamily="34" charset="0"/>
+                <a:cs typeface="Segoe UI" panose="020B0502040204020203" pitchFamily="34" charset="0"/>
+              </a:rPr>
+              <a:t>64  : -  </a:t>
+            </a:r>
+          </a:p>
+          <a:p>
+            <a:pPr marL="90488" rtl="0">
+              <a:defRPr/>
+            </a:pPr>
+            <a:r>
+              <a:rPr lang="en-US" sz="500">
+                <a:solidFill>
+                  <a:srgbClr val="C00000"/>
+                </a:solidFill>
+                <a:latin typeface="Segoe UI" panose="020B0502040204020203" pitchFamily="34" charset="0"/>
+                <a:cs typeface="Segoe UI" panose="020B0502040204020203" pitchFamily="34" charset="0"/>
+              </a:rPr>
+              <a:t>128: SuperUser</a:t>
             </a:r>
           </a:p>
           <a:p>
@@ -11618,7 +11648,7 @@
         </p:nvSpPr>
         <p:spPr bwMode="auto">
           <a:xfrm>
-            <a:off x="5007411" y="1296045"/>
+            <a:off x="5112172" y="1296045"/>
             <a:ext cx="1077711" cy="915820"/>
           </a:xfrm>
           <a:prstGeom prst="roundRect">

--- a/ExaminerB/.appCatalog/ExaminerB notes 1404.pptx
+++ b/ExaminerB/.appCatalog/ExaminerB notes 1404.pptx
@@ -9915,7 +9915,7 @@
                 <a:ea typeface="Calibri" panose="020F0502020204030204" pitchFamily="34" charset="0"/>
                 <a:cs typeface="Calibri Light" panose="020F0302020204030204" pitchFamily="34" charset="0"/>
               </a:rPr>
-              <a:t>NoteTypes:</a:t>
+              <a:t>ReferenceTypes:</a:t>
             </a:r>
           </a:p>
           <a:p>

--- a/ExaminerB/.appCatalog/ExaminerB notes 1404.pptx
+++ b/ExaminerB/.appCatalog/ExaminerB notes 1404.pptx
@@ -280,7 +280,7 @@
             </a:pPr>
             <a:fld id="{BCC18F51-09EC-435C-A3BA-64A766E099C0}" type="datetimeFigureOut">
               <a:rPr lang="fa-IR"/>
-              <a:t>07/02/1448</a:t>
+              <a:t>08/02/1448</a:t>
             </a:fld>
             <a:endParaRPr/>
           </a:p>
@@ -459,7 +459,7 @@
             </a:pPr>
             <a:fld id="{BCC18F51-09EC-435C-A3BA-64A766E099C0}" type="datetimeFigureOut">
               <a:rPr lang="fa-IR"/>
-              <a:t>07/02/1448</a:t>
+              <a:t>08/02/1448</a:t>
             </a:fld>
             <a:endParaRPr/>
           </a:p>
@@ -648,7 +648,7 @@
             </a:pPr>
             <a:fld id="{BCC18F51-09EC-435C-A3BA-64A766E099C0}" type="datetimeFigureOut">
               <a:rPr lang="fa-IR"/>
-              <a:t>07/02/1448</a:t>
+              <a:t>08/02/1448</a:t>
             </a:fld>
             <a:endParaRPr/>
           </a:p>
@@ -827,7 +827,7 @@
             </a:pPr>
             <a:fld id="{BCC18F51-09EC-435C-A3BA-64A766E099C0}" type="datetimeFigureOut">
               <a:rPr lang="fa-IR"/>
-              <a:t>07/02/1448</a:t>
+              <a:t>08/02/1448</a:t>
             </a:fld>
             <a:endParaRPr/>
           </a:p>
@@ -1079,7 +1079,7 @@
             </a:pPr>
             <a:fld id="{BCC18F51-09EC-435C-A3BA-64A766E099C0}" type="datetimeFigureOut">
               <a:rPr lang="fa-IR"/>
-              <a:t>07/02/1448</a:t>
+              <a:t>08/02/1448</a:t>
             </a:fld>
             <a:endParaRPr/>
           </a:p>
@@ -1324,7 +1324,7 @@
             </a:pPr>
             <a:fld id="{BCC18F51-09EC-435C-A3BA-64A766E099C0}" type="datetimeFigureOut">
               <a:rPr lang="fa-IR"/>
-              <a:t>07/02/1448</a:t>
+              <a:t>08/02/1448</a:t>
             </a:fld>
             <a:endParaRPr/>
           </a:p>
@@ -1706,7 +1706,7 @@
             </a:pPr>
             <a:fld id="{BCC18F51-09EC-435C-A3BA-64A766E099C0}" type="datetimeFigureOut">
               <a:rPr lang="fa-IR"/>
-              <a:t>07/02/1448</a:t>
+              <a:t>08/02/1448</a:t>
             </a:fld>
             <a:endParaRPr/>
           </a:p>
@@ -1829,7 +1829,7 @@
             </a:pPr>
             <a:fld id="{BCC18F51-09EC-435C-A3BA-64A766E099C0}" type="datetimeFigureOut">
               <a:rPr lang="fa-IR"/>
-              <a:t>07/02/1448</a:t>
+              <a:t>08/02/1448</a:t>
             </a:fld>
             <a:endParaRPr/>
           </a:p>
@@ -1928,7 +1928,7 @@
             </a:pPr>
             <a:fld id="{BCC18F51-09EC-435C-A3BA-64A766E099C0}" type="datetimeFigureOut">
               <a:rPr lang="fa-IR"/>
-              <a:t>07/02/1448</a:t>
+              <a:t>08/02/1448</a:t>
             </a:fld>
             <a:endParaRPr/>
           </a:p>
@@ -2215,7 +2215,7 @@
             </a:pPr>
             <a:fld id="{BCC18F51-09EC-435C-A3BA-64A766E099C0}" type="datetimeFigureOut">
               <a:rPr lang="fa-IR"/>
-              <a:t>07/02/1448</a:t>
+              <a:t>08/02/1448</a:t>
             </a:fld>
             <a:endParaRPr/>
           </a:p>
@@ -2479,7 +2479,7 @@
             </a:pPr>
             <a:fld id="{BCC18F51-09EC-435C-A3BA-64A766E099C0}" type="datetimeFigureOut">
               <a:rPr lang="fa-IR"/>
-              <a:t>07/02/1448</a:t>
+              <a:t>08/02/1448</a:t>
             </a:fld>
             <a:endParaRPr/>
           </a:p>
@@ -2701,7 +2701,7 @@
             </a:pPr>
             <a:fld id="{BCC18F51-09EC-435C-A3BA-64A766E099C0}" type="datetimeFigureOut">
               <a:rPr lang="fa-IR"/>
-              <a:t>07/02/1448</a:t>
+              <a:t>08/02/1448</a:t>
             </a:fld>
             <a:endParaRPr/>
           </a:p>
